--- a/laboratory/docs/slides/ACRS_PhD_Proposal_JenishaT_24ETRP720001.pptx
+++ b/laboratory/docs/slides/ACRS_PhD_Proposal_JenishaT_24ETRP720001.pptx
@@ -31,6 +31,9 @@
     <p:sldId id="279" r:id="rId30"/>
     <p:sldId id="280" r:id="rId31"/>
     <p:sldId id="281" r:id="rId32"/>
+    <p:sldId id="282" r:id="rId33"/>
+    <p:sldId id="283" r:id="rId34"/>
+    <p:sldId id="284" r:id="rId35"/>
   </p:sldIdLst>
   <p:sldSz cx="12191695" cy="6858000" type="screen4x3"/>
   <p:notesSz cx="6858000" cy="9144000"/>
@@ -3877,7 +3880,7 @@
           <a:lstStyle/>
           <a:p>
             <a:pPr algn="l"/>
-            <a:fld id="{b98f9638-04df-4c72-9c92-606d10a7ef95}" type="datetime3">
+            <a:fld id="{83e579be-63f4-4788-a6c2-180dd5d096fe}" type="datetime3">
               <a:rPr lang="en-GB" sz="1000" dirty="0">
                 <a:solidFill>
                   <a:srgbClr val="C4A35A"/>
@@ -3911,7 +3914,7 @@
           <a:lstStyle/>
           <a:p>
             <a:pPr algn="r"/>
-            <a:fld id="{a85ef5c4-7dfc-429b-bbf1-dbb2695ad106}" type="slidenum">
+            <a:fld id="{ed52e502-5a0f-4e2b-9b59-06022553a770}" type="slidenum">
               <a:rPr lang="en-GB" sz="1000" dirty="0">
                 <a:solidFill>
                   <a:srgbClr val="C4A35A"/>
@@ -3927,7 +3930,7 @@
                 </a:solidFill>
                 <a:latin typeface="Calibri"/>
               </a:rPr>
-              <a:t> / 26</a:t>
+              <a:t> / 29</a:t>
             </a:r>
             <a:endParaRPr lang="en-GB" sz="1000"/>
           </a:p>
@@ -4722,7 +4725,7 @@
           <a:lstStyle/>
           <a:p>
             <a:pPr algn="l"/>
-            <a:fld id="{6c7b8693-73b9-41f7-9ad5-234c74dd9c45}" type="datetime3">
+            <a:fld id="{f90767aa-7782-491b-8bdb-8b478202b1cd}" type="datetime3">
               <a:rPr lang="en-GB" sz="1000" dirty="0">
                 <a:solidFill>
                   <a:srgbClr val="C4A35A"/>
@@ -4756,7 +4759,7 @@
           <a:lstStyle/>
           <a:p>
             <a:pPr algn="r"/>
-            <a:fld id="{c50ced96-0f47-4875-a185-a887ef4b13ed}" type="slidenum">
+            <a:fld id="{910170b1-6529-4f59-b33b-ffd83907e1cb}" type="slidenum">
               <a:rPr lang="en-GB" sz="1000" dirty="0">
                 <a:solidFill>
                   <a:srgbClr val="C4A35A"/>
@@ -4772,7 +4775,7 @@
                 </a:solidFill>
                 <a:latin typeface="Calibri"/>
               </a:rPr>
-              <a:t> / 26</a:t>
+              <a:t> / 29</a:t>
             </a:r>
             <a:endParaRPr lang="en-GB" sz="1000"/>
           </a:p>
@@ -5779,7 +5782,7 @@
           <a:lstStyle/>
           <a:p>
             <a:pPr algn="l"/>
-            <a:fld id="{47d4c20c-946e-41da-ab15-f1789a7c1123}" type="datetime3">
+            <a:fld id="{d884dfe5-9119-4e49-8dc6-e43f96439049}" type="datetime3">
               <a:rPr lang="en-GB" sz="1000" dirty="0">
                 <a:solidFill>
                   <a:srgbClr val="C4A35A"/>
@@ -5813,7 +5816,7 @@
           <a:lstStyle/>
           <a:p>
             <a:pPr algn="r"/>
-            <a:fld id="{9a8edc2e-45ac-4561-b3ee-f91a3ec3ce8b}" type="slidenum">
+            <a:fld id="{650cf51f-9584-4990-8991-1c3080f07a89}" type="slidenum">
               <a:rPr lang="en-GB" sz="1000" dirty="0">
                 <a:solidFill>
                   <a:srgbClr val="C4A35A"/>
@@ -5829,7 +5832,7 @@
                 </a:solidFill>
                 <a:latin typeface="Calibri"/>
               </a:rPr>
-              <a:t> / 26</a:t>
+              <a:t> / 29</a:t>
             </a:r>
             <a:endParaRPr lang="en-GB" sz="1000"/>
           </a:p>
@@ -6728,7 +6731,7 @@
           <a:lstStyle/>
           <a:p>
             <a:pPr algn="l"/>
-            <a:fld id="{f26a099f-d2d6-4df0-b459-b87f86e58f87}" type="datetime3">
+            <a:fld id="{15782857-843a-4951-90b8-d59b027ae312}" type="datetime3">
               <a:rPr lang="en-GB" sz="1000" dirty="0">
                 <a:solidFill>
                   <a:srgbClr val="C4A35A"/>
@@ -6762,7 +6765,7 @@
           <a:lstStyle/>
           <a:p>
             <a:pPr algn="r"/>
-            <a:fld id="{5861caa7-531b-4a35-8397-7d7e0641079f}" type="slidenum">
+            <a:fld id="{e5fee357-7c02-4d79-81b7-b356f9faef1c}" type="slidenum">
               <a:rPr lang="en-GB" sz="1000" dirty="0">
                 <a:solidFill>
                   <a:srgbClr val="C4A35A"/>
@@ -6778,7 +6781,7 @@
                 </a:solidFill>
                 <a:latin typeface="Calibri"/>
               </a:rPr>
-              <a:t> / 26</a:t>
+              <a:t> / 29</a:t>
             </a:r>
             <a:endParaRPr lang="en-GB" sz="1000"/>
           </a:p>
@@ -7623,7 +7626,7 @@
           <a:lstStyle/>
           <a:p>
             <a:pPr algn="l"/>
-            <a:fld id="{c45c5187-474d-4c51-ab7b-081890602298}" type="datetime3">
+            <a:fld id="{b1a7769a-410d-4a4b-9deb-ecb129e0d8ea}" type="datetime3">
               <a:rPr lang="en-GB" sz="1000" dirty="0">
                 <a:solidFill>
                   <a:srgbClr val="C4A35A"/>
@@ -7657,7 +7660,7 @@
           <a:lstStyle/>
           <a:p>
             <a:pPr algn="r"/>
-            <a:fld id="{684cac2c-bc18-4a8b-803b-6c0fab206b16}" type="slidenum">
+            <a:fld id="{297e6af9-f449-4c77-b139-178b9ed3a1bf}" type="slidenum">
               <a:rPr lang="en-GB" sz="1000" dirty="0">
                 <a:solidFill>
                   <a:srgbClr val="C4A35A"/>
@@ -7673,7 +7676,7 @@
                 </a:solidFill>
                 <a:latin typeface="Calibri"/>
               </a:rPr>
-              <a:t> / 26</a:t>
+              <a:t> / 29</a:t>
             </a:r>
             <a:endParaRPr lang="en-GB" sz="1000"/>
           </a:p>
@@ -8572,7 +8575,7 @@
           <a:lstStyle/>
           <a:p>
             <a:pPr algn="l"/>
-            <a:fld id="{915faa91-7932-4d71-8c50-263f18a71d86}" type="datetime3">
+            <a:fld id="{1f2103da-f21b-42fa-827a-3ebd3efa9e9f}" type="datetime3">
               <a:rPr lang="en-GB" sz="1000" dirty="0">
                 <a:solidFill>
                   <a:srgbClr val="C4A35A"/>
@@ -8606,7 +8609,7 @@
           <a:lstStyle/>
           <a:p>
             <a:pPr algn="r"/>
-            <a:fld id="{831f242d-129f-47ab-819a-2ff0030a1982}" type="slidenum">
+            <a:fld id="{c2bdb072-023c-429f-b7e4-33acfbfc82f7}" type="slidenum">
               <a:rPr lang="en-GB" sz="1000" dirty="0">
                 <a:solidFill>
                   <a:srgbClr val="C4A35A"/>
@@ -8622,7 +8625,7 @@
                 </a:solidFill>
                 <a:latin typeface="Calibri"/>
               </a:rPr>
-              <a:t> / 26</a:t>
+              <a:t> / 29</a:t>
             </a:r>
             <a:endParaRPr lang="en-GB" sz="1000"/>
           </a:p>
@@ -9145,7 +9148,7 @@
           <a:lstStyle/>
           <a:p>
             <a:pPr algn="l"/>
-            <a:fld id="{5ff438f2-5e87-4d2e-b759-dce808b5a121}" type="datetime3">
+            <a:fld id="{8291e4b9-ddf5-472d-845b-23f69fa140b0}" type="datetime3">
               <a:rPr lang="en-GB" sz="1000" dirty="0">
                 <a:solidFill>
                   <a:srgbClr val="C4A35A"/>
@@ -9179,7 +9182,7 @@
           <a:lstStyle/>
           <a:p>
             <a:pPr algn="r"/>
-            <a:fld id="{ba7e406a-6cea-4061-b670-59c1f6fd3f94}" type="slidenum">
+            <a:fld id="{d1c11a1d-86c3-4325-bfca-6eb1736a58e6}" type="slidenum">
               <a:rPr lang="en-GB" sz="1000" dirty="0">
                 <a:solidFill>
                   <a:srgbClr val="C4A35A"/>
@@ -9195,7 +9198,7 @@
                 </a:solidFill>
                 <a:latin typeface="Calibri"/>
               </a:rPr>
-              <a:t> / 26</a:t>
+              <a:t> / 29</a:t>
             </a:r>
             <a:endParaRPr lang="en-GB" sz="1000"/>
           </a:p>
@@ -9728,6 +9731,24 @@
                 </a:solidFill>
                 <a:latin typeface="Calibri"/>
               </a:rPr>
+              <a:t>Implementation. The four modules are the functions in satr.ts, aprr.ts, mncd.ts, fcnp.ts — formulas on the next slides, full traces on /walkthrough.</a:t>
+            </a:r>
+          </a:p>
+          <a:p>
+            <a:pPr>
+              <a:spcAft>
+                <a:spcPts val="600"/>
+              </a:spcAft>
+              <a:buFont typeface="Arial"/>
+              <a:buChar char="•"/>
+            </a:pPr>
+            <a:r>
+              <a:rPr sz="1300">
+                <a:solidFill>
+                  <a:srgbClr val="1A1214"/>
+                </a:solidFill>
+                <a:latin typeface="Calibri"/>
+              </a:rPr>
               <a:t>What will not appear in this proposal. Promised retrieval scores, latency targets, consensus percentages, or token-reduction ratios.</a:t>
             </a:r>
           </a:p>
@@ -10113,7 +10134,7 @@
           <a:lstStyle/>
           <a:p>
             <a:pPr algn="l"/>
-            <a:fld id="{74304ce5-3c27-4c7f-b72e-fadf4c76f9fa}" type="datetime3">
+            <a:fld id="{0f034aa5-9251-46b6-8b37-bbf5bed02ddb}" type="datetime3">
               <a:rPr lang="en-GB" sz="1000" dirty="0">
                 <a:solidFill>
                   <a:srgbClr val="C4A35A"/>
@@ -10147,7 +10168,7 @@
           <a:lstStyle/>
           <a:p>
             <a:pPr algn="r"/>
-            <a:fld id="{2c6e9561-14e6-4a26-b041-c283711a2acd}" type="slidenum">
+            <a:fld id="{e31d84c6-9c34-4ae3-b059-414c1b348969}" type="slidenum">
               <a:rPr lang="en-GB" sz="1000" dirty="0">
                 <a:solidFill>
                   <a:srgbClr val="C4A35A"/>
@@ -10163,7 +10184,7 @@
                 </a:solidFill>
                 <a:latin typeface="Calibri"/>
               </a:rPr>
-              <a:t> / 26</a:t>
+              <a:t> / 29</a:t>
             </a:r>
             <a:endParaRPr lang="en-GB" sz="1000"/>
           </a:p>
@@ -10722,7 +10743,7 @@
           <a:lstStyle/>
           <a:p>
             <a:pPr algn="l"/>
-            <a:fld id="{49381238-ea32-4edf-86ba-fcfa69984ff3}" type="datetime3">
+            <a:fld id="{6d122bc5-fac9-41f0-9724-ae9723b8bb30}" type="datetime3">
               <a:rPr lang="en-GB" sz="1000" dirty="0">
                 <a:solidFill>
                   <a:srgbClr val="C4A35A"/>
@@ -10756,7 +10777,7 @@
           <a:lstStyle/>
           <a:p>
             <a:pPr algn="r"/>
-            <a:fld id="{9d757bba-e520-4b7f-998d-215bd437c54e}" type="slidenum">
+            <a:fld id="{6b437917-906d-455a-b1e3-a6a6f0c24ee8}" type="slidenum">
               <a:rPr lang="en-GB" sz="1000" dirty="0">
                 <a:solidFill>
                   <a:srgbClr val="C4A35A"/>
@@ -10772,7 +10793,7 @@
                 </a:solidFill>
                 <a:latin typeface="Calibri"/>
               </a:rPr>
-              <a:t> / 26</a:t>
+              <a:t> / 29</a:t>
             </a:r>
             <a:endParaRPr lang="en-GB" sz="1000"/>
           </a:p>
@@ -11331,7 +11352,7 @@
           <a:lstStyle/>
           <a:p>
             <a:pPr algn="l"/>
-            <a:fld id="{9dec8c96-b996-4ecf-82e9-35843929c280}" type="datetime3">
+            <a:fld id="{6d2a41ad-8a07-4bb7-b393-8dae1b791f82}" type="datetime3">
               <a:rPr lang="en-GB" sz="1000" dirty="0">
                 <a:solidFill>
                   <a:srgbClr val="C4A35A"/>
@@ -11365,7 +11386,7 @@
           <a:lstStyle/>
           <a:p>
             <a:pPr algn="r"/>
-            <a:fld id="{543e504a-503c-4bbd-959a-4cec825e8d01}" type="slidenum">
+            <a:fld id="{3e929ac0-3c05-466c-ba11-6e24f0e123e5}" type="slidenum">
               <a:rPr lang="en-GB" sz="1000" dirty="0">
                 <a:solidFill>
                   <a:srgbClr val="C4A35A"/>
@@ -11381,7 +11402,7 @@
                 </a:solidFill>
                 <a:latin typeface="Calibri"/>
               </a:rPr>
-              <a:t> / 26</a:t>
+              <a:t> / 29</a:t>
             </a:r>
             <a:endParaRPr lang="en-GB" sz="1000"/>
           </a:p>
@@ -11940,7 +11961,7 @@
           <a:lstStyle/>
           <a:p>
             <a:pPr algn="l"/>
-            <a:fld id="{704cdfe1-bb1e-4d6b-b3d9-2461149855d1}" type="datetime3">
+            <a:fld id="{032c2daf-b888-42d3-8eb1-b0ec911c82dc}" type="datetime3">
               <a:rPr lang="en-GB" sz="1000" dirty="0">
                 <a:solidFill>
                   <a:srgbClr val="C4A35A"/>
@@ -11974,7 +11995,7 @@
           <a:lstStyle/>
           <a:p>
             <a:pPr algn="r"/>
-            <a:fld id="{30b8179a-6ca0-4b06-97c3-1c6b64e74919}" type="slidenum">
+            <a:fld id="{ba648479-646a-48ff-90db-39ed4006d22f}" type="slidenum">
               <a:rPr lang="en-GB" sz="1000" dirty="0">
                 <a:solidFill>
                   <a:srgbClr val="C4A35A"/>
@@ -11990,7 +12011,7 @@
                 </a:solidFill>
                 <a:latin typeface="Calibri"/>
               </a:rPr>
-              <a:t> / 26</a:t>
+              <a:t> / 29</a:t>
             </a:r>
             <a:endParaRPr lang="en-GB" sz="1000"/>
           </a:p>
@@ -12950,7 +12971,7 @@
           <a:lstStyle/>
           <a:p>
             <a:pPr algn="l"/>
-            <a:fld id="{147e2e15-6e62-4f2e-ac85-91666b268752}" type="datetime3">
+            <a:fld id="{b4579f13-7b13-4779-8530-c0ac35db377a}" type="datetime3">
               <a:rPr lang="en-GB" sz="1000" dirty="0">
                 <a:solidFill>
                   <a:srgbClr val="C4A35A"/>
@@ -12984,7 +13005,7 @@
           <a:lstStyle/>
           <a:p>
             <a:pPr algn="r"/>
-            <a:fld id="{bd60bcf4-ba63-48c9-ab7e-ebff9ff828d9}" type="slidenum">
+            <a:fld id="{d682814e-f95a-4a7f-8a83-8ecf758a7113}" type="slidenum">
               <a:rPr lang="en-GB" sz="1000" dirty="0">
                 <a:solidFill>
                   <a:srgbClr val="C4A35A"/>
@@ -13000,7 +13021,7 @@
                 </a:solidFill>
                 <a:latin typeface="Calibri"/>
               </a:rPr>
-              <a:t> / 26</a:t>
+              <a:t> / 29</a:t>
             </a:r>
             <a:endParaRPr lang="en-GB" sz="1000"/>
           </a:p>
@@ -13559,7 +13580,7 @@
           <a:lstStyle/>
           <a:p>
             <a:pPr algn="l"/>
-            <a:fld id="{f75fd1a7-97d2-4884-8cfc-54c63cb88625}" type="datetime3">
+            <a:fld id="{2c5e8bc4-e04b-4a2a-bff8-bd04950680f7}" type="datetime3">
               <a:rPr lang="en-GB" sz="1000" dirty="0">
                 <a:solidFill>
                   <a:srgbClr val="C4A35A"/>
@@ -13593,7 +13614,7 @@
           <a:lstStyle/>
           <a:p>
             <a:pPr algn="r"/>
-            <a:fld id="{316b1242-7c19-463b-929c-86b4db6df9f5}" type="slidenum">
+            <a:fld id="{dd327c99-9dc1-4ba4-9a1a-dd634cde3cd7}" type="slidenum">
               <a:rPr lang="en-GB" sz="1000" dirty="0">
                 <a:solidFill>
                   <a:srgbClr val="C4A35A"/>
@@ -13609,7 +13630,7 @@
                 </a:solidFill>
                 <a:latin typeface="Calibri"/>
               </a:rPr>
-              <a:t> / 26</a:t>
+              <a:t> / 29</a:t>
             </a:r>
             <a:endParaRPr lang="en-GB" sz="1000"/>
           </a:p>
@@ -14562,7 +14583,7 @@
           <a:lstStyle/>
           <a:p>
             <a:pPr algn="l"/>
-            <a:fld id="{728284ff-b9ef-4170-98bd-dff881033f42}" type="datetime3">
+            <a:fld id="{ff9e8050-41f1-4cd5-ad4a-571a72a3d51e}" type="datetime3">
               <a:rPr lang="en-GB" sz="1000" dirty="0">
                 <a:solidFill>
                   <a:srgbClr val="C4A35A"/>
@@ -14596,7 +14617,7 @@
           <a:lstStyle/>
           <a:p>
             <a:pPr algn="r"/>
-            <a:fld id="{b3ecf6fa-66dd-42fb-9fda-b57058a43207}" type="slidenum">
+            <a:fld id="{984b57e9-b723-4113-a13c-1a03bfa36444}" type="slidenum">
               <a:rPr lang="en-GB" sz="1000" dirty="0">
                 <a:solidFill>
                   <a:srgbClr val="C4A35A"/>
@@ -14612,7 +14633,7 @@
                 </a:solidFill>
                 <a:latin typeface="Calibri"/>
               </a:rPr>
-              <a:t> / 26</a:t>
+              <a:t> / 29</a:t>
             </a:r>
             <a:endParaRPr lang="en-GB" sz="1000"/>
           </a:p>
@@ -14944,7 +14965,7 @@
                 </a:solidFill>
                 <a:latin typeface="Calibri"/>
               </a:rPr>
-              <a:t>RESEARCH PROPOSAL  ·  Conclusion</a:t>
+              <a:t>RESEARCH PROPOSAL  ·  Research Methodology</a:t>
             </a:r>
           </a:p>
         </p:txBody>
@@ -14979,7 +15000,7 @@
                 </a:solidFill>
                 <a:latin typeface="Calibri"/>
               </a:rPr>
-              <a:t>Conclusion</a:t>
+              <a:t>Research Methodology — implementation formulas</a:t>
             </a:r>
           </a:p>
         </p:txBody>
@@ -15014,124 +15035,378 @@
                 </a:solidFill>
                 <a:latin typeface="Calibri"/>
               </a:rPr>
-              <a:t>ACRS is proposed as a structural orchestration layer. The contribution is the closed loop and the four named gaps — not a pre-committed leaderboard.</a:t>
-            </a:r>
-          </a:p>
-        </p:txBody>
-      </p:sp>
-      <p:sp>
-        <p:nvSpPr>
-          <p:cNvPr id="12" name="TextBox 11"/>
-          <p:cNvSpPr txBox="1"/>
-          <p:nvPr/>
-        </p:nvSpPr>
-        <p:spPr>
-          <a:xfrm>
-            <a:off x="365760" y="2212848"/>
-            <a:ext cx="11430000" cy="3977639"/>
-          </a:xfrm>
-          <a:prstGeom prst="rect">
-            <a:avLst/>
-          </a:prstGeom>
-          <a:noFill/>
-        </p:spPr>
-        <p:txBody>
-          <a:bodyPr wrap="square">
-            <a:spAutoFit/>
-          </a:bodyPr>
-          <a:lstStyle/>
-          <a:p>
-            <a:pPr>
-              <a:spcAft>
-                <a:spcPts val="600"/>
-              </a:spcAft>
-              <a:buFont typeface="Arial"/>
-              <a:buChar char="•"/>
-            </a:pPr>
-            <a:r>
-              <a:rPr sz="1300">
-                <a:solidFill>
-                  <a:srgbClr val="1A1214"/>
-                </a:solidFill>
-                <a:latin typeface="Calibri"/>
-              </a:rPr>
-              <a:t>The literature (AutoGen, MetaGPT, ChatDev, CAMEL, ToolLLM, MasRouter, RouteLLM, PILOT, LLMLingua, PECAD) establishes conversation, tools, learned routing, and prompt compression. It does not establish SATR → APRR → MNCD → FCNP as one contract over live Indian OGD.</a:t>
-            </a:r>
-          </a:p>
-          <a:p>
-            <a:pPr>
-              <a:spcAft>
-                <a:spcPts val="600"/>
-              </a:spcAft>
-              <a:buFont typeface="Arial"/>
-              <a:buChar char="•"/>
-            </a:pPr>
-            <a:r>
-              <a:rPr sz="1300">
-                <a:solidFill>
-                  <a:srgbClr val="1A1214"/>
-                </a:solidFill>
-                <a:latin typeface="Calibri"/>
-              </a:rPr>
-              <a:t>The identified problem is five gaps: G1 session–tool fusion, G2 training-free specialist posterior, G3 live fail-loud Indian OGD, G4 conductance prune with write-back, G5 missing integration layer.</a:t>
-            </a:r>
-          </a:p>
-          <a:p>
-            <a:pPr>
-              <a:spcAft>
-                <a:spcPts val="600"/>
-              </a:spcAft>
-              <a:buFont typeface="Arial"/>
-              <a:buChar char="•"/>
-            </a:pPr>
-            <a:r>
-              <a:rPr sz="1300">
-                <a:solidFill>
-                  <a:srgbClr val="1A1214"/>
-                </a:solidFill>
-                <a:latin typeface="Calibri"/>
-              </a:rPr>
-              <a:t>The aim is to design that layer. Four objectives (SATR, APRR, MNCD, FCNP) and four research questions map onto it.</a:t>
-            </a:r>
-          </a:p>
-          <a:p>
-            <a:pPr>
-              <a:spcAft>
-                <a:spcPts val="600"/>
-              </a:spcAft>
-              <a:buFont typeface="Arial"/>
-              <a:buChar char="•"/>
-            </a:pPr>
-            <a:r>
-              <a:rPr sz="1300">
-                <a:solidFill>
-                  <a:srgbClr val="1A1214"/>
-                </a:solidFill>
-                <a:latin typeface="Calibri"/>
-              </a:rPr>
-              <a:t>Methodology is specified per objective: ToolBench as ranking library; Dirichlet–Thompson routing; verified data.gov.in UUIDs with score-sum; Physarum-inspired prune with SATR write-back. Metric numbers are deferred.</a:t>
-            </a:r>
-          </a:p>
-          <a:p>
-            <a:pPr>
-              <a:spcAft>
-                <a:spcPts val="600"/>
-              </a:spcAft>
-              <a:buFont typeface="Arial"/>
-              <a:buChar char="•"/>
-            </a:pPr>
-            <a:r>
-              <a:rPr sz="1300">
-                <a:solidFill>
-                  <a:srgbClr val="1A1214"/>
-                </a:solidFill>
-                <a:latin typeface="Calibri"/>
-              </a:rPr>
-              <a:t>Next step after approval. Freeze evaluation protocols, implement the closed loop, and report whatever the measurements show — including negative results.</a:t>
-            </a:r>
-          </a:p>
-        </p:txBody>
-      </p:sp>
+              <a:t>How the proposal will be implemented: the equations copied from the laboratory, not a promised leaderboard. Constants are the repository defaults.</a:t>
+            </a:r>
+          </a:p>
+        </p:txBody>
+      </p:sp>
+      <p:graphicFrame>
+        <p:nvGraphicFramePr>
+          <p:cNvPr id="12" name="Table 11"/>
+          <p:cNvGraphicFramePr>
+            <a:graphicFrameLocks noGrp="1"/>
+          </p:cNvGraphicFramePr>
+          <p:nvPr/>
+        </p:nvGraphicFramePr>
+        <p:xfrm>
+          <a:off x="320040" y="2212848"/>
+          <a:ext cx="11521439" cy="4023360"/>
+        </p:xfrm>
+        <a:graphic>
+          <a:graphicData uri="http://schemas.openxmlformats.org/drawingml/2006/table">
+            <a:tbl>
+              <a:tblPr firstRow="1" bandRow="1">
+                <a:tableStyleId>{5C22544A-7EE6-4342-B048-85BDC9FD1C3A}</a:tableStyleId>
+              </a:tblPr>
+              <a:tblGrid>
+                <a:gridCol w="1843430"/>
+                <a:gridCol w="3917289"/>
+                <a:gridCol w="5760720"/>
+              </a:tblGrid>
+              <a:tr h="804672">
+                <a:tc>
+                  <a:txBody>
+                    <a:bodyPr/>
+                    <a:lstStyle/>
+                    <a:p>
+                      <a:r>
+                        <a:rPr b="1" sz="1100">
+                          <a:solidFill>
+                            <a:srgbClr val="FFFFFF"/>
+                          </a:solidFill>
+                          <a:latin typeface="Calibri"/>
+                        </a:rPr>
+                        <a:t>Module</a:t>
+                      </a:r>
+                    </a:p>
+                  </a:txBody>
+                  <a:tcPr>
+                    <a:solidFill>
+                      <a:srgbClr val="7C1D2E"/>
+                    </a:solidFill>
+                  </a:tcPr>
+                </a:tc>
+                <a:tc>
+                  <a:txBody>
+                    <a:bodyPr/>
+                    <a:lstStyle/>
+                    <a:p>
+                      <a:r>
+                        <a:rPr b="1" sz="1100">
+                          <a:solidFill>
+                            <a:srgbClr val="FFFFFF"/>
+                          </a:solidFill>
+                          <a:latin typeface="Calibri"/>
+                        </a:rPr>
+                        <a:t>Formula as coded</a:t>
+                      </a:r>
+                    </a:p>
+                  </a:txBody>
+                  <a:tcPr>
+                    <a:solidFill>
+                      <a:srgbClr val="7C1D2E"/>
+                    </a:solidFill>
+                  </a:tcPr>
+                </a:tc>
+                <a:tc>
+                  <a:txBody>
+                    <a:bodyPr/>
+                    <a:lstStyle/>
+                    <a:p>
+                      <a:r>
+                        <a:rPr b="1" sz="1100">
+                          <a:solidFill>
+                            <a:srgbClr val="FFFFFF"/>
+                          </a:solidFill>
+                          <a:latin typeface="Calibri"/>
+                        </a:rPr>
+                        <a:t>Constants</a:t>
+                      </a:r>
+                    </a:p>
+                  </a:txBody>
+                  <a:tcPr>
+                    <a:solidFill>
+                      <a:srgbClr val="7C1D2E"/>
+                    </a:solidFill>
+                  </a:tcPr>
+                </a:tc>
+              </a:tr>
+              <a:tr h="804672">
+                <a:tc>
+                  <a:txBody>
+                    <a:bodyPr/>
+                    <a:lstStyle/>
+                    <a:p>
+                      <a:r>
+                        <a:rPr sz="1000" b="1">
+                          <a:solidFill>
+                            <a:srgbClr val="7C1D2E"/>
+                          </a:solidFill>
+                          <a:latin typeface="Calibri"/>
+                        </a:rPr>
+                        <a:t>O1 SATR</a:t>
+                      </a:r>
+                    </a:p>
+                  </a:txBody>
+                  <a:tcPr>
+                    <a:solidFill>
+                      <a:srgbClr val="FFFAF3"/>
+                    </a:solidFill>
+                  </a:tcPr>
+                </a:tc>
+                <a:tc>
+                  <a:txBody>
+                    <a:bodyPr/>
+                    <a:lstStyle/>
+                    <a:p>
+                      <a:r>
+                        <a:rPr sz="1000">
+                          <a:solidFill>
+                            <a:srgbClr val="1A1214"/>
+                          </a:solidFill>
+                          <a:latin typeface="Calibri"/>
+                        </a:rPr>
+                        <a:t>s(a|q,H)=w_base s_base + w_cat cat + w_sch sch + w_ept ept + w_cooc Σ γ^{n-i} log(1+w_{h_i,a}) + w_rec rec − 0.35 fails;  s_base=0.7 BM25+0.3 TFIDF-cos+0.08 mem-cos</a:t>
+                      </a:r>
+                    </a:p>
+                  </a:txBody>
+                  <a:tcPr>
+                    <a:solidFill>
+                      <a:srgbClr val="FFFAF3"/>
+                    </a:solidFill>
+                  </a:tcPr>
+                </a:tc>
+                <a:tc>
+                  <a:txBody>
+                    <a:bodyPr/>
+                    <a:lstStyle/>
+                    <a:p>
+                      <a:r>
+                        <a:rPr sz="1000">
+                          <a:solidFill>
+                            <a:srgbClr val="1A1214"/>
+                          </a:solidFill>
+                          <a:latin typeface="Calibri"/>
+                        </a:rPr>
+                        <a:t>w=(1, 0.45, 0.25, 0.3, 0.35, 0.25); γ=0.7; ρ=0.02; δ=1; decay=0.85; BM25 k1=1.5 b=0.75</a:t>
+                      </a:r>
+                    </a:p>
+                  </a:txBody>
+                  <a:tcPr>
+                    <a:solidFill>
+                      <a:srgbClr val="FFFAF3"/>
+                    </a:solidFill>
+                  </a:tcPr>
+                </a:tc>
+              </a:tr>
+              <a:tr h="804672">
+                <a:tc>
+                  <a:txBody>
+                    <a:bodyPr/>
+                    <a:lstStyle/>
+                    <a:p>
+                      <a:r>
+                        <a:rPr sz="1000" b="1">
+                          <a:solidFill>
+                            <a:srgbClr val="7C1D2E"/>
+                          </a:solidFill>
+                          <a:latin typeface="Calibri"/>
+                        </a:rPr>
+                        <a:t>O2 APRR</a:t>
+                      </a:r>
+                    </a:p>
+                  </a:txBody>
+                  <a:tcPr>
+                    <a:solidFill>
+                      <a:srgbClr val="FFFAF3"/>
+                    </a:solidFill>
+                  </a:tcPr>
+                </a:tc>
+                <a:tc>
+                  <a:txBody>
+                    <a:bodyPr/>
+                    <a:lstStyle/>
+                    <a:p>
+                      <a:r>
+                        <a:rPr sz="1000">
+                          <a:solidFill>
+                            <a:srgbClr val="1A1214"/>
+                          </a:solidFill>
+                          <a:latin typeface="Calibri"/>
+                        </a:rPr>
+                        <a:t>P(a_j|a_i,q) ∝ W_ij^α η_ij^β ψ_j(q)^γ ;  W←(1-λ)W + κ·reward·1/L²·1/lat</a:t>
+                      </a:r>
+                    </a:p>
+                  </a:txBody>
+                  <a:tcPr>
+                    <a:solidFill>
+                      <a:srgbClr val="FFFAF3"/>
+                    </a:solidFill>
+                  </a:tcPr>
+                </a:tc>
+                <a:tc>
+                  <a:txBody>
+                    <a:bodyPr/>
+                    <a:lstStyle/>
+                    <a:p>
+                      <a:r>
+                        <a:rPr sz="1000">
+                          <a:solidFill>
+                            <a:srgbClr val="1A1214"/>
+                          </a:solidFill>
+                          <a:latin typeface="Calibri"/>
+                        </a:rPr>
+                        <a:t>α=2, β=1, γ=2.5, λ=0.005, κ=5, W0=0.1, ε=0 (lab), maxHops=4; reward +1 / −0.05</a:t>
+                      </a:r>
+                    </a:p>
+                  </a:txBody>
+                  <a:tcPr>
+                    <a:solidFill>
+                      <a:srgbClr val="FFFAF3"/>
+                    </a:solidFill>
+                  </a:tcPr>
+                </a:tc>
+              </a:tr>
+              <a:tr h="804672">
+                <a:tc>
+                  <a:txBody>
+                    <a:bodyPr/>
+                    <a:lstStyle/>
+                    <a:p>
+                      <a:r>
+                        <a:rPr sz="1000" b="1">
+                          <a:solidFill>
+                            <a:srgbClr val="7C1D2E"/>
+                          </a:solidFill>
+                          <a:latin typeface="Calibri"/>
+                        </a:rPr>
+                        <a:t>O3 MNCD</a:t>
+                      </a:r>
+                    </a:p>
+                  </a:txBody>
+                  <a:tcPr>
+                    <a:solidFill>
+                      <a:srgbClr val="FFFAF3"/>
+                    </a:solidFill>
+                  </a:tcPr>
+                </a:tc>
+                <a:tc>
+                  <a:txBody>
+                    <a:bodyPr/>
+                    <a:lstStyle/>
+                    <a:p>
+                      <a:r>
+                        <a:rPr sz="1000">
+                          <a:solidFill>
+                            <a:srgbClr val="1A1214"/>
+                          </a:solidFill>
+                          <a:latin typeface="Calibri"/>
+                        </a:rPr>
+                        <a:t>s=0.45 score/(|score|+2)+0.35 overlap+liveBoost−0.05 idx;  tally=Σ w_a s_a;  w=success/(1+lat/1000)</a:t>
+                      </a:r>
+                    </a:p>
+                  </a:txBody>
+                  <a:tcPr>
+                    <a:solidFill>
+                      <a:srgbClr val="FFFAF3"/>
+                    </a:solidFill>
+                  </a:tcPr>
+                </a:tc>
+                <a:tc>
+                  <a:txBody>
+                    <a:bodyPr/>
+                    <a:lstStyle/>
+                    <a:p>
+                      <a:r>
+                        <a:rPr sz="1000">
+                          <a:solidFill>
+                            <a:srgbClr val="1A1214"/>
+                          </a:solidFill>
+                          <a:latin typeface="Calibri"/>
+                        </a:rPr>
+                        <a:t>liveBoost 0.25+0.20 preferred; fanout=3; R=2; τ=0.55; score-sum not Borda; live UUID only</a:t>
+                      </a:r>
+                    </a:p>
+                  </a:txBody>
+                  <a:tcPr>
+                    <a:solidFill>
+                      <a:srgbClr val="FFFAF3"/>
+                    </a:solidFill>
+                  </a:tcPr>
+                </a:tc>
+              </a:tr>
+              <a:tr h="804672">
+                <a:tc>
+                  <a:txBody>
+                    <a:bodyPr/>
+                    <a:lstStyle/>
+                    <a:p>
+                      <a:r>
+                        <a:rPr sz="1000" b="1">
+                          <a:solidFill>
+                            <a:srgbClr val="7C1D2E"/>
+                          </a:solidFill>
+                          <a:latin typeface="Calibri"/>
+                        </a:rPr>
+                        <a:t>O4 FCNP</a:t>
+                      </a:r>
+                    </a:p>
+                  </a:txBody>
+                  <a:tcPr>
+                    <a:solidFill>
+                      <a:srgbClr val="FFFAF3"/>
+                    </a:solidFill>
+                  </a:tcPr>
+                </a:tc>
+                <a:tc>
+                  <a:txBody>
+                    <a:bodyPr/>
+                    <a:lstStyle/>
+                    <a:p>
+                      <a:r>
+                        <a:rPr sz="1000">
+                          <a:solidFill>
+                            <a:srgbClr val="1A1214"/>
+                          </a:solidFill>
+                          <a:latin typeface="Calibri"/>
+                        </a:rPr>
+                        <a:t>D_ij(t+1)=(1-μ)D_ij+α|Q_ij|^γ ;  L p = I ;  Q=|D(p_i-p_j)|;  keep 35% / summarize 20% / drop</a:t>
+                      </a:r>
+                    </a:p>
+                  </a:txBody>
+                  <a:tcPr>
+                    <a:solidFill>
+                      <a:srgbClr val="FFFAF3"/>
+                    </a:solidFill>
+                  </a:tcPr>
+                </a:tc>
+                <a:tc>
+                  <a:txBody>
+                    <a:bodyPr/>
+                    <a:lstStyle/>
+                    <a:p>
+                      <a:r>
+                        <a:rPr sz="1000">
+                          <a:solidFill>
+                            <a:srgbClr val="1A1214"/>
+                          </a:solidFill>
+                          <a:latin typeface="Calibri"/>
+                        </a:rPr>
+                        <a:t>μ=0.1, α=0.5, γ=1.2, sim≥0.12; pinned live citations never evicted; memory→SATR</a:t>
+                      </a:r>
+                    </a:p>
+                  </a:txBody>
+                  <a:tcPr>
+                    <a:solidFill>
+                      <a:srgbClr val="FFFAF3"/>
+                    </a:solidFill>
+                  </a:tcPr>
+                </a:tc>
+              </a:tr>
+            </a:tbl>
+          </a:graphicData>
+        </a:graphic>
+      </p:graphicFrame>
       <p:sp>
         <p:nvSpPr>
           <p:cNvPr id="4022" name="Automatic Date 22"/>
@@ -15153,7 +15428,7 @@
           <a:lstStyle/>
           <a:p>
             <a:pPr algn="l"/>
-            <a:fld id="{20464716-b496-404f-9990-0057820e99ff}" type="datetime3">
+            <a:fld id="{b20bf3b9-d51c-4b89-bd7a-b90e39ccf131}" type="datetime3">
               <a:rPr lang="en-GB" sz="1000" dirty="0">
                 <a:solidFill>
                   <a:srgbClr val="C4A35A"/>
@@ -15187,7 +15462,7 @@
           <a:lstStyle/>
           <a:p>
             <a:pPr algn="r"/>
-            <a:fld id="{2f39b963-498f-4ead-8c17-0c4ced818f40}" type="slidenum">
+            <a:fld id="{5158a0a1-7ea9-42d5-8f43-15f073790545}" type="slidenum">
               <a:rPr lang="en-GB" sz="1000" dirty="0">
                 <a:solidFill>
                   <a:srgbClr val="C4A35A"/>
@@ -15203,7 +15478,7 @@
                 </a:solidFill>
                 <a:latin typeface="Calibri"/>
               </a:rPr>
-              <a:t> / 26</a:t>
+              <a:t> / 29</a:t>
             </a:r>
             <a:endParaRPr lang="en-GB" sz="1000"/>
           </a:p>
@@ -15535,7 +15810,7 @@
                 </a:solidFill>
                 <a:latin typeface="Calibri"/>
               </a:rPr>
-              <a:t>RESEARCH PROPOSAL  ·  References 1/3</a:t>
+              <a:t>RESEARCH PROPOSAL  ·  Research Methodology</a:t>
             </a:r>
           </a:p>
         </p:txBody>
@@ -15570,7 +15845,7 @@
                 </a:solidFill>
                 <a:latin typeface="Calibri"/>
               </a:rPr>
-              <a:t>References (1/3) — multi-agent systems and tool learning</a:t>
+              <a:t>Research Methodology — ToolBench walkthrough</a:t>
             </a:r>
           </a:p>
         </p:txBody>
@@ -15584,6 +15859,41 @@
         <p:spPr>
           <a:xfrm>
             <a:off x="365760" y="1572768"/>
+            <a:ext cx="11430000" cy="640080"/>
+          </a:xfrm>
+          <a:prstGeom prst="rect">
+            <a:avLst/>
+          </a:prstGeom>
+          <a:noFill/>
+        </p:spPr>
+        <p:txBody>
+          <a:bodyPr wrap="square">
+            <a:spAutoFit/>
+          </a:bodyPr>
+          <a:lstStyle/>
+          <a:p>
+            <a:pPr algn="l"/>
+            <a:r>
+              <a:rPr sz="1400" b="0">
+                <a:solidFill>
+                  <a:srgbClr val="5C4A4E"/>
+                </a:solidFill>
+                <a:latin typeface="Calibri"/>
+              </a:rPr>
+              <a:t>One ToolBench-schema datum, processed by all four objectives. RapidAPI is never GET. Numbers are a 07 September 2026 lab trace, not a metric claim.</a:t>
+            </a:r>
+          </a:p>
+        </p:txBody>
+      </p:sp>
+      <p:sp>
+        <p:nvSpPr>
+          <p:cNvPr id="12" name="TextBox 11"/>
+          <p:cNvSpPr txBox="1"/>
+          <p:nvPr/>
+        </p:nvSpPr>
+        <p:spPr>
+          <a:xfrm>
+            <a:off x="365760" y="2212848"/>
             <a:ext cx="11430000" cy="3977639"/>
           </a:xfrm>
           <a:prstGeom prst="rect">
@@ -15611,7 +15921,7 @@
                 </a:solidFill>
                 <a:latin typeface="Calibri"/>
               </a:rPr>
-              <a:t>Wu, Q., Bansal, G., Zhang, J., Wu, Y., Li, B., Zhu, E., Jiang, L., Zhang, X., Zhang, S., Liu, J., Awadallah, A. H., White, R. W., Burger, D., and Wang, C. AutoGen: Enabling Next-Gen LLM Applications via Multi-Agent Conversation. ICLR 2024 Workshop on Large Language Model (LLM) Agents; also COLM 2024. arXiv:2308.08155.</a:t>
+              <a:t>Intake. Bundled G1 jsonl qid=6491 is a RapidAPI aircraft query (gold docs 4308–4317). Off-sector flights are stripped. The ranking-library analogue walked here is tb.agri.soil_health with q = “What is the soil pH and recommended fertilizer dose for a farm village?”</a:t>
             </a:r>
           </a:p>
           <a:p>
@@ -15629,7 +15939,7 @@
                 </a:solidFill>
                 <a:latin typeface="Calibri"/>
               </a:rPr>
-              <a:t>Hong, S., Zhuge, M., Chen, J., Zheng, X., Cheng, Y., Wang, J., Zhang, C., Wang, Z., Yau, S. K. S., Lin, Z., Zhou, L., Ran, C., Xiao, L., Wu, C., and Schmidhuber, J. MetaGPT: Meta Programming for A Multi-Agent Collaborative Framework. ICLR 2024.</a:t>
+              <a:t>O1 SATR. Cold start so s=z(s_base). tb.agri.soil_health s_base=18.08 → s=5.40 (rank 1, ranking-only). karnataka::shc_karnataka s=1.40. datagov.fertilizer s=0.60 (live, rank 4).</a:t>
             </a:r>
           </a:p>
           <a:p>
@@ -15647,7 +15957,7 @@
                 </a:solidFill>
                 <a:latin typeface="Calibri"/>
               </a:rPr>
-              <a:t>Li, G., Hammoud, H. A. A. K., Itani, H., Khizbullin, D., and Ghanem, B. CAMEL: Communicative Agents for “Mind” Exploration of Large Language Model Society. NeurIPS 2023.</a:t>
+              <a:t>O2 APRR. Path agriculture_analyst → schema_planner (p=0.73) → retrieval_specialist (p=0.95). Non-Agriculture specialists fall back to SATR #1 = soil_health.</a:t>
             </a:r>
           </a:p>
           <a:p>
@@ -15665,7 +15975,7 @@
                 </a:solidFill>
                 <a:latin typeface="Calibri"/>
               </a:rPr>
-              <a:t>Qian, C., Liu, W., Liu, H., Chen, N., Dang, Y., Li, J., Yang, C., Chen, W., Su, Y., Cong, X., Xu, J., Li, D., Liu, Z., and Sun, M. ChatDev: Communicative Agents for Software Development. ACL 2024. arXiv:2307.07924.</a:t>
+              <a:t>O3 MNCD. Agent score s=0.45 score/(|score|+2)+0.35 overlap. soil_health 0.5995; tally=3·0.7407·0.5995=1.332. Not liveExecutable. preferredLiveToolId matches fertilizer → GET UUID 2e0e6c04-97f2-456b-9309-bf605650cb11 (44 live subsidy rows, e.g. 2002-03 Indigenous Urea 7790 Rs crore).</a:t>
             </a:r>
           </a:p>
           <a:p>
@@ -15683,25 +15993,42 @@
                 </a:solidFill>
                 <a:latin typeface="Calibri"/>
               </a:rPr>
-              <a:t>Qin, Y., Liang, S., Ye, Y., Zhu, K., Yan, L., Lu, Y., Lin, Y., Cong, X., Tang, X., Qian, B., Zhao, S., Hong, L., Tian, R., Xie, R., Zhou, J., Gerstein, M., Li, D., Liu, Z., and Sun, M. ToolLLM: Facilitating Large Language Models to Master 16000+ Real-world APIs. ICLR 2024.</a:t>
-            </a:r>
-          </a:p>
-          <a:p>
-            <a:pPr>
-              <a:spcAft>
-                <a:spcPts val="600"/>
-              </a:spcAft>
-              <a:buFont typeface="Arial"/>
-              <a:buChar char="•"/>
-            </a:pPr>
-            <a:r>
-              <a:rPr sz="1300">
-                <a:solidFill>
-                  <a:srgbClr val="1A1214"/>
-                </a:solidFill>
-                <a:latin typeface="Calibri"/>
-              </a:rPr>
-              <a:t>Zheng, Y., Li, P., Liu, W., Liu, Y., Luan, J., and Wang, B. ToolRerank: Adaptive and Hierarchy-Aware Reranking for Tool Retrieval. LREC-COLING 2024.</a:t>
+              <a:t>O4 FCNP. 10 spans → keep 6 / drop 4; pin query + live fertilizer observation + citation. Memory written back to SATR.</a:t>
+            </a:r>
+          </a:p>
+        </p:txBody>
+      </p:sp>
+      <p:sp>
+        <p:nvSpPr>
+          <p:cNvPr id="13" name="TextBox 12"/>
+          <p:cNvSpPr txBox="1"/>
+          <p:nvPr/>
+        </p:nvSpPr>
+        <p:spPr>
+          <a:xfrm>
+            <a:off x="365760" y="6199632"/>
+            <a:ext cx="11430000" cy="256032"/>
+          </a:xfrm>
+          <a:prstGeom prst="rect">
+            <a:avLst/>
+          </a:prstGeom>
+          <a:noFill/>
+        </p:spPr>
+        <p:txBody>
+          <a:bodyPr wrap="square">
+            <a:spAutoFit/>
+          </a:bodyPr>
+          <a:lstStyle/>
+          <a:p>
+            <a:pPr algn="l"/>
+            <a:r>
+              <a:rPr sz="1000" b="0">
+                <a:solidFill>
+                  <a:srgbClr val="5C4A4E"/>
+                </a:solidFill>
+                <a:latin typeface="Calibri"/>
+              </a:rPr>
+              <a:t>ToolBench = ranking library. Live evidence is always a verified data.gov.in Agriculture UUID.</a:t>
             </a:r>
           </a:p>
         </p:txBody>
@@ -15727,7 +16054,7 @@
           <a:lstStyle/>
           <a:p>
             <a:pPr algn="l"/>
-            <a:fld id="{e41c3b7c-47bd-4c4a-9de3-37c03bbcd3f1}" type="datetime3">
+            <a:fld id="{d9cf41e1-6d2e-407a-b496-da6b73f15326}" type="datetime3">
               <a:rPr lang="en-GB" sz="1000" dirty="0">
                 <a:solidFill>
                   <a:srgbClr val="C4A35A"/>
@@ -15761,7 +16088,7 @@
           <a:lstStyle/>
           <a:p>
             <a:pPr algn="r"/>
-            <a:fld id="{fe3122eb-362a-4ec6-862d-2115be9a0339}" type="slidenum">
+            <a:fld id="{4567793e-acda-4149-b8eb-eca6c8b5c0e2}" type="slidenum">
               <a:rPr lang="en-GB" sz="1000" dirty="0">
                 <a:solidFill>
                   <a:srgbClr val="C4A35A"/>
@@ -15777,7 +16104,7 @@
                 </a:solidFill>
                 <a:latin typeface="Calibri"/>
               </a:rPr>
-              <a:t> / 26</a:t>
+              <a:t> / 29</a:t>
             </a:r>
             <a:endParaRPr lang="en-GB" sz="1000"/>
           </a:p>
@@ -16109,7 +16436,7 @@
                 </a:solidFill>
                 <a:latin typeface="Calibri"/>
               </a:rPr>
-              <a:t>RESEARCH PROPOSAL  ·  References 2/3</a:t>
+              <a:t>RESEARCH PROPOSAL  ·  Research Methodology</a:t>
             </a:r>
           </a:p>
         </p:txBody>
@@ -16144,7 +16471,7 @@
                 </a:solidFill>
                 <a:latin typeface="Calibri"/>
               </a:rPr>
-              <a:t>References (2/3) — routing, compression, reasoning, biology</a:t>
+              <a:t>Research Methodology — data.gov.in walkthrough</a:t>
             </a:r>
           </a:p>
         </p:txBody>
@@ -16158,6 +16485,41 @@
         <p:spPr>
           <a:xfrm>
             <a:off x="365760" y="1572768"/>
+            <a:ext cx="11430000" cy="640080"/>
+          </a:xfrm>
+          <a:prstGeom prst="rect">
+            <a:avLst/>
+          </a:prstGeom>
+          <a:noFill/>
+        </p:spPr>
+        <p:txBody>
+          <a:bodyPr wrap="square">
+            <a:spAutoFit/>
+          </a:bodyPr>
+          <a:lstStyle/>
+          <a:p>
+            <a:pPr algn="l"/>
+            <a:r>
+              <a:rPr sz="1400" b="0">
+                <a:solidFill>
+                  <a:srgbClr val="5C4A4E"/>
+                </a:solidFill>
+                <a:latin typeface="Calibri"/>
+              </a:rPr>
+              <a:t>The same four objectives on live AGMARKNET. Query: “What is the current mandi price of wheat in Punjab?” Fail-loud: no invented Punjab-wheat modal.</a:t>
+            </a:r>
+          </a:p>
+        </p:txBody>
+      </p:sp>
+      <p:sp>
+        <p:nvSpPr>
+          <p:cNvPr id="12" name="TextBox 11"/>
+          <p:cNvSpPr txBox="1"/>
+          <p:nvPr/>
+        </p:nvSpPr>
+        <p:spPr>
+          <a:xfrm>
+            <a:off x="365760" y="2212848"/>
             <a:ext cx="11430000" cy="3977639"/>
           </a:xfrm>
           <a:prstGeom prst="rect">
@@ -16185,7 +16547,7 @@
                 </a:solidFill>
                 <a:latin typeface="Calibri"/>
               </a:rPr>
-              <a:t>Ong, I., Almahairi, A., Wu, V., Chiang, W.-L., Wu, T., Gonzalez, J. E., Kadous, M. W., and Stoica, I. RouteLLM: Learning to Route LLMs with Preference Data. arXiv:2406.18665, 2024.</a:t>
+              <a:t>Intake. extractToolArguments → state=Punjab, commodity=Wheat. preferredLiveToolId → datagov.mandi_prices (UUID 9ef84268-d588-465a-a308-a864a43d0070). Limit capped at 10 000.</a:t>
             </a:r>
           </a:p>
           <a:p>
@@ -16203,7 +16565,7 @@
                 </a:solidFill>
                 <a:latin typeface="Calibri"/>
               </a:rPr>
-              <a:t>Panda, S., and co-authors. PILOT: Preference-informed LinUCB for routing among language models. Findings of EMNLP 2025.</a:t>
+              <a:t>O1 SATR. karnataka::agmarknet_ka s=3.73 (rank 1, same UUID); datagov.mandi_prices s=3.05 (rank 2, preferred); datagov.msp s=2.31 (ranking-only).</a:t>
             </a:r>
           </a:p>
           <a:p>
@@ -16221,7 +16583,7 @@
                 </a:solidFill>
                 <a:latin typeface="Calibri"/>
               </a:rPr>
-              <a:t>Yue, Y., Zhang, G., Liu, B., Wan, G., Wang, K., Cheng, D., and Qi, Y. MasRouter: Learning to Route LLMs for Multi-Agent Systems. ACL 2025 (long). doi:10.18653/v1/2025.acl-long.757.</a:t>
+              <a:t>O2 APRR. Path agriculture_analyst → schema_planner (p=0.54) → tool_executor (p=0.66, terminal stop). Hop 0: Karnataka mandi, national mandi, MSP. Hop 2 live leftover: crop_production.</a:t>
             </a:r>
           </a:p>
           <a:p>
@@ -16239,7 +16601,7 @@
                 </a:solidFill>
                 <a:latin typeface="Calibri"/>
               </a:rPr>
-              <a:t>Jiang, H., Wu, Q., Lin, C.-Y., Yang, Y., and Qiu, L. LLMLingua: Compressing Prompts for Accelerated Inference of Large Language Models. EMNLP 2023.</a:t>
+              <a:t>O3 MNCD. mandi_prices agent-score 0.787 (liveBoost 0.45); karnataka 0.7789. Score-sum winner karnataka::agmarknet_ka tally=1.154. Live GET: 10 000 arrivals; 0 Wheat in Punjab today; 479 other live Punjab rows; Wheat in 133 live rows from MP, Rajasthan, UP, Gujarat, Maharashtra, West Bengal, Chhattisgarh. Shown mean modal Rs 2593/quintal (e.g. Bhindi, Dera Baba Nanak APMC, Rs 828, 07/09/2026).</a:t>
             </a:r>
           </a:p>
           <a:p>
@@ -16257,61 +16619,42 @@
                 </a:solidFill>
                 <a:latin typeface="Calibri"/>
               </a:rPr>
-              <a:t>Wei, J., Wang, X., Schuurmans, D., Bosma, M., Ichter, B., Xia, F., Chi, E., Le, Q., and Zhou, D. Chain-of-Thought Prompting Elicits Reasoning in Large Language Models. NeurIPS 2022.</a:t>
-            </a:r>
-          </a:p>
-          <a:p>
-            <a:pPr>
-              <a:spcAft>
-                <a:spcPts val="600"/>
-              </a:spcAft>
-              <a:buFont typeface="Arial"/>
-              <a:buChar char="•"/>
-            </a:pPr>
-            <a:r>
-              <a:rPr sz="1300">
-                <a:solidFill>
-                  <a:srgbClr val="1A1214"/>
-                </a:solidFill>
-                <a:latin typeface="Calibri"/>
-              </a:rPr>
-              <a:t>Yao, S., Zhao, J., Yu, D., Du, N., Shafran, I., Narasimhan, K., and Cao, Y. ReAct: Synergizing Reasoning and Acting in Language Models. ICLR 2023.</a:t>
-            </a:r>
-          </a:p>
-          <a:p>
-            <a:pPr>
-              <a:spcAft>
-                <a:spcPts val="600"/>
-              </a:spcAft>
-              <a:buFont typeface="Arial"/>
-              <a:buChar char="•"/>
-            </a:pPr>
-            <a:r>
-              <a:rPr sz="1300">
-                <a:solidFill>
-                  <a:srgbClr val="1A1214"/>
-                </a:solidFill>
-                <a:latin typeface="Calibri"/>
-              </a:rPr>
-              <a:t>Yao, S., Yu, D., Zhao, J., Shafran, I., Griffiths, T. L., Cao, Y., and Narasimhan, K. Tree of Thoughts: Deliberate Problem Solving with Large Language Models. NeurIPS 2023.</a:t>
-            </a:r>
-          </a:p>
-          <a:p>
-            <a:pPr>
-              <a:spcAft>
-                <a:spcPts val="600"/>
-              </a:spcAft>
-              <a:buFont typeface="Arial"/>
-              <a:buChar char="•"/>
-            </a:pPr>
-            <a:r>
-              <a:rPr sz="1300">
-                <a:solidFill>
-                  <a:srgbClr val="1A1214"/>
-                </a:solidFill>
-                <a:latin typeface="Calibri"/>
-              </a:rPr>
-              <a:t>Tero, A., Takagi, S., Saigusa, T., Ito, K., Bebber, D. P., Fricker, M. D., Yumiki, K., Kobayashi, R., and Nakagaki, T. Rules for Biologically Inspired Adaptive Network Design. Science, 2010. doi:10.1126/science.1177894.</a:t>
+              <a:t>O4 FCNP. 10 spans → keep 7; pin the AGMARKNET citation. W ← (1-λ)W + κ·1/L²/lat on the hop path. Next SATR is session-conditioned.</a:t>
+            </a:r>
+          </a:p>
+        </p:txBody>
+      </p:sp>
+      <p:sp>
+        <p:nvSpPr>
+          <p:cNvPr id="13" name="TextBox 12"/>
+          <p:cNvSpPr txBox="1"/>
+          <p:nvPr/>
+        </p:nvSpPr>
+        <p:spPr>
+          <a:xfrm>
+            <a:off x="365760" y="6199632"/>
+            <a:ext cx="11430000" cy="256032"/>
+          </a:xfrm>
+          <a:prstGeom prst="rect">
+            <a:avLst/>
+          </a:prstGeom>
+          <a:noFill/>
+        </p:spPr>
+        <p:txBody>
+          <a:bodyPr wrap="square">
+            <a:spAutoFit/>
+          </a:bodyPr>
+          <a:lstStyle/>
+          <a:p>
+            <a:pPr algn="l"/>
+            <a:r>
+              <a:rPr sz="1000" b="0">
+                <a:solidFill>
+                  <a:srgbClr val="5C4A4E"/>
+                </a:solidFill>
+                <a:latin typeface="Calibri"/>
+              </a:rPr>
+              <a:t>Lab trace 07 September 2026. Re-run on /walkthrough; rows change daily. No dummy prices.</a:t>
             </a:r>
           </a:p>
         </p:txBody>
@@ -16337,7 +16680,7 @@
           <a:lstStyle/>
           <a:p>
             <a:pPr algn="l"/>
-            <a:fld id="{a7d57394-d6b8-42d7-984a-bd4414ba8111}" type="datetime3">
+            <a:fld id="{230c114c-225b-4fe2-8006-e59029bcbc42}" type="datetime3">
               <a:rPr lang="en-GB" sz="1000" dirty="0">
                 <a:solidFill>
                   <a:srgbClr val="C4A35A"/>
@@ -16371,7 +16714,7 @@
           <a:lstStyle/>
           <a:p>
             <a:pPr algn="r"/>
-            <a:fld id="{740a88ae-5d9d-4654-ae48-3b967af74764}" type="slidenum">
+            <a:fld id="{11c7c39a-e098-46df-90a0-d600553d3c72}" type="slidenum">
               <a:rPr lang="en-GB" sz="1000" dirty="0">
                 <a:solidFill>
                   <a:srgbClr val="C4A35A"/>
@@ -16387,7 +16730,7 @@
                 </a:solidFill>
                 <a:latin typeface="Calibri"/>
               </a:rPr>
-              <a:t> / 26</a:t>
+              <a:t> / 29</a:t>
             </a:r>
             <a:endParaRPr lang="en-GB" sz="1000"/>
           </a:p>
@@ -16719,7 +17062,7 @@
                 </a:solidFill>
                 <a:latin typeface="Calibri"/>
               </a:rPr>
-              <a:t>RESEARCH PROPOSAL  ·  References 3/3</a:t>
+              <a:t>RESEARCH PROPOSAL  ·  Conclusion</a:t>
             </a:r>
           </a:p>
         </p:txBody>
@@ -16754,7 +17097,7 @@
                 </a:solidFill>
                 <a:latin typeface="Calibri"/>
               </a:rPr>
-              <a:t>References (3/3) — memory, tools, Indian agricultural data</a:t>
+              <a:t>Conclusion</a:t>
             </a:r>
           </a:p>
         </p:txBody>
@@ -16768,6 +17111,41 @@
         <p:spPr>
           <a:xfrm>
             <a:off x="365760" y="1572768"/>
+            <a:ext cx="11430000" cy="640080"/>
+          </a:xfrm>
+          <a:prstGeom prst="rect">
+            <a:avLst/>
+          </a:prstGeom>
+          <a:noFill/>
+        </p:spPr>
+        <p:txBody>
+          <a:bodyPr wrap="square">
+            <a:spAutoFit/>
+          </a:bodyPr>
+          <a:lstStyle/>
+          <a:p>
+            <a:pPr algn="l"/>
+            <a:r>
+              <a:rPr sz="1400" b="0">
+                <a:solidFill>
+                  <a:srgbClr val="5C4A4E"/>
+                </a:solidFill>
+                <a:latin typeface="Calibri"/>
+              </a:rPr>
+              <a:t>ACRS is proposed as a structural orchestration layer. The contribution is the closed loop and the four named gaps — not a pre-committed leaderboard.</a:t>
+            </a:r>
+          </a:p>
+        </p:txBody>
+      </p:sp>
+      <p:sp>
+        <p:nvSpPr>
+          <p:cNvPr id="12" name="TextBox 11"/>
+          <p:cNvSpPr txBox="1"/>
+          <p:nvPr/>
+        </p:nvSpPr>
+        <p:spPr>
+          <a:xfrm>
+            <a:off x="365760" y="2212848"/>
             <a:ext cx="11430000" cy="3977639"/>
           </a:xfrm>
           <a:prstGeom prst="rect">
@@ -16795,7 +17173,7 @@
                 </a:solidFill>
                 <a:latin typeface="Calibri"/>
               </a:rPr>
-              <a:t>Park, J. S., O’Brien, J. C., Cai, C. J., Morris, M. R., Liang, P., and Bernstein, M. S. Generative Agents: Interactive Simulacra of Human Behavior. CHI 2023.</a:t>
+              <a:t>The literature (AutoGen, MetaGPT, ChatDev, CAMEL, ToolLLM, MasRouter, RouteLLM, PILOT, LLMLingua, PECAD) establishes conversation, tools, learned routing, and prompt compression. It does not establish SATR → APRR → MNCD → FCNP as one contract over live Indian OGD.</a:t>
             </a:r>
           </a:p>
           <a:p>
@@ -16813,7 +17191,7 @@
                 </a:solidFill>
                 <a:latin typeface="Calibri"/>
               </a:rPr>
-              <a:t>Shinn, N., Cassano, F., Berman, E., Gopinath, A., Narasimhan, K., and Yao, S. Reflexion: Language Agents with Verbal Reinforcement Learning. NeurIPS 2023.</a:t>
+              <a:t>The identified problem is five gaps: G1 session–tool fusion, G2 training-free specialist posterior, G3 live fail-loud Indian OGD, G4 conductance prune with write-back, G5 missing integration layer.</a:t>
             </a:r>
           </a:p>
           <a:p>
@@ -16831,7 +17209,7 @@
                 </a:solidFill>
                 <a:latin typeface="Calibri"/>
               </a:rPr>
-              <a:t>Shen, Y., Song, K., Tan, X., Li, D., Lu, W., and Zhuang, Y. HuggingGPT: Solving AI Tasks with ChatGPT and its Friends in Hugging Face. NeurIPS 2023.</a:t>
+              <a:t>The aim is to design that layer. Four objectives (SATR, APRR, MNCD, FCNP) and four research questions map onto it.</a:t>
             </a:r>
           </a:p>
           <a:p>
@@ -16849,7 +17227,7 @@
                 </a:solidFill>
                 <a:latin typeface="Calibri"/>
               </a:rPr>
-              <a:t>Schick, T., Dwivedi-Yu, J., Dessì, R., Raileanu, R., Lomeli, M., Zettlemoyer, L., Cancedda, N., and Scialom, T. Toolformer: Language Models Can Teach Themselves to Use Tools. NeurIPS 2023.</a:t>
+              <a:t>Methodology is specified per objective: ToolBench as ranking library; Dirichlet–Thompson routing; verified data.gov.in UUIDs with score-sum; Physarum-inspired prune with SATR write-back. Metric numbers are deferred.</a:t>
             </a:r>
           </a:p>
           <a:p>
@@ -16867,60 +17245,7 @@
                 </a:solidFill>
                 <a:latin typeface="Calibri"/>
               </a:rPr>
-              <a:t>Guo, H., Woodruff, A., and Yadav, A. Improving Lives of Indebted Farmers Using Deep Learning: Predicting Agricultural Produce Prices Using Convolutional Neural Networks (PECAD). AAAI 2020. doi:10.1609/aaai.v34i08.7039. AGMARKNET scrape for price prediction; cited here as Indian OGD precedent, not as a baseline this proposal claims to beat.</a:t>
-            </a:r>
-          </a:p>
-          <a:p>
-            <a:pPr>
-              <a:spcAft>
-                <a:spcPts val="600"/>
-              </a:spcAft>
-              <a:buFont typeface="Arial"/>
-              <a:buChar char="•"/>
-            </a:pPr>
-            <a:r>
-              <a:rPr sz="1300">
-                <a:solidFill>
-                  <a:srgbClr val="1A1214"/>
-                </a:solidFill>
-                <a:latin typeface="Calibri"/>
-              </a:rPr>
-              <a:t>Government of India. Open Government Data Platform India (data.gov.in); AGMARKNET resource 9ef84268-d588-465a-a308-a864a43d0070; Directorate of Economics and Statistics crop production; IMD rainfall series; Government Open Data License — India (GODL-India).</a:t>
-            </a:r>
-          </a:p>
-        </p:txBody>
-      </p:sp>
-      <p:sp>
-        <p:nvSpPr>
-          <p:cNvPr id="12" name="TextBox 11"/>
-          <p:cNvSpPr txBox="1"/>
-          <p:nvPr/>
-        </p:nvSpPr>
-        <p:spPr>
-          <a:xfrm>
-            <a:off x="365760" y="6199632"/>
-            <a:ext cx="11430000" cy="256032"/>
-          </a:xfrm>
-          <a:prstGeom prst="rect">
-            <a:avLst/>
-          </a:prstGeom>
-          <a:noFill/>
-        </p:spPr>
-        <p:txBody>
-          <a:bodyPr wrap="square">
-            <a:spAutoFit/>
-          </a:bodyPr>
-          <a:lstStyle/>
-          <a:p>
-            <a:pPr algn="l"/>
-            <a:r>
-              <a:rPr sz="1000" b="0">
-                <a:solidFill>
-                  <a:srgbClr val="5C4A4E"/>
-                </a:solidFill>
-                <a:latin typeface="Calibri"/>
-              </a:rPr>
-              <a:t>CrewAI is an engineering framework without a flagship peer-reviewed paper in this list; AutoGen and MetaGPT are the MAS citations.</a:t>
+              <a:t>Next step after approval. Freeze evaluation protocols, implement the closed loop, and report whatever the measurements show — including negative results.</a:t>
             </a:r>
           </a:p>
         </p:txBody>
@@ -16946,7 +17271,7 @@
           <a:lstStyle/>
           <a:p>
             <a:pPr algn="l"/>
-            <a:fld id="{09d31ef4-b9dd-4f41-987c-3952cd194080}" type="datetime3">
+            <a:fld id="{f416b8ab-dc34-4091-a64a-9724bed8fb74}" type="datetime3">
               <a:rPr lang="en-GB" sz="1000" dirty="0">
                 <a:solidFill>
                   <a:srgbClr val="C4A35A"/>
@@ -16980,7 +17305,7 @@
           <a:lstStyle/>
           <a:p>
             <a:pPr algn="r"/>
-            <a:fld id="{addbed0d-a0fe-485b-afbd-3297496087c3}" type="slidenum">
+            <a:fld id="{e5bc0dd9-8c55-4d78-b837-e643d138f5f8}" type="slidenum">
               <a:rPr lang="en-GB" sz="1000" dirty="0">
                 <a:solidFill>
                   <a:srgbClr val="C4A35A"/>
@@ -16996,7 +17321,7 @@
                 </a:solidFill>
                 <a:latin typeface="Calibri"/>
               </a:rPr>
-              <a:t> / 26</a:t>
+              <a:t> / 29</a:t>
             </a:r>
             <a:endParaRPr lang="en-GB" sz="1000"/>
           </a:p>
@@ -17328,7 +17653,7 @@
                 </a:solidFill>
                 <a:latin typeface="Calibri"/>
               </a:rPr>
-              <a:t>RESEARCH PROPOSAL  ·  Thank you</a:t>
+              <a:t>RESEARCH PROPOSAL  ·  References 1/3</a:t>
             </a:r>
           </a:p>
         </p:txBody>
@@ -17363,7 +17688,7 @@
                 </a:solidFill>
                 <a:latin typeface="Calibri"/>
               </a:rPr>
-              <a:t>Thank you</a:t>
+              <a:t>References (1/3) — multi-agent systems and tool learning</a:t>
             </a:r>
           </a:p>
         </p:txBody>
@@ -17377,41 +17702,6 @@
         <p:spPr>
           <a:xfrm>
             <a:off x="365760" y="1572768"/>
-            <a:ext cx="11430000" cy="640080"/>
-          </a:xfrm>
-          <a:prstGeom prst="rect">
-            <a:avLst/>
-          </a:prstGeom>
-          <a:noFill/>
-        </p:spPr>
-        <p:txBody>
-          <a:bodyPr wrap="square">
-            <a:spAutoFit/>
-          </a:bodyPr>
-          <a:lstStyle/>
-          <a:p>
-            <a:pPr algn="l"/>
-            <a:r>
-              <a:rPr sz="1400" b="0">
-                <a:solidFill>
-                  <a:srgbClr val="5C4A4E"/>
-                </a:solidFill>
-                <a:latin typeface="Calibri"/>
-              </a:rPr>
-              <a:t>Adaptive Context Reasoning System — a research programme, not a performance number.</a:t>
-            </a:r>
-          </a:p>
-        </p:txBody>
-      </p:sp>
-      <p:sp>
-        <p:nvSpPr>
-          <p:cNvPr id="12" name="TextBox 11"/>
-          <p:cNvSpPr txBox="1"/>
-          <p:nvPr/>
-        </p:nvSpPr>
-        <p:spPr>
-          <a:xfrm>
-            <a:off x="365760" y="2212848"/>
             <a:ext cx="11430000" cy="3977639"/>
           </a:xfrm>
           <a:prstGeom prst="rect">
@@ -17439,7 +17729,7 @@
                 </a:solidFill>
                 <a:latin typeface="Calibri"/>
               </a:rPr>
-              <a:t>Presented By: Jenisha T</a:t>
+              <a:t>Wu, Q., Bansal, G., Zhang, J., Wu, Y., Li, B., Zhu, E., Jiang, L., Zhang, X., Zhang, S., Liu, J., Awadallah, A. H., White, R. W., Burger, D., and Wang, C. AutoGen: Enabling Next-Gen LLM Applications via Multi-Agent Conversation. ICLR 2024 Workshop on Large Language Model (LLM) Agents; also COLM 2024. arXiv:2308.08155.</a:t>
             </a:r>
           </a:p>
           <a:p>
@@ -17457,7 +17747,7 @@
                 </a:solidFill>
                 <a:latin typeface="Calibri"/>
               </a:rPr>
-              <a:t>(Reg. No. 24ETRP720001)</a:t>
+              <a:t>Hong, S., Zhuge, M., Chen, J., Zheng, X., Cheng, Y., Wang, J., Zhang, C., Wang, Z., Yau, S. K. S., Lin, Z., Zhou, L., Ran, C., Xiao, L., Wu, C., and Schmidhuber, J. MetaGPT: Meta Programming for A Multi-Agent Collaborative Framework. ICLR 2024.</a:t>
             </a:r>
           </a:p>
           <a:p>
@@ -17475,7 +17765,7 @@
                 </a:solidFill>
                 <a:latin typeface="Calibri"/>
               </a:rPr>
-              <a:t>Supervisor: Dr. Jyothi A P</a:t>
+              <a:t>Li, G., Hammoud, H. A. A. K., Itani, H., Khizbullin, D., and Ghanem, B. CAMEL: Communicative Agents for “Mind” Exploration of Large Language Model Society. NeurIPS 2023.</a:t>
             </a:r>
           </a:p>
           <a:p>
@@ -17493,7 +17783,7 @@
                 </a:solidFill>
                 <a:latin typeface="Calibri"/>
               </a:rPr>
-              <a:t>Department of Computer Science and Engineering</a:t>
+              <a:t>Qian, C., Liu, W., Liu, H., Chen, N., Dang, Y., Li, J., Yang, C., Chen, W., Su, Y., Cong, X., Xu, J., Li, D., Liu, Z., and Sun, M. ChatDev: Communicative Agents for Software Development. ACL 2024. arXiv:2307.07924.</a:t>
             </a:r>
           </a:p>
           <a:p>
@@ -17511,7 +17801,7 @@
                 </a:solidFill>
                 <a:latin typeface="Calibri"/>
               </a:rPr>
-              <a:t>Faculty of Engineering and Technology, MSRUAS</a:t>
+              <a:t>Qin, Y., Liang, S., Ye, Y., Zhu, K., Yan, L., Lu, Y., Lin, Y., Cong, X., Tang, X., Qian, B., Zhao, S., Hong, L., Tian, R., Xie, R., Zhou, J., Gerstein, M., Li, D., Liu, Z., and Sun, M. ToolLLM: Facilitating Large Language Models to Master 16000+ Real-world APIs. ICLR 2024.</a:t>
             </a:r>
           </a:p>
           <a:p>
@@ -17529,7 +17819,7 @@
                 </a:solidFill>
                 <a:latin typeface="Calibri"/>
               </a:rPr>
-              <a:t>jenisha.t@msruas.ac.in</a:t>
+              <a:t>Zheng, Y., Li, P., Liu, W., Liu, Y., Luan, J., and Wang, B. ToolRerank: Adaptive and Hierarchy-Aware Reranking for Tool Retrieval. LREC-COLING 2024.</a:t>
             </a:r>
           </a:p>
         </p:txBody>
@@ -17555,7 +17845,7 @@
           <a:lstStyle/>
           <a:p>
             <a:pPr algn="l"/>
-            <a:fld id="{a788b296-e162-4685-9fd6-45ec38f2277f}" type="datetime3">
+            <a:fld id="{9cdb6dfa-da93-495b-a150-a5d82e7710de}" type="datetime3">
               <a:rPr lang="en-GB" sz="1000" dirty="0">
                 <a:solidFill>
                   <a:srgbClr val="C4A35A"/>
@@ -17589,7 +17879,7 @@
           <a:lstStyle/>
           <a:p>
             <a:pPr algn="r"/>
-            <a:fld id="{8304211e-782d-4da2-9fa0-25738d4dad1d}" type="slidenum">
+            <a:fld id="{81fa6b54-347d-4f02-bd8c-3c1541a1f152}" type="slidenum">
               <a:rPr lang="en-GB" sz="1000" dirty="0">
                 <a:solidFill>
                   <a:srgbClr val="C4A35A"/>
@@ -17605,7 +17895,1835 @@
                 </a:solidFill>
                 <a:latin typeface="Calibri"/>
               </a:rPr>
-              <a:t> / 26</a:t>
+              <a:t> / 29</a:t>
+            </a:r>
+            <a:endParaRPr lang="en-GB" sz="1000"/>
+          </a:p>
+        </p:txBody>
+      </p:sp>
+    </p:spTree>
+  </p:cSld>
+  <p:clrMapOvr>
+    <a:masterClrMapping/>
+  </p:clrMapOvr>
+  <p:hf sldNum="1" hdr="0" ftr="1" dt="1"/>
+</p:sld>
+</file>
+
+<file path=ppt/slides/slide27.xml><?xml version="1.0" encoding="utf-8"?>
+<p:sld xmlns:a="http://schemas.openxmlformats.org/drawingml/2006/main" xmlns:p="http://schemas.openxmlformats.org/presentationml/2006/main" xmlns:r="http://schemas.openxmlformats.org/officeDocument/2006/relationships">
+  <p:cSld>
+    <p:spTree>
+      <p:nvGrpSpPr>
+        <p:cNvPr id="1" name=""/>
+        <p:cNvGrpSpPr/>
+        <p:nvPr/>
+      </p:nvGrpSpPr>
+      <p:grpSpPr/>
+      <p:sp>
+        <p:nvSpPr>
+          <p:cNvPr id="2" name="Rectangle 1"/>
+          <p:cNvSpPr/>
+          <p:nvPr/>
+        </p:nvSpPr>
+        <p:spPr>
+          <a:xfrm>
+            <a:off x="0" y="0"/>
+            <a:ext cx="12191695" cy="658368"/>
+          </a:xfrm>
+          <a:prstGeom prst="rect">
+            <a:avLst/>
+          </a:prstGeom>
+          <a:solidFill>
+            <a:srgbClr val="7C1D2E"/>
+          </a:solidFill>
+          <a:ln>
+            <a:noFill/>
+          </a:ln>
+        </p:spPr>
+        <p:style>
+          <a:lnRef idx="1">
+            <a:schemeClr val="accent1"/>
+          </a:lnRef>
+          <a:fillRef idx="3">
+            <a:schemeClr val="accent1"/>
+          </a:fillRef>
+          <a:effectRef idx="2">
+            <a:schemeClr val="accent1"/>
+          </a:effectRef>
+          <a:fontRef idx="minor">
+            <a:schemeClr val="lt1"/>
+          </a:fontRef>
+        </p:style>
+        <p:txBody>
+          <a:bodyPr rtlCol="0" anchor="ctr"/>
+          <a:lstStyle/>
+          <a:p>
+            <a:pPr algn="ctr"/>
+          </a:p>
+        </p:txBody>
+      </p:sp>
+      <p:sp>
+        <p:nvSpPr>
+          <p:cNvPr id="3" name="Rectangle 2"/>
+          <p:cNvSpPr/>
+          <p:nvPr/>
+        </p:nvSpPr>
+        <p:spPr>
+          <a:xfrm>
+            <a:off x="0" y="658368"/>
+            <a:ext cx="12191695" cy="54864"/>
+          </a:xfrm>
+          <a:prstGeom prst="rect">
+            <a:avLst/>
+          </a:prstGeom>
+          <a:solidFill>
+            <a:srgbClr val="C4A35A"/>
+          </a:solidFill>
+          <a:ln>
+            <a:noFill/>
+          </a:ln>
+        </p:spPr>
+        <p:style>
+          <a:lnRef idx="1">
+            <a:schemeClr val="accent1"/>
+          </a:lnRef>
+          <a:fillRef idx="3">
+            <a:schemeClr val="accent1"/>
+          </a:fillRef>
+          <a:effectRef idx="2">
+            <a:schemeClr val="accent1"/>
+          </a:effectRef>
+          <a:fontRef idx="minor">
+            <a:schemeClr val="lt1"/>
+          </a:fontRef>
+        </p:style>
+        <p:txBody>
+          <a:bodyPr rtlCol="0" anchor="ctr"/>
+          <a:lstStyle/>
+          <a:p>
+            <a:pPr algn="ctr"/>
+          </a:p>
+        </p:txBody>
+      </p:sp>
+      <p:sp>
+        <p:nvSpPr>
+          <p:cNvPr id="4" name="Rectangle 3"/>
+          <p:cNvSpPr/>
+          <p:nvPr/>
+        </p:nvSpPr>
+        <p:spPr>
+          <a:xfrm>
+            <a:off x="0" y="6510528"/>
+            <a:ext cx="12191695" cy="347472"/>
+          </a:xfrm>
+          <a:prstGeom prst="rect">
+            <a:avLst/>
+          </a:prstGeom>
+          <a:solidFill>
+            <a:srgbClr val="7C1D2E"/>
+          </a:solidFill>
+          <a:ln>
+            <a:noFill/>
+          </a:ln>
+        </p:spPr>
+        <p:style>
+          <a:lnRef idx="1">
+            <a:schemeClr val="accent1"/>
+          </a:lnRef>
+          <a:fillRef idx="3">
+            <a:schemeClr val="accent1"/>
+          </a:fillRef>
+          <a:effectRef idx="2">
+            <a:schemeClr val="accent1"/>
+          </a:effectRef>
+          <a:fontRef idx="minor">
+            <a:schemeClr val="lt1"/>
+          </a:fontRef>
+        </p:style>
+        <p:txBody>
+          <a:bodyPr rtlCol="0" anchor="ctr"/>
+          <a:lstStyle/>
+          <a:p>
+            <a:pPr algn="ctr"/>
+          </a:p>
+        </p:txBody>
+      </p:sp>
+      <p:sp>
+        <p:nvSpPr>
+          <p:cNvPr id="5" name="TextBox 4"/>
+          <p:cNvSpPr txBox="1"/>
+          <p:nvPr/>
+        </p:nvSpPr>
+        <p:spPr>
+          <a:xfrm>
+            <a:off x="292608" y="73152"/>
+            <a:ext cx="11521440" cy="292608"/>
+          </a:xfrm>
+          <a:prstGeom prst="rect">
+            <a:avLst/>
+          </a:prstGeom>
+          <a:noFill/>
+        </p:spPr>
+        <p:txBody>
+          <a:bodyPr wrap="square">
+            <a:spAutoFit/>
+          </a:bodyPr>
+          <a:lstStyle/>
+          <a:p>
+            <a:pPr algn="l"/>
+            <a:r>
+              <a:rPr sz="1300" b="1">
+                <a:solidFill>
+                  <a:srgbClr val="FFFFFF"/>
+                </a:solidFill>
+                <a:latin typeface="Calibri"/>
+              </a:rPr>
+              <a:t>M. S. RAMAIAH UNIVERSITY OF APPLIED SCIENCES</a:t>
+            </a:r>
+          </a:p>
+        </p:txBody>
+      </p:sp>
+      <p:sp>
+        <p:nvSpPr>
+          <p:cNvPr id="6" name="TextBox 5"/>
+          <p:cNvSpPr txBox="1"/>
+          <p:nvPr/>
+        </p:nvSpPr>
+        <p:spPr>
+          <a:xfrm>
+            <a:off x="292608" y="347472"/>
+            <a:ext cx="11521440" cy="256032"/>
+          </a:xfrm>
+          <a:prstGeom prst="rect">
+            <a:avLst/>
+          </a:prstGeom>
+          <a:noFill/>
+        </p:spPr>
+        <p:txBody>
+          <a:bodyPr wrap="square">
+            <a:spAutoFit/>
+          </a:bodyPr>
+          <a:lstStyle/>
+          <a:p>
+            <a:pPr algn="l"/>
+            <a:r>
+              <a:rPr sz="1100" b="0">
+                <a:solidFill>
+                  <a:srgbClr val="C4A35A"/>
+                </a:solidFill>
+                <a:latin typeface="Calibri"/>
+              </a:rPr>
+              <a:t>Faculty of Engineering and Technology  ·  RESEARCH PROPOSAL</a:t>
+            </a:r>
+          </a:p>
+        </p:txBody>
+      </p:sp>
+      <p:sp>
+        <p:nvSpPr>
+          <p:cNvPr id="7" name="TextBox 6"/>
+          <p:cNvSpPr txBox="1"/>
+          <p:nvPr/>
+        </p:nvSpPr>
+        <p:spPr>
+          <a:xfrm>
+            <a:off x="3383280" y="6565392"/>
+            <a:ext cx="5760720" cy="237744"/>
+          </a:xfrm>
+          <a:prstGeom prst="rect">
+            <a:avLst/>
+          </a:prstGeom>
+          <a:noFill/>
+        </p:spPr>
+        <p:txBody>
+          <a:bodyPr wrap="square">
+            <a:spAutoFit/>
+          </a:bodyPr>
+          <a:lstStyle/>
+          <a:p>
+            <a:pPr algn="ctr"/>
+            <a:r>
+              <a:rPr sz="1000" b="0">
+                <a:solidFill>
+                  <a:srgbClr val="FFFFFF"/>
+                </a:solidFill>
+                <a:latin typeface="Calibri"/>
+              </a:rPr>
+              <a:t>Jenisha T  |  24ETRP720001  |  Part Time</a:t>
+            </a:r>
+          </a:p>
+        </p:txBody>
+      </p:sp>
+      <p:sp>
+        <p:nvSpPr>
+          <p:cNvPr id="8" name="Rectangle 7"/>
+          <p:cNvSpPr/>
+          <p:nvPr/>
+        </p:nvSpPr>
+        <p:spPr>
+          <a:xfrm>
+            <a:off x="0" y="713232"/>
+            <a:ext cx="12191695" cy="5797296"/>
+          </a:xfrm>
+          <a:prstGeom prst="rect">
+            <a:avLst/>
+          </a:prstGeom>
+          <a:solidFill>
+            <a:srgbClr val="FFFAF3"/>
+          </a:solidFill>
+          <a:ln>
+            <a:noFill/>
+          </a:ln>
+        </p:spPr>
+        <p:style>
+          <a:lnRef idx="1">
+            <a:schemeClr val="accent1"/>
+          </a:lnRef>
+          <a:fillRef idx="3">
+            <a:schemeClr val="accent1"/>
+          </a:fillRef>
+          <a:effectRef idx="2">
+            <a:schemeClr val="accent1"/>
+          </a:effectRef>
+          <a:fontRef idx="minor">
+            <a:schemeClr val="lt1"/>
+          </a:fontRef>
+        </p:style>
+        <p:txBody>
+          <a:bodyPr rtlCol="0" anchor="ctr"/>
+          <a:lstStyle/>
+          <a:p>
+            <a:pPr algn="ctr"/>
+          </a:p>
+        </p:txBody>
+      </p:sp>
+      <p:sp>
+        <p:nvSpPr>
+          <p:cNvPr id="9" name="TextBox 8"/>
+          <p:cNvSpPr txBox="1"/>
+          <p:nvPr/>
+        </p:nvSpPr>
+        <p:spPr>
+          <a:xfrm>
+            <a:off x="365760" y="804672"/>
+            <a:ext cx="11430000" cy="237744"/>
+          </a:xfrm>
+          <a:prstGeom prst="rect">
+            <a:avLst/>
+          </a:prstGeom>
+          <a:noFill/>
+        </p:spPr>
+        <p:txBody>
+          <a:bodyPr wrap="square">
+            <a:spAutoFit/>
+          </a:bodyPr>
+          <a:lstStyle/>
+          <a:p>
+            <a:pPr algn="l"/>
+            <a:r>
+              <a:rPr sz="1100" b="1">
+                <a:solidFill>
+                  <a:srgbClr val="7C1D2E"/>
+                </a:solidFill>
+                <a:latin typeface="Calibri"/>
+              </a:rPr>
+              <a:t>RESEARCH PROPOSAL  ·  References 2/3</a:t>
+            </a:r>
+          </a:p>
+        </p:txBody>
+      </p:sp>
+      <p:sp>
+        <p:nvSpPr>
+          <p:cNvPr id="10" name="TextBox 9"/>
+          <p:cNvSpPr txBox="1"/>
+          <p:nvPr/>
+        </p:nvSpPr>
+        <p:spPr>
+          <a:xfrm>
+            <a:off x="365760" y="1024128"/>
+            <a:ext cx="11430000" cy="502920"/>
+          </a:xfrm>
+          <a:prstGeom prst="rect">
+            <a:avLst/>
+          </a:prstGeom>
+          <a:noFill/>
+        </p:spPr>
+        <p:txBody>
+          <a:bodyPr wrap="square">
+            <a:spAutoFit/>
+          </a:bodyPr>
+          <a:lstStyle/>
+          <a:p>
+            <a:pPr algn="l"/>
+            <a:r>
+              <a:rPr sz="2200" b="1">
+                <a:solidFill>
+                  <a:srgbClr val="1A1214"/>
+                </a:solidFill>
+                <a:latin typeface="Calibri"/>
+              </a:rPr>
+              <a:t>References (2/3) — routing, compression, reasoning, biology</a:t>
+            </a:r>
+          </a:p>
+        </p:txBody>
+      </p:sp>
+      <p:sp>
+        <p:nvSpPr>
+          <p:cNvPr id="11" name="TextBox 10"/>
+          <p:cNvSpPr txBox="1"/>
+          <p:nvPr/>
+        </p:nvSpPr>
+        <p:spPr>
+          <a:xfrm>
+            <a:off x="365760" y="1572768"/>
+            <a:ext cx="11430000" cy="3977639"/>
+          </a:xfrm>
+          <a:prstGeom prst="rect">
+            <a:avLst/>
+          </a:prstGeom>
+          <a:noFill/>
+        </p:spPr>
+        <p:txBody>
+          <a:bodyPr wrap="square">
+            <a:spAutoFit/>
+          </a:bodyPr>
+          <a:lstStyle/>
+          <a:p>
+            <a:pPr>
+              <a:spcAft>
+                <a:spcPts val="600"/>
+              </a:spcAft>
+              <a:buFont typeface="Arial"/>
+              <a:buChar char="•"/>
+            </a:pPr>
+            <a:r>
+              <a:rPr sz="1300">
+                <a:solidFill>
+                  <a:srgbClr val="1A1214"/>
+                </a:solidFill>
+                <a:latin typeface="Calibri"/>
+              </a:rPr>
+              <a:t>Ong, I., Almahairi, A., Wu, V., Chiang, W.-L., Wu, T., Gonzalez, J. E., Kadous, M. W., and Stoica, I. RouteLLM: Learning to Route LLMs with Preference Data. arXiv:2406.18665, 2024.</a:t>
+            </a:r>
+          </a:p>
+          <a:p>
+            <a:pPr>
+              <a:spcAft>
+                <a:spcPts val="600"/>
+              </a:spcAft>
+              <a:buFont typeface="Arial"/>
+              <a:buChar char="•"/>
+            </a:pPr>
+            <a:r>
+              <a:rPr sz="1300">
+                <a:solidFill>
+                  <a:srgbClr val="1A1214"/>
+                </a:solidFill>
+                <a:latin typeface="Calibri"/>
+              </a:rPr>
+              <a:t>Panda, S., and co-authors. PILOT: Preference-informed LinUCB for routing among language models. Findings of EMNLP 2025.</a:t>
+            </a:r>
+          </a:p>
+          <a:p>
+            <a:pPr>
+              <a:spcAft>
+                <a:spcPts val="600"/>
+              </a:spcAft>
+              <a:buFont typeface="Arial"/>
+              <a:buChar char="•"/>
+            </a:pPr>
+            <a:r>
+              <a:rPr sz="1300">
+                <a:solidFill>
+                  <a:srgbClr val="1A1214"/>
+                </a:solidFill>
+                <a:latin typeface="Calibri"/>
+              </a:rPr>
+              <a:t>Yue, Y., Zhang, G., Liu, B., Wan, G., Wang, K., Cheng, D., and Qi, Y. MasRouter: Learning to Route LLMs for Multi-Agent Systems. ACL 2025 (long). doi:10.18653/v1/2025.acl-long.757.</a:t>
+            </a:r>
+          </a:p>
+          <a:p>
+            <a:pPr>
+              <a:spcAft>
+                <a:spcPts val="600"/>
+              </a:spcAft>
+              <a:buFont typeface="Arial"/>
+              <a:buChar char="•"/>
+            </a:pPr>
+            <a:r>
+              <a:rPr sz="1300">
+                <a:solidFill>
+                  <a:srgbClr val="1A1214"/>
+                </a:solidFill>
+                <a:latin typeface="Calibri"/>
+              </a:rPr>
+              <a:t>Jiang, H., Wu, Q., Lin, C.-Y., Yang, Y., and Qiu, L. LLMLingua: Compressing Prompts for Accelerated Inference of Large Language Models. EMNLP 2023.</a:t>
+            </a:r>
+          </a:p>
+          <a:p>
+            <a:pPr>
+              <a:spcAft>
+                <a:spcPts val="600"/>
+              </a:spcAft>
+              <a:buFont typeface="Arial"/>
+              <a:buChar char="•"/>
+            </a:pPr>
+            <a:r>
+              <a:rPr sz="1300">
+                <a:solidFill>
+                  <a:srgbClr val="1A1214"/>
+                </a:solidFill>
+                <a:latin typeface="Calibri"/>
+              </a:rPr>
+              <a:t>Wei, J., Wang, X., Schuurmans, D., Bosma, M., Ichter, B., Xia, F., Chi, E., Le, Q., and Zhou, D. Chain-of-Thought Prompting Elicits Reasoning in Large Language Models. NeurIPS 2022.</a:t>
+            </a:r>
+          </a:p>
+          <a:p>
+            <a:pPr>
+              <a:spcAft>
+                <a:spcPts val="600"/>
+              </a:spcAft>
+              <a:buFont typeface="Arial"/>
+              <a:buChar char="•"/>
+            </a:pPr>
+            <a:r>
+              <a:rPr sz="1300">
+                <a:solidFill>
+                  <a:srgbClr val="1A1214"/>
+                </a:solidFill>
+                <a:latin typeface="Calibri"/>
+              </a:rPr>
+              <a:t>Yao, S., Zhao, J., Yu, D., Du, N., Shafran, I., Narasimhan, K., and Cao, Y. ReAct: Synergizing Reasoning and Acting in Language Models. ICLR 2023.</a:t>
+            </a:r>
+          </a:p>
+          <a:p>
+            <a:pPr>
+              <a:spcAft>
+                <a:spcPts val="600"/>
+              </a:spcAft>
+              <a:buFont typeface="Arial"/>
+              <a:buChar char="•"/>
+            </a:pPr>
+            <a:r>
+              <a:rPr sz="1300">
+                <a:solidFill>
+                  <a:srgbClr val="1A1214"/>
+                </a:solidFill>
+                <a:latin typeface="Calibri"/>
+              </a:rPr>
+              <a:t>Yao, S., Yu, D., Zhao, J., Shafran, I., Griffiths, T. L., Cao, Y., and Narasimhan, K. Tree of Thoughts: Deliberate Problem Solving with Large Language Models. NeurIPS 2023.</a:t>
+            </a:r>
+          </a:p>
+          <a:p>
+            <a:pPr>
+              <a:spcAft>
+                <a:spcPts val="600"/>
+              </a:spcAft>
+              <a:buFont typeface="Arial"/>
+              <a:buChar char="•"/>
+            </a:pPr>
+            <a:r>
+              <a:rPr sz="1300">
+                <a:solidFill>
+                  <a:srgbClr val="1A1214"/>
+                </a:solidFill>
+                <a:latin typeface="Calibri"/>
+              </a:rPr>
+              <a:t>Tero, A., Takagi, S., Saigusa, T., Ito, K., Bebber, D. P., Fricker, M. D., Yumiki, K., Kobayashi, R., and Nakagaki, T. Rules for Biologically Inspired Adaptive Network Design. Science, 2010. doi:10.1126/science.1177894.</a:t>
+            </a:r>
+          </a:p>
+        </p:txBody>
+      </p:sp>
+      <p:sp>
+        <p:nvSpPr>
+          <p:cNvPr id="4027" name="Automatic Date 27"/>
+          <p:cNvSpPr txBox="1"/>
+          <p:nvPr/>
+        </p:nvSpPr>
+        <p:spPr>
+          <a:xfrm>
+            <a:off x="255016" y="6565900"/>
+            <a:ext cx="3108960" cy="255016"/>
+          </a:xfrm>
+          <a:prstGeom prst="rect">
+            <a:avLst/>
+          </a:prstGeom>
+          <a:noFill/>
+        </p:spPr>
+        <p:txBody>
+          <a:bodyPr wrap="none" lIns="0" tIns="0" rIns="0" bIns="0" anchor="ctr"/>
+          <a:lstStyle/>
+          <a:p>
+            <a:pPr algn="l"/>
+            <a:fld id="{562959d6-ef5e-4a9e-af27-b616b9d5d687}" type="datetime3">
+              <a:rPr lang="en-GB" sz="1000" dirty="0">
+                <a:solidFill>
+                  <a:srgbClr val="C4A35A"/>
+                </a:solidFill>
+                <a:latin typeface="Calibri"/>
+              </a:rPr>
+              <a:t>7 September 2026</a:t>
+            </a:fld>
+            <a:endParaRPr lang="en-GB" sz="1000"/>
+          </a:p>
+        </p:txBody>
+      </p:sp>
+      <p:sp>
+        <p:nvSpPr>
+          <p:cNvPr id="5027" name="Automatic Slide Number 27"/>
+          <p:cNvSpPr txBox="1"/>
+          <p:nvPr/>
+        </p:nvSpPr>
+        <p:spPr>
+          <a:xfrm>
+            <a:off x="9601200" y="6565900"/>
+            <a:ext cx="2286000" cy="255016"/>
+          </a:xfrm>
+          <a:prstGeom prst="rect">
+            <a:avLst/>
+          </a:prstGeom>
+          <a:noFill/>
+        </p:spPr>
+        <p:txBody>
+          <a:bodyPr wrap="none" lIns="0" tIns="0" rIns="0" bIns="0" anchor="ctr"/>
+          <a:lstStyle/>
+          <a:p>
+            <a:pPr algn="r"/>
+            <a:fld id="{d83c6a4c-5d4d-4e13-9e3e-6fce3b0005ec}" type="slidenum">
+              <a:rPr lang="en-GB" sz="1000" dirty="0">
+                <a:solidFill>
+                  <a:srgbClr val="C4A35A"/>
+                </a:solidFill>
+                <a:latin typeface="Calibri"/>
+              </a:rPr>
+              <a:t>27</a:t>
+            </a:fld>
+            <a:r>
+              <a:rPr lang="en-GB" sz="1000">
+                <a:solidFill>
+                  <a:srgbClr val="C4A35A"/>
+                </a:solidFill>
+                <a:latin typeface="Calibri"/>
+              </a:rPr>
+              <a:t> / 29</a:t>
+            </a:r>
+            <a:endParaRPr lang="en-GB" sz="1000"/>
+          </a:p>
+        </p:txBody>
+      </p:sp>
+    </p:spTree>
+  </p:cSld>
+  <p:clrMapOvr>
+    <a:masterClrMapping/>
+  </p:clrMapOvr>
+  <p:hf sldNum="1" hdr="0" ftr="1" dt="1"/>
+</p:sld>
+</file>
+
+<file path=ppt/slides/slide28.xml><?xml version="1.0" encoding="utf-8"?>
+<p:sld xmlns:a="http://schemas.openxmlformats.org/drawingml/2006/main" xmlns:p="http://schemas.openxmlformats.org/presentationml/2006/main" xmlns:r="http://schemas.openxmlformats.org/officeDocument/2006/relationships">
+  <p:cSld>
+    <p:spTree>
+      <p:nvGrpSpPr>
+        <p:cNvPr id="1" name=""/>
+        <p:cNvGrpSpPr/>
+        <p:nvPr/>
+      </p:nvGrpSpPr>
+      <p:grpSpPr/>
+      <p:sp>
+        <p:nvSpPr>
+          <p:cNvPr id="2" name="Rectangle 1"/>
+          <p:cNvSpPr/>
+          <p:nvPr/>
+        </p:nvSpPr>
+        <p:spPr>
+          <a:xfrm>
+            <a:off x="0" y="0"/>
+            <a:ext cx="12191695" cy="658368"/>
+          </a:xfrm>
+          <a:prstGeom prst="rect">
+            <a:avLst/>
+          </a:prstGeom>
+          <a:solidFill>
+            <a:srgbClr val="7C1D2E"/>
+          </a:solidFill>
+          <a:ln>
+            <a:noFill/>
+          </a:ln>
+        </p:spPr>
+        <p:style>
+          <a:lnRef idx="1">
+            <a:schemeClr val="accent1"/>
+          </a:lnRef>
+          <a:fillRef idx="3">
+            <a:schemeClr val="accent1"/>
+          </a:fillRef>
+          <a:effectRef idx="2">
+            <a:schemeClr val="accent1"/>
+          </a:effectRef>
+          <a:fontRef idx="minor">
+            <a:schemeClr val="lt1"/>
+          </a:fontRef>
+        </p:style>
+        <p:txBody>
+          <a:bodyPr rtlCol="0" anchor="ctr"/>
+          <a:lstStyle/>
+          <a:p>
+            <a:pPr algn="ctr"/>
+          </a:p>
+        </p:txBody>
+      </p:sp>
+      <p:sp>
+        <p:nvSpPr>
+          <p:cNvPr id="3" name="Rectangle 2"/>
+          <p:cNvSpPr/>
+          <p:nvPr/>
+        </p:nvSpPr>
+        <p:spPr>
+          <a:xfrm>
+            <a:off x="0" y="658368"/>
+            <a:ext cx="12191695" cy="54864"/>
+          </a:xfrm>
+          <a:prstGeom prst="rect">
+            <a:avLst/>
+          </a:prstGeom>
+          <a:solidFill>
+            <a:srgbClr val="C4A35A"/>
+          </a:solidFill>
+          <a:ln>
+            <a:noFill/>
+          </a:ln>
+        </p:spPr>
+        <p:style>
+          <a:lnRef idx="1">
+            <a:schemeClr val="accent1"/>
+          </a:lnRef>
+          <a:fillRef idx="3">
+            <a:schemeClr val="accent1"/>
+          </a:fillRef>
+          <a:effectRef idx="2">
+            <a:schemeClr val="accent1"/>
+          </a:effectRef>
+          <a:fontRef idx="minor">
+            <a:schemeClr val="lt1"/>
+          </a:fontRef>
+        </p:style>
+        <p:txBody>
+          <a:bodyPr rtlCol="0" anchor="ctr"/>
+          <a:lstStyle/>
+          <a:p>
+            <a:pPr algn="ctr"/>
+          </a:p>
+        </p:txBody>
+      </p:sp>
+      <p:sp>
+        <p:nvSpPr>
+          <p:cNvPr id="4" name="Rectangle 3"/>
+          <p:cNvSpPr/>
+          <p:nvPr/>
+        </p:nvSpPr>
+        <p:spPr>
+          <a:xfrm>
+            <a:off x="0" y="6510528"/>
+            <a:ext cx="12191695" cy="347472"/>
+          </a:xfrm>
+          <a:prstGeom prst="rect">
+            <a:avLst/>
+          </a:prstGeom>
+          <a:solidFill>
+            <a:srgbClr val="7C1D2E"/>
+          </a:solidFill>
+          <a:ln>
+            <a:noFill/>
+          </a:ln>
+        </p:spPr>
+        <p:style>
+          <a:lnRef idx="1">
+            <a:schemeClr val="accent1"/>
+          </a:lnRef>
+          <a:fillRef idx="3">
+            <a:schemeClr val="accent1"/>
+          </a:fillRef>
+          <a:effectRef idx="2">
+            <a:schemeClr val="accent1"/>
+          </a:effectRef>
+          <a:fontRef idx="minor">
+            <a:schemeClr val="lt1"/>
+          </a:fontRef>
+        </p:style>
+        <p:txBody>
+          <a:bodyPr rtlCol="0" anchor="ctr"/>
+          <a:lstStyle/>
+          <a:p>
+            <a:pPr algn="ctr"/>
+          </a:p>
+        </p:txBody>
+      </p:sp>
+      <p:sp>
+        <p:nvSpPr>
+          <p:cNvPr id="5" name="TextBox 4"/>
+          <p:cNvSpPr txBox="1"/>
+          <p:nvPr/>
+        </p:nvSpPr>
+        <p:spPr>
+          <a:xfrm>
+            <a:off x="292608" y="73152"/>
+            <a:ext cx="11521440" cy="292608"/>
+          </a:xfrm>
+          <a:prstGeom prst="rect">
+            <a:avLst/>
+          </a:prstGeom>
+          <a:noFill/>
+        </p:spPr>
+        <p:txBody>
+          <a:bodyPr wrap="square">
+            <a:spAutoFit/>
+          </a:bodyPr>
+          <a:lstStyle/>
+          <a:p>
+            <a:pPr algn="l"/>
+            <a:r>
+              <a:rPr sz="1300" b="1">
+                <a:solidFill>
+                  <a:srgbClr val="FFFFFF"/>
+                </a:solidFill>
+                <a:latin typeface="Calibri"/>
+              </a:rPr>
+              <a:t>M. S. RAMAIAH UNIVERSITY OF APPLIED SCIENCES</a:t>
+            </a:r>
+          </a:p>
+        </p:txBody>
+      </p:sp>
+      <p:sp>
+        <p:nvSpPr>
+          <p:cNvPr id="6" name="TextBox 5"/>
+          <p:cNvSpPr txBox="1"/>
+          <p:nvPr/>
+        </p:nvSpPr>
+        <p:spPr>
+          <a:xfrm>
+            <a:off x="292608" y="347472"/>
+            <a:ext cx="11521440" cy="256032"/>
+          </a:xfrm>
+          <a:prstGeom prst="rect">
+            <a:avLst/>
+          </a:prstGeom>
+          <a:noFill/>
+        </p:spPr>
+        <p:txBody>
+          <a:bodyPr wrap="square">
+            <a:spAutoFit/>
+          </a:bodyPr>
+          <a:lstStyle/>
+          <a:p>
+            <a:pPr algn="l"/>
+            <a:r>
+              <a:rPr sz="1100" b="0">
+                <a:solidFill>
+                  <a:srgbClr val="C4A35A"/>
+                </a:solidFill>
+                <a:latin typeface="Calibri"/>
+              </a:rPr>
+              <a:t>Faculty of Engineering and Technology  ·  RESEARCH PROPOSAL</a:t>
+            </a:r>
+          </a:p>
+        </p:txBody>
+      </p:sp>
+      <p:sp>
+        <p:nvSpPr>
+          <p:cNvPr id="7" name="TextBox 6"/>
+          <p:cNvSpPr txBox="1"/>
+          <p:nvPr/>
+        </p:nvSpPr>
+        <p:spPr>
+          <a:xfrm>
+            <a:off x="3383280" y="6565392"/>
+            <a:ext cx="5760720" cy="237744"/>
+          </a:xfrm>
+          <a:prstGeom prst="rect">
+            <a:avLst/>
+          </a:prstGeom>
+          <a:noFill/>
+        </p:spPr>
+        <p:txBody>
+          <a:bodyPr wrap="square">
+            <a:spAutoFit/>
+          </a:bodyPr>
+          <a:lstStyle/>
+          <a:p>
+            <a:pPr algn="ctr"/>
+            <a:r>
+              <a:rPr sz="1000" b="0">
+                <a:solidFill>
+                  <a:srgbClr val="FFFFFF"/>
+                </a:solidFill>
+                <a:latin typeface="Calibri"/>
+              </a:rPr>
+              <a:t>Jenisha T  |  24ETRP720001  |  Part Time</a:t>
+            </a:r>
+          </a:p>
+        </p:txBody>
+      </p:sp>
+      <p:sp>
+        <p:nvSpPr>
+          <p:cNvPr id="8" name="Rectangle 7"/>
+          <p:cNvSpPr/>
+          <p:nvPr/>
+        </p:nvSpPr>
+        <p:spPr>
+          <a:xfrm>
+            <a:off x="0" y="713232"/>
+            <a:ext cx="12191695" cy="5797296"/>
+          </a:xfrm>
+          <a:prstGeom prst="rect">
+            <a:avLst/>
+          </a:prstGeom>
+          <a:solidFill>
+            <a:srgbClr val="FFFAF3"/>
+          </a:solidFill>
+          <a:ln>
+            <a:noFill/>
+          </a:ln>
+        </p:spPr>
+        <p:style>
+          <a:lnRef idx="1">
+            <a:schemeClr val="accent1"/>
+          </a:lnRef>
+          <a:fillRef idx="3">
+            <a:schemeClr val="accent1"/>
+          </a:fillRef>
+          <a:effectRef idx="2">
+            <a:schemeClr val="accent1"/>
+          </a:effectRef>
+          <a:fontRef idx="minor">
+            <a:schemeClr val="lt1"/>
+          </a:fontRef>
+        </p:style>
+        <p:txBody>
+          <a:bodyPr rtlCol="0" anchor="ctr"/>
+          <a:lstStyle/>
+          <a:p>
+            <a:pPr algn="ctr"/>
+          </a:p>
+        </p:txBody>
+      </p:sp>
+      <p:sp>
+        <p:nvSpPr>
+          <p:cNvPr id="9" name="TextBox 8"/>
+          <p:cNvSpPr txBox="1"/>
+          <p:nvPr/>
+        </p:nvSpPr>
+        <p:spPr>
+          <a:xfrm>
+            <a:off x="365760" y="804672"/>
+            <a:ext cx="11430000" cy="237744"/>
+          </a:xfrm>
+          <a:prstGeom prst="rect">
+            <a:avLst/>
+          </a:prstGeom>
+          <a:noFill/>
+        </p:spPr>
+        <p:txBody>
+          <a:bodyPr wrap="square">
+            <a:spAutoFit/>
+          </a:bodyPr>
+          <a:lstStyle/>
+          <a:p>
+            <a:pPr algn="l"/>
+            <a:r>
+              <a:rPr sz="1100" b="1">
+                <a:solidFill>
+                  <a:srgbClr val="7C1D2E"/>
+                </a:solidFill>
+                <a:latin typeface="Calibri"/>
+              </a:rPr>
+              <a:t>RESEARCH PROPOSAL  ·  References 3/3</a:t>
+            </a:r>
+          </a:p>
+        </p:txBody>
+      </p:sp>
+      <p:sp>
+        <p:nvSpPr>
+          <p:cNvPr id="10" name="TextBox 9"/>
+          <p:cNvSpPr txBox="1"/>
+          <p:nvPr/>
+        </p:nvSpPr>
+        <p:spPr>
+          <a:xfrm>
+            <a:off x="365760" y="1024128"/>
+            <a:ext cx="11430000" cy="502920"/>
+          </a:xfrm>
+          <a:prstGeom prst="rect">
+            <a:avLst/>
+          </a:prstGeom>
+          <a:noFill/>
+        </p:spPr>
+        <p:txBody>
+          <a:bodyPr wrap="square">
+            <a:spAutoFit/>
+          </a:bodyPr>
+          <a:lstStyle/>
+          <a:p>
+            <a:pPr algn="l"/>
+            <a:r>
+              <a:rPr sz="2200" b="1">
+                <a:solidFill>
+                  <a:srgbClr val="1A1214"/>
+                </a:solidFill>
+                <a:latin typeface="Calibri"/>
+              </a:rPr>
+              <a:t>References (3/3) — memory, tools, Indian agricultural data</a:t>
+            </a:r>
+          </a:p>
+        </p:txBody>
+      </p:sp>
+      <p:sp>
+        <p:nvSpPr>
+          <p:cNvPr id="11" name="TextBox 10"/>
+          <p:cNvSpPr txBox="1"/>
+          <p:nvPr/>
+        </p:nvSpPr>
+        <p:spPr>
+          <a:xfrm>
+            <a:off x="365760" y="1572768"/>
+            <a:ext cx="11430000" cy="3977639"/>
+          </a:xfrm>
+          <a:prstGeom prst="rect">
+            <a:avLst/>
+          </a:prstGeom>
+          <a:noFill/>
+        </p:spPr>
+        <p:txBody>
+          <a:bodyPr wrap="square">
+            <a:spAutoFit/>
+          </a:bodyPr>
+          <a:lstStyle/>
+          <a:p>
+            <a:pPr>
+              <a:spcAft>
+                <a:spcPts val="600"/>
+              </a:spcAft>
+              <a:buFont typeface="Arial"/>
+              <a:buChar char="•"/>
+            </a:pPr>
+            <a:r>
+              <a:rPr sz="1300">
+                <a:solidFill>
+                  <a:srgbClr val="1A1214"/>
+                </a:solidFill>
+                <a:latin typeface="Calibri"/>
+              </a:rPr>
+              <a:t>Park, J. S., O’Brien, J. C., Cai, C. J., Morris, M. R., Liang, P., and Bernstein, M. S. Generative Agents: Interactive Simulacra of Human Behavior. CHI 2023.</a:t>
+            </a:r>
+          </a:p>
+          <a:p>
+            <a:pPr>
+              <a:spcAft>
+                <a:spcPts val="600"/>
+              </a:spcAft>
+              <a:buFont typeface="Arial"/>
+              <a:buChar char="•"/>
+            </a:pPr>
+            <a:r>
+              <a:rPr sz="1300">
+                <a:solidFill>
+                  <a:srgbClr val="1A1214"/>
+                </a:solidFill>
+                <a:latin typeface="Calibri"/>
+              </a:rPr>
+              <a:t>Shinn, N., Cassano, F., Berman, E., Gopinath, A., Narasimhan, K., and Yao, S. Reflexion: Language Agents with Verbal Reinforcement Learning. NeurIPS 2023.</a:t>
+            </a:r>
+          </a:p>
+          <a:p>
+            <a:pPr>
+              <a:spcAft>
+                <a:spcPts val="600"/>
+              </a:spcAft>
+              <a:buFont typeface="Arial"/>
+              <a:buChar char="•"/>
+            </a:pPr>
+            <a:r>
+              <a:rPr sz="1300">
+                <a:solidFill>
+                  <a:srgbClr val="1A1214"/>
+                </a:solidFill>
+                <a:latin typeface="Calibri"/>
+              </a:rPr>
+              <a:t>Shen, Y., Song, K., Tan, X., Li, D., Lu, W., and Zhuang, Y. HuggingGPT: Solving AI Tasks with ChatGPT and its Friends in Hugging Face. NeurIPS 2023.</a:t>
+            </a:r>
+          </a:p>
+          <a:p>
+            <a:pPr>
+              <a:spcAft>
+                <a:spcPts val="600"/>
+              </a:spcAft>
+              <a:buFont typeface="Arial"/>
+              <a:buChar char="•"/>
+            </a:pPr>
+            <a:r>
+              <a:rPr sz="1300">
+                <a:solidFill>
+                  <a:srgbClr val="1A1214"/>
+                </a:solidFill>
+                <a:latin typeface="Calibri"/>
+              </a:rPr>
+              <a:t>Schick, T., Dwivedi-Yu, J., Dessì, R., Raileanu, R., Lomeli, M., Zettlemoyer, L., Cancedda, N., and Scialom, T. Toolformer: Language Models Can Teach Themselves to Use Tools. NeurIPS 2023.</a:t>
+            </a:r>
+          </a:p>
+          <a:p>
+            <a:pPr>
+              <a:spcAft>
+                <a:spcPts val="600"/>
+              </a:spcAft>
+              <a:buFont typeface="Arial"/>
+              <a:buChar char="•"/>
+            </a:pPr>
+            <a:r>
+              <a:rPr sz="1300">
+                <a:solidFill>
+                  <a:srgbClr val="1A1214"/>
+                </a:solidFill>
+                <a:latin typeface="Calibri"/>
+              </a:rPr>
+              <a:t>Guo, H., Woodruff, A., and Yadav, A. Improving Lives of Indebted Farmers Using Deep Learning: Predicting Agricultural Produce Prices Using Convolutional Neural Networks (PECAD). AAAI 2020. doi:10.1609/aaai.v34i08.7039. AGMARKNET scrape for price prediction; cited here as Indian OGD precedent, not as a baseline this proposal claims to beat.</a:t>
+            </a:r>
+          </a:p>
+          <a:p>
+            <a:pPr>
+              <a:spcAft>
+                <a:spcPts val="600"/>
+              </a:spcAft>
+              <a:buFont typeface="Arial"/>
+              <a:buChar char="•"/>
+            </a:pPr>
+            <a:r>
+              <a:rPr sz="1300">
+                <a:solidFill>
+                  <a:srgbClr val="1A1214"/>
+                </a:solidFill>
+                <a:latin typeface="Calibri"/>
+              </a:rPr>
+              <a:t>Government of India. Open Government Data Platform India (data.gov.in); AGMARKNET resource 9ef84268-d588-465a-a308-a864a43d0070; Directorate of Economics and Statistics crop production; IMD rainfall series; Government Open Data License — India (GODL-India).</a:t>
+            </a:r>
+          </a:p>
+        </p:txBody>
+      </p:sp>
+      <p:sp>
+        <p:nvSpPr>
+          <p:cNvPr id="12" name="TextBox 11"/>
+          <p:cNvSpPr txBox="1"/>
+          <p:nvPr/>
+        </p:nvSpPr>
+        <p:spPr>
+          <a:xfrm>
+            <a:off x="365760" y="6199632"/>
+            <a:ext cx="11430000" cy="256032"/>
+          </a:xfrm>
+          <a:prstGeom prst="rect">
+            <a:avLst/>
+          </a:prstGeom>
+          <a:noFill/>
+        </p:spPr>
+        <p:txBody>
+          <a:bodyPr wrap="square">
+            <a:spAutoFit/>
+          </a:bodyPr>
+          <a:lstStyle/>
+          <a:p>
+            <a:pPr algn="l"/>
+            <a:r>
+              <a:rPr sz="1000" b="0">
+                <a:solidFill>
+                  <a:srgbClr val="5C4A4E"/>
+                </a:solidFill>
+                <a:latin typeface="Calibri"/>
+              </a:rPr>
+              <a:t>CrewAI is an engineering framework without a flagship peer-reviewed paper in this list; AutoGen and MetaGPT are the MAS citations.</a:t>
+            </a:r>
+          </a:p>
+        </p:txBody>
+      </p:sp>
+      <p:sp>
+        <p:nvSpPr>
+          <p:cNvPr id="4028" name="Automatic Date 28"/>
+          <p:cNvSpPr txBox="1"/>
+          <p:nvPr/>
+        </p:nvSpPr>
+        <p:spPr>
+          <a:xfrm>
+            <a:off x="255016" y="6565900"/>
+            <a:ext cx="3108960" cy="255016"/>
+          </a:xfrm>
+          <a:prstGeom prst="rect">
+            <a:avLst/>
+          </a:prstGeom>
+          <a:noFill/>
+        </p:spPr>
+        <p:txBody>
+          <a:bodyPr wrap="none" lIns="0" tIns="0" rIns="0" bIns="0" anchor="ctr"/>
+          <a:lstStyle/>
+          <a:p>
+            <a:pPr algn="l"/>
+            <a:fld id="{95b8df89-af37-4df7-8146-f0d9e9d8bae4}" type="datetime3">
+              <a:rPr lang="en-GB" sz="1000" dirty="0">
+                <a:solidFill>
+                  <a:srgbClr val="C4A35A"/>
+                </a:solidFill>
+                <a:latin typeface="Calibri"/>
+              </a:rPr>
+              <a:t>7 September 2026</a:t>
+            </a:fld>
+            <a:endParaRPr lang="en-GB" sz="1000"/>
+          </a:p>
+        </p:txBody>
+      </p:sp>
+      <p:sp>
+        <p:nvSpPr>
+          <p:cNvPr id="5028" name="Automatic Slide Number 28"/>
+          <p:cNvSpPr txBox="1"/>
+          <p:nvPr/>
+        </p:nvSpPr>
+        <p:spPr>
+          <a:xfrm>
+            <a:off x="9601200" y="6565900"/>
+            <a:ext cx="2286000" cy="255016"/>
+          </a:xfrm>
+          <a:prstGeom prst="rect">
+            <a:avLst/>
+          </a:prstGeom>
+          <a:noFill/>
+        </p:spPr>
+        <p:txBody>
+          <a:bodyPr wrap="none" lIns="0" tIns="0" rIns="0" bIns="0" anchor="ctr"/>
+          <a:lstStyle/>
+          <a:p>
+            <a:pPr algn="r"/>
+            <a:fld id="{cb08ca71-0ebf-4857-8a68-891e08413128}" type="slidenum">
+              <a:rPr lang="en-GB" sz="1000" dirty="0">
+                <a:solidFill>
+                  <a:srgbClr val="C4A35A"/>
+                </a:solidFill>
+                <a:latin typeface="Calibri"/>
+              </a:rPr>
+              <a:t>28</a:t>
+            </a:fld>
+            <a:r>
+              <a:rPr lang="en-GB" sz="1000">
+                <a:solidFill>
+                  <a:srgbClr val="C4A35A"/>
+                </a:solidFill>
+                <a:latin typeface="Calibri"/>
+              </a:rPr>
+              <a:t> / 29</a:t>
+            </a:r>
+            <a:endParaRPr lang="en-GB" sz="1000"/>
+          </a:p>
+        </p:txBody>
+      </p:sp>
+    </p:spTree>
+  </p:cSld>
+  <p:clrMapOvr>
+    <a:masterClrMapping/>
+  </p:clrMapOvr>
+  <p:hf sldNum="1" hdr="0" ftr="1" dt="1"/>
+</p:sld>
+</file>
+
+<file path=ppt/slides/slide29.xml><?xml version="1.0" encoding="utf-8"?>
+<p:sld xmlns:a="http://schemas.openxmlformats.org/drawingml/2006/main" xmlns:p="http://schemas.openxmlformats.org/presentationml/2006/main" xmlns:r="http://schemas.openxmlformats.org/officeDocument/2006/relationships">
+  <p:cSld>
+    <p:spTree>
+      <p:nvGrpSpPr>
+        <p:cNvPr id="1" name=""/>
+        <p:cNvGrpSpPr/>
+        <p:nvPr/>
+      </p:nvGrpSpPr>
+      <p:grpSpPr/>
+      <p:sp>
+        <p:nvSpPr>
+          <p:cNvPr id="2" name="Rectangle 1"/>
+          <p:cNvSpPr/>
+          <p:nvPr/>
+        </p:nvSpPr>
+        <p:spPr>
+          <a:xfrm>
+            <a:off x="0" y="0"/>
+            <a:ext cx="12191695" cy="658368"/>
+          </a:xfrm>
+          <a:prstGeom prst="rect">
+            <a:avLst/>
+          </a:prstGeom>
+          <a:solidFill>
+            <a:srgbClr val="7C1D2E"/>
+          </a:solidFill>
+          <a:ln>
+            <a:noFill/>
+          </a:ln>
+        </p:spPr>
+        <p:style>
+          <a:lnRef idx="1">
+            <a:schemeClr val="accent1"/>
+          </a:lnRef>
+          <a:fillRef idx="3">
+            <a:schemeClr val="accent1"/>
+          </a:fillRef>
+          <a:effectRef idx="2">
+            <a:schemeClr val="accent1"/>
+          </a:effectRef>
+          <a:fontRef idx="minor">
+            <a:schemeClr val="lt1"/>
+          </a:fontRef>
+        </p:style>
+        <p:txBody>
+          <a:bodyPr rtlCol="0" anchor="ctr"/>
+          <a:lstStyle/>
+          <a:p>
+            <a:pPr algn="ctr"/>
+          </a:p>
+        </p:txBody>
+      </p:sp>
+      <p:sp>
+        <p:nvSpPr>
+          <p:cNvPr id="3" name="Rectangle 2"/>
+          <p:cNvSpPr/>
+          <p:nvPr/>
+        </p:nvSpPr>
+        <p:spPr>
+          <a:xfrm>
+            <a:off x="0" y="658368"/>
+            <a:ext cx="12191695" cy="54864"/>
+          </a:xfrm>
+          <a:prstGeom prst="rect">
+            <a:avLst/>
+          </a:prstGeom>
+          <a:solidFill>
+            <a:srgbClr val="C4A35A"/>
+          </a:solidFill>
+          <a:ln>
+            <a:noFill/>
+          </a:ln>
+        </p:spPr>
+        <p:style>
+          <a:lnRef idx="1">
+            <a:schemeClr val="accent1"/>
+          </a:lnRef>
+          <a:fillRef idx="3">
+            <a:schemeClr val="accent1"/>
+          </a:fillRef>
+          <a:effectRef idx="2">
+            <a:schemeClr val="accent1"/>
+          </a:effectRef>
+          <a:fontRef idx="minor">
+            <a:schemeClr val="lt1"/>
+          </a:fontRef>
+        </p:style>
+        <p:txBody>
+          <a:bodyPr rtlCol="0" anchor="ctr"/>
+          <a:lstStyle/>
+          <a:p>
+            <a:pPr algn="ctr"/>
+          </a:p>
+        </p:txBody>
+      </p:sp>
+      <p:sp>
+        <p:nvSpPr>
+          <p:cNvPr id="4" name="Rectangle 3"/>
+          <p:cNvSpPr/>
+          <p:nvPr/>
+        </p:nvSpPr>
+        <p:spPr>
+          <a:xfrm>
+            <a:off x="0" y="6510528"/>
+            <a:ext cx="12191695" cy="347472"/>
+          </a:xfrm>
+          <a:prstGeom prst="rect">
+            <a:avLst/>
+          </a:prstGeom>
+          <a:solidFill>
+            <a:srgbClr val="7C1D2E"/>
+          </a:solidFill>
+          <a:ln>
+            <a:noFill/>
+          </a:ln>
+        </p:spPr>
+        <p:style>
+          <a:lnRef idx="1">
+            <a:schemeClr val="accent1"/>
+          </a:lnRef>
+          <a:fillRef idx="3">
+            <a:schemeClr val="accent1"/>
+          </a:fillRef>
+          <a:effectRef idx="2">
+            <a:schemeClr val="accent1"/>
+          </a:effectRef>
+          <a:fontRef idx="minor">
+            <a:schemeClr val="lt1"/>
+          </a:fontRef>
+        </p:style>
+        <p:txBody>
+          <a:bodyPr rtlCol="0" anchor="ctr"/>
+          <a:lstStyle/>
+          <a:p>
+            <a:pPr algn="ctr"/>
+          </a:p>
+        </p:txBody>
+      </p:sp>
+      <p:sp>
+        <p:nvSpPr>
+          <p:cNvPr id="5" name="TextBox 4"/>
+          <p:cNvSpPr txBox="1"/>
+          <p:nvPr/>
+        </p:nvSpPr>
+        <p:spPr>
+          <a:xfrm>
+            <a:off x="292608" y="73152"/>
+            <a:ext cx="11521440" cy="292608"/>
+          </a:xfrm>
+          <a:prstGeom prst="rect">
+            <a:avLst/>
+          </a:prstGeom>
+          <a:noFill/>
+        </p:spPr>
+        <p:txBody>
+          <a:bodyPr wrap="square">
+            <a:spAutoFit/>
+          </a:bodyPr>
+          <a:lstStyle/>
+          <a:p>
+            <a:pPr algn="l"/>
+            <a:r>
+              <a:rPr sz="1300" b="1">
+                <a:solidFill>
+                  <a:srgbClr val="FFFFFF"/>
+                </a:solidFill>
+                <a:latin typeface="Calibri"/>
+              </a:rPr>
+              <a:t>M. S. RAMAIAH UNIVERSITY OF APPLIED SCIENCES</a:t>
+            </a:r>
+          </a:p>
+        </p:txBody>
+      </p:sp>
+      <p:sp>
+        <p:nvSpPr>
+          <p:cNvPr id="6" name="TextBox 5"/>
+          <p:cNvSpPr txBox="1"/>
+          <p:nvPr/>
+        </p:nvSpPr>
+        <p:spPr>
+          <a:xfrm>
+            <a:off x="292608" y="347472"/>
+            <a:ext cx="11521440" cy="256032"/>
+          </a:xfrm>
+          <a:prstGeom prst="rect">
+            <a:avLst/>
+          </a:prstGeom>
+          <a:noFill/>
+        </p:spPr>
+        <p:txBody>
+          <a:bodyPr wrap="square">
+            <a:spAutoFit/>
+          </a:bodyPr>
+          <a:lstStyle/>
+          <a:p>
+            <a:pPr algn="l"/>
+            <a:r>
+              <a:rPr sz="1100" b="0">
+                <a:solidFill>
+                  <a:srgbClr val="C4A35A"/>
+                </a:solidFill>
+                <a:latin typeface="Calibri"/>
+              </a:rPr>
+              <a:t>Faculty of Engineering and Technology  ·  RESEARCH PROPOSAL</a:t>
+            </a:r>
+          </a:p>
+        </p:txBody>
+      </p:sp>
+      <p:sp>
+        <p:nvSpPr>
+          <p:cNvPr id="7" name="TextBox 6"/>
+          <p:cNvSpPr txBox="1"/>
+          <p:nvPr/>
+        </p:nvSpPr>
+        <p:spPr>
+          <a:xfrm>
+            <a:off x="3383280" y="6565392"/>
+            <a:ext cx="5760720" cy="237744"/>
+          </a:xfrm>
+          <a:prstGeom prst="rect">
+            <a:avLst/>
+          </a:prstGeom>
+          <a:noFill/>
+        </p:spPr>
+        <p:txBody>
+          <a:bodyPr wrap="square">
+            <a:spAutoFit/>
+          </a:bodyPr>
+          <a:lstStyle/>
+          <a:p>
+            <a:pPr algn="ctr"/>
+            <a:r>
+              <a:rPr sz="1000" b="0">
+                <a:solidFill>
+                  <a:srgbClr val="FFFFFF"/>
+                </a:solidFill>
+                <a:latin typeface="Calibri"/>
+              </a:rPr>
+              <a:t>Jenisha T  |  24ETRP720001  |  Part Time</a:t>
+            </a:r>
+          </a:p>
+        </p:txBody>
+      </p:sp>
+      <p:sp>
+        <p:nvSpPr>
+          <p:cNvPr id="8" name="Rectangle 7"/>
+          <p:cNvSpPr/>
+          <p:nvPr/>
+        </p:nvSpPr>
+        <p:spPr>
+          <a:xfrm>
+            <a:off x="0" y="713232"/>
+            <a:ext cx="12191695" cy="5797296"/>
+          </a:xfrm>
+          <a:prstGeom prst="rect">
+            <a:avLst/>
+          </a:prstGeom>
+          <a:solidFill>
+            <a:srgbClr val="FFFAF3"/>
+          </a:solidFill>
+          <a:ln>
+            <a:noFill/>
+          </a:ln>
+        </p:spPr>
+        <p:style>
+          <a:lnRef idx="1">
+            <a:schemeClr val="accent1"/>
+          </a:lnRef>
+          <a:fillRef idx="3">
+            <a:schemeClr val="accent1"/>
+          </a:fillRef>
+          <a:effectRef idx="2">
+            <a:schemeClr val="accent1"/>
+          </a:effectRef>
+          <a:fontRef idx="minor">
+            <a:schemeClr val="lt1"/>
+          </a:fontRef>
+        </p:style>
+        <p:txBody>
+          <a:bodyPr rtlCol="0" anchor="ctr"/>
+          <a:lstStyle/>
+          <a:p>
+            <a:pPr algn="ctr"/>
+          </a:p>
+        </p:txBody>
+      </p:sp>
+      <p:sp>
+        <p:nvSpPr>
+          <p:cNvPr id="9" name="TextBox 8"/>
+          <p:cNvSpPr txBox="1"/>
+          <p:nvPr/>
+        </p:nvSpPr>
+        <p:spPr>
+          <a:xfrm>
+            <a:off x="365760" y="804672"/>
+            <a:ext cx="11430000" cy="237744"/>
+          </a:xfrm>
+          <a:prstGeom prst="rect">
+            <a:avLst/>
+          </a:prstGeom>
+          <a:noFill/>
+        </p:spPr>
+        <p:txBody>
+          <a:bodyPr wrap="square">
+            <a:spAutoFit/>
+          </a:bodyPr>
+          <a:lstStyle/>
+          <a:p>
+            <a:pPr algn="l"/>
+            <a:r>
+              <a:rPr sz="1100" b="1">
+                <a:solidFill>
+                  <a:srgbClr val="7C1D2E"/>
+                </a:solidFill>
+                <a:latin typeface="Calibri"/>
+              </a:rPr>
+              <a:t>RESEARCH PROPOSAL  ·  Thank you</a:t>
+            </a:r>
+          </a:p>
+        </p:txBody>
+      </p:sp>
+      <p:sp>
+        <p:nvSpPr>
+          <p:cNvPr id="10" name="TextBox 9"/>
+          <p:cNvSpPr txBox="1"/>
+          <p:nvPr/>
+        </p:nvSpPr>
+        <p:spPr>
+          <a:xfrm>
+            <a:off x="365760" y="1024128"/>
+            <a:ext cx="11430000" cy="502920"/>
+          </a:xfrm>
+          <a:prstGeom prst="rect">
+            <a:avLst/>
+          </a:prstGeom>
+          <a:noFill/>
+        </p:spPr>
+        <p:txBody>
+          <a:bodyPr wrap="square">
+            <a:spAutoFit/>
+          </a:bodyPr>
+          <a:lstStyle/>
+          <a:p>
+            <a:pPr algn="l"/>
+            <a:r>
+              <a:rPr sz="2200" b="1">
+                <a:solidFill>
+                  <a:srgbClr val="1A1214"/>
+                </a:solidFill>
+                <a:latin typeface="Calibri"/>
+              </a:rPr>
+              <a:t>Thank you</a:t>
+            </a:r>
+          </a:p>
+        </p:txBody>
+      </p:sp>
+      <p:sp>
+        <p:nvSpPr>
+          <p:cNvPr id="11" name="TextBox 10"/>
+          <p:cNvSpPr txBox="1"/>
+          <p:nvPr/>
+        </p:nvSpPr>
+        <p:spPr>
+          <a:xfrm>
+            <a:off x="365760" y="1572768"/>
+            <a:ext cx="11430000" cy="640080"/>
+          </a:xfrm>
+          <a:prstGeom prst="rect">
+            <a:avLst/>
+          </a:prstGeom>
+          <a:noFill/>
+        </p:spPr>
+        <p:txBody>
+          <a:bodyPr wrap="square">
+            <a:spAutoFit/>
+          </a:bodyPr>
+          <a:lstStyle/>
+          <a:p>
+            <a:pPr algn="l"/>
+            <a:r>
+              <a:rPr sz="1400" b="0">
+                <a:solidFill>
+                  <a:srgbClr val="5C4A4E"/>
+                </a:solidFill>
+                <a:latin typeface="Calibri"/>
+              </a:rPr>
+              <a:t>Adaptive Context Reasoning System — a research programme, not a performance number.</a:t>
+            </a:r>
+          </a:p>
+        </p:txBody>
+      </p:sp>
+      <p:sp>
+        <p:nvSpPr>
+          <p:cNvPr id="12" name="TextBox 11"/>
+          <p:cNvSpPr txBox="1"/>
+          <p:nvPr/>
+        </p:nvSpPr>
+        <p:spPr>
+          <a:xfrm>
+            <a:off x="365760" y="2212848"/>
+            <a:ext cx="11430000" cy="3977639"/>
+          </a:xfrm>
+          <a:prstGeom prst="rect">
+            <a:avLst/>
+          </a:prstGeom>
+          <a:noFill/>
+        </p:spPr>
+        <p:txBody>
+          <a:bodyPr wrap="square">
+            <a:spAutoFit/>
+          </a:bodyPr>
+          <a:lstStyle/>
+          <a:p>
+            <a:pPr>
+              <a:spcAft>
+                <a:spcPts val="600"/>
+              </a:spcAft>
+              <a:buFont typeface="Arial"/>
+              <a:buChar char="•"/>
+            </a:pPr>
+            <a:r>
+              <a:rPr sz="1300">
+                <a:solidFill>
+                  <a:srgbClr val="1A1214"/>
+                </a:solidFill>
+                <a:latin typeface="Calibri"/>
+              </a:rPr>
+              <a:t>Presented By: Jenisha T</a:t>
+            </a:r>
+          </a:p>
+          <a:p>
+            <a:pPr>
+              <a:spcAft>
+                <a:spcPts val="600"/>
+              </a:spcAft>
+              <a:buFont typeface="Arial"/>
+              <a:buChar char="•"/>
+            </a:pPr>
+            <a:r>
+              <a:rPr sz="1300">
+                <a:solidFill>
+                  <a:srgbClr val="1A1214"/>
+                </a:solidFill>
+                <a:latin typeface="Calibri"/>
+              </a:rPr>
+              <a:t>(Reg. No. 24ETRP720001)</a:t>
+            </a:r>
+          </a:p>
+          <a:p>
+            <a:pPr>
+              <a:spcAft>
+                <a:spcPts val="600"/>
+              </a:spcAft>
+              <a:buFont typeface="Arial"/>
+              <a:buChar char="•"/>
+            </a:pPr>
+            <a:r>
+              <a:rPr sz="1300">
+                <a:solidFill>
+                  <a:srgbClr val="1A1214"/>
+                </a:solidFill>
+                <a:latin typeface="Calibri"/>
+              </a:rPr>
+              <a:t>Supervisor: Dr. Jyothi A P</a:t>
+            </a:r>
+          </a:p>
+          <a:p>
+            <a:pPr>
+              <a:spcAft>
+                <a:spcPts val="600"/>
+              </a:spcAft>
+              <a:buFont typeface="Arial"/>
+              <a:buChar char="•"/>
+            </a:pPr>
+            <a:r>
+              <a:rPr sz="1300">
+                <a:solidFill>
+                  <a:srgbClr val="1A1214"/>
+                </a:solidFill>
+                <a:latin typeface="Calibri"/>
+              </a:rPr>
+              <a:t>Department of Computer Science and Engineering</a:t>
+            </a:r>
+          </a:p>
+          <a:p>
+            <a:pPr>
+              <a:spcAft>
+                <a:spcPts val="600"/>
+              </a:spcAft>
+              <a:buFont typeface="Arial"/>
+              <a:buChar char="•"/>
+            </a:pPr>
+            <a:r>
+              <a:rPr sz="1300">
+                <a:solidFill>
+                  <a:srgbClr val="1A1214"/>
+                </a:solidFill>
+                <a:latin typeface="Calibri"/>
+              </a:rPr>
+              <a:t>Faculty of Engineering and Technology, MSRUAS</a:t>
+            </a:r>
+          </a:p>
+          <a:p>
+            <a:pPr>
+              <a:spcAft>
+                <a:spcPts val="600"/>
+              </a:spcAft>
+              <a:buFont typeface="Arial"/>
+              <a:buChar char="•"/>
+            </a:pPr>
+            <a:r>
+              <a:rPr sz="1300">
+                <a:solidFill>
+                  <a:srgbClr val="1A1214"/>
+                </a:solidFill>
+                <a:latin typeface="Calibri"/>
+              </a:rPr>
+              <a:t>jenisha.t@msruas.ac.in</a:t>
+            </a:r>
+          </a:p>
+        </p:txBody>
+      </p:sp>
+      <p:sp>
+        <p:nvSpPr>
+          <p:cNvPr id="4029" name="Automatic Date 29"/>
+          <p:cNvSpPr txBox="1"/>
+          <p:nvPr/>
+        </p:nvSpPr>
+        <p:spPr>
+          <a:xfrm>
+            <a:off x="255016" y="6565900"/>
+            <a:ext cx="3108960" cy="255016"/>
+          </a:xfrm>
+          <a:prstGeom prst="rect">
+            <a:avLst/>
+          </a:prstGeom>
+          <a:noFill/>
+        </p:spPr>
+        <p:txBody>
+          <a:bodyPr wrap="none" lIns="0" tIns="0" rIns="0" bIns="0" anchor="ctr"/>
+          <a:lstStyle/>
+          <a:p>
+            <a:pPr algn="l"/>
+            <a:fld id="{b09ad385-af60-43f0-9156-1f204ce994d0}" type="datetime3">
+              <a:rPr lang="en-GB" sz="1000" dirty="0">
+                <a:solidFill>
+                  <a:srgbClr val="C4A35A"/>
+                </a:solidFill>
+                <a:latin typeface="Calibri"/>
+              </a:rPr>
+              <a:t>7 September 2026</a:t>
+            </a:fld>
+            <a:endParaRPr lang="en-GB" sz="1000"/>
+          </a:p>
+        </p:txBody>
+      </p:sp>
+      <p:sp>
+        <p:nvSpPr>
+          <p:cNvPr id="5029" name="Automatic Slide Number 29"/>
+          <p:cNvSpPr txBox="1"/>
+          <p:nvPr/>
+        </p:nvSpPr>
+        <p:spPr>
+          <a:xfrm>
+            <a:off x="9601200" y="6565900"/>
+            <a:ext cx="2286000" cy="255016"/>
+          </a:xfrm>
+          <a:prstGeom prst="rect">
+            <a:avLst/>
+          </a:prstGeom>
+          <a:noFill/>
+        </p:spPr>
+        <p:txBody>
+          <a:bodyPr wrap="none" lIns="0" tIns="0" rIns="0" bIns="0" anchor="ctr"/>
+          <a:lstStyle/>
+          <a:p>
+            <a:pPr algn="r"/>
+            <a:fld id="{7732671a-b82b-4df5-bb6e-0afebe3b34c3}" type="slidenum">
+              <a:rPr lang="en-GB" sz="1000" dirty="0">
+                <a:solidFill>
+                  <a:srgbClr val="C4A35A"/>
+                </a:solidFill>
+                <a:latin typeface="Calibri"/>
+              </a:rPr>
+              <a:t>29</a:t>
+            </a:fld>
+            <a:r>
+              <a:rPr lang="en-GB" sz="1000">
+                <a:solidFill>
+                  <a:srgbClr val="C4A35A"/>
+                </a:solidFill>
+                <a:latin typeface="Calibri"/>
+              </a:rPr>
+              <a:t> / 29</a:t>
             </a:r>
             <a:endParaRPr lang="en-GB" sz="1000"/>
           </a:p>
@@ -18007,7 +20125,7 @@
                 </a:solidFill>
                 <a:latin typeface="Calibri"/>
               </a:rPr>
-              <a:t>Nine required sections. Research Methodology is expanded for each objective (O1 SATR, O2 APRR, O3 MNCD, O4 FCNP) plus the integrated SATR → APRR → MNCD → FCNP loop. Objective order is SATR → APRR → MNCD → FCNP (not SMART).</a:t>
+              <a:t>Nine required sections. Research Methodology is expanded for each objective (O1 SATR, O2 APRR, O3 MNCD, O4 FCNP), the integrated loop, the exact repository formulas, and two worked traces (ToolBench-schema ranking; live data.gov.in). Objective order is SATR → APRR → MNCD → FCNP (not SMART).</a:t>
             </a:r>
           </a:p>
         </p:txBody>
@@ -18282,6 +20400,60 @@
                 </a:solidFill>
                 <a:latin typeface="Calibri"/>
               </a:rPr>
+              <a:t>08f   Methodology — implementation formulas</a:t>
+            </a:r>
+          </a:p>
+          <a:p>
+            <a:pPr>
+              <a:spcAft>
+                <a:spcPts val="600"/>
+              </a:spcAft>
+              <a:buFont typeface="Arial"/>
+              <a:buChar char="•"/>
+            </a:pPr>
+            <a:r>
+              <a:rPr sz="1400">
+                <a:solidFill>
+                  <a:srgbClr val="1A1214"/>
+                </a:solidFill>
+                <a:latin typeface="Calibri"/>
+              </a:rPr>
+              <a:t>08g   Methodology — ToolBench walkthrough</a:t>
+            </a:r>
+          </a:p>
+          <a:p>
+            <a:pPr>
+              <a:spcAft>
+                <a:spcPts val="600"/>
+              </a:spcAft>
+              <a:buFont typeface="Arial"/>
+              <a:buChar char="•"/>
+            </a:pPr>
+            <a:r>
+              <a:rPr sz="1400">
+                <a:solidFill>
+                  <a:srgbClr val="1A1214"/>
+                </a:solidFill>
+                <a:latin typeface="Calibri"/>
+              </a:rPr>
+              <a:t>08h   Methodology — data.gov.in walkthrough</a:t>
+            </a:r>
+          </a:p>
+          <a:p>
+            <a:pPr>
+              <a:spcAft>
+                <a:spcPts val="600"/>
+              </a:spcAft>
+              <a:buFont typeface="Arial"/>
+              <a:buChar char="•"/>
+            </a:pPr>
+            <a:r>
+              <a:rPr sz="1400">
+                <a:solidFill>
+                  <a:srgbClr val="1A1214"/>
+                </a:solidFill>
+                <a:latin typeface="Calibri"/>
+              </a:rPr>
               <a:t>09   Conclusion</a:t>
             </a:r>
           </a:p>
@@ -18308,7 +20480,7 @@
           <a:lstStyle/>
           <a:p>
             <a:pPr algn="l"/>
-            <a:fld id="{7a1c0f1f-15a0-45f3-86d8-cbb2239fa28a}" type="datetime3">
+            <a:fld id="{223d533e-fcb4-4588-9325-65460c2034f3}" type="datetime3">
               <a:rPr lang="en-GB" sz="1000" dirty="0">
                 <a:solidFill>
                   <a:srgbClr val="C4A35A"/>
@@ -18342,7 +20514,7 @@
           <a:lstStyle/>
           <a:p>
             <a:pPr algn="r"/>
-            <a:fld id="{f18eea57-c34d-4050-9968-f266c52e60e4}" type="slidenum">
+            <a:fld id="{7db883b2-5e65-4d0a-9577-685629fc0312}" type="slidenum">
               <a:rPr lang="en-GB" sz="1000" dirty="0">
                 <a:solidFill>
                   <a:srgbClr val="C4A35A"/>
@@ -18358,7 +20530,7 @@
                 </a:solidFill>
                 <a:latin typeface="Calibri"/>
               </a:rPr>
-              <a:t> / 26</a:t>
+              <a:t> / 29</a:t>
             </a:r>
             <a:endParaRPr lang="en-GB" sz="1000"/>
           </a:p>
@@ -18881,7 +21053,7 @@
           <a:lstStyle/>
           <a:p>
             <a:pPr algn="l"/>
-            <a:fld id="{978fd5fd-074f-4174-bdfb-3d035a3d6a0c}" type="datetime3">
+            <a:fld id="{9620dd0e-9894-4538-9932-b75ff274520f}" type="datetime3">
               <a:rPr lang="en-GB" sz="1000" dirty="0">
                 <a:solidFill>
                   <a:srgbClr val="C4A35A"/>
@@ -18915,7 +21087,7 @@
           <a:lstStyle/>
           <a:p>
             <a:pPr algn="r"/>
-            <a:fld id="{44ad8e5d-1b68-40c1-b0e3-9fcc9df45212}" type="slidenum">
+            <a:fld id="{5863f060-9947-48c4-bafc-e68bb0e01203}" type="slidenum">
               <a:rPr lang="en-GB" sz="1000" dirty="0">
                 <a:solidFill>
                   <a:srgbClr val="C4A35A"/>
@@ -18931,7 +21103,7 @@
                 </a:solidFill>
                 <a:latin typeface="Calibri"/>
               </a:rPr>
-              <a:t> / 26</a:t>
+              <a:t> / 29</a:t>
             </a:r>
             <a:endParaRPr lang="en-GB" sz="1000"/>
           </a:p>
@@ -19472,7 +21644,7 @@
           <a:lstStyle/>
           <a:p>
             <a:pPr algn="l"/>
-            <a:fld id="{f6be0919-ca93-432b-af91-fd18f0d8fb7b}" type="datetime3">
+            <a:fld id="{64aedd5c-30a7-43d8-9988-d66312523c97}" type="datetime3">
               <a:rPr lang="en-GB" sz="1000" dirty="0">
                 <a:solidFill>
                   <a:srgbClr val="C4A35A"/>
@@ -19506,7 +21678,7 @@
           <a:lstStyle/>
           <a:p>
             <a:pPr algn="r"/>
-            <a:fld id="{be3fd8e2-1901-426f-b25b-d1d71de12b06}" type="slidenum">
+            <a:fld id="{1cc698ae-86b1-4454-9fb2-7fc6c9a6cdde}" type="slidenum">
               <a:rPr lang="en-GB" sz="1000" dirty="0">
                 <a:solidFill>
                   <a:srgbClr val="C4A35A"/>
@@ -19522,7 +21694,7 @@
                 </a:solidFill>
                 <a:latin typeface="Calibri"/>
               </a:rPr>
-              <a:t> / 26</a:t>
+              <a:t> / 29</a:t>
             </a:r>
             <a:endParaRPr lang="en-GB" sz="1000"/>
           </a:p>
@@ -20045,7 +22217,7 @@
           <a:lstStyle/>
           <a:p>
             <a:pPr algn="l"/>
-            <a:fld id="{fee9b8ef-1d03-415a-b117-8339c0e381a8}" type="datetime3">
+            <a:fld id="{a3e7f3a8-432e-455d-a4a7-ed4792f841e5}" type="datetime3">
               <a:rPr lang="en-GB" sz="1000" dirty="0">
                 <a:solidFill>
                   <a:srgbClr val="C4A35A"/>
@@ -20079,7 +22251,7 @@
           <a:lstStyle/>
           <a:p>
             <a:pPr algn="r"/>
-            <a:fld id="{b67c7307-2bad-44a7-be22-de0bc84f4643}" type="slidenum">
+            <a:fld id="{949733b5-734e-48ad-ab4e-dcce487b897e}" type="slidenum">
               <a:rPr lang="en-GB" sz="1000" dirty="0">
                 <a:solidFill>
                   <a:srgbClr val="C4A35A"/>
@@ -20095,7 +22267,7 @@
                 </a:solidFill>
                 <a:latin typeface="Calibri"/>
               </a:rPr>
-              <a:t> / 26</a:t>
+              <a:t> / 29</a:t>
             </a:r>
             <a:endParaRPr lang="en-GB" sz="1000"/>
           </a:p>
@@ -20958,7 +23130,7 @@
           <a:lstStyle/>
           <a:p>
             <a:pPr algn="l"/>
-            <a:fld id="{c417e24d-d11b-46b4-8226-d6948ec6242b}" type="datetime3">
+            <a:fld id="{e4e8b7a3-cf70-4e74-87b1-1232394058e4}" type="datetime3">
               <a:rPr lang="en-GB" sz="1000" dirty="0">
                 <a:solidFill>
                   <a:srgbClr val="C4A35A"/>
@@ -20992,7 +23164,7 @@
           <a:lstStyle/>
           <a:p>
             <a:pPr algn="r"/>
-            <a:fld id="{f92abb12-637b-46e2-a9fd-50bf3e903cb5}" type="slidenum">
+            <a:fld id="{73d42dcb-cd8b-4fe6-bd23-3cacbb0b4035}" type="slidenum">
               <a:rPr lang="en-GB" sz="1000" dirty="0">
                 <a:solidFill>
                   <a:srgbClr val="C4A35A"/>
@@ -21008,7 +23180,7 @@
                 </a:solidFill>
                 <a:latin typeface="Calibri"/>
               </a:rPr>
-              <a:t> / 26</a:t>
+              <a:t> / 29</a:t>
             </a:r>
             <a:endParaRPr lang="en-GB" sz="1000"/>
           </a:p>
@@ -21584,7 +23756,7 @@
           <a:lstStyle/>
           <a:p>
             <a:pPr algn="l"/>
-            <a:fld id="{5c06a2dc-ae4a-4828-9ca0-4d56a32ccfe1}" type="datetime3">
+            <a:fld id="{b5fe9bf3-f919-4574-8479-076138fc083e}" type="datetime3">
               <a:rPr lang="en-GB" sz="1000" dirty="0">
                 <a:solidFill>
                   <a:srgbClr val="C4A35A"/>
@@ -21618,7 +23790,7 @@
           <a:lstStyle/>
           <a:p>
             <a:pPr algn="r"/>
-            <a:fld id="{e7bc000f-3f53-4707-99d3-dacc62bc1248}" type="slidenum">
+            <a:fld id="{a4b3f19e-b0eb-404b-8cf5-e2af2088801b}" type="slidenum">
               <a:rPr lang="en-GB" sz="1000" dirty="0">
                 <a:solidFill>
                   <a:srgbClr val="C4A35A"/>
@@ -21634,7 +23806,7 @@
                 </a:solidFill>
                 <a:latin typeface="Calibri"/>
               </a:rPr>
-              <a:t> / 26</a:t>
+              <a:t> / 29</a:t>
             </a:r>
             <a:endParaRPr lang="en-GB" sz="1000"/>
           </a:p>
@@ -22175,7 +24347,7 @@
           <a:lstStyle/>
           <a:p>
             <a:pPr algn="l"/>
-            <a:fld id="{96bb9a69-5f70-4d74-a9f2-c8dcdd08c03b}" type="datetime3">
+            <a:fld id="{a3e62801-1a5f-4f1a-a6f1-1aee747ea848}" type="datetime3">
               <a:rPr lang="en-GB" sz="1000" dirty="0">
                 <a:solidFill>
                   <a:srgbClr val="C4A35A"/>
@@ -22209,7 +24381,7 @@
           <a:lstStyle/>
           <a:p>
             <a:pPr algn="r"/>
-            <a:fld id="{16f4da2f-6071-4dd0-b42c-2ca3c721e19a}" type="slidenum">
+            <a:fld id="{12cdba31-4ff3-4cd0-bc61-2705891444f4}" type="slidenum">
               <a:rPr lang="en-GB" sz="1000" dirty="0">
                 <a:solidFill>
                   <a:srgbClr val="C4A35A"/>
@@ -22225,7 +24397,7 @@
                 </a:solidFill>
                 <a:latin typeface="Calibri"/>
               </a:rPr>
-              <a:t> / 26</a:t>
+              <a:t> / 29</a:t>
             </a:r>
             <a:endParaRPr lang="en-GB" sz="1000"/>
           </a:p>

--- a/laboratory/docs/slides/ACRS_PhD_Proposal_JenishaT_24ETRP720001.pptx
+++ b/laboratory/docs/slides/ACRS_PhD_Proposal_JenishaT_24ETRP720001.pptx
@@ -3880,7 +3880,7 @@
           <a:lstStyle/>
           <a:p>
             <a:pPr algn="l"/>
-            <a:fld id="{83e579be-63f4-4788-a6c2-180dd5d096fe}" type="datetime3">
+            <a:fld id="{cf382ad4-9d5b-4571-a7f3-962aa0068a50}" type="datetime3">
               <a:rPr lang="en-GB" sz="1000" dirty="0">
                 <a:solidFill>
                   <a:srgbClr val="C4A35A"/>
@@ -3914,7 +3914,7 @@
           <a:lstStyle/>
           <a:p>
             <a:pPr algn="r"/>
-            <a:fld id="{ed52e502-5a0f-4e2b-9b59-06022553a770}" type="slidenum">
+            <a:fld id="{4115014d-a917-432e-ab7a-4ca04b28c853}" type="slidenum">
               <a:rPr lang="en-GB" sz="1000" dirty="0">
                 <a:solidFill>
                   <a:srgbClr val="C4A35A"/>
@@ -4725,7 +4725,7 @@
           <a:lstStyle/>
           <a:p>
             <a:pPr algn="l"/>
-            <a:fld id="{f90767aa-7782-491b-8bdb-8b478202b1cd}" type="datetime3">
+            <a:fld id="{b42acdf4-9994-462d-9fa1-57af662aee69}" type="datetime3">
               <a:rPr lang="en-GB" sz="1000" dirty="0">
                 <a:solidFill>
                   <a:srgbClr val="C4A35A"/>
@@ -4759,7 +4759,7 @@
           <a:lstStyle/>
           <a:p>
             <a:pPr algn="r"/>
-            <a:fld id="{910170b1-6529-4f59-b33b-ffd83907e1cb}" type="slidenum">
+            <a:fld id="{9a97d7dd-bbf9-459f-b737-2284bf7fe5d2}" type="slidenum">
               <a:rPr lang="en-GB" sz="1000" dirty="0">
                 <a:solidFill>
                   <a:srgbClr val="C4A35A"/>
@@ -5782,7 +5782,7 @@
           <a:lstStyle/>
           <a:p>
             <a:pPr algn="l"/>
-            <a:fld id="{d884dfe5-9119-4e49-8dc6-e43f96439049}" type="datetime3">
+            <a:fld id="{320e181c-cc21-47fd-af5d-dd7a9375cb5e}" type="datetime3">
               <a:rPr lang="en-GB" sz="1000" dirty="0">
                 <a:solidFill>
                   <a:srgbClr val="C4A35A"/>
@@ -5816,7 +5816,7 @@
           <a:lstStyle/>
           <a:p>
             <a:pPr algn="r"/>
-            <a:fld id="{650cf51f-9584-4990-8991-1c3080f07a89}" type="slidenum">
+            <a:fld id="{ced8c100-b473-46f9-8769-0e7eb749e577}" type="slidenum">
               <a:rPr lang="en-GB" sz="1000" dirty="0">
                 <a:solidFill>
                   <a:srgbClr val="C4A35A"/>
@@ -6275,7 +6275,7 @@
                 </a:solidFill>
                 <a:latin typeface="Calibri"/>
               </a:rPr>
-              <a:t>SOTA. Yue et al., MasRouter (ACL 2025, doi:10.18653/v1/2025.acl-long.757): trained neural controller over multi-agent topologies. Ong et al., RouteLLM (arXiv:2406.18665, 2024): routers among LLMs. Panda et al., PILOT (Findings of EMNLP 2025): preference-prior LinUCB for budget-constrained LLM routing. Hong et al., MetaGPT (ICLR 2024): authored SOP workflows. Pipeline: query → trained controller or difficulty model → choose one LLM/agent → execute</a:t>
+              <a:t>SOTA. Yue et al., MasRouter (ACL 2025, doi:10.18653/v1/2025.acl-long.757): trained neural controller over multi-agent topologies. Ong et al., RouteLLM (ICLR 2025, arXiv:2406.18665): routers among LLMs. Panda et al., Adaptive LLM Routing under Budget Constraints (PILOT; Findings of EMNLP 2025, doi:10.18653/v1/2025.findings-emnlp.1301): preference-prior LinUCB for budget-constrained LLM routing. Hong et al., MetaGPT (ICLR 2024): authored SOP workflows. Pipeline: query → trained controller or difficulty model → choose one LLM/agent → execute</a:t>
             </a:r>
           </a:p>
           <a:p>
@@ -6731,7 +6731,7 @@
           <a:lstStyle/>
           <a:p>
             <a:pPr algn="l"/>
-            <a:fld id="{15782857-843a-4951-90b8-d59b027ae312}" type="datetime3">
+            <a:fld id="{1b6412fb-779c-40ac-b7e9-210160e6fbc2}" type="datetime3">
               <a:rPr lang="en-GB" sz="1000" dirty="0">
                 <a:solidFill>
                   <a:srgbClr val="C4A35A"/>
@@ -6765,7 +6765,7 @@
           <a:lstStyle/>
           <a:p>
             <a:pPr algn="r"/>
-            <a:fld id="{e5fee357-7c02-4d79-81b7-b356f9faef1c}" type="slidenum">
+            <a:fld id="{093aa637-3a68-4348-92e9-3e32c93e18e3}" type="slidenum">
               <a:rPr lang="en-GB" sz="1000" dirty="0">
                 <a:solidFill>
                   <a:srgbClr val="C4A35A"/>
@@ -7224,7 +7224,7 @@
                 </a:solidFill>
                 <a:latin typeface="Calibri"/>
               </a:rPr>
-              <a:t>SOTA. Wu et al., AutoGen (ICLR 2024 LLM Agents Workshop; COLM 2024, arXiv:2308.08155): multi-agent conversation. Hong et al., MetaGPT (ICLR 2024): SOP pipeline. Qian et al., ChatDev (ACL 2024): organisational chat-chain. Li et al., CAMEL (NeurIPS 2023): communicative role-playing agents. Pipeline: manager LLM → sequential or star-topology agent messages → tool calls</a:t>
+              <a:t>SOTA. Wu et al., AutoGen (COLM 2024; ICLR 2024 LLM Agents Workshop Best Paper, arXiv:2308.08155): multi-agent conversation. Hong et al., MetaGPT (ICLR 2024): SOP pipeline. Qian et al., ChatDev (ACL 2024): organisational chat-chain. Li et al., CAMEL (NeurIPS 2023): communicative role-playing agents. Pipeline: manager LLM → sequential or star-topology agent messages → tool calls</a:t>
             </a:r>
           </a:p>
           <a:p>
@@ -7626,7 +7626,7 @@
           <a:lstStyle/>
           <a:p>
             <a:pPr algn="l"/>
-            <a:fld id="{b1a7769a-410d-4a4b-9deb-ecb129e0d8ea}" type="datetime3">
+            <a:fld id="{d3544d8b-634a-4be3-aaff-6ca081e2ee5d}" type="datetime3">
               <a:rPr lang="en-GB" sz="1000" dirty="0">
                 <a:solidFill>
                   <a:srgbClr val="C4A35A"/>
@@ -7660,7 +7660,7 @@
           <a:lstStyle/>
           <a:p>
             <a:pPr algn="r"/>
-            <a:fld id="{297e6af9-f449-4c77-b139-178b9ed3a1bf}" type="slidenum">
+            <a:fld id="{54fa8686-c5d5-4ae2-a9c6-a950a922bf27}" type="slidenum">
               <a:rPr lang="en-GB" sz="1000" dirty="0">
                 <a:solidFill>
                   <a:srgbClr val="C4A35A"/>
@@ -8119,7 +8119,7 @@
                 </a:solidFill>
                 <a:latin typeface="Calibri"/>
               </a:rPr>
-              <a:t>SOTA. Jiang et al., LLMLingua (EMNLP 2023): token-level prompt compression. Tero et al., Science 2010 (doi:10.1126/science.1177894): Physarum adaptive network. Park et al., Generative Agents (CHI 2023): language memory stream in a sandbox. Pipeline: long prompt → compressor → LLM. Memory is not written back into a tool retriever.</a:t>
+              <a:t>SOTA. Jiang et al., LLMLingua (EMNLP 2023): token-level prompt compression. Tero et al., Science 2010 (doi:10.1126/science.1177894): Physarum adaptive network. Park et al., Generative Agents (UIST 2023): language memory stream in a sandbox. Pipeline: long prompt → compressor → LLM. Memory is not written back into a tool retriever.</a:t>
             </a:r>
           </a:p>
           <a:p>
@@ -8575,7 +8575,7 @@
           <a:lstStyle/>
           <a:p>
             <a:pPr algn="l"/>
-            <a:fld id="{1f2103da-f21b-42fa-827a-3ebd3efa9e9f}" type="datetime3">
+            <a:fld id="{cfd289b2-41bf-4622-8c79-0fd966265a38}" type="datetime3">
               <a:rPr lang="en-GB" sz="1000" dirty="0">
                 <a:solidFill>
                   <a:srgbClr val="C4A35A"/>
@@ -8609,7 +8609,7 @@
           <a:lstStyle/>
           <a:p>
             <a:pPr algn="r"/>
-            <a:fld id="{c2bdb072-023c-429f-b7e4-33acfbfc82f7}" type="slidenum">
+            <a:fld id="{da124401-3e88-4a7b-9bf6-571400987b31}" type="slidenum">
               <a:rPr lang="en-GB" sz="1000" dirty="0">
                 <a:solidFill>
                   <a:srgbClr val="C4A35A"/>
@@ -9086,7 +9086,7 @@
                 </a:solidFill>
                 <a:latin typeface="Calibri"/>
               </a:rPr>
-              <a:t>RQ2. Can routing sample a training-free posterior over tool-specialist agents instead of a trained neural controller or an authored SOP (Yue et al., MasRouter, ACL 2025; Hong et al., MetaGPT, ICLR 2024; Ong et al., RouteLLM, 2024)?  →  addressed by O2 (Adaptive Probabilistic Routing Reinforcement (APRR)).</a:t>
+              <a:t>RQ2. Can routing sample a training-free posterior over tool-specialist agents instead of a trained neural controller or an authored SOP (Yue et al., MasRouter, ACL 2025; Hong et al., MetaGPT, ICLR 2024; Ong et al., RouteLLM, ICLR 2025)?  →  addressed by O2 (Adaptive Probabilistic Routing Reinforcement (APRR)).</a:t>
             </a:r>
           </a:p>
           <a:p>
@@ -9148,7 +9148,7 @@
           <a:lstStyle/>
           <a:p>
             <a:pPr algn="l"/>
-            <a:fld id="{8291e4b9-ddf5-472d-845b-23f69fa140b0}" type="datetime3">
+            <a:fld id="{341773cd-b688-4285-99a5-4153c11901d7}" type="datetime3">
               <a:rPr lang="en-GB" sz="1000" dirty="0">
                 <a:solidFill>
                   <a:srgbClr val="C4A35A"/>
@@ -9182,7 +9182,7 @@
           <a:lstStyle/>
           <a:p>
             <a:pPr algn="r"/>
-            <a:fld id="{d1c11a1d-86c3-4325-bfca-6eb1736a58e6}" type="slidenum">
+            <a:fld id="{6ae21204-8da0-4105-ae07-d5a0959f6b6e}" type="slidenum">
               <a:rPr lang="en-GB" sz="1000" dirty="0">
                 <a:solidFill>
                   <a:srgbClr val="C4A35A"/>
@@ -10134,7 +10134,7 @@
           <a:lstStyle/>
           <a:p>
             <a:pPr algn="l"/>
-            <a:fld id="{0f034aa5-9251-46b6-8b37-bbf5bed02ddb}" type="datetime3">
+            <a:fld id="{c3324ae9-4da0-47fb-b8eb-54fe14240bb7}" type="datetime3">
               <a:rPr lang="en-GB" sz="1000" dirty="0">
                 <a:solidFill>
                   <a:srgbClr val="C4A35A"/>
@@ -10168,7 +10168,7 @@
           <a:lstStyle/>
           <a:p>
             <a:pPr algn="r"/>
-            <a:fld id="{e31d84c6-9c34-4ae3-b059-414c1b348969}" type="slidenum">
+            <a:fld id="{96b32d34-258a-4a24-8b89-8210200daf86}" type="slidenum">
               <a:rPr lang="en-GB" sz="1000" dirty="0">
                 <a:solidFill>
                   <a:srgbClr val="C4A35A"/>
@@ -10743,7 +10743,7 @@
           <a:lstStyle/>
           <a:p>
             <a:pPr algn="l"/>
-            <a:fld id="{6d122bc5-fac9-41f0-9724-ae9723b8bb30}" type="datetime3">
+            <a:fld id="{b7a04f51-5ba2-4abf-b68d-968c7825b3ee}" type="datetime3">
               <a:rPr lang="en-GB" sz="1000" dirty="0">
                 <a:solidFill>
                   <a:srgbClr val="C4A35A"/>
@@ -10777,7 +10777,7 @@
           <a:lstStyle/>
           <a:p>
             <a:pPr algn="r"/>
-            <a:fld id="{6b437917-906d-455a-b1e3-a6a6f0c24ee8}" type="slidenum">
+            <a:fld id="{92d69429-b4bd-4aca-aba6-115f73b36510}" type="slidenum">
               <a:rPr lang="en-GB" sz="1000" dirty="0">
                 <a:solidFill>
                   <a:srgbClr val="C4A35A"/>
@@ -11352,7 +11352,7 @@
           <a:lstStyle/>
           <a:p>
             <a:pPr algn="l"/>
-            <a:fld id="{6d2a41ad-8a07-4bb7-b393-8dae1b791f82}" type="datetime3">
+            <a:fld id="{d7f3cd70-8b75-4ed5-979d-b22bb9654b30}" type="datetime3">
               <a:rPr lang="en-GB" sz="1000" dirty="0">
                 <a:solidFill>
                   <a:srgbClr val="C4A35A"/>
@@ -11386,7 +11386,7 @@
           <a:lstStyle/>
           <a:p>
             <a:pPr algn="r"/>
-            <a:fld id="{3e929ac0-3c05-466c-ba11-6e24f0e123e5}" type="slidenum">
+            <a:fld id="{0aced49a-16dc-4b48-80d7-03bf1135ac44}" type="slidenum">
               <a:rPr lang="en-GB" sz="1000" dirty="0">
                 <a:solidFill>
                   <a:srgbClr val="C4A35A"/>
@@ -11961,7 +11961,7 @@
           <a:lstStyle/>
           <a:p>
             <a:pPr algn="l"/>
-            <a:fld id="{032c2daf-b888-42d3-8eb1-b0ec911c82dc}" type="datetime3">
+            <a:fld id="{5822a2d4-1eec-42de-b121-20902f4d4982}" type="datetime3">
               <a:rPr lang="en-GB" sz="1000" dirty="0">
                 <a:solidFill>
                   <a:srgbClr val="C4A35A"/>
@@ -11995,7 +11995,7 @@
           <a:lstStyle/>
           <a:p>
             <a:pPr algn="r"/>
-            <a:fld id="{ba648479-646a-48ff-90db-39ed4006d22f}" type="slidenum">
+            <a:fld id="{e2560189-ea0e-4f50-97b4-2d294e5ee0ee}" type="slidenum">
               <a:rPr lang="en-GB" sz="1000" dirty="0">
                 <a:solidFill>
                   <a:srgbClr val="C4A35A"/>
@@ -12971,7 +12971,7 @@
           <a:lstStyle/>
           <a:p>
             <a:pPr algn="l"/>
-            <a:fld id="{b4579f13-7b13-4779-8530-c0ac35db377a}" type="datetime3">
+            <a:fld id="{d13d980e-9a2c-4812-ac6a-d8a3ad81cafd}" type="datetime3">
               <a:rPr lang="en-GB" sz="1000" dirty="0">
                 <a:solidFill>
                   <a:srgbClr val="C4A35A"/>
@@ -13005,7 +13005,7 @@
           <a:lstStyle/>
           <a:p>
             <a:pPr algn="r"/>
-            <a:fld id="{d682814e-f95a-4a7f-8a83-8ecf758a7113}" type="slidenum">
+            <a:fld id="{86489c17-82d4-40f9-adad-23f5f7da950e}" type="slidenum">
               <a:rPr lang="en-GB" sz="1000" dirty="0">
                 <a:solidFill>
                   <a:srgbClr val="C4A35A"/>
@@ -13580,7 +13580,7 @@
           <a:lstStyle/>
           <a:p>
             <a:pPr algn="l"/>
-            <a:fld id="{2c5e8bc4-e04b-4a2a-bff8-bd04950680f7}" type="datetime3">
+            <a:fld id="{adcadd0e-2fcb-445a-9938-cdbb93397236}" type="datetime3">
               <a:rPr lang="en-GB" sz="1000" dirty="0">
                 <a:solidFill>
                   <a:srgbClr val="C4A35A"/>
@@ -13614,7 +13614,7 @@
           <a:lstStyle/>
           <a:p>
             <a:pPr algn="r"/>
-            <a:fld id="{dd327c99-9dc1-4ba4-9a1a-dd634cde3cd7}" type="slidenum">
+            <a:fld id="{4774cd38-e984-4137-900c-26b27ccacadb}" type="slidenum">
               <a:rPr lang="en-GB" sz="1000" dirty="0">
                 <a:solidFill>
                   <a:srgbClr val="C4A35A"/>
@@ -14583,7 +14583,7 @@
           <a:lstStyle/>
           <a:p>
             <a:pPr algn="l"/>
-            <a:fld id="{ff9e8050-41f1-4cd5-ad4a-571a72a3d51e}" type="datetime3">
+            <a:fld id="{362f7b63-d8bc-441e-9368-e2a62bb9c88d}" type="datetime3">
               <a:rPr lang="en-GB" sz="1000" dirty="0">
                 <a:solidFill>
                   <a:srgbClr val="C4A35A"/>
@@ -14617,7 +14617,7 @@
           <a:lstStyle/>
           <a:p>
             <a:pPr algn="r"/>
-            <a:fld id="{984b57e9-b723-4113-a13c-1a03bfa36444}" type="slidenum">
+            <a:fld id="{a7339dc4-b60c-4f96-902e-ac987b8814e9}" type="slidenum">
               <a:rPr lang="en-GB" sz="1000" dirty="0">
                 <a:solidFill>
                   <a:srgbClr val="C4A35A"/>
@@ -15428,7 +15428,7 @@
           <a:lstStyle/>
           <a:p>
             <a:pPr algn="l"/>
-            <a:fld id="{b20bf3b9-d51c-4b89-bd7a-b90e39ccf131}" type="datetime3">
+            <a:fld id="{b7275cf1-995f-4ea1-b6e9-53ae9ec899c3}" type="datetime3">
               <a:rPr lang="en-GB" sz="1000" dirty="0">
                 <a:solidFill>
                   <a:srgbClr val="C4A35A"/>
@@ -15462,7 +15462,7 @@
           <a:lstStyle/>
           <a:p>
             <a:pPr algn="r"/>
-            <a:fld id="{5158a0a1-7ea9-42d5-8f43-15f073790545}" type="slidenum">
+            <a:fld id="{ba38338f-517f-4230-9bd9-fa7e8331db15}" type="slidenum">
               <a:rPr lang="en-GB" sz="1000" dirty="0">
                 <a:solidFill>
                   <a:srgbClr val="C4A35A"/>
@@ -16054,7 +16054,7 @@
           <a:lstStyle/>
           <a:p>
             <a:pPr algn="l"/>
-            <a:fld id="{d9cf41e1-6d2e-407a-b496-da6b73f15326}" type="datetime3">
+            <a:fld id="{3a719e08-2afb-4238-b868-78b7d5f5fcca}" type="datetime3">
               <a:rPr lang="en-GB" sz="1000" dirty="0">
                 <a:solidFill>
                   <a:srgbClr val="C4A35A"/>
@@ -16088,7 +16088,7 @@
           <a:lstStyle/>
           <a:p>
             <a:pPr algn="r"/>
-            <a:fld id="{4567793e-acda-4149-b8eb-eca6c8b5c0e2}" type="slidenum">
+            <a:fld id="{5de8015c-8c45-4ddb-a783-82f9cf18582b}" type="slidenum">
               <a:rPr lang="en-GB" sz="1000" dirty="0">
                 <a:solidFill>
                   <a:srgbClr val="C4A35A"/>
@@ -16680,7 +16680,7 @@
           <a:lstStyle/>
           <a:p>
             <a:pPr algn="l"/>
-            <a:fld id="{230c114c-225b-4fe2-8006-e59029bcbc42}" type="datetime3">
+            <a:fld id="{1e400cfc-c8db-4425-bfb9-18861736248b}" type="datetime3">
               <a:rPr lang="en-GB" sz="1000" dirty="0">
                 <a:solidFill>
                   <a:srgbClr val="C4A35A"/>
@@ -16714,7 +16714,7 @@
           <a:lstStyle/>
           <a:p>
             <a:pPr algn="r"/>
-            <a:fld id="{11c7c39a-e098-46df-90a0-d600553d3c72}" type="slidenum">
+            <a:fld id="{2d04b296-06fc-4ab4-991b-9d4886ec38d5}" type="slidenum">
               <a:rPr lang="en-GB" sz="1000" dirty="0">
                 <a:solidFill>
                   <a:srgbClr val="C4A35A"/>
@@ -17271,7 +17271,7 @@
           <a:lstStyle/>
           <a:p>
             <a:pPr algn="l"/>
-            <a:fld id="{f416b8ab-dc34-4091-a64a-9724bed8fb74}" type="datetime3">
+            <a:fld id="{7d82533d-7618-4554-8c26-732ceea2a632}" type="datetime3">
               <a:rPr lang="en-GB" sz="1000" dirty="0">
                 <a:solidFill>
                   <a:srgbClr val="C4A35A"/>
@@ -17305,7 +17305,7 @@
           <a:lstStyle/>
           <a:p>
             <a:pPr algn="r"/>
-            <a:fld id="{e5bc0dd9-8c55-4d78-b837-e643d138f5f8}" type="slidenum">
+            <a:fld id="{a617c65f-33bc-438b-b7ae-b1f7e798ee90}" type="slidenum">
               <a:rPr lang="en-GB" sz="1000" dirty="0">
                 <a:solidFill>
                   <a:srgbClr val="C4A35A"/>
@@ -17729,7 +17729,7 @@
                 </a:solidFill>
                 <a:latin typeface="Calibri"/>
               </a:rPr>
-              <a:t>Wu, Q., Bansal, G., Zhang, J., Wu, Y., Li, B., Zhu, E., Jiang, L., Zhang, X., Zhang, S., Liu, J., Awadallah, A. H., White, R. W., Burger, D., and Wang, C. AutoGen: Enabling Next-Gen LLM Applications via Multi-Agent Conversation. ICLR 2024 Workshop on Large Language Model (LLM) Agents; also COLM 2024. arXiv:2308.08155.</a:t>
+              <a:t>Wu, Q., Bansal, G., Zhang, J., Wu, Y., Li, B., Zhu, E., Jiang, L., Zhang, X., Zhang, S., Liu, J., Awadallah, A. H., White, R. W., Burger, D., and Wang, C. AutoGen: Enabling Next-Gen LLM Applications via Multi-Agent Conversations. Conference on Language Modeling (COLM) 2024. Also ICLR 2024 Workshop on Large Language Model (LLM) Agents (Best Paper). arXiv:2308.08155.</a:t>
             </a:r>
           </a:p>
           <a:p>
@@ -17783,7 +17783,7 @@
                 </a:solidFill>
                 <a:latin typeface="Calibri"/>
               </a:rPr>
-              <a:t>Qian, C., Liu, W., Liu, H., Chen, N., Dang, Y., Li, J., Yang, C., Chen, W., Su, Y., Cong, X., Xu, J., Li, D., Liu, Z., and Sun, M. ChatDev: Communicative Agents for Software Development. ACL 2024. arXiv:2307.07924.</a:t>
+              <a:t>Qian, C., Liu, W., Liu, H., Chen, N., Dang, Y., Li, J., Yang, C., Chen, W., Su, Y., Cong, X., Xu, J., Li, D., Liu, Z., and Sun, M. ChatDev: Communicative Agents for Software Development. ACL 2024 (long), pages 15174–15186. doi:10.18653/v1/2024.acl-long.810.</a:t>
             </a:r>
           </a:p>
           <a:p>
@@ -17819,7 +17819,7 @@
                 </a:solidFill>
                 <a:latin typeface="Calibri"/>
               </a:rPr>
-              <a:t>Zheng, Y., Li, P., Liu, W., Liu, Y., Luan, J., and Wang, B. ToolRerank: Adaptive and Hierarchy-Aware Reranking for Tool Retrieval. LREC-COLING 2024.</a:t>
+              <a:t>Zheng, Y., Li, P., Liu, W., Liu, Y., Luan, J., and Wang, B. ToolRerank: Adaptive and Hierarchy-Aware Reranking for Tool Retrieval. LREC-COLING 2024, pages 16263–16273. ACL Anthology 2024.lrec-main.1413.</a:t>
             </a:r>
           </a:p>
         </p:txBody>
@@ -17845,7 +17845,7 @@
           <a:lstStyle/>
           <a:p>
             <a:pPr algn="l"/>
-            <a:fld id="{9cdb6dfa-da93-495b-a150-a5d82e7710de}" type="datetime3">
+            <a:fld id="{bdbd47cb-badf-4b98-bfe8-334b5bd330f7}" type="datetime3">
               <a:rPr lang="en-GB" sz="1000" dirty="0">
                 <a:solidFill>
                   <a:srgbClr val="C4A35A"/>
@@ -17879,7 +17879,7 @@
           <a:lstStyle/>
           <a:p>
             <a:pPr algn="r"/>
-            <a:fld id="{81fa6b54-347d-4f02-bd8c-3c1541a1f152}" type="slidenum">
+            <a:fld id="{db5565c4-e592-46ce-bbf1-cc963147bc3b}" type="slidenum">
               <a:rPr lang="en-GB" sz="1000" dirty="0">
                 <a:solidFill>
                   <a:srgbClr val="C4A35A"/>
@@ -18303,7 +18303,7 @@
                 </a:solidFill>
                 <a:latin typeface="Calibri"/>
               </a:rPr>
-              <a:t>Ong, I., Almahairi, A., Wu, V., Chiang, W.-L., Wu, T., Gonzalez, J. E., Kadous, M. W., and Stoica, I. RouteLLM: Learning to Route LLMs with Preference Data. arXiv:2406.18665, 2024.</a:t>
+              <a:t>Ong, I., Almahairi, A., Wu, V., Chiang, W.-L., Wu, T., Gonzalez, J. E., Kadous, M. W., and Stoica, I. RouteLLM: Learning to Route LLMs from Preference Data. ICLR 2025. arXiv:2406.18665.</a:t>
             </a:r>
           </a:p>
           <a:p>
@@ -18321,7 +18321,7 @@
                 </a:solidFill>
                 <a:latin typeface="Calibri"/>
               </a:rPr>
-              <a:t>Panda, S., and co-authors. PILOT: Preference-informed LinUCB for routing among language models. Findings of EMNLP 2025.</a:t>
+              <a:t>Panda, P., Magazine, R., Devaguptapu, C., Takemori, S., and Sharma, V. Adaptive LLM Routing under Budget Constraints. Findings of the Association for Computational Linguistics: EMNLP 2025, pages 23934–23949. doi:10.18653/v1/2025.findings-emnlp.1301.</a:t>
             </a:r>
           </a:p>
           <a:p>
@@ -18339,7 +18339,7 @@
                 </a:solidFill>
                 <a:latin typeface="Calibri"/>
               </a:rPr>
-              <a:t>Yue, Y., Zhang, G., Liu, B., Wan, G., Wang, K., Cheng, D., and Qi, Y. MasRouter: Learning to Route LLMs for Multi-Agent Systems. ACL 2025 (long). doi:10.18653/v1/2025.acl-long.757.</a:t>
+              <a:t>Yue, Y., Zhang, G., Liu, B., Wan, G., Wang, K., Cheng, D., and Qi, Y. MasRouter: Learning to Route LLMs for Multi-Agent Systems. ACL 2025 (long), pages 15549–15572. doi:10.18653/v1/2025.acl-long.757.</a:t>
             </a:r>
           </a:p>
           <a:p>
@@ -18357,7 +18357,7 @@
                 </a:solidFill>
                 <a:latin typeface="Calibri"/>
               </a:rPr>
-              <a:t>Jiang, H., Wu, Q., Lin, C.-Y., Yang, Y., and Qiu, L. LLMLingua: Compressing Prompts for Accelerated Inference of Large Language Models. EMNLP 2023.</a:t>
+              <a:t>Jiang, H., Wu, Q., Lin, C.-Y., Yang, Y., and Qiu, L. LLMLingua: Compressing Prompts for Accelerated Inference of Large Language Models. EMNLP 2023, pages 13358–13376. doi:10.18653/v1/2023.emnlp-main.825.</a:t>
             </a:r>
           </a:p>
           <a:p>
@@ -18429,7 +18429,7 @@
                 </a:solidFill>
                 <a:latin typeface="Calibri"/>
               </a:rPr>
-              <a:t>Tero, A., Takagi, S., Saigusa, T., Ito, K., Bebber, D. P., Fricker, M. D., Yumiki, K., Kobayashi, R., and Nakagaki, T. Rules for Biologically Inspired Adaptive Network Design. Science, 2010. doi:10.1126/science.1177894.</a:t>
+              <a:t>Tero, A., Takagi, S., Saigusa, T., Ito, K., Bebber, D. P., Fricker, M. D., Yumiki, K., Kobayashi, R., and Nakagaki, T. Rules for Biologically Inspired Adaptive Network Design. Science 327(5964):439–442, 2010. doi:10.1126/science.1177894.</a:t>
             </a:r>
           </a:p>
         </p:txBody>
@@ -18455,7 +18455,7 @@
           <a:lstStyle/>
           <a:p>
             <a:pPr algn="l"/>
-            <a:fld id="{562959d6-ef5e-4a9e-af27-b616b9d5d687}" type="datetime3">
+            <a:fld id="{f30ab948-5360-4967-8e47-120f2038b09b}" type="datetime3">
               <a:rPr lang="en-GB" sz="1000" dirty="0">
                 <a:solidFill>
                   <a:srgbClr val="C4A35A"/>
@@ -18489,7 +18489,7 @@
           <a:lstStyle/>
           <a:p>
             <a:pPr algn="r"/>
-            <a:fld id="{d83c6a4c-5d4d-4e13-9e3e-6fce3b0005ec}" type="slidenum">
+            <a:fld id="{cbf3415a-7a29-48d1-8270-3a647fbde29a}" type="slidenum">
               <a:rPr lang="en-GB" sz="1000" dirty="0">
                 <a:solidFill>
                   <a:srgbClr val="C4A35A"/>
@@ -18913,7 +18913,7 @@
                 </a:solidFill>
                 <a:latin typeface="Calibri"/>
               </a:rPr>
-              <a:t>Park, J. S., O’Brien, J. C., Cai, C. J., Morris, M. R., Liang, P., and Bernstein, M. S. Generative Agents: Interactive Simulacra of Human Behavior. CHI 2023.</a:t>
+              <a:t>Park, J. S., O’Brien, J. C., Cai, C. J., Morris, M. R., Liang, P., and Bernstein, M. S. Generative Agents: Interactive Simulacra of Human Behavior. UIST 2023 (Best Paper). doi:10.1145/3586183.3606763.</a:t>
             </a:r>
           </a:p>
           <a:p>
@@ -18931,7 +18931,7 @@
                 </a:solidFill>
                 <a:latin typeface="Calibri"/>
               </a:rPr>
-              <a:t>Shinn, N., Cassano, F., Berman, E., Gopinath, A., Narasimhan, K., and Yao, S. Reflexion: Language Agents with Verbal Reinforcement Learning. NeurIPS 2023.</a:t>
+              <a:t>Shinn, N., Cassano, F., Gopinath, A., Narasimhan, K., and Yao, S. Reflexion: Language Agents with Verbal Reinforcement Learning. NeurIPS 2023.</a:t>
             </a:r>
           </a:p>
           <a:p>
@@ -18967,7 +18967,7 @@
                 </a:solidFill>
                 <a:latin typeface="Calibri"/>
               </a:rPr>
-              <a:t>Schick, T., Dwivedi-Yu, J., Dessì, R., Raileanu, R., Lomeli, M., Zettlemoyer, L., Cancedda, N., and Scialom, T. Toolformer: Language Models Can Teach Themselves to Use Tools. NeurIPS 2023.</a:t>
+              <a:t>Schick, T., Dwivedi-Yu, J., Dessì, R., Raileanu, R., Lomeli, M., Hambro, E., Zettlemoyer, L., Cancedda, N., and Scialom, T. Toolformer: Language Models Can Teach Themselves to Use Tools. NeurIPS 2023.</a:t>
             </a:r>
           </a:p>
           <a:p>
@@ -19064,7 +19064,7 @@
           <a:lstStyle/>
           <a:p>
             <a:pPr algn="l"/>
-            <a:fld id="{95b8df89-af37-4df7-8146-f0d9e9d8bae4}" type="datetime3">
+            <a:fld id="{8845a490-4f47-499e-b909-8aa5c80d54fd}" type="datetime3">
               <a:rPr lang="en-GB" sz="1000" dirty="0">
                 <a:solidFill>
                   <a:srgbClr val="C4A35A"/>
@@ -19098,7 +19098,7 @@
           <a:lstStyle/>
           <a:p>
             <a:pPr algn="r"/>
-            <a:fld id="{cb08ca71-0ebf-4857-8a68-891e08413128}" type="slidenum">
+            <a:fld id="{2812f601-7f41-4fce-a530-fa9ae32528d7}" type="slidenum">
               <a:rPr lang="en-GB" sz="1000" dirty="0">
                 <a:solidFill>
                   <a:srgbClr val="C4A35A"/>
@@ -19673,7 +19673,7 @@
           <a:lstStyle/>
           <a:p>
             <a:pPr algn="l"/>
-            <a:fld id="{b09ad385-af60-43f0-9156-1f204ce994d0}" type="datetime3">
+            <a:fld id="{8db6c439-ad45-4641-9244-04cfb319adc4}" type="datetime3">
               <a:rPr lang="en-GB" sz="1000" dirty="0">
                 <a:solidFill>
                   <a:srgbClr val="C4A35A"/>
@@ -19707,7 +19707,7 @@
           <a:lstStyle/>
           <a:p>
             <a:pPr algn="r"/>
-            <a:fld id="{7732671a-b82b-4df5-bb6e-0afebe3b34c3}" type="slidenum">
+            <a:fld id="{66b0b058-1519-45e6-b8e9-a19977264c7c}" type="slidenum">
               <a:rPr lang="en-GB" sz="1000" dirty="0">
                 <a:solidFill>
                   <a:srgbClr val="C4A35A"/>
@@ -20480,7 +20480,7 @@
           <a:lstStyle/>
           <a:p>
             <a:pPr algn="l"/>
-            <a:fld id="{223d533e-fcb4-4588-9325-65460c2034f3}" type="datetime3">
+            <a:fld id="{00c878d5-56e1-450d-9045-5e1f625b010e}" type="datetime3">
               <a:rPr lang="en-GB" sz="1000" dirty="0">
                 <a:solidFill>
                   <a:srgbClr val="C4A35A"/>
@@ -20514,7 +20514,7 @@
           <a:lstStyle/>
           <a:p>
             <a:pPr algn="r"/>
-            <a:fld id="{7db883b2-5e65-4d0a-9577-685629fc0312}" type="slidenum">
+            <a:fld id="{435ae7ac-45c3-4143-bbc1-680e90b3d59c}" type="slidenum">
               <a:rPr lang="en-GB" sz="1000" dirty="0">
                 <a:solidFill>
                   <a:srgbClr val="C4A35A"/>
@@ -21053,7 +21053,7 @@
           <a:lstStyle/>
           <a:p>
             <a:pPr algn="l"/>
-            <a:fld id="{9620dd0e-9894-4538-9932-b75ff274520f}" type="datetime3">
+            <a:fld id="{104b5bdf-a8ac-47d1-bd7a-57e979f6a94a}" type="datetime3">
               <a:rPr lang="en-GB" sz="1000" dirty="0">
                 <a:solidFill>
                   <a:srgbClr val="C4A35A"/>
@@ -21087,7 +21087,7 @@
           <a:lstStyle/>
           <a:p>
             <a:pPr algn="r"/>
-            <a:fld id="{5863f060-9947-48c4-bafc-e68bb0e01203}" type="slidenum">
+            <a:fld id="{a31c0cce-42b4-4181-b080-696eb8cf1677}" type="slidenum">
               <a:rPr lang="en-GB" sz="1000" dirty="0">
                 <a:solidFill>
                   <a:srgbClr val="C4A35A"/>
@@ -21644,7 +21644,7 @@
           <a:lstStyle/>
           <a:p>
             <a:pPr algn="l"/>
-            <a:fld id="{64aedd5c-30a7-43d8-9988-d66312523c97}" type="datetime3">
+            <a:fld id="{8ba1e492-1ae7-481b-b862-1ebcdf07a286}" type="datetime3">
               <a:rPr lang="en-GB" sz="1000" dirty="0">
                 <a:solidFill>
                   <a:srgbClr val="C4A35A"/>
@@ -21678,7 +21678,7 @@
           <a:lstStyle/>
           <a:p>
             <a:pPr algn="r"/>
-            <a:fld id="{1cc698ae-86b1-4454-9fb2-7fc6c9a6cdde}" type="slidenum">
+            <a:fld id="{afb8084b-2e94-449d-aa2b-5ed3da0f56be}" type="slidenum">
               <a:rPr lang="en-GB" sz="1000" dirty="0">
                 <a:solidFill>
                   <a:srgbClr val="C4A35A"/>
@@ -22155,7 +22155,7 @@
                 </a:solidFill>
                 <a:latin typeface="Calibri"/>
               </a:rPr>
-              <a:t>Ong et al., RouteLLM (2024); Yue et al., MasRouter (ACL 2025); Panda et al., PILOT (Findings of EMNLP 2025): learned or bandit routers over LLM SKUs or collaboration modes. Gap: they do not maintain a training-free Dirichlet–Thompson posterior over named tool specialists.</a:t>
+              <a:t>Ong et al., RouteLLM (ICLR 2025); Yue et al., MasRouter (ACL 2025); Panda et al., Adaptive LLM Routing / PILOT (Findings of EMNLP 2025): learned or bandit routers over LLM SKUs or collaboration modes. Gap: they do not maintain a training-free Dirichlet–Thompson posterior over named tool specialists.</a:t>
             </a:r>
           </a:p>
           <a:p>
@@ -22217,7 +22217,7 @@
           <a:lstStyle/>
           <a:p>
             <a:pPr algn="l"/>
-            <a:fld id="{a3e7f3a8-432e-455d-a4a7-ed4792f841e5}" type="datetime3">
+            <a:fld id="{d360d952-ccb4-49a8-a1bc-239a283780f0}" type="datetime3">
               <a:rPr lang="en-GB" sz="1000" dirty="0">
                 <a:solidFill>
                   <a:srgbClr val="C4A35A"/>
@@ -22251,7 +22251,7 @@
           <a:lstStyle/>
           <a:p>
             <a:pPr algn="r"/>
-            <a:fld id="{949733b5-734e-48ad-ab4e-dcce487b897e}" type="slidenum">
+            <a:fld id="{8b39cc19-3373-41f3-a3a4-414a814de599}" type="slidenum">
               <a:rPr lang="en-GB" sz="1000" dirty="0">
                 <a:solidFill>
                   <a:srgbClr val="C4A35A"/>
@@ -23130,7 +23130,7 @@
           <a:lstStyle/>
           <a:p>
             <a:pPr algn="l"/>
-            <a:fld id="{e4e8b7a3-cf70-4e74-87b1-1232394058e4}" type="datetime3">
+            <a:fld id="{c552fd5e-d268-4730-be36-75aa8cbf14f5}" type="datetime3">
               <a:rPr lang="en-GB" sz="1000" dirty="0">
                 <a:solidFill>
                   <a:srgbClr val="C4A35A"/>
@@ -23164,7 +23164,7 @@
           <a:lstStyle/>
           <a:p>
             <a:pPr algn="r"/>
-            <a:fld id="{73d42dcb-cd8b-4fe6-bd23-3cacbb0b4035}" type="slidenum">
+            <a:fld id="{33606c85-0073-4913-b1b9-9fc870523cb7}" type="slidenum">
               <a:rPr lang="en-GB" sz="1000" dirty="0">
                 <a:solidFill>
                   <a:srgbClr val="C4A35A"/>
@@ -23756,7 +23756,7 @@
           <a:lstStyle/>
           <a:p>
             <a:pPr algn="l"/>
-            <a:fld id="{b5fe9bf3-f919-4574-8479-076138fc083e}" type="datetime3">
+            <a:fld id="{c9317def-778d-43d7-8d25-bb8fc53f6084}" type="datetime3">
               <a:rPr lang="en-GB" sz="1000" dirty="0">
                 <a:solidFill>
                   <a:srgbClr val="C4A35A"/>
@@ -23790,7 +23790,7 @@
           <a:lstStyle/>
           <a:p>
             <a:pPr algn="r"/>
-            <a:fld id="{a4b3f19e-b0eb-404b-8cf5-e2af2088801b}" type="slidenum">
+            <a:fld id="{7938b078-7bbb-4754-beb3-fd1d0444eda6}" type="slidenum">
               <a:rPr lang="en-GB" sz="1000" dirty="0">
                 <a:solidFill>
                   <a:srgbClr val="C4A35A"/>
@@ -24347,7 +24347,7 @@
           <a:lstStyle/>
           <a:p>
             <a:pPr algn="l"/>
-            <a:fld id="{a3e62801-1a5f-4f1a-a6f1-1aee747ea848}" type="datetime3">
+            <a:fld id="{a7622a34-11ef-40fc-8043-27160bd6baf9}" type="datetime3">
               <a:rPr lang="en-GB" sz="1000" dirty="0">
                 <a:solidFill>
                   <a:srgbClr val="C4A35A"/>
@@ -24381,7 +24381,7 @@
           <a:lstStyle/>
           <a:p>
             <a:pPr algn="r"/>
-            <a:fld id="{12cdba31-4ff3-4cd0-bc61-2705891444f4}" type="slidenum">
+            <a:fld id="{2becf470-8354-46f4-be26-db6b206de56f}" type="slidenum">
               <a:rPr lang="en-GB" sz="1000" dirty="0">
                 <a:solidFill>
                   <a:srgbClr val="C4A35A"/>

--- a/laboratory/docs/slides/ACRS_PhD_Proposal_JenishaT_24ETRP720001.pptx
+++ b/laboratory/docs/slides/ACRS_PhD_Proposal_JenishaT_24ETRP720001.pptx
@@ -39,6 +39,7 @@
     <p:sldId id="287" r:id="rId38"/>
     <p:sldId id="288" r:id="rId39"/>
     <p:sldId id="289" r:id="rId40"/>
+    <p:sldId id="290" r:id="rId41"/>
   </p:sldIdLst>
   <p:sldSz cx="12191695" cy="6858000" type="screen4x3"/>
   <p:notesSz cx="6858000" cy="9144000"/>
@@ -3885,7 +3886,7 @@
           <a:lstStyle/>
           <a:p>
             <a:pPr algn="l"/>
-            <a:fld id="{949ba231-cbef-4f0c-81da-16c445884d8e}" type="datetime3">
+            <a:fld id="{71b3aeff-9eb6-466f-a712-8febfb6b1a75}" type="datetime3">
               <a:rPr lang="en-GB" sz="1000" dirty="0">
                 <a:solidFill>
                   <a:srgbClr val="C4A35A"/>
@@ -3919,7 +3920,7 @@
           <a:lstStyle/>
           <a:p>
             <a:pPr algn="r"/>
-            <a:fld id="{3afc2f45-940e-4775-b60e-f0ccf6ab912d}" type="slidenum">
+            <a:fld id="{ce19ab25-573e-4d05-b117-c6152f6fdd1a}" type="slidenum">
               <a:rPr lang="en-GB" sz="1000" dirty="0">
                 <a:solidFill>
                   <a:srgbClr val="C4A35A"/>
@@ -3935,7 +3936,7 @@
                 </a:solidFill>
                 <a:latin typeface="Calibri"/>
               </a:rPr>
-              <a:t> / 34</a:t>
+              <a:t> / 35</a:t>
             </a:r>
             <a:endParaRPr lang="en-GB" sz="1000"/>
           </a:p>
@@ -4971,7 +4972,7 @@
           <a:lstStyle/>
           <a:p>
             <a:pPr algn="l"/>
-            <a:fld id="{b1e5f2c4-2fcc-489e-913a-764aea4745f3}" type="datetime3">
+            <a:fld id="{ce068a3b-f7fd-44e7-9125-d8d2e115f582}" type="datetime3">
               <a:rPr lang="en-GB" sz="1000" dirty="0">
                 <a:solidFill>
                   <a:srgbClr val="C4A35A"/>
@@ -5005,7 +5006,7 @@
           <a:lstStyle/>
           <a:p>
             <a:pPr algn="r"/>
-            <a:fld id="{0927d157-d9b7-40e5-b493-c5518bd63e20}" type="slidenum">
+            <a:fld id="{fa015c52-3a36-4cc0-9614-1ce6379e3691}" type="slidenum">
               <a:rPr lang="en-GB" sz="1000" dirty="0">
                 <a:solidFill>
                   <a:srgbClr val="C4A35A"/>
@@ -5021,7 +5022,7 @@
                 </a:solidFill>
                 <a:latin typeface="Calibri"/>
               </a:rPr>
-              <a:t> / 34</a:t>
+              <a:t> / 35</a:t>
             </a:r>
             <a:endParaRPr lang="en-GB" sz="1000"/>
           </a:p>
@@ -6057,7 +6058,7 @@
           <a:lstStyle/>
           <a:p>
             <a:pPr algn="l"/>
-            <a:fld id="{fcf29b54-828a-4842-bcce-c98fb073782e}" type="datetime3">
+            <a:fld id="{e64e9e07-3ef5-4475-877b-ff1423d6d7a1}" type="datetime3">
               <a:rPr lang="en-GB" sz="1000" dirty="0">
                 <a:solidFill>
                   <a:srgbClr val="C4A35A"/>
@@ -6091,7 +6092,7 @@
           <a:lstStyle/>
           <a:p>
             <a:pPr algn="r"/>
-            <a:fld id="{8b728fc7-bb8c-4dcd-9613-34b2f4779ca7}" type="slidenum">
+            <a:fld id="{13d48605-84cc-4369-9c51-85df095d5af2}" type="slidenum">
               <a:rPr lang="en-GB" sz="1000" dirty="0">
                 <a:solidFill>
                   <a:srgbClr val="C4A35A"/>
@@ -6107,7 +6108,7 @@
                 </a:solidFill>
                 <a:latin typeface="Calibri"/>
               </a:rPr>
-              <a:t> / 34</a:t>
+              <a:t> / 35</a:t>
             </a:r>
             <a:endParaRPr lang="en-GB" sz="1000"/>
           </a:p>
@@ -6509,7 +6510,7 @@
                 </a:solidFill>
                 <a:latin typeface="Calibri"/>
               </a:rPr>
-              <a:t>Qualitative map only. This table names the gap each family leaves for ACRS; it does not claim a percentage improvement over any baseline.</a:t>
+              <a:t>Qualitative map only. This table names the gap each family leaves for ACRS; it does not claim a percentage improvement over any baseline. The next slide is the FET section To Solve the Research Gap.</a:t>
             </a:r>
           </a:p>
         </p:txBody>
@@ -6970,7 +6971,7 @@
           <a:lstStyle/>
           <a:p>
             <a:pPr algn="l"/>
-            <a:fld id="{450b0227-7477-4c6c-a327-1c5a81c13a30}" type="datetime3">
+            <a:fld id="{26a1c519-33e3-4d13-b9a8-1b7ca1c27f9a}" type="datetime3">
               <a:rPr lang="en-GB" sz="1000" dirty="0">
                 <a:solidFill>
                   <a:srgbClr val="C4A35A"/>
@@ -7004,7 +7005,7 @@
           <a:lstStyle/>
           <a:p>
             <a:pPr algn="r"/>
-            <a:fld id="{72e3007c-7f29-4be7-804f-65ca5fcb8d50}" type="slidenum">
+            <a:fld id="{786acd1e-24df-4760-9453-969e47489651}" type="slidenum">
               <a:rPr lang="en-GB" sz="1000" dirty="0">
                 <a:solidFill>
                   <a:srgbClr val="C4A35A"/>
@@ -7020,7 +7021,7 @@
                 </a:solidFill>
                 <a:latin typeface="Calibri"/>
               </a:rPr>
-              <a:t> / 34</a:t>
+              <a:t> / 35</a:t>
             </a:r>
             <a:endParaRPr lang="en-GB" sz="1000"/>
           </a:p>
@@ -7352,7 +7353,7 @@
                 </a:solidFill>
                 <a:latin typeface="Calibri"/>
               </a:rPr>
-              <a:t>RESEARCH PROPOSAL  ·  Identified Research Problem</a:t>
+              <a:t>RESEARCH PROPOSAL  ·  To Solve the Research Gap</a:t>
             </a:r>
           </a:p>
         </p:txBody>
@@ -7387,7 +7388,7 @@
                 </a:solidFill>
                 <a:latin typeface="Calibri"/>
               </a:rPr>
-              <a:t>Identified Research Problem</a:t>
+              <a:t>To Solve the Research Gap</a:t>
             </a:r>
           </a:p>
         </p:txBody>
@@ -7422,159 +7423,446 @@
                 </a:solidFill>
                 <a:latin typeface="Calibri"/>
               </a:rPr>
-              <a:t>Five architectural gaps. Four named objectives. One integration contract. Closing a gap is evidenced by a runnable loop and citable equations, not by a promised leaderboard number.</a:t>
-            </a:r>
-          </a:p>
-        </p:txBody>
-      </p:sp>
-      <p:sp>
-        <p:nvSpPr>
-          <p:cNvPr id="12" name="TextBox 11"/>
-          <p:cNvSpPr txBox="1"/>
-          <p:nvPr/>
-        </p:nvSpPr>
-        <p:spPr>
-          <a:xfrm>
-            <a:off x="365760" y="1993392"/>
-            <a:ext cx="11430000" cy="3977639"/>
-          </a:xfrm>
-          <a:prstGeom prst="rect">
-            <a:avLst/>
-          </a:prstGeom>
-          <a:noFill/>
-        </p:spPr>
-        <p:txBody>
-          <a:bodyPr wrap="square">
-            <a:spAutoFit/>
-          </a:bodyPr>
-          <a:lstStyle/>
-          <a:p>
-            <a:pPr>
-              <a:spcAft>
-                <a:spcPts val="600"/>
-              </a:spcAft>
-              <a:buFont typeface="Arial"/>
-              <a:buChar char="•"/>
-            </a:pPr>
-            <a:r>
-              <a:rPr sz="1300">
-                <a:solidFill>
-                  <a:srgbClr val="1A1214"/>
-                </a:solidFill>
-                <a:latin typeface="Calibri"/>
-              </a:rPr>
-              <a:t>G1 — Turn-amnesic retrieval. ToolLLM SBERT (Qin et al., ICLR 2024) and ToolRerank (Zheng et al., LREC-COLING 2024) score each query independently. Session co-activation is unused. → Objective 1 SATR.</a:t>
-            </a:r>
-          </a:p>
-          <a:p>
-            <a:pPr>
-              <a:spcAft>
-                <a:spcPts val="600"/>
-              </a:spcAft>
-              <a:buFont typeface="Arial"/>
-              <a:buChar char="•"/>
-            </a:pPr>
-            <a:r>
-              <a:rPr sz="1300">
-                <a:solidFill>
-                  <a:srgbClr val="1A1214"/>
-                </a:solidFill>
-                <a:latin typeface="Calibri"/>
-              </a:rPr>
-              <a:t>G2 — Routers pick models or authored SOPs, not tool-specialist agents with a training-free posterior. RouteLLM / PILOT / MasRouter / MetaGPT. → Objective 2 APRR.</a:t>
-            </a:r>
-          </a:p>
-          <a:p>
-            <a:pPr>
-              <a:spcAft>
-                <a:spcPts val="600"/>
-              </a:spcAft>
-              <a:buFont typeface="Arial"/>
-              <a:buChar char="•"/>
-            </a:pPr>
-            <a:r>
-              <a:rPr sz="1300">
-                <a:solidFill>
-                  <a:srgbClr val="1A1214"/>
-                </a:solidFill>
-                <a:latin typeface="Calibri"/>
-              </a:rPr>
-              <a:t>G3 — MAS communication is star, SOP, or chat. No mesh vote whose object is a live tool identifier. AutoGen, MetaGPT, ChatDev, CAMEL. → Objective 3 MNCD.</a:t>
-            </a:r>
-          </a:p>
-          <a:p>
-            <a:pPr>
-              <a:spcAft>
-                <a:spcPts val="600"/>
-              </a:spcAft>
-              <a:buFont typeface="Arial"/>
-              <a:buChar char="•"/>
-            </a:pPr>
-            <a:r>
-              <a:rPr sz="1300">
-                <a:solidFill>
-                  <a:srgbClr val="1A1214"/>
-                </a:solidFill>
-                <a:latin typeface="Calibri"/>
-              </a:rPr>
-              <a:t>G4 — Prompt compressors (LLMLingua, EMNLP 2023) do not write live citations back into retrieval. → Objective 4 FCNP.</a:t>
-            </a:r>
-          </a:p>
-          <a:p>
-            <a:pPr>
-              <a:spcAft>
-                <a:spcPts val="600"/>
-              </a:spcAft>
-              <a:buFont typeface="Arial"/>
-              <a:buChar char="•"/>
-            </a:pPr>
-            <a:r>
-              <a:rPr sz="1300">
-                <a:solidFill>
-                  <a:srgbClr val="1A1214"/>
-                </a:solidFill>
-                <a:latin typeface="Calibri"/>
-              </a:rPr>
-              <a:t>G5 — No closed four-stage contract executed on journal-publishable Indian OGD (data.gov.in / AGMARKNET / IMD / DES), with ToolBench used only as a ranking library. → Integrated ACRS.</a:t>
-            </a:r>
-          </a:p>
-        </p:txBody>
-      </p:sp>
-      <p:sp>
-        <p:nvSpPr>
-          <p:cNvPr id="13" name="TextBox 12"/>
-          <p:cNvSpPr txBox="1"/>
-          <p:nvPr/>
-        </p:nvSpPr>
-        <p:spPr>
-          <a:xfrm>
-            <a:off x="365760" y="6199632"/>
-            <a:ext cx="11430000" cy="256032"/>
-          </a:xfrm>
-          <a:prstGeom prst="rect">
-            <a:avLst/>
-          </a:prstGeom>
-          <a:noFill/>
-        </p:spPr>
-        <p:txBody>
-          <a:bodyPr wrap="square">
-            <a:spAutoFit/>
-          </a:bodyPr>
-          <a:lstStyle/>
-          <a:p>
-            <a:pPr algn="l"/>
-            <a:r>
-              <a:rPr sz="1000" b="0">
-                <a:solidFill>
-                  <a:srgbClr val="5C4A4E"/>
-                </a:solidFill>
-                <a:latin typeface="Calibri"/>
-              </a:rPr>
-              <a:t>Gaps are architectural. This deck does not convert them into NDCG, latency, or accuracy targets.</a:t>
-            </a:r>
-          </a:p>
-        </p:txBody>
-      </p:sp>
+              <a:t>To solve the research gaps identified in Evidence 1–14, the following work is proposed. Closing a gap is a named module on a closed loop, not a promised leaderboard number.</a:t>
+            </a:r>
+          </a:p>
+        </p:txBody>
+      </p:sp>
+      <p:graphicFrame>
+        <p:nvGraphicFramePr>
+          <p:cNvPr id="12" name="Table 11"/>
+          <p:cNvGraphicFramePr>
+            <a:graphicFrameLocks noGrp="1"/>
+          </p:cNvGraphicFramePr>
+          <p:nvPr/>
+        </p:nvGraphicFramePr>
+        <p:xfrm>
+          <a:off x="320040" y="1993392"/>
+          <a:ext cx="11521439" cy="4023360"/>
+        </p:xfrm>
+        <a:graphic>
+          <a:graphicData uri="http://schemas.openxmlformats.org/drawingml/2006/table">
+            <a:tbl>
+              <a:tblPr firstRow="1" bandRow="1">
+                <a:tableStyleId>{5C22544A-7EE6-4342-B048-85BDC9FD1C3A}</a:tableStyleId>
+              </a:tblPr>
+              <a:tblGrid>
+                <a:gridCol w="2995574"/>
+                <a:gridCol w="2304288"/>
+                <a:gridCol w="6221577"/>
+              </a:tblGrid>
+              <a:tr h="670560">
+                <a:tc>
+                  <a:txBody>
+                    <a:bodyPr/>
+                    <a:lstStyle/>
+                    <a:p>
+                      <a:r>
+                        <a:rPr b="1" sz="1100">
+                          <a:solidFill>
+                            <a:srgbClr val="FFFFFF"/>
+                          </a:solidFill>
+                          <a:latin typeface="Calibri"/>
+                        </a:rPr>
+                        <a:t>Research gap</a:t>
+                      </a:r>
+                    </a:p>
+                  </a:txBody>
+                  <a:tcPr>
+                    <a:solidFill>
+                      <a:srgbClr val="7C1D2E"/>
+                    </a:solidFill>
+                  </a:tcPr>
+                </a:tc>
+                <a:tc>
+                  <a:txBody>
+                    <a:bodyPr/>
+                    <a:lstStyle/>
+                    <a:p>
+                      <a:r>
+                        <a:rPr b="1" sz="1100">
+                          <a:solidFill>
+                            <a:srgbClr val="FFFFFF"/>
+                          </a:solidFill>
+                          <a:latin typeface="Calibri"/>
+                        </a:rPr>
+                        <a:t>Left open by</a:t>
+                      </a:r>
+                    </a:p>
+                  </a:txBody>
+                  <a:tcPr>
+                    <a:solidFill>
+                      <a:srgbClr val="7C1D2E"/>
+                    </a:solidFill>
+                  </a:tcPr>
+                </a:tc>
+                <a:tc>
+                  <a:txBody>
+                    <a:bodyPr/>
+                    <a:lstStyle/>
+                    <a:p>
+                      <a:r>
+                        <a:rPr b="1" sz="1100">
+                          <a:solidFill>
+                            <a:srgbClr val="FFFFFF"/>
+                          </a:solidFill>
+                          <a:latin typeface="Calibri"/>
+                        </a:rPr>
+                        <a:t>To solve the research gap</a:t>
+                      </a:r>
+                    </a:p>
+                  </a:txBody>
+                  <a:tcPr>
+                    <a:solidFill>
+                      <a:srgbClr val="7C1D2E"/>
+                    </a:solidFill>
+                  </a:tcPr>
+                </a:tc>
+              </a:tr>
+              <a:tr h="670560">
+                <a:tc>
+                  <a:txBody>
+                    <a:bodyPr/>
+                    <a:lstStyle/>
+                    <a:p>
+                      <a:r>
+                        <a:rPr sz="1000" b="1">
+                          <a:solidFill>
+                            <a:srgbClr val="7C1D2E"/>
+                          </a:solidFill>
+                          <a:latin typeface="Calibri"/>
+                        </a:rPr>
+                        <a:t>G1 — Turn-amnesic retrieval</a:t>
+                      </a:r>
+                    </a:p>
+                  </a:txBody>
+                  <a:tcPr>
+                    <a:solidFill>
+                      <a:srgbClr val="FFFAF3"/>
+                    </a:solidFill>
+                  </a:tcPr>
+                </a:tc>
+                <a:tc>
+                  <a:txBody>
+                    <a:bodyPr/>
+                    <a:lstStyle/>
+                    <a:p>
+                      <a:r>
+                        <a:rPr sz="1000">
+                          <a:solidFill>
+                            <a:srgbClr val="1A1214"/>
+                          </a:solidFill>
+                          <a:latin typeface="Calibri"/>
+                        </a:rPr>
+                        <a:t>Evidence 5, 6, 14</a:t>
+                      </a:r>
+                    </a:p>
+                  </a:txBody>
+                  <a:tcPr>
+                    <a:solidFill>
+                      <a:srgbClr val="FFFAF3"/>
+                    </a:solidFill>
+                  </a:tcPr>
+                </a:tc>
+                <a:tc>
+                  <a:txBody>
+                    <a:bodyPr/>
+                    <a:lstStyle/>
+                    <a:p>
+                      <a:r>
+                        <a:rPr sz="1000">
+                          <a:solidFill>
+                            <a:srgbClr val="1A1214"/>
+                          </a:solidFill>
+                          <a:latin typeface="Calibri"/>
+                        </a:rPr>
+                        <a:t>O1 SATR. Fuse session co-activation with semantic rank; write FCNP residue into the next prior.</a:t>
+                      </a:r>
+                    </a:p>
+                  </a:txBody>
+                  <a:tcPr>
+                    <a:solidFill>
+                      <a:srgbClr val="FFFAF3"/>
+                    </a:solidFill>
+                  </a:tcPr>
+                </a:tc>
+              </a:tr>
+              <a:tr h="670560">
+                <a:tc>
+                  <a:txBody>
+                    <a:bodyPr/>
+                    <a:lstStyle/>
+                    <a:p>
+                      <a:r>
+                        <a:rPr sz="1000" b="1">
+                          <a:solidFill>
+                            <a:srgbClr val="7C1D2E"/>
+                          </a:solidFill>
+                          <a:latin typeface="Calibri"/>
+                        </a:rPr>
+                        <a:t>G2 — Model / SOP routers</a:t>
+                      </a:r>
+                    </a:p>
+                  </a:txBody>
+                  <a:tcPr>
+                    <a:solidFill>
+                      <a:srgbClr val="FFFAF3"/>
+                    </a:solidFill>
+                  </a:tcPr>
+                </a:tc>
+                <a:tc>
+                  <a:txBody>
+                    <a:bodyPr/>
+                    <a:lstStyle/>
+                    <a:p>
+                      <a:r>
+                        <a:rPr sz="1000">
+                          <a:solidFill>
+                            <a:srgbClr val="1A1214"/>
+                          </a:solidFill>
+                          <a:latin typeface="Calibri"/>
+                        </a:rPr>
+                        <a:t>Evidence 2, 7, 8, 9</a:t>
+                      </a:r>
+                    </a:p>
+                  </a:txBody>
+                  <a:tcPr>
+                    <a:solidFill>
+                      <a:srgbClr val="FFFAF3"/>
+                    </a:solidFill>
+                  </a:tcPr>
+                </a:tc>
+                <a:tc>
+                  <a:txBody>
+                    <a:bodyPr/>
+                    <a:lstStyle/>
+                    <a:p>
+                      <a:r>
+                        <a:rPr sz="1000">
+                          <a:solidFill>
+                            <a:srgbClr val="1A1214"/>
+                          </a:solidFill>
+                          <a:latin typeface="Calibri"/>
+                        </a:rPr>
+                        <a:t>O2 APRR. Training-free Dirichlet–Thompson posterior over named specialists, not LLM SKUs.</a:t>
+                      </a:r>
+                    </a:p>
+                  </a:txBody>
+                  <a:tcPr>
+                    <a:solidFill>
+                      <a:srgbClr val="FFFAF3"/>
+                    </a:solidFill>
+                  </a:tcPr>
+                </a:tc>
+              </a:tr>
+              <a:tr h="670560">
+                <a:tc>
+                  <a:txBody>
+                    <a:bodyPr/>
+                    <a:lstStyle/>
+                    <a:p>
+                      <a:r>
+                        <a:rPr sz="1000" b="1">
+                          <a:solidFill>
+                            <a:srgbClr val="7C1D2E"/>
+                          </a:solidFill>
+                          <a:latin typeface="Calibri"/>
+                        </a:rPr>
+                        <a:t>G3 — Chat / star coordination</a:t>
+                      </a:r>
+                    </a:p>
+                  </a:txBody>
+                  <a:tcPr>
+                    <a:solidFill>
+                      <a:srgbClr val="FFFAF3"/>
+                    </a:solidFill>
+                  </a:tcPr>
+                </a:tc>
+                <a:tc>
+                  <a:txBody>
+                    <a:bodyPr/>
+                    <a:lstStyle/>
+                    <a:p>
+                      <a:r>
+                        <a:rPr sz="1000">
+                          <a:solidFill>
+                            <a:srgbClr val="1A1214"/>
+                          </a:solidFill>
+                          <a:latin typeface="Calibri"/>
+                        </a:rPr>
+                        <a:t>Evidence 1, 2, 3, 4</a:t>
+                      </a:r>
+                    </a:p>
+                  </a:txBody>
+                  <a:tcPr>
+                    <a:solidFill>
+                      <a:srgbClr val="FFFAF3"/>
+                    </a:solidFill>
+                  </a:tcPr>
+                </a:tc>
+                <a:tc>
+                  <a:txBody>
+                    <a:bodyPr/>
+                    <a:lstStyle/>
+                    <a:p>
+                      <a:r>
+                        <a:rPr sz="1000">
+                          <a:solidFill>
+                            <a:srgbClr val="1A1214"/>
+                          </a:solidFill>
+                          <a:latin typeface="Calibri"/>
+                        </a:rPr>
+                        <a:t>O3 MNCD. Score-sum over live tool identifiers, then a fail-loud data.gov.in GET.</a:t>
+                      </a:r>
+                    </a:p>
+                  </a:txBody>
+                  <a:tcPr>
+                    <a:solidFill>
+                      <a:srgbClr val="FFFAF3"/>
+                    </a:solidFill>
+                  </a:tcPr>
+                </a:tc>
+              </a:tr>
+              <a:tr h="670560">
+                <a:tc>
+                  <a:txBody>
+                    <a:bodyPr/>
+                    <a:lstStyle/>
+                    <a:p>
+                      <a:r>
+                        <a:rPr sz="1000" b="1">
+                          <a:solidFill>
+                            <a:srgbClr val="7C1D2E"/>
+                          </a:solidFill>
+                          <a:latin typeface="Calibri"/>
+                        </a:rPr>
+                        <a:t>G4 — Token compression, no write-back</a:t>
+                      </a:r>
+                    </a:p>
+                  </a:txBody>
+                  <a:tcPr>
+                    <a:solidFill>
+                      <a:srgbClr val="FFFAF3"/>
+                    </a:solidFill>
+                  </a:tcPr>
+                </a:tc>
+                <a:tc>
+                  <a:txBody>
+                    <a:bodyPr/>
+                    <a:lstStyle/>
+                    <a:p>
+                      <a:r>
+                        <a:rPr sz="1000">
+                          <a:solidFill>
+                            <a:srgbClr val="1A1214"/>
+                          </a:solidFill>
+                          <a:latin typeface="Calibri"/>
+                        </a:rPr>
+                        <a:t>Evidence 10, 11, 12</a:t>
+                      </a:r>
+                    </a:p>
+                  </a:txBody>
+                  <a:tcPr>
+                    <a:solidFill>
+                      <a:srgbClr val="FFFAF3"/>
+                    </a:solidFill>
+                  </a:tcPr>
+                </a:tc>
+                <a:tc>
+                  <a:txBody>
+                    <a:bodyPr/>
+                    <a:lstStyle/>
+                    <a:p>
+                      <a:r>
+                        <a:rPr sz="1000">
+                          <a:solidFill>
+                            <a:srgbClr val="1A1214"/>
+                          </a:solidFill>
+                          <a:latin typeface="Calibri"/>
+                        </a:rPr>
+                        <a:t>O4 FCNP. Conductance prune of the mesh; pin live citations back into SATR.</a:t>
+                      </a:r>
+                    </a:p>
+                  </a:txBody>
+                  <a:tcPr>
+                    <a:solidFill>
+                      <a:srgbClr val="FFFAF3"/>
+                    </a:solidFill>
+                  </a:tcPr>
+                </a:tc>
+              </a:tr>
+              <a:tr h="670560">
+                <a:tc>
+                  <a:txBody>
+                    <a:bodyPr/>
+                    <a:lstStyle/>
+                    <a:p>
+                      <a:r>
+                        <a:rPr sz="1000" b="1">
+                          <a:solidFill>
+                            <a:srgbClr val="7C1D2E"/>
+                          </a:solidFill>
+                          <a:latin typeface="Calibri"/>
+                        </a:rPr>
+                        <a:t>G5 — No live Indian OGD loop</a:t>
+                      </a:r>
+                    </a:p>
+                  </a:txBody>
+                  <a:tcPr>
+                    <a:solidFill>
+                      <a:srgbClr val="FFFAF3"/>
+                    </a:solidFill>
+                  </a:tcPr>
+                </a:tc>
+                <a:tc>
+                  <a:txBody>
+                    <a:bodyPr/>
+                    <a:lstStyle/>
+                    <a:p>
+                      <a:r>
+                        <a:rPr sz="1000">
+                          <a:solidFill>
+                            <a:srgbClr val="1A1214"/>
+                          </a:solidFill>
+                          <a:latin typeface="Calibri"/>
+                        </a:rPr>
+                        <a:t>Evidence 5, 13</a:t>
+                      </a:r>
+                    </a:p>
+                  </a:txBody>
+                  <a:tcPr>
+                    <a:solidFill>
+                      <a:srgbClr val="FFFAF3"/>
+                    </a:solidFill>
+                  </a:tcPr>
+                </a:tc>
+                <a:tc>
+                  <a:txBody>
+                    <a:bodyPr/>
+                    <a:lstStyle/>
+                    <a:p>
+                      <a:r>
+                        <a:rPr sz="1000">
+                          <a:solidFill>
+                            <a:srgbClr val="1A1214"/>
+                          </a:solidFill>
+                          <a:latin typeface="Calibri"/>
+                        </a:rPr>
+                        <a:t>Integrated ACRS on verified Agriculture UUIDs. ToolBench is ranking-only; prices are never invented.</a:t>
+                      </a:r>
+                    </a:p>
+                  </a:txBody>
+                  <a:tcPr>
+                    <a:solidFill>
+                      <a:srgbClr val="FFFAF3"/>
+                    </a:solidFill>
+                  </a:tcPr>
+                </a:tc>
+              </a:tr>
+            </a:tbl>
+          </a:graphicData>
+        </a:graphic>
+      </p:graphicFrame>
       <p:sp>
         <p:nvSpPr>
           <p:cNvPr id="4013" name="Automatic Date 13"/>
@@ -7596,7 +7884,7 @@
           <a:lstStyle/>
           <a:p>
             <a:pPr algn="l"/>
-            <a:fld id="{d998a064-a677-44a9-9cf0-6d7fdba84052}" type="datetime3">
+            <a:fld id="{85443837-34f4-44ed-adbb-71f295ebe8a2}" type="datetime3">
               <a:rPr lang="en-GB" sz="1000" dirty="0">
                 <a:solidFill>
                   <a:srgbClr val="C4A35A"/>
@@ -7630,7 +7918,7 @@
           <a:lstStyle/>
           <a:p>
             <a:pPr algn="r"/>
-            <a:fld id="{a9ce8f31-885c-4b8f-83ec-0bc49f625f94}" type="slidenum">
+            <a:fld id="{781aa607-b344-4401-967e-d1b4431600cc}" type="slidenum">
               <a:rPr lang="en-GB" sz="1000" dirty="0">
                 <a:solidFill>
                   <a:srgbClr val="C4A35A"/>
@@ -7646,7 +7934,7 @@
                 </a:solidFill>
                 <a:latin typeface="Calibri"/>
               </a:rPr>
-              <a:t> / 34</a:t>
+              <a:t> / 35</a:t>
             </a:r>
             <a:endParaRPr lang="en-GB" sz="1000"/>
           </a:p>
@@ -7978,7 +8266,7 @@
                 </a:solidFill>
                 <a:latin typeface="Calibri"/>
               </a:rPr>
-              <a:t>RESEARCH PROPOSAL  ·  Research Title &amp; Aim</a:t>
+              <a:t>RESEARCH PROPOSAL  ·  Identified Research Problem</a:t>
             </a:r>
           </a:p>
         </p:txBody>
@@ -8013,7 +8301,7 @@
                 </a:solidFill>
                 <a:latin typeface="Calibri"/>
               </a:rPr>
-              <a:t>Research Title &amp; Aim</a:t>
+              <a:t>Identified Research Problem</a:t>
             </a:r>
           </a:p>
         </p:txBody>
@@ -8048,7 +8336,7 @@
                 </a:solidFill>
                 <a:latin typeface="Calibri"/>
               </a:rPr>
-              <a:t>Adaptive Context Reasoning System (ACRS): A Structural Orchestration Layer for Multi-Agent LLM Ecosystems</a:t>
+              <a:t>Five architectural gaps. Four named objectives. One integration contract. The previous slide maps each gap onto the module that closes it. Closing a gap is evidenced by a runnable loop and citable equations, not by a promised leaderboard number.</a:t>
             </a:r>
           </a:p>
         </p:txBody>
@@ -8089,7 +8377,7 @@
                 </a:solidFill>
                 <a:latin typeface="Calibri"/>
               </a:rPr>
-              <a:t>Aim. Design, implement, and critically evaluate ACRS — a structural orchestration layer in which session-aware tool retrieval (SATR), training-free specialist routing (APRR), mesh consensus over tool identifiers (MNCD), and flow-coupled context pruning with write-back (FCNP) form a closed loop on live Indian Open Government Data. The proposal-stage claim is architectural completeness and live-pipeline integrity, not a leaderboard number.</a:t>
+              <a:t>G1 — Turn-amnesic retrieval. ToolLLM SBERT (Qin et al., ICLR 2024) and ToolRerank (Zheng et al., LREC-COLING 2024) score each query independently. Session co-activation is unused. → Objective 1 SATR.</a:t>
             </a:r>
           </a:p>
           <a:p>
@@ -8107,7 +8395,7 @@
                 </a:solidFill>
                 <a:latin typeface="Calibri"/>
               </a:rPr>
-              <a:t>Scope of the title. Adaptive = session-conditioned ranking and routing. Context = fused session memory plus mesh residue. Reasoning = specialist posterior plus score-sum consensus. System = four named modules on one contract.</a:t>
+              <a:t>G2 — Routers pick models or authored SOPs, not tool-specialist agents with a training-free posterior. RouteLLM / PILOT / MasRouter / MetaGPT. → Objective 2 APRR.</a:t>
             </a:r>
           </a:p>
           <a:p>
@@ -8125,7 +8413,7 @@
                 </a:solidFill>
                 <a:latin typeface="Calibri"/>
               </a:rPr>
-              <a:t>What the title is not. It is not a new LLM, not a crop-yield model, and not a claim that ACRS already outperforms ToolLLM, MasRouter, or LLMLingua on a published leaderboard.</a:t>
+              <a:t>G3 — MAS communication is star, SOP, or chat. No mesh vote whose object is a live tool identifier. AutoGen, MetaGPT, ChatDev, CAMEL. → Objective 3 MNCD.</a:t>
             </a:r>
           </a:p>
           <a:p>
@@ -8143,7 +8431,7 @@
                 </a:solidFill>
                 <a:latin typeface="Calibri"/>
               </a:rPr>
-              <a:t>Domain lock for the live loop. Agriculture on data.gov.in (AGMARKNET and related verified UUIDs). Other sectors stay out of the inference path in this proposal.</a:t>
+              <a:t>G4 — Prompt compressors (LLMLingua, EMNLP 2023) do not write live citations back into retrieval. → Objective 4 FCNP.</a:t>
             </a:r>
           </a:p>
           <a:p>
@@ -8161,7 +8449,42 @@
                 </a:solidFill>
                 <a:latin typeface="Calibri"/>
               </a:rPr>
-              <a:t>Integration order that the aim implies. SATR (memory) → APRR (who acts) → MNCD (live evidence) → FCNP (prune and write back).</a:t>
+              <a:t>G5 — No closed four-stage contract executed on journal-publishable Indian OGD (data.gov.in / AGMARKNET / IMD / DES), with ToolBench used only as a ranking library. → Integrated ACRS.</a:t>
+            </a:r>
+          </a:p>
+        </p:txBody>
+      </p:sp>
+      <p:sp>
+        <p:nvSpPr>
+          <p:cNvPr id="13" name="TextBox 12"/>
+          <p:cNvSpPr txBox="1"/>
+          <p:nvPr/>
+        </p:nvSpPr>
+        <p:spPr>
+          <a:xfrm>
+            <a:off x="365760" y="6199632"/>
+            <a:ext cx="11430000" cy="256032"/>
+          </a:xfrm>
+          <a:prstGeom prst="rect">
+            <a:avLst/>
+          </a:prstGeom>
+          <a:noFill/>
+        </p:spPr>
+        <p:txBody>
+          <a:bodyPr wrap="square">
+            <a:spAutoFit/>
+          </a:bodyPr>
+          <a:lstStyle/>
+          <a:p>
+            <a:pPr algn="l"/>
+            <a:r>
+              <a:rPr sz="1000" b="0">
+                <a:solidFill>
+                  <a:srgbClr val="5C4A4E"/>
+                </a:solidFill>
+                <a:latin typeface="Calibri"/>
+              </a:rPr>
+              <a:t>Gaps are architectural. This deck does not convert them into NDCG, latency, or accuracy targets.</a:t>
             </a:r>
           </a:p>
         </p:txBody>
@@ -8187,7 +8510,7 @@
           <a:lstStyle/>
           <a:p>
             <a:pPr algn="l"/>
-            <a:fld id="{1bc991c8-4d26-4903-b84e-57086c40be54}" type="datetime3">
+            <a:fld id="{5372b5f5-9417-4e1c-85a0-61e973d7a49b}" type="datetime3">
               <a:rPr lang="en-GB" sz="1000" dirty="0">
                 <a:solidFill>
                   <a:srgbClr val="C4A35A"/>
@@ -8221,7 +8544,7 @@
           <a:lstStyle/>
           <a:p>
             <a:pPr algn="r"/>
-            <a:fld id="{f856e4d2-ef22-46e6-b3b2-515adb734521}" type="slidenum">
+            <a:fld id="{e82186bd-14eb-40e6-ac0e-86b0cfa34915}" type="slidenum">
               <a:rPr lang="en-GB" sz="1000" dirty="0">
                 <a:solidFill>
                   <a:srgbClr val="C4A35A"/>
@@ -8237,7 +8560,7 @@
                 </a:solidFill>
                 <a:latin typeface="Calibri"/>
               </a:rPr>
-              <a:t> / 34</a:t>
+              <a:t> / 35</a:t>
             </a:r>
             <a:endParaRPr lang="en-GB" sz="1000"/>
           </a:p>
@@ -8569,7 +8892,7 @@
                 </a:solidFill>
                 <a:latin typeface="Calibri"/>
               </a:rPr>
-              <a:t>RESEARCH PROPOSAL  ·  Research Objectives</a:t>
+              <a:t>RESEARCH PROPOSAL  ·  Research Title &amp; Aim</a:t>
             </a:r>
           </a:p>
         </p:txBody>
@@ -8604,7 +8927,7 @@
                 </a:solidFill>
                 <a:latin typeface="Calibri"/>
               </a:rPr>
-              <a:t>Research Objectives</a:t>
+              <a:t>Research Title &amp; Aim</a:t>
             </a:r>
           </a:p>
         </p:txBody>
@@ -8639,7 +8962,598 @@
                 </a:solidFill>
                 <a:latin typeface="Calibri"/>
               </a:rPr>
-              <a:t>Four named modules. Each row is a thesis-sized design claim. Metric targets are deferred until a protocol is frozen.</a:t>
+              <a:t>Adaptive Context Reasoning System (ACRS): A Structural Orchestration Layer for Multi-Agent LLM Ecosystems</a:t>
+            </a:r>
+          </a:p>
+        </p:txBody>
+      </p:sp>
+      <p:sp>
+        <p:nvSpPr>
+          <p:cNvPr id="12" name="TextBox 11"/>
+          <p:cNvSpPr txBox="1"/>
+          <p:nvPr/>
+        </p:nvSpPr>
+        <p:spPr>
+          <a:xfrm>
+            <a:off x="365760" y="1993392"/>
+            <a:ext cx="11430000" cy="3977639"/>
+          </a:xfrm>
+          <a:prstGeom prst="rect">
+            <a:avLst/>
+          </a:prstGeom>
+          <a:noFill/>
+        </p:spPr>
+        <p:txBody>
+          <a:bodyPr wrap="square">
+            <a:spAutoFit/>
+          </a:bodyPr>
+          <a:lstStyle/>
+          <a:p>
+            <a:pPr>
+              <a:spcAft>
+                <a:spcPts val="600"/>
+              </a:spcAft>
+              <a:buFont typeface="Arial"/>
+              <a:buChar char="•"/>
+            </a:pPr>
+            <a:r>
+              <a:rPr sz="1300">
+                <a:solidFill>
+                  <a:srgbClr val="1A1214"/>
+                </a:solidFill>
+                <a:latin typeface="Calibri"/>
+              </a:rPr>
+              <a:t>Aim. Design, implement, and critically evaluate ACRS — a structural orchestration layer in which session-aware tool retrieval (SATR), training-free specialist routing (APRR), mesh consensus over tool identifiers (MNCD), and flow-coupled context pruning with write-back (FCNP) form a closed loop on live Indian Open Government Data. The proposal-stage claim is architectural completeness and live-pipeline integrity, not a leaderboard number.</a:t>
+            </a:r>
+          </a:p>
+          <a:p>
+            <a:pPr>
+              <a:spcAft>
+                <a:spcPts val="600"/>
+              </a:spcAft>
+              <a:buFont typeface="Arial"/>
+              <a:buChar char="•"/>
+            </a:pPr>
+            <a:r>
+              <a:rPr sz="1300">
+                <a:solidFill>
+                  <a:srgbClr val="1A1214"/>
+                </a:solidFill>
+                <a:latin typeface="Calibri"/>
+              </a:rPr>
+              <a:t>Scope of the title. Adaptive = session-conditioned ranking and routing. Context = fused session memory plus mesh residue. Reasoning = specialist posterior plus score-sum consensus. System = four named modules on one contract.</a:t>
+            </a:r>
+          </a:p>
+          <a:p>
+            <a:pPr>
+              <a:spcAft>
+                <a:spcPts val="600"/>
+              </a:spcAft>
+              <a:buFont typeface="Arial"/>
+              <a:buChar char="•"/>
+            </a:pPr>
+            <a:r>
+              <a:rPr sz="1300">
+                <a:solidFill>
+                  <a:srgbClr val="1A1214"/>
+                </a:solidFill>
+                <a:latin typeface="Calibri"/>
+              </a:rPr>
+              <a:t>What the title is not. It is not a new LLM, not a crop-yield model, and not a claim that ACRS already outperforms ToolLLM, MasRouter, or LLMLingua on a published leaderboard.</a:t>
+            </a:r>
+          </a:p>
+          <a:p>
+            <a:pPr>
+              <a:spcAft>
+                <a:spcPts val="600"/>
+              </a:spcAft>
+              <a:buFont typeface="Arial"/>
+              <a:buChar char="•"/>
+            </a:pPr>
+            <a:r>
+              <a:rPr sz="1300">
+                <a:solidFill>
+                  <a:srgbClr val="1A1214"/>
+                </a:solidFill>
+                <a:latin typeface="Calibri"/>
+              </a:rPr>
+              <a:t>Domain lock for the live loop. Agriculture on data.gov.in (AGMARKNET and related verified UUIDs). Other sectors stay out of the inference path in this proposal.</a:t>
+            </a:r>
+          </a:p>
+          <a:p>
+            <a:pPr>
+              <a:spcAft>
+                <a:spcPts val="600"/>
+              </a:spcAft>
+              <a:buFont typeface="Arial"/>
+              <a:buChar char="•"/>
+            </a:pPr>
+            <a:r>
+              <a:rPr sz="1300">
+                <a:solidFill>
+                  <a:srgbClr val="1A1214"/>
+                </a:solidFill>
+                <a:latin typeface="Calibri"/>
+              </a:rPr>
+              <a:t>Integration order that the aim implies. SATR (memory) → APRR (who acts) → MNCD (live evidence) → FCNP (prune and write back).</a:t>
+            </a:r>
+          </a:p>
+        </p:txBody>
+      </p:sp>
+      <p:sp>
+        <p:nvSpPr>
+          <p:cNvPr id="4015" name="Automatic Date 15"/>
+          <p:cNvSpPr txBox="1"/>
+          <p:nvPr/>
+        </p:nvSpPr>
+        <p:spPr>
+          <a:xfrm>
+            <a:off x="255016" y="6565900"/>
+            <a:ext cx="3108960" cy="255016"/>
+          </a:xfrm>
+          <a:prstGeom prst="rect">
+            <a:avLst/>
+          </a:prstGeom>
+          <a:noFill/>
+        </p:spPr>
+        <p:txBody>
+          <a:bodyPr wrap="none" lIns="0" tIns="0" rIns="0" bIns="0" anchor="ctr"/>
+          <a:lstStyle/>
+          <a:p>
+            <a:pPr algn="l"/>
+            <a:fld id="{41d81935-a1bb-41f6-86b4-c80899f28a23}" type="datetime3">
+              <a:rPr lang="en-GB" sz="1000" dirty="0">
+                <a:solidFill>
+                  <a:srgbClr val="C4A35A"/>
+                </a:solidFill>
+                <a:latin typeface="Calibri"/>
+              </a:rPr>
+              <a:t>7 September 2026</a:t>
+            </a:fld>
+            <a:endParaRPr lang="en-GB" sz="1000"/>
+          </a:p>
+        </p:txBody>
+      </p:sp>
+      <p:sp>
+        <p:nvSpPr>
+          <p:cNvPr id="5015" name="Automatic Slide Number 15"/>
+          <p:cNvSpPr txBox="1"/>
+          <p:nvPr/>
+        </p:nvSpPr>
+        <p:spPr>
+          <a:xfrm>
+            <a:off x="9601200" y="6565900"/>
+            <a:ext cx="2286000" cy="255016"/>
+          </a:xfrm>
+          <a:prstGeom prst="rect">
+            <a:avLst/>
+          </a:prstGeom>
+          <a:noFill/>
+        </p:spPr>
+        <p:txBody>
+          <a:bodyPr wrap="none" lIns="0" tIns="0" rIns="0" bIns="0" anchor="ctr"/>
+          <a:lstStyle/>
+          <a:p>
+            <a:pPr algn="r"/>
+            <a:fld id="{6469575c-ee2f-4162-a5ca-90f98fed8ed0}" type="slidenum">
+              <a:rPr lang="en-GB" sz="1000" dirty="0">
+                <a:solidFill>
+                  <a:srgbClr val="C4A35A"/>
+                </a:solidFill>
+                <a:latin typeface="Calibri"/>
+              </a:rPr>
+              <a:t>15</a:t>
+            </a:fld>
+            <a:r>
+              <a:rPr lang="en-GB" sz="1000">
+                <a:solidFill>
+                  <a:srgbClr val="C4A35A"/>
+                </a:solidFill>
+                <a:latin typeface="Calibri"/>
+              </a:rPr>
+              <a:t> / 35</a:t>
+            </a:r>
+            <a:endParaRPr lang="en-GB" sz="1000"/>
+          </a:p>
+        </p:txBody>
+      </p:sp>
+    </p:spTree>
+  </p:cSld>
+  <p:clrMapOvr>
+    <a:masterClrMapping/>
+  </p:clrMapOvr>
+  <p:hf sldNum="1" hdr="0" ftr="1" dt="1"/>
+</p:sld>
+</file>
+
+<file path=ppt/slides/slide16.xml><?xml version="1.0" encoding="utf-8"?>
+<p:sld xmlns:a="http://schemas.openxmlformats.org/drawingml/2006/main" xmlns:p="http://schemas.openxmlformats.org/presentationml/2006/main" xmlns:r="http://schemas.openxmlformats.org/officeDocument/2006/relationships">
+  <p:cSld>
+    <p:spTree>
+      <p:nvGrpSpPr>
+        <p:cNvPr id="1" name=""/>
+        <p:cNvGrpSpPr/>
+        <p:nvPr/>
+      </p:nvGrpSpPr>
+      <p:grpSpPr/>
+      <p:sp>
+        <p:nvSpPr>
+          <p:cNvPr id="2" name="Rectangle 1"/>
+          <p:cNvSpPr/>
+          <p:nvPr/>
+        </p:nvSpPr>
+        <p:spPr>
+          <a:xfrm>
+            <a:off x="0" y="0"/>
+            <a:ext cx="12191695" cy="658368"/>
+          </a:xfrm>
+          <a:prstGeom prst="rect">
+            <a:avLst/>
+          </a:prstGeom>
+          <a:solidFill>
+            <a:srgbClr val="7C1D2E"/>
+          </a:solidFill>
+          <a:ln>
+            <a:noFill/>
+          </a:ln>
+        </p:spPr>
+        <p:style>
+          <a:lnRef idx="1">
+            <a:schemeClr val="accent1"/>
+          </a:lnRef>
+          <a:fillRef idx="3">
+            <a:schemeClr val="accent1"/>
+          </a:fillRef>
+          <a:effectRef idx="2">
+            <a:schemeClr val="accent1"/>
+          </a:effectRef>
+          <a:fontRef idx="minor">
+            <a:schemeClr val="lt1"/>
+          </a:fontRef>
+        </p:style>
+        <p:txBody>
+          <a:bodyPr rtlCol="0" anchor="ctr"/>
+          <a:lstStyle/>
+          <a:p>
+            <a:pPr algn="ctr"/>
+          </a:p>
+        </p:txBody>
+      </p:sp>
+      <p:sp>
+        <p:nvSpPr>
+          <p:cNvPr id="3" name="Rectangle 2"/>
+          <p:cNvSpPr/>
+          <p:nvPr/>
+        </p:nvSpPr>
+        <p:spPr>
+          <a:xfrm>
+            <a:off x="0" y="658368"/>
+            <a:ext cx="12191695" cy="54864"/>
+          </a:xfrm>
+          <a:prstGeom prst="rect">
+            <a:avLst/>
+          </a:prstGeom>
+          <a:solidFill>
+            <a:srgbClr val="C4A35A"/>
+          </a:solidFill>
+          <a:ln>
+            <a:noFill/>
+          </a:ln>
+        </p:spPr>
+        <p:style>
+          <a:lnRef idx="1">
+            <a:schemeClr val="accent1"/>
+          </a:lnRef>
+          <a:fillRef idx="3">
+            <a:schemeClr val="accent1"/>
+          </a:fillRef>
+          <a:effectRef idx="2">
+            <a:schemeClr val="accent1"/>
+          </a:effectRef>
+          <a:fontRef idx="minor">
+            <a:schemeClr val="lt1"/>
+          </a:fontRef>
+        </p:style>
+        <p:txBody>
+          <a:bodyPr rtlCol="0" anchor="ctr"/>
+          <a:lstStyle/>
+          <a:p>
+            <a:pPr algn="ctr"/>
+          </a:p>
+        </p:txBody>
+      </p:sp>
+      <p:sp>
+        <p:nvSpPr>
+          <p:cNvPr id="4" name="Rectangle 3"/>
+          <p:cNvSpPr/>
+          <p:nvPr/>
+        </p:nvSpPr>
+        <p:spPr>
+          <a:xfrm>
+            <a:off x="0" y="6510528"/>
+            <a:ext cx="12191695" cy="347472"/>
+          </a:xfrm>
+          <a:prstGeom prst="rect">
+            <a:avLst/>
+          </a:prstGeom>
+          <a:solidFill>
+            <a:srgbClr val="7C1D2E"/>
+          </a:solidFill>
+          <a:ln>
+            <a:noFill/>
+          </a:ln>
+        </p:spPr>
+        <p:style>
+          <a:lnRef idx="1">
+            <a:schemeClr val="accent1"/>
+          </a:lnRef>
+          <a:fillRef idx="3">
+            <a:schemeClr val="accent1"/>
+          </a:fillRef>
+          <a:effectRef idx="2">
+            <a:schemeClr val="accent1"/>
+          </a:effectRef>
+          <a:fontRef idx="minor">
+            <a:schemeClr val="lt1"/>
+          </a:fontRef>
+        </p:style>
+        <p:txBody>
+          <a:bodyPr rtlCol="0" anchor="ctr"/>
+          <a:lstStyle/>
+          <a:p>
+            <a:pPr algn="ctr"/>
+          </a:p>
+        </p:txBody>
+      </p:sp>
+      <p:sp>
+        <p:nvSpPr>
+          <p:cNvPr id="5" name="TextBox 4"/>
+          <p:cNvSpPr txBox="1"/>
+          <p:nvPr/>
+        </p:nvSpPr>
+        <p:spPr>
+          <a:xfrm>
+            <a:off x="292608" y="73152"/>
+            <a:ext cx="11521440" cy="292608"/>
+          </a:xfrm>
+          <a:prstGeom prst="rect">
+            <a:avLst/>
+          </a:prstGeom>
+          <a:noFill/>
+        </p:spPr>
+        <p:txBody>
+          <a:bodyPr wrap="square">
+            <a:spAutoFit/>
+          </a:bodyPr>
+          <a:lstStyle/>
+          <a:p>
+            <a:pPr algn="l"/>
+            <a:r>
+              <a:rPr sz="1300" b="1">
+                <a:solidFill>
+                  <a:srgbClr val="FFFFFF"/>
+                </a:solidFill>
+                <a:latin typeface="Calibri"/>
+              </a:rPr>
+              <a:t>M. S. RAMAIAH UNIVERSITY OF APPLIED SCIENCES</a:t>
+            </a:r>
+          </a:p>
+        </p:txBody>
+      </p:sp>
+      <p:sp>
+        <p:nvSpPr>
+          <p:cNvPr id="6" name="TextBox 5"/>
+          <p:cNvSpPr txBox="1"/>
+          <p:nvPr/>
+        </p:nvSpPr>
+        <p:spPr>
+          <a:xfrm>
+            <a:off x="292608" y="347472"/>
+            <a:ext cx="11521440" cy="256032"/>
+          </a:xfrm>
+          <a:prstGeom prst="rect">
+            <a:avLst/>
+          </a:prstGeom>
+          <a:noFill/>
+        </p:spPr>
+        <p:txBody>
+          <a:bodyPr wrap="square">
+            <a:spAutoFit/>
+          </a:bodyPr>
+          <a:lstStyle/>
+          <a:p>
+            <a:pPr algn="l"/>
+            <a:r>
+              <a:rPr sz="1100" b="0">
+                <a:solidFill>
+                  <a:srgbClr val="C4A35A"/>
+                </a:solidFill>
+                <a:latin typeface="Calibri"/>
+              </a:rPr>
+              <a:t>Faculty of Engineering and Technology  ·  RESEARCH PROPOSAL</a:t>
+            </a:r>
+          </a:p>
+        </p:txBody>
+      </p:sp>
+      <p:sp>
+        <p:nvSpPr>
+          <p:cNvPr id="7" name="TextBox 6"/>
+          <p:cNvSpPr txBox="1"/>
+          <p:nvPr/>
+        </p:nvSpPr>
+        <p:spPr>
+          <a:xfrm>
+            <a:off x="3383280" y="6565392"/>
+            <a:ext cx="5760720" cy="237744"/>
+          </a:xfrm>
+          <a:prstGeom prst="rect">
+            <a:avLst/>
+          </a:prstGeom>
+          <a:noFill/>
+        </p:spPr>
+        <p:txBody>
+          <a:bodyPr wrap="square">
+            <a:spAutoFit/>
+          </a:bodyPr>
+          <a:lstStyle/>
+          <a:p>
+            <a:pPr algn="ctr"/>
+            <a:r>
+              <a:rPr sz="1000" b="0">
+                <a:solidFill>
+                  <a:srgbClr val="FFFFFF"/>
+                </a:solidFill>
+                <a:latin typeface="Calibri"/>
+              </a:rPr>
+              <a:t>Jenisha T  |  24ETRP720001  |  Part Time</a:t>
+            </a:r>
+          </a:p>
+        </p:txBody>
+      </p:sp>
+      <p:sp>
+        <p:nvSpPr>
+          <p:cNvPr id="8" name="Rectangle 7"/>
+          <p:cNvSpPr/>
+          <p:nvPr/>
+        </p:nvSpPr>
+        <p:spPr>
+          <a:xfrm>
+            <a:off x="0" y="713232"/>
+            <a:ext cx="12191695" cy="5797296"/>
+          </a:xfrm>
+          <a:prstGeom prst="rect">
+            <a:avLst/>
+          </a:prstGeom>
+          <a:solidFill>
+            <a:srgbClr val="FFFAF3"/>
+          </a:solidFill>
+          <a:ln>
+            <a:noFill/>
+          </a:ln>
+        </p:spPr>
+        <p:style>
+          <a:lnRef idx="1">
+            <a:schemeClr val="accent1"/>
+          </a:lnRef>
+          <a:fillRef idx="3">
+            <a:schemeClr val="accent1"/>
+          </a:fillRef>
+          <a:effectRef idx="2">
+            <a:schemeClr val="accent1"/>
+          </a:effectRef>
+          <a:fontRef idx="minor">
+            <a:schemeClr val="lt1"/>
+          </a:fontRef>
+        </p:style>
+        <p:txBody>
+          <a:bodyPr rtlCol="0" anchor="ctr"/>
+          <a:lstStyle/>
+          <a:p>
+            <a:pPr algn="ctr"/>
+          </a:p>
+        </p:txBody>
+      </p:sp>
+      <p:sp>
+        <p:nvSpPr>
+          <p:cNvPr id="9" name="TextBox 8"/>
+          <p:cNvSpPr txBox="1"/>
+          <p:nvPr/>
+        </p:nvSpPr>
+        <p:spPr>
+          <a:xfrm>
+            <a:off x="365760" y="804672"/>
+            <a:ext cx="11430000" cy="237744"/>
+          </a:xfrm>
+          <a:prstGeom prst="rect">
+            <a:avLst/>
+          </a:prstGeom>
+          <a:noFill/>
+        </p:spPr>
+        <p:txBody>
+          <a:bodyPr wrap="square">
+            <a:spAutoFit/>
+          </a:bodyPr>
+          <a:lstStyle/>
+          <a:p>
+            <a:pPr algn="l"/>
+            <a:r>
+              <a:rPr sz="1100" b="1">
+                <a:solidFill>
+                  <a:srgbClr val="7C1D2E"/>
+                </a:solidFill>
+                <a:latin typeface="Calibri"/>
+              </a:rPr>
+              <a:t>RESEARCH PROPOSAL  ·  Research Objectives</a:t>
+            </a:r>
+          </a:p>
+        </p:txBody>
+      </p:sp>
+      <p:sp>
+        <p:nvSpPr>
+          <p:cNvPr id="10" name="TextBox 9"/>
+          <p:cNvSpPr txBox="1"/>
+          <p:nvPr/>
+        </p:nvSpPr>
+        <p:spPr>
+          <a:xfrm>
+            <a:off x="365760" y="1024128"/>
+            <a:ext cx="11430000" cy="502920"/>
+          </a:xfrm>
+          <a:prstGeom prst="rect">
+            <a:avLst/>
+          </a:prstGeom>
+          <a:noFill/>
+        </p:spPr>
+        <p:txBody>
+          <a:bodyPr wrap="square">
+            <a:spAutoFit/>
+          </a:bodyPr>
+          <a:lstStyle/>
+          <a:p>
+            <a:pPr algn="l"/>
+            <a:r>
+              <a:rPr sz="2200" b="1">
+                <a:solidFill>
+                  <a:srgbClr val="1A1214"/>
+                </a:solidFill>
+                <a:latin typeface="Calibri"/>
+              </a:rPr>
+              <a:t>Research Objectives</a:t>
+            </a:r>
+          </a:p>
+        </p:txBody>
+      </p:sp>
+      <p:sp>
+        <p:nvSpPr>
+          <p:cNvPr id="11" name="TextBox 10"/>
+          <p:cNvSpPr txBox="1"/>
+          <p:nvPr/>
+        </p:nvSpPr>
+        <p:spPr>
+          <a:xfrm>
+            <a:off x="365760" y="1572768"/>
+            <a:ext cx="11430000" cy="384048"/>
+          </a:xfrm>
+          <a:prstGeom prst="rect">
+            <a:avLst/>
+          </a:prstGeom>
+          <a:noFill/>
+        </p:spPr>
+        <p:txBody>
+          <a:bodyPr wrap="square">
+            <a:spAutoFit/>
+          </a:bodyPr>
+          <a:lstStyle/>
+          <a:p>
+            <a:pPr algn="l"/>
+            <a:r>
+              <a:rPr sz="1300" b="0">
+                <a:solidFill>
+                  <a:srgbClr val="5C4A4E"/>
+                </a:solidFill>
+                <a:latin typeface="Calibri"/>
+              </a:rPr>
+              <a:t>To solve the research gap, four named modules are proposed. Each row is a thesis-sized design claim. Metric targets are deferred until a protocol is frozen.</a:t>
             </a:r>
           </a:p>
         </p:txBody>
@@ -9013,7 +9927,7 @@
       </p:graphicFrame>
       <p:sp>
         <p:nvSpPr>
-          <p:cNvPr id="4015" name="Automatic Date 15"/>
+          <p:cNvPr id="4016" name="Automatic Date 16"/>
           <p:cNvSpPr txBox="1"/>
           <p:nvPr/>
         </p:nvSpPr>
@@ -9032,7 +9946,7 @@
           <a:lstStyle/>
           <a:p>
             <a:pPr algn="l"/>
-            <a:fld id="{3a948abf-fff8-4d13-82ce-fce9c4abd810}" type="datetime3">
+            <a:fld id="{c773e69a-667a-4e8e-8b00-7215ade6f64c}" type="datetime3">
               <a:rPr lang="en-GB" sz="1000" dirty="0">
                 <a:solidFill>
                   <a:srgbClr val="C4A35A"/>
@@ -9047,7 +9961,7 @@
       </p:sp>
       <p:sp>
         <p:nvSpPr>
-          <p:cNvPr id="5015" name="Automatic Slide Number 15"/>
+          <p:cNvPr id="5016" name="Automatic Slide Number 16"/>
           <p:cNvSpPr txBox="1"/>
           <p:nvPr/>
         </p:nvSpPr>
@@ -9066,1064 +9980,7 @@
           <a:lstStyle/>
           <a:p>
             <a:pPr algn="r"/>
-            <a:fld id="{189589f4-325b-4902-a1aa-3c37eca4637e}" type="slidenum">
-              <a:rPr lang="en-GB" sz="1000" dirty="0">
-                <a:solidFill>
-                  <a:srgbClr val="C4A35A"/>
-                </a:solidFill>
-                <a:latin typeface="Calibri"/>
-              </a:rPr>
-              <a:t>15</a:t>
-            </a:fld>
-            <a:r>
-              <a:rPr lang="en-GB" sz="1000">
-                <a:solidFill>
-                  <a:srgbClr val="C4A35A"/>
-                </a:solidFill>
-                <a:latin typeface="Calibri"/>
-              </a:rPr>
-              <a:t> / 34</a:t>
-            </a:r>
-            <a:endParaRPr lang="en-GB" sz="1000"/>
-          </a:p>
-        </p:txBody>
-      </p:sp>
-    </p:spTree>
-  </p:cSld>
-  <p:clrMapOvr>
-    <a:masterClrMapping/>
-  </p:clrMapOvr>
-  <p:hf sldNum="1" hdr="0" ftr="1" dt="1"/>
-</p:sld>
-</file>
-
-<file path=ppt/slides/slide16.xml><?xml version="1.0" encoding="utf-8"?>
-<p:sld xmlns:a="http://schemas.openxmlformats.org/drawingml/2006/main" xmlns:p="http://schemas.openxmlformats.org/presentationml/2006/main" xmlns:r="http://schemas.openxmlformats.org/officeDocument/2006/relationships">
-  <p:cSld>
-    <p:spTree>
-      <p:nvGrpSpPr>
-        <p:cNvPr id="1" name=""/>
-        <p:cNvGrpSpPr/>
-        <p:nvPr/>
-      </p:nvGrpSpPr>
-      <p:grpSpPr/>
-      <p:sp>
-        <p:nvSpPr>
-          <p:cNvPr id="2" name="Rectangle 1"/>
-          <p:cNvSpPr/>
-          <p:nvPr/>
-        </p:nvSpPr>
-        <p:spPr>
-          <a:xfrm>
-            <a:off x="0" y="0"/>
-            <a:ext cx="12191695" cy="658368"/>
-          </a:xfrm>
-          <a:prstGeom prst="rect">
-            <a:avLst/>
-          </a:prstGeom>
-          <a:solidFill>
-            <a:srgbClr val="7C1D2E"/>
-          </a:solidFill>
-          <a:ln>
-            <a:noFill/>
-          </a:ln>
-        </p:spPr>
-        <p:style>
-          <a:lnRef idx="1">
-            <a:schemeClr val="accent1"/>
-          </a:lnRef>
-          <a:fillRef idx="3">
-            <a:schemeClr val="accent1"/>
-          </a:fillRef>
-          <a:effectRef idx="2">
-            <a:schemeClr val="accent1"/>
-          </a:effectRef>
-          <a:fontRef idx="minor">
-            <a:schemeClr val="lt1"/>
-          </a:fontRef>
-        </p:style>
-        <p:txBody>
-          <a:bodyPr rtlCol="0" anchor="ctr"/>
-          <a:lstStyle/>
-          <a:p>
-            <a:pPr algn="ctr"/>
-          </a:p>
-        </p:txBody>
-      </p:sp>
-      <p:sp>
-        <p:nvSpPr>
-          <p:cNvPr id="3" name="Rectangle 2"/>
-          <p:cNvSpPr/>
-          <p:nvPr/>
-        </p:nvSpPr>
-        <p:spPr>
-          <a:xfrm>
-            <a:off x="0" y="658368"/>
-            <a:ext cx="12191695" cy="54864"/>
-          </a:xfrm>
-          <a:prstGeom prst="rect">
-            <a:avLst/>
-          </a:prstGeom>
-          <a:solidFill>
-            <a:srgbClr val="C4A35A"/>
-          </a:solidFill>
-          <a:ln>
-            <a:noFill/>
-          </a:ln>
-        </p:spPr>
-        <p:style>
-          <a:lnRef idx="1">
-            <a:schemeClr val="accent1"/>
-          </a:lnRef>
-          <a:fillRef idx="3">
-            <a:schemeClr val="accent1"/>
-          </a:fillRef>
-          <a:effectRef idx="2">
-            <a:schemeClr val="accent1"/>
-          </a:effectRef>
-          <a:fontRef idx="minor">
-            <a:schemeClr val="lt1"/>
-          </a:fontRef>
-        </p:style>
-        <p:txBody>
-          <a:bodyPr rtlCol="0" anchor="ctr"/>
-          <a:lstStyle/>
-          <a:p>
-            <a:pPr algn="ctr"/>
-          </a:p>
-        </p:txBody>
-      </p:sp>
-      <p:sp>
-        <p:nvSpPr>
-          <p:cNvPr id="4" name="Rectangle 3"/>
-          <p:cNvSpPr/>
-          <p:nvPr/>
-        </p:nvSpPr>
-        <p:spPr>
-          <a:xfrm>
-            <a:off x="0" y="6510528"/>
-            <a:ext cx="12191695" cy="347472"/>
-          </a:xfrm>
-          <a:prstGeom prst="rect">
-            <a:avLst/>
-          </a:prstGeom>
-          <a:solidFill>
-            <a:srgbClr val="7C1D2E"/>
-          </a:solidFill>
-          <a:ln>
-            <a:noFill/>
-          </a:ln>
-        </p:spPr>
-        <p:style>
-          <a:lnRef idx="1">
-            <a:schemeClr val="accent1"/>
-          </a:lnRef>
-          <a:fillRef idx="3">
-            <a:schemeClr val="accent1"/>
-          </a:fillRef>
-          <a:effectRef idx="2">
-            <a:schemeClr val="accent1"/>
-          </a:effectRef>
-          <a:fontRef idx="minor">
-            <a:schemeClr val="lt1"/>
-          </a:fontRef>
-        </p:style>
-        <p:txBody>
-          <a:bodyPr rtlCol="0" anchor="ctr"/>
-          <a:lstStyle/>
-          <a:p>
-            <a:pPr algn="ctr"/>
-          </a:p>
-        </p:txBody>
-      </p:sp>
-      <p:sp>
-        <p:nvSpPr>
-          <p:cNvPr id="5" name="TextBox 4"/>
-          <p:cNvSpPr txBox="1"/>
-          <p:nvPr/>
-        </p:nvSpPr>
-        <p:spPr>
-          <a:xfrm>
-            <a:off x="292608" y="73152"/>
-            <a:ext cx="11521440" cy="292608"/>
-          </a:xfrm>
-          <a:prstGeom prst="rect">
-            <a:avLst/>
-          </a:prstGeom>
-          <a:noFill/>
-        </p:spPr>
-        <p:txBody>
-          <a:bodyPr wrap="square">
-            <a:spAutoFit/>
-          </a:bodyPr>
-          <a:lstStyle/>
-          <a:p>
-            <a:pPr algn="l"/>
-            <a:r>
-              <a:rPr sz="1300" b="1">
-                <a:solidFill>
-                  <a:srgbClr val="FFFFFF"/>
-                </a:solidFill>
-                <a:latin typeface="Calibri"/>
-              </a:rPr>
-              <a:t>M. S. RAMAIAH UNIVERSITY OF APPLIED SCIENCES</a:t>
-            </a:r>
-          </a:p>
-        </p:txBody>
-      </p:sp>
-      <p:sp>
-        <p:nvSpPr>
-          <p:cNvPr id="6" name="TextBox 5"/>
-          <p:cNvSpPr txBox="1"/>
-          <p:nvPr/>
-        </p:nvSpPr>
-        <p:spPr>
-          <a:xfrm>
-            <a:off x="292608" y="347472"/>
-            <a:ext cx="11521440" cy="256032"/>
-          </a:xfrm>
-          <a:prstGeom prst="rect">
-            <a:avLst/>
-          </a:prstGeom>
-          <a:noFill/>
-        </p:spPr>
-        <p:txBody>
-          <a:bodyPr wrap="square">
-            <a:spAutoFit/>
-          </a:bodyPr>
-          <a:lstStyle/>
-          <a:p>
-            <a:pPr algn="l"/>
-            <a:r>
-              <a:rPr sz="1100" b="0">
-                <a:solidFill>
-                  <a:srgbClr val="C4A35A"/>
-                </a:solidFill>
-                <a:latin typeface="Calibri"/>
-              </a:rPr>
-              <a:t>Faculty of Engineering and Technology  ·  RESEARCH PROPOSAL</a:t>
-            </a:r>
-          </a:p>
-        </p:txBody>
-      </p:sp>
-      <p:sp>
-        <p:nvSpPr>
-          <p:cNvPr id="7" name="TextBox 6"/>
-          <p:cNvSpPr txBox="1"/>
-          <p:nvPr/>
-        </p:nvSpPr>
-        <p:spPr>
-          <a:xfrm>
-            <a:off x="3383280" y="6565392"/>
-            <a:ext cx="5760720" cy="237744"/>
-          </a:xfrm>
-          <a:prstGeom prst="rect">
-            <a:avLst/>
-          </a:prstGeom>
-          <a:noFill/>
-        </p:spPr>
-        <p:txBody>
-          <a:bodyPr wrap="square">
-            <a:spAutoFit/>
-          </a:bodyPr>
-          <a:lstStyle/>
-          <a:p>
-            <a:pPr algn="ctr"/>
-            <a:r>
-              <a:rPr sz="1000" b="0">
-                <a:solidFill>
-                  <a:srgbClr val="FFFFFF"/>
-                </a:solidFill>
-                <a:latin typeface="Calibri"/>
-              </a:rPr>
-              <a:t>Jenisha T  |  24ETRP720001  |  Part Time</a:t>
-            </a:r>
-          </a:p>
-        </p:txBody>
-      </p:sp>
-      <p:sp>
-        <p:nvSpPr>
-          <p:cNvPr id="8" name="Rectangle 7"/>
-          <p:cNvSpPr/>
-          <p:nvPr/>
-        </p:nvSpPr>
-        <p:spPr>
-          <a:xfrm>
-            <a:off x="0" y="713232"/>
-            <a:ext cx="12191695" cy="5797296"/>
-          </a:xfrm>
-          <a:prstGeom prst="rect">
-            <a:avLst/>
-          </a:prstGeom>
-          <a:solidFill>
-            <a:srgbClr val="FFFAF3"/>
-          </a:solidFill>
-          <a:ln>
-            <a:noFill/>
-          </a:ln>
-        </p:spPr>
-        <p:style>
-          <a:lnRef idx="1">
-            <a:schemeClr val="accent1"/>
-          </a:lnRef>
-          <a:fillRef idx="3">
-            <a:schemeClr val="accent1"/>
-          </a:fillRef>
-          <a:effectRef idx="2">
-            <a:schemeClr val="accent1"/>
-          </a:effectRef>
-          <a:fontRef idx="minor">
-            <a:schemeClr val="lt1"/>
-          </a:fontRef>
-        </p:style>
-        <p:txBody>
-          <a:bodyPr rtlCol="0" anchor="ctr"/>
-          <a:lstStyle/>
-          <a:p>
-            <a:pPr algn="ctr"/>
-          </a:p>
-        </p:txBody>
-      </p:sp>
-      <p:sp>
-        <p:nvSpPr>
-          <p:cNvPr id="9" name="TextBox 8"/>
-          <p:cNvSpPr txBox="1"/>
-          <p:nvPr/>
-        </p:nvSpPr>
-        <p:spPr>
-          <a:xfrm>
-            <a:off x="365760" y="804672"/>
-            <a:ext cx="11430000" cy="237744"/>
-          </a:xfrm>
-          <a:prstGeom prst="rect">
-            <a:avLst/>
-          </a:prstGeom>
-          <a:noFill/>
-        </p:spPr>
-        <p:txBody>
-          <a:bodyPr wrap="square">
-            <a:spAutoFit/>
-          </a:bodyPr>
-          <a:lstStyle/>
-          <a:p>
-            <a:pPr algn="l"/>
-            <a:r>
-              <a:rPr sz="1100" b="1">
-                <a:solidFill>
-                  <a:srgbClr val="7C1D2E"/>
-                </a:solidFill>
-                <a:latin typeface="Calibri"/>
-              </a:rPr>
-              <a:t>RESEARCH PROPOSAL  ·  Research Objectives</a:t>
-            </a:r>
-          </a:p>
-        </p:txBody>
-      </p:sp>
-      <p:sp>
-        <p:nvSpPr>
-          <p:cNvPr id="10" name="TextBox 9"/>
-          <p:cNvSpPr txBox="1"/>
-          <p:nvPr/>
-        </p:nvSpPr>
-        <p:spPr>
-          <a:xfrm>
-            <a:off x="365760" y="1024128"/>
-            <a:ext cx="11430000" cy="502920"/>
-          </a:xfrm>
-          <a:prstGeom prst="rect">
-            <a:avLst/>
-          </a:prstGeom>
-          <a:noFill/>
-        </p:spPr>
-        <p:txBody>
-          <a:bodyPr wrap="square">
-            <a:spAutoFit/>
-          </a:bodyPr>
-          <a:lstStyle/>
-          <a:p>
-            <a:pPr algn="l"/>
-            <a:r>
-              <a:rPr sz="2200" b="1">
-                <a:solidFill>
-                  <a:srgbClr val="1A1214"/>
-                </a:solidFill>
-                <a:latin typeface="Calibri"/>
-              </a:rPr>
-              <a:t>Objective 1 — SATR</a:t>
-            </a:r>
-          </a:p>
-        </p:txBody>
-      </p:sp>
-      <p:sp>
-        <p:nvSpPr>
-          <p:cNvPr id="11" name="TextBox 10"/>
-          <p:cNvSpPr txBox="1"/>
-          <p:nvPr/>
-        </p:nvSpPr>
-        <p:spPr>
-          <a:xfrm>
-            <a:off x="365760" y="1572768"/>
-            <a:ext cx="11430000" cy="384048"/>
-          </a:xfrm>
-          <a:prstGeom prst="rect">
-            <a:avLst/>
-          </a:prstGeom>
-          <a:noFill/>
-        </p:spPr>
-        <p:txBody>
-          <a:bodyPr wrap="square">
-            <a:spAutoFit/>
-          </a:bodyPr>
-          <a:lstStyle/>
-          <a:p>
-            <a:pPr algn="l"/>
-            <a:r>
-              <a:rPr sz="1300" b="0">
-                <a:solidFill>
-                  <a:srgbClr val="5C4A4E"/>
-                </a:solidFill>
-                <a:latin typeface="Calibri"/>
-              </a:rPr>
-              <a:t>The retrieval chapter of the thesis: given query q and session history H, return a ranked list of ToolBench-schema tools fused with a co-activation cache. The unit of publication is the fusion rule, not an NDCG target.</a:t>
-            </a:r>
-          </a:p>
-        </p:txBody>
-      </p:sp>
-      <p:sp>
-        <p:nvSpPr>
-          <p:cNvPr id="12" name="TextBox 11"/>
-          <p:cNvSpPr txBox="1"/>
-          <p:nvPr/>
-        </p:nvSpPr>
-        <p:spPr>
-          <a:xfrm>
-            <a:off x="365760" y="1993392"/>
-            <a:ext cx="11430000" cy="1874519"/>
-          </a:xfrm>
-          <a:prstGeom prst="rect">
-            <a:avLst/>
-          </a:prstGeom>
-          <a:noFill/>
-        </p:spPr>
-        <p:txBody>
-          <a:bodyPr wrap="square">
-            <a:spAutoFit/>
-          </a:bodyPr>
-          <a:lstStyle/>
-          <a:p>
-            <a:pPr>
-              <a:spcAft>
-                <a:spcPts val="600"/>
-              </a:spcAft>
-              <a:buFont typeface="Arial"/>
-              <a:buChar char="•"/>
-            </a:pPr>
-            <a:r>
-              <a:rPr sz="1300">
-                <a:solidFill>
-                  <a:srgbClr val="1A1214"/>
-                </a:solidFill>
-                <a:latin typeface="Calibri"/>
-              </a:rPr>
-              <a:t>SOTA. Qin et al., ToolLLM / ToolBench (ICLR 2024): Sentence-BERT API retriever over 16,464 RapidAPI tools, then ToolLLaMA + DFSDT. Zheng et al., ToolRerank (LREC-COLING 2024): adaptive truncation of seen vs unseen APIs and hierarchy-aware concentration/diversity. Pipeline: instruction → SBERT retrieve top-k APIs → (optional ToolRerank truncate/rerank) → LLM DFSDT/ReAct planner</a:t>
-            </a:r>
-          </a:p>
-          <a:p>
-            <a:pPr>
-              <a:spcAft>
-                <a:spcPts val="600"/>
-              </a:spcAft>
-              <a:buFont typeface="Arial"/>
-              <a:buChar char="•"/>
-            </a:pPr>
-            <a:r>
-              <a:rPr sz="1300">
-                <a:solidFill>
-                  <a:srgbClr val="1A1214"/>
-                </a:solidFill>
-                <a:latin typeface="Calibri"/>
-              </a:rPr>
-              <a:t>Gap. SOTA retrievers are turn-amnesic. They do not maintain a success-conditioned co-activation graph or ingest pruned memory from later stages.</a:t>
-            </a:r>
-          </a:p>
-          <a:p>
-            <a:pPr>
-              <a:spcAft>
-                <a:spcPts val="600"/>
-              </a:spcAft>
-              <a:buFont typeface="Arial"/>
-              <a:buChar char="•"/>
-            </a:pPr>
-            <a:r>
-              <a:rPr sz="1300">
-                <a:solidFill>
-                  <a:srgbClr val="1A1214"/>
-                </a:solidFill>
-                <a:latin typeface="Calibri"/>
-              </a:rPr>
-              <a:t>Novelty. Session co-activation cache as a first-class prior over tool pairs. Convex fusion of semantic and session scores; λ may grow with session length. ToolRerank-style seen/unseen truncation kept, then applied after session scoring. FCNP memory mixed into the next SATR prior so retrieval is closed-loop.</a:t>
-            </a:r>
-          </a:p>
-        </p:txBody>
-      </p:sp>
-      <p:sp>
-        <p:nvSpPr>
-          <p:cNvPr id="13" name="TextBox 12"/>
-          <p:cNvSpPr txBox="1"/>
-          <p:nvPr/>
-        </p:nvSpPr>
-        <p:spPr>
-          <a:xfrm>
-            <a:off x="365760" y="4434840"/>
-            <a:ext cx="11430000" cy="219456"/>
-          </a:xfrm>
-          <a:prstGeom prst="rect">
-            <a:avLst/>
-          </a:prstGeom>
-          <a:noFill/>
-        </p:spPr>
-        <p:txBody>
-          <a:bodyPr wrap="square">
-            <a:spAutoFit/>
-          </a:bodyPr>
-          <a:lstStyle/>
-          <a:p>
-            <a:pPr algn="l"/>
-            <a:r>
-              <a:rPr sz="1100" b="0">
-                <a:solidFill>
-                  <a:srgbClr val="5C4A4E"/>
-                </a:solidFill>
-                <a:latin typeface="Calibri"/>
-              </a:rPr>
-              <a:t>Top: published SOTA. Bottom: this proposal. No numerical targets.</a:t>
-            </a:r>
-          </a:p>
-        </p:txBody>
-      </p:sp>
-      <p:sp>
-        <p:nvSpPr>
-          <p:cNvPr id="14" name="Rounded Rectangle 13"/>
-          <p:cNvSpPr/>
-          <p:nvPr/>
-        </p:nvSpPr>
-        <p:spPr>
-          <a:xfrm>
-            <a:off x="365760" y="4690872"/>
-            <a:ext cx="2775204" cy="438912"/>
-          </a:xfrm>
-          <a:prstGeom prst="roundRect">
-            <a:avLst>
-              <a:gd name="adj" fmla="val 10000"/>
-            </a:avLst>
-          </a:prstGeom>
-          <a:solidFill>
-            <a:srgbClr val="4A2A32"/>
-          </a:solidFill>
-          <a:ln>
-            <a:noFill/>
-          </a:ln>
-        </p:spPr>
-        <p:style>
-          <a:lnRef idx="1">
-            <a:schemeClr val="accent1"/>
-          </a:lnRef>
-          <a:fillRef idx="3">
-            <a:schemeClr val="accent1"/>
-          </a:fillRef>
-          <a:effectRef idx="2">
-            <a:schemeClr val="accent1"/>
-          </a:effectRef>
-          <a:fontRef idx="minor">
-            <a:schemeClr val="lt1"/>
-          </a:fontRef>
-        </p:style>
-        <p:txBody>
-          <a:bodyPr rtlCol="0" anchor="ctr" wrap="square"/>
-          <a:lstStyle/>
-          <a:p>
-            <a:pPr algn="ctr"/>
-            <a:r>
-              <a:rPr sz="1000" b="1">
-                <a:solidFill>
-                  <a:srgbClr val="FFFFFF"/>
-                </a:solidFill>
-                <a:latin typeface="Calibri"/>
-              </a:rPr>
-              <a:t>Query embed</a:t>
-            </a:r>
-          </a:p>
-        </p:txBody>
-      </p:sp>
-      <p:sp>
-        <p:nvSpPr>
-          <p:cNvPr id="15" name="Rounded Rectangle 14"/>
-          <p:cNvSpPr/>
-          <p:nvPr/>
-        </p:nvSpPr>
-        <p:spPr>
-          <a:xfrm>
-            <a:off x="3250692" y="4690872"/>
-            <a:ext cx="2775204" cy="438912"/>
-          </a:xfrm>
-          <a:prstGeom prst="roundRect">
-            <a:avLst>
-              <a:gd name="adj" fmla="val 10000"/>
-            </a:avLst>
-          </a:prstGeom>
-          <a:solidFill>
-            <a:srgbClr val="4A2A32"/>
-          </a:solidFill>
-          <a:ln>
-            <a:noFill/>
-          </a:ln>
-        </p:spPr>
-        <p:style>
-          <a:lnRef idx="1">
-            <a:schemeClr val="accent1"/>
-          </a:lnRef>
-          <a:fillRef idx="3">
-            <a:schemeClr val="accent1"/>
-          </a:fillRef>
-          <a:effectRef idx="2">
-            <a:schemeClr val="accent1"/>
-          </a:effectRef>
-          <a:fontRef idx="minor">
-            <a:schemeClr val="lt1"/>
-          </a:fontRef>
-        </p:style>
-        <p:txBody>
-          <a:bodyPr rtlCol="0" anchor="ctr" wrap="square"/>
-          <a:lstStyle/>
-          <a:p>
-            <a:pPr algn="ctr"/>
-            <a:r>
-              <a:rPr sz="1000" b="1">
-                <a:solidFill>
-                  <a:srgbClr val="FFFFFF"/>
-                </a:solidFill>
-                <a:latin typeface="Calibri"/>
-              </a:rPr>
-              <a:t>SBERT (Qin ICLR 2024)</a:t>
-            </a:r>
-          </a:p>
-        </p:txBody>
-      </p:sp>
-      <p:sp>
-        <p:nvSpPr>
-          <p:cNvPr id="16" name="Rounded Rectangle 15"/>
-          <p:cNvSpPr/>
-          <p:nvPr/>
-        </p:nvSpPr>
-        <p:spPr>
-          <a:xfrm>
-            <a:off x="6135624" y="4690872"/>
-            <a:ext cx="2775204" cy="438912"/>
-          </a:xfrm>
-          <a:prstGeom prst="roundRect">
-            <a:avLst>
-              <a:gd name="adj" fmla="val 10000"/>
-            </a:avLst>
-          </a:prstGeom>
-          <a:solidFill>
-            <a:srgbClr val="4A2A32"/>
-          </a:solidFill>
-          <a:ln>
-            <a:noFill/>
-          </a:ln>
-        </p:spPr>
-        <p:style>
-          <a:lnRef idx="1">
-            <a:schemeClr val="accent1"/>
-          </a:lnRef>
-          <a:fillRef idx="3">
-            <a:schemeClr val="accent1"/>
-          </a:fillRef>
-          <a:effectRef idx="2">
-            <a:schemeClr val="accent1"/>
-          </a:effectRef>
-          <a:fontRef idx="minor">
-            <a:schemeClr val="lt1"/>
-          </a:fontRef>
-        </p:style>
-        <p:txBody>
-          <a:bodyPr rtlCol="0" anchor="ctr" wrap="square"/>
-          <a:lstStyle/>
-          <a:p>
-            <a:pPr algn="ctr"/>
-            <a:r>
-              <a:rPr sz="1000" b="1">
-                <a:solidFill>
-                  <a:srgbClr val="FFFFFF"/>
-                </a:solidFill>
-                <a:latin typeface="Calibri"/>
-              </a:rPr>
-              <a:t>ToolRerank</a:t>
-            </a:r>
-          </a:p>
-        </p:txBody>
-      </p:sp>
-      <p:sp>
-        <p:nvSpPr>
-          <p:cNvPr id="17" name="Rounded Rectangle 16"/>
-          <p:cNvSpPr/>
-          <p:nvPr/>
-        </p:nvSpPr>
-        <p:spPr>
-          <a:xfrm>
-            <a:off x="9020556" y="4690872"/>
-            <a:ext cx="2775204" cy="438912"/>
-          </a:xfrm>
-          <a:prstGeom prst="roundRect">
-            <a:avLst>
-              <a:gd name="adj" fmla="val 10000"/>
-            </a:avLst>
-          </a:prstGeom>
-          <a:solidFill>
-            <a:srgbClr val="4A2A32"/>
-          </a:solidFill>
-          <a:ln>
-            <a:noFill/>
-          </a:ln>
-        </p:spPr>
-        <p:style>
-          <a:lnRef idx="1">
-            <a:schemeClr val="accent1"/>
-          </a:lnRef>
-          <a:fillRef idx="3">
-            <a:schemeClr val="accent1"/>
-          </a:fillRef>
-          <a:effectRef idx="2">
-            <a:schemeClr val="accent1"/>
-          </a:effectRef>
-          <a:fontRef idx="minor">
-            <a:schemeClr val="lt1"/>
-          </a:fontRef>
-        </p:style>
-        <p:txBody>
-          <a:bodyPr rtlCol="0" anchor="ctr" wrap="square"/>
-          <a:lstStyle/>
-          <a:p>
-            <a:pPr algn="ctr"/>
-            <a:r>
-              <a:rPr sz="1000" b="1">
-                <a:solidFill>
-                  <a:srgbClr val="FFFFFF"/>
-                </a:solidFill>
-                <a:latin typeface="Calibri"/>
-              </a:rPr>
-              <a:t>Planner</a:t>
-            </a:r>
-          </a:p>
-        </p:txBody>
-      </p:sp>
-      <p:sp>
-        <p:nvSpPr>
-          <p:cNvPr id="18" name="Rounded Rectangle 17"/>
-          <p:cNvSpPr/>
-          <p:nvPr/>
-        </p:nvSpPr>
-        <p:spPr>
-          <a:xfrm>
-            <a:off x="365760" y="5221224"/>
-            <a:ext cx="2775204" cy="438912"/>
-          </a:xfrm>
-          <a:prstGeom prst="roundRect">
-            <a:avLst>
-              <a:gd name="adj" fmla="val 10000"/>
-            </a:avLst>
-          </a:prstGeom>
-          <a:solidFill>
-            <a:srgbClr val="7C1D2E"/>
-          </a:solidFill>
-          <a:ln>
-            <a:noFill/>
-          </a:ln>
-        </p:spPr>
-        <p:style>
-          <a:lnRef idx="1">
-            <a:schemeClr val="accent1"/>
-          </a:lnRef>
-          <a:fillRef idx="3">
-            <a:schemeClr val="accent1"/>
-          </a:fillRef>
-          <a:effectRef idx="2">
-            <a:schemeClr val="accent1"/>
-          </a:effectRef>
-          <a:fontRef idx="minor">
-            <a:schemeClr val="lt1"/>
-          </a:fontRef>
-        </p:style>
-        <p:txBody>
-          <a:bodyPr rtlCol="0" anchor="ctr" wrap="square"/>
-          <a:lstStyle/>
-          <a:p>
-            <a:pPr algn="ctr"/>
-            <a:r>
-              <a:rPr sz="1000" b="1">
-                <a:solidFill>
-                  <a:srgbClr val="FFFFFF"/>
-                </a:solidFill>
-                <a:latin typeface="Calibri"/>
-              </a:rPr>
-              <a:t>q + H + M_t</a:t>
-            </a:r>
-          </a:p>
-        </p:txBody>
-      </p:sp>
-      <p:sp>
-        <p:nvSpPr>
-          <p:cNvPr id="19" name="Rounded Rectangle 18"/>
-          <p:cNvSpPr/>
-          <p:nvPr/>
-        </p:nvSpPr>
-        <p:spPr>
-          <a:xfrm>
-            <a:off x="3250692" y="5221224"/>
-            <a:ext cx="2775204" cy="438912"/>
-          </a:xfrm>
-          <a:prstGeom prst="roundRect">
-            <a:avLst>
-              <a:gd name="adj" fmla="val 10000"/>
-            </a:avLst>
-          </a:prstGeom>
-          <a:solidFill>
-            <a:srgbClr val="7C1D2E"/>
-          </a:solidFill>
-          <a:ln>
-            <a:noFill/>
-          </a:ln>
-        </p:spPr>
-        <p:style>
-          <a:lnRef idx="1">
-            <a:schemeClr val="accent1"/>
-          </a:lnRef>
-          <a:fillRef idx="3">
-            <a:schemeClr val="accent1"/>
-          </a:fillRef>
-          <a:effectRef idx="2">
-            <a:schemeClr val="accent1"/>
-          </a:effectRef>
-          <a:fontRef idx="minor">
-            <a:schemeClr val="lt1"/>
-          </a:fontRef>
-        </p:style>
-        <p:txBody>
-          <a:bodyPr rtlCol="0" anchor="ctr" wrap="square"/>
-          <a:lstStyle/>
-          <a:p>
-            <a:pPr algn="ctr"/>
-            <a:r>
-              <a:rPr sz="1000" b="1">
-                <a:solidFill>
-                  <a:srgbClr val="FFFFFF"/>
-                </a:solidFill>
-                <a:latin typeface="Calibri"/>
-              </a:rPr>
-              <a:t>Session fusion</a:t>
-            </a:r>
-          </a:p>
-        </p:txBody>
-      </p:sp>
-      <p:sp>
-        <p:nvSpPr>
-          <p:cNvPr id="20" name="Rounded Rectangle 19"/>
-          <p:cNvSpPr/>
-          <p:nvPr/>
-        </p:nvSpPr>
-        <p:spPr>
-          <a:xfrm>
-            <a:off x="6135624" y="5221224"/>
-            <a:ext cx="2775204" cy="438912"/>
-          </a:xfrm>
-          <a:prstGeom prst="roundRect">
-            <a:avLst>
-              <a:gd name="adj" fmla="val 10000"/>
-            </a:avLst>
-          </a:prstGeom>
-          <a:solidFill>
-            <a:srgbClr val="7C1D2E"/>
-          </a:solidFill>
-          <a:ln>
-            <a:noFill/>
-          </a:ln>
-        </p:spPr>
-        <p:style>
-          <a:lnRef idx="1">
-            <a:schemeClr val="accent1"/>
-          </a:lnRef>
-          <a:fillRef idx="3">
-            <a:schemeClr val="accent1"/>
-          </a:fillRef>
-          <a:effectRef idx="2">
-            <a:schemeClr val="accent1"/>
-          </a:effectRef>
-          <a:fontRef idx="minor">
-            <a:schemeClr val="lt1"/>
-          </a:fontRef>
-        </p:style>
-        <p:txBody>
-          <a:bodyPr rtlCol="0" anchor="ctr" wrap="square"/>
-          <a:lstStyle/>
-          <a:p>
-            <a:pPr algn="ctr"/>
-            <a:r>
-              <a:rPr sz="1000" b="1">
-                <a:solidFill>
-                  <a:srgbClr val="FFFFFF"/>
-                </a:solidFill>
-                <a:latin typeface="Calibri"/>
-              </a:rPr>
-              <a:t>Hierarchy cut</a:t>
-            </a:r>
-          </a:p>
-        </p:txBody>
-      </p:sp>
-      <p:sp>
-        <p:nvSpPr>
-          <p:cNvPr id="21" name="Rounded Rectangle 20"/>
-          <p:cNvSpPr/>
-          <p:nvPr/>
-        </p:nvSpPr>
-        <p:spPr>
-          <a:xfrm>
-            <a:off x="9020556" y="5221224"/>
-            <a:ext cx="2775204" cy="438912"/>
-          </a:xfrm>
-          <a:prstGeom prst="roundRect">
-            <a:avLst>
-              <a:gd name="adj" fmla="val 10000"/>
-            </a:avLst>
-          </a:prstGeom>
-          <a:solidFill>
-            <a:srgbClr val="7C1D2E"/>
-          </a:solidFill>
-          <a:ln>
-            <a:noFill/>
-          </a:ln>
-        </p:spPr>
-        <p:style>
-          <a:lnRef idx="1">
-            <a:schemeClr val="accent1"/>
-          </a:lnRef>
-          <a:fillRef idx="3">
-            <a:schemeClr val="accent1"/>
-          </a:fillRef>
-          <a:effectRef idx="2">
-            <a:schemeClr val="accent1"/>
-          </a:effectRef>
-          <a:fontRef idx="minor">
-            <a:schemeClr val="lt1"/>
-          </a:fontRef>
-        </p:style>
-        <p:txBody>
-          <a:bodyPr rtlCol="0" anchor="ctr" wrap="square"/>
-          <a:lstStyle/>
-          <a:p>
-            <a:pPr algn="ctr"/>
-            <a:r>
-              <a:rPr sz="1000" b="1">
-                <a:solidFill>
-                  <a:srgbClr val="FFFFFF"/>
-                </a:solidFill>
-                <a:latin typeface="Calibri"/>
-              </a:rPr>
-              <a:t>Shortlist → APRR</a:t>
-            </a:r>
-          </a:p>
-        </p:txBody>
-      </p:sp>
-      <p:sp>
-        <p:nvSpPr>
-          <p:cNvPr id="22" name="TextBox 21"/>
-          <p:cNvSpPr txBox="1"/>
-          <p:nvPr/>
-        </p:nvSpPr>
-        <p:spPr>
-          <a:xfrm>
-            <a:off x="365760" y="6199632"/>
-            <a:ext cx="11430000" cy="256032"/>
-          </a:xfrm>
-          <a:prstGeom prst="rect">
-            <a:avLst/>
-          </a:prstGeom>
-          <a:noFill/>
-        </p:spPr>
-        <p:txBody>
-          <a:bodyPr wrap="square">
-            <a:spAutoFit/>
-          </a:bodyPr>
-          <a:lstStyle/>
-          <a:p>
-            <a:pPr algn="l"/>
-            <a:r>
-              <a:rPr sz="1000" b="0">
-                <a:solidFill>
-                  <a:srgbClr val="5C4A4E"/>
-                </a:solidFill>
-                <a:latin typeface="Calibri"/>
-              </a:rPr>
-              <a:t>Repository: github.com/joyjeni/session-aware-toolbench-rerank</a:t>
-            </a:r>
-          </a:p>
-        </p:txBody>
-      </p:sp>
-      <p:sp>
-        <p:nvSpPr>
-          <p:cNvPr id="4016" name="Automatic Date 16"/>
-          <p:cNvSpPr txBox="1"/>
-          <p:nvPr/>
-        </p:nvSpPr>
-        <p:spPr>
-          <a:xfrm>
-            <a:off x="255016" y="6565900"/>
-            <a:ext cx="3108960" cy="255016"/>
-          </a:xfrm>
-          <a:prstGeom prst="rect">
-            <a:avLst/>
-          </a:prstGeom>
-          <a:noFill/>
-        </p:spPr>
-        <p:txBody>
-          <a:bodyPr wrap="none" lIns="0" tIns="0" rIns="0" bIns="0" anchor="ctr"/>
-          <a:lstStyle/>
-          <a:p>
-            <a:pPr algn="l"/>
-            <a:fld id="{2232c7c5-d2af-4cb8-8ae3-efbfa17e2653}" type="datetime3">
-              <a:rPr lang="en-GB" sz="1000" dirty="0">
-                <a:solidFill>
-                  <a:srgbClr val="C4A35A"/>
-                </a:solidFill>
-                <a:latin typeface="Calibri"/>
-              </a:rPr>
-              <a:t>7 September 2026</a:t>
-            </a:fld>
-            <a:endParaRPr lang="en-GB" sz="1000"/>
-          </a:p>
-        </p:txBody>
-      </p:sp>
-      <p:sp>
-        <p:nvSpPr>
-          <p:cNvPr id="5016" name="Automatic Slide Number 16"/>
-          <p:cNvSpPr txBox="1"/>
-          <p:nvPr/>
-        </p:nvSpPr>
-        <p:spPr>
-          <a:xfrm>
-            <a:off x="9601200" y="6565900"/>
-            <a:ext cx="2286000" cy="255016"/>
-          </a:xfrm>
-          <a:prstGeom prst="rect">
-            <a:avLst/>
-          </a:prstGeom>
-          <a:noFill/>
-        </p:spPr>
-        <p:txBody>
-          <a:bodyPr wrap="none" lIns="0" tIns="0" rIns="0" bIns="0" anchor="ctr"/>
-          <a:lstStyle/>
-          <a:p>
-            <a:pPr algn="r"/>
-            <a:fld id="{e9bda95f-ee45-4c07-8458-abf0ccab60b9}" type="slidenum">
+            <a:fld id="{6355a613-8b8d-437a-98ec-ea7157fc589f}" type="slidenum">
               <a:rPr lang="en-GB" sz="1000" dirty="0">
                 <a:solidFill>
                   <a:srgbClr val="C4A35A"/>
@@ -10139,7 +9996,7 @@
                 </a:solidFill>
                 <a:latin typeface="Calibri"/>
               </a:rPr>
-              <a:t> / 34</a:t>
+              <a:t> / 35</a:t>
             </a:r>
             <a:endParaRPr lang="en-GB" sz="1000"/>
           </a:p>
@@ -10506,7 +10363,7 @@
                 </a:solidFill>
                 <a:latin typeface="Calibri"/>
               </a:rPr>
-              <a:t>Objective 2 — APRR</a:t>
+              <a:t>Objective 1 — SATR</a:t>
             </a:r>
           </a:p>
         </p:txBody>
@@ -10541,7 +10398,7 @@
                 </a:solidFill>
                 <a:latin typeface="Calibri"/>
               </a:rPr>
-              <a:t>The routing chapter: a training-free posterior over tool-specialist agents, updated from SATR scores and from live MNCD observations. The unit of publication is the Bayesian controller, not a Pareto chart.</a:t>
+              <a:t>The retrieval chapter of the thesis: given query q and session history H, return a ranked list of ToolBench-schema tools fused with a co-activation cache. The unit of publication is the fusion rule, not an NDCG target.</a:t>
             </a:r>
           </a:p>
         </p:txBody>
@@ -10582,7 +10439,7 @@
                 </a:solidFill>
                 <a:latin typeface="Calibri"/>
               </a:rPr>
-              <a:t>SOTA. Yue et al., MasRouter (ACL 2025, doi:10.18653/v1/2025.acl-long.757): trained neural controller over multi-agent topologies. Ong et al., RouteLLM (ICLR 2025, arXiv:2406.18665): routers among LLMs. Panda et al., Adaptive LLM Routing under Budget Constraints (PILOT; Findings of EMNLP 2025, doi:10.18653/v1/2025.findings-emnlp.1301): preference-prior LinUCB for budget-constrained LLM routing. Hong et al., MetaGPT (ICLR 2024): authored SOP workflows. Pipeline: query → trained controller or difficulty model → choose one LLM/agent → execute</a:t>
+              <a:t>SOTA. Qin et al., ToolLLM / ToolBench (ICLR 2024): Sentence-BERT API retriever over 16,464 RapidAPI tools, then ToolLLaMA + DFSDT. Zheng et al., ToolRerank (LREC-COLING 2024): adaptive truncation of seen vs unseen APIs and hierarchy-aware concentration/diversity. Pipeline: instruction → SBERT retrieve top-k APIs → (optional ToolRerank truncate/rerank) → LLM DFSDT/ReAct planner</a:t>
             </a:r>
           </a:p>
           <a:p>
@@ -10600,7 +10457,7 @@
                 </a:solidFill>
                 <a:latin typeface="Calibri"/>
               </a:rPr>
-              <a:t>Gap. SOTA either trains a neural router, picks a model, or follows an authored SOP. It does not maintain a training-free affinity matrix over Indian OGD tool families.</a:t>
+              <a:t>Gap. SOTA retrievers are turn-amnesic. They do not maintain a success-conditioned co-activation graph or ingest pruned memory from later stages.</a:t>
             </a:r>
           </a:p>
           <a:p>
@@ -10618,7 +10475,7 @@
                 </a:solidFill>
                 <a:latin typeface="Calibri"/>
               </a:rPr>
-              <a:t>Novelty. Training-free online W versus MasRouter's learned controller. Implemented update is κ·reward·1/L²·1/lat_norm with negative reward on failure. CTGR and FTDR remain in the GitHub repo; this lab runs core APRR hops. W is session state, so routing can adapt across farmer turns.</a:t>
+              <a:t>Novelty. Session co-activation cache as a first-class prior over tool pairs. Convex fusion of semantic and session scores; λ may grow with session length. ToolRerank-style seen/unseen truncation kept, then applied after session scoring. FCNP memory mixed into the next SATR prior so retrieval is closed-loop.</a:t>
             </a:r>
           </a:p>
         </p:txBody>
@@ -10667,7 +10524,7 @@
         <p:spPr>
           <a:xfrm>
             <a:off x="365760" y="4690872"/>
-            <a:ext cx="3736848" cy="438912"/>
+            <a:ext cx="2775204" cy="438912"/>
           </a:xfrm>
           <a:prstGeom prst="roundRect">
             <a:avLst>
@@ -10707,7 +10564,7 @@
                 </a:solidFill>
                 <a:latin typeface="Calibri"/>
               </a:rPr>
-              <a:t>Query</a:t>
+              <a:t>Query embed</a:t>
             </a:r>
           </a:p>
         </p:txBody>
@@ -10720,8 +10577,8 @@
         </p:nvSpPr>
         <p:spPr>
           <a:xfrm>
-            <a:off x="4212336" y="4690872"/>
-            <a:ext cx="3736848" cy="438912"/>
+            <a:off x="3250692" y="4690872"/>
+            <a:ext cx="2775204" cy="438912"/>
           </a:xfrm>
           <a:prstGeom prst="roundRect">
             <a:avLst>
@@ -10761,7 +10618,7 @@
                 </a:solidFill>
                 <a:latin typeface="Calibri"/>
               </a:rPr>
-              <a:t>MasRouter / RouteLLM / SOP</a:t>
+              <a:t>SBERT (Qin ICLR 2024)</a:t>
             </a:r>
           </a:p>
         </p:txBody>
@@ -10774,8 +10631,8 @@
         </p:nvSpPr>
         <p:spPr>
           <a:xfrm>
-            <a:off x="8058912" y="4690872"/>
-            <a:ext cx="3736848" cy="438912"/>
+            <a:off x="6135624" y="4690872"/>
+            <a:ext cx="2775204" cy="438912"/>
           </a:xfrm>
           <a:prstGeom prst="roundRect">
             <a:avLst>
@@ -10815,7 +10672,7 @@
                 </a:solidFill>
                 <a:latin typeface="Calibri"/>
               </a:rPr>
-              <a:t>Pick an LLM</a:t>
+              <a:t>ToolRerank</a:t>
             </a:r>
           </a:p>
         </p:txBody>
@@ -10828,8 +10685,62 @@
         </p:nvSpPr>
         <p:spPr>
           <a:xfrm>
+            <a:off x="9020556" y="4690872"/>
+            <a:ext cx="2775204" cy="438912"/>
+          </a:xfrm>
+          <a:prstGeom prst="roundRect">
+            <a:avLst>
+              <a:gd name="adj" fmla="val 10000"/>
+            </a:avLst>
+          </a:prstGeom>
+          <a:solidFill>
+            <a:srgbClr val="4A2A32"/>
+          </a:solidFill>
+          <a:ln>
+            <a:noFill/>
+          </a:ln>
+        </p:spPr>
+        <p:style>
+          <a:lnRef idx="1">
+            <a:schemeClr val="accent1"/>
+          </a:lnRef>
+          <a:fillRef idx="3">
+            <a:schemeClr val="accent1"/>
+          </a:fillRef>
+          <a:effectRef idx="2">
+            <a:schemeClr val="accent1"/>
+          </a:effectRef>
+          <a:fontRef idx="minor">
+            <a:schemeClr val="lt1"/>
+          </a:fontRef>
+        </p:style>
+        <p:txBody>
+          <a:bodyPr rtlCol="0" anchor="ctr" wrap="square"/>
+          <a:lstStyle/>
+          <a:p>
+            <a:pPr algn="ctr"/>
+            <a:r>
+              <a:rPr sz="1000" b="1">
+                <a:solidFill>
+                  <a:srgbClr val="FFFFFF"/>
+                </a:solidFill>
+                <a:latin typeface="Calibri"/>
+              </a:rPr>
+              <a:t>Planner</a:t>
+            </a:r>
+          </a:p>
+        </p:txBody>
+      </p:sp>
+      <p:sp>
+        <p:nvSpPr>
+          <p:cNvPr id="18" name="Rounded Rectangle 17"/>
+          <p:cNvSpPr/>
+          <p:nvPr/>
+        </p:nvSpPr>
+        <p:spPr>
+          <a:xfrm>
             <a:off x="365760" y="5221224"/>
-            <a:ext cx="3736848" cy="438912"/>
+            <a:ext cx="2775204" cy="438912"/>
           </a:xfrm>
           <a:prstGeom prst="roundRect">
             <a:avLst>
@@ -10869,21 +10780,21 @@
                 </a:solidFill>
                 <a:latin typeface="Calibri"/>
               </a:rPr>
-              <a:t>SATR shortlist</a:t>
-            </a:r>
-          </a:p>
-        </p:txBody>
-      </p:sp>
-      <p:sp>
-        <p:nvSpPr>
-          <p:cNvPr id="18" name="Rounded Rectangle 17"/>
+              <a:t>q + H + M_t</a:t>
+            </a:r>
+          </a:p>
+        </p:txBody>
+      </p:sp>
+      <p:sp>
+        <p:nvSpPr>
+          <p:cNvPr id="19" name="Rounded Rectangle 18"/>
           <p:cNvSpPr/>
           <p:nvPr/>
         </p:nvSpPr>
         <p:spPr>
           <a:xfrm>
-            <a:off x="4212336" y="5221224"/>
-            <a:ext cx="3736848" cy="438912"/>
+            <a:off x="3250692" y="5221224"/>
+            <a:ext cx="2775204" cy="438912"/>
           </a:xfrm>
           <a:prstGeom prst="roundRect">
             <a:avLst>
@@ -10923,21 +10834,21 @@
                 </a:solidFill>
                 <a:latin typeface="Calibri"/>
               </a:rPr>
-              <a:t>Dirichlet–Thompson</a:t>
-            </a:r>
-          </a:p>
-        </p:txBody>
-      </p:sp>
-      <p:sp>
-        <p:nvSpPr>
-          <p:cNvPr id="19" name="Rounded Rectangle 18"/>
+              <a:t>Session fusion</a:t>
+            </a:r>
+          </a:p>
+        </p:txBody>
+      </p:sp>
+      <p:sp>
+        <p:nvSpPr>
+          <p:cNvPr id="20" name="Rounded Rectangle 19"/>
           <p:cNvSpPr/>
           <p:nvPr/>
         </p:nvSpPr>
         <p:spPr>
           <a:xfrm>
-            <a:off x="8058912" y="5221224"/>
-            <a:ext cx="3736848" cy="438912"/>
+            <a:off x="6135624" y="5221224"/>
+            <a:ext cx="2775204" cy="438912"/>
           </a:xfrm>
           <a:prstGeom prst="roundRect">
             <a:avLst>
@@ -10977,14 +10888,68 @@
                 </a:solidFill>
                 <a:latin typeface="Calibri"/>
               </a:rPr>
-              <a:t>Specialist path → MNCD</a:t>
-            </a:r>
-          </a:p>
-        </p:txBody>
-      </p:sp>
-      <p:sp>
-        <p:nvSpPr>
-          <p:cNvPr id="20" name="TextBox 19"/>
+              <a:t>Hierarchy cut</a:t>
+            </a:r>
+          </a:p>
+        </p:txBody>
+      </p:sp>
+      <p:sp>
+        <p:nvSpPr>
+          <p:cNvPr id="21" name="Rounded Rectangle 20"/>
+          <p:cNvSpPr/>
+          <p:nvPr/>
+        </p:nvSpPr>
+        <p:spPr>
+          <a:xfrm>
+            <a:off x="9020556" y="5221224"/>
+            <a:ext cx="2775204" cy="438912"/>
+          </a:xfrm>
+          <a:prstGeom prst="roundRect">
+            <a:avLst>
+              <a:gd name="adj" fmla="val 10000"/>
+            </a:avLst>
+          </a:prstGeom>
+          <a:solidFill>
+            <a:srgbClr val="7C1D2E"/>
+          </a:solidFill>
+          <a:ln>
+            <a:noFill/>
+          </a:ln>
+        </p:spPr>
+        <p:style>
+          <a:lnRef idx="1">
+            <a:schemeClr val="accent1"/>
+          </a:lnRef>
+          <a:fillRef idx="3">
+            <a:schemeClr val="accent1"/>
+          </a:fillRef>
+          <a:effectRef idx="2">
+            <a:schemeClr val="accent1"/>
+          </a:effectRef>
+          <a:fontRef idx="minor">
+            <a:schemeClr val="lt1"/>
+          </a:fontRef>
+        </p:style>
+        <p:txBody>
+          <a:bodyPr rtlCol="0" anchor="ctr" wrap="square"/>
+          <a:lstStyle/>
+          <a:p>
+            <a:pPr algn="ctr"/>
+            <a:r>
+              <a:rPr sz="1000" b="1">
+                <a:solidFill>
+                  <a:srgbClr val="FFFFFF"/>
+                </a:solidFill>
+                <a:latin typeface="Calibri"/>
+              </a:rPr>
+              <a:t>Shortlist → APRR</a:t>
+            </a:r>
+          </a:p>
+        </p:txBody>
+      </p:sp>
+      <p:sp>
+        <p:nvSpPr>
+          <p:cNvPr id="22" name="TextBox 21"/>
           <p:cNvSpPr txBox="1"/>
           <p:nvPr/>
         </p:nvSpPr>
@@ -11012,7 +10977,7 @@
                 </a:solidFill>
                 <a:latin typeface="Calibri"/>
               </a:rPr>
-              <a:t>Repository: github.com/joyjeni/aprr-multi-agent-routing</a:t>
+              <a:t>Repository: github.com/joyjeni/session-aware-toolbench-rerank</a:t>
             </a:r>
           </a:p>
         </p:txBody>
@@ -11038,7 +11003,7 @@
           <a:lstStyle/>
           <a:p>
             <a:pPr algn="l"/>
-            <a:fld id="{30ad248b-6b02-4c06-842d-013e39f29dc7}" type="datetime3">
+            <a:fld id="{e29cf978-cc45-40b3-b854-3efb0debf69d}" type="datetime3">
               <a:rPr lang="en-GB" sz="1000" dirty="0">
                 <a:solidFill>
                   <a:srgbClr val="C4A35A"/>
@@ -11072,7 +11037,7 @@
           <a:lstStyle/>
           <a:p>
             <a:pPr algn="r"/>
-            <a:fld id="{cfc5f377-f26f-4ce2-973d-ec2bbfc1f34e}" type="slidenum">
+            <a:fld id="{c871c739-0e5b-4d42-82f9-bbdd7c34b61e}" type="slidenum">
               <a:rPr lang="en-GB" sz="1000" dirty="0">
                 <a:solidFill>
                   <a:srgbClr val="C4A35A"/>
@@ -11088,7 +11053,7 @@
                 </a:solidFill>
                 <a:latin typeface="Calibri"/>
               </a:rPr>
-              <a:t> / 34</a:t>
+              <a:t> / 35</a:t>
             </a:r>
             <a:endParaRPr lang="en-GB" sz="1000"/>
           </a:p>
@@ -11455,7 +11420,7 @@
                 </a:solidFill>
                 <a:latin typeface="Calibri"/>
               </a:rPr>
-              <a:t>Objective 3 — MNCD</a:t>
+              <a:t>Objective 2 — APRR</a:t>
             </a:r>
           </a:p>
         </p:txBody>
@@ -11490,7 +11455,7 @@
                 </a:solidFill>
                 <a:latin typeface="Calibri"/>
               </a:rPr>
-              <a:t>The consensus-and-execution chapter: gossip (toolId, score), score-sum consensus, live data.gov.in GET on verified UUIDs. The unit of publication is the protocol plus the citation contract.</a:t>
+              <a:t>The routing chapter: a training-free posterior over tool-specialist agents, updated from SATR scores and from live MNCD observations. The unit of publication is the Bayesian controller, not a Pareto chart.</a:t>
             </a:r>
           </a:p>
         </p:txBody>
@@ -11531,7 +11496,7 @@
                 </a:solidFill>
                 <a:latin typeface="Calibri"/>
               </a:rPr>
-              <a:t>SOTA. Wu et al., AutoGen (COLM 2024; ICLR 2024 LLM Agents Workshop Best Paper, arXiv:2308.08155): multi-agent conversation. Hong et al., MetaGPT (ICLR 2024): SOP pipeline. Qian et al., ChatDev (ACL 2024): organisational chat-chain. Li et al., CAMEL (NeurIPS 2023): communicative role-playing agents. Pipeline: manager LLM → sequential or star-topology agent messages → tool calls</a:t>
+              <a:t>SOTA. Yue et al., MasRouter (ACL 2025, doi:10.18653/v1/2025.acl-long.757): trained neural controller over multi-agent topologies. Ong et al., RouteLLM (ICLR 2025, arXiv:2406.18665): routers among LLMs. Panda et al., Adaptive LLM Routing under Budget Constraints (PILOT; Findings of EMNLP 2025, doi:10.18653/v1/2025.findings-emnlp.1301): preference-prior LinUCB for budget-constrained LLM routing. Hong et al., MetaGPT (ICLR 2024): authored SOP workflows. Pipeline: query → trained controller or difficulty model → choose one LLM/agent → execute</a:t>
             </a:r>
           </a:p>
           <a:p>
@@ -11549,7 +11514,7 @@
                 </a:solidFill>
                 <a:latin typeface="Calibri"/>
               </a:rPr>
-              <a:t>Gap. Star and chat topologies coordinate over natural-language messages. They do not vote over tool identifiers backed by a ministry API.</a:t>
+              <a:t>Gap. SOTA either trains a neural router, picks a model, or follows an authored SOP. It does not maintain a training-free affinity matrix over Indian OGD tool families.</a:t>
             </a:r>
           </a:p>
           <a:p>
@@ -11567,7 +11532,7 @@
                 </a:solidFill>
                 <a:latin typeface="Calibri"/>
               </a:rPr>
-              <a:t>Novelty. First-class vote object is a tool ID, not a chat utterance. consensus_pick is score-sum; consensus_pick_borda is a non-default variant. Live Indian OGD only. Catalog-only tools stay ranking-only; prices are never invented. HTTP 5xx/429 are retried; empty filters show other live rows from the same resource.</a:t>
+              <a:t>Novelty. Training-free online W versus MasRouter's learned controller. Implemented update is κ·reward·1/L²·1/lat_norm with negative reward on failure. CTGR and FTDR remain in the GitHub repo; this lab runs core APRR hops. W is session state, so routing can adapt across farmer turns.</a:t>
             </a:r>
           </a:p>
         </p:txBody>
@@ -11616,7 +11581,7 @@
         <p:spPr>
           <a:xfrm>
             <a:off x="365760" y="4690872"/>
-            <a:ext cx="5660136" cy="438912"/>
+            <a:ext cx="3736848" cy="438912"/>
           </a:xfrm>
           <a:prstGeom prst="roundRect">
             <a:avLst>
@@ -11656,7 +11621,7 @@
                 </a:solidFill>
                 <a:latin typeface="Calibri"/>
               </a:rPr>
-              <a:t>Manager LLM</a:t>
+              <a:t>Query</a:t>
             </a:r>
           </a:p>
         </p:txBody>
@@ -11669,8 +11634,8 @@
         </p:nvSpPr>
         <p:spPr>
           <a:xfrm>
-            <a:off x="6135624" y="4690872"/>
-            <a:ext cx="5660136" cy="438912"/>
+            <a:off x="4212336" y="4690872"/>
+            <a:ext cx="3736848" cy="438912"/>
           </a:xfrm>
           <a:prstGeom prst="roundRect">
             <a:avLst>
@@ -11710,7 +11675,7 @@
                 </a:solidFill>
                 <a:latin typeface="Calibri"/>
               </a:rPr>
-              <a:t>Star / chat messages</a:t>
+              <a:t>MasRouter / RouteLLM / SOP</a:t>
             </a:r>
           </a:p>
         </p:txBody>
@@ -11718,6 +11683,60 @@
       <p:sp>
         <p:nvSpPr>
           <p:cNvPr id="16" name="Rounded Rectangle 15"/>
+          <p:cNvSpPr/>
+          <p:nvPr/>
+        </p:nvSpPr>
+        <p:spPr>
+          <a:xfrm>
+            <a:off x="8058912" y="4690872"/>
+            <a:ext cx="3736848" cy="438912"/>
+          </a:xfrm>
+          <a:prstGeom prst="roundRect">
+            <a:avLst>
+              <a:gd name="adj" fmla="val 10000"/>
+            </a:avLst>
+          </a:prstGeom>
+          <a:solidFill>
+            <a:srgbClr val="4A2A32"/>
+          </a:solidFill>
+          <a:ln>
+            <a:noFill/>
+          </a:ln>
+        </p:spPr>
+        <p:style>
+          <a:lnRef idx="1">
+            <a:schemeClr val="accent1"/>
+          </a:lnRef>
+          <a:fillRef idx="3">
+            <a:schemeClr val="accent1"/>
+          </a:fillRef>
+          <a:effectRef idx="2">
+            <a:schemeClr val="accent1"/>
+          </a:effectRef>
+          <a:fontRef idx="minor">
+            <a:schemeClr val="lt1"/>
+          </a:fontRef>
+        </p:style>
+        <p:txBody>
+          <a:bodyPr rtlCol="0" anchor="ctr" wrap="square"/>
+          <a:lstStyle/>
+          <a:p>
+            <a:pPr algn="ctr"/>
+            <a:r>
+              <a:rPr sz="1000" b="1">
+                <a:solidFill>
+                  <a:srgbClr val="FFFFFF"/>
+                </a:solidFill>
+                <a:latin typeface="Calibri"/>
+              </a:rPr>
+              <a:t>Pick an LLM</a:t>
+            </a:r>
+          </a:p>
+        </p:txBody>
+      </p:sp>
+      <p:sp>
+        <p:nvSpPr>
+          <p:cNvPr id="17" name="Rounded Rectangle 16"/>
           <p:cNvSpPr/>
           <p:nvPr/>
         </p:nvSpPr>
@@ -11764,14 +11783,14 @@
                 </a:solidFill>
                 <a:latin typeface="Calibri"/>
               </a:rPr>
-              <a:t>Mesh gossip</a:t>
-            </a:r>
-          </a:p>
-        </p:txBody>
-      </p:sp>
-      <p:sp>
-        <p:nvSpPr>
-          <p:cNvPr id="17" name="Rounded Rectangle 16"/>
+              <a:t>SATR shortlist</a:t>
+            </a:r>
+          </a:p>
+        </p:txBody>
+      </p:sp>
+      <p:sp>
+        <p:nvSpPr>
+          <p:cNvPr id="18" name="Rounded Rectangle 17"/>
           <p:cNvSpPr/>
           <p:nvPr/>
         </p:nvSpPr>
@@ -11818,14 +11837,14 @@
                 </a:solidFill>
                 <a:latin typeface="Calibri"/>
               </a:rPr>
-              <a:t>Score-sum over tool IDs</a:t>
-            </a:r>
-          </a:p>
-        </p:txBody>
-      </p:sp>
-      <p:sp>
-        <p:nvSpPr>
-          <p:cNvPr id="18" name="Rounded Rectangle 17"/>
+              <a:t>Dirichlet–Thompson</a:t>
+            </a:r>
+          </a:p>
+        </p:txBody>
+      </p:sp>
+      <p:sp>
+        <p:nvSpPr>
+          <p:cNvPr id="19" name="Rounded Rectangle 18"/>
           <p:cNvSpPr/>
           <p:nvPr/>
         </p:nvSpPr>
@@ -11872,14 +11891,14 @@
                 </a:solidFill>
                 <a:latin typeface="Calibri"/>
               </a:rPr>
-              <a:t>Live data.gov.in</a:t>
-            </a:r>
-          </a:p>
-        </p:txBody>
-      </p:sp>
-      <p:sp>
-        <p:nvSpPr>
-          <p:cNvPr id="19" name="TextBox 18"/>
+              <a:t>Specialist path → MNCD</a:t>
+            </a:r>
+          </a:p>
+        </p:txBody>
+      </p:sp>
+      <p:sp>
+        <p:nvSpPr>
+          <p:cNvPr id="20" name="TextBox 19"/>
           <p:cNvSpPr txBox="1"/>
           <p:nvPr/>
         </p:nvSpPr>
@@ -11907,7 +11926,7 @@
                 </a:solidFill>
                 <a:latin typeface="Calibri"/>
               </a:rPr>
-              <a:t>Repository: github.com/joyjeni/mncd-mesh-agents</a:t>
+              <a:t>Repository: github.com/joyjeni/aprr-multi-agent-routing</a:t>
             </a:r>
           </a:p>
         </p:txBody>
@@ -11933,7 +11952,7 @@
           <a:lstStyle/>
           <a:p>
             <a:pPr algn="l"/>
-            <a:fld id="{478afd03-5969-4adb-80c7-163cb2dd2b7f}" type="datetime3">
+            <a:fld id="{93ec147d-3cff-4aca-9e70-cf65a3605a43}" type="datetime3">
               <a:rPr lang="en-GB" sz="1000" dirty="0">
                 <a:solidFill>
                   <a:srgbClr val="C4A35A"/>
@@ -11967,7 +11986,7 @@
           <a:lstStyle/>
           <a:p>
             <a:pPr algn="r"/>
-            <a:fld id="{0790d798-797e-4804-bb25-3f6636dd999f}" type="slidenum">
+            <a:fld id="{b098cc0c-bb78-44c3-87a4-16713a385c6e}" type="slidenum">
               <a:rPr lang="en-GB" sz="1000" dirty="0">
                 <a:solidFill>
                   <a:srgbClr val="C4A35A"/>
@@ -11983,7 +12002,7 @@
                 </a:solidFill>
                 <a:latin typeface="Calibri"/>
               </a:rPr>
-              <a:t> / 34</a:t>
+              <a:t> / 35</a:t>
             </a:r>
             <a:endParaRPr lang="en-GB" sz="1000"/>
           </a:p>
@@ -12350,7 +12369,7 @@
                 </a:solidFill>
                 <a:latin typeface="Calibri"/>
               </a:rPr>
-              <a:t>Objective 4 — FCNP</a:t>
+              <a:t>Objective 3 — MNCD</a:t>
             </a:r>
           </a:p>
         </p:txBody>
@@ -12385,7 +12404,7 @@
                 </a:solidFill>
                 <a:latin typeface="Calibri"/>
               </a:rPr>
-              <a:t>The memory chapter: Kirchhoff/Physarum conductances prune the mesh trace and write surviving live citations back into SATR. The unit of publication is the coupling, not a token-percentage.</a:t>
+              <a:t>The consensus-and-execution chapter: gossip (toolId, score), score-sum consensus, live data.gov.in GET on verified UUIDs. The unit of publication is the protocol plus the citation contract.</a:t>
             </a:r>
           </a:p>
         </p:txBody>
@@ -12426,7 +12445,7 @@
                 </a:solidFill>
                 <a:latin typeface="Calibri"/>
               </a:rPr>
-              <a:t>SOTA. Jiang et al., LLMLingua (EMNLP 2023): token-level prompt compression. Tero et al., Science 2010 (doi:10.1126/science.1177894): Physarum adaptive network. Park et al., Generative Agents (UIST 2023): language memory stream in a sandbox. Pipeline: long prompt → compressor → LLM. Memory is not written back into a tool retriever.</a:t>
+              <a:t>SOTA. Wu et al., AutoGen (COLM 2024; ICLR 2024 LLM Agents Workshop Best Paper, arXiv:2308.08155): multi-agent conversation. Hong et al., MetaGPT (ICLR 2024): SOP pipeline. Qian et al., ChatDev (ACL 2024): organisational chat-chain. Li et al., CAMEL (NeurIPS 2023): communicative role-playing agents. Pipeline: manager LLM → sequential or star-topology agent messages → tool calls</a:t>
             </a:r>
           </a:p>
           <a:p>
@@ -12444,7 +12463,7 @@
                 </a:solidFill>
                 <a:latin typeface="Calibri"/>
               </a:rPr>
-              <a:t>Gap. Token compressors are not current-reinforced over a context graph and do not pin live government citations into the next retrieval turn.</a:t>
+              <a:t>Gap. Star and chat topologies coordinate over natural-language messages. They do not vote over tool identifiers backed by a ministry API.</a:t>
             </a:r>
           </a:p>
           <a:p>
@@ -12462,7 +12481,7 @@
                 </a:solidFill>
                 <a:latin typeface="Calibri"/>
               </a:rPr>
-              <a:t>Novelty. Laplacian solve with grounded sink, matching the published Python pruner. Hybrid tiering and persistent high-flow citations. If a requested crop/state has no AGMARKNET rows today, other live rows are shown; nothing is invented. Closed loop: retained spans become SATR session memory.</a:t>
+              <a:t>Novelty. First-class vote object is a tool ID, not a chat utterance. consensus_pick is score-sum; consensus_pick_borda is a non-default variant. Live Indian OGD only. Catalog-only tools stay ranking-only; prices are never invented. HTTP 5xx/429 are retried; empty filters show other live rows from the same resource.</a:t>
             </a:r>
           </a:p>
         </p:txBody>
@@ -12511,7 +12530,7 @@
         <p:spPr>
           <a:xfrm>
             <a:off x="365760" y="4690872"/>
-            <a:ext cx="3736848" cy="438912"/>
+            <a:ext cx="5660136" cy="438912"/>
           </a:xfrm>
           <a:prstGeom prst="roundRect">
             <a:avLst>
@@ -12551,7 +12570,7 @@
                 </a:solidFill>
                 <a:latin typeface="Calibri"/>
               </a:rPr>
-              <a:t>Long prompt</a:t>
+              <a:t>Manager LLM</a:t>
             </a:r>
           </a:p>
         </p:txBody>
@@ -12564,8 +12583,8 @@
         </p:nvSpPr>
         <p:spPr>
           <a:xfrm>
-            <a:off x="4212336" y="4690872"/>
-            <a:ext cx="3736848" cy="438912"/>
+            <a:off x="6135624" y="4690872"/>
+            <a:ext cx="5660136" cy="438912"/>
           </a:xfrm>
           <a:prstGeom prst="roundRect">
             <a:avLst>
@@ -12605,7 +12624,7 @@
                 </a:solidFill>
                 <a:latin typeface="Calibri"/>
               </a:rPr>
-              <a:t>LLMLingua tokens</a:t>
+              <a:t>Star / chat messages</a:t>
             </a:r>
           </a:p>
         </p:txBody>
@@ -12613,60 +12632,6 @@
       <p:sp>
         <p:nvSpPr>
           <p:cNvPr id="16" name="Rounded Rectangle 15"/>
-          <p:cNvSpPr/>
-          <p:nvPr/>
-        </p:nvSpPr>
-        <p:spPr>
-          <a:xfrm>
-            <a:off x="8058912" y="4690872"/>
-            <a:ext cx="3736848" cy="438912"/>
-          </a:xfrm>
-          <a:prstGeom prst="roundRect">
-            <a:avLst>
-              <a:gd name="adj" fmla="val 10000"/>
-            </a:avLst>
-          </a:prstGeom>
-          <a:solidFill>
-            <a:srgbClr val="4A2A32"/>
-          </a:solidFill>
-          <a:ln>
-            <a:noFill/>
-          </a:ln>
-        </p:spPr>
-        <p:style>
-          <a:lnRef idx="1">
-            <a:schemeClr val="accent1"/>
-          </a:lnRef>
-          <a:fillRef idx="3">
-            <a:schemeClr val="accent1"/>
-          </a:fillRef>
-          <a:effectRef idx="2">
-            <a:schemeClr val="accent1"/>
-          </a:effectRef>
-          <a:fontRef idx="minor">
-            <a:schemeClr val="lt1"/>
-          </a:fontRef>
-        </p:style>
-        <p:txBody>
-          <a:bodyPr rtlCol="0" anchor="ctr" wrap="square"/>
-          <a:lstStyle/>
-          <a:p>
-            <a:pPr algn="ctr"/>
-            <a:r>
-              <a:rPr sz="1000" b="1">
-                <a:solidFill>
-                  <a:srgbClr val="FFFFFF"/>
-                </a:solidFill>
-                <a:latin typeface="Calibri"/>
-              </a:rPr>
-              <a:t>No write-back</a:t>
-            </a:r>
-          </a:p>
-        </p:txBody>
-      </p:sp>
-      <p:sp>
-        <p:nvSpPr>
-          <p:cNvPr id="17" name="Rounded Rectangle 16"/>
           <p:cNvSpPr/>
           <p:nvPr/>
         </p:nvSpPr>
@@ -12713,14 +12678,14 @@
                 </a:solidFill>
                 <a:latin typeface="Calibri"/>
               </a:rPr>
-              <a:t>MNCD citations</a:t>
-            </a:r>
-          </a:p>
-        </p:txBody>
-      </p:sp>
-      <p:sp>
-        <p:nvSpPr>
-          <p:cNvPr id="18" name="Rounded Rectangle 17"/>
+              <a:t>Mesh gossip</a:t>
+            </a:r>
+          </a:p>
+        </p:txBody>
+      </p:sp>
+      <p:sp>
+        <p:nvSpPr>
+          <p:cNvPr id="17" name="Rounded Rectangle 16"/>
           <p:cNvSpPr/>
           <p:nvPr/>
         </p:nvSpPr>
@@ -12767,14 +12732,14 @@
                 </a:solidFill>
                 <a:latin typeface="Calibri"/>
               </a:rPr>
-              <a:t>Kirchhoff / Physarum</a:t>
-            </a:r>
-          </a:p>
-        </p:txBody>
-      </p:sp>
-      <p:sp>
-        <p:nvSpPr>
-          <p:cNvPr id="19" name="Rounded Rectangle 18"/>
+              <a:t>Score-sum over tool IDs</a:t>
+            </a:r>
+          </a:p>
+        </p:txBody>
+      </p:sp>
+      <p:sp>
+        <p:nvSpPr>
+          <p:cNvPr id="18" name="Rounded Rectangle 17"/>
           <p:cNvSpPr/>
           <p:nvPr/>
         </p:nvSpPr>
@@ -12821,14 +12786,14 @@
                 </a:solidFill>
                 <a:latin typeface="Calibri"/>
               </a:rPr>
-              <a:t>M_t → SATR</a:t>
-            </a:r>
-          </a:p>
-        </p:txBody>
-      </p:sp>
-      <p:sp>
-        <p:nvSpPr>
-          <p:cNvPr id="20" name="TextBox 19"/>
+              <a:t>Live data.gov.in</a:t>
+            </a:r>
+          </a:p>
+        </p:txBody>
+      </p:sp>
+      <p:sp>
+        <p:nvSpPr>
+          <p:cNvPr id="19" name="TextBox 18"/>
           <p:cNvSpPr txBox="1"/>
           <p:nvPr/>
         </p:nvSpPr>
@@ -12856,7 +12821,7 @@
                 </a:solidFill>
                 <a:latin typeface="Calibri"/>
               </a:rPr>
-              <a:t>Repository: github.com/joyjeni/fcnp-context-pruning</a:t>
+              <a:t>Repository: github.com/joyjeni/mncd-mesh-agents</a:t>
             </a:r>
           </a:p>
         </p:txBody>
@@ -12882,7 +12847,7 @@
           <a:lstStyle/>
           <a:p>
             <a:pPr algn="l"/>
-            <a:fld id="{26f195b1-d398-40df-9388-ca5931d86c68}" type="datetime3">
+            <a:fld id="{5ab52488-3ad9-40ba-a95e-d6a959d0b182}" type="datetime3">
               <a:rPr lang="en-GB" sz="1000" dirty="0">
                 <a:solidFill>
                   <a:srgbClr val="C4A35A"/>
@@ -12916,7 +12881,7 @@
           <a:lstStyle/>
           <a:p>
             <a:pPr algn="r"/>
-            <a:fld id="{4f6cb9f3-9eef-4258-9f1d-94bab16ec2ca}" type="slidenum">
+            <a:fld id="{05daf5e0-a3a5-4f41-a5fd-737424911341}" type="slidenum">
               <a:rPr lang="en-GB" sz="1000" dirty="0">
                 <a:solidFill>
                   <a:srgbClr val="C4A35A"/>
@@ -12932,7 +12897,7 @@
                 </a:solidFill>
                 <a:latin typeface="Calibri"/>
               </a:rPr>
-              <a:t> / 34</a:t>
+              <a:t> / 35</a:t>
             </a:r>
             <a:endParaRPr lang="en-GB" sz="1000"/>
           </a:p>
@@ -13892,7 +13857,7 @@
           <a:lstStyle/>
           <a:p>
             <a:pPr algn="l"/>
-            <a:fld id="{2d2e2e78-29c7-422e-a650-056f59c82c48}" type="datetime3">
+            <a:fld id="{d0559989-db4a-433a-99bc-a6bd40595895}" type="datetime3">
               <a:rPr lang="en-GB" sz="1000" dirty="0">
                 <a:solidFill>
                   <a:srgbClr val="C4A35A"/>
@@ -13926,7 +13891,7 @@
           <a:lstStyle/>
           <a:p>
             <a:pPr algn="r"/>
-            <a:fld id="{f3bba04b-2b01-4190-b7a5-013d254b1b96}" type="slidenum">
+            <a:fld id="{f6696013-ccf0-450a-b4cb-ae4fcc2761f0}" type="slidenum">
               <a:rPr lang="en-GB" sz="1000" dirty="0">
                 <a:solidFill>
                   <a:srgbClr val="C4A35A"/>
@@ -13942,7 +13907,7 @@
                 </a:solidFill>
                 <a:latin typeface="Calibri"/>
               </a:rPr>
-              <a:t> / 34</a:t>
+              <a:t> / 35</a:t>
             </a:r>
             <a:endParaRPr lang="en-GB" sz="1000"/>
           </a:p>
@@ -14274,7 +14239,7 @@
                 </a:solidFill>
                 <a:latin typeface="Calibri"/>
               </a:rPr>
-              <a:t>RESEARCH PROPOSAL  ·  Research Questions</a:t>
+              <a:t>RESEARCH PROPOSAL  ·  Research Objectives</a:t>
             </a:r>
           </a:p>
         </p:txBody>
@@ -14309,7 +14274,7 @@
                 </a:solidFill>
                 <a:latin typeface="Calibri"/>
               </a:rPr>
-              <a:t>Research Questions</a:t>
+              <a:t>Objective 4 — FCNP</a:t>
             </a:r>
           </a:p>
         </p:txBody>
@@ -14344,7 +14309,7 @@
                 </a:solidFill>
                 <a:latin typeface="Calibri"/>
               </a:rPr>
-              <a:t>Each question is paired with one objective. Answers will be empirical after a protocol is frozen; this slide does not pre-commit scores.</a:t>
+              <a:t>The memory chapter: Kirchhoff/Physarum conductances prune the mesh trace and write surviving live citations back into SATR. The unit of publication is the coupling, not a token-percentage.</a:t>
             </a:r>
           </a:p>
         </p:txBody>
@@ -14358,7 +14323,7 @@
         <p:spPr>
           <a:xfrm>
             <a:off x="365760" y="1993392"/>
-            <a:ext cx="11430000" cy="3977639"/>
+            <a:ext cx="11430000" cy="1874519"/>
           </a:xfrm>
           <a:prstGeom prst="rect">
             <a:avLst/>
@@ -14385,7 +14350,7 @@
                 </a:solidFill>
                 <a:latin typeface="Calibri"/>
               </a:rPr>
-              <a:t>RQ1. Can tool retrieval be conditioned on a co-activation cache and session memory rather than a single query embedding (Qin et al., ToolLLM, ICLR 2024; Zheng et al., ToolRerank, LREC-COLING 2024)?  →  addressed by O1 (SessionRerank+ (SATR)).</a:t>
+              <a:t>SOTA. Jiang et al., LLMLingua (EMNLP 2023): token-level prompt compression. Tero et al., Science 2010 (doi:10.1126/science.1177894): Physarum adaptive network. Park et al., Generative Agents (UIST 2023): language memory stream in a sandbox. Pipeline: long prompt → compressor → LLM. Memory is not written back into a tool retriever.</a:t>
             </a:r>
           </a:p>
           <a:p>
@@ -14403,7 +14368,7 @@
                 </a:solidFill>
                 <a:latin typeface="Calibri"/>
               </a:rPr>
-              <a:t>RQ2. Can routing sample a training-free posterior over tool-specialist agents instead of a trained neural controller or an authored SOP (Yue et al., MasRouter, ACL 2025; Hong et al., MetaGPT, ICLR 2024; Ong et al., RouteLLM, ICLR 2025)?  →  addressed by O2 (Adaptive Probabilistic Routing Reinforcement (APRR)).</a:t>
+              <a:t>Gap. Token compressors are not current-reinforced over a context graph and do not pin live government citations into the next retrieval turn.</a:t>
             </a:r>
           </a:p>
           <a:p>
@@ -14421,25 +14386,401 @@
                 </a:solidFill>
                 <a:latin typeface="Calibri"/>
               </a:rPr>
-              <a:t>RQ3. Can execution proceed as gossiped (toolId, score) plus score-sum consensus, then a live data.gov.in GET, instead of a central chat orchestrator (Wu et al., AutoGen, COLM 2024)?  →  addressed by O3 (Mesh Network Context Diffusion (MNCD)).</a:t>
-            </a:r>
-          </a:p>
-          <a:p>
-            <a:pPr>
-              <a:spcAft>
-                <a:spcPts val="600"/>
-              </a:spcAft>
-              <a:buFont typeface="Arial"/>
-              <a:buChar char="•"/>
-            </a:pPr>
-            <a:r>
-              <a:rPr sz="1300">
-                <a:solidFill>
-                  <a:srgbClr val="1A1214"/>
-                </a:solidFill>
-                <a:latin typeface="Calibri"/>
-              </a:rPr>
-              <a:t>RQ4. Can Kirchhoff/Physarum pruning pin live citations back into retrieval rather than only shortening the prompt (Jiang et al., LLMLingua, EMNLP 2023; Tero et al., Science 2010)?  →  addressed by O4 (Flow-Coupled Network Pruning (FCNP)).</a:t>
+              <a:t>Novelty. Laplacian solve with grounded sink, matching the published Python pruner. Hybrid tiering and persistent high-flow citations. If a requested crop/state has no AGMARKNET rows today, other live rows are shown; nothing is invented. Closed loop: retained spans become SATR session memory.</a:t>
+            </a:r>
+          </a:p>
+        </p:txBody>
+      </p:sp>
+      <p:sp>
+        <p:nvSpPr>
+          <p:cNvPr id="13" name="TextBox 12"/>
+          <p:cNvSpPr txBox="1"/>
+          <p:nvPr/>
+        </p:nvSpPr>
+        <p:spPr>
+          <a:xfrm>
+            <a:off x="365760" y="4434840"/>
+            <a:ext cx="11430000" cy="219456"/>
+          </a:xfrm>
+          <a:prstGeom prst="rect">
+            <a:avLst/>
+          </a:prstGeom>
+          <a:noFill/>
+        </p:spPr>
+        <p:txBody>
+          <a:bodyPr wrap="square">
+            <a:spAutoFit/>
+          </a:bodyPr>
+          <a:lstStyle/>
+          <a:p>
+            <a:pPr algn="l"/>
+            <a:r>
+              <a:rPr sz="1100" b="0">
+                <a:solidFill>
+                  <a:srgbClr val="5C4A4E"/>
+                </a:solidFill>
+                <a:latin typeface="Calibri"/>
+              </a:rPr>
+              <a:t>Top: published SOTA. Bottom: this proposal. No numerical targets.</a:t>
+            </a:r>
+          </a:p>
+        </p:txBody>
+      </p:sp>
+      <p:sp>
+        <p:nvSpPr>
+          <p:cNvPr id="14" name="Rounded Rectangle 13"/>
+          <p:cNvSpPr/>
+          <p:nvPr/>
+        </p:nvSpPr>
+        <p:spPr>
+          <a:xfrm>
+            <a:off x="365760" y="4690872"/>
+            <a:ext cx="3736848" cy="438912"/>
+          </a:xfrm>
+          <a:prstGeom prst="roundRect">
+            <a:avLst>
+              <a:gd name="adj" fmla="val 10000"/>
+            </a:avLst>
+          </a:prstGeom>
+          <a:solidFill>
+            <a:srgbClr val="4A2A32"/>
+          </a:solidFill>
+          <a:ln>
+            <a:noFill/>
+          </a:ln>
+        </p:spPr>
+        <p:style>
+          <a:lnRef idx="1">
+            <a:schemeClr val="accent1"/>
+          </a:lnRef>
+          <a:fillRef idx="3">
+            <a:schemeClr val="accent1"/>
+          </a:fillRef>
+          <a:effectRef idx="2">
+            <a:schemeClr val="accent1"/>
+          </a:effectRef>
+          <a:fontRef idx="minor">
+            <a:schemeClr val="lt1"/>
+          </a:fontRef>
+        </p:style>
+        <p:txBody>
+          <a:bodyPr rtlCol="0" anchor="ctr" wrap="square"/>
+          <a:lstStyle/>
+          <a:p>
+            <a:pPr algn="ctr"/>
+            <a:r>
+              <a:rPr sz="1000" b="1">
+                <a:solidFill>
+                  <a:srgbClr val="FFFFFF"/>
+                </a:solidFill>
+                <a:latin typeface="Calibri"/>
+              </a:rPr>
+              <a:t>Long prompt</a:t>
+            </a:r>
+          </a:p>
+        </p:txBody>
+      </p:sp>
+      <p:sp>
+        <p:nvSpPr>
+          <p:cNvPr id="15" name="Rounded Rectangle 14"/>
+          <p:cNvSpPr/>
+          <p:nvPr/>
+        </p:nvSpPr>
+        <p:spPr>
+          <a:xfrm>
+            <a:off x="4212336" y="4690872"/>
+            <a:ext cx="3736848" cy="438912"/>
+          </a:xfrm>
+          <a:prstGeom prst="roundRect">
+            <a:avLst>
+              <a:gd name="adj" fmla="val 10000"/>
+            </a:avLst>
+          </a:prstGeom>
+          <a:solidFill>
+            <a:srgbClr val="4A2A32"/>
+          </a:solidFill>
+          <a:ln>
+            <a:noFill/>
+          </a:ln>
+        </p:spPr>
+        <p:style>
+          <a:lnRef idx="1">
+            <a:schemeClr val="accent1"/>
+          </a:lnRef>
+          <a:fillRef idx="3">
+            <a:schemeClr val="accent1"/>
+          </a:fillRef>
+          <a:effectRef idx="2">
+            <a:schemeClr val="accent1"/>
+          </a:effectRef>
+          <a:fontRef idx="minor">
+            <a:schemeClr val="lt1"/>
+          </a:fontRef>
+        </p:style>
+        <p:txBody>
+          <a:bodyPr rtlCol="0" anchor="ctr" wrap="square"/>
+          <a:lstStyle/>
+          <a:p>
+            <a:pPr algn="ctr"/>
+            <a:r>
+              <a:rPr sz="1000" b="1">
+                <a:solidFill>
+                  <a:srgbClr val="FFFFFF"/>
+                </a:solidFill>
+                <a:latin typeface="Calibri"/>
+              </a:rPr>
+              <a:t>LLMLingua tokens</a:t>
+            </a:r>
+          </a:p>
+        </p:txBody>
+      </p:sp>
+      <p:sp>
+        <p:nvSpPr>
+          <p:cNvPr id="16" name="Rounded Rectangle 15"/>
+          <p:cNvSpPr/>
+          <p:nvPr/>
+        </p:nvSpPr>
+        <p:spPr>
+          <a:xfrm>
+            <a:off x="8058912" y="4690872"/>
+            <a:ext cx="3736848" cy="438912"/>
+          </a:xfrm>
+          <a:prstGeom prst="roundRect">
+            <a:avLst>
+              <a:gd name="adj" fmla="val 10000"/>
+            </a:avLst>
+          </a:prstGeom>
+          <a:solidFill>
+            <a:srgbClr val="4A2A32"/>
+          </a:solidFill>
+          <a:ln>
+            <a:noFill/>
+          </a:ln>
+        </p:spPr>
+        <p:style>
+          <a:lnRef idx="1">
+            <a:schemeClr val="accent1"/>
+          </a:lnRef>
+          <a:fillRef idx="3">
+            <a:schemeClr val="accent1"/>
+          </a:fillRef>
+          <a:effectRef idx="2">
+            <a:schemeClr val="accent1"/>
+          </a:effectRef>
+          <a:fontRef idx="minor">
+            <a:schemeClr val="lt1"/>
+          </a:fontRef>
+        </p:style>
+        <p:txBody>
+          <a:bodyPr rtlCol="0" anchor="ctr" wrap="square"/>
+          <a:lstStyle/>
+          <a:p>
+            <a:pPr algn="ctr"/>
+            <a:r>
+              <a:rPr sz="1000" b="1">
+                <a:solidFill>
+                  <a:srgbClr val="FFFFFF"/>
+                </a:solidFill>
+                <a:latin typeface="Calibri"/>
+              </a:rPr>
+              <a:t>No write-back</a:t>
+            </a:r>
+          </a:p>
+        </p:txBody>
+      </p:sp>
+      <p:sp>
+        <p:nvSpPr>
+          <p:cNvPr id="17" name="Rounded Rectangle 16"/>
+          <p:cNvSpPr/>
+          <p:nvPr/>
+        </p:nvSpPr>
+        <p:spPr>
+          <a:xfrm>
+            <a:off x="365760" y="5221224"/>
+            <a:ext cx="3736848" cy="438912"/>
+          </a:xfrm>
+          <a:prstGeom prst="roundRect">
+            <a:avLst>
+              <a:gd name="adj" fmla="val 10000"/>
+            </a:avLst>
+          </a:prstGeom>
+          <a:solidFill>
+            <a:srgbClr val="7C1D2E"/>
+          </a:solidFill>
+          <a:ln>
+            <a:noFill/>
+          </a:ln>
+        </p:spPr>
+        <p:style>
+          <a:lnRef idx="1">
+            <a:schemeClr val="accent1"/>
+          </a:lnRef>
+          <a:fillRef idx="3">
+            <a:schemeClr val="accent1"/>
+          </a:fillRef>
+          <a:effectRef idx="2">
+            <a:schemeClr val="accent1"/>
+          </a:effectRef>
+          <a:fontRef idx="minor">
+            <a:schemeClr val="lt1"/>
+          </a:fontRef>
+        </p:style>
+        <p:txBody>
+          <a:bodyPr rtlCol="0" anchor="ctr" wrap="square"/>
+          <a:lstStyle/>
+          <a:p>
+            <a:pPr algn="ctr"/>
+            <a:r>
+              <a:rPr sz="1000" b="1">
+                <a:solidFill>
+                  <a:srgbClr val="FFFFFF"/>
+                </a:solidFill>
+                <a:latin typeface="Calibri"/>
+              </a:rPr>
+              <a:t>MNCD citations</a:t>
+            </a:r>
+          </a:p>
+        </p:txBody>
+      </p:sp>
+      <p:sp>
+        <p:nvSpPr>
+          <p:cNvPr id="18" name="Rounded Rectangle 17"/>
+          <p:cNvSpPr/>
+          <p:nvPr/>
+        </p:nvSpPr>
+        <p:spPr>
+          <a:xfrm>
+            <a:off x="4212336" y="5221224"/>
+            <a:ext cx="3736848" cy="438912"/>
+          </a:xfrm>
+          <a:prstGeom prst="roundRect">
+            <a:avLst>
+              <a:gd name="adj" fmla="val 10000"/>
+            </a:avLst>
+          </a:prstGeom>
+          <a:solidFill>
+            <a:srgbClr val="7C1D2E"/>
+          </a:solidFill>
+          <a:ln>
+            <a:noFill/>
+          </a:ln>
+        </p:spPr>
+        <p:style>
+          <a:lnRef idx="1">
+            <a:schemeClr val="accent1"/>
+          </a:lnRef>
+          <a:fillRef idx="3">
+            <a:schemeClr val="accent1"/>
+          </a:fillRef>
+          <a:effectRef idx="2">
+            <a:schemeClr val="accent1"/>
+          </a:effectRef>
+          <a:fontRef idx="minor">
+            <a:schemeClr val="lt1"/>
+          </a:fontRef>
+        </p:style>
+        <p:txBody>
+          <a:bodyPr rtlCol="0" anchor="ctr" wrap="square"/>
+          <a:lstStyle/>
+          <a:p>
+            <a:pPr algn="ctr"/>
+            <a:r>
+              <a:rPr sz="1000" b="1">
+                <a:solidFill>
+                  <a:srgbClr val="FFFFFF"/>
+                </a:solidFill>
+                <a:latin typeface="Calibri"/>
+              </a:rPr>
+              <a:t>Kirchhoff / Physarum</a:t>
+            </a:r>
+          </a:p>
+        </p:txBody>
+      </p:sp>
+      <p:sp>
+        <p:nvSpPr>
+          <p:cNvPr id="19" name="Rounded Rectangle 18"/>
+          <p:cNvSpPr/>
+          <p:nvPr/>
+        </p:nvSpPr>
+        <p:spPr>
+          <a:xfrm>
+            <a:off x="8058912" y="5221224"/>
+            <a:ext cx="3736848" cy="438912"/>
+          </a:xfrm>
+          <a:prstGeom prst="roundRect">
+            <a:avLst>
+              <a:gd name="adj" fmla="val 10000"/>
+            </a:avLst>
+          </a:prstGeom>
+          <a:solidFill>
+            <a:srgbClr val="7C1D2E"/>
+          </a:solidFill>
+          <a:ln>
+            <a:noFill/>
+          </a:ln>
+        </p:spPr>
+        <p:style>
+          <a:lnRef idx="1">
+            <a:schemeClr val="accent1"/>
+          </a:lnRef>
+          <a:fillRef idx="3">
+            <a:schemeClr val="accent1"/>
+          </a:fillRef>
+          <a:effectRef idx="2">
+            <a:schemeClr val="accent1"/>
+          </a:effectRef>
+          <a:fontRef idx="minor">
+            <a:schemeClr val="lt1"/>
+          </a:fontRef>
+        </p:style>
+        <p:txBody>
+          <a:bodyPr rtlCol="0" anchor="ctr" wrap="square"/>
+          <a:lstStyle/>
+          <a:p>
+            <a:pPr algn="ctr"/>
+            <a:r>
+              <a:rPr sz="1000" b="1">
+                <a:solidFill>
+                  <a:srgbClr val="FFFFFF"/>
+                </a:solidFill>
+                <a:latin typeface="Calibri"/>
+              </a:rPr>
+              <a:t>M_t → SATR</a:t>
+            </a:r>
+          </a:p>
+        </p:txBody>
+      </p:sp>
+      <p:sp>
+        <p:nvSpPr>
+          <p:cNvPr id="20" name="TextBox 19"/>
+          <p:cNvSpPr txBox="1"/>
+          <p:nvPr/>
+        </p:nvSpPr>
+        <p:spPr>
+          <a:xfrm>
+            <a:off x="365760" y="6199632"/>
+            <a:ext cx="11430000" cy="256032"/>
+          </a:xfrm>
+          <a:prstGeom prst="rect">
+            <a:avLst/>
+          </a:prstGeom>
+          <a:noFill/>
+        </p:spPr>
+        <p:txBody>
+          <a:bodyPr wrap="square">
+            <a:spAutoFit/>
+          </a:bodyPr>
+          <a:lstStyle/>
+          <a:p>
+            <a:pPr algn="l"/>
+            <a:r>
+              <a:rPr sz="1000" b="0">
+                <a:solidFill>
+                  <a:srgbClr val="5C4A4E"/>
+                </a:solidFill>
+                <a:latin typeface="Calibri"/>
+              </a:rPr>
+              <a:t>Repository: github.com/joyjeni/fcnp-context-pruning</a:t>
             </a:r>
           </a:p>
         </p:txBody>
@@ -14465,7 +14806,7 @@
           <a:lstStyle/>
           <a:p>
             <a:pPr algn="l"/>
-            <a:fld id="{fc7b0f5b-d06a-499f-91ba-9048dd46f25d}" type="datetime3">
+            <a:fld id="{b7b26fba-6d78-4364-b3ef-0a8460a89177}" type="datetime3">
               <a:rPr lang="en-GB" sz="1000" dirty="0">
                 <a:solidFill>
                   <a:srgbClr val="C4A35A"/>
@@ -14499,7 +14840,7 @@
           <a:lstStyle/>
           <a:p>
             <a:pPr algn="r"/>
-            <a:fld id="{c3e2cf2d-17b6-4adf-9687-bc7a17441857}" type="slidenum">
+            <a:fld id="{77531f5b-d21b-4735-8473-87f790477140}" type="slidenum">
               <a:rPr lang="en-GB" sz="1000" dirty="0">
                 <a:solidFill>
                   <a:srgbClr val="C4A35A"/>
@@ -14515,7 +14856,7 @@
                 </a:solidFill>
                 <a:latin typeface="Calibri"/>
               </a:rPr>
-              <a:t> / 34</a:t>
+              <a:t> / 35</a:t>
             </a:r>
             <a:endParaRPr lang="en-GB" sz="1000"/>
           </a:p>
@@ -14847,7 +15188,7 @@
                 </a:solidFill>
                 <a:latin typeface="Calibri"/>
               </a:rPr>
-              <a:t>RESEARCH PROPOSAL  ·  Research Methodology</a:t>
+              <a:t>RESEARCH PROPOSAL  ·  Research Questions</a:t>
             </a:r>
           </a:p>
         </p:txBody>
@@ -14882,7 +15223,7 @@
                 </a:solidFill>
                 <a:latin typeface="Calibri"/>
               </a:rPr>
-              <a:t>Research Methodology</a:t>
+              <a:t>Research Questions</a:t>
             </a:r>
           </a:p>
         </p:txBody>
@@ -14917,7 +15258,7 @@
                 </a:solidFill>
                 <a:latin typeface="Calibri"/>
               </a:rPr>
-              <a:t>One methodology per objective, then one integrated protocol. Proposal-stage: design the loop and freeze the protocol; do not pre-commit a leaderboard.</a:t>
+              <a:t>Each question is paired with one objective. Answers will be empirical after a protocol is frozen; this slide does not pre-commit scores.</a:t>
             </a:r>
           </a:p>
         </p:txBody>
@@ -14931,7 +15272,7 @@
         <p:spPr>
           <a:xfrm>
             <a:off x="365760" y="1993392"/>
-            <a:ext cx="11430000" cy="1874519"/>
+            <a:ext cx="11430000" cy="3977639"/>
           </a:xfrm>
           <a:prstGeom prst="rect">
             <a:avLst/>
@@ -14958,7 +15299,7 @@
                 </a:solidFill>
                 <a:latin typeface="Calibri"/>
               </a:rPr>
-              <a:t>O1 SATR — fused session ranking against a ToolBench-style library. Live mandi rows are not SATR’s job.</a:t>
+              <a:t>RQ1. Can tool retrieval be conditioned on a co-activation cache and session memory rather than a single query embedding (Qin et al., ToolLLM, ICLR 2024; Zheng et al., ToolRerank, LREC-COLING 2024)?  →  addressed by O1 (SessionRerank+ (SATR)).</a:t>
             </a:r>
           </a:p>
           <a:p>
@@ -14976,7 +15317,7 @@
                 </a:solidFill>
                 <a:latin typeface="Calibri"/>
               </a:rPr>
-              <a:t>O2 APRR — training-free Dirichlet–Thompson posterior over named specialists. Learned routers are a future bake-off, not the implementation.</a:t>
+              <a:t>RQ2. Can routing sample a training-free posterior over tool-specialist agents instead of a trained neural controller or an authored SOP (Yue et al., MasRouter, ACL 2025; Hong et al., MetaGPT, ICLR 2024; Ong et al., RouteLLM, ICLR 2025)?  →  addressed by O2 (Adaptive Probabilistic Routing Reinforcement (APRR)).</a:t>
             </a:r>
           </a:p>
           <a:p>
@@ -14994,7 +15335,7 @@
                 </a:solidFill>
                 <a:latin typeface="Calibri"/>
               </a:rPr>
-              <a:t>O3 MNCD — gossip + score-sum consensus, then live data.gov.in GET on verified Agriculture UUIDs. Fail loud. No dummy prices.</a:t>
+              <a:t>RQ3. Can execution proceed as gossiped (toolId, score) plus score-sum consensus, then a live data.gov.in GET, instead of a central chat orchestrator (Wu et al., AutoGen, COLM 2024)?  →  addressed by O3 (Mesh Network Context Diffusion (MNCD)).</a:t>
             </a:r>
           </a:p>
           <a:p>
@@ -15012,420 +15353,7 @@
                 </a:solidFill>
                 <a:latin typeface="Calibri"/>
               </a:rPr>
-              <a:t>O4 FCNP — Kirchhoff / Physarum-inspired conductance prune with write-back into SATR. Not LLMLingua token deletion.</a:t>
-            </a:r>
-          </a:p>
-          <a:p>
-            <a:pPr>
-              <a:spcAft>
-                <a:spcPts val="600"/>
-              </a:spcAft>
-              <a:buFont typeface="Arial"/>
-              <a:buChar char="•"/>
-            </a:pPr>
-            <a:r>
-              <a:rPr sz="1300">
-                <a:solidFill>
-                  <a:srgbClr val="1A1214"/>
-                </a:solidFill>
-                <a:latin typeface="Calibri"/>
-              </a:rPr>
-              <a:t>Integrated contract. SATR → APRR → MNCD → FCNP must run in that order on one user turn. Skipping MNCD or FCNP is an incomplete run.</a:t>
-            </a:r>
-          </a:p>
-          <a:p>
-            <a:pPr>
-              <a:spcAft>
-                <a:spcPts val="600"/>
-              </a:spcAft>
-              <a:buFont typeface="Arial"/>
-              <a:buChar char="•"/>
-            </a:pPr>
-            <a:r>
-              <a:rPr sz="1300">
-                <a:solidFill>
-                  <a:srgbClr val="1A1214"/>
-                </a:solidFill>
-                <a:latin typeface="Calibri"/>
-              </a:rPr>
-              <a:t>Implementation. The four modules are the functions in satr.ts, aprr.ts, mncd.ts, fcnp.ts — formulas on the next slides, full traces on /walkthrough.</a:t>
-            </a:r>
-          </a:p>
-          <a:p>
-            <a:pPr>
-              <a:spcAft>
-                <a:spcPts val="600"/>
-              </a:spcAft>
-              <a:buFont typeface="Arial"/>
-              <a:buChar char="•"/>
-            </a:pPr>
-            <a:r>
-              <a:rPr sz="1300">
-                <a:solidFill>
-                  <a:srgbClr val="1A1214"/>
-                </a:solidFill>
-                <a:latin typeface="Calibri"/>
-              </a:rPr>
-              <a:t>What will not appear in this proposal. Promised retrieval scores, latency targets, consensus percentages, or token-reduction ratios.</a:t>
-            </a:r>
-          </a:p>
-        </p:txBody>
-      </p:sp>
-      <p:sp>
-        <p:nvSpPr>
-          <p:cNvPr id="13" name="TextBox 12"/>
-          <p:cNvSpPr txBox="1"/>
-          <p:nvPr/>
-        </p:nvSpPr>
-        <p:spPr>
-          <a:xfrm>
-            <a:off x="365760" y="4434840"/>
-            <a:ext cx="11430000" cy="219456"/>
-          </a:xfrm>
-          <a:prstGeom prst="rect">
-            <a:avLst/>
-          </a:prstGeom>
-          <a:noFill/>
-        </p:spPr>
-        <p:txBody>
-          <a:bodyPr wrap="square">
-            <a:spAutoFit/>
-          </a:bodyPr>
-          <a:lstStyle/>
-          <a:p>
-            <a:pPr algn="l"/>
-            <a:r>
-              <a:rPr sz="1100" b="0">
-                <a:solidFill>
-                  <a:srgbClr val="5C4A4E"/>
-                </a:solidFill>
-                <a:latin typeface="Calibri"/>
-              </a:rPr>
-              <a:t>ACRS loop (maroon). Green path is the increment, not a metric.</a:t>
-            </a:r>
-          </a:p>
-        </p:txBody>
-      </p:sp>
-      <p:sp>
-        <p:nvSpPr>
-          <p:cNvPr id="14" name="Rounded Rectangle 13"/>
-          <p:cNvSpPr/>
-          <p:nvPr/>
-        </p:nvSpPr>
-        <p:spPr>
-          <a:xfrm>
-            <a:off x="365760" y="4690872"/>
-            <a:ext cx="1813560" cy="438912"/>
-          </a:xfrm>
-          <a:prstGeom prst="roundRect">
-            <a:avLst>
-              <a:gd name="adj" fmla="val 10000"/>
-            </a:avLst>
-          </a:prstGeom>
-          <a:solidFill>
-            <a:srgbClr val="7C1D2E"/>
-          </a:solidFill>
-          <a:ln>
-            <a:noFill/>
-          </a:ln>
-        </p:spPr>
-        <p:style>
-          <a:lnRef idx="1">
-            <a:schemeClr val="accent1"/>
-          </a:lnRef>
-          <a:fillRef idx="3">
-            <a:schemeClr val="accent1"/>
-          </a:fillRef>
-          <a:effectRef idx="2">
-            <a:schemeClr val="accent1"/>
-          </a:effectRef>
-          <a:fontRef idx="minor">
-            <a:schemeClr val="lt1"/>
-          </a:fontRef>
-        </p:style>
-        <p:txBody>
-          <a:bodyPr rtlCol="0" anchor="ctr" wrap="square"/>
-          <a:lstStyle/>
-          <a:p>
-            <a:pPr algn="ctr"/>
-            <a:r>
-              <a:rPr sz="1000" b="1">
-                <a:solidFill>
-                  <a:srgbClr val="FFFFFF"/>
-                </a:solidFill>
-                <a:latin typeface="Calibri"/>
-              </a:rPr>
-              <a:t>q + M</a:t>
-            </a:r>
-          </a:p>
-        </p:txBody>
-      </p:sp>
-      <p:sp>
-        <p:nvSpPr>
-          <p:cNvPr id="15" name="Rounded Rectangle 14"/>
-          <p:cNvSpPr/>
-          <p:nvPr/>
-        </p:nvSpPr>
-        <p:spPr>
-          <a:xfrm>
-            <a:off x="2289048" y="4690872"/>
-            <a:ext cx="1813560" cy="438912"/>
-          </a:xfrm>
-          <a:prstGeom prst="roundRect">
-            <a:avLst>
-              <a:gd name="adj" fmla="val 10000"/>
-            </a:avLst>
-          </a:prstGeom>
-          <a:solidFill>
-            <a:srgbClr val="7C1D2E"/>
-          </a:solidFill>
-          <a:ln>
-            <a:noFill/>
-          </a:ln>
-        </p:spPr>
-        <p:style>
-          <a:lnRef idx="1">
-            <a:schemeClr val="accent1"/>
-          </a:lnRef>
-          <a:fillRef idx="3">
-            <a:schemeClr val="accent1"/>
-          </a:fillRef>
-          <a:effectRef idx="2">
-            <a:schemeClr val="accent1"/>
-          </a:effectRef>
-          <a:fontRef idx="minor">
-            <a:schemeClr val="lt1"/>
-          </a:fontRef>
-        </p:style>
-        <p:txBody>
-          <a:bodyPr rtlCol="0" anchor="ctr" wrap="square"/>
-          <a:lstStyle/>
-          <a:p>
-            <a:pPr algn="ctr"/>
-            <a:r>
-              <a:rPr sz="1000" b="1">
-                <a:solidFill>
-                  <a:srgbClr val="FFFFFF"/>
-                </a:solidFill>
-                <a:latin typeface="Calibri"/>
-              </a:rPr>
-              <a:t>SATR</a:t>
-            </a:r>
-          </a:p>
-        </p:txBody>
-      </p:sp>
-      <p:sp>
-        <p:nvSpPr>
-          <p:cNvPr id="16" name="Rounded Rectangle 15"/>
-          <p:cNvSpPr/>
-          <p:nvPr/>
-        </p:nvSpPr>
-        <p:spPr>
-          <a:xfrm>
-            <a:off x="4212336" y="4690872"/>
-            <a:ext cx="1813560" cy="438912"/>
-          </a:xfrm>
-          <a:prstGeom prst="roundRect">
-            <a:avLst>
-              <a:gd name="adj" fmla="val 10000"/>
-            </a:avLst>
-          </a:prstGeom>
-          <a:solidFill>
-            <a:srgbClr val="7C1D2E"/>
-          </a:solidFill>
-          <a:ln>
-            <a:noFill/>
-          </a:ln>
-        </p:spPr>
-        <p:style>
-          <a:lnRef idx="1">
-            <a:schemeClr val="accent1"/>
-          </a:lnRef>
-          <a:fillRef idx="3">
-            <a:schemeClr val="accent1"/>
-          </a:fillRef>
-          <a:effectRef idx="2">
-            <a:schemeClr val="accent1"/>
-          </a:effectRef>
-          <a:fontRef idx="minor">
-            <a:schemeClr val="lt1"/>
-          </a:fontRef>
-        </p:style>
-        <p:txBody>
-          <a:bodyPr rtlCol="0" anchor="ctr" wrap="square"/>
-          <a:lstStyle/>
-          <a:p>
-            <a:pPr algn="ctr"/>
-            <a:r>
-              <a:rPr sz="1000" b="1">
-                <a:solidFill>
-                  <a:srgbClr val="FFFFFF"/>
-                </a:solidFill>
-                <a:latin typeface="Calibri"/>
-              </a:rPr>
-              <a:t>APRR</a:t>
-            </a:r>
-          </a:p>
-        </p:txBody>
-      </p:sp>
-      <p:sp>
-        <p:nvSpPr>
-          <p:cNvPr id="17" name="Rounded Rectangle 16"/>
-          <p:cNvSpPr/>
-          <p:nvPr/>
-        </p:nvSpPr>
-        <p:spPr>
-          <a:xfrm>
-            <a:off x="6135624" y="4690872"/>
-            <a:ext cx="1813560" cy="438912"/>
-          </a:xfrm>
-          <a:prstGeom prst="roundRect">
-            <a:avLst>
-              <a:gd name="adj" fmla="val 10000"/>
-            </a:avLst>
-          </a:prstGeom>
-          <a:solidFill>
-            <a:srgbClr val="7C1D2E"/>
-          </a:solidFill>
-          <a:ln>
-            <a:noFill/>
-          </a:ln>
-        </p:spPr>
-        <p:style>
-          <a:lnRef idx="1">
-            <a:schemeClr val="accent1"/>
-          </a:lnRef>
-          <a:fillRef idx="3">
-            <a:schemeClr val="accent1"/>
-          </a:fillRef>
-          <a:effectRef idx="2">
-            <a:schemeClr val="accent1"/>
-          </a:effectRef>
-          <a:fontRef idx="minor">
-            <a:schemeClr val="lt1"/>
-          </a:fontRef>
-        </p:style>
-        <p:txBody>
-          <a:bodyPr rtlCol="0" anchor="ctr" wrap="square"/>
-          <a:lstStyle/>
-          <a:p>
-            <a:pPr algn="ctr"/>
-            <a:r>
-              <a:rPr sz="1000" b="1">
-                <a:solidFill>
-                  <a:srgbClr val="FFFFFF"/>
-                </a:solidFill>
-                <a:latin typeface="Calibri"/>
-              </a:rPr>
-              <a:t>MNCD</a:t>
-            </a:r>
-          </a:p>
-        </p:txBody>
-      </p:sp>
-      <p:sp>
-        <p:nvSpPr>
-          <p:cNvPr id="18" name="Rounded Rectangle 17"/>
-          <p:cNvSpPr/>
-          <p:nvPr/>
-        </p:nvSpPr>
-        <p:spPr>
-          <a:xfrm>
-            <a:off x="8058912" y="4690872"/>
-            <a:ext cx="1813560" cy="438912"/>
-          </a:xfrm>
-          <a:prstGeom prst="roundRect">
-            <a:avLst>
-              <a:gd name="adj" fmla="val 10000"/>
-            </a:avLst>
-          </a:prstGeom>
-          <a:solidFill>
-            <a:srgbClr val="7C1D2E"/>
-          </a:solidFill>
-          <a:ln>
-            <a:noFill/>
-          </a:ln>
-        </p:spPr>
-        <p:style>
-          <a:lnRef idx="1">
-            <a:schemeClr val="accent1"/>
-          </a:lnRef>
-          <a:fillRef idx="3">
-            <a:schemeClr val="accent1"/>
-          </a:fillRef>
-          <a:effectRef idx="2">
-            <a:schemeClr val="accent1"/>
-          </a:effectRef>
-          <a:fontRef idx="minor">
-            <a:schemeClr val="lt1"/>
-          </a:fontRef>
-        </p:style>
-        <p:txBody>
-          <a:bodyPr rtlCol="0" anchor="ctr" wrap="square"/>
-          <a:lstStyle/>
-          <a:p>
-            <a:pPr algn="ctr"/>
-            <a:r>
-              <a:rPr sz="1000" b="1">
-                <a:solidFill>
-                  <a:srgbClr val="FFFFFF"/>
-                </a:solidFill>
-                <a:latin typeface="Calibri"/>
-              </a:rPr>
-              <a:t>FCNP</a:t>
-            </a:r>
-          </a:p>
-        </p:txBody>
-      </p:sp>
-      <p:sp>
-        <p:nvSpPr>
-          <p:cNvPr id="19" name="Rounded Rectangle 18"/>
-          <p:cNvSpPr/>
-          <p:nvPr/>
-        </p:nvSpPr>
-        <p:spPr>
-          <a:xfrm>
-            <a:off x="9982200" y="4690872"/>
-            <a:ext cx="1813560" cy="438912"/>
-          </a:xfrm>
-          <a:prstGeom prst="roundRect">
-            <a:avLst>
-              <a:gd name="adj" fmla="val 10000"/>
-            </a:avLst>
-          </a:prstGeom>
-          <a:solidFill>
-            <a:srgbClr val="7C1D2E"/>
-          </a:solidFill>
-          <a:ln>
-            <a:noFill/>
-          </a:ln>
-        </p:spPr>
-        <p:style>
-          <a:lnRef idx="1">
-            <a:schemeClr val="accent1"/>
-          </a:lnRef>
-          <a:fillRef idx="3">
-            <a:schemeClr val="accent1"/>
-          </a:fillRef>
-          <a:effectRef idx="2">
-            <a:schemeClr val="accent1"/>
-          </a:effectRef>
-          <a:fontRef idx="minor">
-            <a:schemeClr val="lt1"/>
-          </a:fontRef>
-        </p:style>
-        <p:txBody>
-          <a:bodyPr rtlCol="0" anchor="ctr" wrap="square"/>
-          <a:lstStyle/>
-          <a:p>
-            <a:pPr algn="ctr"/>
-            <a:r>
-              <a:rPr sz="1000" b="1">
-                <a:solidFill>
-                  <a:srgbClr val="FFFFFF"/>
-                </a:solidFill>
-                <a:latin typeface="Calibri"/>
-              </a:rPr>
-              <a:t>a + M</a:t>
+              <a:t>RQ4. Can Kirchhoff/Physarum pruning pin live citations back into retrieval rather than only shortening the prompt (Jiang et al., LLMLingua, EMNLP 2023; Tero et al., Science 2010)?  →  addressed by O4 (Flow-Coupled Network Pruning (FCNP)).</a:t>
             </a:r>
           </a:p>
         </p:txBody>
@@ -15451,7 +15379,7 @@
           <a:lstStyle/>
           <a:p>
             <a:pPr algn="l"/>
-            <a:fld id="{e1ee615e-2ade-435f-8a41-052cd35ec896}" type="datetime3">
+            <a:fld id="{76069615-0df4-4b1c-afc0-049b53b69a89}" type="datetime3">
               <a:rPr lang="en-GB" sz="1000" dirty="0">
                 <a:solidFill>
                   <a:srgbClr val="C4A35A"/>
@@ -15485,7 +15413,7 @@
           <a:lstStyle/>
           <a:p>
             <a:pPr algn="r"/>
-            <a:fld id="{cb54f38d-102e-4620-b917-0e1b57eb7f57}" type="slidenum">
+            <a:fld id="{494c4d17-7d98-4380-9cf6-0ed3f03c37d6}" type="slidenum">
               <a:rPr lang="en-GB" sz="1000" dirty="0">
                 <a:solidFill>
                   <a:srgbClr val="C4A35A"/>
@@ -15501,7 +15429,7 @@
                 </a:solidFill>
                 <a:latin typeface="Calibri"/>
               </a:rPr>
-              <a:t> / 34</a:t>
+              <a:t> / 35</a:t>
             </a:r>
             <a:endParaRPr lang="en-GB" sz="1000"/>
           </a:p>
@@ -15868,7 +15796,7 @@
                 </a:solidFill>
                 <a:latin typeface="Calibri"/>
               </a:rPr>
-              <a:t>Research Methodology — O1 SATR</a:t>
+              <a:t>Research Methodology</a:t>
             </a:r>
           </a:p>
         </p:txBody>
@@ -15903,7 +15831,7 @@
                 </a:solidFill>
                 <a:latin typeface="Calibri"/>
               </a:rPr>
-              <a:t>How session-aware ranking will be designed and later evaluated.</a:t>
+              <a:t>One methodology per objective, then one integrated protocol. Proposal-stage: design the loop and freeze the protocol; do not pre-commit a leaderboard.</a:t>
             </a:r>
           </a:p>
         </p:txBody>
@@ -15917,7 +15845,7 @@
         <p:spPr>
           <a:xfrm>
             <a:off x="365760" y="1993392"/>
-            <a:ext cx="11430000" cy="3977639"/>
+            <a:ext cx="11430000" cy="1874519"/>
           </a:xfrm>
           <a:prstGeom prst="rect">
             <a:avLst/>
@@ -15944,7 +15872,7 @@
                 </a:solidFill>
                 <a:latin typeface="Calibri"/>
               </a:rPr>
-              <a:t>Design method. Specify a fused session object: query + dialogue turns + last tool traces + co-activation counts. Rank tools with that object, not with the raw utterance alone.</a:t>
+              <a:t>O1 SATR — fused session ranking against a ToolBench-style library. Live mandi rows are not SATR’s job.</a:t>
             </a:r>
           </a:p>
           <a:p>
@@ -15962,7 +15890,7 @@
                 </a:solidFill>
                 <a:latin typeface="Calibri"/>
               </a:rPr>
-              <a:t>Ranking library (not live prices). Use ToolBench / ToolLLM artefacts as a public tool-ranking library and protocol family. RapidAPI-style traces are ranking evidence only.</a:t>
+              <a:t>O2 APRR — training-free Dirichlet–Thompson posterior over named specialists. Learned routers are a future bake-off, not the implementation.</a:t>
             </a:r>
           </a:p>
           <a:p>
@@ -15980,7 +15908,7 @@
                 </a:solidFill>
                 <a:latin typeface="Calibri"/>
               </a:rPr>
-              <a:t>Live Indian OGD is out of SATR’s ranking path. Mandi and weather rows enter at MNCD. SATR must not invent or cache dummy AGMARKNET prices.</a:t>
+              <a:t>O3 MNCD — gossip + score-sum consensus, then live data.gov.in GET on verified Agriculture UUIDs. Fail loud. No dummy prices.</a:t>
             </a:r>
           </a:p>
           <a:p>
@@ -15998,7 +15926,7 @@
                 </a:solidFill>
                 <a:latin typeface="Calibri"/>
               </a:rPr>
-              <a:t>Implementation path. Persist co-activation in a session store; expose a rank(query, session) API that APRR can call. Fail loud if the session schema is incomplete.</a:t>
+              <a:t>O4 FCNP — Kirchhoff / Physarum-inspired conductance prune with write-back into SATR. Not LLMLingua token deletion.</a:t>
             </a:r>
           </a:p>
           <a:p>
@@ -16016,7 +15944,7 @@
                 </a:solidFill>
                 <a:latin typeface="Calibri"/>
               </a:rPr>
-              <a:t>Future evaluation protocol (not a result). When the protocol is frozen, compare session-fused ranking against query-only ranking on the same ToolBench-style split. Report the protocol, not a pre-committed score.</a:t>
+              <a:t>Integrated contract. SATR → APRR → MNCD → FCNP must run in that order on one user turn. Skipping MNCD or FCNP is an incomplete run.</a:t>
             </a:r>
           </a:p>
           <a:p>
@@ -16034,7 +15962,384 @@
                 </a:solidFill>
                 <a:latin typeface="Calibri"/>
               </a:rPr>
-              <a:t>Deliverable for the thesis chapter. Algorithm, schema, and ablation plan (with vs without tool-trace fusion).</a:t>
+              <a:t>Implementation. The four modules are the functions in satr.ts, aprr.ts, mncd.ts, fcnp.ts — formulas on the next slides, full traces on /walkthrough.</a:t>
+            </a:r>
+          </a:p>
+          <a:p>
+            <a:pPr>
+              <a:spcAft>
+                <a:spcPts val="600"/>
+              </a:spcAft>
+              <a:buFont typeface="Arial"/>
+              <a:buChar char="•"/>
+            </a:pPr>
+            <a:r>
+              <a:rPr sz="1300">
+                <a:solidFill>
+                  <a:srgbClr val="1A1214"/>
+                </a:solidFill>
+                <a:latin typeface="Calibri"/>
+              </a:rPr>
+              <a:t>What will not appear in this proposal. Promised retrieval scores, latency targets, consensus percentages, or token-reduction ratios.</a:t>
+            </a:r>
+          </a:p>
+        </p:txBody>
+      </p:sp>
+      <p:sp>
+        <p:nvSpPr>
+          <p:cNvPr id="13" name="TextBox 12"/>
+          <p:cNvSpPr txBox="1"/>
+          <p:nvPr/>
+        </p:nvSpPr>
+        <p:spPr>
+          <a:xfrm>
+            <a:off x="365760" y="4434840"/>
+            <a:ext cx="11430000" cy="219456"/>
+          </a:xfrm>
+          <a:prstGeom prst="rect">
+            <a:avLst/>
+          </a:prstGeom>
+          <a:noFill/>
+        </p:spPr>
+        <p:txBody>
+          <a:bodyPr wrap="square">
+            <a:spAutoFit/>
+          </a:bodyPr>
+          <a:lstStyle/>
+          <a:p>
+            <a:pPr algn="l"/>
+            <a:r>
+              <a:rPr sz="1100" b="0">
+                <a:solidFill>
+                  <a:srgbClr val="5C4A4E"/>
+                </a:solidFill>
+                <a:latin typeface="Calibri"/>
+              </a:rPr>
+              <a:t>ACRS loop (maroon). Green path is the increment, not a metric.</a:t>
+            </a:r>
+          </a:p>
+        </p:txBody>
+      </p:sp>
+      <p:sp>
+        <p:nvSpPr>
+          <p:cNvPr id="14" name="Rounded Rectangle 13"/>
+          <p:cNvSpPr/>
+          <p:nvPr/>
+        </p:nvSpPr>
+        <p:spPr>
+          <a:xfrm>
+            <a:off x="365760" y="4690872"/>
+            <a:ext cx="1813560" cy="438912"/>
+          </a:xfrm>
+          <a:prstGeom prst="roundRect">
+            <a:avLst>
+              <a:gd name="adj" fmla="val 10000"/>
+            </a:avLst>
+          </a:prstGeom>
+          <a:solidFill>
+            <a:srgbClr val="7C1D2E"/>
+          </a:solidFill>
+          <a:ln>
+            <a:noFill/>
+          </a:ln>
+        </p:spPr>
+        <p:style>
+          <a:lnRef idx="1">
+            <a:schemeClr val="accent1"/>
+          </a:lnRef>
+          <a:fillRef idx="3">
+            <a:schemeClr val="accent1"/>
+          </a:fillRef>
+          <a:effectRef idx="2">
+            <a:schemeClr val="accent1"/>
+          </a:effectRef>
+          <a:fontRef idx="minor">
+            <a:schemeClr val="lt1"/>
+          </a:fontRef>
+        </p:style>
+        <p:txBody>
+          <a:bodyPr rtlCol="0" anchor="ctr" wrap="square"/>
+          <a:lstStyle/>
+          <a:p>
+            <a:pPr algn="ctr"/>
+            <a:r>
+              <a:rPr sz="1000" b="1">
+                <a:solidFill>
+                  <a:srgbClr val="FFFFFF"/>
+                </a:solidFill>
+                <a:latin typeface="Calibri"/>
+              </a:rPr>
+              <a:t>q + M</a:t>
+            </a:r>
+          </a:p>
+        </p:txBody>
+      </p:sp>
+      <p:sp>
+        <p:nvSpPr>
+          <p:cNvPr id="15" name="Rounded Rectangle 14"/>
+          <p:cNvSpPr/>
+          <p:nvPr/>
+        </p:nvSpPr>
+        <p:spPr>
+          <a:xfrm>
+            <a:off x="2289048" y="4690872"/>
+            <a:ext cx="1813560" cy="438912"/>
+          </a:xfrm>
+          <a:prstGeom prst="roundRect">
+            <a:avLst>
+              <a:gd name="adj" fmla="val 10000"/>
+            </a:avLst>
+          </a:prstGeom>
+          <a:solidFill>
+            <a:srgbClr val="7C1D2E"/>
+          </a:solidFill>
+          <a:ln>
+            <a:noFill/>
+          </a:ln>
+        </p:spPr>
+        <p:style>
+          <a:lnRef idx="1">
+            <a:schemeClr val="accent1"/>
+          </a:lnRef>
+          <a:fillRef idx="3">
+            <a:schemeClr val="accent1"/>
+          </a:fillRef>
+          <a:effectRef idx="2">
+            <a:schemeClr val="accent1"/>
+          </a:effectRef>
+          <a:fontRef idx="minor">
+            <a:schemeClr val="lt1"/>
+          </a:fontRef>
+        </p:style>
+        <p:txBody>
+          <a:bodyPr rtlCol="0" anchor="ctr" wrap="square"/>
+          <a:lstStyle/>
+          <a:p>
+            <a:pPr algn="ctr"/>
+            <a:r>
+              <a:rPr sz="1000" b="1">
+                <a:solidFill>
+                  <a:srgbClr val="FFFFFF"/>
+                </a:solidFill>
+                <a:latin typeface="Calibri"/>
+              </a:rPr>
+              <a:t>SATR</a:t>
+            </a:r>
+          </a:p>
+        </p:txBody>
+      </p:sp>
+      <p:sp>
+        <p:nvSpPr>
+          <p:cNvPr id="16" name="Rounded Rectangle 15"/>
+          <p:cNvSpPr/>
+          <p:nvPr/>
+        </p:nvSpPr>
+        <p:spPr>
+          <a:xfrm>
+            <a:off x="4212336" y="4690872"/>
+            <a:ext cx="1813560" cy="438912"/>
+          </a:xfrm>
+          <a:prstGeom prst="roundRect">
+            <a:avLst>
+              <a:gd name="adj" fmla="val 10000"/>
+            </a:avLst>
+          </a:prstGeom>
+          <a:solidFill>
+            <a:srgbClr val="7C1D2E"/>
+          </a:solidFill>
+          <a:ln>
+            <a:noFill/>
+          </a:ln>
+        </p:spPr>
+        <p:style>
+          <a:lnRef idx="1">
+            <a:schemeClr val="accent1"/>
+          </a:lnRef>
+          <a:fillRef idx="3">
+            <a:schemeClr val="accent1"/>
+          </a:fillRef>
+          <a:effectRef idx="2">
+            <a:schemeClr val="accent1"/>
+          </a:effectRef>
+          <a:fontRef idx="minor">
+            <a:schemeClr val="lt1"/>
+          </a:fontRef>
+        </p:style>
+        <p:txBody>
+          <a:bodyPr rtlCol="0" anchor="ctr" wrap="square"/>
+          <a:lstStyle/>
+          <a:p>
+            <a:pPr algn="ctr"/>
+            <a:r>
+              <a:rPr sz="1000" b="1">
+                <a:solidFill>
+                  <a:srgbClr val="FFFFFF"/>
+                </a:solidFill>
+                <a:latin typeface="Calibri"/>
+              </a:rPr>
+              <a:t>APRR</a:t>
+            </a:r>
+          </a:p>
+        </p:txBody>
+      </p:sp>
+      <p:sp>
+        <p:nvSpPr>
+          <p:cNvPr id="17" name="Rounded Rectangle 16"/>
+          <p:cNvSpPr/>
+          <p:nvPr/>
+        </p:nvSpPr>
+        <p:spPr>
+          <a:xfrm>
+            <a:off x="6135624" y="4690872"/>
+            <a:ext cx="1813560" cy="438912"/>
+          </a:xfrm>
+          <a:prstGeom prst="roundRect">
+            <a:avLst>
+              <a:gd name="adj" fmla="val 10000"/>
+            </a:avLst>
+          </a:prstGeom>
+          <a:solidFill>
+            <a:srgbClr val="7C1D2E"/>
+          </a:solidFill>
+          <a:ln>
+            <a:noFill/>
+          </a:ln>
+        </p:spPr>
+        <p:style>
+          <a:lnRef idx="1">
+            <a:schemeClr val="accent1"/>
+          </a:lnRef>
+          <a:fillRef idx="3">
+            <a:schemeClr val="accent1"/>
+          </a:fillRef>
+          <a:effectRef idx="2">
+            <a:schemeClr val="accent1"/>
+          </a:effectRef>
+          <a:fontRef idx="minor">
+            <a:schemeClr val="lt1"/>
+          </a:fontRef>
+        </p:style>
+        <p:txBody>
+          <a:bodyPr rtlCol="0" anchor="ctr" wrap="square"/>
+          <a:lstStyle/>
+          <a:p>
+            <a:pPr algn="ctr"/>
+            <a:r>
+              <a:rPr sz="1000" b="1">
+                <a:solidFill>
+                  <a:srgbClr val="FFFFFF"/>
+                </a:solidFill>
+                <a:latin typeface="Calibri"/>
+              </a:rPr>
+              <a:t>MNCD</a:t>
+            </a:r>
+          </a:p>
+        </p:txBody>
+      </p:sp>
+      <p:sp>
+        <p:nvSpPr>
+          <p:cNvPr id="18" name="Rounded Rectangle 17"/>
+          <p:cNvSpPr/>
+          <p:nvPr/>
+        </p:nvSpPr>
+        <p:spPr>
+          <a:xfrm>
+            <a:off x="8058912" y="4690872"/>
+            <a:ext cx="1813560" cy="438912"/>
+          </a:xfrm>
+          <a:prstGeom prst="roundRect">
+            <a:avLst>
+              <a:gd name="adj" fmla="val 10000"/>
+            </a:avLst>
+          </a:prstGeom>
+          <a:solidFill>
+            <a:srgbClr val="7C1D2E"/>
+          </a:solidFill>
+          <a:ln>
+            <a:noFill/>
+          </a:ln>
+        </p:spPr>
+        <p:style>
+          <a:lnRef idx="1">
+            <a:schemeClr val="accent1"/>
+          </a:lnRef>
+          <a:fillRef idx="3">
+            <a:schemeClr val="accent1"/>
+          </a:fillRef>
+          <a:effectRef idx="2">
+            <a:schemeClr val="accent1"/>
+          </a:effectRef>
+          <a:fontRef idx="minor">
+            <a:schemeClr val="lt1"/>
+          </a:fontRef>
+        </p:style>
+        <p:txBody>
+          <a:bodyPr rtlCol="0" anchor="ctr" wrap="square"/>
+          <a:lstStyle/>
+          <a:p>
+            <a:pPr algn="ctr"/>
+            <a:r>
+              <a:rPr sz="1000" b="1">
+                <a:solidFill>
+                  <a:srgbClr val="FFFFFF"/>
+                </a:solidFill>
+                <a:latin typeface="Calibri"/>
+              </a:rPr>
+              <a:t>FCNP</a:t>
+            </a:r>
+          </a:p>
+        </p:txBody>
+      </p:sp>
+      <p:sp>
+        <p:nvSpPr>
+          <p:cNvPr id="19" name="Rounded Rectangle 18"/>
+          <p:cNvSpPr/>
+          <p:nvPr/>
+        </p:nvSpPr>
+        <p:spPr>
+          <a:xfrm>
+            <a:off x="9982200" y="4690872"/>
+            <a:ext cx="1813560" cy="438912"/>
+          </a:xfrm>
+          <a:prstGeom prst="roundRect">
+            <a:avLst>
+              <a:gd name="adj" fmla="val 10000"/>
+            </a:avLst>
+          </a:prstGeom>
+          <a:solidFill>
+            <a:srgbClr val="7C1D2E"/>
+          </a:solidFill>
+          <a:ln>
+            <a:noFill/>
+          </a:ln>
+        </p:spPr>
+        <p:style>
+          <a:lnRef idx="1">
+            <a:schemeClr val="accent1"/>
+          </a:lnRef>
+          <a:fillRef idx="3">
+            <a:schemeClr val="accent1"/>
+          </a:fillRef>
+          <a:effectRef idx="2">
+            <a:schemeClr val="accent1"/>
+          </a:effectRef>
+          <a:fontRef idx="minor">
+            <a:schemeClr val="lt1"/>
+          </a:fontRef>
+        </p:style>
+        <p:txBody>
+          <a:bodyPr rtlCol="0" anchor="ctr" wrap="square"/>
+          <a:lstStyle/>
+          <a:p>
+            <a:pPr algn="ctr"/>
+            <a:r>
+              <a:rPr sz="1000" b="1">
+                <a:solidFill>
+                  <a:srgbClr val="FFFFFF"/>
+                </a:solidFill>
+                <a:latin typeface="Calibri"/>
+              </a:rPr>
+              <a:t>a + M</a:t>
             </a:r>
           </a:p>
         </p:txBody>
@@ -16060,7 +16365,7 @@
           <a:lstStyle/>
           <a:p>
             <a:pPr algn="l"/>
-            <a:fld id="{367071c4-087c-4dc0-bd09-81113c60fc6d}" type="datetime3">
+            <a:fld id="{b61a22c8-33a4-4aed-b03e-0353973ff374}" type="datetime3">
               <a:rPr lang="en-GB" sz="1000" dirty="0">
                 <a:solidFill>
                   <a:srgbClr val="C4A35A"/>
@@ -16094,7 +16399,7 @@
           <a:lstStyle/>
           <a:p>
             <a:pPr algn="r"/>
-            <a:fld id="{e91fad53-87cf-4370-b6be-77d3f9715d32}" type="slidenum">
+            <a:fld id="{3a0645bc-fcb6-49ec-a332-ec01c3375020}" type="slidenum">
               <a:rPr lang="en-GB" sz="1000" dirty="0">
                 <a:solidFill>
                   <a:srgbClr val="C4A35A"/>
@@ -16110,7 +16415,7 @@
                 </a:solidFill>
                 <a:latin typeface="Calibri"/>
               </a:rPr>
-              <a:t> / 34</a:t>
+              <a:t> / 35</a:t>
             </a:r>
             <a:endParaRPr lang="en-GB" sz="1000"/>
           </a:p>
@@ -16477,7 +16782,7 @@
                 </a:solidFill>
                 <a:latin typeface="Calibri"/>
               </a:rPr>
-              <a:t>Research Methodology — O2 APRR</a:t>
+              <a:t>Research Methodology — O1 SATR</a:t>
             </a:r>
           </a:p>
         </p:txBody>
@@ -16512,7 +16817,7 @@
                 </a:solidFill>
                 <a:latin typeface="Calibri"/>
               </a:rPr>
-              <a:t>How the specialist posterior will be designed. No win-rate or millisecond target is claimed at proposal stage.</a:t>
+              <a:t>How session-aware ranking will be designed and later evaluated.</a:t>
             </a:r>
           </a:p>
         </p:txBody>
@@ -16553,7 +16858,7 @@
                 </a:solidFill>
                 <a:latin typeface="Calibri"/>
               </a:rPr>
-              <a:t>Design method. Maintain a Dirichlet–Thompson posterior over named specialists. Sample or take the MAP specialist given SATR’s fused session.</a:t>
+              <a:t>Design method. Specify a fused session object: query + dialogue turns + last tool traces + co-activation counts. Rank tools with that object, not with the raw utterance alone.</a:t>
             </a:r>
           </a:p>
           <a:p>
@@ -16571,7 +16876,7 @@
                 </a:solidFill>
                 <a:latin typeface="Calibri"/>
               </a:rPr>
-              <a:t>Allocation rule (proposal form). P(agent | context) ∝ W^α · η^β · ψ^γ, with W = session-matched specialist weight, η = reliability, ψ = cost/risk. Exponents are design knobs, not fitted claims.</a:t>
+              <a:t>Ranking library (not live prices). Use ToolBench / ToolLLM artefacts as a public tool-ranking library and protocol family. RapidAPI-style traces are ranking evidence only.</a:t>
             </a:r>
           </a:p>
           <a:p>
@@ -16589,7 +16894,7 @@
                 </a:solidFill>
                 <a:latin typeface="Calibri"/>
               </a:rPr>
-              <a:t>Training-free stance. Do not train a MasRouter- or RouteLLM-style classifier as the primary method. Learned routers remain a future bake-off class, not the implementation.</a:t>
+              <a:t>Live Indian OGD is out of SATR’s ranking path. Mandi and weather rows enter at MNCD. SATR must not invent or cache dummy AGMARKNET prices.</a:t>
             </a:r>
           </a:p>
           <a:p>
@@ -16607,7 +16912,7 @@
                 </a:solidFill>
                 <a:latin typeface="Calibri"/>
               </a:rPr>
-              <a:t>What is being routed. Specialists in the ACRS mesh — not LLM SKUs (GPT-4 vs Mixtral) and not AutoGen conversation modes as the object of routing.</a:t>
+              <a:t>Implementation path. Persist co-activation in a session store; expose a rank(query, session) API that APRR can call. Fail loud if the session schema is incomplete.</a:t>
             </a:r>
           </a:p>
           <a:p>
@@ -16625,7 +16930,7 @@
                 </a:solidFill>
                 <a:latin typeface="Calibri"/>
               </a:rPr>
-              <a:t>Update rule. After MNCD returns verified or failed evidence, update η (and optionally W) so the next turn’s posterior is not identical to a cold start.</a:t>
+              <a:t>Future evaluation protocol (not a result). When the protocol is frozen, compare session-fused ranking against query-only ranking on the same ToolBench-style split. Report the protocol, not a pre-committed score.</a:t>
             </a:r>
           </a:p>
           <a:p>
@@ -16643,7 +16948,7 @@
                 </a:solidFill>
                 <a:latin typeface="Calibri"/>
               </a:rPr>
-              <a:t>Future evaluation protocol (not a result). Log specialist choice vs task type on held-out session traces; compare against a static role graph. No pre-committed accuracy.</a:t>
+              <a:t>Deliverable for the thesis chapter. Algorithm, schema, and ablation plan (with vs without tool-trace fusion).</a:t>
             </a:r>
           </a:p>
         </p:txBody>
@@ -16669,7 +16974,7 @@
           <a:lstStyle/>
           <a:p>
             <a:pPr algn="l"/>
-            <a:fld id="{d2d85f67-30e4-496a-af6a-2dc81e1fbbf4}" type="datetime3">
+            <a:fld id="{0407ec71-a3ca-4793-9684-378f21d6070c}" type="datetime3">
               <a:rPr lang="en-GB" sz="1000" dirty="0">
                 <a:solidFill>
                   <a:srgbClr val="C4A35A"/>
@@ -16703,7 +17008,7 @@
           <a:lstStyle/>
           <a:p>
             <a:pPr algn="r"/>
-            <a:fld id="{56d28ca7-ce2d-46a6-bac8-81aa9fc50fac}" type="slidenum">
+            <a:fld id="{8fce417a-32e1-4b40-9130-784f009d6a45}" type="slidenum">
               <a:rPr lang="en-GB" sz="1000" dirty="0">
                 <a:solidFill>
                   <a:srgbClr val="C4A35A"/>
@@ -16719,7 +17024,7 @@
                 </a:solidFill>
                 <a:latin typeface="Calibri"/>
               </a:rPr>
-              <a:t> / 34</a:t>
+              <a:t> / 35</a:t>
             </a:r>
             <a:endParaRPr lang="en-GB" sz="1000"/>
           </a:p>
@@ -17086,7 +17391,7 @@
                 </a:solidFill>
                 <a:latin typeface="Calibri"/>
               </a:rPr>
-              <a:t>Research Methodology — O3 MNCD</a:t>
+              <a:t>Research Methodology — O2 APRR</a:t>
             </a:r>
           </a:p>
         </p:txBody>
@@ -17121,7 +17426,7 @@
                 </a:solidFill>
                 <a:latin typeface="Calibri"/>
               </a:rPr>
-              <a:t>How live Indian OGD and score-sum consensus will be executed. PECAD is a domain precedent, not a baseline to beat.</a:t>
+              <a:t>How the specialist posterior will be designed. No win-rate or millisecond target is claimed at proposal stage.</a:t>
             </a:r>
           </a:p>
         </p:txBody>
@@ -17162,7 +17467,7 @@
                 </a:solidFill>
                 <a:latin typeface="Calibri"/>
               </a:rPr>
-              <a:t>Design method. Specialists selected by APRR gossip partial beliefs. Aggregate with score-sum (not Borda). Every live claim must cite a verified data.gov.in resource UUID.</a:t>
+              <a:t>Design method. Maintain a Dirichlet–Thompson posterior over named specialists. Sample or take the MAP specialist given SATR’s fused session.</a:t>
             </a:r>
           </a:p>
           <a:p>
@@ -17180,7 +17485,7 @@
                 </a:solidFill>
                 <a:latin typeface="Calibri"/>
               </a:rPr>
-              <a:t>Corpus / API. Agriculture-only Open Government Data: AGMARKNET (9ef84268-d588-465a-a308-a864a43d0070) and other UUIDs that pass verification.</a:t>
+              <a:t>Allocation rule (proposal form). P(agent | context) ∝ W^α · η^β · ψ^γ, with W = session-matched specialist weight, η = reliability, ψ = cost/risk. Exponents are design knobs, not fitted claims.</a:t>
             </a:r>
           </a:p>
           <a:p>
@@ -17198,7 +17503,7 @@
                 </a:solidFill>
                 <a:latin typeface="Calibri"/>
               </a:rPr>
-              <a:t>Fail-loud contract. HTTP 5xx/429 are retried with backoff; missing API key, unverified UUID, or empty filtered universe hard-fail. No dummy mandi prices.</a:t>
+              <a:t>Training-free stance. Do not train a MasRouter- or RouteLLM-style classifier as the primary method. Learned routers remain a future bake-off class, not the implementation.</a:t>
             </a:r>
           </a:p>
           <a:p>
@@ -17216,7 +17521,7 @@
                 </a:solidFill>
                 <a:latin typeface="Calibri"/>
               </a:rPr>
-              <a:t>Platform constraint. data.gov.in Elastic max_result_window is 10 000; limit is capped. Pagination is sequential, not a fabricated parallel harvest.</a:t>
+              <a:t>What is being routed. Specialists in the ACRS mesh — not LLM SKUs (GPT-4 vs Mixtral) and not AutoGen conversation modes as the object of routing.</a:t>
             </a:r>
           </a:p>
           <a:p>
@@ -17234,7 +17539,7 @@
                 </a:solidFill>
                 <a:latin typeface="Calibri"/>
               </a:rPr>
-              <a:t>Related work used correctly. Guo, Woodruff &amp; Yadav, PECAD (AAAI 2020) shows AGMARKNET as a real DSS input. MNCD does not re-implement crop-yield prediction.</a:t>
+              <a:t>Update rule. After MNCD returns verified or failed evidence, update η (and optionally W) so the next turn’s posterior is not identical to a cold start.</a:t>
             </a:r>
           </a:p>
           <a:p>
@@ -17252,7 +17557,7 @@
                 </a:solidFill>
                 <a:latin typeface="Calibri"/>
               </a:rPr>
-              <a:t>Future evaluation protocol (not a result). Measure citation completeness, fail-loud rate on injected faults, and qualitative agreement of score-sum vs majority vote.</a:t>
+              <a:t>Future evaluation protocol (not a result). Log specialist choice vs task type on held-out session traces; compare against a static role graph. No pre-committed accuracy.</a:t>
             </a:r>
           </a:p>
         </p:txBody>
@@ -17278,7 +17583,7 @@
           <a:lstStyle/>
           <a:p>
             <a:pPr algn="l"/>
-            <a:fld id="{789653f4-c3ba-4efa-bed3-49546c3bc8ce}" type="datetime3">
+            <a:fld id="{e0d082ce-a9be-4a2a-80a6-e5c2643b9383}" type="datetime3">
               <a:rPr lang="en-GB" sz="1000" dirty="0">
                 <a:solidFill>
                   <a:srgbClr val="C4A35A"/>
@@ -17312,7 +17617,7 @@
           <a:lstStyle/>
           <a:p>
             <a:pPr algn="r"/>
-            <a:fld id="{e3c2cbf3-5dc7-4be0-a931-7033dc38c5bc}" type="slidenum">
+            <a:fld id="{8e4b46db-3cad-4d7b-8e88-eb2af2fcc9bb}" type="slidenum">
               <a:rPr lang="en-GB" sz="1000" dirty="0">
                 <a:solidFill>
                   <a:srgbClr val="C4A35A"/>
@@ -17328,7 +17633,7 @@
                 </a:solidFill>
                 <a:latin typeface="Calibri"/>
               </a:rPr>
-              <a:t> / 34</a:t>
+              <a:t> / 35</a:t>
             </a:r>
             <a:endParaRPr lang="en-GB" sz="1000"/>
           </a:p>
@@ -17695,7 +18000,7 @@
                 </a:solidFill>
                 <a:latin typeface="Calibri"/>
               </a:rPr>
-              <a:t>Research Methodology — O4 FCNP</a:t>
+              <a:t>Research Methodology — O3 MNCD</a:t>
             </a:r>
           </a:p>
         </p:txBody>
@@ -17730,7 +18035,7 @@
                 </a:solidFill>
                 <a:latin typeface="Calibri"/>
               </a:rPr>
-              <a:t>How mesh pruning will be designed. No token-reduction ratio is claimed at proposal stage.</a:t>
+              <a:t>How live Indian OGD and score-sum consensus will be executed. PECAD is a domain precedent, not a baseline to beat.</a:t>
             </a:r>
           </a:p>
         </p:txBody>
@@ -17771,7 +18076,7 @@
                 </a:solidFill>
                 <a:latin typeface="Calibri"/>
               </a:rPr>
-              <a:t>Design method. Treat the post-MNCD mesh as a flow network. Apply a Kirchhoff / Physarum-inspired conductance update; drop low-conductance specialist edges; keep a residue.</a:t>
+              <a:t>Design method. Specialists selected by APRR gossip partial beliefs. Aggregate with score-sum (not Borda). Every live claim must cite a verified data.gov.in resource UUID.</a:t>
             </a:r>
           </a:p>
           <a:p>
@@ -17789,7 +18094,7 @@
                 </a:solidFill>
                 <a:latin typeface="Calibri"/>
               </a:rPr>
-              <a:t>Write-back (the integration hinge). The residue is written into SATR’s next fused session. Without write-back, FCNP would be prompt compression by another name.</a:t>
+              <a:t>Corpus / API. Agriculture-only Open Government Data: AGMARKNET (9ef84268-d588-465a-a308-a864a43d0070) and other UUIDs that pass verification.</a:t>
             </a:r>
           </a:p>
           <a:p>
@@ -17807,7 +18112,7 @@
                 </a:solidFill>
                 <a:latin typeface="Calibri"/>
               </a:rPr>
-              <a:t>Contrast with LLMLingua. LLMLingua shortens tokens before the LLM. FCNP prunes who remains in the mesh. Tokenisers are not the primary artefact.</a:t>
+              <a:t>Fail-loud contract. HTTP 5xx/429 are retried with backoff; missing API key, unverified UUID, or empty filtered universe hard-fail. No dummy mandi prices.</a:t>
             </a:r>
           </a:p>
           <a:p>
@@ -17825,7 +18130,7 @@
                 </a:solidFill>
                 <a:latin typeface="Calibri"/>
               </a:rPr>
-              <a:t>Heuristic honesty. Discrete conductance is a design heuristic inspired by Tero et al. (Science, 2010), not a proof that the mesh is a Physarum organism.</a:t>
+              <a:t>Platform constraint. data.gov.in Elastic max_result_window is 10 000; limit is capped. Pagination is sequential, not a fabricated parallel harvest.</a:t>
             </a:r>
           </a:p>
           <a:p>
@@ -17843,7 +18148,7 @@
                 </a:solidFill>
                 <a:latin typeface="Calibri"/>
               </a:rPr>
-              <a:t>Safety. Pruning must not delete the last live-data specialist if MNCD still has an open verified query. Fail loud rather than silently drop evidence.</a:t>
+              <a:t>Related work used correctly. Guo, Woodruff &amp; Yadav, PECAD (AAAI 2020) shows AGMARKNET as a real DSS input. MNCD does not re-implement crop-yield prediction.</a:t>
             </a:r>
           </a:p>
           <a:p>
@@ -17861,7 +18166,7 @@
                 </a:solidFill>
                 <a:latin typeface="Calibri"/>
               </a:rPr>
-              <a:t>Future evaluation protocol (not a result). Compare mesh size and downstream SATR rank stability with vs without pruning on the same session traces.</a:t>
+              <a:t>Future evaluation protocol (not a result). Measure citation completeness, fail-loud rate on injected faults, and qualitative agreement of score-sum vs majority vote.</a:t>
             </a:r>
           </a:p>
         </p:txBody>
@@ -17887,7 +18192,7 @@
           <a:lstStyle/>
           <a:p>
             <a:pPr algn="l"/>
-            <a:fld id="{cac3e86a-911f-4ecc-b80c-951275825b78}" type="datetime3">
+            <a:fld id="{61132897-fbec-4ef1-9d44-e3639fdd4abb}" type="datetime3">
               <a:rPr lang="en-GB" sz="1000" dirty="0">
                 <a:solidFill>
                   <a:srgbClr val="C4A35A"/>
@@ -17921,7 +18226,7 @@
           <a:lstStyle/>
           <a:p>
             <a:pPr algn="r"/>
-            <a:fld id="{7151f3a8-3a9b-481c-bae3-1f04045a8f7b}" type="slidenum">
+            <a:fld id="{6c5c5b79-775f-4745-b4fd-0cce63c37f1e}" type="slidenum">
               <a:rPr lang="en-GB" sz="1000" dirty="0">
                 <a:solidFill>
                   <a:srgbClr val="C4A35A"/>
@@ -17937,7 +18242,7 @@
                 </a:solidFill>
                 <a:latin typeface="Calibri"/>
               </a:rPr>
-              <a:t> / 34</a:t>
+              <a:t> / 35</a:t>
             </a:r>
             <a:endParaRPr lang="en-GB" sz="1000"/>
           </a:p>
@@ -18304,7 +18609,7 @@
                 </a:solidFill>
                 <a:latin typeface="Calibri"/>
               </a:rPr>
-              <a:t>Research Methodology — integrated loop</a:t>
+              <a:t>Research Methodology — O4 FCNP</a:t>
             </a:r>
           </a:p>
         </p:txBody>
@@ -18339,7 +18644,7 @@
                 </a:solidFill>
                 <a:latin typeface="Calibri"/>
               </a:rPr>
-              <a:t>Closed contract SATR → APRR → MNCD → FCNP → SATR. The novelty is the loop and the data contract, not a claimed accuracy.</a:t>
+              <a:t>How mesh pruning will be designed. No token-reduction ratio is claimed at proposal stage.</a:t>
             </a:r>
           </a:p>
         </p:txBody>
@@ -18353,7 +18658,7 @@
         <p:spPr>
           <a:xfrm>
             <a:off x="365760" y="1993392"/>
-            <a:ext cx="11430000" cy="1874519"/>
+            <a:ext cx="11430000" cy="3977639"/>
           </a:xfrm>
           <a:prstGeom prst="rect">
             <a:avLst/>
@@ -18380,7 +18685,7 @@
                 </a:solidFill>
                 <a:latin typeface="Calibri"/>
               </a:rPr>
-              <a:t>Closed-loop protocol. One user turn must traverse all four modules in order. Skipping MNCD (no live UUID) or FCNP (no write-back) is treated as an incomplete run, not a successful demo.</a:t>
+              <a:t>Design method. Treat the post-MNCD mesh as a flow network. Apply a Kirchhoff / Physarum-inspired conductance update; drop low-conductance specialist edges; keep a residue.</a:t>
             </a:r>
           </a:p>
           <a:p>
@@ -18398,7 +18703,7 @@
                 </a:solidFill>
                 <a:latin typeface="Calibri"/>
               </a:rPr>
-              <a:t>Two evidence regimes. (1) ToolBench-style ranking traces for SATR. (2) Live data.gov.in Agriculture rows for MNCD. Do not mix dummy prices into (1) or RapidAPI tools into (2).</a:t>
+              <a:t>Write-back (the integration hinge). The residue is written into SATR’s next fused session. Without write-back, FCNP would be prompt compression by another name.</a:t>
             </a:r>
           </a:p>
           <a:p>
@@ -18416,7 +18721,7 @@
                 </a:solidFill>
                 <a:latin typeface="Calibri"/>
               </a:rPr>
-              <a:t>Independent variables (future experiments). Session fusion on/off; Dirichlet routing vs static roles; score-sum vs majority; FCNP write-back on/off.</a:t>
+              <a:t>Contrast with LLMLingua. LLMLingua shortens tokens before the LLM. FCNP prunes who remains in the mesh. Tokenisers are not the primary artefact.</a:t>
             </a:r>
           </a:p>
           <a:p>
@@ -18434,7 +18739,7 @@
                 </a:solidFill>
                 <a:latin typeface="Calibri"/>
               </a:rPr>
-              <a:t>Dependent measures (to be frozen later). Citation completeness, fail-loud correctness, rank stability across turns, qualitative specialist-choice logs.</a:t>
+              <a:t>Heuristic honesty. Discrete conductance is a design heuristic inspired by Tero et al. (Science, 2010), not a proof that the mesh is a Physarum organism.</a:t>
             </a:r>
           </a:p>
           <a:p>
@@ -18452,7 +18757,7 @@
                 </a:solidFill>
                 <a:latin typeface="Calibri"/>
               </a:rPr>
-              <a:t>Domain lock. Agriculture on Indian OGD for the live path. Other sectors are out of scope until a later amendment.</a:t>
+              <a:t>Safety. Pruning must not delete the last live-data specialist if MNCD still has an open verified query. Fail loud rather than silently drop evidence.</a:t>
             </a:r>
           </a:p>
           <a:p>
@@ -18470,401 +18775,7 @@
                 </a:solidFill>
                 <a:latin typeface="Calibri"/>
               </a:rPr>
-              <a:t>Ethics / data. Public government catalogues only; no personal data; API keys stay in the environment, never in the thesis text.</a:t>
-            </a:r>
-          </a:p>
-        </p:txBody>
-      </p:sp>
-      <p:sp>
-        <p:nvSpPr>
-          <p:cNvPr id="13" name="TextBox 12"/>
-          <p:cNvSpPr txBox="1"/>
-          <p:nvPr/>
-        </p:nvSpPr>
-        <p:spPr>
-          <a:xfrm>
-            <a:off x="365760" y="4434840"/>
-            <a:ext cx="11430000" cy="219456"/>
-          </a:xfrm>
-          <a:prstGeom prst="rect">
-            <a:avLst/>
-          </a:prstGeom>
-          <a:noFill/>
-        </p:spPr>
-        <p:txBody>
-          <a:bodyPr wrap="square">
-            <a:spAutoFit/>
-          </a:bodyPr>
-          <a:lstStyle/>
-          <a:p>
-            <a:pPr algn="l"/>
-            <a:r>
-              <a:rPr sz="1100" b="0">
-                <a:solidFill>
-                  <a:srgbClr val="5C4A4E"/>
-                </a:solidFill>
-                <a:latin typeface="Calibri"/>
-              </a:rPr>
-              <a:t>ACRS loop (maroon). Green path is the increment, not a metric.</a:t>
-            </a:r>
-          </a:p>
-        </p:txBody>
-      </p:sp>
-      <p:sp>
-        <p:nvSpPr>
-          <p:cNvPr id="14" name="Rounded Rectangle 13"/>
-          <p:cNvSpPr/>
-          <p:nvPr/>
-        </p:nvSpPr>
-        <p:spPr>
-          <a:xfrm>
-            <a:off x="365760" y="4690872"/>
-            <a:ext cx="1813560" cy="438912"/>
-          </a:xfrm>
-          <a:prstGeom prst="roundRect">
-            <a:avLst>
-              <a:gd name="adj" fmla="val 10000"/>
-            </a:avLst>
-          </a:prstGeom>
-          <a:solidFill>
-            <a:srgbClr val="7C1D2E"/>
-          </a:solidFill>
-          <a:ln>
-            <a:noFill/>
-          </a:ln>
-        </p:spPr>
-        <p:style>
-          <a:lnRef idx="1">
-            <a:schemeClr val="accent1"/>
-          </a:lnRef>
-          <a:fillRef idx="3">
-            <a:schemeClr val="accent1"/>
-          </a:fillRef>
-          <a:effectRef idx="2">
-            <a:schemeClr val="accent1"/>
-          </a:effectRef>
-          <a:fontRef idx="minor">
-            <a:schemeClr val="lt1"/>
-          </a:fontRef>
-        </p:style>
-        <p:txBody>
-          <a:bodyPr rtlCol="0" anchor="ctr" wrap="square"/>
-          <a:lstStyle/>
-          <a:p>
-            <a:pPr algn="ctr"/>
-            <a:r>
-              <a:rPr sz="1000" b="1">
-                <a:solidFill>
-                  <a:srgbClr val="FFFFFF"/>
-                </a:solidFill>
-                <a:latin typeface="Calibri"/>
-              </a:rPr>
-              <a:t>q + M</a:t>
-            </a:r>
-          </a:p>
-        </p:txBody>
-      </p:sp>
-      <p:sp>
-        <p:nvSpPr>
-          <p:cNvPr id="15" name="Rounded Rectangle 14"/>
-          <p:cNvSpPr/>
-          <p:nvPr/>
-        </p:nvSpPr>
-        <p:spPr>
-          <a:xfrm>
-            <a:off x="2289048" y="4690872"/>
-            <a:ext cx="1813560" cy="438912"/>
-          </a:xfrm>
-          <a:prstGeom prst="roundRect">
-            <a:avLst>
-              <a:gd name="adj" fmla="val 10000"/>
-            </a:avLst>
-          </a:prstGeom>
-          <a:solidFill>
-            <a:srgbClr val="7C1D2E"/>
-          </a:solidFill>
-          <a:ln>
-            <a:noFill/>
-          </a:ln>
-        </p:spPr>
-        <p:style>
-          <a:lnRef idx="1">
-            <a:schemeClr val="accent1"/>
-          </a:lnRef>
-          <a:fillRef idx="3">
-            <a:schemeClr val="accent1"/>
-          </a:fillRef>
-          <a:effectRef idx="2">
-            <a:schemeClr val="accent1"/>
-          </a:effectRef>
-          <a:fontRef idx="minor">
-            <a:schemeClr val="lt1"/>
-          </a:fontRef>
-        </p:style>
-        <p:txBody>
-          <a:bodyPr rtlCol="0" anchor="ctr" wrap="square"/>
-          <a:lstStyle/>
-          <a:p>
-            <a:pPr algn="ctr"/>
-            <a:r>
-              <a:rPr sz="1000" b="1">
-                <a:solidFill>
-                  <a:srgbClr val="FFFFFF"/>
-                </a:solidFill>
-                <a:latin typeface="Calibri"/>
-              </a:rPr>
-              <a:t>SATR</a:t>
-            </a:r>
-          </a:p>
-        </p:txBody>
-      </p:sp>
-      <p:sp>
-        <p:nvSpPr>
-          <p:cNvPr id="16" name="Rounded Rectangle 15"/>
-          <p:cNvSpPr/>
-          <p:nvPr/>
-        </p:nvSpPr>
-        <p:spPr>
-          <a:xfrm>
-            <a:off x="4212336" y="4690872"/>
-            <a:ext cx="1813560" cy="438912"/>
-          </a:xfrm>
-          <a:prstGeom prst="roundRect">
-            <a:avLst>
-              <a:gd name="adj" fmla="val 10000"/>
-            </a:avLst>
-          </a:prstGeom>
-          <a:solidFill>
-            <a:srgbClr val="7C1D2E"/>
-          </a:solidFill>
-          <a:ln>
-            <a:noFill/>
-          </a:ln>
-        </p:spPr>
-        <p:style>
-          <a:lnRef idx="1">
-            <a:schemeClr val="accent1"/>
-          </a:lnRef>
-          <a:fillRef idx="3">
-            <a:schemeClr val="accent1"/>
-          </a:fillRef>
-          <a:effectRef idx="2">
-            <a:schemeClr val="accent1"/>
-          </a:effectRef>
-          <a:fontRef idx="minor">
-            <a:schemeClr val="lt1"/>
-          </a:fontRef>
-        </p:style>
-        <p:txBody>
-          <a:bodyPr rtlCol="0" anchor="ctr" wrap="square"/>
-          <a:lstStyle/>
-          <a:p>
-            <a:pPr algn="ctr"/>
-            <a:r>
-              <a:rPr sz="1000" b="1">
-                <a:solidFill>
-                  <a:srgbClr val="FFFFFF"/>
-                </a:solidFill>
-                <a:latin typeface="Calibri"/>
-              </a:rPr>
-              <a:t>APRR</a:t>
-            </a:r>
-          </a:p>
-        </p:txBody>
-      </p:sp>
-      <p:sp>
-        <p:nvSpPr>
-          <p:cNvPr id="17" name="Rounded Rectangle 16"/>
-          <p:cNvSpPr/>
-          <p:nvPr/>
-        </p:nvSpPr>
-        <p:spPr>
-          <a:xfrm>
-            <a:off x="6135624" y="4690872"/>
-            <a:ext cx="1813560" cy="438912"/>
-          </a:xfrm>
-          <a:prstGeom prst="roundRect">
-            <a:avLst>
-              <a:gd name="adj" fmla="val 10000"/>
-            </a:avLst>
-          </a:prstGeom>
-          <a:solidFill>
-            <a:srgbClr val="7C1D2E"/>
-          </a:solidFill>
-          <a:ln>
-            <a:noFill/>
-          </a:ln>
-        </p:spPr>
-        <p:style>
-          <a:lnRef idx="1">
-            <a:schemeClr val="accent1"/>
-          </a:lnRef>
-          <a:fillRef idx="3">
-            <a:schemeClr val="accent1"/>
-          </a:fillRef>
-          <a:effectRef idx="2">
-            <a:schemeClr val="accent1"/>
-          </a:effectRef>
-          <a:fontRef idx="minor">
-            <a:schemeClr val="lt1"/>
-          </a:fontRef>
-        </p:style>
-        <p:txBody>
-          <a:bodyPr rtlCol="0" anchor="ctr" wrap="square"/>
-          <a:lstStyle/>
-          <a:p>
-            <a:pPr algn="ctr"/>
-            <a:r>
-              <a:rPr sz="1000" b="1">
-                <a:solidFill>
-                  <a:srgbClr val="FFFFFF"/>
-                </a:solidFill>
-                <a:latin typeface="Calibri"/>
-              </a:rPr>
-              <a:t>MNCD</a:t>
-            </a:r>
-          </a:p>
-        </p:txBody>
-      </p:sp>
-      <p:sp>
-        <p:nvSpPr>
-          <p:cNvPr id="18" name="Rounded Rectangle 17"/>
-          <p:cNvSpPr/>
-          <p:nvPr/>
-        </p:nvSpPr>
-        <p:spPr>
-          <a:xfrm>
-            <a:off x="8058912" y="4690872"/>
-            <a:ext cx="1813560" cy="438912"/>
-          </a:xfrm>
-          <a:prstGeom prst="roundRect">
-            <a:avLst>
-              <a:gd name="adj" fmla="val 10000"/>
-            </a:avLst>
-          </a:prstGeom>
-          <a:solidFill>
-            <a:srgbClr val="7C1D2E"/>
-          </a:solidFill>
-          <a:ln>
-            <a:noFill/>
-          </a:ln>
-        </p:spPr>
-        <p:style>
-          <a:lnRef idx="1">
-            <a:schemeClr val="accent1"/>
-          </a:lnRef>
-          <a:fillRef idx="3">
-            <a:schemeClr val="accent1"/>
-          </a:fillRef>
-          <a:effectRef idx="2">
-            <a:schemeClr val="accent1"/>
-          </a:effectRef>
-          <a:fontRef idx="minor">
-            <a:schemeClr val="lt1"/>
-          </a:fontRef>
-        </p:style>
-        <p:txBody>
-          <a:bodyPr rtlCol="0" anchor="ctr" wrap="square"/>
-          <a:lstStyle/>
-          <a:p>
-            <a:pPr algn="ctr"/>
-            <a:r>
-              <a:rPr sz="1000" b="1">
-                <a:solidFill>
-                  <a:srgbClr val="FFFFFF"/>
-                </a:solidFill>
-                <a:latin typeface="Calibri"/>
-              </a:rPr>
-              <a:t>FCNP</a:t>
-            </a:r>
-          </a:p>
-        </p:txBody>
-      </p:sp>
-      <p:sp>
-        <p:nvSpPr>
-          <p:cNvPr id="19" name="Rounded Rectangle 18"/>
-          <p:cNvSpPr/>
-          <p:nvPr/>
-        </p:nvSpPr>
-        <p:spPr>
-          <a:xfrm>
-            <a:off x="9982200" y="4690872"/>
-            <a:ext cx="1813560" cy="438912"/>
-          </a:xfrm>
-          <a:prstGeom prst="roundRect">
-            <a:avLst>
-              <a:gd name="adj" fmla="val 10000"/>
-            </a:avLst>
-          </a:prstGeom>
-          <a:solidFill>
-            <a:srgbClr val="7C1D2E"/>
-          </a:solidFill>
-          <a:ln>
-            <a:noFill/>
-          </a:ln>
-        </p:spPr>
-        <p:style>
-          <a:lnRef idx="1">
-            <a:schemeClr val="accent1"/>
-          </a:lnRef>
-          <a:fillRef idx="3">
-            <a:schemeClr val="accent1"/>
-          </a:fillRef>
-          <a:effectRef idx="2">
-            <a:schemeClr val="accent1"/>
-          </a:effectRef>
-          <a:fontRef idx="minor">
-            <a:schemeClr val="lt1"/>
-          </a:fontRef>
-        </p:style>
-        <p:txBody>
-          <a:bodyPr rtlCol="0" anchor="ctr" wrap="square"/>
-          <a:lstStyle/>
-          <a:p>
-            <a:pPr algn="ctr"/>
-            <a:r>
-              <a:rPr sz="1000" b="1">
-                <a:solidFill>
-                  <a:srgbClr val="FFFFFF"/>
-                </a:solidFill>
-                <a:latin typeface="Calibri"/>
-              </a:rPr>
-              <a:t>a + M</a:t>
-            </a:r>
-          </a:p>
-        </p:txBody>
-      </p:sp>
-      <p:sp>
-        <p:nvSpPr>
-          <p:cNvPr id="20" name="TextBox 19"/>
-          <p:cNvSpPr txBox="1"/>
-          <p:nvPr/>
-        </p:nvSpPr>
-        <p:spPr>
-          <a:xfrm>
-            <a:off x="365760" y="6199632"/>
-            <a:ext cx="11430000" cy="256032"/>
-          </a:xfrm>
-          <a:prstGeom prst="rect">
-            <a:avLst/>
-          </a:prstGeom>
-          <a:noFill/>
-        </p:spPr>
-        <p:txBody>
-          <a:bodyPr wrap="square">
-            <a:spAutoFit/>
-          </a:bodyPr>
-          <a:lstStyle/>
-          <a:p>
-            <a:pPr algn="l"/>
-            <a:r>
-              <a:rPr sz="1000" b="0">
-                <a:solidFill>
-                  <a:srgbClr val="5C4A4E"/>
-                </a:solidFill>
-                <a:latin typeface="Calibri"/>
-              </a:rPr>
-              <a:t>Master repository: github.com/joyjeni/phd-agentic-ai-master</a:t>
+              <a:t>Future evaluation protocol (not a result). Compare mesh size and downstream SATR rank stability with vs without pruning on the same session traces.</a:t>
             </a:r>
           </a:p>
         </p:txBody>
@@ -18890,7 +18801,7 @@
           <a:lstStyle/>
           <a:p>
             <a:pPr algn="l"/>
-            <a:fld id="{b93e14b3-9885-40b5-a0ff-94e67b3a3702}" type="datetime3">
+            <a:fld id="{6ccc1567-79b5-4443-9009-fcb9ec17a3ba}" type="datetime3">
               <a:rPr lang="en-GB" sz="1000" dirty="0">
                 <a:solidFill>
                   <a:srgbClr val="C4A35A"/>
@@ -18924,7 +18835,7 @@
           <a:lstStyle/>
           <a:p>
             <a:pPr algn="r"/>
-            <a:fld id="{1540dcc3-2794-4dd8-b87a-132542f5c473}" type="slidenum">
+            <a:fld id="{ca89bc95-6608-43b2-8720-0529f68ddf55}" type="slidenum">
               <a:rPr lang="en-GB" sz="1000" dirty="0">
                 <a:solidFill>
                   <a:srgbClr val="C4A35A"/>
@@ -18940,7 +18851,7 @@
                 </a:solidFill>
                 <a:latin typeface="Calibri"/>
               </a:rPr>
-              <a:t> / 34</a:t>
+              <a:t> / 35</a:t>
             </a:r>
             <a:endParaRPr lang="en-GB" sz="1000"/>
           </a:p>
@@ -18956,6 +18867,1009 @@
 </file>
 
 <file path=ppt/slides/slide27.xml><?xml version="1.0" encoding="utf-8"?>
+<p:sld xmlns:a="http://schemas.openxmlformats.org/drawingml/2006/main" xmlns:p="http://schemas.openxmlformats.org/presentationml/2006/main" xmlns:r="http://schemas.openxmlformats.org/officeDocument/2006/relationships">
+  <p:cSld>
+    <p:spTree>
+      <p:nvGrpSpPr>
+        <p:cNvPr id="1" name=""/>
+        <p:cNvGrpSpPr/>
+        <p:nvPr/>
+      </p:nvGrpSpPr>
+      <p:grpSpPr/>
+      <p:sp>
+        <p:nvSpPr>
+          <p:cNvPr id="2" name="Rectangle 1"/>
+          <p:cNvSpPr/>
+          <p:nvPr/>
+        </p:nvSpPr>
+        <p:spPr>
+          <a:xfrm>
+            <a:off x="0" y="0"/>
+            <a:ext cx="12191695" cy="658368"/>
+          </a:xfrm>
+          <a:prstGeom prst="rect">
+            <a:avLst/>
+          </a:prstGeom>
+          <a:solidFill>
+            <a:srgbClr val="7C1D2E"/>
+          </a:solidFill>
+          <a:ln>
+            <a:noFill/>
+          </a:ln>
+        </p:spPr>
+        <p:style>
+          <a:lnRef idx="1">
+            <a:schemeClr val="accent1"/>
+          </a:lnRef>
+          <a:fillRef idx="3">
+            <a:schemeClr val="accent1"/>
+          </a:fillRef>
+          <a:effectRef idx="2">
+            <a:schemeClr val="accent1"/>
+          </a:effectRef>
+          <a:fontRef idx="minor">
+            <a:schemeClr val="lt1"/>
+          </a:fontRef>
+        </p:style>
+        <p:txBody>
+          <a:bodyPr rtlCol="0" anchor="ctr"/>
+          <a:lstStyle/>
+          <a:p>
+            <a:pPr algn="ctr"/>
+          </a:p>
+        </p:txBody>
+      </p:sp>
+      <p:sp>
+        <p:nvSpPr>
+          <p:cNvPr id="3" name="Rectangle 2"/>
+          <p:cNvSpPr/>
+          <p:nvPr/>
+        </p:nvSpPr>
+        <p:spPr>
+          <a:xfrm>
+            <a:off x="0" y="658368"/>
+            <a:ext cx="12191695" cy="54864"/>
+          </a:xfrm>
+          <a:prstGeom prst="rect">
+            <a:avLst/>
+          </a:prstGeom>
+          <a:solidFill>
+            <a:srgbClr val="C4A35A"/>
+          </a:solidFill>
+          <a:ln>
+            <a:noFill/>
+          </a:ln>
+        </p:spPr>
+        <p:style>
+          <a:lnRef idx="1">
+            <a:schemeClr val="accent1"/>
+          </a:lnRef>
+          <a:fillRef idx="3">
+            <a:schemeClr val="accent1"/>
+          </a:fillRef>
+          <a:effectRef idx="2">
+            <a:schemeClr val="accent1"/>
+          </a:effectRef>
+          <a:fontRef idx="minor">
+            <a:schemeClr val="lt1"/>
+          </a:fontRef>
+        </p:style>
+        <p:txBody>
+          <a:bodyPr rtlCol="0" anchor="ctr"/>
+          <a:lstStyle/>
+          <a:p>
+            <a:pPr algn="ctr"/>
+          </a:p>
+        </p:txBody>
+      </p:sp>
+      <p:sp>
+        <p:nvSpPr>
+          <p:cNvPr id="4" name="Rectangle 3"/>
+          <p:cNvSpPr/>
+          <p:nvPr/>
+        </p:nvSpPr>
+        <p:spPr>
+          <a:xfrm>
+            <a:off x="0" y="6510528"/>
+            <a:ext cx="12191695" cy="347472"/>
+          </a:xfrm>
+          <a:prstGeom prst="rect">
+            <a:avLst/>
+          </a:prstGeom>
+          <a:solidFill>
+            <a:srgbClr val="7C1D2E"/>
+          </a:solidFill>
+          <a:ln>
+            <a:noFill/>
+          </a:ln>
+        </p:spPr>
+        <p:style>
+          <a:lnRef idx="1">
+            <a:schemeClr val="accent1"/>
+          </a:lnRef>
+          <a:fillRef idx="3">
+            <a:schemeClr val="accent1"/>
+          </a:fillRef>
+          <a:effectRef idx="2">
+            <a:schemeClr val="accent1"/>
+          </a:effectRef>
+          <a:fontRef idx="minor">
+            <a:schemeClr val="lt1"/>
+          </a:fontRef>
+        </p:style>
+        <p:txBody>
+          <a:bodyPr rtlCol="0" anchor="ctr"/>
+          <a:lstStyle/>
+          <a:p>
+            <a:pPr algn="ctr"/>
+          </a:p>
+        </p:txBody>
+      </p:sp>
+      <p:sp>
+        <p:nvSpPr>
+          <p:cNvPr id="5" name="TextBox 4"/>
+          <p:cNvSpPr txBox="1"/>
+          <p:nvPr/>
+        </p:nvSpPr>
+        <p:spPr>
+          <a:xfrm>
+            <a:off x="292608" y="73152"/>
+            <a:ext cx="11521440" cy="292608"/>
+          </a:xfrm>
+          <a:prstGeom prst="rect">
+            <a:avLst/>
+          </a:prstGeom>
+          <a:noFill/>
+        </p:spPr>
+        <p:txBody>
+          <a:bodyPr wrap="square">
+            <a:spAutoFit/>
+          </a:bodyPr>
+          <a:lstStyle/>
+          <a:p>
+            <a:pPr algn="l"/>
+            <a:r>
+              <a:rPr sz="1300" b="1">
+                <a:solidFill>
+                  <a:srgbClr val="FFFFFF"/>
+                </a:solidFill>
+                <a:latin typeface="Calibri"/>
+              </a:rPr>
+              <a:t>M. S. RAMAIAH UNIVERSITY OF APPLIED SCIENCES</a:t>
+            </a:r>
+          </a:p>
+        </p:txBody>
+      </p:sp>
+      <p:sp>
+        <p:nvSpPr>
+          <p:cNvPr id="6" name="TextBox 5"/>
+          <p:cNvSpPr txBox="1"/>
+          <p:nvPr/>
+        </p:nvSpPr>
+        <p:spPr>
+          <a:xfrm>
+            <a:off x="292608" y="347472"/>
+            <a:ext cx="11521440" cy="256032"/>
+          </a:xfrm>
+          <a:prstGeom prst="rect">
+            <a:avLst/>
+          </a:prstGeom>
+          <a:noFill/>
+        </p:spPr>
+        <p:txBody>
+          <a:bodyPr wrap="square">
+            <a:spAutoFit/>
+          </a:bodyPr>
+          <a:lstStyle/>
+          <a:p>
+            <a:pPr algn="l"/>
+            <a:r>
+              <a:rPr sz="1100" b="0">
+                <a:solidFill>
+                  <a:srgbClr val="C4A35A"/>
+                </a:solidFill>
+                <a:latin typeface="Calibri"/>
+              </a:rPr>
+              <a:t>Faculty of Engineering and Technology  ·  RESEARCH PROPOSAL</a:t>
+            </a:r>
+          </a:p>
+        </p:txBody>
+      </p:sp>
+      <p:sp>
+        <p:nvSpPr>
+          <p:cNvPr id="7" name="TextBox 6"/>
+          <p:cNvSpPr txBox="1"/>
+          <p:nvPr/>
+        </p:nvSpPr>
+        <p:spPr>
+          <a:xfrm>
+            <a:off x="3383280" y="6565392"/>
+            <a:ext cx="5760720" cy="237744"/>
+          </a:xfrm>
+          <a:prstGeom prst="rect">
+            <a:avLst/>
+          </a:prstGeom>
+          <a:noFill/>
+        </p:spPr>
+        <p:txBody>
+          <a:bodyPr wrap="square">
+            <a:spAutoFit/>
+          </a:bodyPr>
+          <a:lstStyle/>
+          <a:p>
+            <a:pPr algn="ctr"/>
+            <a:r>
+              <a:rPr sz="1000" b="0">
+                <a:solidFill>
+                  <a:srgbClr val="FFFFFF"/>
+                </a:solidFill>
+                <a:latin typeface="Calibri"/>
+              </a:rPr>
+              <a:t>Jenisha T  |  24ETRP720001  |  Part Time</a:t>
+            </a:r>
+          </a:p>
+        </p:txBody>
+      </p:sp>
+      <p:sp>
+        <p:nvSpPr>
+          <p:cNvPr id="8" name="Rectangle 7"/>
+          <p:cNvSpPr/>
+          <p:nvPr/>
+        </p:nvSpPr>
+        <p:spPr>
+          <a:xfrm>
+            <a:off x="0" y="713232"/>
+            <a:ext cx="12191695" cy="5797296"/>
+          </a:xfrm>
+          <a:prstGeom prst="rect">
+            <a:avLst/>
+          </a:prstGeom>
+          <a:solidFill>
+            <a:srgbClr val="FFFAF3"/>
+          </a:solidFill>
+          <a:ln>
+            <a:noFill/>
+          </a:ln>
+        </p:spPr>
+        <p:style>
+          <a:lnRef idx="1">
+            <a:schemeClr val="accent1"/>
+          </a:lnRef>
+          <a:fillRef idx="3">
+            <a:schemeClr val="accent1"/>
+          </a:fillRef>
+          <a:effectRef idx="2">
+            <a:schemeClr val="accent1"/>
+          </a:effectRef>
+          <a:fontRef idx="minor">
+            <a:schemeClr val="lt1"/>
+          </a:fontRef>
+        </p:style>
+        <p:txBody>
+          <a:bodyPr rtlCol="0" anchor="ctr"/>
+          <a:lstStyle/>
+          <a:p>
+            <a:pPr algn="ctr"/>
+          </a:p>
+        </p:txBody>
+      </p:sp>
+      <p:sp>
+        <p:nvSpPr>
+          <p:cNvPr id="9" name="TextBox 8"/>
+          <p:cNvSpPr txBox="1"/>
+          <p:nvPr/>
+        </p:nvSpPr>
+        <p:spPr>
+          <a:xfrm>
+            <a:off x="365760" y="804672"/>
+            <a:ext cx="11430000" cy="237744"/>
+          </a:xfrm>
+          <a:prstGeom prst="rect">
+            <a:avLst/>
+          </a:prstGeom>
+          <a:noFill/>
+        </p:spPr>
+        <p:txBody>
+          <a:bodyPr wrap="square">
+            <a:spAutoFit/>
+          </a:bodyPr>
+          <a:lstStyle/>
+          <a:p>
+            <a:pPr algn="l"/>
+            <a:r>
+              <a:rPr sz="1100" b="1">
+                <a:solidFill>
+                  <a:srgbClr val="7C1D2E"/>
+                </a:solidFill>
+                <a:latin typeface="Calibri"/>
+              </a:rPr>
+              <a:t>RESEARCH PROPOSAL  ·  Research Methodology</a:t>
+            </a:r>
+          </a:p>
+        </p:txBody>
+      </p:sp>
+      <p:sp>
+        <p:nvSpPr>
+          <p:cNvPr id="10" name="TextBox 9"/>
+          <p:cNvSpPr txBox="1"/>
+          <p:nvPr/>
+        </p:nvSpPr>
+        <p:spPr>
+          <a:xfrm>
+            <a:off x="365760" y="1024128"/>
+            <a:ext cx="11430000" cy="502920"/>
+          </a:xfrm>
+          <a:prstGeom prst="rect">
+            <a:avLst/>
+          </a:prstGeom>
+          <a:noFill/>
+        </p:spPr>
+        <p:txBody>
+          <a:bodyPr wrap="square">
+            <a:spAutoFit/>
+          </a:bodyPr>
+          <a:lstStyle/>
+          <a:p>
+            <a:pPr algn="l"/>
+            <a:r>
+              <a:rPr sz="2200" b="1">
+                <a:solidFill>
+                  <a:srgbClr val="1A1214"/>
+                </a:solidFill>
+                <a:latin typeface="Calibri"/>
+              </a:rPr>
+              <a:t>Research Methodology — integrated loop</a:t>
+            </a:r>
+          </a:p>
+        </p:txBody>
+      </p:sp>
+      <p:sp>
+        <p:nvSpPr>
+          <p:cNvPr id="11" name="TextBox 10"/>
+          <p:cNvSpPr txBox="1"/>
+          <p:nvPr/>
+        </p:nvSpPr>
+        <p:spPr>
+          <a:xfrm>
+            <a:off x="365760" y="1572768"/>
+            <a:ext cx="11430000" cy="384048"/>
+          </a:xfrm>
+          <a:prstGeom prst="rect">
+            <a:avLst/>
+          </a:prstGeom>
+          <a:noFill/>
+        </p:spPr>
+        <p:txBody>
+          <a:bodyPr wrap="square">
+            <a:spAutoFit/>
+          </a:bodyPr>
+          <a:lstStyle/>
+          <a:p>
+            <a:pPr algn="l"/>
+            <a:r>
+              <a:rPr sz="1300" b="0">
+                <a:solidFill>
+                  <a:srgbClr val="5C4A4E"/>
+                </a:solidFill>
+                <a:latin typeface="Calibri"/>
+              </a:rPr>
+              <a:t>Closed contract SATR → APRR → MNCD → FCNP → SATR. The novelty is the loop and the data contract, not a claimed accuracy.</a:t>
+            </a:r>
+          </a:p>
+        </p:txBody>
+      </p:sp>
+      <p:sp>
+        <p:nvSpPr>
+          <p:cNvPr id="12" name="TextBox 11"/>
+          <p:cNvSpPr txBox="1"/>
+          <p:nvPr/>
+        </p:nvSpPr>
+        <p:spPr>
+          <a:xfrm>
+            <a:off x="365760" y="1993392"/>
+            <a:ext cx="11430000" cy="1874519"/>
+          </a:xfrm>
+          <a:prstGeom prst="rect">
+            <a:avLst/>
+          </a:prstGeom>
+          <a:noFill/>
+        </p:spPr>
+        <p:txBody>
+          <a:bodyPr wrap="square">
+            <a:spAutoFit/>
+          </a:bodyPr>
+          <a:lstStyle/>
+          <a:p>
+            <a:pPr>
+              <a:spcAft>
+                <a:spcPts val="600"/>
+              </a:spcAft>
+              <a:buFont typeface="Arial"/>
+              <a:buChar char="•"/>
+            </a:pPr>
+            <a:r>
+              <a:rPr sz="1300">
+                <a:solidFill>
+                  <a:srgbClr val="1A1214"/>
+                </a:solidFill>
+                <a:latin typeface="Calibri"/>
+              </a:rPr>
+              <a:t>Closed-loop protocol. One user turn must traverse all four modules in order. Skipping MNCD (no live UUID) or FCNP (no write-back) is treated as an incomplete run, not a successful demo.</a:t>
+            </a:r>
+          </a:p>
+          <a:p>
+            <a:pPr>
+              <a:spcAft>
+                <a:spcPts val="600"/>
+              </a:spcAft>
+              <a:buFont typeface="Arial"/>
+              <a:buChar char="•"/>
+            </a:pPr>
+            <a:r>
+              <a:rPr sz="1300">
+                <a:solidFill>
+                  <a:srgbClr val="1A1214"/>
+                </a:solidFill>
+                <a:latin typeface="Calibri"/>
+              </a:rPr>
+              <a:t>Two evidence regimes. (1) ToolBench-style ranking traces for SATR. (2) Live data.gov.in Agriculture rows for MNCD. Do not mix dummy prices into (1) or RapidAPI tools into (2).</a:t>
+            </a:r>
+          </a:p>
+          <a:p>
+            <a:pPr>
+              <a:spcAft>
+                <a:spcPts val="600"/>
+              </a:spcAft>
+              <a:buFont typeface="Arial"/>
+              <a:buChar char="•"/>
+            </a:pPr>
+            <a:r>
+              <a:rPr sz="1300">
+                <a:solidFill>
+                  <a:srgbClr val="1A1214"/>
+                </a:solidFill>
+                <a:latin typeface="Calibri"/>
+              </a:rPr>
+              <a:t>Independent variables (future experiments). Session fusion on/off; Dirichlet routing vs static roles; score-sum vs majority; FCNP write-back on/off.</a:t>
+            </a:r>
+          </a:p>
+          <a:p>
+            <a:pPr>
+              <a:spcAft>
+                <a:spcPts val="600"/>
+              </a:spcAft>
+              <a:buFont typeface="Arial"/>
+              <a:buChar char="•"/>
+            </a:pPr>
+            <a:r>
+              <a:rPr sz="1300">
+                <a:solidFill>
+                  <a:srgbClr val="1A1214"/>
+                </a:solidFill>
+                <a:latin typeface="Calibri"/>
+              </a:rPr>
+              <a:t>Dependent measures (to be frozen later). Citation completeness, fail-loud correctness, rank stability across turns, qualitative specialist-choice logs.</a:t>
+            </a:r>
+          </a:p>
+          <a:p>
+            <a:pPr>
+              <a:spcAft>
+                <a:spcPts val="600"/>
+              </a:spcAft>
+              <a:buFont typeface="Arial"/>
+              <a:buChar char="•"/>
+            </a:pPr>
+            <a:r>
+              <a:rPr sz="1300">
+                <a:solidFill>
+                  <a:srgbClr val="1A1214"/>
+                </a:solidFill>
+                <a:latin typeface="Calibri"/>
+              </a:rPr>
+              <a:t>Domain lock. Agriculture on Indian OGD for the live path. Other sectors are out of scope until a later amendment.</a:t>
+            </a:r>
+          </a:p>
+          <a:p>
+            <a:pPr>
+              <a:spcAft>
+                <a:spcPts val="600"/>
+              </a:spcAft>
+              <a:buFont typeface="Arial"/>
+              <a:buChar char="•"/>
+            </a:pPr>
+            <a:r>
+              <a:rPr sz="1300">
+                <a:solidFill>
+                  <a:srgbClr val="1A1214"/>
+                </a:solidFill>
+                <a:latin typeface="Calibri"/>
+              </a:rPr>
+              <a:t>Ethics / data. Public government catalogues only; no personal data; API keys stay in the environment, never in the thesis text.</a:t>
+            </a:r>
+          </a:p>
+        </p:txBody>
+      </p:sp>
+      <p:sp>
+        <p:nvSpPr>
+          <p:cNvPr id="13" name="TextBox 12"/>
+          <p:cNvSpPr txBox="1"/>
+          <p:nvPr/>
+        </p:nvSpPr>
+        <p:spPr>
+          <a:xfrm>
+            <a:off x="365760" y="4434840"/>
+            <a:ext cx="11430000" cy="219456"/>
+          </a:xfrm>
+          <a:prstGeom prst="rect">
+            <a:avLst/>
+          </a:prstGeom>
+          <a:noFill/>
+        </p:spPr>
+        <p:txBody>
+          <a:bodyPr wrap="square">
+            <a:spAutoFit/>
+          </a:bodyPr>
+          <a:lstStyle/>
+          <a:p>
+            <a:pPr algn="l"/>
+            <a:r>
+              <a:rPr sz="1100" b="0">
+                <a:solidFill>
+                  <a:srgbClr val="5C4A4E"/>
+                </a:solidFill>
+                <a:latin typeface="Calibri"/>
+              </a:rPr>
+              <a:t>ACRS loop (maroon). Green path is the increment, not a metric.</a:t>
+            </a:r>
+          </a:p>
+        </p:txBody>
+      </p:sp>
+      <p:sp>
+        <p:nvSpPr>
+          <p:cNvPr id="14" name="Rounded Rectangle 13"/>
+          <p:cNvSpPr/>
+          <p:nvPr/>
+        </p:nvSpPr>
+        <p:spPr>
+          <a:xfrm>
+            <a:off x="365760" y="4690872"/>
+            <a:ext cx="1813560" cy="438912"/>
+          </a:xfrm>
+          <a:prstGeom prst="roundRect">
+            <a:avLst>
+              <a:gd name="adj" fmla="val 10000"/>
+            </a:avLst>
+          </a:prstGeom>
+          <a:solidFill>
+            <a:srgbClr val="7C1D2E"/>
+          </a:solidFill>
+          <a:ln>
+            <a:noFill/>
+          </a:ln>
+        </p:spPr>
+        <p:style>
+          <a:lnRef idx="1">
+            <a:schemeClr val="accent1"/>
+          </a:lnRef>
+          <a:fillRef idx="3">
+            <a:schemeClr val="accent1"/>
+          </a:fillRef>
+          <a:effectRef idx="2">
+            <a:schemeClr val="accent1"/>
+          </a:effectRef>
+          <a:fontRef idx="minor">
+            <a:schemeClr val="lt1"/>
+          </a:fontRef>
+        </p:style>
+        <p:txBody>
+          <a:bodyPr rtlCol="0" anchor="ctr" wrap="square"/>
+          <a:lstStyle/>
+          <a:p>
+            <a:pPr algn="ctr"/>
+            <a:r>
+              <a:rPr sz="1000" b="1">
+                <a:solidFill>
+                  <a:srgbClr val="FFFFFF"/>
+                </a:solidFill>
+                <a:latin typeface="Calibri"/>
+              </a:rPr>
+              <a:t>q + M</a:t>
+            </a:r>
+          </a:p>
+        </p:txBody>
+      </p:sp>
+      <p:sp>
+        <p:nvSpPr>
+          <p:cNvPr id="15" name="Rounded Rectangle 14"/>
+          <p:cNvSpPr/>
+          <p:nvPr/>
+        </p:nvSpPr>
+        <p:spPr>
+          <a:xfrm>
+            <a:off x="2289048" y="4690872"/>
+            <a:ext cx="1813560" cy="438912"/>
+          </a:xfrm>
+          <a:prstGeom prst="roundRect">
+            <a:avLst>
+              <a:gd name="adj" fmla="val 10000"/>
+            </a:avLst>
+          </a:prstGeom>
+          <a:solidFill>
+            <a:srgbClr val="7C1D2E"/>
+          </a:solidFill>
+          <a:ln>
+            <a:noFill/>
+          </a:ln>
+        </p:spPr>
+        <p:style>
+          <a:lnRef idx="1">
+            <a:schemeClr val="accent1"/>
+          </a:lnRef>
+          <a:fillRef idx="3">
+            <a:schemeClr val="accent1"/>
+          </a:fillRef>
+          <a:effectRef idx="2">
+            <a:schemeClr val="accent1"/>
+          </a:effectRef>
+          <a:fontRef idx="minor">
+            <a:schemeClr val="lt1"/>
+          </a:fontRef>
+        </p:style>
+        <p:txBody>
+          <a:bodyPr rtlCol="0" anchor="ctr" wrap="square"/>
+          <a:lstStyle/>
+          <a:p>
+            <a:pPr algn="ctr"/>
+            <a:r>
+              <a:rPr sz="1000" b="1">
+                <a:solidFill>
+                  <a:srgbClr val="FFFFFF"/>
+                </a:solidFill>
+                <a:latin typeface="Calibri"/>
+              </a:rPr>
+              <a:t>SATR</a:t>
+            </a:r>
+          </a:p>
+        </p:txBody>
+      </p:sp>
+      <p:sp>
+        <p:nvSpPr>
+          <p:cNvPr id="16" name="Rounded Rectangle 15"/>
+          <p:cNvSpPr/>
+          <p:nvPr/>
+        </p:nvSpPr>
+        <p:spPr>
+          <a:xfrm>
+            <a:off x="4212336" y="4690872"/>
+            <a:ext cx="1813560" cy="438912"/>
+          </a:xfrm>
+          <a:prstGeom prst="roundRect">
+            <a:avLst>
+              <a:gd name="adj" fmla="val 10000"/>
+            </a:avLst>
+          </a:prstGeom>
+          <a:solidFill>
+            <a:srgbClr val="7C1D2E"/>
+          </a:solidFill>
+          <a:ln>
+            <a:noFill/>
+          </a:ln>
+        </p:spPr>
+        <p:style>
+          <a:lnRef idx="1">
+            <a:schemeClr val="accent1"/>
+          </a:lnRef>
+          <a:fillRef idx="3">
+            <a:schemeClr val="accent1"/>
+          </a:fillRef>
+          <a:effectRef idx="2">
+            <a:schemeClr val="accent1"/>
+          </a:effectRef>
+          <a:fontRef idx="minor">
+            <a:schemeClr val="lt1"/>
+          </a:fontRef>
+        </p:style>
+        <p:txBody>
+          <a:bodyPr rtlCol="0" anchor="ctr" wrap="square"/>
+          <a:lstStyle/>
+          <a:p>
+            <a:pPr algn="ctr"/>
+            <a:r>
+              <a:rPr sz="1000" b="1">
+                <a:solidFill>
+                  <a:srgbClr val="FFFFFF"/>
+                </a:solidFill>
+                <a:latin typeface="Calibri"/>
+              </a:rPr>
+              <a:t>APRR</a:t>
+            </a:r>
+          </a:p>
+        </p:txBody>
+      </p:sp>
+      <p:sp>
+        <p:nvSpPr>
+          <p:cNvPr id="17" name="Rounded Rectangle 16"/>
+          <p:cNvSpPr/>
+          <p:nvPr/>
+        </p:nvSpPr>
+        <p:spPr>
+          <a:xfrm>
+            <a:off x="6135624" y="4690872"/>
+            <a:ext cx="1813560" cy="438912"/>
+          </a:xfrm>
+          <a:prstGeom prst="roundRect">
+            <a:avLst>
+              <a:gd name="adj" fmla="val 10000"/>
+            </a:avLst>
+          </a:prstGeom>
+          <a:solidFill>
+            <a:srgbClr val="7C1D2E"/>
+          </a:solidFill>
+          <a:ln>
+            <a:noFill/>
+          </a:ln>
+        </p:spPr>
+        <p:style>
+          <a:lnRef idx="1">
+            <a:schemeClr val="accent1"/>
+          </a:lnRef>
+          <a:fillRef idx="3">
+            <a:schemeClr val="accent1"/>
+          </a:fillRef>
+          <a:effectRef idx="2">
+            <a:schemeClr val="accent1"/>
+          </a:effectRef>
+          <a:fontRef idx="minor">
+            <a:schemeClr val="lt1"/>
+          </a:fontRef>
+        </p:style>
+        <p:txBody>
+          <a:bodyPr rtlCol="0" anchor="ctr" wrap="square"/>
+          <a:lstStyle/>
+          <a:p>
+            <a:pPr algn="ctr"/>
+            <a:r>
+              <a:rPr sz="1000" b="1">
+                <a:solidFill>
+                  <a:srgbClr val="FFFFFF"/>
+                </a:solidFill>
+                <a:latin typeface="Calibri"/>
+              </a:rPr>
+              <a:t>MNCD</a:t>
+            </a:r>
+          </a:p>
+        </p:txBody>
+      </p:sp>
+      <p:sp>
+        <p:nvSpPr>
+          <p:cNvPr id="18" name="Rounded Rectangle 17"/>
+          <p:cNvSpPr/>
+          <p:nvPr/>
+        </p:nvSpPr>
+        <p:spPr>
+          <a:xfrm>
+            <a:off x="8058912" y="4690872"/>
+            <a:ext cx="1813560" cy="438912"/>
+          </a:xfrm>
+          <a:prstGeom prst="roundRect">
+            <a:avLst>
+              <a:gd name="adj" fmla="val 10000"/>
+            </a:avLst>
+          </a:prstGeom>
+          <a:solidFill>
+            <a:srgbClr val="7C1D2E"/>
+          </a:solidFill>
+          <a:ln>
+            <a:noFill/>
+          </a:ln>
+        </p:spPr>
+        <p:style>
+          <a:lnRef idx="1">
+            <a:schemeClr val="accent1"/>
+          </a:lnRef>
+          <a:fillRef idx="3">
+            <a:schemeClr val="accent1"/>
+          </a:fillRef>
+          <a:effectRef idx="2">
+            <a:schemeClr val="accent1"/>
+          </a:effectRef>
+          <a:fontRef idx="minor">
+            <a:schemeClr val="lt1"/>
+          </a:fontRef>
+        </p:style>
+        <p:txBody>
+          <a:bodyPr rtlCol="0" anchor="ctr" wrap="square"/>
+          <a:lstStyle/>
+          <a:p>
+            <a:pPr algn="ctr"/>
+            <a:r>
+              <a:rPr sz="1000" b="1">
+                <a:solidFill>
+                  <a:srgbClr val="FFFFFF"/>
+                </a:solidFill>
+                <a:latin typeface="Calibri"/>
+              </a:rPr>
+              <a:t>FCNP</a:t>
+            </a:r>
+          </a:p>
+        </p:txBody>
+      </p:sp>
+      <p:sp>
+        <p:nvSpPr>
+          <p:cNvPr id="19" name="Rounded Rectangle 18"/>
+          <p:cNvSpPr/>
+          <p:nvPr/>
+        </p:nvSpPr>
+        <p:spPr>
+          <a:xfrm>
+            <a:off x="9982200" y="4690872"/>
+            <a:ext cx="1813560" cy="438912"/>
+          </a:xfrm>
+          <a:prstGeom prst="roundRect">
+            <a:avLst>
+              <a:gd name="adj" fmla="val 10000"/>
+            </a:avLst>
+          </a:prstGeom>
+          <a:solidFill>
+            <a:srgbClr val="7C1D2E"/>
+          </a:solidFill>
+          <a:ln>
+            <a:noFill/>
+          </a:ln>
+        </p:spPr>
+        <p:style>
+          <a:lnRef idx="1">
+            <a:schemeClr val="accent1"/>
+          </a:lnRef>
+          <a:fillRef idx="3">
+            <a:schemeClr val="accent1"/>
+          </a:fillRef>
+          <a:effectRef idx="2">
+            <a:schemeClr val="accent1"/>
+          </a:effectRef>
+          <a:fontRef idx="minor">
+            <a:schemeClr val="lt1"/>
+          </a:fontRef>
+        </p:style>
+        <p:txBody>
+          <a:bodyPr rtlCol="0" anchor="ctr" wrap="square"/>
+          <a:lstStyle/>
+          <a:p>
+            <a:pPr algn="ctr"/>
+            <a:r>
+              <a:rPr sz="1000" b="1">
+                <a:solidFill>
+                  <a:srgbClr val="FFFFFF"/>
+                </a:solidFill>
+                <a:latin typeface="Calibri"/>
+              </a:rPr>
+              <a:t>a + M</a:t>
+            </a:r>
+          </a:p>
+        </p:txBody>
+      </p:sp>
+      <p:sp>
+        <p:nvSpPr>
+          <p:cNvPr id="20" name="TextBox 19"/>
+          <p:cNvSpPr txBox="1"/>
+          <p:nvPr/>
+        </p:nvSpPr>
+        <p:spPr>
+          <a:xfrm>
+            <a:off x="365760" y="6199632"/>
+            <a:ext cx="11430000" cy="256032"/>
+          </a:xfrm>
+          <a:prstGeom prst="rect">
+            <a:avLst/>
+          </a:prstGeom>
+          <a:noFill/>
+        </p:spPr>
+        <p:txBody>
+          <a:bodyPr wrap="square">
+            <a:spAutoFit/>
+          </a:bodyPr>
+          <a:lstStyle/>
+          <a:p>
+            <a:pPr algn="l"/>
+            <a:r>
+              <a:rPr sz="1000" b="0">
+                <a:solidFill>
+                  <a:srgbClr val="5C4A4E"/>
+                </a:solidFill>
+                <a:latin typeface="Calibri"/>
+              </a:rPr>
+              <a:t>Master repository: github.com/joyjeni/phd-agentic-ai-master</a:t>
+            </a:r>
+          </a:p>
+        </p:txBody>
+      </p:sp>
+      <p:sp>
+        <p:nvSpPr>
+          <p:cNvPr id="4027" name="Automatic Date 27"/>
+          <p:cNvSpPr txBox="1"/>
+          <p:nvPr/>
+        </p:nvSpPr>
+        <p:spPr>
+          <a:xfrm>
+            <a:off x="255016" y="6565900"/>
+            <a:ext cx="3108960" cy="255016"/>
+          </a:xfrm>
+          <a:prstGeom prst="rect">
+            <a:avLst/>
+          </a:prstGeom>
+          <a:noFill/>
+        </p:spPr>
+        <p:txBody>
+          <a:bodyPr wrap="none" lIns="0" tIns="0" rIns="0" bIns="0" anchor="ctr"/>
+          <a:lstStyle/>
+          <a:p>
+            <a:pPr algn="l"/>
+            <a:fld id="{e9686833-e7ad-45b1-beb9-d1b9542d112e}" type="datetime3">
+              <a:rPr lang="en-GB" sz="1000" dirty="0">
+                <a:solidFill>
+                  <a:srgbClr val="C4A35A"/>
+                </a:solidFill>
+                <a:latin typeface="Calibri"/>
+              </a:rPr>
+              <a:t>7 September 2026</a:t>
+            </a:fld>
+            <a:endParaRPr lang="en-GB" sz="1000"/>
+          </a:p>
+        </p:txBody>
+      </p:sp>
+      <p:sp>
+        <p:nvSpPr>
+          <p:cNvPr id="5027" name="Automatic Slide Number 27"/>
+          <p:cNvSpPr txBox="1"/>
+          <p:nvPr/>
+        </p:nvSpPr>
+        <p:spPr>
+          <a:xfrm>
+            <a:off x="9601200" y="6565900"/>
+            <a:ext cx="2286000" cy="255016"/>
+          </a:xfrm>
+          <a:prstGeom prst="rect">
+            <a:avLst/>
+          </a:prstGeom>
+          <a:noFill/>
+        </p:spPr>
+        <p:txBody>
+          <a:bodyPr wrap="none" lIns="0" tIns="0" rIns="0" bIns="0" anchor="ctr"/>
+          <a:lstStyle/>
+          <a:p>
+            <a:pPr algn="r"/>
+            <a:fld id="{ac68a6ae-ec49-4750-a458-9cb71ec173a0}" type="slidenum">
+              <a:rPr lang="en-GB" sz="1000" dirty="0">
+                <a:solidFill>
+                  <a:srgbClr val="C4A35A"/>
+                </a:solidFill>
+                <a:latin typeface="Calibri"/>
+              </a:rPr>
+              <a:t>27</a:t>
+            </a:fld>
+            <a:r>
+              <a:rPr lang="en-GB" sz="1000">
+                <a:solidFill>
+                  <a:srgbClr val="C4A35A"/>
+                </a:solidFill>
+                <a:latin typeface="Calibri"/>
+              </a:rPr>
+              <a:t> / 35</a:t>
+            </a:r>
+            <a:endParaRPr lang="en-GB" sz="1000"/>
+          </a:p>
+        </p:txBody>
+      </p:sp>
+    </p:spTree>
+  </p:cSld>
+  <p:clrMapOvr>
+    <a:masterClrMapping/>
+  </p:clrMapOvr>
+  <p:hf sldNum="1" hdr="0" ftr="1" dt="1"/>
+</p:sld>
+</file>
+
+<file path=ppt/slides/slide28.xml><?xml version="1.0" encoding="utf-8"?>
 <p:sld xmlns:a="http://schemas.openxmlformats.org/drawingml/2006/main" xmlns:p="http://schemas.openxmlformats.org/presentationml/2006/main" xmlns:r="http://schemas.openxmlformats.org/officeDocument/2006/relationships">
   <p:cSld>
     <p:spTree>
@@ -19716,7 +20630,7 @@
       </p:graphicFrame>
       <p:sp>
         <p:nvSpPr>
-          <p:cNvPr id="4027" name="Automatic Date 27"/>
+          <p:cNvPr id="4028" name="Automatic Date 28"/>
           <p:cNvSpPr txBox="1"/>
           <p:nvPr/>
         </p:nvSpPr>
@@ -19735,7 +20649,7 @@
           <a:lstStyle/>
           <a:p>
             <a:pPr algn="l"/>
-            <a:fld id="{ba94bc27-9d6e-4b0c-8359-485e1c8a667a}" type="datetime3">
+            <a:fld id="{e8651a33-27ae-4378-b9fc-531f8c1327f1}" type="datetime3">
               <a:rPr lang="en-GB" sz="1000" dirty="0">
                 <a:solidFill>
                   <a:srgbClr val="C4A35A"/>
@@ -19750,7 +20664,7 @@
       </p:sp>
       <p:sp>
         <p:nvSpPr>
-          <p:cNvPr id="5027" name="Automatic Slide Number 27"/>
+          <p:cNvPr id="5028" name="Automatic Slide Number 28"/>
           <p:cNvSpPr txBox="1"/>
           <p:nvPr/>
         </p:nvSpPr>
@@ -19769,633 +20683,7 @@
           <a:lstStyle/>
           <a:p>
             <a:pPr algn="r"/>
-            <a:fld id="{f55cec17-ffa6-4d66-a0fa-78e59b7ab90c}" type="slidenum">
-              <a:rPr lang="en-GB" sz="1000" dirty="0">
-                <a:solidFill>
-                  <a:srgbClr val="C4A35A"/>
-                </a:solidFill>
-                <a:latin typeface="Calibri"/>
-              </a:rPr>
-              <a:t>27</a:t>
-            </a:fld>
-            <a:r>
-              <a:rPr lang="en-GB" sz="1000">
-                <a:solidFill>
-                  <a:srgbClr val="C4A35A"/>
-                </a:solidFill>
-                <a:latin typeface="Calibri"/>
-              </a:rPr>
-              <a:t> / 34</a:t>
-            </a:r>
-            <a:endParaRPr lang="en-GB" sz="1000"/>
-          </a:p>
-        </p:txBody>
-      </p:sp>
-    </p:spTree>
-  </p:cSld>
-  <p:clrMapOvr>
-    <a:masterClrMapping/>
-  </p:clrMapOvr>
-  <p:hf sldNum="1" hdr="0" ftr="1" dt="1"/>
-</p:sld>
-</file>
-
-<file path=ppt/slides/slide28.xml><?xml version="1.0" encoding="utf-8"?>
-<p:sld xmlns:a="http://schemas.openxmlformats.org/drawingml/2006/main" xmlns:p="http://schemas.openxmlformats.org/presentationml/2006/main" xmlns:r="http://schemas.openxmlformats.org/officeDocument/2006/relationships">
-  <p:cSld>
-    <p:spTree>
-      <p:nvGrpSpPr>
-        <p:cNvPr id="1" name=""/>
-        <p:cNvGrpSpPr/>
-        <p:nvPr/>
-      </p:nvGrpSpPr>
-      <p:grpSpPr/>
-      <p:sp>
-        <p:nvSpPr>
-          <p:cNvPr id="2" name="Rectangle 1"/>
-          <p:cNvSpPr/>
-          <p:nvPr/>
-        </p:nvSpPr>
-        <p:spPr>
-          <a:xfrm>
-            <a:off x="0" y="0"/>
-            <a:ext cx="12191695" cy="658368"/>
-          </a:xfrm>
-          <a:prstGeom prst="rect">
-            <a:avLst/>
-          </a:prstGeom>
-          <a:solidFill>
-            <a:srgbClr val="7C1D2E"/>
-          </a:solidFill>
-          <a:ln>
-            <a:noFill/>
-          </a:ln>
-        </p:spPr>
-        <p:style>
-          <a:lnRef idx="1">
-            <a:schemeClr val="accent1"/>
-          </a:lnRef>
-          <a:fillRef idx="3">
-            <a:schemeClr val="accent1"/>
-          </a:fillRef>
-          <a:effectRef idx="2">
-            <a:schemeClr val="accent1"/>
-          </a:effectRef>
-          <a:fontRef idx="minor">
-            <a:schemeClr val="lt1"/>
-          </a:fontRef>
-        </p:style>
-        <p:txBody>
-          <a:bodyPr rtlCol="0" anchor="ctr"/>
-          <a:lstStyle/>
-          <a:p>
-            <a:pPr algn="ctr"/>
-          </a:p>
-        </p:txBody>
-      </p:sp>
-      <p:sp>
-        <p:nvSpPr>
-          <p:cNvPr id="3" name="Rectangle 2"/>
-          <p:cNvSpPr/>
-          <p:nvPr/>
-        </p:nvSpPr>
-        <p:spPr>
-          <a:xfrm>
-            <a:off x="0" y="658368"/>
-            <a:ext cx="12191695" cy="54864"/>
-          </a:xfrm>
-          <a:prstGeom prst="rect">
-            <a:avLst/>
-          </a:prstGeom>
-          <a:solidFill>
-            <a:srgbClr val="C4A35A"/>
-          </a:solidFill>
-          <a:ln>
-            <a:noFill/>
-          </a:ln>
-        </p:spPr>
-        <p:style>
-          <a:lnRef idx="1">
-            <a:schemeClr val="accent1"/>
-          </a:lnRef>
-          <a:fillRef idx="3">
-            <a:schemeClr val="accent1"/>
-          </a:fillRef>
-          <a:effectRef idx="2">
-            <a:schemeClr val="accent1"/>
-          </a:effectRef>
-          <a:fontRef idx="minor">
-            <a:schemeClr val="lt1"/>
-          </a:fontRef>
-        </p:style>
-        <p:txBody>
-          <a:bodyPr rtlCol="0" anchor="ctr"/>
-          <a:lstStyle/>
-          <a:p>
-            <a:pPr algn="ctr"/>
-          </a:p>
-        </p:txBody>
-      </p:sp>
-      <p:sp>
-        <p:nvSpPr>
-          <p:cNvPr id="4" name="Rectangle 3"/>
-          <p:cNvSpPr/>
-          <p:nvPr/>
-        </p:nvSpPr>
-        <p:spPr>
-          <a:xfrm>
-            <a:off x="0" y="6510528"/>
-            <a:ext cx="12191695" cy="347472"/>
-          </a:xfrm>
-          <a:prstGeom prst="rect">
-            <a:avLst/>
-          </a:prstGeom>
-          <a:solidFill>
-            <a:srgbClr val="7C1D2E"/>
-          </a:solidFill>
-          <a:ln>
-            <a:noFill/>
-          </a:ln>
-        </p:spPr>
-        <p:style>
-          <a:lnRef idx="1">
-            <a:schemeClr val="accent1"/>
-          </a:lnRef>
-          <a:fillRef idx="3">
-            <a:schemeClr val="accent1"/>
-          </a:fillRef>
-          <a:effectRef idx="2">
-            <a:schemeClr val="accent1"/>
-          </a:effectRef>
-          <a:fontRef idx="minor">
-            <a:schemeClr val="lt1"/>
-          </a:fontRef>
-        </p:style>
-        <p:txBody>
-          <a:bodyPr rtlCol="0" anchor="ctr"/>
-          <a:lstStyle/>
-          <a:p>
-            <a:pPr algn="ctr"/>
-          </a:p>
-        </p:txBody>
-      </p:sp>
-      <p:sp>
-        <p:nvSpPr>
-          <p:cNvPr id="5" name="TextBox 4"/>
-          <p:cNvSpPr txBox="1"/>
-          <p:nvPr/>
-        </p:nvSpPr>
-        <p:spPr>
-          <a:xfrm>
-            <a:off x="292608" y="73152"/>
-            <a:ext cx="11521440" cy="292608"/>
-          </a:xfrm>
-          <a:prstGeom prst="rect">
-            <a:avLst/>
-          </a:prstGeom>
-          <a:noFill/>
-        </p:spPr>
-        <p:txBody>
-          <a:bodyPr wrap="square">
-            <a:spAutoFit/>
-          </a:bodyPr>
-          <a:lstStyle/>
-          <a:p>
-            <a:pPr algn="l"/>
-            <a:r>
-              <a:rPr sz="1300" b="1">
-                <a:solidFill>
-                  <a:srgbClr val="FFFFFF"/>
-                </a:solidFill>
-                <a:latin typeface="Calibri"/>
-              </a:rPr>
-              <a:t>M. S. RAMAIAH UNIVERSITY OF APPLIED SCIENCES</a:t>
-            </a:r>
-          </a:p>
-        </p:txBody>
-      </p:sp>
-      <p:sp>
-        <p:nvSpPr>
-          <p:cNvPr id="6" name="TextBox 5"/>
-          <p:cNvSpPr txBox="1"/>
-          <p:nvPr/>
-        </p:nvSpPr>
-        <p:spPr>
-          <a:xfrm>
-            <a:off x="292608" y="347472"/>
-            <a:ext cx="11521440" cy="256032"/>
-          </a:xfrm>
-          <a:prstGeom prst="rect">
-            <a:avLst/>
-          </a:prstGeom>
-          <a:noFill/>
-        </p:spPr>
-        <p:txBody>
-          <a:bodyPr wrap="square">
-            <a:spAutoFit/>
-          </a:bodyPr>
-          <a:lstStyle/>
-          <a:p>
-            <a:pPr algn="l"/>
-            <a:r>
-              <a:rPr sz="1100" b="0">
-                <a:solidFill>
-                  <a:srgbClr val="C4A35A"/>
-                </a:solidFill>
-                <a:latin typeface="Calibri"/>
-              </a:rPr>
-              <a:t>Faculty of Engineering and Technology  ·  RESEARCH PROPOSAL</a:t>
-            </a:r>
-          </a:p>
-        </p:txBody>
-      </p:sp>
-      <p:sp>
-        <p:nvSpPr>
-          <p:cNvPr id="7" name="TextBox 6"/>
-          <p:cNvSpPr txBox="1"/>
-          <p:nvPr/>
-        </p:nvSpPr>
-        <p:spPr>
-          <a:xfrm>
-            <a:off x="3383280" y="6565392"/>
-            <a:ext cx="5760720" cy="237744"/>
-          </a:xfrm>
-          <a:prstGeom prst="rect">
-            <a:avLst/>
-          </a:prstGeom>
-          <a:noFill/>
-        </p:spPr>
-        <p:txBody>
-          <a:bodyPr wrap="square">
-            <a:spAutoFit/>
-          </a:bodyPr>
-          <a:lstStyle/>
-          <a:p>
-            <a:pPr algn="ctr"/>
-            <a:r>
-              <a:rPr sz="1000" b="0">
-                <a:solidFill>
-                  <a:srgbClr val="FFFFFF"/>
-                </a:solidFill>
-                <a:latin typeface="Calibri"/>
-              </a:rPr>
-              <a:t>Jenisha T  |  24ETRP720001  |  Part Time</a:t>
-            </a:r>
-          </a:p>
-        </p:txBody>
-      </p:sp>
-      <p:sp>
-        <p:nvSpPr>
-          <p:cNvPr id="8" name="Rectangle 7"/>
-          <p:cNvSpPr/>
-          <p:nvPr/>
-        </p:nvSpPr>
-        <p:spPr>
-          <a:xfrm>
-            <a:off x="0" y="713232"/>
-            <a:ext cx="12191695" cy="5797296"/>
-          </a:xfrm>
-          <a:prstGeom prst="rect">
-            <a:avLst/>
-          </a:prstGeom>
-          <a:solidFill>
-            <a:srgbClr val="FFFAF3"/>
-          </a:solidFill>
-          <a:ln>
-            <a:noFill/>
-          </a:ln>
-        </p:spPr>
-        <p:style>
-          <a:lnRef idx="1">
-            <a:schemeClr val="accent1"/>
-          </a:lnRef>
-          <a:fillRef idx="3">
-            <a:schemeClr val="accent1"/>
-          </a:fillRef>
-          <a:effectRef idx="2">
-            <a:schemeClr val="accent1"/>
-          </a:effectRef>
-          <a:fontRef idx="minor">
-            <a:schemeClr val="lt1"/>
-          </a:fontRef>
-        </p:style>
-        <p:txBody>
-          <a:bodyPr rtlCol="0" anchor="ctr"/>
-          <a:lstStyle/>
-          <a:p>
-            <a:pPr algn="ctr"/>
-          </a:p>
-        </p:txBody>
-      </p:sp>
-      <p:sp>
-        <p:nvSpPr>
-          <p:cNvPr id="9" name="TextBox 8"/>
-          <p:cNvSpPr txBox="1"/>
-          <p:nvPr/>
-        </p:nvSpPr>
-        <p:spPr>
-          <a:xfrm>
-            <a:off x="365760" y="804672"/>
-            <a:ext cx="11430000" cy="237744"/>
-          </a:xfrm>
-          <a:prstGeom prst="rect">
-            <a:avLst/>
-          </a:prstGeom>
-          <a:noFill/>
-        </p:spPr>
-        <p:txBody>
-          <a:bodyPr wrap="square">
-            <a:spAutoFit/>
-          </a:bodyPr>
-          <a:lstStyle/>
-          <a:p>
-            <a:pPr algn="l"/>
-            <a:r>
-              <a:rPr sz="1100" b="1">
-                <a:solidFill>
-                  <a:srgbClr val="7C1D2E"/>
-                </a:solidFill>
-                <a:latin typeface="Calibri"/>
-              </a:rPr>
-              <a:t>RESEARCH PROPOSAL  ·  Research Methodology</a:t>
-            </a:r>
-          </a:p>
-        </p:txBody>
-      </p:sp>
-      <p:sp>
-        <p:nvSpPr>
-          <p:cNvPr id="10" name="TextBox 9"/>
-          <p:cNvSpPr txBox="1"/>
-          <p:nvPr/>
-        </p:nvSpPr>
-        <p:spPr>
-          <a:xfrm>
-            <a:off x="365760" y="1024128"/>
-            <a:ext cx="11430000" cy="502920"/>
-          </a:xfrm>
-          <a:prstGeom prst="rect">
-            <a:avLst/>
-          </a:prstGeom>
-          <a:noFill/>
-        </p:spPr>
-        <p:txBody>
-          <a:bodyPr wrap="square">
-            <a:spAutoFit/>
-          </a:bodyPr>
-          <a:lstStyle/>
-          <a:p>
-            <a:pPr algn="l"/>
-            <a:r>
-              <a:rPr sz="2200" b="1">
-                <a:solidFill>
-                  <a:srgbClr val="1A1214"/>
-                </a:solidFill>
-                <a:latin typeface="Calibri"/>
-              </a:rPr>
-              <a:t>Research Methodology — ToolBench walkthrough</a:t>
-            </a:r>
-          </a:p>
-        </p:txBody>
-      </p:sp>
-      <p:sp>
-        <p:nvSpPr>
-          <p:cNvPr id="11" name="TextBox 10"/>
-          <p:cNvSpPr txBox="1"/>
-          <p:nvPr/>
-        </p:nvSpPr>
-        <p:spPr>
-          <a:xfrm>
-            <a:off x="365760" y="1572768"/>
-            <a:ext cx="11430000" cy="384048"/>
-          </a:xfrm>
-          <a:prstGeom prst="rect">
-            <a:avLst/>
-          </a:prstGeom>
-          <a:noFill/>
-        </p:spPr>
-        <p:txBody>
-          <a:bodyPr wrap="square">
-            <a:spAutoFit/>
-          </a:bodyPr>
-          <a:lstStyle/>
-          <a:p>
-            <a:pPr algn="l"/>
-            <a:r>
-              <a:rPr sz="1300" b="0">
-                <a:solidFill>
-                  <a:srgbClr val="5C4A4E"/>
-                </a:solidFill>
-                <a:latin typeface="Calibri"/>
-              </a:rPr>
-              <a:t>One ToolBench-schema datum, processed by all four objectives. RapidAPI is never GET. Numbers are a 07 September 2026 lab trace, not a metric claim.</a:t>
-            </a:r>
-          </a:p>
-        </p:txBody>
-      </p:sp>
-      <p:sp>
-        <p:nvSpPr>
-          <p:cNvPr id="12" name="TextBox 11"/>
-          <p:cNvSpPr txBox="1"/>
-          <p:nvPr/>
-        </p:nvSpPr>
-        <p:spPr>
-          <a:xfrm>
-            <a:off x="365760" y="1993392"/>
-            <a:ext cx="11430000" cy="3977639"/>
-          </a:xfrm>
-          <a:prstGeom prst="rect">
-            <a:avLst/>
-          </a:prstGeom>
-          <a:noFill/>
-        </p:spPr>
-        <p:txBody>
-          <a:bodyPr wrap="square">
-            <a:spAutoFit/>
-          </a:bodyPr>
-          <a:lstStyle/>
-          <a:p>
-            <a:pPr>
-              <a:spcAft>
-                <a:spcPts val="600"/>
-              </a:spcAft>
-              <a:buFont typeface="Arial"/>
-              <a:buChar char="•"/>
-            </a:pPr>
-            <a:r>
-              <a:rPr sz="1300">
-                <a:solidFill>
-                  <a:srgbClr val="1A1214"/>
-                </a:solidFill>
-                <a:latin typeface="Calibri"/>
-              </a:rPr>
-              <a:t>Intake. Bundled G1 jsonl qid=6491 is a RapidAPI aircraft query (gold docs 4308–4317). Off-sector flights are stripped. The ranking-library analogue walked here is tb.agri.soil_health with q = “What is the soil pH and recommended fertilizer dose for a farm village?”</a:t>
-            </a:r>
-          </a:p>
-          <a:p>
-            <a:pPr>
-              <a:spcAft>
-                <a:spcPts val="600"/>
-              </a:spcAft>
-              <a:buFont typeface="Arial"/>
-              <a:buChar char="•"/>
-            </a:pPr>
-            <a:r>
-              <a:rPr sz="1300">
-                <a:solidFill>
-                  <a:srgbClr val="1A1214"/>
-                </a:solidFill>
-                <a:latin typeface="Calibri"/>
-              </a:rPr>
-              <a:t>O1 SATR. Cold start so s=z(s_base). tb.agri.soil_health s_base=18.08 → s=5.40 (rank 1, ranking-only). karnataka::shc_karnataka s=1.40. datagov.fertilizer s=0.60 (live, rank 4).</a:t>
-            </a:r>
-          </a:p>
-          <a:p>
-            <a:pPr>
-              <a:spcAft>
-                <a:spcPts val="600"/>
-              </a:spcAft>
-              <a:buFont typeface="Arial"/>
-              <a:buChar char="•"/>
-            </a:pPr>
-            <a:r>
-              <a:rPr sz="1300">
-                <a:solidFill>
-                  <a:srgbClr val="1A1214"/>
-                </a:solidFill>
-                <a:latin typeface="Calibri"/>
-              </a:rPr>
-              <a:t>O2 APRR. Path agriculture_analyst → schema_planner (p=0.73) → retrieval_specialist (p=0.95). Non-Agriculture specialists fall back to SATR #1 = soil_health.</a:t>
-            </a:r>
-          </a:p>
-          <a:p>
-            <a:pPr>
-              <a:spcAft>
-                <a:spcPts val="600"/>
-              </a:spcAft>
-              <a:buFont typeface="Arial"/>
-              <a:buChar char="•"/>
-            </a:pPr>
-            <a:r>
-              <a:rPr sz="1300">
-                <a:solidFill>
-                  <a:srgbClr val="1A1214"/>
-                </a:solidFill>
-                <a:latin typeface="Calibri"/>
-              </a:rPr>
-              <a:t>O3 MNCD. Agent score s=0.45 score/(|score|+2)+0.35 overlap. soil_health 0.5995; tally=3·0.7407·0.5995=1.332. Not liveExecutable. preferredLiveToolId matches fertilizer → GET UUID 2e0e6c04-97f2-456b-9309-bf605650cb11 (44 live subsidy rows, e.g. 2002-03 Indigenous Urea 7790 Rs crore).</a:t>
-            </a:r>
-          </a:p>
-          <a:p>
-            <a:pPr>
-              <a:spcAft>
-                <a:spcPts val="600"/>
-              </a:spcAft>
-              <a:buFont typeface="Arial"/>
-              <a:buChar char="•"/>
-            </a:pPr>
-            <a:r>
-              <a:rPr sz="1300">
-                <a:solidFill>
-                  <a:srgbClr val="1A1214"/>
-                </a:solidFill>
-                <a:latin typeface="Calibri"/>
-              </a:rPr>
-              <a:t>O4 FCNP. 10 spans → keep 6 / drop 4; pin query + live fertilizer observation + citation. Memory written back to SATR.</a:t>
-            </a:r>
-          </a:p>
-        </p:txBody>
-      </p:sp>
-      <p:sp>
-        <p:nvSpPr>
-          <p:cNvPr id="13" name="TextBox 12"/>
-          <p:cNvSpPr txBox="1"/>
-          <p:nvPr/>
-        </p:nvSpPr>
-        <p:spPr>
-          <a:xfrm>
-            <a:off x="365760" y="6199632"/>
-            <a:ext cx="11430000" cy="256032"/>
-          </a:xfrm>
-          <a:prstGeom prst="rect">
-            <a:avLst/>
-          </a:prstGeom>
-          <a:noFill/>
-        </p:spPr>
-        <p:txBody>
-          <a:bodyPr wrap="square">
-            <a:spAutoFit/>
-          </a:bodyPr>
-          <a:lstStyle/>
-          <a:p>
-            <a:pPr algn="l"/>
-            <a:r>
-              <a:rPr sz="1000" b="0">
-                <a:solidFill>
-                  <a:srgbClr val="5C4A4E"/>
-                </a:solidFill>
-                <a:latin typeface="Calibri"/>
-              </a:rPr>
-              <a:t>ToolBench = ranking library. Live evidence is always a verified data.gov.in Agriculture UUID.</a:t>
-            </a:r>
-          </a:p>
-        </p:txBody>
-      </p:sp>
-      <p:sp>
-        <p:nvSpPr>
-          <p:cNvPr id="4028" name="Automatic Date 28"/>
-          <p:cNvSpPr txBox="1"/>
-          <p:nvPr/>
-        </p:nvSpPr>
-        <p:spPr>
-          <a:xfrm>
-            <a:off x="255016" y="6565900"/>
-            <a:ext cx="3108960" cy="255016"/>
-          </a:xfrm>
-          <a:prstGeom prst="rect">
-            <a:avLst/>
-          </a:prstGeom>
-          <a:noFill/>
-        </p:spPr>
-        <p:txBody>
-          <a:bodyPr wrap="none" lIns="0" tIns="0" rIns="0" bIns="0" anchor="ctr"/>
-          <a:lstStyle/>
-          <a:p>
-            <a:pPr algn="l"/>
-            <a:fld id="{c35b4d7c-6442-4859-932f-380b5e05b00f}" type="datetime3">
-              <a:rPr lang="en-GB" sz="1000" dirty="0">
-                <a:solidFill>
-                  <a:srgbClr val="C4A35A"/>
-                </a:solidFill>
-                <a:latin typeface="Calibri"/>
-              </a:rPr>
-              <a:t>7 September 2026</a:t>
-            </a:fld>
-            <a:endParaRPr lang="en-GB" sz="1000"/>
-          </a:p>
-        </p:txBody>
-      </p:sp>
-      <p:sp>
-        <p:nvSpPr>
-          <p:cNvPr id="5028" name="Automatic Slide Number 28"/>
-          <p:cNvSpPr txBox="1"/>
-          <p:nvPr/>
-        </p:nvSpPr>
-        <p:spPr>
-          <a:xfrm>
-            <a:off x="9601200" y="6565900"/>
-            <a:ext cx="2286000" cy="255016"/>
-          </a:xfrm>
-          <a:prstGeom prst="rect">
-            <a:avLst/>
-          </a:prstGeom>
-          <a:noFill/>
-        </p:spPr>
-        <p:txBody>
-          <a:bodyPr wrap="none" lIns="0" tIns="0" rIns="0" bIns="0" anchor="ctr"/>
-          <a:lstStyle/>
-          <a:p>
-            <a:pPr algn="r"/>
-            <a:fld id="{255c4b0e-006b-4705-b304-9e6644e10445}" type="slidenum">
+            <a:fld id="{f1edd49f-9e4f-4194-a34d-d40fdd5c6aa1}" type="slidenum">
               <a:rPr lang="en-GB" sz="1000" dirty="0">
                 <a:solidFill>
                   <a:srgbClr val="C4A35A"/>
@@ -20411,7 +20699,7 @@
                 </a:solidFill>
                 <a:latin typeface="Calibri"/>
               </a:rPr>
-              <a:t> / 34</a:t>
+              <a:t> / 35</a:t>
             </a:r>
             <a:endParaRPr lang="en-GB" sz="1000"/>
           </a:p>
@@ -20778,7 +21066,7 @@
                 </a:solidFill>
                 <a:latin typeface="Calibri"/>
               </a:rPr>
-              <a:t>Research Methodology — data.gov.in walkthrough</a:t>
+              <a:t>Research Methodology — ToolBench walkthrough</a:t>
             </a:r>
           </a:p>
         </p:txBody>
@@ -20813,7 +21101,7 @@
                 </a:solidFill>
                 <a:latin typeface="Calibri"/>
               </a:rPr>
-              <a:t>The same four objectives on live AGMARKNET. Query: “What is the current mandi price of wheat in Punjab?” Fail-loud: no invented Punjab-wheat modal.</a:t>
+              <a:t>One ToolBench-schema datum, processed by all four objectives. RapidAPI is never GET. Numbers are a 07 September 2026 lab trace, not a metric claim.</a:t>
             </a:r>
           </a:p>
         </p:txBody>
@@ -20854,7 +21142,7 @@
                 </a:solidFill>
                 <a:latin typeface="Calibri"/>
               </a:rPr>
-              <a:t>Intake. extractToolArguments → state=Punjab, commodity=Wheat. preferredLiveToolId → datagov.mandi_prices (UUID 9ef84268-d588-465a-a308-a864a43d0070). Limit capped at 10 000.</a:t>
+              <a:t>Intake. Bundled G1 jsonl qid=6491 is a RapidAPI aircraft query (gold docs 4308–4317). Off-sector flights are stripped. The ranking-library analogue walked here is tb.agri.soil_health with q = “What is the soil pH and recommended fertilizer dose for a farm village?”</a:t>
             </a:r>
           </a:p>
           <a:p>
@@ -20872,7 +21160,7 @@
                 </a:solidFill>
                 <a:latin typeface="Calibri"/>
               </a:rPr>
-              <a:t>O1 SATR. karnataka::agmarknet_ka s=3.73 (rank 1, same UUID); datagov.mandi_prices s=3.05 (rank 2, preferred); datagov.msp s=2.31 (ranking-only).</a:t>
+              <a:t>O1 SATR. Cold start so s=z(s_base). tb.agri.soil_health s_base=18.08 → s=5.40 (rank 1, ranking-only). karnataka::shc_karnataka s=1.40. datagov.fertilizer s=0.60 (live, rank 4).</a:t>
             </a:r>
           </a:p>
           <a:p>
@@ -20890,7 +21178,7 @@
                 </a:solidFill>
                 <a:latin typeface="Calibri"/>
               </a:rPr>
-              <a:t>O2 APRR. Path agriculture_analyst → schema_planner (p=0.54) → tool_executor (p=0.66, terminal stop). Hop 0: Karnataka mandi, national mandi, MSP. Hop 2 live leftover: crop_production.</a:t>
+              <a:t>O2 APRR. Path agriculture_analyst → schema_planner (p=0.73) → retrieval_specialist (p=0.95). Non-Agriculture specialists fall back to SATR #1 = soil_health.</a:t>
             </a:r>
           </a:p>
           <a:p>
@@ -20908,7 +21196,7 @@
                 </a:solidFill>
                 <a:latin typeface="Calibri"/>
               </a:rPr>
-              <a:t>O3 MNCD. mandi_prices agent-score 0.787 (liveBoost 0.45); karnataka 0.7789. Score-sum winner karnataka::agmarknet_ka tally=1.154. Live GET: 10 000 arrivals; 0 Wheat in Punjab today; 479 other live Punjab rows; Wheat in 133 live rows from MP, Rajasthan, UP, Gujarat, Maharashtra, West Bengal, Chhattisgarh. Shown mean modal Rs 2593/quintal (e.g. Bhindi, Dera Baba Nanak APMC, Rs 828, 07/09/2026).</a:t>
+              <a:t>O3 MNCD. Agent score s=0.45 score/(|score|+2)+0.35 overlap. soil_health 0.5995; tally=3·0.7407·0.5995=1.332. Not liveExecutable. preferredLiveToolId matches fertilizer → GET UUID 2e0e6c04-97f2-456b-9309-bf605650cb11 (44 live subsidy rows, e.g. 2002-03 Indigenous Urea 7790 Rs crore).</a:t>
             </a:r>
           </a:p>
           <a:p>
@@ -20926,7 +21214,7 @@
                 </a:solidFill>
                 <a:latin typeface="Calibri"/>
               </a:rPr>
-              <a:t>O4 FCNP. 10 spans → keep 7; pin the AGMARKNET citation. W ← (1-λ)W + κ·1/L²/lat on the hop path. Next SATR is session-conditioned.</a:t>
+              <a:t>O4 FCNP. 10 spans → keep 6 / drop 4; pin query + live fertilizer observation + citation. Memory written back to SATR.</a:t>
             </a:r>
           </a:p>
         </p:txBody>
@@ -20961,7 +21249,7 @@
                 </a:solidFill>
                 <a:latin typeface="Calibri"/>
               </a:rPr>
-              <a:t>Lab trace 07 September 2026. Re-run on /walkthrough; rows change daily. No dummy prices.</a:t>
+              <a:t>ToolBench = ranking library. Live evidence is always a verified data.gov.in Agriculture UUID.</a:t>
             </a:r>
           </a:p>
         </p:txBody>
@@ -20987,7 +21275,7 @@
           <a:lstStyle/>
           <a:p>
             <a:pPr algn="l"/>
-            <a:fld id="{4ca2c469-5945-4407-b640-fa01c8edb6e6}" type="datetime3">
+            <a:fld id="{42e20ad7-8f06-4e85-afb0-1c91907862d2}" type="datetime3">
               <a:rPr lang="en-GB" sz="1000" dirty="0">
                 <a:solidFill>
                   <a:srgbClr val="C4A35A"/>
@@ -21021,7 +21309,7 @@
           <a:lstStyle/>
           <a:p>
             <a:pPr algn="r"/>
-            <a:fld id="{0527c3f4-2e2f-4070-9e10-dc8aa65e115b}" type="slidenum">
+            <a:fld id="{3ceb30f8-bd3a-4710-b02e-891763dfcbf5}" type="slidenum">
               <a:rPr lang="en-GB" sz="1000" dirty="0">
                 <a:solidFill>
                   <a:srgbClr val="C4A35A"/>
@@ -21037,7 +21325,7 @@
                 </a:solidFill>
                 <a:latin typeface="Calibri"/>
               </a:rPr>
-              <a:t> / 34</a:t>
+              <a:t> / 35</a:t>
             </a:r>
             <a:endParaRPr lang="en-GB" sz="1000"/>
           </a:p>
@@ -21439,7 +21727,7 @@
                 </a:solidFill>
                 <a:latin typeface="Calibri"/>
               </a:rPr>
-              <a:t>Nine required sections. Literature Review follows the FET Evidence 1, Evidence 2, … template. Research Methodology is expanded for each objective (O1 SATR, O2 APRR, O3 MNCD, O4 FCNP), the integrated loop, the exact repository formulas, and two worked traces (ToolBench-schema ranking; live data.gov.in). Objective order is SATR → APRR → MNCD → FCNP (not SMART).</a:t>
+              <a:t>Nine required sections plus the FET mapping To Solve the Research Gap. Literature Review follows the Evidence 1, Evidence 2, … template. After the literature summary, each limitation is closed by a named ACRS module. Research Methodology is expanded for each objective (O1 SATR, O2 APRR, O3 MNCD, O4 FCNP), the integrated loop, the exact repository formulas, and two worked traces (ToolBench-schema ranking; live data.gov.in). Objective order is SATR → APRR → MNCD → FCNP (not SMART).</a:t>
             </a:r>
           </a:p>
         </p:txBody>
@@ -21534,7 +21822,7 @@
                 </a:solidFill>
                 <a:latin typeface="Calibri"/>
               </a:rPr>
-              <a:t>04   Identified Research Problem</a:t>
+              <a:t>03a   To Solve the Research Gap</a:t>
             </a:r>
           </a:p>
           <a:p>
@@ -21552,7 +21840,7 @@
                 </a:solidFill>
                 <a:latin typeface="Calibri"/>
               </a:rPr>
-              <a:t>05   Research Title &amp; Aim</a:t>
+              <a:t>04   Identified Research Problem</a:t>
             </a:r>
           </a:p>
           <a:p>
@@ -21570,7 +21858,7 @@
                 </a:solidFill>
                 <a:latin typeface="Calibri"/>
               </a:rPr>
-              <a:t>06   Research Objectives</a:t>
+              <a:t>05   Research Title &amp; Aim</a:t>
             </a:r>
           </a:p>
           <a:p>
@@ -21588,7 +21876,7 @@
                 </a:solidFill>
                 <a:latin typeface="Calibri"/>
               </a:rPr>
-              <a:t>07   Research Questions</a:t>
+              <a:t>06   Research Objectives</a:t>
             </a:r>
           </a:p>
           <a:p>
@@ -21606,7 +21894,7 @@
                 </a:solidFill>
                 <a:latin typeface="Calibri"/>
               </a:rPr>
-              <a:t>08   Research Methodology</a:t>
+              <a:t>07   Research Questions</a:t>
             </a:r>
           </a:p>
           <a:p>
@@ -21624,7 +21912,7 @@
                 </a:solidFill>
                 <a:latin typeface="Calibri"/>
               </a:rPr>
-              <a:t>08a   Methodology — O1 SATR</a:t>
+              <a:t>08   Research Methodology</a:t>
             </a:r>
           </a:p>
           <a:p>
@@ -21642,7 +21930,7 @@
                 </a:solidFill>
                 <a:latin typeface="Calibri"/>
               </a:rPr>
-              <a:t>08b   Methodology — O2 APRR</a:t>
+              <a:t>08a   Methodology — O1 SATR</a:t>
             </a:r>
           </a:p>
           <a:p>
@@ -21660,7 +21948,7 @@
                 </a:solidFill>
                 <a:latin typeface="Calibri"/>
               </a:rPr>
-              <a:t>08c   Methodology — O3 MNCD</a:t>
+              <a:t>08b   Methodology — O2 APRR</a:t>
             </a:r>
           </a:p>
           <a:p>
@@ -21678,7 +21966,7 @@
                 </a:solidFill>
                 <a:latin typeface="Calibri"/>
               </a:rPr>
-              <a:t>08d   Methodology — O4 FCNP</a:t>
+              <a:t>08c   Methodology — O3 MNCD</a:t>
             </a:r>
           </a:p>
           <a:p>
@@ -21696,7 +21984,7 @@
                 </a:solidFill>
                 <a:latin typeface="Calibri"/>
               </a:rPr>
-              <a:t>08e   Methodology — integrated loop</a:t>
+              <a:t>08d   Methodology — O4 FCNP</a:t>
             </a:r>
           </a:p>
           <a:p>
@@ -21714,7 +22002,7 @@
                 </a:solidFill>
                 <a:latin typeface="Calibri"/>
               </a:rPr>
-              <a:t>08f   Methodology — implementation formulas</a:t>
+              <a:t>08e   Methodology — integrated loop</a:t>
             </a:r>
           </a:p>
           <a:p>
@@ -21732,7 +22020,7 @@
                 </a:solidFill>
                 <a:latin typeface="Calibri"/>
               </a:rPr>
-              <a:t>08g   Methodology — ToolBench walkthrough</a:t>
+              <a:t>08f   Methodology — implementation formulas</a:t>
             </a:r>
           </a:p>
           <a:p>
@@ -21750,7 +22038,7 @@
                 </a:solidFill>
                 <a:latin typeface="Calibri"/>
               </a:rPr>
-              <a:t>08h   Methodology — data.gov.in walkthrough</a:t>
+              <a:t>08g   Methodology — ToolBench walkthrough</a:t>
             </a:r>
           </a:p>
           <a:p>
@@ -21768,6 +22056,24 @@
                 </a:solidFill>
                 <a:latin typeface="Calibri"/>
               </a:rPr>
+              <a:t>08h   Methodology — data.gov.in walkthrough</a:t>
+            </a:r>
+          </a:p>
+          <a:p>
+            <a:pPr>
+              <a:spcAft>
+                <a:spcPts val="600"/>
+              </a:spcAft>
+              <a:buFont typeface="Arial"/>
+              <a:buChar char="•"/>
+            </a:pPr>
+            <a:r>
+              <a:rPr sz="1400">
+                <a:solidFill>
+                  <a:srgbClr val="1A1214"/>
+                </a:solidFill>
+                <a:latin typeface="Calibri"/>
+              </a:rPr>
               <a:t>09   Conclusion</a:t>
             </a:r>
           </a:p>
@@ -21794,7 +22100,7 @@
           <a:lstStyle/>
           <a:p>
             <a:pPr algn="l"/>
-            <a:fld id="{4a9bb48f-1129-44fe-9b05-e4ea53442d45}" type="datetime3">
+            <a:fld id="{029af62f-8c5b-4162-baf5-6185fbac24f3}" type="datetime3">
               <a:rPr lang="en-GB" sz="1000" dirty="0">
                 <a:solidFill>
                   <a:srgbClr val="C4A35A"/>
@@ -21828,7 +22134,7 @@
           <a:lstStyle/>
           <a:p>
             <a:pPr algn="r"/>
-            <a:fld id="{1002ef74-9eec-44fc-94f6-d89bae219078}" type="slidenum">
+            <a:fld id="{342b0715-4032-4b7f-8de4-68aceeac8cab}" type="slidenum">
               <a:rPr lang="en-GB" sz="1000" dirty="0">
                 <a:solidFill>
                   <a:srgbClr val="C4A35A"/>
@@ -21844,7 +22150,7 @@
                 </a:solidFill>
                 <a:latin typeface="Calibri"/>
               </a:rPr>
-              <a:t> / 34</a:t>
+              <a:t> / 35</a:t>
             </a:r>
             <a:endParaRPr lang="en-GB" sz="1000"/>
           </a:p>
@@ -22176,7 +22482,7 @@
                 </a:solidFill>
                 <a:latin typeface="Calibri"/>
               </a:rPr>
-              <a:t>RESEARCH PROPOSAL  ·  Conclusion</a:t>
+              <a:t>RESEARCH PROPOSAL  ·  Research Methodology</a:t>
             </a:r>
           </a:p>
         </p:txBody>
@@ -22211,7 +22517,7 @@
                 </a:solidFill>
                 <a:latin typeface="Calibri"/>
               </a:rPr>
-              <a:t>Conclusion</a:t>
+              <a:t>Research Methodology — data.gov.in walkthrough</a:t>
             </a:r>
           </a:p>
         </p:txBody>
@@ -22246,7 +22552,7 @@
                 </a:solidFill>
                 <a:latin typeface="Calibri"/>
               </a:rPr>
-              <a:t>ACRS is proposed as a structural orchestration layer. The contribution is the closed loop and the four named gaps — not a pre-committed leaderboard.</a:t>
+              <a:t>The same four objectives on live AGMARKNET. Query: “What is the current mandi price of wheat in Punjab?” Fail-loud: no invented Punjab-wheat modal.</a:t>
             </a:r>
           </a:p>
         </p:txBody>
@@ -22287,7 +22593,7 @@
                 </a:solidFill>
                 <a:latin typeface="Calibri"/>
               </a:rPr>
-              <a:t>The literature (AutoGen, MetaGPT, ChatDev, CAMEL, ToolLLM, MasRouter, RouteLLM, PILOT, LLMLingua, PECAD) establishes conversation, tools, learned routing, and prompt compression. It does not establish SATR → APRR → MNCD → FCNP as one contract over live Indian OGD.</a:t>
+              <a:t>Intake. extractToolArguments → state=Punjab, commodity=Wheat. preferredLiveToolId → datagov.mandi_prices (UUID 9ef84268-d588-465a-a308-a864a43d0070). Limit capped at 10 000.</a:t>
             </a:r>
           </a:p>
           <a:p>
@@ -22305,7 +22611,7 @@
                 </a:solidFill>
                 <a:latin typeface="Calibri"/>
               </a:rPr>
-              <a:t>The identified problem is five gaps: G1 session–tool fusion, G2 training-free specialist posterior, G3 live fail-loud Indian OGD, G4 conductance prune with write-back, G5 missing integration layer.</a:t>
+              <a:t>O1 SATR. karnataka::agmarknet_ka s=3.73 (rank 1, same UUID); datagov.mandi_prices s=3.05 (rank 2, preferred); datagov.msp s=2.31 (ranking-only).</a:t>
             </a:r>
           </a:p>
           <a:p>
@@ -22323,7 +22629,7 @@
                 </a:solidFill>
                 <a:latin typeface="Calibri"/>
               </a:rPr>
-              <a:t>The aim is to design that layer. Four objectives (SATR, APRR, MNCD, FCNP) and four research questions map onto it.</a:t>
+              <a:t>O2 APRR. Path agriculture_analyst → schema_planner (p=0.54) → tool_executor (p=0.66, terminal stop). Hop 0: Karnataka mandi, national mandi, MSP. Hop 2 live leftover: crop_production.</a:t>
             </a:r>
           </a:p>
           <a:p>
@@ -22341,7 +22647,7 @@
                 </a:solidFill>
                 <a:latin typeface="Calibri"/>
               </a:rPr>
-              <a:t>Methodology is specified per objective: ToolBench as ranking library; Dirichlet–Thompson routing; verified data.gov.in UUIDs with score-sum; Physarum-inspired prune with SATR write-back. Metric numbers are deferred.</a:t>
+              <a:t>O3 MNCD. mandi_prices agent-score 0.787 (liveBoost 0.45); karnataka 0.7789. Score-sum winner karnataka::agmarknet_ka tally=1.154. Live GET: 10 000 arrivals; 0 Wheat in Punjab today; 479 other live Punjab rows; Wheat in 133 live rows from MP, Rajasthan, UP, Gujarat, Maharashtra, West Bengal, Chhattisgarh. Shown mean modal Rs 2593/quintal (e.g. Bhindi, Dera Baba Nanak APMC, Rs 828, 07/09/2026).</a:t>
             </a:r>
           </a:p>
           <a:p>
@@ -22359,7 +22665,42 @@
                 </a:solidFill>
                 <a:latin typeface="Calibri"/>
               </a:rPr>
-              <a:t>Next step after approval. Freeze evaluation protocols, implement the closed loop, and report whatever the measurements show — including negative results.</a:t>
+              <a:t>O4 FCNP. 10 spans → keep 7; pin the AGMARKNET citation. W ← (1-λ)W + κ·1/L²/lat on the hop path. Next SATR is session-conditioned.</a:t>
+            </a:r>
+          </a:p>
+        </p:txBody>
+      </p:sp>
+      <p:sp>
+        <p:nvSpPr>
+          <p:cNvPr id="13" name="TextBox 12"/>
+          <p:cNvSpPr txBox="1"/>
+          <p:nvPr/>
+        </p:nvSpPr>
+        <p:spPr>
+          <a:xfrm>
+            <a:off x="365760" y="6199632"/>
+            <a:ext cx="11430000" cy="256032"/>
+          </a:xfrm>
+          <a:prstGeom prst="rect">
+            <a:avLst/>
+          </a:prstGeom>
+          <a:noFill/>
+        </p:spPr>
+        <p:txBody>
+          <a:bodyPr wrap="square">
+            <a:spAutoFit/>
+          </a:bodyPr>
+          <a:lstStyle/>
+          <a:p>
+            <a:pPr algn="l"/>
+            <a:r>
+              <a:rPr sz="1000" b="0">
+                <a:solidFill>
+                  <a:srgbClr val="5C4A4E"/>
+                </a:solidFill>
+                <a:latin typeface="Calibri"/>
+              </a:rPr>
+              <a:t>Lab trace 07 September 2026. Re-run on /walkthrough; rows change daily. No dummy prices.</a:t>
             </a:r>
           </a:p>
         </p:txBody>
@@ -22385,7 +22726,7 @@
           <a:lstStyle/>
           <a:p>
             <a:pPr algn="l"/>
-            <a:fld id="{46db4fd2-7cbb-477f-ac9b-5d84fc9dc9a7}" type="datetime3">
+            <a:fld id="{a63a17a5-25d5-4e97-8762-3fdf0fba6e94}" type="datetime3">
               <a:rPr lang="en-GB" sz="1000" dirty="0">
                 <a:solidFill>
                   <a:srgbClr val="C4A35A"/>
@@ -22419,7 +22760,7 @@
           <a:lstStyle/>
           <a:p>
             <a:pPr algn="r"/>
-            <a:fld id="{d8eec09d-0c95-418f-bc17-e755b339882d}" type="slidenum">
+            <a:fld id="{675ae9ba-56c2-49ea-a938-41c1b88d3b5b}" type="slidenum">
               <a:rPr lang="en-GB" sz="1000" dirty="0">
                 <a:solidFill>
                   <a:srgbClr val="C4A35A"/>
@@ -22435,7 +22776,7 @@
                 </a:solidFill>
                 <a:latin typeface="Calibri"/>
               </a:rPr>
-              <a:t> / 34</a:t>
+              <a:t> / 35</a:t>
             </a:r>
             <a:endParaRPr lang="en-GB" sz="1000"/>
           </a:p>
@@ -22767,7 +23108,7 @@
                 </a:solidFill>
                 <a:latin typeface="Calibri"/>
               </a:rPr>
-              <a:t>RESEARCH PROPOSAL  ·  References 1/3</a:t>
+              <a:t>RESEARCH PROPOSAL  ·  Conclusion</a:t>
             </a:r>
           </a:p>
         </p:txBody>
@@ -22802,7 +23143,7 @@
                 </a:solidFill>
                 <a:latin typeface="Calibri"/>
               </a:rPr>
-              <a:t>References (1/3) — multi-agent systems and tool learning</a:t>
+              <a:t>Conclusion</a:t>
             </a:r>
           </a:p>
         </p:txBody>
@@ -22816,6 +23157,41 @@
         <p:spPr>
           <a:xfrm>
             <a:off x="365760" y="1572768"/>
+            <a:ext cx="11430000" cy="384048"/>
+          </a:xfrm>
+          <a:prstGeom prst="rect">
+            <a:avLst/>
+          </a:prstGeom>
+          <a:noFill/>
+        </p:spPr>
+        <p:txBody>
+          <a:bodyPr wrap="square">
+            <a:spAutoFit/>
+          </a:bodyPr>
+          <a:lstStyle/>
+          <a:p>
+            <a:pPr algn="l"/>
+            <a:r>
+              <a:rPr sz="1300" b="0">
+                <a:solidFill>
+                  <a:srgbClr val="5C4A4E"/>
+                </a:solidFill>
+                <a:latin typeface="Calibri"/>
+              </a:rPr>
+              <a:t>ACRS is proposed as a structural orchestration layer. The contribution is the closed loop and the four named gaps — not a pre-committed leaderboard.</a:t>
+            </a:r>
+          </a:p>
+        </p:txBody>
+      </p:sp>
+      <p:sp>
+        <p:nvSpPr>
+          <p:cNvPr id="12" name="TextBox 11"/>
+          <p:cNvSpPr txBox="1"/>
+          <p:nvPr/>
+        </p:nvSpPr>
+        <p:spPr>
+          <a:xfrm>
+            <a:off x="365760" y="1993392"/>
             <a:ext cx="11430000" cy="3977639"/>
           </a:xfrm>
           <a:prstGeom prst="rect">
@@ -22843,7 +23219,7 @@
                 </a:solidFill>
                 <a:latin typeface="Calibri"/>
               </a:rPr>
-              <a:t>Wu, Q., Bansal, G., Zhang, J., Wu, Y., Li, B., Zhu, E., Jiang, L., Zhang, X., Zhang, S., Liu, J., Awadallah, A. H., White, R. W., Burger, D., and Wang, C. AutoGen: Enabling Next-Gen LLM Applications via Multi-Agent Conversations. Conference on Language Modeling (COLM) 2024. Also ICLR 2024 Workshop on Large Language Model (LLM) Agents (Best Paper). arXiv:2308.08155.</a:t>
+              <a:t>The literature (AutoGen, MetaGPT, ChatDev, CAMEL, ToolLLM, MasRouter, RouteLLM, PILOT, LLMLingua, PECAD) establishes conversation, tools, learned routing, and prompt compression. It does not establish SATR → APRR → MNCD → FCNP as one contract over live Indian OGD.</a:t>
             </a:r>
           </a:p>
           <a:p>
@@ -22861,7 +23237,7 @@
                 </a:solidFill>
                 <a:latin typeface="Calibri"/>
               </a:rPr>
-              <a:t>Hong, S., Zhuge, M., Chen, J., Zheng, X., Cheng, Y., Wang, J., Zhang, C., Wang, Z., Yau, S. K. S., Lin, Z., Zhou, L., Ran, C., Xiao, L., Wu, C., and Schmidhuber, J. MetaGPT: Meta Programming for A Multi-Agent Collaborative Framework. ICLR 2024.</a:t>
+              <a:t>The identified problem is five gaps: G1 session–tool fusion, G2 training-free specialist posterior, G3 live fail-loud Indian OGD, G4 conductance prune with write-back, G5 missing integration layer.</a:t>
             </a:r>
           </a:p>
           <a:p>
@@ -22879,7 +23255,7 @@
                 </a:solidFill>
                 <a:latin typeface="Calibri"/>
               </a:rPr>
-              <a:t>Li, G., Hammoud, H. A. A. K., Itani, H., Khizbullin, D., and Ghanem, B. CAMEL: Communicative Agents for “Mind” Exploration of Large Language Model Society. NeurIPS 2023.</a:t>
+              <a:t>The aim is to design that layer. Four objectives (SATR, APRR, MNCD, FCNP) and four research questions map onto it.</a:t>
             </a:r>
           </a:p>
           <a:p>
@@ -22897,7 +23273,7 @@
                 </a:solidFill>
                 <a:latin typeface="Calibri"/>
               </a:rPr>
-              <a:t>Qian, C., Liu, W., Liu, H., Chen, N., Dang, Y., Li, J., Yang, C., Chen, W., Su, Y., Cong, X., Xu, J., Li, D., Liu, Z., and Sun, M. ChatDev: Communicative Agents for Software Development. ACL 2024 (long), pages 15174–15186. doi:10.18653/v1/2024.acl-long.810.</a:t>
+              <a:t>Methodology is specified per objective: ToolBench as ranking library; Dirichlet–Thompson routing; verified data.gov.in UUIDs with score-sum; Physarum-inspired prune with SATR write-back. Metric numbers are deferred.</a:t>
             </a:r>
           </a:p>
           <a:p>
@@ -22915,25 +23291,7 @@
                 </a:solidFill>
                 <a:latin typeface="Calibri"/>
               </a:rPr>
-              <a:t>Qin, Y., Liang, S., Ye, Y., Zhu, K., Yan, L., Lu, Y., Lin, Y., Cong, X., Tang, X., Qian, B., Zhao, S., Hong, L., Tian, R., Xie, R., Zhou, J., Gerstein, M., Li, D., Liu, Z., and Sun, M. ToolLLM: Facilitating Large Language Models to Master 16000+ Real-world APIs. ICLR 2024.</a:t>
-            </a:r>
-          </a:p>
-          <a:p>
-            <a:pPr>
-              <a:spcAft>
-                <a:spcPts val="600"/>
-              </a:spcAft>
-              <a:buFont typeface="Arial"/>
-              <a:buChar char="•"/>
-            </a:pPr>
-            <a:r>
-              <a:rPr sz="1300">
-                <a:solidFill>
-                  <a:srgbClr val="1A1214"/>
-                </a:solidFill>
-                <a:latin typeface="Calibri"/>
-              </a:rPr>
-              <a:t>Zheng, Y., Li, P., Liu, W., Liu, Y., Luan, J., and Wang, B. ToolRerank: Adaptive and Hierarchy-Aware Reranking for Tool Retrieval. LREC-COLING 2024, pages 16263–16273. ACL Anthology 2024.lrec-main.1413.</a:t>
+              <a:t>Next step after approval. Freeze evaluation protocols, implement the closed loop, and report whatever the measurements show — including negative results.</a:t>
             </a:r>
           </a:p>
         </p:txBody>
@@ -22959,7 +23317,7 @@
           <a:lstStyle/>
           <a:p>
             <a:pPr algn="l"/>
-            <a:fld id="{8c1053ec-1a1e-4656-a84f-e31a00fc911f}" type="datetime3">
+            <a:fld id="{56be0562-10e0-4c31-b0a6-0062a30b3373}" type="datetime3">
               <a:rPr lang="en-GB" sz="1000" dirty="0">
                 <a:solidFill>
                   <a:srgbClr val="C4A35A"/>
@@ -22993,7 +23351,7 @@
           <a:lstStyle/>
           <a:p>
             <a:pPr algn="r"/>
-            <a:fld id="{8af43032-f8e9-4173-9e7e-6bc93ac293cc}" type="slidenum">
+            <a:fld id="{b979e46a-fa89-4efe-bdb2-e9eeed422dbc}" type="slidenum">
               <a:rPr lang="en-GB" sz="1000" dirty="0">
                 <a:solidFill>
                   <a:srgbClr val="C4A35A"/>
@@ -23009,7 +23367,7 @@
                 </a:solidFill>
                 <a:latin typeface="Calibri"/>
               </a:rPr>
-              <a:t> / 34</a:t>
+              <a:t> / 35</a:t>
             </a:r>
             <a:endParaRPr lang="en-GB" sz="1000"/>
           </a:p>
@@ -23341,7 +23699,7 @@
                 </a:solidFill>
                 <a:latin typeface="Calibri"/>
               </a:rPr>
-              <a:t>RESEARCH PROPOSAL  ·  References 2/3</a:t>
+              <a:t>RESEARCH PROPOSAL  ·  References 1/3</a:t>
             </a:r>
           </a:p>
         </p:txBody>
@@ -23376,7 +23734,7 @@
                 </a:solidFill>
                 <a:latin typeface="Calibri"/>
               </a:rPr>
-              <a:t>References (2/3) — routing, compression, reasoning, biology</a:t>
+              <a:t>References (1/3) — multi-agent systems and tool learning</a:t>
             </a:r>
           </a:p>
         </p:txBody>
@@ -23417,7 +23775,7 @@
                 </a:solidFill>
                 <a:latin typeface="Calibri"/>
               </a:rPr>
-              <a:t>Ong, I., Almahairi, A., Wu, V., Chiang, W.-L., Wu, T., Gonzalez, J. E., Kadous, M. W., and Stoica, I. RouteLLM: Learning to Route LLMs from Preference Data. ICLR 2025. arXiv:2406.18665.</a:t>
+              <a:t>Wu, Q., Bansal, G., Zhang, J., Wu, Y., Li, B., Zhu, E., Jiang, L., Zhang, X., Zhang, S., Liu, J., Awadallah, A. H., White, R. W., Burger, D., and Wang, C. AutoGen: Enabling Next-Gen LLM Applications via Multi-Agent Conversations. Conference on Language Modeling (COLM) 2024. Also ICLR 2024 Workshop on Large Language Model (LLM) Agents (Best Paper). arXiv:2308.08155.</a:t>
             </a:r>
           </a:p>
           <a:p>
@@ -23435,7 +23793,7 @@
                 </a:solidFill>
                 <a:latin typeface="Calibri"/>
               </a:rPr>
-              <a:t>Panda, P., Magazine, R., Devaguptapu, C., Takemori, S., and Sharma, V. Adaptive LLM Routing under Budget Constraints. Findings of the Association for Computational Linguistics: EMNLP 2025, pages 23934–23949. doi:10.18653/v1/2025.findings-emnlp.1301.</a:t>
+              <a:t>Hong, S., Zhuge, M., Chen, J., Zheng, X., Cheng, Y., Wang, J., Zhang, C., Wang, Z., Yau, S. K. S., Lin, Z., Zhou, L., Ran, C., Xiao, L., Wu, C., and Schmidhuber, J. MetaGPT: Meta Programming for A Multi-Agent Collaborative Framework. ICLR 2024.</a:t>
             </a:r>
           </a:p>
           <a:p>
@@ -23453,7 +23811,7 @@
                 </a:solidFill>
                 <a:latin typeface="Calibri"/>
               </a:rPr>
-              <a:t>Yue, Y., Zhang, G., Liu, B., Wan, G., Wang, K., Cheng, D., and Qi, Y. MasRouter: Learning to Route LLMs for Multi-Agent Systems. ACL 2025 (long), pages 15549–15572. doi:10.18653/v1/2025.acl-long.757.</a:t>
+              <a:t>Li, G., Hammoud, H. A. A. K., Itani, H., Khizbullin, D., and Ghanem, B. CAMEL: Communicative Agents for “Mind” Exploration of Large Language Model Society. NeurIPS 2023.</a:t>
             </a:r>
           </a:p>
           <a:p>
@@ -23471,7 +23829,7 @@
                 </a:solidFill>
                 <a:latin typeface="Calibri"/>
               </a:rPr>
-              <a:t>Jiang, H., Wu, Q., Lin, C.-Y., Yang, Y., and Qiu, L. LLMLingua: Compressing Prompts for Accelerated Inference of Large Language Models. EMNLP 2023, pages 13358–13376. doi:10.18653/v1/2023.emnlp-main.825.</a:t>
+              <a:t>Qian, C., Liu, W., Liu, H., Chen, N., Dang, Y., Li, J., Yang, C., Chen, W., Su, Y., Cong, X., Xu, J., Li, D., Liu, Z., and Sun, M. ChatDev: Communicative Agents for Software Development. ACL 2024 (long), pages 15174–15186. doi:10.18653/v1/2024.acl-long.810.</a:t>
             </a:r>
           </a:p>
           <a:p>
@@ -23489,7 +23847,7 @@
                 </a:solidFill>
                 <a:latin typeface="Calibri"/>
               </a:rPr>
-              <a:t>Wei, J., Wang, X., Schuurmans, D., Bosma, M., Ichter, B., Xia, F., Chi, E., Le, Q., and Zhou, D. Chain-of-Thought Prompting Elicits Reasoning in Large Language Models. NeurIPS 2022.</a:t>
+              <a:t>Qin, Y., Liang, S., Ye, Y., Zhu, K., Yan, L., Lu, Y., Lin, Y., Cong, X., Tang, X., Qian, B., Zhao, S., Hong, L., Tian, R., Xie, R., Zhou, J., Gerstein, M., Li, D., Liu, Z., and Sun, M. ToolLLM: Facilitating Large Language Models to Master 16000+ Real-world APIs. ICLR 2024.</a:t>
             </a:r>
           </a:p>
           <a:p>
@@ -23507,43 +23865,7 @@
                 </a:solidFill>
                 <a:latin typeface="Calibri"/>
               </a:rPr>
-              <a:t>Yao, S., Zhao, J., Yu, D., Du, N., Shafran, I., Narasimhan, K., and Cao, Y. ReAct: Synergizing Reasoning and Acting in Language Models. ICLR 2023.</a:t>
-            </a:r>
-          </a:p>
-          <a:p>
-            <a:pPr>
-              <a:spcAft>
-                <a:spcPts val="600"/>
-              </a:spcAft>
-              <a:buFont typeface="Arial"/>
-              <a:buChar char="•"/>
-            </a:pPr>
-            <a:r>
-              <a:rPr sz="1300">
-                <a:solidFill>
-                  <a:srgbClr val="1A1214"/>
-                </a:solidFill>
-                <a:latin typeface="Calibri"/>
-              </a:rPr>
-              <a:t>Yao, S., Yu, D., Zhao, J., Shafran, I., Griffiths, T. L., Cao, Y., and Narasimhan, K. Tree of Thoughts: Deliberate Problem Solving with Large Language Models. NeurIPS 2023.</a:t>
-            </a:r>
-          </a:p>
-          <a:p>
-            <a:pPr>
-              <a:spcAft>
-                <a:spcPts val="600"/>
-              </a:spcAft>
-              <a:buFont typeface="Arial"/>
-              <a:buChar char="•"/>
-            </a:pPr>
-            <a:r>
-              <a:rPr sz="1300">
-                <a:solidFill>
-                  <a:srgbClr val="1A1214"/>
-                </a:solidFill>
-                <a:latin typeface="Calibri"/>
-              </a:rPr>
-              <a:t>Tero, A., Takagi, S., Saigusa, T., Ito, K., Bebber, D. P., Fricker, M. D., Yumiki, K., Kobayashi, R., and Nakagaki, T. Rules for Biologically Inspired Adaptive Network Design. Science 327(5964):439–442, 2010. doi:10.1126/science.1177894.</a:t>
+              <a:t>Zheng, Y., Li, P., Liu, W., Liu, Y., Luan, J., and Wang, B. ToolRerank: Adaptive and Hierarchy-Aware Reranking for Tool Retrieval. LREC-COLING 2024, pages 16263–16273. ACL Anthology 2024.lrec-main.1413.</a:t>
             </a:r>
           </a:p>
         </p:txBody>
@@ -23569,7 +23891,7 @@
           <a:lstStyle/>
           <a:p>
             <a:pPr algn="l"/>
-            <a:fld id="{f51bfe64-c6e9-494e-88a4-b2ac55ec030d}" type="datetime3">
+            <a:fld id="{ea889bef-c30d-49ca-9628-5ab55dfea395}" type="datetime3">
               <a:rPr lang="en-GB" sz="1000" dirty="0">
                 <a:solidFill>
                   <a:srgbClr val="C4A35A"/>
@@ -23603,7 +23925,7 @@
           <a:lstStyle/>
           <a:p>
             <a:pPr algn="r"/>
-            <a:fld id="{45a92c3f-8a80-4f0f-93a8-9bb48af7497c}" type="slidenum">
+            <a:fld id="{b553dc07-6b45-4d1d-a949-dadc9f1a6737}" type="slidenum">
               <a:rPr lang="en-GB" sz="1000" dirty="0">
                 <a:solidFill>
                   <a:srgbClr val="C4A35A"/>
@@ -23619,7 +23941,7 @@
                 </a:solidFill>
                 <a:latin typeface="Calibri"/>
               </a:rPr>
-              <a:t> / 34</a:t>
+              <a:t> / 35</a:t>
             </a:r>
             <a:endParaRPr lang="en-GB" sz="1000"/>
           </a:p>
@@ -23951,7 +24273,7 @@
                 </a:solidFill>
                 <a:latin typeface="Calibri"/>
               </a:rPr>
-              <a:t>RESEARCH PROPOSAL  ·  References 3/3</a:t>
+              <a:t>RESEARCH PROPOSAL  ·  References 2/3</a:t>
             </a:r>
           </a:p>
         </p:txBody>
@@ -23986,7 +24308,7 @@
                 </a:solidFill>
                 <a:latin typeface="Calibri"/>
               </a:rPr>
-              <a:t>References (3/3) — memory, tools, Indian agricultural data</a:t>
+              <a:t>References (2/3) — routing, compression, reasoning, biology</a:t>
             </a:r>
           </a:p>
         </p:txBody>
@@ -24027,7 +24349,7 @@
                 </a:solidFill>
                 <a:latin typeface="Calibri"/>
               </a:rPr>
-              <a:t>Park, J. S., O’Brien, J. C., Cai, C. J., Morris, M. R., Liang, P., and Bernstein, M. S. Generative Agents: Interactive Simulacra of Human Behavior. UIST 2023 (Best Paper). doi:10.1145/3586183.3606763.</a:t>
+              <a:t>Ong, I., Almahairi, A., Wu, V., Chiang, W.-L., Wu, T., Gonzalez, J. E., Kadous, M. W., and Stoica, I. RouteLLM: Learning to Route LLMs from Preference Data. ICLR 2025. arXiv:2406.18665.</a:t>
             </a:r>
           </a:p>
           <a:p>
@@ -24045,7 +24367,7 @@
                 </a:solidFill>
                 <a:latin typeface="Calibri"/>
               </a:rPr>
-              <a:t>Shinn, N., Cassano, F., Gopinath, A., Narasimhan, K., and Yao, S. Reflexion: Language Agents with Verbal Reinforcement Learning. NeurIPS 2023.</a:t>
+              <a:t>Panda, P., Magazine, R., Devaguptapu, C., Takemori, S., and Sharma, V. Adaptive LLM Routing under Budget Constraints. Findings of the Association for Computational Linguistics: EMNLP 2025, pages 23934–23949. doi:10.18653/v1/2025.findings-emnlp.1301.</a:t>
             </a:r>
           </a:p>
           <a:p>
@@ -24063,7 +24385,7 @@
                 </a:solidFill>
                 <a:latin typeface="Calibri"/>
               </a:rPr>
-              <a:t>Shen, Y., Song, K., Tan, X., Li, D., Lu, W., and Zhuang, Y. HuggingGPT: Solving AI Tasks with ChatGPT and its Friends in Hugging Face. NeurIPS 2023.</a:t>
+              <a:t>Yue, Y., Zhang, G., Liu, B., Wan, G., Wang, K., Cheng, D., and Qi, Y. MasRouter: Learning to Route LLMs for Multi-Agent Systems. ACL 2025 (long), pages 15549–15572. doi:10.18653/v1/2025.acl-long.757.</a:t>
             </a:r>
           </a:p>
           <a:p>
@@ -24081,7 +24403,7 @@
                 </a:solidFill>
                 <a:latin typeface="Calibri"/>
               </a:rPr>
-              <a:t>Schick, T., Dwivedi-Yu, J., Dessì, R., Raileanu, R., Lomeli, M., Hambro, E., Zettlemoyer, L., Cancedda, N., and Scialom, T. Toolformer: Language Models Can Teach Themselves to Use Tools. NeurIPS 2023.</a:t>
+              <a:t>Jiang, H., Wu, Q., Lin, C.-Y., Yang, Y., and Qiu, L. LLMLingua: Compressing Prompts for Accelerated Inference of Large Language Models. EMNLP 2023, pages 13358–13376. doi:10.18653/v1/2023.emnlp-main.825.</a:t>
             </a:r>
           </a:p>
           <a:p>
@@ -24099,7 +24421,7 @@
                 </a:solidFill>
                 <a:latin typeface="Calibri"/>
               </a:rPr>
-              <a:t>Guo, H., Woodruff, A., and Yadav, A. Improving Lives of Indebted Farmers Using Deep Learning: Predicting Agricultural Produce Prices Using Convolutional Neural Networks (PECAD). AAAI 2020. doi:10.1609/aaai.v34i08.7039. AGMARKNET scrape for price prediction; cited here as Indian OGD precedent, not as a baseline this proposal claims to beat.</a:t>
+              <a:t>Wei, J., Wang, X., Schuurmans, D., Bosma, M., Ichter, B., Xia, F., Chi, E., Le, Q., and Zhou, D. Chain-of-Thought Prompting Elicits Reasoning in Large Language Models. NeurIPS 2022.</a:t>
             </a:r>
           </a:p>
           <a:p>
@@ -24117,42 +24439,43 @@
                 </a:solidFill>
                 <a:latin typeface="Calibri"/>
               </a:rPr>
-              <a:t>Government of India. Open Government Data Platform India (data.gov.in); AGMARKNET resource 9ef84268-d588-465a-a308-a864a43d0070; Directorate of Economics and Statistics crop production; IMD rainfall series; Government Open Data License — India (GODL-India).</a:t>
-            </a:r>
-          </a:p>
-        </p:txBody>
-      </p:sp>
-      <p:sp>
-        <p:nvSpPr>
-          <p:cNvPr id="12" name="TextBox 11"/>
-          <p:cNvSpPr txBox="1"/>
-          <p:nvPr/>
-        </p:nvSpPr>
-        <p:spPr>
-          <a:xfrm>
-            <a:off x="365760" y="6199632"/>
-            <a:ext cx="11430000" cy="256032"/>
-          </a:xfrm>
-          <a:prstGeom prst="rect">
-            <a:avLst/>
-          </a:prstGeom>
-          <a:noFill/>
-        </p:spPr>
-        <p:txBody>
-          <a:bodyPr wrap="square">
-            <a:spAutoFit/>
-          </a:bodyPr>
-          <a:lstStyle/>
-          <a:p>
-            <a:pPr algn="l"/>
-            <a:r>
-              <a:rPr sz="1000" b="0">
-                <a:solidFill>
-                  <a:srgbClr val="5C4A4E"/>
-                </a:solidFill>
-                <a:latin typeface="Calibri"/>
-              </a:rPr>
-              <a:t>CrewAI is an engineering framework without a flagship peer-reviewed paper in this list; AutoGen and MetaGPT are the MAS citations.</a:t>
+              <a:t>Yao, S., Zhao, J., Yu, D., Du, N., Shafran, I., Narasimhan, K., and Cao, Y. ReAct: Synergizing Reasoning and Acting in Language Models. ICLR 2023.</a:t>
+            </a:r>
+          </a:p>
+          <a:p>
+            <a:pPr>
+              <a:spcAft>
+                <a:spcPts val="600"/>
+              </a:spcAft>
+              <a:buFont typeface="Arial"/>
+              <a:buChar char="•"/>
+            </a:pPr>
+            <a:r>
+              <a:rPr sz="1300">
+                <a:solidFill>
+                  <a:srgbClr val="1A1214"/>
+                </a:solidFill>
+                <a:latin typeface="Calibri"/>
+              </a:rPr>
+              <a:t>Yao, S., Yu, D., Zhao, J., Shafran, I., Griffiths, T. L., Cao, Y., and Narasimhan, K. Tree of Thoughts: Deliberate Problem Solving with Large Language Models. NeurIPS 2023.</a:t>
+            </a:r>
+          </a:p>
+          <a:p>
+            <a:pPr>
+              <a:spcAft>
+                <a:spcPts val="600"/>
+              </a:spcAft>
+              <a:buFont typeface="Arial"/>
+              <a:buChar char="•"/>
+            </a:pPr>
+            <a:r>
+              <a:rPr sz="1300">
+                <a:solidFill>
+                  <a:srgbClr val="1A1214"/>
+                </a:solidFill>
+                <a:latin typeface="Calibri"/>
+              </a:rPr>
+              <a:t>Tero, A., Takagi, S., Saigusa, T., Ito, K., Bebber, D. P., Fricker, M. D., Yumiki, K., Kobayashi, R., and Nakagaki, T. Rules for Biologically Inspired Adaptive Network Design. Science 327(5964):439–442, 2010. doi:10.1126/science.1177894.</a:t>
             </a:r>
           </a:p>
         </p:txBody>
@@ -24178,7 +24501,7 @@
           <a:lstStyle/>
           <a:p>
             <a:pPr algn="l"/>
-            <a:fld id="{7f12abc3-f1f4-4930-b10e-f487ad16a000}" type="datetime3">
+            <a:fld id="{d87aaa26-533f-4e32-98d5-6fe4c717a3cc}" type="datetime3">
               <a:rPr lang="en-GB" sz="1000" dirty="0">
                 <a:solidFill>
                   <a:srgbClr val="C4A35A"/>
@@ -24212,7 +24535,7 @@
           <a:lstStyle/>
           <a:p>
             <a:pPr algn="r"/>
-            <a:fld id="{0e930b78-bfff-43ff-a3a5-764bb32ffb50}" type="slidenum">
+            <a:fld id="{17a5b390-b2b2-410b-a6cc-df6668ed6dc3}" type="slidenum">
               <a:rPr lang="en-GB" sz="1000" dirty="0">
                 <a:solidFill>
                   <a:srgbClr val="C4A35A"/>
@@ -24228,7 +24551,7 @@
                 </a:solidFill>
                 <a:latin typeface="Calibri"/>
               </a:rPr>
-              <a:t> / 34</a:t>
+              <a:t> / 35</a:t>
             </a:r>
             <a:endParaRPr lang="en-GB" sz="1000"/>
           </a:p>
@@ -24560,7 +24883,7 @@
                 </a:solidFill>
                 <a:latin typeface="Calibri"/>
               </a:rPr>
-              <a:t>RESEARCH PROPOSAL  ·  Thank you</a:t>
+              <a:t>RESEARCH PROPOSAL  ·  References 3/3</a:t>
             </a:r>
           </a:p>
         </p:txBody>
@@ -24595,7 +24918,7 @@
                 </a:solidFill>
                 <a:latin typeface="Calibri"/>
               </a:rPr>
-              <a:t>Thank you</a:t>
+              <a:t>References (3/3) — memory, tools, Indian agricultural data</a:t>
             </a:r>
           </a:p>
         </p:txBody>
@@ -24609,41 +24932,6 @@
         <p:spPr>
           <a:xfrm>
             <a:off x="365760" y="1572768"/>
-            <a:ext cx="11430000" cy="384048"/>
-          </a:xfrm>
-          <a:prstGeom prst="rect">
-            <a:avLst/>
-          </a:prstGeom>
-          <a:noFill/>
-        </p:spPr>
-        <p:txBody>
-          <a:bodyPr wrap="square">
-            <a:spAutoFit/>
-          </a:bodyPr>
-          <a:lstStyle/>
-          <a:p>
-            <a:pPr algn="l"/>
-            <a:r>
-              <a:rPr sz="1300" b="0">
-                <a:solidFill>
-                  <a:srgbClr val="5C4A4E"/>
-                </a:solidFill>
-                <a:latin typeface="Calibri"/>
-              </a:rPr>
-              <a:t>Adaptive Context Reasoning System — a research programme, not a performance number.</a:t>
-            </a:r>
-          </a:p>
-        </p:txBody>
-      </p:sp>
-      <p:sp>
-        <p:nvSpPr>
-          <p:cNvPr id="12" name="TextBox 11"/>
-          <p:cNvSpPr txBox="1"/>
-          <p:nvPr/>
-        </p:nvSpPr>
-        <p:spPr>
-          <a:xfrm>
-            <a:off x="365760" y="1993392"/>
             <a:ext cx="11430000" cy="3977639"/>
           </a:xfrm>
           <a:prstGeom prst="rect">
@@ -24671,7 +24959,7 @@
                 </a:solidFill>
                 <a:latin typeface="Calibri"/>
               </a:rPr>
-              <a:t>Presented By: Jenisha T</a:t>
+              <a:t>Park, J. S., O’Brien, J. C., Cai, C. J., Morris, M. R., Liang, P., and Bernstein, M. S. Generative Agents: Interactive Simulacra of Human Behavior. UIST 2023 (Best Paper). doi:10.1145/3586183.3606763.</a:t>
             </a:r>
           </a:p>
           <a:p>
@@ -24689,7 +24977,7 @@
                 </a:solidFill>
                 <a:latin typeface="Calibri"/>
               </a:rPr>
-              <a:t>(Reg. No. 24ETRP720001)</a:t>
+              <a:t>Shinn, N., Cassano, F., Gopinath, A., Narasimhan, K., and Yao, S. Reflexion: Language Agents with Verbal Reinforcement Learning. NeurIPS 2023.</a:t>
             </a:r>
           </a:p>
           <a:p>
@@ -24707,7 +24995,7 @@
                 </a:solidFill>
                 <a:latin typeface="Calibri"/>
               </a:rPr>
-              <a:t>Supervisor: Dr. Jyothi A P</a:t>
+              <a:t>Shen, Y., Song, K., Tan, X., Li, D., Lu, W., and Zhuang, Y. HuggingGPT: Solving AI Tasks with ChatGPT and its Friends in Hugging Face. NeurIPS 2023.</a:t>
             </a:r>
           </a:p>
           <a:p>
@@ -24725,7 +25013,7 @@
                 </a:solidFill>
                 <a:latin typeface="Calibri"/>
               </a:rPr>
-              <a:t>Department of Computer Science and Engineering</a:t>
+              <a:t>Schick, T., Dwivedi-Yu, J., Dessì, R., Raileanu, R., Lomeli, M., Hambro, E., Zettlemoyer, L., Cancedda, N., and Scialom, T. Toolformer: Language Models Can Teach Themselves to Use Tools. NeurIPS 2023.</a:t>
             </a:r>
           </a:p>
           <a:p>
@@ -24743,7 +25031,7 @@
                 </a:solidFill>
                 <a:latin typeface="Calibri"/>
               </a:rPr>
-              <a:t>Faculty of Engineering and Technology, MSRUAS</a:t>
+              <a:t>Guo, H., Woodruff, A., and Yadav, A. Improving Lives of Indebted Farmers Using Deep Learning: Predicting Agricultural Produce Prices Using Convolutional Neural Networks (PECAD). AAAI 2020. doi:10.1609/aaai.v34i08.7039. AGMARKNET scrape for price prediction; cited here as Indian OGD precedent, not as a baseline this proposal claims to beat.</a:t>
             </a:r>
           </a:p>
           <a:p>
@@ -24761,7 +25049,42 @@
                 </a:solidFill>
                 <a:latin typeface="Calibri"/>
               </a:rPr>
-              <a:t>jenisha.t@msruas.ac.in</a:t>
+              <a:t>Government of India. Open Government Data Platform India (data.gov.in); AGMARKNET resource 9ef84268-d588-465a-a308-a864a43d0070; Directorate of Economics and Statistics crop production; IMD rainfall series; Government Open Data License — India (GODL-India).</a:t>
+            </a:r>
+          </a:p>
+        </p:txBody>
+      </p:sp>
+      <p:sp>
+        <p:nvSpPr>
+          <p:cNvPr id="12" name="TextBox 11"/>
+          <p:cNvSpPr txBox="1"/>
+          <p:nvPr/>
+        </p:nvSpPr>
+        <p:spPr>
+          <a:xfrm>
+            <a:off x="365760" y="6199632"/>
+            <a:ext cx="11430000" cy="256032"/>
+          </a:xfrm>
+          <a:prstGeom prst="rect">
+            <a:avLst/>
+          </a:prstGeom>
+          <a:noFill/>
+        </p:spPr>
+        <p:txBody>
+          <a:bodyPr wrap="square">
+            <a:spAutoFit/>
+          </a:bodyPr>
+          <a:lstStyle/>
+          <a:p>
+            <a:pPr algn="l"/>
+            <a:r>
+              <a:rPr sz="1000" b="0">
+                <a:solidFill>
+                  <a:srgbClr val="5C4A4E"/>
+                </a:solidFill>
+                <a:latin typeface="Calibri"/>
+              </a:rPr>
+              <a:t>CrewAI is an engineering framework without a flagship peer-reviewed paper in this list; AutoGen and MetaGPT are the MAS citations.</a:t>
             </a:r>
           </a:p>
         </p:txBody>
@@ -24787,7 +25110,7 @@
           <a:lstStyle/>
           <a:p>
             <a:pPr algn="l"/>
-            <a:fld id="{d7481d26-3ceb-4d32-beb6-d91a25f01014}" type="datetime3">
+            <a:fld id="{7d4c7bb1-9982-48b0-8fa7-d6599b654522}" type="datetime3">
               <a:rPr lang="en-GB" sz="1000" dirty="0">
                 <a:solidFill>
                   <a:srgbClr val="C4A35A"/>
@@ -24821,7 +25144,7 @@
           <a:lstStyle/>
           <a:p>
             <a:pPr algn="r"/>
-            <a:fld id="{eecbb907-bb05-4ee9-a2d8-84e822ab60ff}" type="slidenum">
+            <a:fld id="{a46db84a-d5d5-4161-8225-b424423773a1}" type="slidenum">
               <a:rPr lang="en-GB" sz="1000" dirty="0">
                 <a:solidFill>
                   <a:srgbClr val="C4A35A"/>
@@ -24837,7 +25160,616 @@
                 </a:solidFill>
                 <a:latin typeface="Calibri"/>
               </a:rPr>
-              <a:t> / 34</a:t>
+              <a:t> / 35</a:t>
+            </a:r>
+            <a:endParaRPr lang="en-GB" sz="1000"/>
+          </a:p>
+        </p:txBody>
+      </p:sp>
+    </p:spTree>
+  </p:cSld>
+  <p:clrMapOvr>
+    <a:masterClrMapping/>
+  </p:clrMapOvr>
+  <p:hf sldNum="1" hdr="0" ftr="1" dt="1"/>
+</p:sld>
+</file>
+
+<file path=ppt/slides/slide35.xml><?xml version="1.0" encoding="utf-8"?>
+<p:sld xmlns:a="http://schemas.openxmlformats.org/drawingml/2006/main" xmlns:p="http://schemas.openxmlformats.org/presentationml/2006/main" xmlns:r="http://schemas.openxmlformats.org/officeDocument/2006/relationships">
+  <p:cSld>
+    <p:spTree>
+      <p:nvGrpSpPr>
+        <p:cNvPr id="1" name=""/>
+        <p:cNvGrpSpPr/>
+        <p:nvPr/>
+      </p:nvGrpSpPr>
+      <p:grpSpPr/>
+      <p:sp>
+        <p:nvSpPr>
+          <p:cNvPr id="2" name="Rectangle 1"/>
+          <p:cNvSpPr/>
+          <p:nvPr/>
+        </p:nvSpPr>
+        <p:spPr>
+          <a:xfrm>
+            <a:off x="0" y="0"/>
+            <a:ext cx="12191695" cy="658368"/>
+          </a:xfrm>
+          <a:prstGeom prst="rect">
+            <a:avLst/>
+          </a:prstGeom>
+          <a:solidFill>
+            <a:srgbClr val="7C1D2E"/>
+          </a:solidFill>
+          <a:ln>
+            <a:noFill/>
+          </a:ln>
+        </p:spPr>
+        <p:style>
+          <a:lnRef idx="1">
+            <a:schemeClr val="accent1"/>
+          </a:lnRef>
+          <a:fillRef idx="3">
+            <a:schemeClr val="accent1"/>
+          </a:fillRef>
+          <a:effectRef idx="2">
+            <a:schemeClr val="accent1"/>
+          </a:effectRef>
+          <a:fontRef idx="minor">
+            <a:schemeClr val="lt1"/>
+          </a:fontRef>
+        </p:style>
+        <p:txBody>
+          <a:bodyPr rtlCol="0" anchor="ctr"/>
+          <a:lstStyle/>
+          <a:p>
+            <a:pPr algn="ctr"/>
+          </a:p>
+        </p:txBody>
+      </p:sp>
+      <p:sp>
+        <p:nvSpPr>
+          <p:cNvPr id="3" name="Rectangle 2"/>
+          <p:cNvSpPr/>
+          <p:nvPr/>
+        </p:nvSpPr>
+        <p:spPr>
+          <a:xfrm>
+            <a:off x="0" y="658368"/>
+            <a:ext cx="12191695" cy="54864"/>
+          </a:xfrm>
+          <a:prstGeom prst="rect">
+            <a:avLst/>
+          </a:prstGeom>
+          <a:solidFill>
+            <a:srgbClr val="C4A35A"/>
+          </a:solidFill>
+          <a:ln>
+            <a:noFill/>
+          </a:ln>
+        </p:spPr>
+        <p:style>
+          <a:lnRef idx="1">
+            <a:schemeClr val="accent1"/>
+          </a:lnRef>
+          <a:fillRef idx="3">
+            <a:schemeClr val="accent1"/>
+          </a:fillRef>
+          <a:effectRef idx="2">
+            <a:schemeClr val="accent1"/>
+          </a:effectRef>
+          <a:fontRef idx="minor">
+            <a:schemeClr val="lt1"/>
+          </a:fontRef>
+        </p:style>
+        <p:txBody>
+          <a:bodyPr rtlCol="0" anchor="ctr"/>
+          <a:lstStyle/>
+          <a:p>
+            <a:pPr algn="ctr"/>
+          </a:p>
+        </p:txBody>
+      </p:sp>
+      <p:sp>
+        <p:nvSpPr>
+          <p:cNvPr id="4" name="Rectangle 3"/>
+          <p:cNvSpPr/>
+          <p:nvPr/>
+        </p:nvSpPr>
+        <p:spPr>
+          <a:xfrm>
+            <a:off x="0" y="6510528"/>
+            <a:ext cx="12191695" cy="347472"/>
+          </a:xfrm>
+          <a:prstGeom prst="rect">
+            <a:avLst/>
+          </a:prstGeom>
+          <a:solidFill>
+            <a:srgbClr val="7C1D2E"/>
+          </a:solidFill>
+          <a:ln>
+            <a:noFill/>
+          </a:ln>
+        </p:spPr>
+        <p:style>
+          <a:lnRef idx="1">
+            <a:schemeClr val="accent1"/>
+          </a:lnRef>
+          <a:fillRef idx="3">
+            <a:schemeClr val="accent1"/>
+          </a:fillRef>
+          <a:effectRef idx="2">
+            <a:schemeClr val="accent1"/>
+          </a:effectRef>
+          <a:fontRef idx="minor">
+            <a:schemeClr val="lt1"/>
+          </a:fontRef>
+        </p:style>
+        <p:txBody>
+          <a:bodyPr rtlCol="0" anchor="ctr"/>
+          <a:lstStyle/>
+          <a:p>
+            <a:pPr algn="ctr"/>
+          </a:p>
+        </p:txBody>
+      </p:sp>
+      <p:sp>
+        <p:nvSpPr>
+          <p:cNvPr id="5" name="TextBox 4"/>
+          <p:cNvSpPr txBox="1"/>
+          <p:nvPr/>
+        </p:nvSpPr>
+        <p:spPr>
+          <a:xfrm>
+            <a:off x="292608" y="73152"/>
+            <a:ext cx="11521440" cy="292608"/>
+          </a:xfrm>
+          <a:prstGeom prst="rect">
+            <a:avLst/>
+          </a:prstGeom>
+          <a:noFill/>
+        </p:spPr>
+        <p:txBody>
+          <a:bodyPr wrap="square">
+            <a:spAutoFit/>
+          </a:bodyPr>
+          <a:lstStyle/>
+          <a:p>
+            <a:pPr algn="l"/>
+            <a:r>
+              <a:rPr sz="1300" b="1">
+                <a:solidFill>
+                  <a:srgbClr val="FFFFFF"/>
+                </a:solidFill>
+                <a:latin typeface="Calibri"/>
+              </a:rPr>
+              <a:t>M. S. RAMAIAH UNIVERSITY OF APPLIED SCIENCES</a:t>
+            </a:r>
+          </a:p>
+        </p:txBody>
+      </p:sp>
+      <p:sp>
+        <p:nvSpPr>
+          <p:cNvPr id="6" name="TextBox 5"/>
+          <p:cNvSpPr txBox="1"/>
+          <p:nvPr/>
+        </p:nvSpPr>
+        <p:spPr>
+          <a:xfrm>
+            <a:off x="292608" y="347472"/>
+            <a:ext cx="11521440" cy="256032"/>
+          </a:xfrm>
+          <a:prstGeom prst="rect">
+            <a:avLst/>
+          </a:prstGeom>
+          <a:noFill/>
+        </p:spPr>
+        <p:txBody>
+          <a:bodyPr wrap="square">
+            <a:spAutoFit/>
+          </a:bodyPr>
+          <a:lstStyle/>
+          <a:p>
+            <a:pPr algn="l"/>
+            <a:r>
+              <a:rPr sz="1100" b="0">
+                <a:solidFill>
+                  <a:srgbClr val="C4A35A"/>
+                </a:solidFill>
+                <a:latin typeface="Calibri"/>
+              </a:rPr>
+              <a:t>Faculty of Engineering and Technology  ·  RESEARCH PROPOSAL</a:t>
+            </a:r>
+          </a:p>
+        </p:txBody>
+      </p:sp>
+      <p:sp>
+        <p:nvSpPr>
+          <p:cNvPr id="7" name="TextBox 6"/>
+          <p:cNvSpPr txBox="1"/>
+          <p:nvPr/>
+        </p:nvSpPr>
+        <p:spPr>
+          <a:xfrm>
+            <a:off x="3383280" y="6565392"/>
+            <a:ext cx="5760720" cy="237744"/>
+          </a:xfrm>
+          <a:prstGeom prst="rect">
+            <a:avLst/>
+          </a:prstGeom>
+          <a:noFill/>
+        </p:spPr>
+        <p:txBody>
+          <a:bodyPr wrap="square">
+            <a:spAutoFit/>
+          </a:bodyPr>
+          <a:lstStyle/>
+          <a:p>
+            <a:pPr algn="ctr"/>
+            <a:r>
+              <a:rPr sz="1000" b="0">
+                <a:solidFill>
+                  <a:srgbClr val="FFFFFF"/>
+                </a:solidFill>
+                <a:latin typeface="Calibri"/>
+              </a:rPr>
+              <a:t>Jenisha T  |  24ETRP720001  |  Part Time</a:t>
+            </a:r>
+          </a:p>
+        </p:txBody>
+      </p:sp>
+      <p:sp>
+        <p:nvSpPr>
+          <p:cNvPr id="8" name="Rectangle 7"/>
+          <p:cNvSpPr/>
+          <p:nvPr/>
+        </p:nvSpPr>
+        <p:spPr>
+          <a:xfrm>
+            <a:off x="0" y="713232"/>
+            <a:ext cx="12191695" cy="5797296"/>
+          </a:xfrm>
+          <a:prstGeom prst="rect">
+            <a:avLst/>
+          </a:prstGeom>
+          <a:solidFill>
+            <a:srgbClr val="FFFAF3"/>
+          </a:solidFill>
+          <a:ln>
+            <a:noFill/>
+          </a:ln>
+        </p:spPr>
+        <p:style>
+          <a:lnRef idx="1">
+            <a:schemeClr val="accent1"/>
+          </a:lnRef>
+          <a:fillRef idx="3">
+            <a:schemeClr val="accent1"/>
+          </a:fillRef>
+          <a:effectRef idx="2">
+            <a:schemeClr val="accent1"/>
+          </a:effectRef>
+          <a:fontRef idx="minor">
+            <a:schemeClr val="lt1"/>
+          </a:fontRef>
+        </p:style>
+        <p:txBody>
+          <a:bodyPr rtlCol="0" anchor="ctr"/>
+          <a:lstStyle/>
+          <a:p>
+            <a:pPr algn="ctr"/>
+          </a:p>
+        </p:txBody>
+      </p:sp>
+      <p:sp>
+        <p:nvSpPr>
+          <p:cNvPr id="9" name="TextBox 8"/>
+          <p:cNvSpPr txBox="1"/>
+          <p:nvPr/>
+        </p:nvSpPr>
+        <p:spPr>
+          <a:xfrm>
+            <a:off x="365760" y="804672"/>
+            <a:ext cx="11430000" cy="237744"/>
+          </a:xfrm>
+          <a:prstGeom prst="rect">
+            <a:avLst/>
+          </a:prstGeom>
+          <a:noFill/>
+        </p:spPr>
+        <p:txBody>
+          <a:bodyPr wrap="square">
+            <a:spAutoFit/>
+          </a:bodyPr>
+          <a:lstStyle/>
+          <a:p>
+            <a:pPr algn="l"/>
+            <a:r>
+              <a:rPr sz="1100" b="1">
+                <a:solidFill>
+                  <a:srgbClr val="7C1D2E"/>
+                </a:solidFill>
+                <a:latin typeface="Calibri"/>
+              </a:rPr>
+              <a:t>RESEARCH PROPOSAL  ·  Thank you</a:t>
+            </a:r>
+          </a:p>
+        </p:txBody>
+      </p:sp>
+      <p:sp>
+        <p:nvSpPr>
+          <p:cNvPr id="10" name="TextBox 9"/>
+          <p:cNvSpPr txBox="1"/>
+          <p:nvPr/>
+        </p:nvSpPr>
+        <p:spPr>
+          <a:xfrm>
+            <a:off x="365760" y="1024128"/>
+            <a:ext cx="11430000" cy="502920"/>
+          </a:xfrm>
+          <a:prstGeom prst="rect">
+            <a:avLst/>
+          </a:prstGeom>
+          <a:noFill/>
+        </p:spPr>
+        <p:txBody>
+          <a:bodyPr wrap="square">
+            <a:spAutoFit/>
+          </a:bodyPr>
+          <a:lstStyle/>
+          <a:p>
+            <a:pPr algn="l"/>
+            <a:r>
+              <a:rPr sz="2200" b="1">
+                <a:solidFill>
+                  <a:srgbClr val="1A1214"/>
+                </a:solidFill>
+                <a:latin typeface="Calibri"/>
+              </a:rPr>
+              <a:t>Thank you</a:t>
+            </a:r>
+          </a:p>
+        </p:txBody>
+      </p:sp>
+      <p:sp>
+        <p:nvSpPr>
+          <p:cNvPr id="11" name="TextBox 10"/>
+          <p:cNvSpPr txBox="1"/>
+          <p:nvPr/>
+        </p:nvSpPr>
+        <p:spPr>
+          <a:xfrm>
+            <a:off x="365760" y="1572768"/>
+            <a:ext cx="11430000" cy="384048"/>
+          </a:xfrm>
+          <a:prstGeom prst="rect">
+            <a:avLst/>
+          </a:prstGeom>
+          <a:noFill/>
+        </p:spPr>
+        <p:txBody>
+          <a:bodyPr wrap="square">
+            <a:spAutoFit/>
+          </a:bodyPr>
+          <a:lstStyle/>
+          <a:p>
+            <a:pPr algn="l"/>
+            <a:r>
+              <a:rPr sz="1300" b="0">
+                <a:solidFill>
+                  <a:srgbClr val="5C4A4E"/>
+                </a:solidFill>
+                <a:latin typeface="Calibri"/>
+              </a:rPr>
+              <a:t>Adaptive Context Reasoning System — a research programme, not a performance number.</a:t>
+            </a:r>
+          </a:p>
+        </p:txBody>
+      </p:sp>
+      <p:sp>
+        <p:nvSpPr>
+          <p:cNvPr id="12" name="TextBox 11"/>
+          <p:cNvSpPr txBox="1"/>
+          <p:nvPr/>
+        </p:nvSpPr>
+        <p:spPr>
+          <a:xfrm>
+            <a:off x="365760" y="1993392"/>
+            <a:ext cx="11430000" cy="3977639"/>
+          </a:xfrm>
+          <a:prstGeom prst="rect">
+            <a:avLst/>
+          </a:prstGeom>
+          <a:noFill/>
+        </p:spPr>
+        <p:txBody>
+          <a:bodyPr wrap="square">
+            <a:spAutoFit/>
+          </a:bodyPr>
+          <a:lstStyle/>
+          <a:p>
+            <a:pPr>
+              <a:spcAft>
+                <a:spcPts val="600"/>
+              </a:spcAft>
+              <a:buFont typeface="Arial"/>
+              <a:buChar char="•"/>
+            </a:pPr>
+            <a:r>
+              <a:rPr sz="1300">
+                <a:solidFill>
+                  <a:srgbClr val="1A1214"/>
+                </a:solidFill>
+                <a:latin typeface="Calibri"/>
+              </a:rPr>
+              <a:t>Presented By: Jenisha T</a:t>
+            </a:r>
+          </a:p>
+          <a:p>
+            <a:pPr>
+              <a:spcAft>
+                <a:spcPts val="600"/>
+              </a:spcAft>
+              <a:buFont typeface="Arial"/>
+              <a:buChar char="•"/>
+            </a:pPr>
+            <a:r>
+              <a:rPr sz="1300">
+                <a:solidFill>
+                  <a:srgbClr val="1A1214"/>
+                </a:solidFill>
+                <a:latin typeface="Calibri"/>
+              </a:rPr>
+              <a:t>(Reg. No. 24ETRP720001)</a:t>
+            </a:r>
+          </a:p>
+          <a:p>
+            <a:pPr>
+              <a:spcAft>
+                <a:spcPts val="600"/>
+              </a:spcAft>
+              <a:buFont typeface="Arial"/>
+              <a:buChar char="•"/>
+            </a:pPr>
+            <a:r>
+              <a:rPr sz="1300">
+                <a:solidFill>
+                  <a:srgbClr val="1A1214"/>
+                </a:solidFill>
+                <a:latin typeface="Calibri"/>
+              </a:rPr>
+              <a:t>Supervisor: Dr. Jyothi A P</a:t>
+            </a:r>
+          </a:p>
+          <a:p>
+            <a:pPr>
+              <a:spcAft>
+                <a:spcPts val="600"/>
+              </a:spcAft>
+              <a:buFont typeface="Arial"/>
+              <a:buChar char="•"/>
+            </a:pPr>
+            <a:r>
+              <a:rPr sz="1300">
+                <a:solidFill>
+                  <a:srgbClr val="1A1214"/>
+                </a:solidFill>
+                <a:latin typeface="Calibri"/>
+              </a:rPr>
+              <a:t>Department of Computer Science and Engineering</a:t>
+            </a:r>
+          </a:p>
+          <a:p>
+            <a:pPr>
+              <a:spcAft>
+                <a:spcPts val="600"/>
+              </a:spcAft>
+              <a:buFont typeface="Arial"/>
+              <a:buChar char="•"/>
+            </a:pPr>
+            <a:r>
+              <a:rPr sz="1300">
+                <a:solidFill>
+                  <a:srgbClr val="1A1214"/>
+                </a:solidFill>
+                <a:latin typeface="Calibri"/>
+              </a:rPr>
+              <a:t>Faculty of Engineering and Technology, MSRUAS</a:t>
+            </a:r>
+          </a:p>
+          <a:p>
+            <a:pPr>
+              <a:spcAft>
+                <a:spcPts val="600"/>
+              </a:spcAft>
+              <a:buFont typeface="Arial"/>
+              <a:buChar char="•"/>
+            </a:pPr>
+            <a:r>
+              <a:rPr sz="1300">
+                <a:solidFill>
+                  <a:srgbClr val="1A1214"/>
+                </a:solidFill>
+                <a:latin typeface="Calibri"/>
+              </a:rPr>
+              <a:t>jenisha.t@msruas.ac.in</a:t>
+            </a:r>
+          </a:p>
+        </p:txBody>
+      </p:sp>
+      <p:sp>
+        <p:nvSpPr>
+          <p:cNvPr id="4035" name="Automatic Date 35"/>
+          <p:cNvSpPr txBox="1"/>
+          <p:nvPr/>
+        </p:nvSpPr>
+        <p:spPr>
+          <a:xfrm>
+            <a:off x="255016" y="6565900"/>
+            <a:ext cx="3108960" cy="255016"/>
+          </a:xfrm>
+          <a:prstGeom prst="rect">
+            <a:avLst/>
+          </a:prstGeom>
+          <a:noFill/>
+        </p:spPr>
+        <p:txBody>
+          <a:bodyPr wrap="none" lIns="0" tIns="0" rIns="0" bIns="0" anchor="ctr"/>
+          <a:lstStyle/>
+          <a:p>
+            <a:pPr algn="l"/>
+            <a:fld id="{436cdb1b-dbc1-40da-b26c-039b45e38da1}" type="datetime3">
+              <a:rPr lang="en-GB" sz="1000" dirty="0">
+                <a:solidFill>
+                  <a:srgbClr val="C4A35A"/>
+                </a:solidFill>
+                <a:latin typeface="Calibri"/>
+              </a:rPr>
+              <a:t>7 September 2026</a:t>
+            </a:fld>
+            <a:endParaRPr lang="en-GB" sz="1000"/>
+          </a:p>
+        </p:txBody>
+      </p:sp>
+      <p:sp>
+        <p:nvSpPr>
+          <p:cNvPr id="5035" name="Automatic Slide Number 35"/>
+          <p:cNvSpPr txBox="1"/>
+          <p:nvPr/>
+        </p:nvSpPr>
+        <p:spPr>
+          <a:xfrm>
+            <a:off x="9601200" y="6565900"/>
+            <a:ext cx="2286000" cy="255016"/>
+          </a:xfrm>
+          <a:prstGeom prst="rect">
+            <a:avLst/>
+          </a:prstGeom>
+          <a:noFill/>
+        </p:spPr>
+        <p:txBody>
+          <a:bodyPr wrap="none" lIns="0" tIns="0" rIns="0" bIns="0" anchor="ctr"/>
+          <a:lstStyle/>
+          <a:p>
+            <a:pPr algn="r"/>
+            <a:fld id="{2fbdc6bb-d1d2-474e-ac84-7c2daf2cd33f}" type="slidenum">
+              <a:rPr lang="en-GB" sz="1000" dirty="0">
+                <a:solidFill>
+                  <a:srgbClr val="C4A35A"/>
+                </a:solidFill>
+                <a:latin typeface="Calibri"/>
+              </a:rPr>
+              <a:t>35</a:t>
+            </a:fld>
+            <a:r>
+              <a:rPr lang="en-GB" sz="1000">
+                <a:solidFill>
+                  <a:srgbClr val="C4A35A"/>
+                </a:solidFill>
+                <a:latin typeface="Calibri"/>
+              </a:rPr>
+              <a:t> / 35</a:t>
             </a:r>
             <a:endParaRPr lang="en-GB" sz="1000"/>
           </a:p>
@@ -25360,7 +26292,7 @@
           <a:lstStyle/>
           <a:p>
             <a:pPr algn="l"/>
-            <a:fld id="{c0f3bcc4-54ba-45e1-90e4-6ebd647e64fa}" type="datetime3">
+            <a:fld id="{3748a27e-c603-47b4-ae7c-65005a79adc6}" type="datetime3">
               <a:rPr lang="en-GB" sz="1000" dirty="0">
                 <a:solidFill>
                   <a:srgbClr val="C4A35A"/>
@@ -25394,7 +26326,7 @@
           <a:lstStyle/>
           <a:p>
             <a:pPr algn="r"/>
-            <a:fld id="{ffb1861b-a258-404f-94a2-05777cdf4855}" type="slidenum">
+            <a:fld id="{4bf26da8-b6fb-4aee-a430-75455272fb13}" type="slidenum">
               <a:rPr lang="en-GB" sz="1000" dirty="0">
                 <a:solidFill>
                   <a:srgbClr val="C4A35A"/>
@@ -25410,7 +26342,7 @@
                 </a:solidFill>
                 <a:latin typeface="Calibri"/>
               </a:rPr>
-              <a:t> / 34</a:t>
+              <a:t> / 35</a:t>
             </a:r>
             <a:endParaRPr lang="en-GB" sz="1000"/>
           </a:p>
@@ -25812,7 +26744,7 @@
                 </a:solidFill>
                 <a:latin typeface="Calibri"/>
               </a:rPr>
-              <a:t>FET template. Each paper is one Evidence block: Author(s), Year, Title, Publication, Objective, Methodology, Findings, Limitations.</a:t>
+              <a:t>FET template. Each paper is one Evidence block: Author(s), Year, Title, Publication, Objective, Methodology, Findings, Limitations, To solve the research gap.</a:t>
             </a:r>
           </a:p>
         </p:txBody>
@@ -26446,7 +27378,7 @@
           <a:lstStyle/>
           <a:p>
             <a:pPr algn="l"/>
-            <a:fld id="{96454c5f-9acc-4434-b2f4-e3b24ad27a77}" type="datetime3">
+            <a:fld id="{a34d88df-573c-4780-a90d-1b2a0494a900}" type="datetime3">
               <a:rPr lang="en-GB" sz="1000" dirty="0">
                 <a:solidFill>
                   <a:srgbClr val="C4A35A"/>
@@ -26480,7 +27412,7 @@
           <a:lstStyle/>
           <a:p>
             <a:pPr algn="r"/>
-            <a:fld id="{dcf16d38-f048-45f8-a139-49d046193b83}" type="slidenum">
+            <a:fld id="{7233a02d-9027-4940-abc6-47225f3ae5ff}" type="slidenum">
               <a:rPr lang="en-GB" sz="1000" dirty="0">
                 <a:solidFill>
                   <a:srgbClr val="C4A35A"/>
@@ -26496,7 +27428,7 @@
                 </a:solidFill>
                 <a:latin typeface="Calibri"/>
               </a:rPr>
-              <a:t> / 34</a:t>
+              <a:t> / 35</a:t>
             </a:r>
             <a:endParaRPr lang="en-GB" sz="1000"/>
           </a:p>
@@ -27532,7 +28464,7 @@
           <a:lstStyle/>
           <a:p>
             <a:pPr algn="l"/>
-            <a:fld id="{702f6864-b6ae-469c-932d-c1c38be2a243}" type="datetime3">
+            <a:fld id="{5866b750-f965-404d-8652-6324503b0307}" type="datetime3">
               <a:rPr lang="en-GB" sz="1000" dirty="0">
                 <a:solidFill>
                   <a:srgbClr val="C4A35A"/>
@@ -27566,7 +28498,7 @@
           <a:lstStyle/>
           <a:p>
             <a:pPr algn="r"/>
-            <a:fld id="{4d50df53-4219-4a26-a89b-c57a66e2d5b3}" type="slidenum">
+            <a:fld id="{e33e20ce-f18c-45cc-a21e-1a3d1f18d606}" type="slidenum">
               <a:rPr lang="en-GB" sz="1000" dirty="0">
                 <a:solidFill>
                   <a:srgbClr val="C4A35A"/>
@@ -27582,7 +28514,7 @@
                 </a:solidFill>
                 <a:latin typeface="Calibri"/>
               </a:rPr>
-              <a:t> / 34</a:t>
+              <a:t> / 35</a:t>
             </a:r>
             <a:endParaRPr lang="en-GB" sz="1000"/>
           </a:p>
@@ -28618,7 +29550,7 @@
           <a:lstStyle/>
           <a:p>
             <a:pPr algn="l"/>
-            <a:fld id="{06b455a4-6ac6-455f-ab6c-52ff50f3f2f8}" type="datetime3">
+            <a:fld id="{e2613ece-20a0-4d9c-b255-f6175e3b7691}" type="datetime3">
               <a:rPr lang="en-GB" sz="1000" dirty="0">
                 <a:solidFill>
                   <a:srgbClr val="C4A35A"/>
@@ -28652,7 +29584,7 @@
           <a:lstStyle/>
           <a:p>
             <a:pPr algn="r"/>
-            <a:fld id="{78e54ba6-b4dd-480f-9be2-cc35232574c9}" type="slidenum">
+            <a:fld id="{afbed635-b70a-4ec4-824a-71e4b7cff056}" type="slidenum">
               <a:rPr lang="en-GB" sz="1000" dirty="0">
                 <a:solidFill>
                   <a:srgbClr val="C4A35A"/>
@@ -28668,7 +29600,7 @@
                 </a:solidFill>
                 <a:latin typeface="Calibri"/>
               </a:rPr>
-              <a:t> / 34</a:t>
+              <a:t> / 35</a:t>
             </a:r>
             <a:endParaRPr lang="en-GB" sz="1000"/>
           </a:p>
@@ -29704,7 +30636,7 @@
           <a:lstStyle/>
           <a:p>
             <a:pPr algn="l"/>
-            <a:fld id="{ffaf39b1-73b5-4495-b457-f54176b80dca}" type="datetime3">
+            <a:fld id="{4a7f4336-c834-45da-bcac-445ad78e2018}" type="datetime3">
               <a:rPr lang="en-GB" sz="1000" dirty="0">
                 <a:solidFill>
                   <a:srgbClr val="C4A35A"/>
@@ -29738,7 +30670,7 @@
           <a:lstStyle/>
           <a:p>
             <a:pPr algn="r"/>
-            <a:fld id="{2542341a-3306-446b-b454-7b88cc6aa7b2}" type="slidenum">
+            <a:fld id="{8b8556e0-e5f6-4c89-a02b-d621b4aca23c}" type="slidenum">
               <a:rPr lang="en-GB" sz="1000" dirty="0">
                 <a:solidFill>
                   <a:srgbClr val="C4A35A"/>
@@ -29754,7 +30686,7 @@
                 </a:solidFill>
                 <a:latin typeface="Calibri"/>
               </a:rPr>
-              <a:t> / 34</a:t>
+              <a:t> / 35</a:t>
             </a:r>
             <a:endParaRPr lang="en-GB" sz="1000"/>
           </a:p>
@@ -30790,7 +31722,7 @@
           <a:lstStyle/>
           <a:p>
             <a:pPr algn="l"/>
-            <a:fld id="{83b562f1-bf2b-4d05-897a-1c951bea6061}" type="datetime3">
+            <a:fld id="{74650ad4-f09f-4ee3-a95a-8eba0cbf3f63}" type="datetime3">
               <a:rPr lang="en-GB" sz="1000" dirty="0">
                 <a:solidFill>
                   <a:srgbClr val="C4A35A"/>
@@ -30824,7 +31756,7 @@
           <a:lstStyle/>
           <a:p>
             <a:pPr algn="r"/>
-            <a:fld id="{b032a8bd-855f-44c5-9d2d-5d574a004295}" type="slidenum">
+            <a:fld id="{19facd15-ebd9-4f88-a580-3358c89a565e}" type="slidenum">
               <a:rPr lang="en-GB" sz="1000" dirty="0">
                 <a:solidFill>
                   <a:srgbClr val="C4A35A"/>
@@ -30840,7 +31772,7 @@
                 </a:solidFill>
                 <a:latin typeface="Calibri"/>
               </a:rPr>
-              <a:t> / 34</a:t>
+              <a:t> / 35</a:t>
             </a:r>
             <a:endParaRPr lang="en-GB" sz="1000"/>
           </a:p>

--- a/laboratory/docs/slides/ACRS_PhD_Proposal_JenishaT_24ETRP720001.pptx
+++ b/laboratory/docs/slides/ACRS_PhD_Proposal_JenishaT_24ETRP720001.pptx
@@ -3888,7 +3888,7 @@
           <a:lstStyle/>
           <a:p>
             <a:pPr algn="l"/>
-            <a:fld id="{a592af38-2bfd-4192-a6a8-a4839c0c4e20}" type="datetime3">
+            <a:fld id="{d71baf80-5258-41ee-8fd2-382f927572be}" type="datetime3">
               <a:rPr lang="en-GB" sz="1000" dirty="0">
                 <a:solidFill>
                   <a:srgbClr val="C4A35A"/>
@@ -3922,7 +3922,7 @@
           <a:lstStyle/>
           <a:p>
             <a:pPr algn="r"/>
-            <a:fld id="{c15ca4eb-9eca-4f91-a923-d001c1b5ecb1}" type="slidenum">
+            <a:fld id="{92c44f60-c4e4-4a6f-9559-5ef99c7ba133}" type="slidenum">
               <a:rPr lang="en-GB" sz="1000" dirty="0">
                 <a:solidFill>
                   <a:srgbClr val="C4A35A"/>
@@ -4532,7 +4532,7 @@
                 </a:solidFill>
                 <a:latin typeface="Calibri"/>
               </a:rPr>
-              <a:t>ICLR 2025</a:t>
+              <a:t>Proceedings of the Thirteenth International Conference on Learning Representations (ICLR 2025)</a:t>
             </a:r>
           </a:p>
           <a:p>
@@ -4836,7 +4836,7 @@
                 </a:solidFill>
                 <a:latin typeface="Calibri"/>
               </a:rPr>
-              <a:t>ACL 2025 (long), pages 15549–15572. doi:10.18653/v1/2025.acl-long.757</a:t>
+              <a:t>Proceedings of the 63rd Annual Meeting of the Association for Computational Linguistics (Volume 1: Long Papers), pages 15549–15572. doi:10.18653/v1/2025.acl-long.757</a:t>
             </a:r>
           </a:p>
           <a:p>
@@ -4974,7 +4974,7 @@
           <a:lstStyle/>
           <a:p>
             <a:pPr algn="l"/>
-            <a:fld id="{359bcabc-11ed-4743-89a3-0800f232a054}" type="datetime3">
+            <a:fld id="{80ef18aa-2b0f-4233-9d52-0fd9df770a24}" type="datetime3">
               <a:rPr lang="en-GB" sz="1000" dirty="0">
                 <a:solidFill>
                   <a:srgbClr val="C4A35A"/>
@@ -5008,7 +5008,7 @@
           <a:lstStyle/>
           <a:p>
             <a:pPr algn="r"/>
-            <a:fld id="{f989ff85-efbd-454c-b2ca-935acf6efafc}" type="slidenum">
+            <a:fld id="{0833e2d1-1197-4696-91a4-a3c44a98cec4}" type="slidenum">
               <a:rPr lang="en-GB" sz="1000" dirty="0">
                 <a:solidFill>
                   <a:srgbClr val="C4A35A"/>
@@ -5922,7 +5922,7 @@
                 </a:solidFill>
                 <a:latin typeface="Calibri"/>
               </a:rPr>
-              <a:t>EMNLP 2023, pages 13358–13376. doi:10.18653/v1/2023.emnlp-main.825</a:t>
+              <a:t>Proceedings of the 2023 Conference on Empirical Methods in Natural Language Processing, pages 13358–13376. doi:10.18653/v1/2023.emnlp-main.825</a:t>
             </a:r>
           </a:p>
           <a:p>
@@ -6060,7 +6060,7 @@
           <a:lstStyle/>
           <a:p>
             <a:pPr algn="l"/>
-            <a:fld id="{ab5bc1b3-b702-4250-bd2f-5536a390cfe6}" type="datetime3">
+            <a:fld id="{a3c3ed8d-5eca-4b6c-affa-4463181892e0}" type="datetime3">
               <a:rPr lang="en-GB" sz="1000" dirty="0">
                 <a:solidFill>
                   <a:srgbClr val="C4A35A"/>
@@ -6094,7 +6094,7 @@
           <a:lstStyle/>
           <a:p>
             <a:pPr algn="r"/>
-            <a:fld id="{21bae128-38b6-42d6-bd8a-8f0b0f91fcb9}" type="slidenum">
+            <a:fld id="{0effeffd-2f24-4a9f-8898-95648ebb57b7}" type="slidenum">
               <a:rPr lang="en-GB" sz="1000" dirty="0">
                 <a:solidFill>
                   <a:srgbClr val="C4A35A"/>
@@ -6704,7 +6704,7 @@
                 </a:solidFill>
                 <a:latin typeface="Calibri"/>
               </a:rPr>
-              <a:t>UIST 2023 (Best Paper). doi:10.1145/3586183.3606763</a:t>
+              <a:t>Proceedings of the 36th Annual ACM Symposium on User Interface Software and Technology (UIST 2023), Best Paper. doi:10.1145/3586183.3606763</a:t>
             </a:r>
           </a:p>
           <a:p>
@@ -7146,7 +7146,7 @@
           <a:lstStyle/>
           <a:p>
             <a:pPr algn="l"/>
-            <a:fld id="{866ad9a2-330d-4d3d-8ed0-32cad833f8ff}" type="datetime3">
+            <a:fld id="{fe0c510a-1e40-42a6-b006-af52ef4bf2aa}" type="datetime3">
               <a:rPr lang="en-GB" sz="1000" dirty="0">
                 <a:solidFill>
                   <a:srgbClr val="C4A35A"/>
@@ -7180,7 +7180,7 @@
           <a:lstStyle/>
           <a:p>
             <a:pPr algn="r"/>
-            <a:fld id="{dac10e69-b2b0-4914-a024-9b16e5c8d942}" type="slidenum">
+            <a:fld id="{12341f12-dc4b-4ec5-aef5-3c91ad41838e}" type="slidenum">
               <a:rPr lang="en-GB" sz="1000" dirty="0">
                 <a:solidFill>
                   <a:srgbClr val="C4A35A"/>
@@ -7790,7 +7790,7 @@
                 </a:solidFill>
                 <a:latin typeface="Calibri"/>
               </a:rPr>
-              <a:t>AAAI 2020. doi:10.1609/aaai.v34i08.7039</a:t>
+              <a:t>Proceedings of the AAAI Conference on Artificial Intelligence, 34(08):13294–13299. doi:10.1609/aaai.v34i08.7039</a:t>
             </a:r>
           </a:p>
           <a:p>
@@ -8094,7 +8094,7 @@
                 </a:solidFill>
                 <a:latin typeface="Calibri"/>
               </a:rPr>
-              <a:t>ICLR 2023</a:t>
+              <a:t>Proceedings of the Eleventh International Conference on Learning Representations (ICLR 2023)</a:t>
             </a:r>
           </a:p>
           <a:p>
@@ -8232,7 +8232,7 @@
           <a:lstStyle/>
           <a:p>
             <a:pPr algn="l"/>
-            <a:fld id="{01d6946c-2e7d-4bb1-9975-51c81c6e9159}" type="datetime3">
+            <a:fld id="{c068383b-94a3-4f48-a86f-e712d0cabad4}" type="datetime3">
               <a:rPr lang="en-GB" sz="1000" dirty="0">
                 <a:solidFill>
                   <a:srgbClr val="C4A35A"/>
@@ -8266,7 +8266,7 @@
           <a:lstStyle/>
           <a:p>
             <a:pPr algn="r"/>
-            <a:fld id="{d34a5259-7744-460a-b4e8-4a4a23644793}" type="slidenum">
+            <a:fld id="{b2c704d7-b40d-4475-adbb-8cad5ec62fef}" type="slidenum">
               <a:rPr lang="en-GB" sz="1000" dirty="0">
                 <a:solidFill>
                   <a:srgbClr val="C4A35A"/>
@@ -9213,7 +9213,7 @@
           <a:lstStyle/>
           <a:p>
             <a:pPr algn="l"/>
-            <a:fld id="{cb9777ca-19c7-43d0-adaa-f97648cbb815}" type="datetime3">
+            <a:fld id="{5669dba5-5a17-4b7d-a4ab-7a8b204c0447}" type="datetime3">
               <a:rPr lang="en-GB" sz="1000" dirty="0">
                 <a:solidFill>
                   <a:srgbClr val="C4A35A"/>
@@ -9247,7 +9247,7 @@
           <a:lstStyle/>
           <a:p>
             <a:pPr algn="r"/>
-            <a:fld id="{7ef55010-d0b2-4c0c-9cbb-df4584cd687f}" type="slidenum">
+            <a:fld id="{c60a1332-34d9-4596-8055-3476abdd9518}" type="slidenum">
               <a:rPr lang="en-GB" sz="1000" dirty="0">
                 <a:solidFill>
                   <a:srgbClr val="C4A35A"/>
@@ -10126,7 +10126,7 @@
           <a:lstStyle/>
           <a:p>
             <a:pPr algn="l"/>
-            <a:fld id="{a7541f5c-8c0d-433e-8536-e58b57be70ae}" type="datetime3">
+            <a:fld id="{4af2f500-35b1-436a-a91f-a05b93a29324}" type="datetime3">
               <a:rPr lang="en-GB" sz="1000" dirty="0">
                 <a:solidFill>
                   <a:srgbClr val="C4A35A"/>
@@ -10160,7 +10160,7 @@
           <a:lstStyle/>
           <a:p>
             <a:pPr algn="r"/>
-            <a:fld id="{0a519498-032c-4c01-81b3-625cd666956a}" type="slidenum">
+            <a:fld id="{1f9b74e3-961a-4ddf-b54c-4350121d15a2}" type="slidenum">
               <a:rPr lang="en-GB" sz="1000" dirty="0">
                 <a:solidFill>
                   <a:srgbClr val="C4A35A"/>
@@ -10752,7 +10752,7 @@
           <a:lstStyle/>
           <a:p>
             <a:pPr algn="l"/>
-            <a:fld id="{2c96e9e0-c412-4d2c-9989-686d13f13e86}" type="datetime3">
+            <a:fld id="{55acb93c-94e0-4f18-8cca-4442e7025315}" type="datetime3">
               <a:rPr lang="en-GB" sz="1000" dirty="0">
                 <a:solidFill>
                   <a:srgbClr val="C4A35A"/>
@@ -10786,7 +10786,7 @@
           <a:lstStyle/>
           <a:p>
             <a:pPr algn="r"/>
-            <a:fld id="{37770477-ed62-4fc1-bd32-543c6b3d375a}" type="slidenum">
+            <a:fld id="{aa9f4d0c-fc34-43f0-9afd-5253eac15ef8}" type="slidenum">
               <a:rPr lang="en-GB" sz="1000" dirty="0">
                 <a:solidFill>
                   <a:srgbClr val="C4A35A"/>
@@ -11343,7 +11343,7 @@
           <a:lstStyle/>
           <a:p>
             <a:pPr algn="l"/>
-            <a:fld id="{d5d09001-286b-46ee-baf7-de3b7724f4c0}" type="datetime3">
+            <a:fld id="{98a746dd-a0f8-400b-965e-d91c4512dfaa}" type="datetime3">
               <a:rPr lang="en-GB" sz="1000" dirty="0">
                 <a:solidFill>
                   <a:srgbClr val="C4A35A"/>
@@ -11377,7 +11377,7 @@
           <a:lstStyle/>
           <a:p>
             <a:pPr algn="r"/>
-            <a:fld id="{e123b192-fb9b-4644-b015-dff371019967}" type="slidenum">
+            <a:fld id="{cfdef9ae-b28d-4cee-b4bd-feffcababcdd}" type="slidenum">
               <a:rPr lang="en-GB" sz="1000" dirty="0">
                 <a:solidFill>
                   <a:srgbClr val="C4A35A"/>
@@ -12188,7 +12188,7 @@
           <a:lstStyle/>
           <a:p>
             <a:pPr algn="l"/>
-            <a:fld id="{68b03453-3e86-4f64-9320-8f32d4aa2a7f}" type="datetime3">
+            <a:fld id="{46227e9c-8ef0-44d0-bf9c-e8f500ae93c3}" type="datetime3">
               <a:rPr lang="en-GB" sz="1000" dirty="0">
                 <a:solidFill>
                   <a:srgbClr val="C4A35A"/>
@@ -12222,7 +12222,7 @@
           <a:lstStyle/>
           <a:p>
             <a:pPr algn="r"/>
-            <a:fld id="{f8969b57-d5df-47b6-869f-798f1a73b396}" type="slidenum">
+            <a:fld id="{ebb3e152-2d02-427e-808c-4a7f6a1b460a}" type="slidenum">
               <a:rPr lang="en-GB" sz="1000" dirty="0">
                 <a:solidFill>
                   <a:srgbClr val="C4A35A"/>
@@ -13245,7 +13245,7 @@
           <a:lstStyle/>
           <a:p>
             <a:pPr algn="l"/>
-            <a:fld id="{d7dcd491-07ea-40a6-b2b5-87c0ef64f8a9}" type="datetime3">
+            <a:fld id="{6398514c-04ac-4f34-b2e9-43a3b1293156}" type="datetime3">
               <a:rPr lang="en-GB" sz="1000" dirty="0">
                 <a:solidFill>
                   <a:srgbClr val="C4A35A"/>
@@ -13279,7 +13279,7 @@
           <a:lstStyle/>
           <a:p>
             <a:pPr algn="r"/>
-            <a:fld id="{e33e67fa-3fc8-48b3-b5cc-82a5be004694}" type="slidenum">
+            <a:fld id="{6e6062b4-a982-4cdc-aba2-8dd2a021fa6a}" type="slidenum">
               <a:rPr lang="en-GB" sz="1000" dirty="0">
                 <a:solidFill>
                   <a:srgbClr val="C4A35A"/>
@@ -14255,7 +14255,7 @@
           <a:lstStyle/>
           <a:p>
             <a:pPr algn="l"/>
-            <a:fld id="{44c251bf-3ab3-468f-9418-27697c48c374}" type="datetime3">
+            <a:fld id="{3282c333-6e27-41c4-bffc-44c1acb576f9}" type="datetime3">
               <a:rPr lang="en-GB" sz="1000" dirty="0">
                 <a:solidFill>
                   <a:srgbClr val="C4A35A"/>
@@ -14289,7 +14289,7 @@
           <a:lstStyle/>
           <a:p>
             <a:pPr algn="r"/>
-            <a:fld id="{2eec9dba-4eef-494d-b224-dee0259a174c}" type="slidenum">
+            <a:fld id="{6f87e086-c5b0-4fe8-9ac1-cbc9c45fd56d}" type="slidenum">
               <a:rPr lang="en-GB" sz="1000" dirty="0">
                 <a:solidFill>
                   <a:srgbClr val="C4A35A"/>
@@ -15204,7 +15204,7 @@
           <a:lstStyle/>
           <a:p>
             <a:pPr algn="l"/>
-            <a:fld id="{089d6e83-3805-4c87-b3b9-cecd3693127e}" type="datetime3">
+            <a:fld id="{f782c0cc-c21d-42d9-a163-17db2cffd165}" type="datetime3">
               <a:rPr lang="en-GB" sz="1000" dirty="0">
                 <a:solidFill>
                   <a:srgbClr val="C4A35A"/>
@@ -15238,7 +15238,7 @@
           <a:lstStyle/>
           <a:p>
             <a:pPr algn="r"/>
-            <a:fld id="{e78ef978-ce2d-4573-b837-41ae78040204}" type="slidenum">
+            <a:fld id="{69c331df-02c5-4be4-ae0e-1dad3c0b3bcc}" type="slidenum">
               <a:rPr lang="en-GB" sz="1000" dirty="0">
                 <a:solidFill>
                   <a:srgbClr val="C4A35A"/>
@@ -16099,7 +16099,7 @@
           <a:lstStyle/>
           <a:p>
             <a:pPr algn="l"/>
-            <a:fld id="{92b66b4b-718c-4a9c-9384-9a83b42ccde9}" type="datetime3">
+            <a:fld id="{deb4b421-3bc1-48f4-b6f6-3a30519bf896}" type="datetime3">
               <a:rPr lang="en-GB" sz="1000" dirty="0">
                 <a:solidFill>
                   <a:srgbClr val="C4A35A"/>
@@ -16133,7 +16133,7 @@
           <a:lstStyle/>
           <a:p>
             <a:pPr algn="r"/>
-            <a:fld id="{1dcad377-8849-49f5-b394-2755819130b0}" type="slidenum">
+            <a:fld id="{28145069-2800-481b-92e8-c40b5facddf9}" type="slidenum">
               <a:rPr lang="en-GB" sz="1000" dirty="0">
                 <a:solidFill>
                   <a:srgbClr val="C4A35A"/>
@@ -17048,7 +17048,7 @@
           <a:lstStyle/>
           <a:p>
             <a:pPr algn="l"/>
-            <a:fld id="{adf3b84c-66b7-4806-bda7-dbe89e147a58}" type="datetime3">
+            <a:fld id="{edb4078d-af2c-4190-80f1-590e3383c0a8}" type="datetime3">
               <a:rPr lang="en-GB" sz="1000" dirty="0">
                 <a:solidFill>
                   <a:srgbClr val="C4A35A"/>
@@ -17082,7 +17082,7 @@
           <a:lstStyle/>
           <a:p>
             <a:pPr algn="r"/>
-            <a:fld id="{12c37e77-af7d-4463-892d-90fc9c1a5acd}" type="slidenum">
+            <a:fld id="{9000935d-5de4-4def-8315-b8ceb7a03d68}" type="slidenum">
               <a:rPr lang="en-GB" sz="1000" dirty="0">
                 <a:solidFill>
                   <a:srgbClr val="C4A35A"/>
@@ -17621,7 +17621,7 @@
           <a:lstStyle/>
           <a:p>
             <a:pPr algn="l"/>
-            <a:fld id="{44a91fcc-0266-4c88-812e-40152ab32524}" type="datetime3">
+            <a:fld id="{4f6e9deb-58e6-42ab-9759-590ff1ae9b49}" type="datetime3">
               <a:rPr lang="en-GB" sz="1000" dirty="0">
                 <a:solidFill>
                   <a:srgbClr val="C4A35A"/>
@@ -17655,7 +17655,7 @@
           <a:lstStyle/>
           <a:p>
             <a:pPr algn="r"/>
-            <a:fld id="{75b0cddd-ae62-455a-9736-6e458fd72700}" type="slidenum">
+            <a:fld id="{4738fe04-9507-436f-b459-a31a20b55165}" type="slidenum">
               <a:rPr lang="en-GB" sz="1000" dirty="0">
                 <a:solidFill>
                   <a:srgbClr val="C4A35A"/>
@@ -18607,7 +18607,7 @@
           <a:lstStyle/>
           <a:p>
             <a:pPr algn="l"/>
-            <a:fld id="{031166c3-5ffe-4bd9-bbad-108368caa7f5}" type="datetime3">
+            <a:fld id="{078a16c0-2001-478e-9a5d-f537e19c5c91}" type="datetime3">
               <a:rPr lang="en-GB" sz="1000" dirty="0">
                 <a:solidFill>
                   <a:srgbClr val="C4A35A"/>
@@ -18641,7 +18641,7 @@
           <a:lstStyle/>
           <a:p>
             <a:pPr algn="r"/>
-            <a:fld id="{3cf87082-bf11-4119-a08e-ec1cbc8c7689}" type="slidenum">
+            <a:fld id="{94e3b12a-ba12-423a-8c18-81c3f07c5b40}" type="slidenum">
               <a:rPr lang="en-GB" sz="1000" dirty="0">
                 <a:solidFill>
                   <a:srgbClr val="C4A35A"/>
@@ -19216,7 +19216,7 @@
           <a:lstStyle/>
           <a:p>
             <a:pPr algn="l"/>
-            <a:fld id="{b297694d-09df-41e3-8ae6-d9a1e600a644}" type="datetime3">
+            <a:fld id="{86ca9b64-c0bb-408c-95e8-46a852909882}" type="datetime3">
               <a:rPr lang="en-GB" sz="1000" dirty="0">
                 <a:solidFill>
                   <a:srgbClr val="C4A35A"/>
@@ -19250,7 +19250,7 @@
           <a:lstStyle/>
           <a:p>
             <a:pPr algn="r"/>
-            <a:fld id="{d0647af6-dc4a-4f45-a3b4-82321bff3b1e}" type="slidenum">
+            <a:fld id="{033420c5-3419-4963-9d96-b9b1965900b8}" type="slidenum">
               <a:rPr lang="en-GB" sz="1000" dirty="0">
                 <a:solidFill>
                   <a:srgbClr val="C4A35A"/>
@@ -19825,7 +19825,7 @@
           <a:lstStyle/>
           <a:p>
             <a:pPr algn="l"/>
-            <a:fld id="{5b33bf48-2989-4acb-b027-6a5fa2e3cad9}" type="datetime3">
+            <a:fld id="{32df07e0-ecff-4d1d-bb55-7f37681f3043}" type="datetime3">
               <a:rPr lang="en-GB" sz="1000" dirty="0">
                 <a:solidFill>
                   <a:srgbClr val="C4A35A"/>
@@ -19859,7 +19859,7 @@
           <a:lstStyle/>
           <a:p>
             <a:pPr algn="r"/>
-            <a:fld id="{cc893ca0-cf49-4246-84c8-25a8ae0b26e3}" type="slidenum">
+            <a:fld id="{281bebbf-2d90-4959-97b8-f56472cfab6f}" type="slidenum">
               <a:rPr lang="en-GB" sz="1000" dirty="0">
                 <a:solidFill>
                   <a:srgbClr val="C4A35A"/>
@@ -20434,7 +20434,7 @@
           <a:lstStyle/>
           <a:p>
             <a:pPr algn="l"/>
-            <a:fld id="{72a9bf4f-2028-48a8-a316-be230cbd3092}" type="datetime3">
+            <a:fld id="{1a431efa-404b-4388-ac3b-238957cf7fd3}" type="datetime3">
               <a:rPr lang="en-GB" sz="1000" dirty="0">
                 <a:solidFill>
                   <a:srgbClr val="C4A35A"/>
@@ -20468,7 +20468,7 @@
           <a:lstStyle/>
           <a:p>
             <a:pPr algn="r"/>
-            <a:fld id="{5230787d-625f-4ee9-a49f-2df02fabe3a2}" type="slidenum">
+            <a:fld id="{a98b6e33-b4d7-4af1-b299-464d5bea1e99}" type="slidenum">
               <a:rPr lang="en-GB" sz="1000" dirty="0">
                 <a:solidFill>
                   <a:srgbClr val="C4A35A"/>
@@ -21043,7 +21043,7 @@
           <a:lstStyle/>
           <a:p>
             <a:pPr algn="l"/>
-            <a:fld id="{f4439b7d-5f5f-4722-9f50-af19d8a9612f}" type="datetime3">
+            <a:fld id="{163db0e1-9c7b-4723-a275-11f73dd8a5c7}" type="datetime3">
               <a:rPr lang="en-GB" sz="1000" dirty="0">
                 <a:solidFill>
                   <a:srgbClr val="C4A35A"/>
@@ -21077,7 +21077,7 @@
           <a:lstStyle/>
           <a:p>
             <a:pPr algn="r"/>
-            <a:fld id="{dc6f4874-ec18-4aa7-b86c-1a263e989e8d}" type="slidenum">
+            <a:fld id="{7d2990bb-84f3-4e75-8478-7178bcab328b}" type="slidenum">
               <a:rPr lang="en-GB" sz="1000" dirty="0">
                 <a:solidFill>
                   <a:srgbClr val="C4A35A"/>
@@ -22046,7 +22046,7 @@
           <a:lstStyle/>
           <a:p>
             <a:pPr algn="l"/>
-            <a:fld id="{054e8042-0499-42dc-ae32-b7f6a90f8ce3}" type="datetime3">
+            <a:fld id="{92f5d081-8ca8-439d-8591-e64f6dde8bee}" type="datetime3">
               <a:rPr lang="en-GB" sz="1000" dirty="0">
                 <a:solidFill>
                   <a:srgbClr val="C4A35A"/>
@@ -22080,7 +22080,7 @@
           <a:lstStyle/>
           <a:p>
             <a:pPr algn="r"/>
-            <a:fld id="{2681fa6d-ff5e-4568-acd6-0ad485369a6e}" type="slidenum">
+            <a:fld id="{a1dc31de-12ca-44d3-89ca-5d68389493fb}" type="slidenum">
               <a:rPr lang="en-GB" sz="1000" dirty="0">
                 <a:solidFill>
                   <a:srgbClr val="C4A35A"/>
@@ -22871,7 +22871,7 @@
           <a:lstStyle/>
           <a:p>
             <a:pPr algn="l"/>
-            <a:fld id="{3a3e51fc-7134-4edc-879e-a34e7fcdb6d3}" type="datetime3">
+            <a:fld id="{9a4fbf78-f12e-49aa-9788-d6d30dd14603}" type="datetime3">
               <a:rPr lang="en-GB" sz="1000" dirty="0">
                 <a:solidFill>
                   <a:srgbClr val="C4A35A"/>
@@ -22905,7 +22905,7 @@
           <a:lstStyle/>
           <a:p>
             <a:pPr algn="r"/>
-            <a:fld id="{b45f0f29-41d1-44e5-afb2-6eaad4f92fed}" type="slidenum">
+            <a:fld id="{75382165-4812-411e-aa54-1e25131180c4}" type="slidenum">
               <a:rPr lang="en-GB" sz="1000" dirty="0">
                 <a:solidFill>
                   <a:srgbClr val="C4A35A"/>
@@ -23716,7 +23716,7 @@
           <a:lstStyle/>
           <a:p>
             <a:pPr algn="l"/>
-            <a:fld id="{ebeb2b45-25cc-4612-81d4-8555266e92f5}" type="datetime3">
+            <a:fld id="{bc71ca46-2131-4257-9429-57f9957cfee7}" type="datetime3">
               <a:rPr lang="en-GB" sz="1000" dirty="0">
                 <a:solidFill>
                   <a:srgbClr val="C4A35A"/>
@@ -23750,7 +23750,7 @@
           <a:lstStyle/>
           <a:p>
             <a:pPr algn="r"/>
-            <a:fld id="{dd0e9598-9073-4892-b0bb-04d4c82709e1}" type="slidenum">
+            <a:fld id="{77b496b8-90b6-4225-90e3-6229ca4feaf5}" type="slidenum">
               <a:rPr lang="en-GB" sz="1000" dirty="0">
                 <a:solidFill>
                   <a:srgbClr val="C4A35A"/>
@@ -24342,7 +24342,7 @@
           <a:lstStyle/>
           <a:p>
             <a:pPr algn="l"/>
-            <a:fld id="{50758c20-f5bd-4fb4-aaca-e09d37af4410}" type="datetime3">
+            <a:fld id="{80a1cfef-7f2d-45a1-b1fd-fdf6d9e4240a}" type="datetime3">
               <a:rPr lang="en-GB" sz="1000" dirty="0">
                 <a:solidFill>
                   <a:srgbClr val="C4A35A"/>
@@ -24376,7 +24376,7 @@
           <a:lstStyle/>
           <a:p>
             <a:pPr algn="r"/>
-            <a:fld id="{d415777c-f86d-4ccc-bcaf-d2c6bbabc25e}" type="slidenum">
+            <a:fld id="{21277150-b1e2-4deb-ba07-c71270a77b4c}" type="slidenum">
               <a:rPr lang="en-GB" sz="1000" dirty="0">
                 <a:solidFill>
                   <a:srgbClr val="C4A35A"/>
@@ -24968,7 +24968,7 @@
           <a:lstStyle/>
           <a:p>
             <a:pPr algn="l"/>
-            <a:fld id="{4e291afa-0131-4997-af56-a51dea43ddfe}" type="datetime3">
+            <a:fld id="{120b136f-223b-4107-9840-3e98487ffba1}" type="datetime3">
               <a:rPr lang="en-GB" sz="1000" dirty="0">
                 <a:solidFill>
                   <a:srgbClr val="C4A35A"/>
@@ -25002,7 +25002,7 @@
           <a:lstStyle/>
           <a:p>
             <a:pPr algn="r"/>
-            <a:fld id="{4a0248f8-445b-497d-b18b-9cf3b22198d4}" type="slidenum">
+            <a:fld id="{5ab24881-973b-4c80-a28e-4d7d823cb625}" type="slidenum">
               <a:rPr lang="en-GB" sz="1000" dirty="0">
                 <a:solidFill>
                   <a:srgbClr val="C4A35A"/>
@@ -25559,7 +25559,7 @@
           <a:lstStyle/>
           <a:p>
             <a:pPr algn="l"/>
-            <a:fld id="{07c22726-c74e-40b5-8f9b-6b83237095fe}" type="datetime3">
+            <a:fld id="{36408254-1929-44f3-9c9a-f459a1e038fd}" type="datetime3">
               <a:rPr lang="en-GB" sz="1000" dirty="0">
                 <a:solidFill>
                   <a:srgbClr val="C4A35A"/>
@@ -25593,7 +25593,7 @@
           <a:lstStyle/>
           <a:p>
             <a:pPr algn="r"/>
-            <a:fld id="{39a27919-5fcd-4548-a814-d47729fe662e}" type="slidenum">
+            <a:fld id="{6c691614-5aff-456d-8857-accc0dd8c635}" type="slidenum">
               <a:rPr lang="en-GB" sz="1000" dirty="0">
                 <a:solidFill>
                   <a:srgbClr val="C4A35A"/>
@@ -26089,7 +26089,7 @@
                 </a:solidFill>
                 <a:latin typeface="Calibri"/>
               </a:rPr>
-              <a:t>Wu, Q., Bansal, G., Zhang, J., Wu, Y., Li, B., Zhu, E., Jiang, L., Zhang, X., Zhang, S., Liu, J., Awadallah, A. H., White, R. W., Burger, D., and Wang, C. AutoGen: Enabling Next-Gen LLM Applications via Multi-Agent Conversations. Conference on Language Modeling (COLM) 2024.</a:t>
+              <a:t>Wu, Q., Bansal, G., Zhang, J., Wu, Y., Li, B., Zhu, E., Jiang, L., Zhang, X., Zhang, S., Liu, J., Awadallah, A. H., White, R. W., Burger, D., and Wang, C. AutoGen: Enabling Next-Gen LLM Applications via Multi-Agent Conversations. Proceedings of the First Conference on Language Modeling (COLM 2024).</a:t>
             </a:r>
           </a:p>
           <a:p>
@@ -26107,7 +26107,7 @@
                 </a:solidFill>
                 <a:latin typeface="Calibri"/>
               </a:rPr>
-              <a:t>Hong, S., Zhuge, M., Chen, J., Zheng, X., Cheng, Y., Wang, J., Zhang, C., Wang, Z., Yau, S. K. S., Lin, Z., Zhou, L., Ran, C., Xiao, L., Wu, C., and Schmidhuber, J. MetaGPT: Meta Programming for A Multi-Agent Collaborative Framework. ICLR 2024.</a:t>
+              <a:t>Hong, S., Zhuge, M., Chen, J., Zheng, X., Cheng, Y., Wang, J., Zhang, C., Wang, Z., Yau, S. K. S., Lin, Z., Zhou, L., Ran, C., Xiao, L., Wu, C., and Schmidhuber, J. MetaGPT: Meta Programming for A Multi-Agent Collaborative Framework. Proceedings of the Twelfth International Conference on Learning Representations (ICLR 2024).</a:t>
             </a:r>
           </a:p>
           <a:p>
@@ -26125,7 +26125,7 @@
                 </a:solidFill>
                 <a:latin typeface="Calibri"/>
               </a:rPr>
-              <a:t>Li, G., Hammoud, H. A. A. K., Itani, H., Khizbullin, D., and Ghanem, B. CAMEL: Communicative Agents for “Mind” Exploration of Large Language Model Society. NeurIPS 2023.</a:t>
+              <a:t>Li, G., Hammoud, H. A. A. K., Itani, H., Khizbullin, D., and Ghanem, B. CAMEL: Communicative Agents for “Mind” Exploration of Large Language Model Society. Advances in Neural Information Processing Systems 36 (NeurIPS 2023).</a:t>
             </a:r>
           </a:p>
           <a:p>
@@ -26143,7 +26143,7 @@
                 </a:solidFill>
                 <a:latin typeface="Calibri"/>
               </a:rPr>
-              <a:t>Qian, C., Liu, W., Liu, H., Chen, N., Dang, Y., Li, J., Yang, C., Chen, W., Su, Y., Cong, X., Xu, J., Li, D., Liu, Z., and Sun, M. ChatDev: Communicative Agents for Software Development. ACL 2024 (long), pages 15174–15186. doi:10.18653/v1/2024.acl-long.810.</a:t>
+              <a:t>Qian, C., Liu, W., Liu, H., Chen, N., Dang, Y., Li, J., Yang, C., Chen, W., Su, Y., Cong, X., Xu, J., Li, D., Liu, Z., and Sun, M. ChatDev: Communicative Agents for Software Development. Proceedings of the 62nd Annual Meeting of the Association for Computational Linguistics (Volume 1: Long Papers), pages 15174–15186. doi:10.18653/v1/2024.acl-long.810.</a:t>
             </a:r>
           </a:p>
         </p:txBody>
@@ -26169,7 +26169,7 @@
           <a:lstStyle/>
           <a:p>
             <a:pPr algn="l"/>
-            <a:fld id="{a5c718af-0715-4364-8b7d-7acc49722591}" type="datetime3">
+            <a:fld id="{ec1287ae-0a9e-4355-ab27-01d85551cf39}" type="datetime3">
               <a:rPr lang="en-GB" sz="1000" dirty="0">
                 <a:solidFill>
                   <a:srgbClr val="C4A35A"/>
@@ -26203,7 +26203,7 @@
           <a:lstStyle/>
           <a:p>
             <a:pPr algn="r"/>
-            <a:fld id="{df32d1cb-e294-4787-b634-982999d56f83}" type="slidenum">
+            <a:fld id="{df1bc67c-1d2b-495a-8ed0-01572de2a505}" type="slidenum">
               <a:rPr lang="en-GB" sz="1000" dirty="0">
                 <a:solidFill>
                   <a:srgbClr val="C4A35A"/>
@@ -26627,7 +26627,7 @@
                 </a:solidFill>
                 <a:latin typeface="Calibri"/>
               </a:rPr>
-              <a:t>Qin, Y., Liang, S., Ye, Y., Zhu, K., Yan, L., Lu, Y., Lin, Y., Cong, X., Tang, X., Qian, B., Zhao, S., Hong, L., Tian, R., Xie, R., Zhou, J., Gerstein, M., Li, D., Liu, Z., and Sun, M. ToolLLM: Facilitating Large Language Models to Master 16000+ Real-world APIs. ICLR 2024.</a:t>
+              <a:t>Qin, Y., Liang, S., Ye, Y., Zhu, K., Yan, L., Lu, Y., Lin, Y., Cong, X., Tang, X., Qian, B., Zhao, S., Hong, L., Tian, R., Xie, R., Zhou, J., Gerstein, M., Li, D., Liu, Z., and Sun, M. ToolLLM: Facilitating Large Language Models to Master 16000+ Real-world APIs. Proceedings of the Twelfth International Conference on Learning Representations (ICLR 2024).</a:t>
             </a:r>
           </a:p>
           <a:p>
@@ -26645,7 +26645,7 @@
                 </a:solidFill>
                 <a:latin typeface="Calibri"/>
               </a:rPr>
-              <a:t>Zheng, Y., Li, P., Liu, W., Liu, Y., Luan, J., and Wang, B. ToolRerank: Adaptive and Hierarchy-Aware Reranking for Tool Retrieval. LREC-COLING 2024, pages 16263–16273. ACL Anthology 2024.lrec-main.1413.</a:t>
+              <a:t>Zheng, Y., Li, P., Liu, W., Liu, Y., Luan, J., and Wang, B. ToolRerank: Adaptive and Hierarchy-Aware Reranking for Tool Retrieval. Proceedings of the 2024 Joint International Conference on Computational Linguistics, Language Resources and Evaluation (LREC-COLING 2024), pages 16263–16273. ACL Anthology 2024.lrec-main.1413.</a:t>
             </a:r>
           </a:p>
           <a:p>
@@ -26663,7 +26663,7 @@
                 </a:solidFill>
                 <a:latin typeface="Calibri"/>
               </a:rPr>
-              <a:t>Ong, I., Almahairi, A., Wu, V., Chiang, W.-L., Wu, T., Gonzalez, J. E., Kadous, M. W., and Stoica, I. RouteLLM: Learning to Route LLMs from Preference Data. ICLR 2025.</a:t>
+              <a:t>Ong, I., Almahairi, A., Wu, V., Chiang, W.-L., Wu, T., Gonzalez, J. E., Kadous, M. W., and Stoica, I. RouteLLM: Learning to Route LLMs from Preference Data. Proceedings of the Thirteenth International Conference on Learning Representations (ICLR 2025).</a:t>
             </a:r>
           </a:p>
           <a:p>
@@ -26699,7 +26699,7 @@
                 </a:solidFill>
                 <a:latin typeface="Calibri"/>
               </a:rPr>
-              <a:t>Yue, Y., Zhang, G., Liu, B., Wan, G., Wang, K., Cheng, D., and Qi, Y. MasRouter: Learning to Route LLMs for Multi-Agent Systems. ACL 2025 (long), pages 15549–15572. doi:10.18653/v1/2025.acl-long.757.</a:t>
+              <a:t>Yue, Y., Zhang, G., Liu, B., Wan, G., Wang, K., Cheng, D., and Qi, Y. MasRouter: Learning to Route LLMs for Multi-Agent Systems. Proceedings of the 63rd Annual Meeting of the Association for Computational Linguistics (Volume 1: Long Papers), pages 15549–15572. doi:10.18653/v1/2025.acl-long.757.</a:t>
             </a:r>
           </a:p>
           <a:p>
@@ -26717,7 +26717,7 @@
                 </a:solidFill>
                 <a:latin typeface="Calibri"/>
               </a:rPr>
-              <a:t>Jiang, H., Wu, Q., Lin, C.-Y., Yang, Y., and Qiu, L. LLMLingua: Compressing Prompts for Accelerated Inference of Large Language Models. EMNLP 2023, pages 13358–13376. doi:10.18653/v1/2023.emnlp-main.825.</a:t>
+              <a:t>Jiang, H., Wu, Q., Lin, C.-Y., Yang, Y., and Qiu, L. LLMLingua: Compressing Prompts for Accelerated Inference of Large Language Models. Proceedings of the 2023 Conference on Empirical Methods in Natural Language Processing, pages 13358–13376. doi:10.18653/v1/2023.emnlp-main.825.</a:t>
             </a:r>
           </a:p>
           <a:p>
@@ -26735,7 +26735,7 @@
                 </a:solidFill>
                 <a:latin typeface="Calibri"/>
               </a:rPr>
-              <a:t>Wei, J., Wang, X., Schuurmans, D., Bosma, M., Ichter, B., Xia, F., Chi, E., Le, Q., and Zhou, D. Chain-of-Thought Prompting Elicits Reasoning in Large Language Models. NeurIPS 2022.</a:t>
+              <a:t>Wei, J., Wang, X., Schuurmans, D., Bosma, M., Ichter, B., Xia, F., Chi, E., Le, Q., and Zhou, D. Chain-of-Thought Prompting Elicits Reasoning in Large Language Models. Advances in Neural Information Processing Systems 35 (NeurIPS 2022).</a:t>
             </a:r>
           </a:p>
           <a:p>
@@ -26753,7 +26753,7 @@
                 </a:solidFill>
                 <a:latin typeface="Calibri"/>
               </a:rPr>
-              <a:t>Yao, S., Zhao, J., Yu, D., Du, N., Shafran, I., Narasimhan, K., and Cao, Y. ReAct: Synergizing Reasoning and Acting in Language Models. ICLR 2023.</a:t>
+              <a:t>Yao, S., Zhao, J., Yu, D., Du, N., Shafran, I., Narasimhan, K., and Cao, Y. ReAct: Synergizing Reasoning and Acting in Language Models. Proceedings of the Eleventh International Conference on Learning Representations (ICLR 2023).</a:t>
             </a:r>
           </a:p>
         </p:txBody>
@@ -26779,7 +26779,7 @@
           <a:lstStyle/>
           <a:p>
             <a:pPr algn="l"/>
-            <a:fld id="{70191280-7c70-429a-9484-252d21e94484}" type="datetime3">
+            <a:fld id="{511d6bfe-66cf-4e4e-a423-9a637bbbbc4c}" type="datetime3">
               <a:rPr lang="en-GB" sz="1000" dirty="0">
                 <a:solidFill>
                   <a:srgbClr val="C4A35A"/>
@@ -26813,7 +26813,7 @@
           <a:lstStyle/>
           <a:p>
             <a:pPr algn="r"/>
-            <a:fld id="{89bee0e0-4768-4480-b582-39cbd4fc3ffd}" type="slidenum">
+            <a:fld id="{349acc61-3c29-4969-821e-0cb397fb4045}" type="slidenum">
               <a:rPr lang="en-GB" sz="1000" dirty="0">
                 <a:solidFill>
                   <a:srgbClr val="C4A35A"/>
@@ -27237,7 +27237,7 @@
                 </a:solidFill>
                 <a:latin typeface="Calibri"/>
               </a:rPr>
-              <a:t>Yao, S., Yu, D., Zhao, J., Shafran, I., Griffiths, T. L., Cao, Y., and Narasimhan, K. Tree of Thoughts: Deliberate Problem Solving with Large Language Models. NeurIPS 2023.</a:t>
+              <a:t>Yao, S., Yu, D., Zhao, J., Shafran, I., Griffiths, T. L., Cao, Y., and Narasimhan, K. Tree of Thoughts: Deliberate Problem Solving with Large Language Models. Advances in Neural Information Processing Systems 36 (NeurIPS 2023).</a:t>
             </a:r>
           </a:p>
           <a:p>
@@ -27255,7 +27255,7 @@
                 </a:solidFill>
                 <a:latin typeface="Calibri"/>
               </a:rPr>
-              <a:t>Park, J. S., O’Brien, J. C., Cai, C. J., Morris, M. R., Liang, P., and Bernstein, M. S. Generative Agents: Interactive Simulacra of Human Behavior. UIST 2023 (Best Paper). doi:10.1145/3586183.3606763.</a:t>
+              <a:t>Park, J. S., O’Brien, J. C., Cai, C. J., Morris, M. R., Liang, P., and Bernstein, M. S. Generative Agents: Interactive Simulacra of Human Behavior. Proceedings of the 36th Annual ACM Symposium on User Interface Software and Technology (UIST 2023), Best Paper. doi:10.1145/3586183.3606763.</a:t>
             </a:r>
           </a:p>
           <a:p>
@@ -27291,7 +27291,7 @@
                 </a:solidFill>
                 <a:latin typeface="Calibri"/>
               </a:rPr>
-              <a:t>Shinn, N., Cassano, F., Gopinath, A., Narasimhan, K., and Yao, S. Reflexion: Language Agents with Verbal Reinforcement Learning. NeurIPS 2023.</a:t>
+              <a:t>Shinn, N., Cassano, F., Gopinath, A., Narasimhan, K., and Yao, S. Reflexion: Language Agents with Verbal Reinforcement Learning. Advances in Neural Information Processing Systems 36 (NeurIPS 2023).</a:t>
             </a:r>
           </a:p>
           <a:p>
@@ -27309,7 +27309,7 @@
                 </a:solidFill>
                 <a:latin typeface="Calibri"/>
               </a:rPr>
-              <a:t>Shen, Y., Song, K., Tan, X., Li, D., Lu, W., and Zhuang, Y. HuggingGPT: Solving AI Tasks with ChatGPT and its Friends in Hugging Face. NeurIPS 2023.</a:t>
+              <a:t>Shen, Y., Song, K., Tan, X., Li, D., Lu, W., and Zhuang, Y. HuggingGPT: Solving AI Tasks with ChatGPT and its Friends in Hugging Face. Advances in Neural Information Processing Systems 36 (NeurIPS 2023).</a:t>
             </a:r>
           </a:p>
           <a:p>
@@ -27327,7 +27327,7 @@
                 </a:solidFill>
                 <a:latin typeface="Calibri"/>
               </a:rPr>
-              <a:t>Schick, T., Dwivedi-Yu, J., Dessì, R., Raileanu, R., Lomeli, M., Hambro, E., Zettlemoyer, L., Cancedda, N., and Scialom, T. Toolformer: Language Models Can Teach Themselves to Use Tools. NeurIPS 2023.</a:t>
+              <a:t>Schick, T., Dwivedi-Yu, J., Dessì, R., Raileanu, R., Lomeli, M., Hambro, E., Zettlemoyer, L., Cancedda, N., and Scialom, T. Toolformer: Language Models Can Teach Themselves to Use Tools. Advances in Neural Information Processing Systems 36 (NeurIPS 2023).</a:t>
             </a:r>
           </a:p>
           <a:p>
@@ -27345,7 +27345,7 @@
                 </a:solidFill>
                 <a:latin typeface="Calibri"/>
               </a:rPr>
-              <a:t>Guo, H., Woodruff, A., and Yadav, A. Improving Lives of Indebted Farmers Using Deep Learning: Predicting Agricultural Produce Prices Using Convolutional Neural Networks (PECAD). AAAI 2020. doi:10.1609/aaai.v34i08.7039. AGMARKNET scrape for price prediction; cited here as Indian OGD precedent, not as a baseline this proposal claims to beat.</a:t>
+              <a:t>Guo, H., Woodruff, A., and Yadav, A. Improving Lives of Indebted Farmers Using Deep Learning: Predicting Agricultural Produce Prices Using Convolutional Neural Networks (PECAD). Proceedings of the AAAI Conference on Artificial Intelligence, 34(08):13294–13299. doi:10.1609/aaai.v34i08.7039. AGMARKNET scrape for price prediction; cited here as Indian OGD precedent, not as a baseline this proposal claims to beat.</a:t>
             </a:r>
           </a:p>
           <a:p>
@@ -27424,7 +27424,7 @@
           <a:lstStyle/>
           <a:p>
             <a:pPr algn="l"/>
-            <a:fld id="{5cd37dfa-9fb7-413d-b0b7-88ae9a1b91d7}" type="datetime3">
+            <a:fld id="{eed4704f-367c-4efb-a9b9-d173f636102b}" type="datetime3">
               <a:rPr lang="en-GB" sz="1000" dirty="0">
                 <a:solidFill>
                   <a:srgbClr val="C4A35A"/>
@@ -27458,7 +27458,7 @@
           <a:lstStyle/>
           <a:p>
             <a:pPr algn="r"/>
-            <a:fld id="{1b06f2d8-21ae-472f-b4de-411fbece50d1}" type="slidenum">
+            <a:fld id="{16feb509-4f75-402f-822f-80fdd9f94104}" type="slidenum">
               <a:rPr lang="en-GB" sz="1000" dirty="0">
                 <a:solidFill>
                   <a:srgbClr val="C4A35A"/>
@@ -28033,7 +28033,7 @@
           <a:lstStyle/>
           <a:p>
             <a:pPr algn="l"/>
-            <a:fld id="{4a6fc49e-0990-4e55-8cb5-7405b3c209d7}" type="datetime3">
+            <a:fld id="{4237108f-9196-42a8-9ede-5ba3d99c00ec}" type="datetime3">
               <a:rPr lang="en-GB" sz="1000" dirty="0">
                 <a:solidFill>
                   <a:srgbClr val="C4A35A"/>
@@ -28067,7 +28067,7 @@
           <a:lstStyle/>
           <a:p>
             <a:pPr algn="r"/>
-            <a:fld id="{061762f7-2cdb-43da-bbcb-e56ad762c65d}" type="slidenum">
+            <a:fld id="{d181acde-5a46-47ce-bda5-05478a7ffcb5}" type="slidenum">
               <a:rPr lang="en-GB" sz="1000" dirty="0">
                 <a:solidFill>
                   <a:srgbClr val="C4A35A"/>
@@ -28624,7 +28624,7 @@
           <a:lstStyle/>
           <a:p>
             <a:pPr algn="l"/>
-            <a:fld id="{0298fed2-18a5-4eb8-9eca-597534549e68}" type="datetime3">
+            <a:fld id="{0dcdaeb4-6425-4e4d-aeb2-4aa0b0e2d629}" type="datetime3">
               <a:rPr lang="en-GB" sz="1000" dirty="0">
                 <a:solidFill>
                   <a:srgbClr val="C4A35A"/>
@@ -28658,7 +28658,7 @@
           <a:lstStyle/>
           <a:p>
             <a:pPr algn="r"/>
-            <a:fld id="{045300fe-3791-4257-bac4-8320224a57f2}" type="slidenum">
+            <a:fld id="{21984bfa-6b85-424e-a2a7-1a191f69139d}" type="slidenum">
               <a:rPr lang="en-GB" sz="1000" dirty="0">
                 <a:solidFill>
                   <a:srgbClr val="C4A35A"/>
@@ -29076,7 +29076,7 @@
                 </a:solidFill>
                 <a:latin typeface="Calibri"/>
               </a:rPr>
-              <a:t>FET template. Each paper is one Evidence block: Author(s), Year, Title, Publication, Objective, Methodology, Findings, Limitations, To solve the research gap. Venues are journals or top international conference proceedings — not preprint reports.</a:t>
+              <a:t>FET template. Each paper is one Evidence block: Author(s), Year, Title, Publication, Objective, Methodology, Findings, Limitations, To solve the research gap. Publication is the journal or the full international conference proceedings title — not a preprint report.</a:t>
             </a:r>
           </a:p>
         </p:txBody>
@@ -29710,7 +29710,7 @@
           <a:lstStyle/>
           <a:p>
             <a:pPr algn="l"/>
-            <a:fld id="{01e485bb-39a8-4822-acfc-53b2f1e48acc}" type="datetime3">
+            <a:fld id="{f0867af2-9d98-4820-9d7c-4f6c6c1b4e22}" type="datetime3">
               <a:rPr lang="en-GB" sz="1000" dirty="0">
                 <a:solidFill>
                   <a:srgbClr val="C4A35A"/>
@@ -29744,7 +29744,7 @@
           <a:lstStyle/>
           <a:p>
             <a:pPr algn="r"/>
-            <a:fld id="{83e84172-a615-4fe6-8a7e-7964370945d5}" type="slidenum">
+            <a:fld id="{03d0a7bb-bfe6-4a6e-b6fd-fc9e6c09aebd}" type="slidenum">
               <a:rPr lang="en-GB" sz="1000" dirty="0">
                 <a:solidFill>
                   <a:srgbClr val="C4A35A"/>
@@ -30796,7 +30796,7 @@
           <a:lstStyle/>
           <a:p>
             <a:pPr algn="l"/>
-            <a:fld id="{61e08b4d-3c4f-4186-abfa-811ec51e3a90}" type="datetime3">
+            <a:fld id="{14db6e45-e613-4f57-a6b2-5d017d02dfd2}" type="datetime3">
               <a:rPr lang="en-GB" sz="1000" dirty="0">
                 <a:solidFill>
                   <a:srgbClr val="C4A35A"/>
@@ -30830,7 +30830,7 @@
           <a:lstStyle/>
           <a:p>
             <a:pPr algn="r"/>
-            <a:fld id="{7749d738-8b1d-4333-8290-1681ef7f14ea}" type="slidenum">
+            <a:fld id="{e1424b5e-4f83-4f6a-87f1-ba4f4878446d}" type="slidenum">
               <a:rPr lang="en-GB" sz="1000" dirty="0">
                 <a:solidFill>
                   <a:srgbClr val="C4A35A"/>
@@ -31440,7 +31440,7 @@
                 </a:solidFill>
                 <a:latin typeface="Calibri"/>
               </a:rPr>
-              <a:t>Conference on Language Modeling (COLM) 2024</a:t>
+              <a:t>Proceedings of the First Conference on Language Modeling (COLM 2024)</a:t>
             </a:r>
           </a:p>
           <a:p>
@@ -31744,7 +31744,7 @@
                 </a:solidFill>
                 <a:latin typeface="Calibri"/>
               </a:rPr>
-              <a:t>ICLR 2024</a:t>
+              <a:t>Proceedings of the Twelfth International Conference on Learning Representations (ICLR 2024)</a:t>
             </a:r>
           </a:p>
           <a:p>
@@ -31882,7 +31882,7 @@
           <a:lstStyle/>
           <a:p>
             <a:pPr algn="l"/>
-            <a:fld id="{fefb8df8-8a24-4489-bdca-73608b7453e9}" type="datetime3">
+            <a:fld id="{80b00913-893a-4471-a7cf-625f85ea8a26}" type="datetime3">
               <a:rPr lang="en-GB" sz="1000" dirty="0">
                 <a:solidFill>
                   <a:srgbClr val="C4A35A"/>
@@ -31916,7 +31916,7 @@
           <a:lstStyle/>
           <a:p>
             <a:pPr algn="r"/>
-            <a:fld id="{38cdff50-6b0d-4fcb-8de0-972f8dc33330}" type="slidenum">
+            <a:fld id="{71cd3473-68cd-4a5a-800c-4791cfc239b5}" type="slidenum">
               <a:rPr lang="en-GB" sz="1000" dirty="0">
                 <a:solidFill>
                   <a:srgbClr val="C4A35A"/>
@@ -32526,7 +32526,7 @@
                 </a:solidFill>
                 <a:latin typeface="Calibri"/>
               </a:rPr>
-              <a:t>ACL 2024 (long), pages 15174–15186. doi:10.18653/v1/2024.acl-long.810</a:t>
+              <a:t>Proceedings of the 62nd Annual Meeting of the Association for Computational Linguistics (Volume 1: Long Papers), pages 15174–15186. doi:10.18653/v1/2024.acl-long.810</a:t>
             </a:r>
           </a:p>
           <a:p>
@@ -32830,7 +32830,7 @@
                 </a:solidFill>
                 <a:latin typeface="Calibri"/>
               </a:rPr>
-              <a:t>NeurIPS 2023</a:t>
+              <a:t>Advances in Neural Information Processing Systems 36 (NeurIPS 2023)</a:t>
             </a:r>
           </a:p>
           <a:p>
@@ -32968,7 +32968,7 @@
           <a:lstStyle/>
           <a:p>
             <a:pPr algn="l"/>
-            <a:fld id="{71eb00ed-f26f-465a-b125-1720ec23410d}" type="datetime3">
+            <a:fld id="{355fe881-3713-41b5-9e61-22eac1c78df8}" type="datetime3">
               <a:rPr lang="en-GB" sz="1000" dirty="0">
                 <a:solidFill>
                   <a:srgbClr val="C4A35A"/>
@@ -33002,7 +33002,7 @@
           <a:lstStyle/>
           <a:p>
             <a:pPr algn="r"/>
-            <a:fld id="{783abf1c-9725-452d-95f0-fcc11e43f05f}" type="slidenum">
+            <a:fld id="{94abc3fc-b33b-4e92-a246-746dd6ce8055}" type="slidenum">
               <a:rPr lang="en-GB" sz="1000" dirty="0">
                 <a:solidFill>
                   <a:srgbClr val="C4A35A"/>
@@ -33612,7 +33612,7 @@
                 </a:solidFill>
                 <a:latin typeface="Calibri"/>
               </a:rPr>
-              <a:t>ICLR 2024</a:t>
+              <a:t>Proceedings of the Twelfth International Conference on Learning Representations (ICLR 2024)</a:t>
             </a:r>
           </a:p>
           <a:p>
@@ -33916,7 +33916,7 @@
                 </a:solidFill>
                 <a:latin typeface="Calibri"/>
               </a:rPr>
-              <a:t>LREC-COLING 2024, pages 16263–16273. ACL Anthology 2024.lrec-main.1413</a:t>
+              <a:t>Proceedings of the 2024 Joint International Conference on Computational Linguistics, Language Resources and Evaluation (LREC-COLING 2024), pages 16263–16273. ACL Anthology 2024.lrec-main.1413</a:t>
             </a:r>
           </a:p>
           <a:p>
@@ -34054,7 +34054,7 @@
           <a:lstStyle/>
           <a:p>
             <a:pPr algn="l"/>
-            <a:fld id="{0cf3df41-7e57-4ab9-b046-f45e28b54131}" type="datetime3">
+            <a:fld id="{16d6341f-3d26-4718-830f-7d6c198fd3b6}" type="datetime3">
               <a:rPr lang="en-GB" sz="1000" dirty="0">
                 <a:solidFill>
                   <a:srgbClr val="C4A35A"/>
@@ -34088,7 +34088,7 @@
           <a:lstStyle/>
           <a:p>
             <a:pPr algn="r"/>
-            <a:fld id="{8de0a052-db6e-4e7a-9741-268ba6ab249e}" type="slidenum">
+            <a:fld id="{9011e848-7ea6-478c-86c6-852cdf7dedcc}" type="slidenum">
               <a:rPr lang="en-GB" sz="1000" dirty="0">
                 <a:solidFill>
                   <a:srgbClr val="C4A35A"/>

--- a/laboratory/docs/slides/ACRS_PhD_Proposal_JenishaT_24ETRP720001.pptx
+++ b/laboratory/docs/slides/ACRS_PhD_Proposal_JenishaT_24ETRP720001.pptx
@@ -3808,30 +3808,6 @@
           </a:p>
         </p:txBody>
       </p:sp>
-      <p:pic>
-        <p:nvPicPr>
-          <p:cNvPr id="15" name="Picture 14" descr="campus-coe-slide.jpg"/>
-          <p:cNvPicPr>
-            <a:picLocks noChangeAspect="1"/>
-          </p:cNvPicPr>
-          <p:nvPr/>
-        </p:nvPicPr>
-        <p:blipFill>
-          <a:blip r:embed="rId4"/>
-          <a:stretch>
-            <a:fillRect/>
-          </a:stretch>
-        </p:blipFill>
-        <p:spPr>
-          <a:xfrm>
-            <a:off x="365760" y="5687568"/>
-            <a:ext cx="11430000" cy="749808"/>
-          </a:xfrm>
-          <a:prstGeom prst="rect">
-            <a:avLst/>
-          </a:prstGeom>
-        </p:spPr>
-      </p:pic>
       <p:sp>
         <p:nvSpPr>
           <p:cNvPr id="4001" name="Automatic Date 1"/>
@@ -3853,7 +3829,7 @@
           <a:lstStyle/>
           <a:p>
             <a:pPr algn="l"/>
-            <a:fld id="{69f3f7cc-cb36-4aee-9eaa-242d594ab6cf}" type="datetime3">
+            <a:fld id="{18db1da8-0893-407e-b629-303c77d36d2d}" type="datetime3">
               <a:rPr lang="en-GB" sz="1000" dirty="0">
                 <a:solidFill>
                   <a:srgbClr val="9AA3AE"/>
@@ -3887,7 +3863,7 @@
           <a:lstStyle/>
           <a:p>
             <a:pPr algn="ctr"/>
-            <a:fld id="{b8fc8b65-38ad-47f0-af92-b142dc1f0de5}" type="slidenum">
+            <a:fld id="{12525ce8-caf5-4c22-bd37-40b6d15d9483}" type="slidenum">
               <a:rPr lang="en-GB" sz="1200" b="1" dirty="0">
                 <a:solidFill>
                   <a:srgbClr val="FFFFFF"/>
@@ -4814,7 +4790,7 @@
           <a:lstStyle/>
           <a:p>
             <a:pPr algn="l"/>
-            <a:fld id="{663338ed-6a11-4679-a76d-934d7acf14fc}" type="datetime3">
+            <a:fld id="{b065faf0-92b4-41a4-8344-9916cf1e3201}" type="datetime3">
               <a:rPr lang="en-GB" sz="1000" dirty="0">
                 <a:solidFill>
                   <a:srgbClr val="9AA3AE"/>
@@ -4848,7 +4824,7 @@
           <a:lstStyle/>
           <a:p>
             <a:pPr algn="ctr"/>
-            <a:fld id="{fa9d1acb-eccd-496d-aacb-97df922365fb}" type="slidenum">
+            <a:fld id="{80cac5db-df01-4d38-b5bc-51019ef67e78}" type="slidenum">
               <a:rPr lang="en-GB" sz="1200" b="1" dirty="0">
                 <a:solidFill>
                   <a:srgbClr val="FFFFFF"/>
@@ -5775,7 +5751,7 @@
           <a:lstStyle/>
           <a:p>
             <a:pPr algn="l"/>
-            <a:fld id="{2ddb174a-8886-4ed5-83af-a89ecc93d78c}" type="datetime3">
+            <a:fld id="{abbc29fb-a276-4f25-a9e8-44af1baa0bf1}" type="datetime3">
               <a:rPr lang="en-GB" sz="1000" dirty="0">
                 <a:solidFill>
                   <a:srgbClr val="9AA3AE"/>
@@ -5809,7 +5785,7 @@
           <a:lstStyle/>
           <a:p>
             <a:pPr algn="ctr"/>
-            <a:fld id="{2c0ab186-74c2-48ee-a991-955d5c3fd7b9}" type="slidenum">
+            <a:fld id="{be1fc8c4-b12d-43c4-9062-a1851ef41dc4}" type="slidenum">
               <a:rPr lang="en-GB" sz="1200" b="1" dirty="0">
                 <a:solidFill>
                   <a:srgbClr val="FFFFFF"/>
@@ -6736,7 +6712,7 @@
           <a:lstStyle/>
           <a:p>
             <a:pPr algn="l"/>
-            <a:fld id="{0f0557d8-bc8d-4ceb-bf47-c2b974ec4a87}" type="datetime3">
+            <a:fld id="{3d76038e-a90a-4c21-bc9c-7bac0b10343c}" type="datetime3">
               <a:rPr lang="en-GB" sz="1000" dirty="0">
                 <a:solidFill>
                   <a:srgbClr val="9AA3AE"/>
@@ -6770,7 +6746,7 @@
           <a:lstStyle/>
           <a:p>
             <a:pPr algn="ctr"/>
-            <a:fld id="{46b22415-f569-41d8-be4e-a7a8f9579ace}" type="slidenum">
+            <a:fld id="{a394284a-bc50-4a7e-beca-78f6bb0ecb83}" type="slidenum">
               <a:rPr lang="en-GB" sz="1200" b="1" dirty="0">
                 <a:solidFill>
                   <a:srgbClr val="FFFFFF"/>
@@ -7697,7 +7673,7 @@
           <a:lstStyle/>
           <a:p>
             <a:pPr algn="l"/>
-            <a:fld id="{45dad787-7060-4aee-b661-877af8bd2961}" type="datetime3">
+            <a:fld id="{283f2263-8b34-4f85-a994-08840dfd6c4b}" type="datetime3">
               <a:rPr lang="en-GB" sz="1000" dirty="0">
                 <a:solidFill>
                   <a:srgbClr val="9AA3AE"/>
@@ -7731,7 +7707,7 @@
           <a:lstStyle/>
           <a:p>
             <a:pPr algn="ctr"/>
-            <a:fld id="{859621d4-b76b-4f2a-9061-4745102ec863}" type="slidenum">
+            <a:fld id="{032ff5a3-b61e-4220-8559-131659f1de93}" type="slidenum">
               <a:rPr lang="en-GB" sz="1200" b="1" dirty="0">
                 <a:solidFill>
                   <a:srgbClr val="FFFFFF"/>
@@ -8553,7 +8529,7 @@
           <a:lstStyle/>
           <a:p>
             <a:pPr algn="l"/>
-            <a:fld id="{285702b5-b9bf-4c27-a7dd-e60a4913ce11}" type="datetime3">
+            <a:fld id="{0176bb95-5e59-4a2b-a594-a040bbb2efea}" type="datetime3">
               <a:rPr lang="en-GB" sz="1000" dirty="0">
                 <a:solidFill>
                   <a:srgbClr val="9AA3AE"/>
@@ -8587,7 +8563,7 @@
           <a:lstStyle/>
           <a:p>
             <a:pPr algn="ctr"/>
-            <a:fld id="{267ecccf-3bb3-49bf-8563-f88d3b00235b}" type="slidenum">
+            <a:fld id="{e89c4a6f-eb0a-4fee-94e2-00d48459a753}" type="slidenum">
               <a:rPr lang="en-GB" sz="1200" b="1" dirty="0">
                 <a:solidFill>
                   <a:srgbClr val="FFFFFF"/>
@@ -9341,7 +9317,7 @@
           <a:lstStyle/>
           <a:p>
             <a:pPr algn="l"/>
-            <a:fld id="{aa32ce77-ed44-4a66-b31e-776164193142}" type="datetime3">
+            <a:fld id="{77fc0926-5000-4272-8cb7-3956fce39bec}" type="datetime3">
               <a:rPr lang="en-GB" sz="1000" dirty="0">
                 <a:solidFill>
                   <a:srgbClr val="9AA3AE"/>
@@ -9375,7 +9351,7 @@
           <a:lstStyle/>
           <a:p>
             <a:pPr algn="ctr"/>
-            <a:fld id="{23d1c1fa-7a16-43f0-ae35-00f57670bb42}" type="slidenum">
+            <a:fld id="{8e090adf-3bda-4b43-b7be-85b18d16c69f}" type="slidenum">
               <a:rPr lang="en-GB" sz="1200" b="1" dirty="0">
                 <a:solidFill>
                   <a:srgbClr val="FFFFFF"/>
@@ -9842,7 +9818,7 @@
           <a:lstStyle/>
           <a:p>
             <a:pPr algn="l"/>
-            <a:fld id="{4d1812ce-7a07-467f-a995-63a4b49f983d}" type="datetime3">
+            <a:fld id="{30004519-f4f2-4fb0-94bc-8143c72aaf64}" type="datetime3">
               <a:rPr lang="en-GB" sz="1000" dirty="0">
                 <a:solidFill>
                   <a:srgbClr val="9AA3AE"/>
@@ -9876,7 +9852,7 @@
           <a:lstStyle/>
           <a:p>
             <a:pPr algn="ctr"/>
-            <a:fld id="{f043d800-f4d2-402b-b8a0-f73f5cccdc64}" type="slidenum">
+            <a:fld id="{178ed62a-689d-473d-b5c8-7b24b91bbed5}" type="slidenum">
               <a:rPr lang="en-GB" sz="1200" b="1" dirty="0">
                 <a:solidFill>
                   <a:srgbClr val="FFFFFF"/>
@@ -10308,7 +10284,7 @@
           <a:lstStyle/>
           <a:p>
             <a:pPr algn="l"/>
-            <a:fld id="{733625af-2220-4803-88ad-755412064500}" type="datetime3">
+            <a:fld id="{54d4075f-f591-4f89-b838-cb839363d5b5}" type="datetime3">
               <a:rPr lang="en-GB" sz="1000" dirty="0">
                 <a:solidFill>
                   <a:srgbClr val="9AA3AE"/>
@@ -10342,7 +10318,7 @@
           <a:lstStyle/>
           <a:p>
             <a:pPr algn="ctr"/>
-            <a:fld id="{12a8cc5f-1e62-471c-98a5-6172e2704195}" type="slidenum">
+            <a:fld id="{51e42d80-cb51-4383-84d4-8fd198bc6fb3}" type="slidenum">
               <a:rPr lang="en-GB" sz="1200" b="1" dirty="0">
                 <a:solidFill>
                   <a:srgbClr val="FFFFFF"/>
@@ -11028,7 +11004,7 @@
           <a:lstStyle/>
           <a:p>
             <a:pPr algn="l"/>
-            <a:fld id="{3799e83d-7c2b-44f0-90c0-5c474fe4126c}" type="datetime3">
+            <a:fld id="{af92c558-fbb5-4adf-93db-8108ac94cd54}" type="datetime3">
               <a:rPr lang="en-GB" sz="1000" dirty="0">
                 <a:solidFill>
                   <a:srgbClr val="9AA3AE"/>
@@ -11062,7 +11038,7 @@
           <a:lstStyle/>
           <a:p>
             <a:pPr algn="ctr"/>
-            <a:fld id="{8f91d0a1-469b-43b0-ba14-3c606f690304}" type="slidenum">
+            <a:fld id="{5cc06e59-f315-448c-936d-a3f1d53b5fdc}" type="slidenum">
               <a:rPr lang="en-GB" sz="1200" b="1" dirty="0">
                 <a:solidFill>
                   <a:srgbClr val="FFFFFF"/>
@@ -11960,7 +11936,7 @@
           <a:lstStyle/>
           <a:p>
             <a:pPr algn="l"/>
-            <a:fld id="{9fef5810-f08e-4e54-a9cc-afa686652d28}" type="datetime3">
+            <a:fld id="{8e4854e5-5fef-4836-9214-63f2ab7a534e}" type="datetime3">
               <a:rPr lang="en-GB" sz="1000" dirty="0">
                 <a:solidFill>
                   <a:srgbClr val="9AA3AE"/>
@@ -11994,7 +11970,7 @@
           <a:lstStyle/>
           <a:p>
             <a:pPr algn="ctr"/>
-            <a:fld id="{c2d3578f-71ad-4b74-aa94-5c4909fab8ab}" type="slidenum">
+            <a:fld id="{8fa83415-597a-410c-b17e-fb582cb1e8f9}" type="slidenum">
               <a:rPr lang="en-GB" sz="1200" b="1" dirty="0">
                 <a:solidFill>
                   <a:srgbClr val="FFFFFF"/>
@@ -12846,7 +12822,7 @@
           <a:lstStyle/>
           <a:p>
             <a:pPr algn="l"/>
-            <a:fld id="{b554c97c-90e7-467b-a8cf-28b62707001c}" type="datetime3">
+            <a:fld id="{3336881b-17f7-4a1b-82e9-413f94f6e4c8}" type="datetime3">
               <a:rPr lang="en-GB" sz="1000" dirty="0">
                 <a:solidFill>
                   <a:srgbClr val="9AA3AE"/>
@@ -12880,7 +12856,7 @@
           <a:lstStyle/>
           <a:p>
             <a:pPr algn="ctr"/>
-            <a:fld id="{b8c55a7c-68bc-4313-b9df-773cceacac9e}" type="slidenum">
+            <a:fld id="{949e44ac-0bdd-43c9-9726-73c2ff22c101}" type="slidenum">
               <a:rPr lang="en-GB" sz="1200" b="1" dirty="0">
                 <a:solidFill>
                   <a:srgbClr val="FFFFFF"/>
@@ -13670,7 +13646,7 @@
           <a:lstStyle/>
           <a:p>
             <a:pPr algn="l"/>
-            <a:fld id="{d3b7681c-8fbf-4296-ac28-93857a304417}" type="datetime3">
+            <a:fld id="{bd275d07-6f45-42fd-98f2-c34a4749ac10}" type="datetime3">
               <a:rPr lang="en-GB" sz="1000" dirty="0">
                 <a:solidFill>
                   <a:srgbClr val="9AA3AE"/>
@@ -13704,7 +13680,7 @@
           <a:lstStyle/>
           <a:p>
             <a:pPr algn="ctr"/>
-            <a:fld id="{16e564e6-a317-43b6-b54d-2f07b8284335}" type="slidenum">
+            <a:fld id="{ea141fdf-28af-448a-891f-76d31d24ab7a}" type="slidenum">
               <a:rPr lang="en-GB" sz="1200" b="1" dirty="0">
                 <a:solidFill>
                   <a:srgbClr val="FFFFFF"/>
@@ -14440,7 +14416,7 @@
           <a:lstStyle/>
           <a:p>
             <a:pPr algn="l"/>
-            <a:fld id="{9df6cce8-aa4f-48da-9a6b-c46cb35b535a}" type="datetime3">
+            <a:fld id="{9310211e-0904-4ed1-89c2-32f530052a4a}" type="datetime3">
               <a:rPr lang="en-GB" sz="1000" dirty="0">
                 <a:solidFill>
                   <a:srgbClr val="9AA3AE"/>
@@ -14474,7 +14450,7 @@
           <a:lstStyle/>
           <a:p>
             <a:pPr algn="ctr"/>
-            <a:fld id="{4d4e1cf0-791f-4e84-91df-b1b8365e9b26}" type="slidenum">
+            <a:fld id="{5612f403-6e9d-4d87-845e-a2cf7236c288}" type="slidenum">
               <a:rPr lang="en-GB" sz="1200" b="1" dirty="0">
                 <a:solidFill>
                   <a:srgbClr val="FFFFFF"/>
@@ -15264,7 +15240,7 @@
           <a:lstStyle/>
           <a:p>
             <a:pPr algn="l"/>
-            <a:fld id="{3effae0a-0036-4e59-8615-d95511fa83f8}" type="datetime3">
+            <a:fld id="{f0bb86df-fb7a-4251-9df1-9a30925cb78b}" type="datetime3">
               <a:rPr lang="en-GB" sz="1000" dirty="0">
                 <a:solidFill>
                   <a:srgbClr val="9AA3AE"/>
@@ -15298,7 +15274,7 @@
           <a:lstStyle/>
           <a:p>
             <a:pPr algn="ctr"/>
-            <a:fld id="{7a0485d0-ac77-4699-af2e-f824fc547bc3}" type="slidenum">
+            <a:fld id="{e7dc9557-bbb3-4ec1-a43b-bc024de48b1b}" type="slidenum">
               <a:rPr lang="en-GB" sz="1200" b="1" dirty="0">
                 <a:solidFill>
                   <a:srgbClr val="FFFFFF"/>
@@ -15712,7 +15688,7 @@
           <a:lstStyle/>
           <a:p>
             <a:pPr algn="l"/>
-            <a:fld id="{a7507d4c-3982-419e-9166-d0a2c1421d50}" type="datetime3">
+            <a:fld id="{e07d2716-8fcd-42f1-98c9-7a42d1a17fc8}" type="datetime3">
               <a:rPr lang="en-GB" sz="1000" dirty="0">
                 <a:solidFill>
                   <a:srgbClr val="9AA3AE"/>
@@ -15746,7 +15722,7 @@
           <a:lstStyle/>
           <a:p>
             <a:pPr algn="ctr"/>
-            <a:fld id="{6efb88b5-1d58-4186-b6db-4874e40eb35f}" type="slidenum">
+            <a:fld id="{3cdc0ba0-d15c-40f0-80af-2a4e90949935}" type="slidenum">
               <a:rPr lang="en-GB" sz="1200" b="1" dirty="0">
                 <a:solidFill>
                   <a:srgbClr val="FFFFFF"/>
@@ -16573,7 +16549,7 @@
           <a:lstStyle/>
           <a:p>
             <a:pPr algn="l"/>
-            <a:fld id="{29983251-8e56-42ef-8a56-eb9a811a7aa0}" type="datetime3">
+            <a:fld id="{a7d7ff34-9e82-4498-8a66-64e512e6ccc5}" type="datetime3">
               <a:rPr lang="en-GB" sz="1000" dirty="0">
                 <a:solidFill>
                   <a:srgbClr val="9AA3AE"/>
@@ -16607,7 +16583,7 @@
           <a:lstStyle/>
           <a:p>
             <a:pPr algn="ctr"/>
-            <a:fld id="{061bd2fd-f3cf-4591-b217-12d296f797a7}" type="slidenum">
+            <a:fld id="{8b6a91b9-f742-4721-b1f9-aeb867ad26fc}" type="slidenum">
               <a:rPr lang="en-GB" sz="1200" b="1" dirty="0">
                 <a:solidFill>
                   <a:srgbClr val="FFFFFF"/>
@@ -17057,7 +17033,7 @@
           <a:lstStyle/>
           <a:p>
             <a:pPr algn="l"/>
-            <a:fld id="{47dddce9-0aab-43c2-9e0e-7449ca213ad2}" type="datetime3">
+            <a:fld id="{69cef7ea-cc5b-4fa0-84c7-85ed226d61cf}" type="datetime3">
               <a:rPr lang="en-GB" sz="1000" dirty="0">
                 <a:solidFill>
                   <a:srgbClr val="9AA3AE"/>
@@ -17091,7 +17067,7 @@
           <a:lstStyle/>
           <a:p>
             <a:pPr algn="ctr"/>
-            <a:fld id="{9ade9d3b-058b-4715-856e-89b5c373fb02}" type="slidenum">
+            <a:fld id="{22355ec6-753f-4f73-8263-28dd73aa71a9}" type="slidenum">
               <a:rPr lang="en-GB" sz="1200" b="1" dirty="0">
                 <a:solidFill>
                   <a:srgbClr val="FFFFFF"/>
@@ -17541,7 +17517,7 @@
           <a:lstStyle/>
           <a:p>
             <a:pPr algn="l"/>
-            <a:fld id="{393ee241-e1d1-46aa-8f77-ef7bfa37976b}" type="datetime3">
+            <a:fld id="{73b68d56-16e5-45d7-95a4-47d27672e99f}" type="datetime3">
               <a:rPr lang="en-GB" sz="1000" dirty="0">
                 <a:solidFill>
                   <a:srgbClr val="9AA3AE"/>
@@ -17575,7 +17551,7 @@
           <a:lstStyle/>
           <a:p>
             <a:pPr algn="ctr"/>
-            <a:fld id="{03f93939-f6c5-4b9c-8e8b-5cff8bdef327}" type="slidenum">
+            <a:fld id="{fa4e2341-7799-4ea3-9d95-8ad1188ef125}" type="slidenum">
               <a:rPr lang="en-GB" sz="1200" b="1" dirty="0">
                 <a:solidFill>
                   <a:srgbClr val="FFFFFF"/>
@@ -18025,7 +18001,7 @@
           <a:lstStyle/>
           <a:p>
             <a:pPr algn="l"/>
-            <a:fld id="{fe9e3b58-af82-4d4c-a641-bd1b5c684ee9}" type="datetime3">
+            <a:fld id="{f7c1fa21-f2f3-4f1e-8b29-f3e4f2d077e5}" type="datetime3">
               <a:rPr lang="en-GB" sz="1000" dirty="0">
                 <a:solidFill>
                   <a:srgbClr val="9AA3AE"/>
@@ -18059,7 +18035,7 @@
           <a:lstStyle/>
           <a:p>
             <a:pPr algn="ctr"/>
-            <a:fld id="{62d5a221-c6bd-48b3-963a-401666b42abb}" type="slidenum">
+            <a:fld id="{51cbd352-2b2e-4c7f-baca-1199d5c47954}" type="slidenum">
               <a:rPr lang="en-GB" sz="1200" b="1" dirty="0">
                 <a:solidFill>
                   <a:srgbClr val="FFFFFF"/>
@@ -18509,7 +18485,7 @@
           <a:lstStyle/>
           <a:p>
             <a:pPr algn="l"/>
-            <a:fld id="{09075067-2636-4291-b44e-ea51cbe7f6e7}" type="datetime3">
+            <a:fld id="{70e73ff5-7c8a-4504-93e0-f57d0f5543e6}" type="datetime3">
               <a:rPr lang="en-GB" sz="1000" dirty="0">
                 <a:solidFill>
                   <a:srgbClr val="9AA3AE"/>
@@ -18543,7 +18519,7 @@
           <a:lstStyle/>
           <a:p>
             <a:pPr algn="ctr"/>
-            <a:fld id="{1bf73c06-e9d9-4baa-bff6-697182cf0637}" type="slidenum">
+            <a:fld id="{e05b7348-07eb-443e-a87f-ca919a68fb73}" type="slidenum">
               <a:rPr lang="en-GB" sz="1200" b="1" dirty="0">
                 <a:solidFill>
                   <a:srgbClr val="FFFFFF"/>
@@ -19387,7 +19363,7 @@
           <a:lstStyle/>
           <a:p>
             <a:pPr algn="l"/>
-            <a:fld id="{45fd43ba-5c79-4b03-8110-5d4736feb910}" type="datetime3">
+            <a:fld id="{9d2c57e7-66d0-41e0-bc7b-02542c0f3c53}" type="datetime3">
               <a:rPr lang="en-GB" sz="1000" dirty="0">
                 <a:solidFill>
                   <a:srgbClr val="9AA3AE"/>
@@ -19421,7 +19397,7 @@
           <a:lstStyle/>
           <a:p>
             <a:pPr algn="ctr"/>
-            <a:fld id="{264a445a-94c0-4877-b6f6-0ed78758f779}" type="slidenum">
+            <a:fld id="{a20c8d6e-0e34-4444-94cc-041bf129f192}" type="slidenum">
               <a:rPr lang="en-GB" sz="1200" b="1" dirty="0">
                 <a:solidFill>
                   <a:srgbClr val="FFFFFF"/>
@@ -20087,7 +20063,7 @@
           <a:lstStyle/>
           <a:p>
             <a:pPr algn="l"/>
-            <a:fld id="{5106e9c3-1941-438b-b6f9-9d009feb545b}" type="datetime3">
+            <a:fld id="{b6882a56-aa72-4027-b367-efe5a8c2c819}" type="datetime3">
               <a:rPr lang="en-GB" sz="1000" dirty="0">
                 <a:solidFill>
                   <a:srgbClr val="9AA3AE"/>
@@ -20121,7 +20097,7 @@
           <a:lstStyle/>
           <a:p>
             <a:pPr algn="ctr"/>
-            <a:fld id="{9c74dfb4-519f-4559-844b-49df064b6e18}" type="slidenum">
+            <a:fld id="{ea783fcc-f880-492c-b57a-e1db3ff52833}" type="slidenum">
               <a:rPr lang="en-GB" sz="1200" b="1" dirty="0">
                 <a:solidFill>
                   <a:srgbClr val="FFFFFF"/>
@@ -20807,7 +20783,7 @@
           <a:lstStyle/>
           <a:p>
             <a:pPr algn="l"/>
-            <a:fld id="{e2834637-d77c-437c-9b1a-bcf0371d935c}" type="datetime3">
+            <a:fld id="{63b247c1-e106-4154-91e9-534da8f70826}" type="datetime3">
               <a:rPr lang="en-GB" sz="1000" dirty="0">
                 <a:solidFill>
                   <a:srgbClr val="9AA3AE"/>
@@ -20841,7 +20817,7 @@
           <a:lstStyle/>
           <a:p>
             <a:pPr algn="ctr"/>
-            <a:fld id="{c256066c-df74-43de-b765-2625706ac7e3}" type="slidenum">
+            <a:fld id="{f3ee6ba5-2640-452c-ac14-ba5052f054e1}" type="slidenum">
               <a:rPr lang="en-GB" sz="1200" b="1" dirty="0">
                 <a:solidFill>
                   <a:srgbClr val="FFFFFF"/>
@@ -21308,7 +21284,7 @@
           <a:lstStyle/>
           <a:p>
             <a:pPr algn="l"/>
-            <a:fld id="{42b3b448-f15e-4150-9db4-92cfe18eeaaa}" type="datetime3">
+            <a:fld id="{bf355f82-082c-42ef-8954-a55148055c72}" type="datetime3">
               <a:rPr lang="en-GB" sz="1000" dirty="0">
                 <a:solidFill>
                   <a:srgbClr val="9AA3AE"/>
@@ -21342,7 +21318,7 @@
           <a:lstStyle/>
           <a:p>
             <a:pPr algn="ctr"/>
-            <a:fld id="{0b17883e-05c1-42ff-8d4c-0f798a3a06a3}" type="slidenum">
+            <a:fld id="{923e6aee-6487-482f-90b3-5e9b393fb784}" type="slidenum">
               <a:rPr lang="en-GB" sz="1200" b="1" dirty="0">
                 <a:solidFill>
                   <a:srgbClr val="FFFFFF"/>
@@ -21809,7 +21785,7 @@
           <a:lstStyle/>
           <a:p>
             <a:pPr algn="l"/>
-            <a:fld id="{276dfddd-7995-46cd-a318-d3be223799ee}" type="datetime3">
+            <a:fld id="{640c10e6-32a0-4eee-b760-9285771022e4}" type="datetime3">
               <a:rPr lang="en-GB" sz="1000" dirty="0">
                 <a:solidFill>
                   <a:srgbClr val="9AA3AE"/>
@@ -21843,7 +21819,7 @@
           <a:lstStyle/>
           <a:p>
             <a:pPr algn="ctr"/>
-            <a:fld id="{30d760e2-3495-46fb-8e7c-4f668ab2f734}" type="slidenum">
+            <a:fld id="{9c5e36ea-8b07-4d1d-b009-4be245004f48}" type="slidenum">
               <a:rPr lang="en-GB" sz="1200" b="1" dirty="0">
                 <a:solidFill>
                   <a:srgbClr val="FFFFFF"/>
@@ -22275,7 +22251,7 @@
           <a:lstStyle/>
           <a:p>
             <a:pPr algn="l"/>
-            <a:fld id="{fe9a0abe-eb87-4f4f-8114-3e00254ba710}" type="datetime3">
+            <a:fld id="{daca3a06-aeb0-4133-91c5-7fab39006ab2}" type="datetime3">
               <a:rPr lang="en-GB" sz="1000" dirty="0">
                 <a:solidFill>
                   <a:srgbClr val="9AA3AE"/>
@@ -22309,7 +22285,7 @@
           <a:lstStyle/>
           <a:p>
             <a:pPr algn="ctr"/>
-            <a:fld id="{e0b7849a-47cf-4ace-8f47-a3b201b48ed0}" type="slidenum">
+            <a:fld id="{26f69c7f-16b7-4288-adf2-1f1740ce7f74}" type="slidenum">
               <a:rPr lang="en-GB" sz="1200" b="1" dirty="0">
                 <a:solidFill>
                   <a:srgbClr val="FFFFFF"/>
@@ -22760,7 +22736,7 @@
           <a:lstStyle/>
           <a:p>
             <a:pPr algn="l"/>
-            <a:fld id="{93425bff-f793-4d2d-8f65-77840508fc9b}" type="datetime3">
+            <a:fld id="{0451e302-021c-4791-b629-d22c02222cc0}" type="datetime3">
               <a:rPr lang="en-GB" sz="1000" dirty="0">
                 <a:solidFill>
                   <a:srgbClr val="9AA3AE"/>
@@ -22794,7 +22770,7 @@
           <a:lstStyle/>
           <a:p>
             <a:pPr algn="ctr"/>
-            <a:fld id="{f74ae963-5949-4d83-823a-826dda7ae873}" type="slidenum">
+            <a:fld id="{f64e56ae-ee65-4471-9164-b7f657a072ac}" type="slidenum">
               <a:rPr lang="en-GB" sz="1200" b="1" dirty="0">
                 <a:solidFill>
                   <a:srgbClr val="FFFFFF"/>
@@ -23245,7 +23221,7 @@
           <a:lstStyle/>
           <a:p>
             <a:pPr algn="l"/>
-            <a:fld id="{060e6c76-0455-4f08-ad86-b1c6afed2cc0}" type="datetime3">
+            <a:fld id="{3f33373d-dcdb-4324-8d51-964b9c9eadde}" type="datetime3">
               <a:rPr lang="en-GB" sz="1000" dirty="0">
                 <a:solidFill>
                   <a:srgbClr val="9AA3AE"/>
@@ -23279,7 +23255,7 @@
           <a:lstStyle/>
           <a:p>
             <a:pPr algn="ctr"/>
-            <a:fld id="{2e08aaba-7cef-4edc-9520-4bed8a082cbc}" type="slidenum">
+            <a:fld id="{e15da2e2-de15-4744-8d43-8fefa38b6b20}" type="slidenum">
               <a:rPr lang="en-GB" sz="1200" b="1" dirty="0">
                 <a:solidFill>
                   <a:srgbClr val="FFFFFF"/>
@@ -23765,7 +23741,7 @@
           <a:lstStyle/>
           <a:p>
             <a:pPr algn="l"/>
-            <a:fld id="{c6790d0c-a859-423d-b94c-0ce4a9e6c6ee}" type="datetime3">
+            <a:fld id="{626b8fdb-92fe-4e8b-a577-1d5b72301a6f}" type="datetime3">
               <a:rPr lang="en-GB" sz="1000" dirty="0">
                 <a:solidFill>
                   <a:srgbClr val="9AA3AE"/>
@@ -23799,7 +23775,7 @@
           <a:lstStyle/>
           <a:p>
             <a:pPr algn="ctr"/>
-            <a:fld id="{4c4e50a0-e92b-4573-8cb0-6df23bb92767}" type="slidenum">
+            <a:fld id="{5ed2ef63-10f2-4b4a-985b-eece7d3a22fd}" type="slidenum">
               <a:rPr lang="en-GB" sz="1200" b="1" dirty="0">
                 <a:solidFill>
                   <a:srgbClr val="FFFFFF"/>
@@ -24249,7 +24225,7 @@
           <a:lstStyle/>
           <a:p>
             <a:pPr algn="l"/>
-            <a:fld id="{a6f4441e-5d8f-4eb0-a2aa-40805dfadac6}" type="datetime3">
+            <a:fld id="{a9cd5c77-cdaf-4f0f-9123-d3dd4efccbda}" type="datetime3">
               <a:rPr lang="en-GB" sz="1000" dirty="0">
                 <a:solidFill>
                   <a:srgbClr val="9AA3AE"/>
@@ -24283,7 +24259,7 @@
           <a:lstStyle/>
           <a:p>
             <a:pPr algn="ctr"/>
-            <a:fld id="{a8714cc0-1683-48dc-ac4c-98562661eb64}" type="slidenum">
+            <a:fld id="{70f103f2-176f-4069-aa5c-db6a88ab8c23}" type="slidenum">
               <a:rPr lang="en-GB" sz="1200" b="1" dirty="0">
                 <a:solidFill>
                   <a:srgbClr val="FFFFFF"/>
@@ -24715,7 +24691,7 @@
           <a:lstStyle/>
           <a:p>
             <a:pPr algn="l"/>
-            <a:fld id="{4f7771e5-047f-4cdf-8580-03d0d59ca521}" type="datetime3">
+            <a:fld id="{6ad3158c-e62b-4e23-b41d-570e23eae695}" type="datetime3">
               <a:rPr lang="en-GB" sz="1000" dirty="0">
                 <a:solidFill>
                   <a:srgbClr val="9AA3AE"/>
@@ -24749,7 +24725,7 @@
           <a:lstStyle/>
           <a:p>
             <a:pPr algn="ctr"/>
-            <a:fld id="{1eab6623-36b6-45db-b6fe-b4336e2fbb41}" type="slidenum">
+            <a:fld id="{bf79af1d-d7ff-4a8c-be61-ab7760eb2ffe}" type="slidenum">
               <a:rPr lang="en-GB" sz="1200" b="1" dirty="0">
                 <a:solidFill>
                   <a:srgbClr val="FFFFFF"/>
@@ -25676,7 +25652,7 @@
           <a:lstStyle/>
           <a:p>
             <a:pPr algn="l"/>
-            <a:fld id="{f85e607b-d029-4b2b-a730-7b32fc924f60}" type="datetime3">
+            <a:fld id="{b494ecb4-dd22-43fb-ade2-43f47082c721}" type="datetime3">
               <a:rPr lang="en-GB" sz="1000" dirty="0">
                 <a:solidFill>
                   <a:srgbClr val="9AA3AE"/>
@@ -25710,7 +25686,7 @@
           <a:lstStyle/>
           <a:p>
             <a:pPr algn="ctr"/>
-            <a:fld id="{c0e73d1b-a0e8-4887-97ab-f331fb6f6dde}" type="slidenum">
+            <a:fld id="{753ca4d6-1acc-45d2-a62b-922ad4baafbe}" type="slidenum">
               <a:rPr lang="en-GB" sz="1200" b="1" dirty="0">
                 <a:solidFill>
                   <a:srgbClr val="FFFFFF"/>
@@ -26637,7 +26613,7 @@
           <a:lstStyle/>
           <a:p>
             <a:pPr algn="l"/>
-            <a:fld id="{3e82595f-684d-4601-b4a1-45ea4f0dd324}" type="datetime3">
+            <a:fld id="{f33a0f06-7bbc-422c-bb05-e8161c5728cb}" type="datetime3">
               <a:rPr lang="en-GB" sz="1000" dirty="0">
                 <a:solidFill>
                   <a:srgbClr val="9AA3AE"/>
@@ -26671,7 +26647,7 @@
           <a:lstStyle/>
           <a:p>
             <a:pPr algn="ctr"/>
-            <a:fld id="{1b4dd74f-2a9a-465c-91a5-fc436b9b9721}" type="slidenum">
+            <a:fld id="{7647f45f-5186-4ae6-b68a-c0544bfb23d7}" type="slidenum">
               <a:rPr lang="en-GB" sz="1200" b="1" dirty="0">
                 <a:solidFill>
                   <a:srgbClr val="FFFFFF"/>
@@ -27598,7 +27574,7 @@
           <a:lstStyle/>
           <a:p>
             <a:pPr algn="l"/>
-            <a:fld id="{40c28361-d833-409c-912a-f32f14f33ae9}" type="datetime3">
+            <a:fld id="{10a3d7ee-749a-4aef-94a0-d5d1c79aec9d}" type="datetime3">
               <a:rPr lang="en-GB" sz="1000" dirty="0">
                 <a:solidFill>
                   <a:srgbClr val="9AA3AE"/>
@@ -27632,7 +27608,7 @@
           <a:lstStyle/>
           <a:p>
             <a:pPr algn="ctr"/>
-            <a:fld id="{a68a9411-e424-4cd1-92c4-bd0294847e2d}" type="slidenum">
+            <a:fld id="{9d1fa946-2e7d-46cc-b195-304f624d43f3}" type="slidenum">
               <a:rPr lang="en-GB" sz="1200" b="1" dirty="0">
                 <a:solidFill>
                   <a:srgbClr val="FFFFFF"/>
@@ -28559,7 +28535,7 @@
           <a:lstStyle/>
           <a:p>
             <a:pPr algn="l"/>
-            <a:fld id="{fe2a0019-5d6a-4f96-be09-a844643021dc}" type="datetime3">
+            <a:fld id="{3060debf-74ce-407b-8df5-1c242b9274df}" type="datetime3">
               <a:rPr lang="en-GB" sz="1000" dirty="0">
                 <a:solidFill>
                   <a:srgbClr val="9AA3AE"/>
@@ -28593,7 +28569,7 @@
           <a:lstStyle/>
           <a:p>
             <a:pPr algn="ctr"/>
-            <a:fld id="{a624d4ac-28b5-4d4f-a66d-2fc4090325fa}" type="slidenum">
+            <a:fld id="{0ffa432b-7044-44bb-bef4-079843f94918}" type="slidenum">
               <a:rPr lang="en-GB" sz="1200" b="1" dirty="0">
                 <a:solidFill>
                   <a:srgbClr val="FFFFFF"/>
@@ -29520,7 +29496,7 @@
           <a:lstStyle/>
           <a:p>
             <a:pPr algn="l"/>
-            <a:fld id="{5f3c7b34-8dc4-40e6-b14c-25f8a702fa0c}" type="datetime3">
+            <a:fld id="{337f72e7-2ad9-459b-9725-ce1b2c0eaea9}" type="datetime3">
               <a:rPr lang="en-GB" sz="1000" dirty="0">
                 <a:solidFill>
                   <a:srgbClr val="9AA3AE"/>
@@ -29554,7 +29530,7 @@
           <a:lstStyle/>
           <a:p>
             <a:pPr algn="ctr"/>
-            <a:fld id="{677b8924-bedb-4679-bd7a-58fc7bd55425}" type="slidenum">
+            <a:fld id="{fb0cc5e5-1d98-444f-b78d-9dfe45d9b303}" type="slidenum">
               <a:rPr lang="en-GB" sz="1200" b="1" dirty="0">
                 <a:solidFill>
                   <a:srgbClr val="FFFFFF"/>

--- a/laboratory/docs/slides/ACRS_PhD_Proposal_JenishaT_24ETRP720001.pptx
+++ b/laboratory/docs/slides/ACRS_PhD_Proposal_JenishaT_24ETRP720001.pptx
@@ -3835,7 +3835,7 @@
           <a:lstStyle/>
           <a:p>
             <a:pPr algn="l"/>
-            <a:fld id="{e7773d2e-318f-4457-8677-d577c4ddb4b1}" type="datetime3">
+            <a:fld id="{79bc40c5-0f19-449d-bbc3-50e058a4d530}" type="datetime3">
               <a:rPr lang="en-GB" sz="1000" dirty="0">
                 <a:solidFill>
                   <a:srgbClr val="9AA3AE"/>
@@ -3869,7 +3869,7 @@
           <a:lstStyle/>
           <a:p>
             <a:pPr algn="ctr"/>
-            <a:fld id="{d8b95837-488b-4c1b-b66f-5ac67e282be8}" type="slidenum">
+            <a:fld id="{6b7ce373-bd35-4a2d-8481-a46c88d74846}" type="slidenum">
               <a:rPr lang="en-GB" sz="1200" b="1" dirty="0">
                 <a:solidFill>
                   <a:srgbClr val="FFFFFF"/>
@@ -4796,7 +4796,7 @@
           <a:lstStyle/>
           <a:p>
             <a:pPr algn="l"/>
-            <a:fld id="{282af29f-e115-428e-8f3b-02a34fb98211}" type="datetime3">
+            <a:fld id="{5d61c29b-9830-4696-b7f2-55af113138e5}" type="datetime3">
               <a:rPr lang="en-GB" sz="1000" dirty="0">
                 <a:solidFill>
                   <a:srgbClr val="9AA3AE"/>
@@ -4830,7 +4830,7 @@
           <a:lstStyle/>
           <a:p>
             <a:pPr algn="ctr"/>
-            <a:fld id="{d7c2cf6a-10c6-431e-bf8c-96d6a61296aa}" type="slidenum">
+            <a:fld id="{a239dbfe-d22a-4c1f-a938-ce1573dc5f73}" type="slidenum">
               <a:rPr lang="en-GB" sz="1200" b="1" dirty="0">
                 <a:solidFill>
                   <a:srgbClr val="FFFFFF"/>
@@ -5757,7 +5757,7 @@
           <a:lstStyle/>
           <a:p>
             <a:pPr algn="l"/>
-            <a:fld id="{2eb26855-ebfa-40fe-bc91-a41c011c6b74}" type="datetime3">
+            <a:fld id="{4e82ab66-753e-41e3-bff6-968c41d4ab38}" type="datetime3">
               <a:rPr lang="en-GB" sz="1000" dirty="0">
                 <a:solidFill>
                   <a:srgbClr val="9AA3AE"/>
@@ -5791,7 +5791,7 @@
           <a:lstStyle/>
           <a:p>
             <a:pPr algn="ctr"/>
-            <a:fld id="{6711f79b-8f43-4629-9772-330f1fcc3185}" type="slidenum">
+            <a:fld id="{403f6587-f939-45f1-9c68-d81dc51c06fa}" type="slidenum">
               <a:rPr lang="en-GB" sz="1200" b="1" dirty="0">
                 <a:solidFill>
                   <a:srgbClr val="FFFFFF"/>
@@ -6718,7 +6718,7 @@
           <a:lstStyle/>
           <a:p>
             <a:pPr algn="l"/>
-            <a:fld id="{570e095b-cb1a-4ec5-9224-8ebb59ed97ec}" type="datetime3">
+            <a:fld id="{4685405d-e35e-47bf-afcd-b8d9e805f68d}" type="datetime3">
               <a:rPr lang="en-GB" sz="1000" dirty="0">
                 <a:solidFill>
                   <a:srgbClr val="9AA3AE"/>
@@ -6752,7 +6752,7 @@
           <a:lstStyle/>
           <a:p>
             <a:pPr algn="ctr"/>
-            <a:fld id="{cce1baab-1aa3-4ff0-8c70-6a5e86bb229a}" type="slidenum">
+            <a:fld id="{7cb31cd2-e21f-43c7-a9c6-e393b35c427f}" type="slidenum">
               <a:rPr lang="en-GB" sz="1200" b="1" dirty="0">
                 <a:solidFill>
                   <a:srgbClr val="FFFFFF"/>
@@ -7679,7 +7679,7 @@
           <a:lstStyle/>
           <a:p>
             <a:pPr algn="l"/>
-            <a:fld id="{eadb0972-6343-4ed7-ac0d-c8fd23e1d313}" type="datetime3">
+            <a:fld id="{3f602372-ae1c-470e-902b-fa58489d3680}" type="datetime3">
               <a:rPr lang="en-GB" sz="1000" dirty="0">
                 <a:solidFill>
                   <a:srgbClr val="9AA3AE"/>
@@ -7713,7 +7713,7 @@
           <a:lstStyle/>
           <a:p>
             <a:pPr algn="ctr"/>
-            <a:fld id="{2d362543-2763-41a6-82da-db8858659055}" type="slidenum">
+            <a:fld id="{7ec21884-11b9-4c5d-ba19-b0a03c53c444}" type="slidenum">
               <a:rPr lang="en-GB" sz="1200" b="1" dirty="0">
                 <a:solidFill>
                   <a:srgbClr val="FFFFFF"/>
@@ -8640,7 +8640,7 @@
           <a:lstStyle/>
           <a:p>
             <a:pPr algn="l"/>
-            <a:fld id="{9ca2661e-e464-405a-a567-4fe2cd93d3dc}" type="datetime3">
+            <a:fld id="{f46035cb-1ce0-4cbc-be49-3df87982d6f9}" type="datetime3">
               <a:rPr lang="en-GB" sz="1000" dirty="0">
                 <a:solidFill>
                   <a:srgbClr val="9AA3AE"/>
@@ -8674,7 +8674,7 @@
           <a:lstStyle/>
           <a:p>
             <a:pPr algn="ctr"/>
-            <a:fld id="{9ed95ebc-c19f-429a-adb5-b44a26af0bc1}" type="slidenum">
+            <a:fld id="{ecb0d392-1e74-4f6a-a784-e106f292d46f}" type="slidenum">
               <a:rPr lang="en-GB" sz="1200" b="1" dirty="0">
                 <a:solidFill>
                   <a:srgbClr val="FFFFFF"/>
@@ -9496,7 +9496,7 @@
           <a:lstStyle/>
           <a:p>
             <a:pPr algn="l"/>
-            <a:fld id="{2ef79ee2-89e6-4834-80fe-b4929cfd857b}" type="datetime3">
+            <a:fld id="{5cc98f82-ce20-43ba-a532-78aea2d81f7b}" type="datetime3">
               <a:rPr lang="en-GB" sz="1000" dirty="0">
                 <a:solidFill>
                   <a:srgbClr val="9AA3AE"/>
@@ -9530,7 +9530,7 @@
           <a:lstStyle/>
           <a:p>
             <a:pPr algn="ctr"/>
-            <a:fld id="{4655f8d8-3178-49e7-809b-bb2932da9ebe}" type="slidenum">
+            <a:fld id="{9638127b-1133-4198-92f0-9f93a64d5561}" type="slidenum">
               <a:rPr lang="en-GB" sz="1200" b="1" dirty="0">
                 <a:solidFill>
                   <a:srgbClr val="FFFFFF"/>
@@ -10284,7 +10284,7 @@
           <a:lstStyle/>
           <a:p>
             <a:pPr algn="l"/>
-            <a:fld id="{674cfa13-4126-4db1-8ad6-7cf1af4086c8}" type="datetime3">
+            <a:fld id="{19e6085b-48e5-49e5-95c5-3401909deebf}" type="datetime3">
               <a:rPr lang="en-GB" sz="1000" dirty="0">
                 <a:solidFill>
                   <a:srgbClr val="9AA3AE"/>
@@ -10318,7 +10318,7 @@
           <a:lstStyle/>
           <a:p>
             <a:pPr algn="ctr"/>
-            <a:fld id="{4a026e9a-6a78-4ac7-abb6-57d53bd2c711}" type="slidenum">
+            <a:fld id="{0d00fb5a-fd5d-43c4-8b88-6e85cc9d1175}" type="slidenum">
               <a:rPr lang="en-GB" sz="1200" b="1" dirty="0">
                 <a:solidFill>
                   <a:srgbClr val="FFFFFF"/>
@@ -11018,7 +11018,7 @@
           <a:lstStyle/>
           <a:p>
             <a:pPr algn="l"/>
-            <a:fld id="{453cd54f-8bb2-42ab-a03e-3e88b0358b59}" type="datetime3">
+            <a:fld id="{cd1f5dea-ced5-48b3-b240-d3d7ae7a38df}" type="datetime3">
               <a:rPr lang="en-GB" sz="1000" dirty="0">
                 <a:solidFill>
                   <a:srgbClr val="9AA3AE"/>
@@ -11052,7 +11052,7 @@
           <a:lstStyle/>
           <a:p>
             <a:pPr algn="ctr"/>
-            <a:fld id="{146a97fa-6c3c-447a-9c71-e28fc22a6ce1}" type="slidenum">
+            <a:fld id="{a62a0ee5-96f8-41b5-a0ab-5b15dd7fde06}" type="slidenum">
               <a:rPr lang="en-GB" sz="1200" b="1" dirty="0">
                 <a:solidFill>
                   <a:srgbClr val="FFFFFF"/>
@@ -11860,7 +11860,7 @@
           <a:lstStyle/>
           <a:p>
             <a:pPr algn="l"/>
-            <a:fld id="{bbff781b-4ce8-4451-aad1-61327014aff0}" type="datetime3">
+            <a:fld id="{839a08de-57a2-4e4f-8e03-c239c89d69f9}" type="datetime3">
               <a:rPr lang="en-GB" sz="1000" dirty="0">
                 <a:solidFill>
                   <a:srgbClr val="9AA3AE"/>
@@ -11894,7 +11894,7 @@
           <a:lstStyle/>
           <a:p>
             <a:pPr algn="ctr"/>
-            <a:fld id="{83f851ac-1c7b-4b4e-9400-172de6e93db7}" type="slidenum">
+            <a:fld id="{45c5cbb9-4351-41f9-a116-50f7bf46e5fd}" type="slidenum">
               <a:rPr lang="en-GB" sz="1200" b="1" dirty="0">
                 <a:solidFill>
                   <a:srgbClr val="FFFFFF"/>
@@ -12361,7 +12361,7 @@
           <a:lstStyle/>
           <a:p>
             <a:pPr algn="l"/>
-            <a:fld id="{6b120672-5081-488c-8ba0-e958b846078c}" type="datetime3">
+            <a:fld id="{063b7edd-66ed-4887-8183-e2d2e7d909db}" type="datetime3">
               <a:rPr lang="en-GB" sz="1000" dirty="0">
                 <a:solidFill>
                   <a:srgbClr val="9AA3AE"/>
@@ -12395,7 +12395,7 @@
           <a:lstStyle/>
           <a:p>
             <a:pPr algn="ctr"/>
-            <a:fld id="{d1a9b669-91c7-474e-bb3e-def6207776ab}" type="slidenum">
+            <a:fld id="{dca317f8-e0b0-4f95-be4b-7ee47a33072a}" type="slidenum">
               <a:rPr lang="en-GB" sz="1200" b="1" dirty="0">
                 <a:solidFill>
                   <a:srgbClr val="FFFFFF"/>
@@ -13247,7 +13247,7 @@
           <a:lstStyle/>
           <a:p>
             <a:pPr algn="l"/>
-            <a:fld id="{b9506bea-f4dc-410f-839e-514c43a12fb8}" type="datetime3">
+            <a:fld id="{b2c918a2-3c26-4fa6-b05b-f8025c3d1b96}" type="datetime3">
               <a:rPr lang="en-GB" sz="1000" dirty="0">
                 <a:solidFill>
                   <a:srgbClr val="9AA3AE"/>
@@ -13281,7 +13281,7 @@
           <a:lstStyle/>
           <a:p>
             <a:pPr algn="ctr"/>
-            <a:fld id="{966ec7b8-53d3-4523-a6bc-fb02b166a3b1}" type="slidenum">
+            <a:fld id="{67feafdc-8afe-468e-bf04-8c4c9bcbc2a1}" type="slidenum">
               <a:rPr lang="en-GB" sz="1200" b="1" dirty="0">
                 <a:solidFill>
                   <a:srgbClr val="FFFFFF"/>
@@ -13713,7 +13713,7 @@
           <a:lstStyle/>
           <a:p>
             <a:pPr algn="l"/>
-            <a:fld id="{59583018-e9f7-4020-b354-acc9e3a84363}" type="datetime3">
+            <a:fld id="{9c26b402-3eaf-4551-8bd3-130ac0adbb17}" type="datetime3">
               <a:rPr lang="en-GB" sz="1000" dirty="0">
                 <a:solidFill>
                   <a:srgbClr val="9AA3AE"/>
@@ -13747,7 +13747,7 @@
           <a:lstStyle/>
           <a:p>
             <a:pPr algn="ctr"/>
-            <a:fld id="{50684804-63fa-40e3-afcd-6d54d281070d}" type="slidenum">
+            <a:fld id="{03e010f6-919f-458d-8d76-532d43b23070}" type="slidenum">
               <a:rPr lang="en-GB" sz="1200" b="1" dirty="0">
                 <a:solidFill>
                   <a:srgbClr val="FFFFFF"/>
@@ -14196,7 +14196,7 @@
           <a:lstStyle/>
           <a:p>
             <a:pPr algn="l"/>
-            <a:fld id="{a68ec423-29c9-42b3-9559-ebbbfe776c99}" type="datetime3">
+            <a:fld id="{7485621a-bc46-4f9e-a50b-684f8da1a82c}" type="datetime3">
               <a:rPr lang="en-GB" sz="1000" dirty="0">
                 <a:solidFill>
                   <a:srgbClr val="9AA3AE"/>
@@ -14230,7 +14230,7 @@
           <a:lstStyle/>
           <a:p>
             <a:pPr algn="ctr"/>
-            <a:fld id="{4f3ab8e3-557f-415f-881f-e47527c319a5}" type="slidenum">
+            <a:fld id="{5797ff8d-9003-4c9c-a48b-43c032073e86}" type="slidenum">
               <a:rPr lang="en-GB" sz="1200" b="1" dirty="0">
                 <a:solidFill>
                   <a:srgbClr val="FFFFFF"/>
@@ -14916,7 +14916,7 @@
           <a:lstStyle/>
           <a:p>
             <a:pPr algn="l"/>
-            <a:fld id="{e448ea58-2cf6-49c8-881a-54cbeb8066a8}" type="datetime3">
+            <a:fld id="{1a1f67f3-5396-4dad-b135-654733e278ed}" type="datetime3">
               <a:rPr lang="en-GB" sz="1000" dirty="0">
                 <a:solidFill>
                   <a:srgbClr val="9AA3AE"/>
@@ -14950,7 +14950,7 @@
           <a:lstStyle/>
           <a:p>
             <a:pPr algn="ctr"/>
-            <a:fld id="{e1293123-d30f-4d30-bf70-a82c8f64e013}" type="slidenum">
+            <a:fld id="{ab615862-4615-46fe-921f-f34b14840e8d}" type="slidenum">
               <a:rPr lang="en-GB" sz="1200" b="1" dirty="0">
                 <a:solidFill>
                   <a:srgbClr val="FFFFFF"/>
@@ -15848,7 +15848,7 @@
           <a:lstStyle/>
           <a:p>
             <a:pPr algn="l"/>
-            <a:fld id="{ca3b18e8-467e-47a9-b6e3-7a38099fb5a4}" type="datetime3">
+            <a:fld id="{51d99c80-f9d8-4146-bb03-48b1a4ce8f82}" type="datetime3">
               <a:rPr lang="en-GB" sz="1000" dirty="0">
                 <a:solidFill>
                   <a:srgbClr val="9AA3AE"/>
@@ -15882,7 +15882,7 @@
           <a:lstStyle/>
           <a:p>
             <a:pPr algn="ctr"/>
-            <a:fld id="{7ebfaa28-1194-452e-98dd-4f646d66af4d}" type="slidenum">
+            <a:fld id="{3f85f916-1749-49d5-81cb-d89044e6c756}" type="slidenum">
               <a:rPr lang="en-GB" sz="1200" b="1" dirty="0">
                 <a:solidFill>
                   <a:srgbClr val="FFFFFF"/>
@@ -16672,7 +16672,7 @@
           <a:lstStyle/>
           <a:p>
             <a:pPr algn="l"/>
-            <a:fld id="{85f407ee-6d08-408c-914c-ffe5d40c42ae}" type="datetime3">
+            <a:fld id="{9c41a283-6aa9-4f59-8a79-696a3d674058}" type="datetime3">
               <a:rPr lang="en-GB" sz="1000" dirty="0">
                 <a:solidFill>
                   <a:srgbClr val="9AA3AE"/>
@@ -16706,7 +16706,7 @@
           <a:lstStyle/>
           <a:p>
             <a:pPr algn="ctr"/>
-            <a:fld id="{41c55e36-4f12-4b1d-a006-10ecd7956920}" type="slidenum">
+            <a:fld id="{b9ece9b5-87d0-48e9-b193-0719d6f83b78}" type="slidenum">
               <a:rPr lang="en-GB" sz="1200" b="1" dirty="0">
                 <a:solidFill>
                   <a:srgbClr val="FFFFFF"/>
@@ -17442,7 +17442,7 @@
           <a:lstStyle/>
           <a:p>
             <a:pPr algn="l"/>
-            <a:fld id="{09b4f6a6-35f1-4747-b4c3-4d60608aed75}" type="datetime3">
+            <a:fld id="{8b089f03-993f-45b4-aff3-05a1331f2598}" type="datetime3">
               <a:rPr lang="en-GB" sz="1000" dirty="0">
                 <a:solidFill>
                   <a:srgbClr val="9AA3AE"/>
@@ -17476,7 +17476,7 @@
           <a:lstStyle/>
           <a:p>
             <a:pPr algn="ctr"/>
-            <a:fld id="{f58664e2-49f6-4fde-9c13-7394dfbbd197}" type="slidenum">
+            <a:fld id="{3fac42c5-9437-4b88-9a3d-cc74bf6ebd9f}" type="slidenum">
               <a:rPr lang="en-GB" sz="1200" b="1" dirty="0">
                 <a:solidFill>
                   <a:srgbClr val="FFFFFF"/>
@@ -18266,7 +18266,7 @@
           <a:lstStyle/>
           <a:p>
             <a:pPr algn="l"/>
-            <a:fld id="{c4e20540-66ec-46c5-afe0-0ff7ddf8ec84}" type="datetime3">
+            <a:fld id="{1b64cfe2-8505-4818-948b-50850dc318f5}" type="datetime3">
               <a:rPr lang="en-GB" sz="1000" dirty="0">
                 <a:solidFill>
                   <a:srgbClr val="9AA3AE"/>
@@ -18300,7 +18300,7 @@
           <a:lstStyle/>
           <a:p>
             <a:pPr algn="ctr"/>
-            <a:fld id="{f399c300-8ea0-42d6-a2ca-45a915dbf074}" type="slidenum">
+            <a:fld id="{9b0cbcdf-35d3-4f4a-b2b7-f08869c66faa}" type="slidenum">
               <a:rPr lang="en-GB" sz="1200" b="1" dirty="0">
                 <a:solidFill>
                   <a:srgbClr val="FFFFFF"/>
@@ -18731,7 +18731,7 @@
           <a:lstStyle/>
           <a:p>
             <a:pPr algn="l"/>
-            <a:fld id="{7b82b865-111c-4a06-b9b8-6a66ebfd93d0}" type="datetime3">
+            <a:fld id="{3afb6d49-9ce3-40f2-89f9-ac188f238c43}" type="datetime3">
               <a:rPr lang="en-GB" sz="1000" dirty="0">
                 <a:solidFill>
                   <a:srgbClr val="9AA3AE"/>
@@ -18765,7 +18765,7 @@
           <a:lstStyle/>
           <a:p>
             <a:pPr algn="ctr"/>
-            <a:fld id="{4367e38f-3d2b-44fe-ae21-2c18f5a0c7a9}" type="slidenum">
+            <a:fld id="{34f27d28-ab41-47a9-b327-015fdf112844}" type="slidenum">
               <a:rPr lang="en-GB" sz="1200" b="1" dirty="0">
                 <a:solidFill>
                   <a:srgbClr val="FFFFFF"/>
@@ -19179,7 +19179,7 @@
           <a:lstStyle/>
           <a:p>
             <a:pPr algn="l"/>
-            <a:fld id="{a4801d7c-7ff0-4297-9f11-7c9881940240}" type="datetime3">
+            <a:fld id="{50e05be2-8efb-42d9-a256-8c00ad199e14}" type="datetime3">
               <a:rPr lang="en-GB" sz="1000" dirty="0">
                 <a:solidFill>
                   <a:srgbClr val="9AA3AE"/>
@@ -19213,7 +19213,7 @@
           <a:lstStyle/>
           <a:p>
             <a:pPr algn="ctr"/>
-            <a:fld id="{e050cfc2-9f35-4fb7-80ee-daa176b2032c}" type="slidenum">
+            <a:fld id="{3c091813-8e18-4b6a-915c-e767aef831eb}" type="slidenum">
               <a:rPr lang="en-GB" sz="1200" b="1" dirty="0">
                 <a:solidFill>
                   <a:srgbClr val="FFFFFF"/>
@@ -20040,7 +20040,7 @@
           <a:lstStyle/>
           <a:p>
             <a:pPr algn="l"/>
-            <a:fld id="{97356abb-6a22-4a98-a3c7-eb64dfa9d2bb}" type="datetime3">
+            <a:fld id="{44c42270-9f08-4dfe-b1eb-21819604775d}" type="datetime3">
               <a:rPr lang="en-GB" sz="1000" dirty="0">
                 <a:solidFill>
                   <a:srgbClr val="9AA3AE"/>
@@ -20074,7 +20074,7 @@
           <a:lstStyle/>
           <a:p>
             <a:pPr algn="ctr"/>
-            <a:fld id="{bc26bcd8-3f37-4eec-80f7-064bfbd55b8c}" type="slidenum">
+            <a:fld id="{92580bb5-0d92-4382-a024-492ccd376510}" type="slidenum">
               <a:rPr lang="en-GB" sz="1200" b="1" dirty="0">
                 <a:solidFill>
                   <a:srgbClr val="FFFFFF"/>
@@ -20367,7 +20367,7 @@
                 </a:solidFill>
                 <a:latin typeface="Calibri"/>
               </a:rPr>
-              <a:t>Nine required sections plus the FET mapping To Solve the Research Gap. Literature Review follows the Evidence 1, Evidence 2, … template. After the literature summary, each limitation is closed by a named ACRS module. Research Title &amp; Aim is followed by the overall objective, four individual design objectives with artefacts, and what those objectives do not claim (docs/RESEARCH_OBJECTIVES.md). Research Methodology is expanded for each objective (O1 SATR, O2 APRR, O3 MNCD, O4 FCNP), the integrated loop, the exact repository formulas, and two worked traces (ToolBench-schema ranking; live data.gov.in). Objective order is SATR → APRR → MNCD → FCNP (not SMART).</a:t>
+              <a:t>Main FET sections only. Motivation, architecture figures, O1–O4, and methodology detail remain in the deck under these headings; they are not listed as sub-sections here.</a:t>
             </a:r>
           </a:p>
         </p:txBody>
@@ -20426,7 +20426,7 @@
                 </a:solidFill>
                 <a:latin typeface="Calibri"/>
               </a:rPr>
-              <a:t>01a   Motivation</a:t>
+              <a:t>02   Literature Review</a:t>
             </a:r>
           </a:p>
           <a:p>
@@ -20444,7 +20444,7 @@
                 </a:solidFill>
                 <a:latin typeface="Calibri"/>
               </a:rPr>
-              <a:t>02   Literature Review</a:t>
+              <a:t>03   Summary of Literature Review</a:t>
             </a:r>
           </a:p>
           <a:p>
@@ -20462,7 +20462,7 @@
                 </a:solidFill>
                 <a:latin typeface="Calibri"/>
               </a:rPr>
-              <a:t>03   Summary of Literature Review</a:t>
+              <a:t>04   To Solve the Research Gap</a:t>
             </a:r>
           </a:p>
           <a:p>
@@ -20480,7 +20480,7 @@
                 </a:solidFill>
                 <a:latin typeface="Calibri"/>
               </a:rPr>
-              <a:t>03a   To Solve the Research Gap</a:t>
+              <a:t>05   Identified Research Problem</a:t>
             </a:r>
           </a:p>
           <a:p>
@@ -20498,7 +20498,7 @@
                 </a:solidFill>
                 <a:latin typeface="Calibri"/>
               </a:rPr>
-              <a:t>03b   SOTA architecture (cited)</a:t>
+              <a:t>06   Research Title &amp; Aim</a:t>
             </a:r>
           </a:p>
           <a:p>
@@ -20516,7 +20516,7 @@
                 </a:solidFill>
                 <a:latin typeface="Calibri"/>
               </a:rPr>
-              <a:t>03c   Proposed ACRS architecture</a:t>
+              <a:t>07   Research Objectives</a:t>
             </a:r>
           </a:p>
           <a:p>
@@ -20534,7 +20534,7 @@
                 </a:solidFill>
                 <a:latin typeface="Calibri"/>
               </a:rPr>
-              <a:t>04   Identified Research Problem</a:t>
+              <a:t>08   Research Questions</a:t>
             </a:r>
           </a:p>
           <a:p>
@@ -20552,7 +20552,7 @@
                 </a:solidFill>
                 <a:latin typeface="Calibri"/>
               </a:rPr>
-              <a:t>05   Research Title &amp; Aim</a:t>
+              <a:t>09   Research Methodology</a:t>
             </a:r>
           </a:p>
           <a:p>
@@ -20570,331 +20570,7 @@
                 </a:solidFill>
                 <a:latin typeface="Calibri"/>
               </a:rPr>
-              <a:t>05a   Research Objectives — overall</a:t>
-            </a:r>
-          </a:p>
-          <a:p>
-            <a:pPr>
-              <a:spcAft>
-                <a:spcPts val="600"/>
-              </a:spcAft>
-              <a:buFont typeface="Arial"/>
-              <a:buChar char="•"/>
-            </a:pPr>
-            <a:r>
-              <a:rPr sz="1400">
-                <a:solidFill>
-                  <a:srgbClr val="1A1A1A"/>
-                </a:solidFill>
-                <a:latin typeface="Calibri"/>
-              </a:rPr>
-              <a:t>06   Research Objectives — individual</a:t>
-            </a:r>
-          </a:p>
-          <a:p>
-            <a:pPr>
-              <a:spcAft>
-                <a:spcPts val="600"/>
-              </a:spcAft>
-              <a:buFont typeface="Arial"/>
-              <a:buChar char="•"/>
-            </a:pPr>
-            <a:r>
-              <a:rPr sz="1400">
-                <a:solidFill>
-                  <a:srgbClr val="1A1A1A"/>
-                </a:solidFill>
-                <a:latin typeface="Calibri"/>
-              </a:rPr>
-              <a:t>06a   Objective 1 — SATR</a:t>
-            </a:r>
-          </a:p>
-          <a:p>
-            <a:pPr>
-              <a:spcAft>
-                <a:spcPts val="600"/>
-              </a:spcAft>
-              <a:buFont typeface="Arial"/>
-              <a:buChar char="•"/>
-            </a:pPr>
-            <a:r>
-              <a:rPr sz="1400">
-                <a:solidFill>
-                  <a:srgbClr val="1A1A1A"/>
-                </a:solidFill>
-                <a:latin typeface="Calibri"/>
-              </a:rPr>
-              <a:t>06b   Objective 2 — APRR</a:t>
-            </a:r>
-          </a:p>
-          <a:p>
-            <a:pPr>
-              <a:spcAft>
-                <a:spcPts val="600"/>
-              </a:spcAft>
-              <a:buFont typeface="Arial"/>
-              <a:buChar char="•"/>
-            </a:pPr>
-            <a:r>
-              <a:rPr sz="1400">
-                <a:solidFill>
-                  <a:srgbClr val="1A1A1A"/>
-                </a:solidFill>
-                <a:latin typeface="Calibri"/>
-              </a:rPr>
-              <a:t>06c   Objective 3 — MNCD</a:t>
-            </a:r>
-          </a:p>
-          <a:p>
-            <a:pPr>
-              <a:spcAft>
-                <a:spcPts val="600"/>
-              </a:spcAft>
-              <a:buFont typeface="Arial"/>
-              <a:buChar char="•"/>
-            </a:pPr>
-            <a:r>
-              <a:rPr sz="1400">
-                <a:solidFill>
-                  <a:srgbClr val="1A1A1A"/>
-                </a:solidFill>
-                <a:latin typeface="Calibri"/>
-              </a:rPr>
-              <a:t>06d   Objective 4 — FCNP</a:t>
-            </a:r>
-          </a:p>
-          <a:p>
-            <a:pPr>
-              <a:spcAft>
-                <a:spcPts val="600"/>
-              </a:spcAft>
-              <a:buFont typeface="Arial"/>
-              <a:buChar char="•"/>
-            </a:pPr>
-            <a:r>
-              <a:rPr sz="1400">
-                <a:solidFill>
-                  <a:srgbClr val="1A1A1A"/>
-                </a:solidFill>
-                <a:latin typeface="Calibri"/>
-              </a:rPr>
-              <a:t>06e   What these objectives do not claim</a:t>
-            </a:r>
-          </a:p>
-          <a:p>
-            <a:pPr>
-              <a:spcAft>
-                <a:spcPts val="600"/>
-              </a:spcAft>
-              <a:buFont typeface="Arial"/>
-              <a:buChar char="•"/>
-            </a:pPr>
-            <a:r>
-              <a:rPr sz="1400">
-                <a:solidFill>
-                  <a:srgbClr val="1A1A1A"/>
-                </a:solidFill>
-                <a:latin typeface="Calibri"/>
-              </a:rPr>
-              <a:t>07   Research Questions</a:t>
-            </a:r>
-          </a:p>
-          <a:p>
-            <a:pPr>
-              <a:spcAft>
-                <a:spcPts val="600"/>
-              </a:spcAft>
-              <a:buFont typeface="Arial"/>
-              <a:buChar char="•"/>
-            </a:pPr>
-            <a:r>
-              <a:rPr sz="1400">
-                <a:solidFill>
-                  <a:srgbClr val="1A1A1A"/>
-                </a:solidFill>
-                <a:latin typeface="Calibri"/>
-              </a:rPr>
-              <a:t>08   Research Methodology</a:t>
-            </a:r>
-          </a:p>
-          <a:p>
-            <a:pPr>
-              <a:spcAft>
-                <a:spcPts val="600"/>
-              </a:spcAft>
-              <a:buFont typeface="Arial"/>
-              <a:buChar char="•"/>
-            </a:pPr>
-            <a:r>
-              <a:rPr sz="1400">
-                <a:solidFill>
-                  <a:srgbClr val="1A1A1A"/>
-                </a:solidFill>
-                <a:latin typeface="Calibri"/>
-              </a:rPr>
-              <a:t>08a   Methodology — O1 SATR</a:t>
-            </a:r>
-          </a:p>
-          <a:p>
-            <a:pPr>
-              <a:spcAft>
-                <a:spcPts val="600"/>
-              </a:spcAft>
-              <a:buFont typeface="Arial"/>
-              <a:buChar char="•"/>
-            </a:pPr>
-            <a:r>
-              <a:rPr sz="1400">
-                <a:solidFill>
-                  <a:srgbClr val="1A1A1A"/>
-                </a:solidFill>
-                <a:latin typeface="Calibri"/>
-              </a:rPr>
-              <a:t>08b   Methodology — O2 APRR</a:t>
-            </a:r>
-          </a:p>
-          <a:p>
-            <a:pPr>
-              <a:spcAft>
-                <a:spcPts val="600"/>
-              </a:spcAft>
-              <a:buFont typeface="Arial"/>
-              <a:buChar char="•"/>
-            </a:pPr>
-            <a:r>
-              <a:rPr sz="1400">
-                <a:solidFill>
-                  <a:srgbClr val="1A1A1A"/>
-                </a:solidFill>
-                <a:latin typeface="Calibri"/>
-              </a:rPr>
-              <a:t>08c   Methodology — O3 MNCD</a:t>
-            </a:r>
-          </a:p>
-          <a:p>
-            <a:pPr>
-              <a:spcAft>
-                <a:spcPts val="600"/>
-              </a:spcAft>
-              <a:buFont typeface="Arial"/>
-              <a:buChar char="•"/>
-            </a:pPr>
-            <a:r>
-              <a:rPr sz="1400">
-                <a:solidFill>
-                  <a:srgbClr val="1A1A1A"/>
-                </a:solidFill>
-                <a:latin typeface="Calibri"/>
-              </a:rPr>
-              <a:t>08d   Methodology — O4 FCNP</a:t>
-            </a:r>
-          </a:p>
-          <a:p>
-            <a:pPr>
-              <a:spcAft>
-                <a:spcPts val="600"/>
-              </a:spcAft>
-              <a:buFont typeface="Arial"/>
-              <a:buChar char="•"/>
-            </a:pPr>
-            <a:r>
-              <a:rPr sz="1400">
-                <a:solidFill>
-                  <a:srgbClr val="1A1A1A"/>
-                </a:solidFill>
-                <a:latin typeface="Calibri"/>
-              </a:rPr>
-              <a:t>08e   Methodology — integrated loop</a:t>
-            </a:r>
-          </a:p>
-          <a:p>
-            <a:pPr>
-              <a:spcAft>
-                <a:spcPts val="600"/>
-              </a:spcAft>
-              <a:buFont typeface="Arial"/>
-              <a:buChar char="•"/>
-            </a:pPr>
-            <a:r>
-              <a:rPr sz="1400">
-                <a:solidFill>
-                  <a:srgbClr val="1A1A1A"/>
-                </a:solidFill>
-                <a:latin typeface="Calibri"/>
-              </a:rPr>
-              <a:t>08f   Methodology — implementation formulas</a:t>
-            </a:r>
-          </a:p>
-          <a:p>
-            <a:pPr>
-              <a:spcAft>
-                <a:spcPts val="600"/>
-              </a:spcAft>
-              <a:buFont typeface="Arial"/>
-              <a:buChar char="•"/>
-            </a:pPr>
-            <a:r>
-              <a:rPr sz="1400">
-                <a:solidFill>
-                  <a:srgbClr val="1A1A1A"/>
-                </a:solidFill>
-                <a:latin typeface="Calibri"/>
-              </a:rPr>
-              <a:t>08g   Methodology — implemented algorithms</a:t>
-            </a:r>
-          </a:p>
-          <a:p>
-            <a:pPr>
-              <a:spcAft>
-                <a:spcPts val="600"/>
-              </a:spcAft>
-              <a:buFont typeface="Arial"/>
-              <a:buChar char="•"/>
-            </a:pPr>
-            <a:r>
-              <a:rPr sz="1400">
-                <a:solidFill>
-                  <a:srgbClr val="1A1A1A"/>
-                </a:solidFill>
-                <a:latin typeface="Calibri"/>
-              </a:rPr>
-              <a:t>08h   Methodology — ToolBench walkthrough</a:t>
-            </a:r>
-          </a:p>
-          <a:p>
-            <a:pPr>
-              <a:spcAft>
-                <a:spcPts val="600"/>
-              </a:spcAft>
-              <a:buFont typeface="Arial"/>
-              <a:buChar char="•"/>
-            </a:pPr>
-            <a:r>
-              <a:rPr sz="1400">
-                <a:solidFill>
-                  <a:srgbClr val="1A1A1A"/>
-                </a:solidFill>
-                <a:latin typeface="Calibri"/>
-              </a:rPr>
-              <a:t>08i   Methodology — data.gov.in walkthrough</a:t>
-            </a:r>
-          </a:p>
-          <a:p>
-            <a:pPr>
-              <a:spcAft>
-                <a:spcPts val="600"/>
-              </a:spcAft>
-              <a:buFont typeface="Arial"/>
-              <a:buChar char="•"/>
-            </a:pPr>
-            <a:r>
-              <a:rPr sz="1400">
-                <a:solidFill>
-                  <a:srgbClr val="1A1A1A"/>
-                </a:solidFill>
-                <a:latin typeface="Calibri"/>
-              </a:rPr>
-              <a:t>09   Conclusion</a:t>
+              <a:t>10   Conclusion</a:t>
             </a:r>
           </a:p>
         </p:txBody>
@@ -20920,7 +20596,7 @@
           <a:lstStyle/>
           <a:p>
             <a:pPr algn="l"/>
-            <a:fld id="{32385244-3427-4c7e-8834-7daf16cf18c9}" type="datetime3">
+            <a:fld id="{c9b5bbf1-9ff5-4ecc-8eb0-1bbadfd40743}" type="datetime3">
               <a:rPr lang="en-GB" sz="1000" dirty="0">
                 <a:solidFill>
                   <a:srgbClr val="9AA3AE"/>
@@ -20954,7 +20630,7 @@
           <a:lstStyle/>
           <a:p>
             <a:pPr algn="ctr"/>
-            <a:fld id="{f4a97765-a6d4-4b9e-9a8e-e7f78076d823}" type="slidenum">
+            <a:fld id="{2de584aa-d926-4c4d-bb77-895d8e64bbd8}" type="slidenum">
               <a:rPr lang="en-GB" sz="1200" b="1" dirty="0">
                 <a:solidFill>
                   <a:srgbClr val="FFFFFF"/>
@@ -21853,7 +21529,7 @@
           <a:lstStyle/>
           <a:p>
             <a:pPr algn="l"/>
-            <a:fld id="{3ec631de-eb5f-44f7-9aa6-cbb274312059}" type="datetime3">
+            <a:fld id="{3ec8776c-7df9-4bab-b909-021eb0df5df4}" type="datetime3">
               <a:rPr lang="en-GB" sz="1000" dirty="0">
                 <a:solidFill>
                   <a:srgbClr val="9AA3AE"/>
@@ -21887,7 +21563,7 @@
           <a:lstStyle/>
           <a:p>
             <a:pPr algn="ctr"/>
-            <a:fld id="{9da2d52a-d53f-41b9-b1b0-625f1169e231}" type="slidenum">
+            <a:fld id="{cffabc69-9f4f-4d20-99e0-8667a738cd75}" type="slidenum">
               <a:rPr lang="en-GB" sz="1200" b="1" dirty="0">
                 <a:solidFill>
                   <a:srgbClr val="FFFFFF"/>
@@ -22696,7 +22372,7 @@
           <a:lstStyle/>
           <a:p>
             <a:pPr algn="l"/>
-            <a:fld id="{c156026f-3f5b-4b4a-bfa8-739694d18f75}" type="datetime3">
+            <a:fld id="{d97a6af6-c169-401f-b9ab-4e314d680a80}" type="datetime3">
               <a:rPr lang="en-GB" sz="1000" dirty="0">
                 <a:solidFill>
                   <a:srgbClr val="9AA3AE"/>
@@ -22730,7 +22406,7 @@
           <a:lstStyle/>
           <a:p>
             <a:pPr algn="ctr"/>
-            <a:fld id="{fe0f5901-0e1d-4aac-8e67-40c57472869b}" type="slidenum">
+            <a:fld id="{763bce3a-3db5-4258-ab62-c39887c16aea}" type="slidenum">
               <a:rPr lang="en-GB" sz="1200" b="1" dirty="0">
                 <a:solidFill>
                   <a:srgbClr val="FFFFFF"/>
@@ -23485,7 +23161,7 @@
           <a:lstStyle/>
           <a:p>
             <a:pPr algn="l"/>
-            <a:fld id="{69ce812d-24ac-4eed-9748-6c8de2dd5f6c}" type="datetime3">
+            <a:fld id="{7eb8c979-1550-403b-8a10-cb9e0e26f8eb}" type="datetime3">
               <a:rPr lang="en-GB" sz="1000" dirty="0">
                 <a:solidFill>
                   <a:srgbClr val="9AA3AE"/>
@@ -23519,7 +23195,7 @@
           <a:lstStyle/>
           <a:p>
             <a:pPr algn="ctr"/>
-            <a:fld id="{2ceb3b18-5a91-4705-ac82-bd8b44bfd4ab}" type="slidenum">
+            <a:fld id="{b46b826d-abcf-4272-a51c-646f5ecd8ca7}" type="slidenum">
               <a:rPr lang="en-GB" sz="1200" b="1" dirty="0">
                 <a:solidFill>
                   <a:srgbClr val="FFFFFF"/>
@@ -24328,7 +24004,7 @@
           <a:lstStyle/>
           <a:p>
             <a:pPr algn="l"/>
-            <a:fld id="{c30b1abb-a8db-4d74-ab34-ebc9a02dfcb8}" type="datetime3">
+            <a:fld id="{f0691323-10fc-4f5b-87eb-d5dae5551ed4}" type="datetime3">
               <a:rPr lang="en-GB" sz="1000" dirty="0">
                 <a:solidFill>
                   <a:srgbClr val="9AA3AE"/>
@@ -24362,7 +24038,7 @@
           <a:lstStyle/>
           <a:p>
             <a:pPr algn="ctr"/>
-            <a:fld id="{3a5756fb-84e5-45c3-be91-9cb02dbfe230}" type="slidenum">
+            <a:fld id="{addfa192-88ff-4118-9e9d-8f9c3b306b6c}" type="slidenum">
               <a:rPr lang="en-GB" sz="1200" b="1" dirty="0">
                 <a:solidFill>
                   <a:srgbClr val="FFFFFF"/>
@@ -25206,7 +24882,7 @@
           <a:lstStyle/>
           <a:p>
             <a:pPr algn="l"/>
-            <a:fld id="{fa79ffc5-3e98-48a6-803e-192542bbe6ac}" type="datetime3">
+            <a:fld id="{43eef4b5-c581-459f-9e20-39875c2d394b}" type="datetime3">
               <a:rPr lang="en-GB" sz="1000" dirty="0">
                 <a:solidFill>
                   <a:srgbClr val="9AA3AE"/>
@@ -25240,7 +24916,7 @@
           <a:lstStyle/>
           <a:p>
             <a:pPr algn="ctr"/>
-            <a:fld id="{e93ae0ab-e345-4e35-96d2-0bb61d5d5818}" type="slidenum">
+            <a:fld id="{280a0534-87bf-4c54-b1fb-5c0087793c4d}" type="slidenum">
               <a:rPr lang="en-GB" sz="1200" b="1" dirty="0">
                 <a:solidFill>
                   <a:srgbClr val="FFFFFF"/>
@@ -25926,7 +25602,7 @@
           <a:lstStyle/>
           <a:p>
             <a:pPr algn="l"/>
-            <a:fld id="{97ad2783-5060-43b5-9f38-72df418805cc}" type="datetime3">
+            <a:fld id="{c68d867b-842b-47dd-9467-4fc2c735f78a}" type="datetime3">
               <a:rPr lang="en-GB" sz="1000" dirty="0">
                 <a:solidFill>
                   <a:srgbClr val="9AA3AE"/>
@@ -25960,7 +25636,7 @@
           <a:lstStyle/>
           <a:p>
             <a:pPr algn="ctr"/>
-            <a:fld id="{fa65d0b8-8a48-4eca-ab5b-f1db98800540}" type="slidenum">
+            <a:fld id="{10795d22-a825-4c38-91ee-2c2d51cfe6c4}" type="slidenum">
               <a:rPr lang="en-GB" sz="1200" b="1" dirty="0">
                 <a:solidFill>
                   <a:srgbClr val="FFFFFF"/>
@@ -26769,7 +26445,7 @@
           <a:lstStyle/>
           <a:p>
             <a:pPr algn="l"/>
-            <a:fld id="{8114bfea-bc94-452f-89c4-a7ce2fa7b24b}" type="datetime3">
+            <a:fld id="{dd8bed28-7843-4dec-a556-7ec4b3f1892a}" type="datetime3">
               <a:rPr lang="en-GB" sz="1000" dirty="0">
                 <a:solidFill>
                   <a:srgbClr val="9AA3AE"/>
@@ -26803,7 +26479,7 @@
           <a:lstStyle/>
           <a:p>
             <a:pPr algn="ctr"/>
-            <a:fld id="{d0c4cd2e-f0de-4452-a6a8-bf5a2f30889f}" type="slidenum">
+            <a:fld id="{c86ce468-cd05-4878-8151-f728b5bcd2bc}" type="slidenum">
               <a:rPr lang="en-GB" sz="1200" b="1" dirty="0">
                 <a:solidFill>
                   <a:srgbClr val="FFFFFF"/>
@@ -27270,7 +26946,7 @@
           <a:lstStyle/>
           <a:p>
             <a:pPr algn="l"/>
-            <a:fld id="{b2f7452c-08f5-4ebd-b73a-92b9f4e6852e}" type="datetime3">
+            <a:fld id="{58bbaa6c-ca9f-452d-8832-bc25a3ea8c58}" type="datetime3">
               <a:rPr lang="en-GB" sz="1000" dirty="0">
                 <a:solidFill>
                   <a:srgbClr val="9AA3AE"/>
@@ -27304,7 +26980,7 @@
           <a:lstStyle/>
           <a:p>
             <a:pPr algn="ctr"/>
-            <a:fld id="{72149f37-bbc9-47c0-b418-d92031c4f1d8}" type="slidenum">
+            <a:fld id="{3862bf4c-9395-443e-b1d7-06bcbe257b48}" type="slidenum">
               <a:rPr lang="en-GB" sz="1200" b="1" dirty="0">
                 <a:solidFill>
                   <a:srgbClr val="FFFFFF"/>
@@ -27771,7 +27447,7 @@
           <a:lstStyle/>
           <a:p>
             <a:pPr algn="l"/>
-            <a:fld id="{08a98e85-9c97-492d-a93d-3ffea1497383}" type="datetime3">
+            <a:fld id="{42127834-62e5-4053-b51f-1c64027f40f5}" type="datetime3">
               <a:rPr lang="en-GB" sz="1000" dirty="0">
                 <a:solidFill>
                   <a:srgbClr val="9AA3AE"/>
@@ -27805,7 +27481,7 @@
           <a:lstStyle/>
           <a:p>
             <a:pPr algn="ctr"/>
-            <a:fld id="{a07c51c3-c359-4d3d-a1fa-23702ab3e633}" type="slidenum">
+            <a:fld id="{34b9de27-a998-464a-bc17-e7796d633a83}" type="slidenum">
               <a:rPr lang="en-GB" sz="1200" b="1" dirty="0">
                 <a:solidFill>
                   <a:srgbClr val="FFFFFF"/>
@@ -28237,7 +27913,7 @@
           <a:lstStyle/>
           <a:p>
             <a:pPr algn="l"/>
-            <a:fld id="{72a1ac19-0033-4336-9260-3f01f5fc5af9}" type="datetime3">
+            <a:fld id="{7e999e89-b92f-49fa-9b3c-a0d8688ec1ff}" type="datetime3">
               <a:rPr lang="en-GB" sz="1000" dirty="0">
                 <a:solidFill>
                   <a:srgbClr val="9AA3AE"/>
@@ -28271,7 +27947,7 @@
           <a:lstStyle/>
           <a:p>
             <a:pPr algn="ctr"/>
-            <a:fld id="{ef4de457-fd2c-4ce2-91df-372a74cfc102}" type="slidenum">
+            <a:fld id="{45d09752-a792-468f-903f-18155740c185}" type="slidenum">
               <a:rPr lang="en-GB" sz="1200" b="1" dirty="0">
                 <a:solidFill>
                   <a:srgbClr val="FFFFFF"/>
@@ -28703,7 +28379,7 @@
           <a:lstStyle/>
           <a:p>
             <a:pPr algn="l"/>
-            <a:fld id="{dd91ca7b-d592-4dce-9d20-a2311ab4ff16}" type="datetime3">
+            <a:fld id="{da43f502-d964-4081-8b04-35951a6cf18c}" type="datetime3">
               <a:rPr lang="en-GB" sz="1000" dirty="0">
                 <a:solidFill>
                   <a:srgbClr val="9AA3AE"/>
@@ -28737,7 +28413,7 @@
           <a:lstStyle/>
           <a:p>
             <a:pPr algn="ctr"/>
-            <a:fld id="{02ef7acd-e93e-4fd7-9bba-bcb29a63f609}" type="slidenum">
+            <a:fld id="{e6ab1be0-1611-4f34-b529-35b35f171ffb}" type="slidenum">
               <a:rPr lang="en-GB" sz="1200" b="1" dirty="0">
                 <a:solidFill>
                   <a:srgbClr val="FFFFFF"/>
@@ -29188,7 +28864,7 @@
           <a:lstStyle/>
           <a:p>
             <a:pPr algn="l"/>
-            <a:fld id="{52565ccd-1c6d-4c38-8f99-461aed8aa2dc}" type="datetime3">
+            <a:fld id="{213fdf83-91e9-4453-824d-e121d5225863}" type="datetime3">
               <a:rPr lang="en-GB" sz="1000" dirty="0">
                 <a:solidFill>
                   <a:srgbClr val="9AA3AE"/>
@@ -29222,7 +28898,7 @@
           <a:lstStyle/>
           <a:p>
             <a:pPr algn="ctr"/>
-            <a:fld id="{4eba2141-5c55-4d1d-ac06-a3779e0a4eef}" type="slidenum">
+            <a:fld id="{9e195598-bad0-4b8c-b9e8-d0e570250b67}" type="slidenum">
               <a:rPr lang="en-GB" sz="1200" b="1" dirty="0">
                 <a:solidFill>
                   <a:srgbClr val="FFFFFF"/>
@@ -29673,7 +29349,7 @@
           <a:lstStyle/>
           <a:p>
             <a:pPr algn="l"/>
-            <a:fld id="{b4fb15d4-85c5-45ca-b258-d0ecc06565ce}" type="datetime3">
+            <a:fld id="{7e8a1db6-538c-4746-a8f0-3613d703205a}" type="datetime3">
               <a:rPr lang="en-GB" sz="1000" dirty="0">
                 <a:solidFill>
                   <a:srgbClr val="9AA3AE"/>
@@ -29707,7 +29383,7 @@
           <a:lstStyle/>
           <a:p>
             <a:pPr algn="ctr"/>
-            <a:fld id="{26c70437-0c43-42ff-96d1-e95f9644b05e}" type="slidenum">
+            <a:fld id="{a778664c-4e2f-4304-a1d1-1b41ca886a29}" type="slidenum">
               <a:rPr lang="en-GB" sz="1200" b="1" dirty="0">
                 <a:solidFill>
                   <a:srgbClr val="FFFFFF"/>
@@ -30193,7 +29869,7 @@
           <a:lstStyle/>
           <a:p>
             <a:pPr algn="l"/>
-            <a:fld id="{d1fdf01e-6e1c-4906-b1ff-d63eea1425ea}" type="datetime3">
+            <a:fld id="{436f79fe-72ab-4076-817d-a358770bc661}" type="datetime3">
               <a:rPr lang="en-GB" sz="1000" dirty="0">
                 <a:solidFill>
                   <a:srgbClr val="9AA3AE"/>
@@ -30227,7 +29903,7 @@
           <a:lstStyle/>
           <a:p>
             <a:pPr algn="ctr"/>
-            <a:fld id="{6afae7ec-76e6-49f2-a73f-f526a4e8a015}" type="slidenum">
+            <a:fld id="{f2eb8670-49d6-40ee-9fea-f1fd65e0a18c}" type="slidenum">
               <a:rPr lang="en-GB" sz="1200" b="1" dirty="0">
                 <a:solidFill>
                   <a:srgbClr val="FFFFFF"/>
@@ -30677,7 +30353,7 @@
           <a:lstStyle/>
           <a:p>
             <a:pPr algn="l"/>
-            <a:fld id="{6b247c57-b302-45fe-b482-20e47e4edacd}" type="datetime3">
+            <a:fld id="{634aae4a-53cc-485b-bb21-2b1de8a83c43}" type="datetime3">
               <a:rPr lang="en-GB" sz="1000" dirty="0">
                 <a:solidFill>
                   <a:srgbClr val="9AA3AE"/>
@@ -30711,7 +30387,7 @@
           <a:lstStyle/>
           <a:p>
             <a:pPr algn="ctr"/>
-            <a:fld id="{1f90fc3c-92a7-4527-b5a1-ab450fd08994}" type="slidenum">
+            <a:fld id="{38f2bb69-bd8f-403a-8f0e-8f1fa088ecb3}" type="slidenum">
               <a:rPr lang="en-GB" sz="1200" b="1" dirty="0">
                 <a:solidFill>
                   <a:srgbClr val="FFFFFF"/>
@@ -31178,7 +30854,7 @@
           <a:lstStyle/>
           <a:p>
             <a:pPr algn="l"/>
-            <a:fld id="{118e3413-55c7-447b-8143-9253f6a99c79}" type="datetime3">
+            <a:fld id="{27274a5d-ec3b-4cbb-a5ff-ef873ac0f039}" type="datetime3">
               <a:rPr lang="en-GB" sz="1000" dirty="0">
                 <a:solidFill>
                   <a:srgbClr val="9AA3AE"/>
@@ -31212,7 +30888,7 @@
           <a:lstStyle/>
           <a:p>
             <a:pPr algn="ctr"/>
-            <a:fld id="{d9f40755-1948-4db9-927c-a59d5c998481}" type="slidenum">
+            <a:fld id="{b8371c9e-8313-40c1-8185-ca56d26f56a0}" type="slidenum">
               <a:rPr lang="en-GB" sz="1200" b="1" dirty="0">
                 <a:solidFill>
                   <a:srgbClr val="FFFFFF"/>
@@ -32139,7 +31815,7 @@
           <a:lstStyle/>
           <a:p>
             <a:pPr algn="l"/>
-            <a:fld id="{ccf7cc15-a7a3-440e-9951-1c284292bdf7}" type="datetime3">
+            <a:fld id="{f3ab26a6-3f37-4d58-8133-c822b45bab1d}" type="datetime3">
               <a:rPr lang="en-GB" sz="1000" dirty="0">
                 <a:solidFill>
                   <a:srgbClr val="9AA3AE"/>
@@ -32173,7 +31849,7 @@
           <a:lstStyle/>
           <a:p>
             <a:pPr algn="ctr"/>
-            <a:fld id="{2d0380dd-eadb-48f3-94eb-74d003b64ba4}" type="slidenum">
+            <a:fld id="{7454e94f-fa10-48e4-8320-07632ecf9a71}" type="slidenum">
               <a:rPr lang="en-GB" sz="1200" b="1" dirty="0">
                 <a:solidFill>
                   <a:srgbClr val="FFFFFF"/>
@@ -33100,7 +32776,7 @@
           <a:lstStyle/>
           <a:p>
             <a:pPr algn="l"/>
-            <a:fld id="{143231b1-bb59-483b-b894-29b3150de939}" type="datetime3">
+            <a:fld id="{20b66ea6-b922-4173-bb50-9bdf3c601f4d}" type="datetime3">
               <a:rPr lang="en-GB" sz="1000" dirty="0">
                 <a:solidFill>
                   <a:srgbClr val="9AA3AE"/>
@@ -33134,7 +32810,7 @@
           <a:lstStyle/>
           <a:p>
             <a:pPr algn="ctr"/>
-            <a:fld id="{6f99ff2e-2f4e-4e70-85e3-7f6fc9ccf21b}" type="slidenum">
+            <a:fld id="{702f82c1-f4e2-415f-9f1f-c4bd7cd13a02}" type="slidenum">
               <a:rPr lang="en-GB" sz="1200" b="1" dirty="0">
                 <a:solidFill>
                   <a:srgbClr val="FFFFFF"/>
@@ -34061,7 +33737,7 @@
           <a:lstStyle/>
           <a:p>
             <a:pPr algn="l"/>
-            <a:fld id="{de1bd0d8-a310-46e3-ba5f-b845bb42f4f6}" type="datetime3">
+            <a:fld id="{3a63f844-f669-42ec-a906-42d6f173762e}" type="datetime3">
               <a:rPr lang="en-GB" sz="1000" dirty="0">
                 <a:solidFill>
                   <a:srgbClr val="9AA3AE"/>
@@ -34095,7 +33771,7 @@
           <a:lstStyle/>
           <a:p>
             <a:pPr algn="ctr"/>
-            <a:fld id="{5afa98a4-8525-4d8f-84bd-74ee381e75c5}" type="slidenum">
+            <a:fld id="{fbdc83b9-9779-4c62-b688-49aa9efd83aa}" type="slidenum">
               <a:rPr lang="en-GB" sz="1200" b="1" dirty="0">
                 <a:solidFill>
                   <a:srgbClr val="FFFFFF"/>
@@ -35022,7 +34698,7 @@
           <a:lstStyle/>
           <a:p>
             <a:pPr algn="l"/>
-            <a:fld id="{19ea6cb2-e778-4890-842b-9627c62f311a}" type="datetime3">
+            <a:fld id="{7284679d-3c1c-4f46-a899-eac1bed4c9ee}" type="datetime3">
               <a:rPr lang="en-GB" sz="1000" dirty="0">
                 <a:solidFill>
                   <a:srgbClr val="9AA3AE"/>
@@ -35056,7 +34732,7 @@
           <a:lstStyle/>
           <a:p>
             <a:pPr algn="ctr"/>
-            <a:fld id="{f55a4476-c437-41a2-83c0-a196fc8b1626}" type="slidenum">
+            <a:fld id="{ffc3683d-054f-430c-bc4a-3a55c2db559e}" type="slidenum">
               <a:rPr lang="en-GB" sz="1200" b="1" dirty="0">
                 <a:solidFill>
                   <a:srgbClr val="FFFFFF"/>

--- a/laboratory/docs/slides/ACRS_PhD_Proposal_JenishaT_24ETRP720001.pptx
+++ b/laboratory/docs/slides/ACRS_PhD_Proposal_JenishaT_24ETRP720001.pptx
@@ -3835,7 +3835,7 @@
           <a:lstStyle/>
           <a:p>
             <a:pPr algn="l"/>
-            <a:fld id="{79bc40c5-0f19-449d-bbc3-50e058a4d530}" type="datetime3">
+            <a:fld id="{654358f5-caf0-4de5-b717-88ffe6f87151}" type="datetime3">
               <a:rPr lang="en-GB" sz="1000" dirty="0">
                 <a:solidFill>
                   <a:srgbClr val="9AA3AE"/>
@@ -3869,7 +3869,7 @@
           <a:lstStyle/>
           <a:p>
             <a:pPr algn="ctr"/>
-            <a:fld id="{6b7ce373-bd35-4a2d-8481-a46c88d74846}" type="slidenum">
+            <a:fld id="{842b063f-fb15-41c6-9987-3afaf94517f3}" type="slidenum">
               <a:rPr lang="en-GB" sz="1200" b="1" dirty="0">
                 <a:solidFill>
                   <a:srgbClr val="FFFFFF"/>
@@ -4796,7 +4796,7 @@
           <a:lstStyle/>
           <a:p>
             <a:pPr algn="l"/>
-            <a:fld id="{5d61c29b-9830-4696-b7f2-55af113138e5}" type="datetime3">
+            <a:fld id="{efce820b-539a-45fb-b9b8-dc9d778614c7}" type="datetime3">
               <a:rPr lang="en-GB" sz="1000" dirty="0">
                 <a:solidFill>
                   <a:srgbClr val="9AA3AE"/>
@@ -4830,7 +4830,7 @@
           <a:lstStyle/>
           <a:p>
             <a:pPr algn="ctr"/>
-            <a:fld id="{a239dbfe-d22a-4c1f-a938-ce1573dc5f73}" type="slidenum">
+            <a:fld id="{c060fcbc-7b94-412d-8c6b-aef9ace5044a}" type="slidenum">
               <a:rPr lang="en-GB" sz="1200" b="1" dirty="0">
                 <a:solidFill>
                   <a:srgbClr val="FFFFFF"/>
@@ -5757,7 +5757,7 @@
           <a:lstStyle/>
           <a:p>
             <a:pPr algn="l"/>
-            <a:fld id="{4e82ab66-753e-41e3-bff6-968c41d4ab38}" type="datetime3">
+            <a:fld id="{aab8fbd1-bfde-47c9-b638-7411440db527}" type="datetime3">
               <a:rPr lang="en-GB" sz="1000" dirty="0">
                 <a:solidFill>
                   <a:srgbClr val="9AA3AE"/>
@@ -5791,7 +5791,7 @@
           <a:lstStyle/>
           <a:p>
             <a:pPr algn="ctr"/>
-            <a:fld id="{403f6587-f939-45f1-9c68-d81dc51c06fa}" type="slidenum">
+            <a:fld id="{201a12ea-9761-4640-a88f-b80086493f30}" type="slidenum">
               <a:rPr lang="en-GB" sz="1200" b="1" dirty="0">
                 <a:solidFill>
                   <a:srgbClr val="FFFFFF"/>
@@ -6718,7 +6718,7 @@
           <a:lstStyle/>
           <a:p>
             <a:pPr algn="l"/>
-            <a:fld id="{4685405d-e35e-47bf-afcd-b8d9e805f68d}" type="datetime3">
+            <a:fld id="{6805c05c-8356-4e91-9f93-b1add282f55c}" type="datetime3">
               <a:rPr lang="en-GB" sz="1000" dirty="0">
                 <a:solidFill>
                   <a:srgbClr val="9AA3AE"/>
@@ -6752,7 +6752,7 @@
           <a:lstStyle/>
           <a:p>
             <a:pPr algn="ctr"/>
-            <a:fld id="{7cb31cd2-e21f-43c7-a9c6-e393b35c427f}" type="slidenum">
+            <a:fld id="{7c4f265e-a1c6-4e70-93cb-35b900c3a795}" type="slidenum">
               <a:rPr lang="en-GB" sz="1200" b="1" dirty="0">
                 <a:solidFill>
                   <a:srgbClr val="FFFFFF"/>
@@ -7679,7 +7679,7 @@
           <a:lstStyle/>
           <a:p>
             <a:pPr algn="l"/>
-            <a:fld id="{3f602372-ae1c-470e-902b-fa58489d3680}" type="datetime3">
+            <a:fld id="{858c5eee-216e-4933-95b9-425d93cb2369}" type="datetime3">
               <a:rPr lang="en-GB" sz="1000" dirty="0">
                 <a:solidFill>
                   <a:srgbClr val="9AA3AE"/>
@@ -7713,7 +7713,7 @@
           <a:lstStyle/>
           <a:p>
             <a:pPr algn="ctr"/>
-            <a:fld id="{7ec21884-11b9-4c5d-ba19-b0a03c53c444}" type="slidenum">
+            <a:fld id="{67870495-24d6-4fd3-a022-dc5624eb1d95}" type="slidenum">
               <a:rPr lang="en-GB" sz="1200" b="1" dirty="0">
                 <a:solidFill>
                   <a:srgbClr val="FFFFFF"/>
@@ -8640,7 +8640,7 @@
           <a:lstStyle/>
           <a:p>
             <a:pPr algn="l"/>
-            <a:fld id="{f46035cb-1ce0-4cbc-be49-3df87982d6f9}" type="datetime3">
+            <a:fld id="{092f85d5-a198-4b9e-b88d-fe748299f529}" type="datetime3">
               <a:rPr lang="en-GB" sz="1000" dirty="0">
                 <a:solidFill>
                   <a:srgbClr val="9AA3AE"/>
@@ -8674,7 +8674,7 @@
           <a:lstStyle/>
           <a:p>
             <a:pPr algn="ctr"/>
-            <a:fld id="{ecb0d392-1e74-4f6a-a784-e106f292d46f}" type="slidenum">
+            <a:fld id="{5d0c0902-0676-48ed-87be-7af188518854}" type="slidenum">
               <a:rPr lang="en-GB" sz="1200" b="1" dirty="0">
                 <a:solidFill>
                   <a:srgbClr val="FFFFFF"/>
@@ -9496,7 +9496,7 @@
           <a:lstStyle/>
           <a:p>
             <a:pPr algn="l"/>
-            <a:fld id="{5cc98f82-ce20-43ba-a532-78aea2d81f7b}" type="datetime3">
+            <a:fld id="{9c57c411-0883-4a3e-8186-427fbb0e5e11}" type="datetime3">
               <a:rPr lang="en-GB" sz="1000" dirty="0">
                 <a:solidFill>
                   <a:srgbClr val="9AA3AE"/>
@@ -9530,7 +9530,7 @@
           <a:lstStyle/>
           <a:p>
             <a:pPr algn="ctr"/>
-            <a:fld id="{9638127b-1133-4198-92f0-9f93a64d5561}" type="slidenum">
+            <a:fld id="{45475850-6966-4d0f-ad09-acf9ef68d1b4}" type="slidenum">
               <a:rPr lang="en-GB" sz="1200" b="1" dirty="0">
                 <a:solidFill>
                   <a:srgbClr val="FFFFFF"/>
@@ -10284,7 +10284,7 @@
           <a:lstStyle/>
           <a:p>
             <a:pPr algn="l"/>
-            <a:fld id="{19e6085b-48e5-49e5-95c5-3401909deebf}" type="datetime3">
+            <a:fld id="{97385b77-8060-439c-b2ab-a421c9ea7f2a}" type="datetime3">
               <a:rPr lang="en-GB" sz="1000" dirty="0">
                 <a:solidFill>
                   <a:srgbClr val="9AA3AE"/>
@@ -10318,7 +10318,7 @@
           <a:lstStyle/>
           <a:p>
             <a:pPr algn="ctr"/>
-            <a:fld id="{0d00fb5a-fd5d-43c4-8b88-6e85cc9d1175}" type="slidenum">
+            <a:fld id="{528a2512-f73e-45d2-9697-f314c3662cd7}" type="slidenum">
               <a:rPr lang="en-GB" sz="1200" b="1" dirty="0">
                 <a:solidFill>
                   <a:srgbClr val="FFFFFF"/>
@@ -11018,7 +11018,7 @@
           <a:lstStyle/>
           <a:p>
             <a:pPr algn="l"/>
-            <a:fld id="{cd1f5dea-ced5-48b3-b240-d3d7ae7a38df}" type="datetime3">
+            <a:fld id="{15551e35-2fb6-444e-8fc7-a95714db58a4}" type="datetime3">
               <a:rPr lang="en-GB" sz="1000" dirty="0">
                 <a:solidFill>
                   <a:srgbClr val="9AA3AE"/>
@@ -11052,7 +11052,7 @@
           <a:lstStyle/>
           <a:p>
             <a:pPr algn="ctr"/>
-            <a:fld id="{a62a0ee5-96f8-41b5-a0ab-5b15dd7fde06}" type="slidenum">
+            <a:fld id="{8be17b33-8142-46e8-987a-38cec05b34d2}" type="slidenum">
               <a:rPr lang="en-GB" sz="1200" b="1" dirty="0">
                 <a:solidFill>
                   <a:srgbClr val="FFFFFF"/>
@@ -11860,7 +11860,7 @@
           <a:lstStyle/>
           <a:p>
             <a:pPr algn="l"/>
-            <a:fld id="{839a08de-57a2-4e4f-8e03-c239c89d69f9}" type="datetime3">
+            <a:fld id="{b9d4b552-97ea-4070-88c0-f31d3be54d5d}" type="datetime3">
               <a:rPr lang="en-GB" sz="1000" dirty="0">
                 <a:solidFill>
                   <a:srgbClr val="9AA3AE"/>
@@ -11894,7 +11894,7 @@
           <a:lstStyle/>
           <a:p>
             <a:pPr algn="ctr"/>
-            <a:fld id="{45c5cbb9-4351-41f9-a116-50f7bf46e5fd}" type="slidenum">
+            <a:fld id="{c2f18ce8-5aa8-4221-ab1b-12cc89bf0f73}" type="slidenum">
               <a:rPr lang="en-GB" sz="1200" b="1" dirty="0">
                 <a:solidFill>
                   <a:srgbClr val="FFFFFF"/>
@@ -12361,7 +12361,7 @@
           <a:lstStyle/>
           <a:p>
             <a:pPr algn="l"/>
-            <a:fld id="{063b7edd-66ed-4887-8183-e2d2e7d909db}" type="datetime3">
+            <a:fld id="{c7a068e7-d6d0-4e60-b057-a929e422c05a}" type="datetime3">
               <a:rPr lang="en-GB" sz="1000" dirty="0">
                 <a:solidFill>
                   <a:srgbClr val="9AA3AE"/>
@@ -12395,7 +12395,7 @@
           <a:lstStyle/>
           <a:p>
             <a:pPr algn="ctr"/>
-            <a:fld id="{dca317f8-e0b0-4f95-be4b-7ee47a33072a}" type="slidenum">
+            <a:fld id="{fc964bca-1c64-4292-af05-f907f1da1a16}" type="slidenum">
               <a:rPr lang="en-GB" sz="1200" b="1" dirty="0">
                 <a:solidFill>
                   <a:srgbClr val="FFFFFF"/>
@@ -13247,7 +13247,7 @@
           <a:lstStyle/>
           <a:p>
             <a:pPr algn="l"/>
-            <a:fld id="{b2c918a2-3c26-4fa6-b05b-f8025c3d1b96}" type="datetime3">
+            <a:fld id="{5cebbbd2-6c67-4d00-afb9-6e9b8d063cad}" type="datetime3">
               <a:rPr lang="en-GB" sz="1000" dirty="0">
                 <a:solidFill>
                   <a:srgbClr val="9AA3AE"/>
@@ -13281,7 +13281,7 @@
           <a:lstStyle/>
           <a:p>
             <a:pPr algn="ctr"/>
-            <a:fld id="{67feafdc-8afe-468e-bf04-8c4c9bcbc2a1}" type="slidenum">
+            <a:fld id="{bd686c24-efd6-456a-80d8-c83d630cbac8}" type="slidenum">
               <a:rPr lang="en-GB" sz="1200" b="1" dirty="0">
                 <a:solidFill>
                   <a:srgbClr val="FFFFFF"/>
@@ -13713,7 +13713,7 @@
           <a:lstStyle/>
           <a:p>
             <a:pPr algn="l"/>
-            <a:fld id="{9c26b402-3eaf-4551-8bd3-130ac0adbb17}" type="datetime3">
+            <a:fld id="{18166bff-3499-4efc-b65c-d6787322171d}" type="datetime3">
               <a:rPr lang="en-GB" sz="1000" dirty="0">
                 <a:solidFill>
                   <a:srgbClr val="9AA3AE"/>
@@ -13747,7 +13747,7 @@
           <a:lstStyle/>
           <a:p>
             <a:pPr algn="ctr"/>
-            <a:fld id="{03e010f6-919f-458d-8d76-532d43b23070}" type="slidenum">
+            <a:fld id="{bd00e1bf-8e84-4fcd-a05d-f797eeb1fccb}" type="slidenum">
               <a:rPr lang="en-GB" sz="1200" b="1" dirty="0">
                 <a:solidFill>
                   <a:srgbClr val="FFFFFF"/>
@@ -14196,7 +14196,7 @@
           <a:lstStyle/>
           <a:p>
             <a:pPr algn="l"/>
-            <a:fld id="{7485621a-bc46-4f9e-a50b-684f8da1a82c}" type="datetime3">
+            <a:fld id="{ea69f39e-f29b-4c3f-8cbc-62e9e82b7399}" type="datetime3">
               <a:rPr lang="en-GB" sz="1000" dirty="0">
                 <a:solidFill>
                   <a:srgbClr val="9AA3AE"/>
@@ -14230,7 +14230,7 @@
           <a:lstStyle/>
           <a:p>
             <a:pPr algn="ctr"/>
-            <a:fld id="{5797ff8d-9003-4c9c-a48b-43c032073e86}" type="slidenum">
+            <a:fld id="{7dacb714-e7f8-427b-a399-e7080fe911c3}" type="slidenum">
               <a:rPr lang="en-GB" sz="1200" b="1" dirty="0">
                 <a:solidFill>
                   <a:srgbClr val="FFFFFF"/>
@@ -14916,7 +14916,7 @@
           <a:lstStyle/>
           <a:p>
             <a:pPr algn="l"/>
-            <a:fld id="{1a1f67f3-5396-4dad-b135-654733e278ed}" type="datetime3">
+            <a:fld id="{eec7e33d-013b-49c6-94b4-338431b5f90b}" type="datetime3">
               <a:rPr lang="en-GB" sz="1000" dirty="0">
                 <a:solidFill>
                   <a:srgbClr val="9AA3AE"/>
@@ -14950,7 +14950,7 @@
           <a:lstStyle/>
           <a:p>
             <a:pPr algn="ctr"/>
-            <a:fld id="{ab615862-4615-46fe-921f-f34b14840e8d}" type="slidenum">
+            <a:fld id="{a4243361-14c3-4ae7-8b84-8558713ea92c}" type="slidenum">
               <a:rPr lang="en-GB" sz="1200" b="1" dirty="0">
                 <a:solidFill>
                   <a:srgbClr val="FFFFFF"/>
@@ -15848,7 +15848,7 @@
           <a:lstStyle/>
           <a:p>
             <a:pPr algn="l"/>
-            <a:fld id="{51d99c80-f9d8-4146-bb03-48b1a4ce8f82}" type="datetime3">
+            <a:fld id="{2e3a5bb4-04d9-4ad6-ad5b-6ddef876a285}" type="datetime3">
               <a:rPr lang="en-GB" sz="1000" dirty="0">
                 <a:solidFill>
                   <a:srgbClr val="9AA3AE"/>
@@ -15882,7 +15882,7 @@
           <a:lstStyle/>
           <a:p>
             <a:pPr algn="ctr"/>
-            <a:fld id="{3f85f916-1749-49d5-81cb-d89044e6c756}" type="slidenum">
+            <a:fld id="{73be9799-60e9-41f7-9fbc-676c491ba1ad}" type="slidenum">
               <a:rPr lang="en-GB" sz="1200" b="1" dirty="0">
                 <a:solidFill>
                   <a:srgbClr val="FFFFFF"/>
@@ -16672,7 +16672,7 @@
           <a:lstStyle/>
           <a:p>
             <a:pPr algn="l"/>
-            <a:fld id="{9c41a283-6aa9-4f59-8a79-696a3d674058}" type="datetime3">
+            <a:fld id="{a1ccffb8-84f5-4789-a02b-fe1e8f203126}" type="datetime3">
               <a:rPr lang="en-GB" sz="1000" dirty="0">
                 <a:solidFill>
                   <a:srgbClr val="9AA3AE"/>
@@ -16706,7 +16706,7 @@
           <a:lstStyle/>
           <a:p>
             <a:pPr algn="ctr"/>
-            <a:fld id="{b9ece9b5-87d0-48e9-b193-0719d6f83b78}" type="slidenum">
+            <a:fld id="{37b7d82a-5b9a-431c-bf7d-48e2dfd428fe}" type="slidenum">
               <a:rPr lang="en-GB" sz="1200" b="1" dirty="0">
                 <a:solidFill>
                   <a:srgbClr val="FFFFFF"/>
@@ -17442,7 +17442,7 @@
           <a:lstStyle/>
           <a:p>
             <a:pPr algn="l"/>
-            <a:fld id="{8b089f03-993f-45b4-aff3-05a1331f2598}" type="datetime3">
+            <a:fld id="{ef65ddd9-b05a-4ea9-a9c0-493c5a39d286}" type="datetime3">
               <a:rPr lang="en-GB" sz="1000" dirty="0">
                 <a:solidFill>
                   <a:srgbClr val="9AA3AE"/>
@@ -17476,7 +17476,7 @@
           <a:lstStyle/>
           <a:p>
             <a:pPr algn="ctr"/>
-            <a:fld id="{3fac42c5-9437-4b88-9a3d-cc74bf6ebd9f}" type="slidenum">
+            <a:fld id="{f2d3b9b3-2822-44b7-a399-a0f3c1997c71}" type="slidenum">
               <a:rPr lang="en-GB" sz="1200" b="1" dirty="0">
                 <a:solidFill>
                   <a:srgbClr val="FFFFFF"/>
@@ -18266,7 +18266,7 @@
           <a:lstStyle/>
           <a:p>
             <a:pPr algn="l"/>
-            <a:fld id="{1b64cfe2-8505-4818-948b-50850dc318f5}" type="datetime3">
+            <a:fld id="{4b54cf07-d71f-4a24-a03b-2f0ff9fad3f1}" type="datetime3">
               <a:rPr lang="en-GB" sz="1000" dirty="0">
                 <a:solidFill>
                   <a:srgbClr val="9AA3AE"/>
@@ -18300,7 +18300,7 @@
           <a:lstStyle/>
           <a:p>
             <a:pPr algn="ctr"/>
-            <a:fld id="{9b0cbcdf-35d3-4f4a-b2b7-f08869c66faa}" type="slidenum">
+            <a:fld id="{2efa6f34-bc09-4d7e-b20b-26e441f4285e}" type="slidenum">
               <a:rPr lang="en-GB" sz="1200" b="1" dirty="0">
                 <a:solidFill>
                   <a:srgbClr val="FFFFFF"/>
@@ -18731,7 +18731,7 @@
           <a:lstStyle/>
           <a:p>
             <a:pPr algn="l"/>
-            <a:fld id="{3afb6d49-9ce3-40f2-89f9-ac188f238c43}" type="datetime3">
+            <a:fld id="{f9b91bfa-44d3-41c6-9167-766f59736625}" type="datetime3">
               <a:rPr lang="en-GB" sz="1000" dirty="0">
                 <a:solidFill>
                   <a:srgbClr val="9AA3AE"/>
@@ -18765,7 +18765,7 @@
           <a:lstStyle/>
           <a:p>
             <a:pPr algn="ctr"/>
-            <a:fld id="{34f27d28-ab41-47a9-b327-015fdf112844}" type="slidenum">
+            <a:fld id="{c2ec321e-a8fa-4e7a-8151-787e8a0beb7f}" type="slidenum">
               <a:rPr lang="en-GB" sz="1200" b="1" dirty="0">
                 <a:solidFill>
                   <a:srgbClr val="FFFFFF"/>
@@ -19179,7 +19179,7 @@
           <a:lstStyle/>
           <a:p>
             <a:pPr algn="l"/>
-            <a:fld id="{50e05be2-8efb-42d9-a256-8c00ad199e14}" type="datetime3">
+            <a:fld id="{6fb1371d-b2b8-4877-a6cc-a7a7796aa15a}" type="datetime3">
               <a:rPr lang="en-GB" sz="1000" dirty="0">
                 <a:solidFill>
                   <a:srgbClr val="9AA3AE"/>
@@ -19213,7 +19213,7 @@
           <a:lstStyle/>
           <a:p>
             <a:pPr algn="ctr"/>
-            <a:fld id="{3c091813-8e18-4b6a-915c-e767aef831eb}" type="slidenum">
+            <a:fld id="{b702aaa2-489e-46cd-a1c0-88cd8b81bb6e}" type="slidenum">
               <a:rPr lang="en-GB" sz="1200" b="1" dirty="0">
                 <a:solidFill>
                   <a:srgbClr val="FFFFFF"/>
@@ -20040,7 +20040,7 @@
           <a:lstStyle/>
           <a:p>
             <a:pPr algn="l"/>
-            <a:fld id="{44c42270-9f08-4dfe-b1eb-21819604775d}" type="datetime3">
+            <a:fld id="{71fbee0f-f2c1-430d-bc69-7811a8b3ed8d}" type="datetime3">
               <a:rPr lang="en-GB" sz="1000" dirty="0">
                 <a:solidFill>
                   <a:srgbClr val="9AA3AE"/>
@@ -20074,7 +20074,7 @@
           <a:lstStyle/>
           <a:p>
             <a:pPr algn="ctr"/>
-            <a:fld id="{92580bb5-0d92-4382-a024-492ccd376510}" type="slidenum">
+            <a:fld id="{b65170d4-0886-49bb-8108-19a0887fc549}" type="slidenum">
               <a:rPr lang="en-GB" sz="1200" b="1" dirty="0">
                 <a:solidFill>
                   <a:srgbClr val="FFFFFF"/>
@@ -20367,7 +20367,7 @@
                 </a:solidFill>
                 <a:latin typeface="Calibri"/>
               </a:rPr>
-              <a:t>Main FET sections only. Motivation, architecture figures, O1–O4, and methodology detail remain in the deck under these headings; they are not listed as sub-sections here.</a:t>
+              <a:t>Main FET sections, then numbered References. Motivation, architecture figures, O1–O4, and methodology detail stay in the deck under these headings. Click 11 References for citations [1]–[24] with DOI links.</a:t>
             </a:r>
           </a:p>
         </p:txBody>
@@ -20573,6 +20573,24 @@
               <a:t>10   Conclusion</a:t>
             </a:r>
           </a:p>
+          <a:p>
+            <a:pPr>
+              <a:spcAft>
+                <a:spcPts val="600"/>
+              </a:spcAft>
+              <a:buFont typeface="Arial"/>
+              <a:buChar char="•"/>
+            </a:pPr>
+            <a:r>
+              <a:rPr sz="1400">
+                <a:solidFill>
+                  <a:srgbClr val="1A1A1A"/>
+                </a:solidFill>
+                <a:latin typeface="Calibri"/>
+              </a:rPr>
+              <a:t>11   References</a:t>
+            </a:r>
+          </a:p>
         </p:txBody>
       </p:sp>
       <p:sp>
@@ -20596,7 +20614,7 @@
           <a:lstStyle/>
           <a:p>
             <a:pPr algn="l"/>
-            <a:fld id="{c9b5bbf1-9ff5-4ecc-8eb0-1bbadfd40743}" type="datetime3">
+            <a:fld id="{7859b740-a759-4604-b3fb-96a0efd38d18}" type="datetime3">
               <a:rPr lang="en-GB" sz="1000" dirty="0">
                 <a:solidFill>
                   <a:srgbClr val="9AA3AE"/>
@@ -20630,7 +20648,7 @@
           <a:lstStyle/>
           <a:p>
             <a:pPr algn="ctr"/>
-            <a:fld id="{2de584aa-d926-4c4d-bb77-895d8e64bbd8}" type="slidenum">
+            <a:fld id="{cdf40f45-aa04-4ac8-98fb-3085c02a8d85}" type="slidenum">
               <a:rPr lang="en-GB" sz="1200" b="1" dirty="0">
                 <a:solidFill>
                   <a:srgbClr val="FFFFFF"/>
@@ -21529,7 +21547,7 @@
           <a:lstStyle/>
           <a:p>
             <a:pPr algn="l"/>
-            <a:fld id="{3ec8776c-7df9-4bab-b909-021eb0df5df4}" type="datetime3">
+            <a:fld id="{2591b51b-1791-48c5-bbd0-02bfd535df53}" type="datetime3">
               <a:rPr lang="en-GB" sz="1000" dirty="0">
                 <a:solidFill>
                   <a:srgbClr val="9AA3AE"/>
@@ -21563,7 +21581,7 @@
           <a:lstStyle/>
           <a:p>
             <a:pPr algn="ctr"/>
-            <a:fld id="{cffabc69-9f4f-4d20-99e0-8667a738cd75}" type="slidenum">
+            <a:fld id="{d1598ad5-973e-4db3-912a-1d5ac5bff2dd}" type="slidenum">
               <a:rPr lang="en-GB" sz="1200" b="1" dirty="0">
                 <a:solidFill>
                   <a:srgbClr val="FFFFFF"/>
@@ -22372,7 +22390,7 @@
           <a:lstStyle/>
           <a:p>
             <a:pPr algn="l"/>
-            <a:fld id="{d97a6af6-c169-401f-b9ab-4e314d680a80}" type="datetime3">
+            <a:fld id="{8ae7e35e-e16d-4576-94c0-e04b4d110eff}" type="datetime3">
               <a:rPr lang="en-GB" sz="1000" dirty="0">
                 <a:solidFill>
                   <a:srgbClr val="9AA3AE"/>
@@ -22406,7 +22424,7 @@
           <a:lstStyle/>
           <a:p>
             <a:pPr algn="ctr"/>
-            <a:fld id="{763bce3a-3db5-4258-ab62-c39887c16aea}" type="slidenum">
+            <a:fld id="{87861bc8-be9a-4c81-8a21-8bf6328ba936}" type="slidenum">
               <a:rPr lang="en-GB" sz="1200" b="1" dirty="0">
                 <a:solidFill>
                   <a:srgbClr val="FFFFFF"/>
@@ -23161,7 +23179,7 @@
           <a:lstStyle/>
           <a:p>
             <a:pPr algn="l"/>
-            <a:fld id="{7eb8c979-1550-403b-8a10-cb9e0e26f8eb}" type="datetime3">
+            <a:fld id="{13204ec2-ee1b-489e-896a-9b4cc96b7428}" type="datetime3">
               <a:rPr lang="en-GB" sz="1000" dirty="0">
                 <a:solidFill>
                   <a:srgbClr val="9AA3AE"/>
@@ -23195,7 +23213,7 @@
           <a:lstStyle/>
           <a:p>
             <a:pPr algn="ctr"/>
-            <a:fld id="{b46b826d-abcf-4272-a51c-646f5ecd8ca7}" type="slidenum">
+            <a:fld id="{b9d6b2ec-2735-401e-b886-4638b2472131}" type="slidenum">
               <a:rPr lang="en-GB" sz="1200" b="1" dirty="0">
                 <a:solidFill>
                   <a:srgbClr val="FFFFFF"/>
@@ -24004,7 +24022,7 @@
           <a:lstStyle/>
           <a:p>
             <a:pPr algn="l"/>
-            <a:fld id="{f0691323-10fc-4f5b-87eb-d5dae5551ed4}" type="datetime3">
+            <a:fld id="{a3bbff6e-1344-4b9c-9a77-f6a19aea3b29}" type="datetime3">
               <a:rPr lang="en-GB" sz="1000" dirty="0">
                 <a:solidFill>
                   <a:srgbClr val="9AA3AE"/>
@@ -24038,7 +24056,7 @@
           <a:lstStyle/>
           <a:p>
             <a:pPr algn="ctr"/>
-            <a:fld id="{addfa192-88ff-4118-9e9d-8f9c3b306b6c}" type="slidenum">
+            <a:fld id="{319f7a6c-9f71-4841-951f-dad096e313fb}" type="slidenum">
               <a:rPr lang="en-GB" sz="1200" b="1" dirty="0">
                 <a:solidFill>
                   <a:srgbClr val="FFFFFF"/>
@@ -24882,7 +24900,7 @@
           <a:lstStyle/>
           <a:p>
             <a:pPr algn="l"/>
-            <a:fld id="{43eef4b5-c581-459f-9e20-39875c2d394b}" type="datetime3">
+            <a:fld id="{8f20f1f2-bea4-4c65-a8a7-9be1dc71db9c}" type="datetime3">
               <a:rPr lang="en-GB" sz="1000" dirty="0">
                 <a:solidFill>
                   <a:srgbClr val="9AA3AE"/>
@@ -24916,7 +24934,7 @@
           <a:lstStyle/>
           <a:p>
             <a:pPr algn="ctr"/>
-            <a:fld id="{280a0534-87bf-4c54-b1fb-5c0087793c4d}" type="slidenum">
+            <a:fld id="{7e854e8e-ae93-425c-8af1-3ae78dde2f51}" type="slidenum">
               <a:rPr lang="en-GB" sz="1200" b="1" dirty="0">
                 <a:solidFill>
                   <a:srgbClr val="FFFFFF"/>
@@ -25602,7 +25620,7 @@
           <a:lstStyle/>
           <a:p>
             <a:pPr algn="l"/>
-            <a:fld id="{c68d867b-842b-47dd-9467-4fc2c735f78a}" type="datetime3">
+            <a:fld id="{24d44e44-41d5-4890-802c-1c0d5ee70455}" type="datetime3">
               <a:rPr lang="en-GB" sz="1000" dirty="0">
                 <a:solidFill>
                   <a:srgbClr val="9AA3AE"/>
@@ -25636,7 +25654,7 @@
           <a:lstStyle/>
           <a:p>
             <a:pPr algn="ctr"/>
-            <a:fld id="{10795d22-a825-4c38-91ee-2c2d51cfe6c4}" type="slidenum">
+            <a:fld id="{637a9b8e-9a95-48de-bf8b-293dd81a845e}" type="slidenum">
               <a:rPr lang="en-GB" sz="1200" b="1" dirty="0">
                 <a:solidFill>
                   <a:srgbClr val="FFFFFF"/>
@@ -26445,7 +26463,7 @@
           <a:lstStyle/>
           <a:p>
             <a:pPr algn="l"/>
-            <a:fld id="{dd8bed28-7843-4dec-a556-7ec4b3f1892a}" type="datetime3">
+            <a:fld id="{d0f58af1-fb50-44d3-91e3-1718154a66d5}" type="datetime3">
               <a:rPr lang="en-GB" sz="1000" dirty="0">
                 <a:solidFill>
                   <a:srgbClr val="9AA3AE"/>
@@ -26479,7 +26497,7 @@
           <a:lstStyle/>
           <a:p>
             <a:pPr algn="ctr"/>
-            <a:fld id="{c86ce468-cd05-4878-8151-f728b5bcd2bc}" type="slidenum">
+            <a:fld id="{9739bd2b-8084-4e55-8078-3180baba6750}" type="slidenum">
               <a:rPr lang="en-GB" sz="1200" b="1" dirty="0">
                 <a:solidFill>
                   <a:srgbClr val="FFFFFF"/>
@@ -26946,7 +26964,7 @@
           <a:lstStyle/>
           <a:p>
             <a:pPr algn="l"/>
-            <a:fld id="{58bbaa6c-ca9f-452d-8832-bc25a3ea8c58}" type="datetime3">
+            <a:fld id="{d7cd5aed-027e-49c0-9a8a-9607d70ff275}" type="datetime3">
               <a:rPr lang="en-GB" sz="1000" dirty="0">
                 <a:solidFill>
                   <a:srgbClr val="9AA3AE"/>
@@ -26980,7 +26998,7 @@
           <a:lstStyle/>
           <a:p>
             <a:pPr algn="ctr"/>
-            <a:fld id="{3862bf4c-9395-443e-b1d7-06bcbe257b48}" type="slidenum">
+            <a:fld id="{86400a96-0f23-4c67-96f1-052ea3d591d9}" type="slidenum">
               <a:rPr lang="en-GB" sz="1200" b="1" dirty="0">
                 <a:solidFill>
                   <a:srgbClr val="FFFFFF"/>
@@ -27447,7 +27465,7 @@
           <a:lstStyle/>
           <a:p>
             <a:pPr algn="l"/>
-            <a:fld id="{42127834-62e5-4053-b51f-1c64027f40f5}" type="datetime3">
+            <a:fld id="{71dc09de-9c00-4119-b05d-64b58418ff07}" type="datetime3">
               <a:rPr lang="en-GB" sz="1000" dirty="0">
                 <a:solidFill>
                   <a:srgbClr val="9AA3AE"/>
@@ -27481,7 +27499,7 @@
           <a:lstStyle/>
           <a:p>
             <a:pPr algn="ctr"/>
-            <a:fld id="{34b9de27-a998-464a-bc17-e7796d633a83}" type="slidenum">
+            <a:fld id="{900bef93-1106-4e85-9d71-610a5e86cf73}" type="slidenum">
               <a:rPr lang="en-GB" sz="1200" b="1" dirty="0">
                 <a:solidFill>
                   <a:srgbClr val="FFFFFF"/>
@@ -27913,7 +27931,7 @@
           <a:lstStyle/>
           <a:p>
             <a:pPr algn="l"/>
-            <a:fld id="{7e999e89-b92f-49fa-9b3c-a0d8688ec1ff}" type="datetime3">
+            <a:fld id="{5592e224-0cbd-4808-b3d2-d79578b5fc48}" type="datetime3">
               <a:rPr lang="en-GB" sz="1000" dirty="0">
                 <a:solidFill>
                   <a:srgbClr val="9AA3AE"/>
@@ -27947,7 +27965,7 @@
           <a:lstStyle/>
           <a:p>
             <a:pPr algn="ctr"/>
-            <a:fld id="{45d09752-a792-468f-903f-18155740c185}" type="slidenum">
+            <a:fld id="{05db1baf-ddcf-49aa-8373-4e106c833c21}" type="slidenum">
               <a:rPr lang="en-GB" sz="1200" b="1" dirty="0">
                 <a:solidFill>
                   <a:srgbClr val="FFFFFF"/>
@@ -28379,7 +28397,7 @@
           <a:lstStyle/>
           <a:p>
             <a:pPr algn="l"/>
-            <a:fld id="{da43f502-d964-4081-8b04-35951a6cf18c}" type="datetime3">
+            <a:fld id="{372d5901-2295-4bca-ade1-32613dde5d04}" type="datetime3">
               <a:rPr lang="en-GB" sz="1000" dirty="0">
                 <a:solidFill>
                   <a:srgbClr val="9AA3AE"/>
@@ -28413,7 +28431,7 @@
           <a:lstStyle/>
           <a:p>
             <a:pPr algn="ctr"/>
-            <a:fld id="{e6ab1be0-1611-4f34-b529-35b35f171ffb}" type="slidenum">
+            <a:fld id="{b99bc3cc-ee97-481e-914d-57fa2c1f680c}" type="slidenum">
               <a:rPr lang="en-GB" sz="1200" b="1" dirty="0">
                 <a:solidFill>
                   <a:srgbClr val="FFFFFF"/>
@@ -28628,7 +28646,7 @@
                 </a:solidFill>
                 <a:latin typeface="Calibri"/>
               </a:rPr>
-              <a:t>References (1/3) — multi-agent orchestration (journals and flagship proceedings)</a:t>
+              <a:t>References</a:t>
             </a:r>
           </a:p>
         </p:txBody>
@@ -28685,6 +28703,41 @@
         <p:spPr>
           <a:xfrm>
             <a:off x="365760" y="1051560"/>
+            <a:ext cx="11430000" cy="384048"/>
+          </a:xfrm>
+          <a:prstGeom prst="rect">
+            <a:avLst/>
+          </a:prstGeom>
+          <a:noFill/>
+        </p:spPr>
+        <p:txBody>
+          <a:bodyPr wrap="square">
+            <a:spAutoFit/>
+          </a:bodyPr>
+          <a:lstStyle/>
+          <a:p>
+            <a:pPr algn="l"/>
+            <a:r>
+              <a:rPr sz="1300" b="0">
+                <a:solidFill>
+                  <a:srgbClr val="5A5A5A"/>
+                </a:solidFill>
+                <a:latin typeface="Calibri"/>
+              </a:rPr>
+              <a:t>Numbered bibliography. Evidence 1–18 use the same numbers as citations [1]–[18]. A DOI is a link to https://doi.org/…. Papers without a Crossref DOI stay numbered and unlinked.</a:t>
+            </a:r>
+          </a:p>
+        </p:txBody>
+      </p:sp>
+      <p:sp>
+        <p:nvSpPr>
+          <p:cNvPr id="9" name="TextBox 8"/>
+          <p:cNvSpPr txBox="1"/>
+          <p:nvPr/>
+        </p:nvSpPr>
+        <p:spPr>
+          <a:xfrm>
+            <a:off x="365760" y="1572768"/>
             <a:ext cx="11430000" cy="4160520"/>
           </a:xfrm>
           <a:prstGeom prst="rect">
@@ -28712,7 +28765,7 @@
                 </a:solidFill>
                 <a:latin typeface="Calibri"/>
               </a:rPr>
-              <a:t>Wang, L., Ma, C., Feng, X., Zhang, Z., Yang, H., Zhang, J., Chen, Z., Tang, J., Chen, X., Lin, Y., Zhao, W. X., Wei, Z., and Wen, J. A survey on large language model based autonomous agents. Frontiers of Computer Science, 18, article 186345 (2024). doi:10.1007/s11704-024-40231-1.</a:t>
+              <a:t>[1] Wang, L., Ma, C., Feng, X., Zhang, Z., Yang, H., Zhang, J., Chen, Z., Tang, J., Chen, X., Lin, Y., Zhao, W. X., Wei, Z., and Wen, J. A survey on large language model based autonomous agents. Frontiers of Computer Science, 18, article 186345 (2024). doi:10.1007/s11704-024-40231-1.</a:t>
             </a:r>
           </a:p>
           <a:p>
@@ -28730,7 +28783,7 @@
                 </a:solidFill>
                 <a:latin typeface="Calibri"/>
               </a:rPr>
-              <a:t>He, J., Treude, C., and Lo, D. LLM-Based Multi-Agent Systems for Software Engineering: Literature Review, Vision, and the Road Ahead. ACM Transactions on Software Engineering and Methodology, 34(5), May 2025. doi:10.1145/3712003.</a:t>
+              <a:t>[2] He, J., Treude, C., and Lo, D. LLM-Based Multi-Agent Systems for Software Engineering: Literature Review, Vision, and the Road Ahead. ACM Transactions on Software Engineering and Methodology, 34(5), May 2025. doi:10.1145/3712003.</a:t>
             </a:r>
           </a:p>
           <a:p>
@@ -28748,7 +28801,7 @@
                 </a:solidFill>
                 <a:latin typeface="Calibri"/>
               </a:rPr>
-              <a:t>Guo, T., Chen, X., Wang, Y., Chang, R., Pei, S., Chawla, N. V., Wiest, O., and Zhang, X. Large Language Model based Multi-Agents: A Survey of Progress and Challenges. Proceedings of the Thirty-Third International Joint Conference on Artificial Intelligence (IJCAI-24), Survey Track, pages 8048–8057. doi:10.24963/ijcai.2024/890.</a:t>
+              <a:t>[3] Guo, T., Chen, X., Wang, Y., Chang, R., Pei, S., Chawla, N. V., Wiest, O., and Zhang, X. Large Language Model based Multi-Agents: A Survey of Progress and Challenges. Proceedings of the Thirty-Third International Joint Conference on Artificial Intelligence (IJCAI-24), Survey Track, pages 8048–8057. doi:10.24963/ijcai.2024/890.</a:t>
             </a:r>
           </a:p>
           <a:p>
@@ -28766,7 +28819,7 @@
                 </a:solidFill>
                 <a:latin typeface="Calibri"/>
               </a:rPr>
-              <a:t>Chang, E. Y., and Geng, L. SagaLLM: Context Management, Validation, and Transaction Guarantees for Multi-Agent LLM Planning. Proceedings of the VLDB Endowment (PVLDB), 18(12):4874–4886, 2025. doi:10.14778/3750601.3750611.</a:t>
+              <a:t>[4] Chang, E. Y., and Geng, L. SagaLLM: Context Management, Validation, and Transaction Guarantees for Multi-Agent LLM Planning. Proceedings of the VLDB Endowment (PVLDB), 18(12):4874–4886, 2025. doi:10.14778/3750601.3750611.</a:t>
             </a:r>
           </a:p>
           <a:p>
@@ -28784,7 +28837,7 @@
                 </a:solidFill>
                 <a:latin typeface="Calibri"/>
               </a:rPr>
-              <a:t>Wu, Q., Bansal, G., Zhang, J., Wu, Y., Li, B., Zhu, E., Jiang, L., Zhang, X., Zhang, S., Liu, J., Awadallah, A. H., White, R. W., Burger, D., and Wang, C. AutoGen: Enabling Next-Gen LLM Applications via Multi-Agent Conversations. Proceedings of the First Conference on Language Modeling (COLM 2024).</a:t>
+              <a:t>[5] Wu, Q., Bansal, G., Zhang, J., Wu, Y., Li, B., Zhu, E., Jiang, L., Zhang, X., Zhang, S., Liu, J., Awadallah, A. H., White, R. W., Burger, D., and Wang, C. AutoGen: Enabling Next-Gen LLM Applications via Multi-Agent Conversations. Proceedings of the First Conference on Language Modeling (COLM 2024).</a:t>
             </a:r>
           </a:p>
           <a:p>
@@ -28802,7 +28855,7 @@
                 </a:solidFill>
                 <a:latin typeface="Calibri"/>
               </a:rPr>
-              <a:t>Hong, S., Zhuge, M., Chen, J., Zheng, X., Cheng, Y., Wang, J., Zhang, C., Wang, Z., Yau, S. K. S., Lin, Z., Zhou, L., Ran, C., Xiao, L., Wu, C., and Schmidhuber, J. MetaGPT: Meta Programming for A Multi-Agent Collaborative Framework. Proceedings of the Twelfth International Conference on Learning Representations (ICLR 2024).</a:t>
+              <a:t>[6] Hong, S., Zhuge, M., Chen, J., Zheng, X., Cheng, Y., Wang, J., Zhang, C., Wang, Z., Yau, S. K. S., Lin, Z., Zhou, L., Ran, C., Xiao, L., Wu, C., and Schmidhuber, J. MetaGPT: Meta Programming for A Multi-Agent Collaborative Framework. Proceedings of the Twelfth International Conference on Learning Representations (ICLR 2024).</a:t>
             </a:r>
           </a:p>
           <a:p>
@@ -28820,7 +28873,7 @@
                 </a:solidFill>
                 <a:latin typeface="Calibri"/>
               </a:rPr>
-              <a:t>Li, G., Hammoud, H. A. A. K., Itani, H., Khizbullin, D., and Ghanem, B. CAMEL: Communicative Agents for “Mind” Exploration of Large Language Model Society. Advances in Neural Information Processing Systems 36 (NeurIPS 2023).</a:t>
+              <a:t>[7] Qian, C., Liu, W., Liu, H., Chen, N., Dang, Y., Li, J., Yang, C., Chen, W., Su, Y., Cong, X., Xu, J., Li, D., Liu, Z., and Sun, M. ChatDev: Communicative Agents for Software Development. Proceedings of the 62nd Annual Meeting of the Association for Computational Linguistics (Volume 1: Long Papers), pages 15174–15186. doi:10.18653/v1/2024.acl-long.810.</a:t>
             </a:r>
           </a:p>
           <a:p>
@@ -28838,7 +28891,42 @@
                 </a:solidFill>
                 <a:latin typeface="Calibri"/>
               </a:rPr>
-              <a:t>Qian, C., Liu, W., Liu, H., Chen, N., Dang, Y., Li, J., Yang, C., Chen, W., Su, Y., Cong, X., Xu, J., Li, D., Liu, Z., and Sun, M. ChatDev: Communicative Agents for Software Development. Proceedings of the 62nd Annual Meeting of the Association for Computational Linguistics (Volume 1: Long Papers), pages 15174–15186. doi:10.18653/v1/2024.acl-long.810.</a:t>
+              <a:t>[8] Li, G., Hammoud, H. A. A. K., Itani, H., Khizbullin, D., and Ghanem, B. CAMEL: Communicative Agents for “Mind” Exploration of Large Language Model Society. Advances in Neural Information Processing Systems 36 (NeurIPS 2023).</a:t>
+            </a:r>
+          </a:p>
+        </p:txBody>
+      </p:sp>
+      <p:sp>
+        <p:nvSpPr>
+          <p:cNvPr id="10" name="TextBox 9"/>
+          <p:cNvSpPr txBox="1"/>
+          <p:nvPr/>
+        </p:nvSpPr>
+        <p:spPr>
+          <a:xfrm>
+            <a:off x="365760" y="6144768"/>
+            <a:ext cx="11430000" cy="256032"/>
+          </a:xfrm>
+          <a:prstGeom prst="rect">
+            <a:avLst/>
+          </a:prstGeom>
+          <a:noFill/>
+        </p:spPr>
+        <p:txBody>
+          <a:bodyPr wrap="square">
+            <a:spAutoFit/>
+          </a:bodyPr>
+          <a:lstStyle/>
+          <a:p>
+            <a:pPr algn="l"/>
+            <a:r>
+              <a:rPr sz="1000" b="0">
+                <a:solidFill>
+                  <a:srgbClr val="5A5A5A"/>
+                </a:solidFill>
+                <a:latin typeface="Calibri"/>
+              </a:rPr>
+              <a:t>Contents item 11. CrewAI is an engineering framework without a flagship peer-reviewed paper in this list.</a:t>
             </a:r>
           </a:p>
         </p:txBody>
@@ -28864,7 +28952,7 @@
           <a:lstStyle/>
           <a:p>
             <a:pPr algn="l"/>
-            <a:fld id="{213fdf83-91e9-4453-824d-e121d5225863}" type="datetime3">
+            <a:fld id="{9b413a79-2a85-47b7-85a4-1e5e0787af6d}" type="datetime3">
               <a:rPr lang="en-GB" sz="1000" dirty="0">
                 <a:solidFill>
                   <a:srgbClr val="9AA3AE"/>
@@ -28898,7 +28986,7 @@
           <a:lstStyle/>
           <a:p>
             <a:pPr algn="ctr"/>
-            <a:fld id="{9e195598-bad0-4b8c-b9e8-d0e570250b67}" type="slidenum">
+            <a:fld id="{7270f86b-1c08-4d4d-bc67-e6d47def8ca1}" type="slidenum">
               <a:rPr lang="en-GB" sz="1200" b="1" dirty="0">
                 <a:solidFill>
                   <a:srgbClr val="FFFFFF"/>
@@ -29113,7 +29201,7 @@
                 </a:solidFill>
                 <a:latin typeface="Calibri"/>
               </a:rPr>
-              <a:t>References (2/3) — tools, routing, compression, reasoning</a:t>
+              <a:t>References — [9]–[16]</a:t>
             </a:r>
           </a:p>
         </p:txBody>
@@ -29170,6 +29258,41 @@
         <p:spPr>
           <a:xfrm>
             <a:off x="365760" y="1051560"/>
+            <a:ext cx="11430000" cy="384048"/>
+          </a:xfrm>
+          <a:prstGeom prst="rect">
+            <a:avLst/>
+          </a:prstGeom>
+          <a:noFill/>
+        </p:spPr>
+        <p:txBody>
+          <a:bodyPr wrap="square">
+            <a:spAutoFit/>
+          </a:bodyPr>
+          <a:lstStyle/>
+          <a:p>
+            <a:pPr algn="l"/>
+            <a:r>
+              <a:rPr sz="1300" b="0">
+                <a:solidFill>
+                  <a:srgbClr val="5A5A5A"/>
+                </a:solidFill>
+                <a:latin typeface="Calibri"/>
+              </a:rPr>
+              <a:t>Continuation. Citations [9]–[16]. Click a DOI to open the publisher record.</a:t>
+            </a:r>
+          </a:p>
+        </p:txBody>
+      </p:sp>
+      <p:sp>
+        <p:nvSpPr>
+          <p:cNvPr id="9" name="TextBox 8"/>
+          <p:cNvSpPr txBox="1"/>
+          <p:nvPr/>
+        </p:nvSpPr>
+        <p:spPr>
+          <a:xfrm>
+            <a:off x="365760" y="1572768"/>
             <a:ext cx="11430000" cy="4160520"/>
           </a:xfrm>
           <a:prstGeom prst="rect">
@@ -29197,7 +29320,7 @@
                 </a:solidFill>
                 <a:latin typeface="Calibri"/>
               </a:rPr>
-              <a:t>Qin, Y., Liang, S., Ye, Y., Zhu, K., Yan, L., Lu, Y., Lin, Y., Cong, X., Tang, X., Qian, B., Zhao, S., Hong, L., Tian, R., Xie, R., Zhou, J., Gerstein, M., Li, D., Liu, Z., and Sun, M. ToolLLM: Facilitating Large Language Models to Master 16000+ Real-world APIs. Proceedings of the Twelfth International Conference on Learning Representations (ICLR 2024).</a:t>
+              <a:t>[9] Qin, Y., Liang, S., Ye, Y., Zhu, K., Yan, L., Lu, Y., Lin, Y., Cong, X., Tang, X., Qian, B., Zhao, S., Hong, L., Tian, R., Xie, R., Zhou, J., Gerstein, M., Li, D., Liu, Z., and Sun, M. ToolLLM: Facilitating Large Language Models to Master 16000+ Real-world APIs. Proceedings of the Twelfth International Conference on Learning Representations (ICLR 2024).</a:t>
             </a:r>
           </a:p>
           <a:p>
@@ -29215,7 +29338,7 @@
                 </a:solidFill>
                 <a:latin typeface="Calibri"/>
               </a:rPr>
-              <a:t>Zheng, Y., Li, P., Liu, W., Liu, Y., Luan, J., and Wang, B. ToolRerank: Adaptive and Hierarchy-Aware Reranking for Tool Retrieval. Proceedings of the 2024 Joint International Conference on Computational Linguistics, Language Resources and Evaluation (LREC-COLING 2024), pages 16263–16273. ACL Anthology 2024.lrec-main.1413.</a:t>
+              <a:t>[10] Zheng, Y., Li, P., Liu, W., Liu, Y., Luan, J., and Wang, B. ToolRerank: Adaptive and Hierarchy-Aware Reranking for Tool Retrieval. Proceedings of the 2024 Joint International Conference on Computational Linguistics, Language Resources and Evaluation (LREC-COLING 2024), pages 16263–16273. ACL Anthology 2024.lrec-main.1413.</a:t>
             </a:r>
           </a:p>
           <a:p>
@@ -29233,7 +29356,7 @@
                 </a:solidFill>
                 <a:latin typeface="Calibri"/>
               </a:rPr>
-              <a:t>Ong, I., Almahairi, A., Wu, V., Chiang, W.-L., Wu, T., Gonzalez, J. E., Kadous, M. W., and Stoica, I. RouteLLM: Learning to Route LLMs from Preference Data. Proceedings of the Thirteenth International Conference on Learning Representations (ICLR 2025).</a:t>
+              <a:t>[11] Ong, I., Almahairi, A., Wu, V., Chiang, W.-L., Wu, T., Gonzalez, J. E., Kadous, M. W., and Stoica, I. RouteLLM: Learning to Route LLMs from Preference Data. Proceedings of the Thirteenth International Conference on Learning Representations (ICLR 2025).</a:t>
             </a:r>
           </a:p>
           <a:p>
@@ -29251,7 +29374,7 @@
                 </a:solidFill>
                 <a:latin typeface="Calibri"/>
               </a:rPr>
-              <a:t>Panda, P., Magazine, R., Devaguptapu, C., Takemori, S., and Sharma, V. Adaptive LLM Routing under Budget Constraints. Findings of the Association for Computational Linguistics: EMNLP 2025, pages 23934–23949. doi:10.18653/v1/2025.findings-emnlp.1301.</a:t>
+              <a:t>[12] Yue, Y., Zhang, G., Liu, B., Wan, G., Wang, K., Cheng, D., and Qi, Y. MasRouter: Learning to Route LLMs for Multi-Agent Systems. Proceedings of the 63rd Annual Meeting of the Association for Computational Linguistics (Volume 1: Long Papers), pages 15549–15572. doi:10.18653/v1/2025.acl-long.757.</a:t>
             </a:r>
           </a:p>
           <a:p>
@@ -29269,7 +29392,7 @@
                 </a:solidFill>
                 <a:latin typeface="Calibri"/>
               </a:rPr>
-              <a:t>Yue, Y., Zhang, G., Liu, B., Wan, G., Wang, K., Cheng, D., and Qi, Y. MasRouter: Learning to Route LLMs for Multi-Agent Systems. Proceedings of the 63rd Annual Meeting of the Association for Computational Linguistics (Volume 1: Long Papers), pages 15549–15572. doi:10.18653/v1/2025.acl-long.757.</a:t>
+              <a:t>[13] Panda, P., Magazine, R., Devaguptapu, C., Takemori, S., and Sharma, V. Adaptive LLM Routing under Budget Constraints. Findings of the Association for Computational Linguistics: EMNLP 2025, pages 23934–23949. doi:10.18653/v1/2025.findings-emnlp.1301. Method name: PILOT (Preference-prior Informed LinUCB).</a:t>
             </a:r>
           </a:p>
           <a:p>
@@ -29287,7 +29410,7 @@
                 </a:solidFill>
                 <a:latin typeface="Calibri"/>
               </a:rPr>
-              <a:t>Jiang, H., Wu, Q., Lin, C.-Y., Yang, Y., and Qiu, L. LLMLingua: Compressing Prompts for Accelerated Inference of Large Language Models. Proceedings of the 2023 Conference on Empirical Methods in Natural Language Processing, pages 13358–13376. doi:10.18653/v1/2023.emnlp-main.825.</a:t>
+              <a:t>[14] Jiang, H., Wu, Q., Lin, C.-Y., Yang, Y., and Qiu, L. LLMLingua: Compressing Prompts for Accelerated Inference of Large Language Models. Proceedings of the 2023 Conference on Empirical Methods in Natural Language Processing, pages 13358–13376. doi:10.18653/v1/2023.emnlp-main.825.</a:t>
             </a:r>
           </a:p>
           <a:p>
@@ -29305,7 +29428,7 @@
                 </a:solidFill>
                 <a:latin typeface="Calibri"/>
               </a:rPr>
-              <a:t>Wei, J., Wang, X., Schuurmans, D., Bosma, M., Ichter, B., Xia, F., Chi, E., Le, Q., and Zhou, D. Chain-of-Thought Prompting Elicits Reasoning in Large Language Models. Advances in Neural Information Processing Systems 35 (NeurIPS 2022).</a:t>
+              <a:t>[15] Park, J. S., O’Brien, J. C., Cai, C. J., Morris, M. R., Liang, P., and Bernstein, M. S. Generative Agents: Interactive Simulacra of Human Behavior. Proceedings of the 36th Annual ACM Symposium on User Interface Software and Technology (UIST 2023), Best Paper. doi:10.1145/3586183.3606763.</a:t>
             </a:r>
           </a:p>
           <a:p>
@@ -29323,7 +29446,7 @@
                 </a:solidFill>
                 <a:latin typeface="Calibri"/>
               </a:rPr>
-              <a:t>Yao, S., Zhao, J., Yu, D., Du, N., Shafran, I., Narasimhan, K., and Cao, Y. ReAct: Synergizing Reasoning and Acting in Language Models. Proceedings of the Eleventh International Conference on Learning Representations (ICLR 2023).</a:t>
+              <a:t>[16] Tero, A., Takagi, S., Saigusa, T., Ito, K., Bebber, D. P., Fricker, M. D., Yumiki, K., Kobayashi, R., and Nakagaki, T. Rules for Biologically Inspired Adaptive Network Design. Science 327(5964):439–442. doi:10.1126/science.1177894.</a:t>
             </a:r>
           </a:p>
         </p:txBody>
@@ -29349,7 +29472,7 @@
           <a:lstStyle/>
           <a:p>
             <a:pPr algn="l"/>
-            <a:fld id="{7e8a1db6-538c-4746-a8f0-3613d703205a}" type="datetime3">
+            <a:fld id="{abddabb5-5ce3-4739-8483-ab7aa8478cfc}" type="datetime3">
               <a:rPr lang="en-GB" sz="1000" dirty="0">
                 <a:solidFill>
                   <a:srgbClr val="9AA3AE"/>
@@ -29383,7 +29506,7 @@
           <a:lstStyle/>
           <a:p>
             <a:pPr algn="ctr"/>
-            <a:fld id="{a778664c-4e2f-4304-a1d1-1b41ca886a29}" type="slidenum">
+            <a:fld id="{0012a6c7-475a-4374-9193-5c92fd15ba7d}" type="slidenum">
               <a:rPr lang="en-GB" sz="1200" b="1" dirty="0">
                 <a:solidFill>
                   <a:srgbClr val="FFFFFF"/>
@@ -29598,7 +29721,7 @@
                 </a:solidFill>
                 <a:latin typeface="Calibri"/>
               </a:rPr>
-              <a:t>References (3/3) — memory, biology, Indian agricultural data</a:t>
+              <a:t>References — [17]–[24]</a:t>
             </a:r>
           </a:p>
         </p:txBody>
@@ -29655,6 +29778,41 @@
         <p:spPr>
           <a:xfrm>
             <a:off x="365760" y="1051560"/>
+            <a:ext cx="11430000" cy="384048"/>
+          </a:xfrm>
+          <a:prstGeom prst="rect">
+            <a:avLst/>
+          </a:prstGeom>
+          <a:noFill/>
+        </p:spPr>
+        <p:txBody>
+          <a:bodyPr wrap="square">
+            <a:spAutoFit/>
+          </a:bodyPr>
+          <a:lstStyle/>
+          <a:p>
+            <a:pPr algn="l"/>
+            <a:r>
+              <a:rPr sz="1300" b="0">
+                <a:solidFill>
+                  <a:srgbClr val="5A5A5A"/>
+                </a:solidFill>
+                <a:latin typeface="Calibri"/>
+              </a:rPr>
+              <a:t>Continuation. Citations [17]–[24]. Click a DOI to open the publisher record.</a:t>
+            </a:r>
+          </a:p>
+        </p:txBody>
+      </p:sp>
+      <p:sp>
+        <p:nvSpPr>
+          <p:cNvPr id="9" name="TextBox 8"/>
+          <p:cNvSpPr txBox="1"/>
+          <p:nvPr/>
+        </p:nvSpPr>
+        <p:spPr>
+          <a:xfrm>
+            <a:off x="365760" y="1572768"/>
             <a:ext cx="11430000" cy="4160520"/>
           </a:xfrm>
           <a:prstGeom prst="rect">
@@ -29682,7 +29840,7 @@
                 </a:solidFill>
                 <a:latin typeface="Calibri"/>
               </a:rPr>
-              <a:t>Yao, S., Yu, D., Zhao, J., Shafran, I., Griffiths, T. L., Cao, Y., and Narasimhan, K. Tree of Thoughts: Deliberate Problem Solving with Large Language Models. Advances in Neural Information Processing Systems 36 (NeurIPS 2023).</a:t>
+              <a:t>[17] Guo, H., Woodruff, A., and Yadav, A. Improving Lives of Indebted Farmers Using Deep Learning: Predicting Agricultural Produce Prices Using Convolutional Neural Networks (PECAD). Proceedings of the AAAI Conference on Artificial Intelligence, 34(08):13294–13299. doi:10.1609/aaai.v34i08.7039.</a:t>
             </a:r>
           </a:p>
           <a:p>
@@ -29700,7 +29858,7 @@
                 </a:solidFill>
                 <a:latin typeface="Calibri"/>
               </a:rPr>
-              <a:t>Park, J. S., O’Brien, J. C., Cai, C. J., Morris, M. R., Liang, P., and Bernstein, M. S. Generative Agents: Interactive Simulacra of Human Behavior. Proceedings of the 36th Annual ACM Symposium on User Interface Software and Technology (UIST 2023), Best Paper. doi:10.1145/3586183.3606763.</a:t>
+              <a:t>[18] Yao, S., Zhao, J., Yu, D., Du, N., Shafran, I., Narasimhan, K., and Cao, Y. ReAct: Synergizing Reasoning and Acting in Language Models. Proceedings of the Eleventh International Conference on Learning Representations (ICLR 2023).</a:t>
             </a:r>
           </a:p>
           <a:p>
@@ -29718,7 +29876,7 @@
                 </a:solidFill>
                 <a:latin typeface="Calibri"/>
               </a:rPr>
-              <a:t>Tero, A., Takagi, S., Saigusa, T., Ito, K., Bebber, D. P., Fricker, M. D., Yumiki, K., Kobayashi, R., and Nakagaki, T. Rules for Biologically Inspired Adaptive Network Design. Science 327(5964):439–442, 2010. doi:10.1126/science.1177894.</a:t>
+              <a:t>[19] Wei, J., Wang, X., Schuurmans, D., Bosma, M., Ichter, B., Xia, F., Chi, E., Le, Q., and Zhou, D. Chain-of-Thought Prompting Elicits Reasoning in Large Language Models. Advances in Neural Information Processing Systems 35 (NeurIPS 2022).</a:t>
             </a:r>
           </a:p>
           <a:p>
@@ -29736,7 +29894,7 @@
                 </a:solidFill>
                 <a:latin typeface="Calibri"/>
               </a:rPr>
-              <a:t>Shinn, N., Cassano, F., Gopinath, A., Narasimhan, K., and Yao, S. Reflexion: Language Agents with Verbal Reinforcement Learning. Advances in Neural Information Processing Systems 36 (NeurIPS 2023).</a:t>
+              <a:t>[20] Yao, S., Yu, D., Zhao, J., Shafran, I., Griffiths, T. L., Cao, Y., and Narasimhan, K. Tree of Thoughts: Deliberate Problem Solving with Large Language Models. Advances in Neural Information Processing Systems 36 (NeurIPS 2023).</a:t>
             </a:r>
           </a:p>
           <a:p>
@@ -29754,7 +29912,7 @@
                 </a:solidFill>
                 <a:latin typeface="Calibri"/>
               </a:rPr>
-              <a:t>Shen, Y., Song, K., Tan, X., Li, D., Lu, W., and Zhuang, Y. HuggingGPT: Solving AI Tasks with ChatGPT and its Friends in Hugging Face. Advances in Neural Information Processing Systems 36 (NeurIPS 2023).</a:t>
+              <a:t>[21] Shinn, N., Cassano, F., Gopinath, A., Narasimhan, K., and Yao, S. Reflexion: Language Agents with Verbal Reinforcement Learning. Advances in Neural Information Processing Systems 36 (NeurIPS 2023).</a:t>
             </a:r>
           </a:p>
           <a:p>
@@ -29772,7 +29930,7 @@
                 </a:solidFill>
                 <a:latin typeface="Calibri"/>
               </a:rPr>
-              <a:t>Schick, T., Dwivedi-Yu, J., Dessì, R., Raileanu, R., Lomeli, M., Hambro, E., Zettlemoyer, L., Cancedda, N., and Scialom, T. Toolformer: Language Models Can Teach Themselves to Use Tools. Advances in Neural Information Processing Systems 36 (NeurIPS 2023).</a:t>
+              <a:t>[22] Shen, Y., Song, K., Tan, X., Li, D., Lu, W., and Zhuang, Y. HuggingGPT: Solving AI Tasks with ChatGPT and its Friends in Hugging Face. Advances in Neural Information Processing Systems 36 (NeurIPS 2023).</a:t>
             </a:r>
           </a:p>
           <a:p>
@@ -29790,7 +29948,7 @@
                 </a:solidFill>
                 <a:latin typeface="Calibri"/>
               </a:rPr>
-              <a:t>Guo, H., Woodruff, A., and Yadav, A. Improving Lives of Indebted Farmers Using Deep Learning: Predicting Agricultural Produce Prices Using Convolutional Neural Networks (PECAD). Proceedings of the AAAI Conference on Artificial Intelligence, 34(08):13294–13299. doi:10.1609/aaai.v34i08.7039. AGMARKNET scrape for price prediction; cited here as Indian OGD precedent, not as a baseline this proposal claims to beat.</a:t>
+              <a:t>[23] Schick, T., Dwivedi-Yu, J., Dessì, R., Raileanu, R., Lomeli, M., Hambro, E., Zettlemoyer, L., Cancedda, N., and Scialom, T. Toolformer: Language Models Can Teach Themselves to Use Tools. Advances in Neural Information Processing Systems 36 (NeurIPS 2023).</a:t>
             </a:r>
           </a:p>
           <a:p>
@@ -29808,42 +29966,7 @@
                 </a:solidFill>
                 <a:latin typeface="Calibri"/>
               </a:rPr>
-              <a:t>Government of India. Open Government Data Platform India (data.gov.in); AGMARKNET resource 9ef84268-d588-465a-a308-a864a43d0070; Directorate of Economics and Statistics crop production; IMD rainfall series; Government Open Data License — India (GODL-India).</a:t>
-            </a:r>
-          </a:p>
-        </p:txBody>
-      </p:sp>
-      <p:sp>
-        <p:nvSpPr>
-          <p:cNvPr id="9" name="TextBox 8"/>
-          <p:cNvSpPr txBox="1"/>
-          <p:nvPr/>
-        </p:nvSpPr>
-        <p:spPr>
-          <a:xfrm>
-            <a:off x="365760" y="6144768"/>
-            <a:ext cx="11430000" cy="256032"/>
-          </a:xfrm>
-          <a:prstGeom prst="rect">
-            <a:avLst/>
-          </a:prstGeom>
-          <a:noFill/>
-        </p:spPr>
-        <p:txBody>
-          <a:bodyPr wrap="square">
-            <a:spAutoFit/>
-          </a:bodyPr>
-          <a:lstStyle/>
-          <a:p>
-            <a:pPr algn="l"/>
-            <a:r>
-              <a:rPr sz="1000" b="0">
-                <a:solidFill>
-                  <a:srgbClr val="5A5A5A"/>
-                </a:solidFill>
-                <a:latin typeface="Calibri"/>
-              </a:rPr>
-              <a:t>CrewAI is an engineering framework without a flagship peer-reviewed paper in this list; AutoGen and MetaGPT are the MAS citations.</a:t>
+              <a:t>[24] Government of India Open Government Data Platform India. data.gov.in; AGMARKNET resource 9ef84268-d588-465a-a308-a864a43d0070; Directorate of Economics and Statistics crop production; IMD rainfall series; Government Open Data License — India (GODL-India). Live execution corpus, not a journal article.</a:t>
             </a:r>
           </a:p>
         </p:txBody>
@@ -29869,7 +29992,7 @@
           <a:lstStyle/>
           <a:p>
             <a:pPr algn="l"/>
-            <a:fld id="{436f79fe-72ab-4076-817d-a358770bc661}" type="datetime3">
+            <a:fld id="{9457d634-7bd3-4fd1-a6ec-664f277c13cc}" type="datetime3">
               <a:rPr lang="en-GB" sz="1000" dirty="0">
                 <a:solidFill>
                   <a:srgbClr val="9AA3AE"/>
@@ -29903,7 +30026,7 @@
           <a:lstStyle/>
           <a:p>
             <a:pPr algn="ctr"/>
-            <a:fld id="{f2eb8670-49d6-40ee-9fea-f1fd65e0a18c}" type="slidenum">
+            <a:fld id="{2d489fd4-c02a-48dd-a675-ca253cbfc81b}" type="slidenum">
               <a:rPr lang="en-GB" sz="1200" b="1" dirty="0">
                 <a:solidFill>
                   <a:srgbClr val="FFFFFF"/>
@@ -30353,7 +30476,7 @@
           <a:lstStyle/>
           <a:p>
             <a:pPr algn="l"/>
-            <a:fld id="{634aae4a-53cc-485b-bb21-2b1de8a83c43}" type="datetime3">
+            <a:fld id="{864c5944-a5c2-41fd-9f33-23d6f093e7e0}" type="datetime3">
               <a:rPr lang="en-GB" sz="1000" dirty="0">
                 <a:solidFill>
                   <a:srgbClr val="9AA3AE"/>
@@ -30387,7 +30510,7 @@
           <a:lstStyle/>
           <a:p>
             <a:pPr algn="ctr"/>
-            <a:fld id="{38f2bb69-bd8f-403a-8f0e-8f1fa088ecb3}" type="slidenum">
+            <a:fld id="{3db4d9ae-f9fd-4599-92ff-4ef579b73fe0}" type="slidenum">
               <a:rPr lang="en-GB" sz="1200" b="1" dirty="0">
                 <a:solidFill>
                   <a:srgbClr val="FFFFFF"/>
@@ -30854,7 +30977,7 @@
           <a:lstStyle/>
           <a:p>
             <a:pPr algn="l"/>
-            <a:fld id="{27274a5d-ec3b-4cbb-a5ff-ef873ac0f039}" type="datetime3">
+            <a:fld id="{0278330f-ab27-41a4-9150-024c821febc5}" type="datetime3">
               <a:rPr lang="en-GB" sz="1000" dirty="0">
                 <a:solidFill>
                   <a:srgbClr val="9AA3AE"/>
@@ -30888,7 +31011,7 @@
           <a:lstStyle/>
           <a:p>
             <a:pPr algn="ctr"/>
-            <a:fld id="{b8371c9e-8313-40c1-8185-ca56d26f56a0}" type="slidenum">
+            <a:fld id="{baca6da4-8281-4431-a397-72420e0d3cf8}" type="slidenum">
               <a:rPr lang="en-GB" sz="1200" b="1" dirty="0">
                 <a:solidFill>
                   <a:srgbClr val="FFFFFF"/>
@@ -31181,7 +31304,7 @@
                 </a:solidFill>
                 <a:latin typeface="Calibri"/>
               </a:rPr>
-              <a:t>FET template. Each paper is one Evidence block: Author(s), Year, Title, Publication, Objective, Methodology, Findings, Limitations, To solve the research gap. Publication is the journal or the full international conference proceedings title — not a preprint report.</a:t>
+              <a:t>FET template. Each paper is Evidence n and citation [n]. Fields: Author(s), Year, Title, Publication, DOI (linked at https://doi.org/…), Objective, Methodology, Findings, Limitations, To solve the research gap.</a:t>
             </a:r>
           </a:p>
         </p:txBody>
@@ -31815,7 +31938,7 @@
           <a:lstStyle/>
           <a:p>
             <a:pPr algn="l"/>
-            <a:fld id="{f3ab26a6-3f37-4d58-8133-c822b45bab1d}" type="datetime3">
+            <a:fld id="{b554e629-8511-45ff-aea0-64e53412a523}" type="datetime3">
               <a:rPr lang="en-GB" sz="1000" dirty="0">
                 <a:solidFill>
                   <a:srgbClr val="9AA3AE"/>
@@ -31849,7 +31972,7 @@
           <a:lstStyle/>
           <a:p>
             <a:pPr algn="ctr"/>
-            <a:fld id="{7454e94f-fa10-48e4-8320-07632ecf9a71}" type="slidenum">
+            <a:fld id="{9c5a3f78-cb95-459f-9713-37d0fa256a89}" type="slidenum">
               <a:rPr lang="en-GB" sz="1200" b="1" dirty="0">
                 <a:solidFill>
                   <a:srgbClr val="FFFFFF"/>
@@ -32776,7 +32899,7 @@
           <a:lstStyle/>
           <a:p>
             <a:pPr algn="l"/>
-            <a:fld id="{20b66ea6-b922-4173-bb50-9bdf3c601f4d}" type="datetime3">
+            <a:fld id="{cb87eb55-61c4-4790-afba-be5251c9fa23}" type="datetime3">
               <a:rPr lang="en-GB" sz="1000" dirty="0">
                 <a:solidFill>
                   <a:srgbClr val="9AA3AE"/>
@@ -32810,7 +32933,7 @@
           <a:lstStyle/>
           <a:p>
             <a:pPr algn="ctr"/>
-            <a:fld id="{702f82c1-f4e2-415f-9f1f-c4bd7cd13a02}" type="slidenum">
+            <a:fld id="{7291de2e-0fc0-4cdb-9f29-52150cc16ff1}" type="slidenum">
               <a:rPr lang="en-GB" sz="1200" b="1" dirty="0">
                 <a:solidFill>
                   <a:srgbClr val="FFFFFF"/>
@@ -33737,7 +33860,7 @@
           <a:lstStyle/>
           <a:p>
             <a:pPr algn="l"/>
-            <a:fld id="{3a63f844-f669-42ec-a906-42d6f173762e}" type="datetime3">
+            <a:fld id="{324b3a64-7e38-4bd4-961a-fb05b16b0ba3}" type="datetime3">
               <a:rPr lang="en-GB" sz="1000" dirty="0">
                 <a:solidFill>
                   <a:srgbClr val="9AA3AE"/>
@@ -33771,7 +33894,7 @@
           <a:lstStyle/>
           <a:p>
             <a:pPr algn="ctr"/>
-            <a:fld id="{fbdc83b9-9779-4c62-b688-49aa9efd83aa}" type="slidenum">
+            <a:fld id="{03624ba8-4215-4f5c-a50e-9a5454bb7129}" type="slidenum">
               <a:rPr lang="en-GB" sz="1200" b="1" dirty="0">
                 <a:solidFill>
                   <a:srgbClr val="FFFFFF"/>
@@ -34698,7 +34821,7 @@
           <a:lstStyle/>
           <a:p>
             <a:pPr algn="l"/>
-            <a:fld id="{7284679d-3c1c-4f46-a899-eac1bed4c9ee}" type="datetime3">
+            <a:fld id="{b8d9af0e-6795-4d62-a15d-04cbfcf47c43}" type="datetime3">
               <a:rPr lang="en-GB" sz="1000" dirty="0">
                 <a:solidFill>
                   <a:srgbClr val="9AA3AE"/>
@@ -34732,7 +34855,7 @@
           <a:lstStyle/>
           <a:p>
             <a:pPr algn="ctr"/>
-            <a:fld id="{ffc3683d-054f-430c-bc4a-3a55c2db559e}" type="slidenum">
+            <a:fld id="{766d859c-fb2c-4347-8b19-cd3f26a2893d}" type="slidenum">
               <a:rPr lang="en-GB" sz="1200" b="1" dirty="0">
                 <a:solidFill>
                   <a:srgbClr val="FFFFFF"/>

--- a/laboratory/docs/slides/ACRS_PhD_Proposal_JenishaT_24ETRP720001.pptx
+++ b/laboratory/docs/slides/ACRS_PhD_Proposal_JenishaT_24ETRP720001.pptx
@@ -3835,7 +3835,7 @@
           <a:lstStyle/>
           <a:p>
             <a:pPr algn="l"/>
-            <a:fld id="{654358f5-caf0-4de5-b717-88ffe6f87151}" type="datetime3">
+            <a:fld id="{07588079-6005-431f-9a8e-7bc56823444c}" type="datetime3">
               <a:rPr lang="en-GB" sz="1000" dirty="0">
                 <a:solidFill>
                   <a:srgbClr val="9AA3AE"/>
@@ -3869,7 +3869,7 @@
           <a:lstStyle/>
           <a:p>
             <a:pPr algn="ctr"/>
-            <a:fld id="{842b063f-fb15-41c6-9987-3afaf94517f3}" type="slidenum">
+            <a:fld id="{71b53968-04a8-491b-9ba6-e6c9490c64f9}" type="slidenum">
               <a:rPr lang="en-GB" sz="1200" b="1" dirty="0">
                 <a:solidFill>
                   <a:srgbClr val="FFFFFF"/>
@@ -4796,7 +4796,7 @@
           <a:lstStyle/>
           <a:p>
             <a:pPr algn="l"/>
-            <a:fld id="{efce820b-539a-45fb-b9b8-dc9d778614c7}" type="datetime3">
+            <a:fld id="{cb776610-fbdf-411d-81ad-c6d7a7000877}" type="datetime3">
               <a:rPr lang="en-GB" sz="1000" dirty="0">
                 <a:solidFill>
                   <a:srgbClr val="9AA3AE"/>
@@ -4830,7 +4830,7 @@
           <a:lstStyle/>
           <a:p>
             <a:pPr algn="ctr"/>
-            <a:fld id="{c060fcbc-7b94-412d-8c6b-aef9ace5044a}" type="slidenum">
+            <a:fld id="{b0b9a404-fad0-46ee-ad80-535535bb4436}" type="slidenum">
               <a:rPr lang="en-GB" sz="1200" b="1" dirty="0">
                 <a:solidFill>
                   <a:srgbClr val="FFFFFF"/>
@@ -5757,7 +5757,7 @@
           <a:lstStyle/>
           <a:p>
             <a:pPr algn="l"/>
-            <a:fld id="{aab8fbd1-bfde-47c9-b638-7411440db527}" type="datetime3">
+            <a:fld id="{b287a157-636b-48e4-b3dd-3c49f41d0f0b}" type="datetime3">
               <a:rPr lang="en-GB" sz="1000" dirty="0">
                 <a:solidFill>
                   <a:srgbClr val="9AA3AE"/>
@@ -5791,7 +5791,7 @@
           <a:lstStyle/>
           <a:p>
             <a:pPr algn="ctr"/>
-            <a:fld id="{201a12ea-9761-4640-a88f-b80086493f30}" type="slidenum">
+            <a:fld id="{dd24d6f3-d6b1-4833-a456-613f9ae5fbab}" type="slidenum">
               <a:rPr lang="en-GB" sz="1200" b="1" dirty="0">
                 <a:solidFill>
                   <a:srgbClr val="FFFFFF"/>
@@ -6718,7 +6718,7 @@
           <a:lstStyle/>
           <a:p>
             <a:pPr algn="l"/>
-            <a:fld id="{6805c05c-8356-4e91-9f93-b1add282f55c}" type="datetime3">
+            <a:fld id="{1534663f-2ce1-4d54-a623-35304ffce95c}" type="datetime3">
               <a:rPr lang="en-GB" sz="1000" dirty="0">
                 <a:solidFill>
                   <a:srgbClr val="9AA3AE"/>
@@ -6752,7 +6752,7 @@
           <a:lstStyle/>
           <a:p>
             <a:pPr algn="ctr"/>
-            <a:fld id="{7c4f265e-a1c6-4e70-93cb-35b900c3a795}" type="slidenum">
+            <a:fld id="{8484abdc-73c5-47a9-89a1-125ba21baeab}" type="slidenum">
               <a:rPr lang="en-GB" sz="1200" b="1" dirty="0">
                 <a:solidFill>
                   <a:srgbClr val="FFFFFF"/>
@@ -7679,7 +7679,7 @@
           <a:lstStyle/>
           <a:p>
             <a:pPr algn="l"/>
-            <a:fld id="{858c5eee-216e-4933-95b9-425d93cb2369}" type="datetime3">
+            <a:fld id="{3efe2991-bdf5-41ce-8fcb-7b2148c0b19a}" type="datetime3">
               <a:rPr lang="en-GB" sz="1000" dirty="0">
                 <a:solidFill>
                   <a:srgbClr val="9AA3AE"/>
@@ -7713,7 +7713,7 @@
           <a:lstStyle/>
           <a:p>
             <a:pPr algn="ctr"/>
-            <a:fld id="{67870495-24d6-4fd3-a022-dc5624eb1d95}" type="slidenum">
+            <a:fld id="{61828160-4e0e-4319-a6cc-d8e603284f49}" type="slidenum">
               <a:rPr lang="en-GB" sz="1200" b="1" dirty="0">
                 <a:solidFill>
                   <a:srgbClr val="FFFFFF"/>
@@ -8640,7 +8640,7 @@
           <a:lstStyle/>
           <a:p>
             <a:pPr algn="l"/>
-            <a:fld id="{092f85d5-a198-4b9e-b88d-fe748299f529}" type="datetime3">
+            <a:fld id="{0fb3341b-9e9a-469e-b53c-b5d3122aa9eb}" type="datetime3">
               <a:rPr lang="en-GB" sz="1000" dirty="0">
                 <a:solidFill>
                   <a:srgbClr val="9AA3AE"/>
@@ -8674,7 +8674,7 @@
           <a:lstStyle/>
           <a:p>
             <a:pPr algn="ctr"/>
-            <a:fld id="{5d0c0902-0676-48ed-87be-7af188518854}" type="slidenum">
+            <a:fld id="{ea3da54a-6545-4334-a77b-7a18debbb0f3}" type="slidenum">
               <a:rPr lang="en-GB" sz="1200" b="1" dirty="0">
                 <a:solidFill>
                   <a:srgbClr val="FFFFFF"/>
@@ -9496,7 +9496,7 @@
           <a:lstStyle/>
           <a:p>
             <a:pPr algn="l"/>
-            <a:fld id="{9c57c411-0883-4a3e-8186-427fbb0e5e11}" type="datetime3">
+            <a:fld id="{0d272d85-8c52-4056-b1e1-c32e660eb148}" type="datetime3">
               <a:rPr lang="en-GB" sz="1000" dirty="0">
                 <a:solidFill>
                   <a:srgbClr val="9AA3AE"/>
@@ -9530,7 +9530,7 @@
           <a:lstStyle/>
           <a:p>
             <a:pPr algn="ctr"/>
-            <a:fld id="{45475850-6966-4d0f-ad09-acf9ef68d1b4}" type="slidenum">
+            <a:fld id="{d0ce5681-8032-4478-8c78-b62c65e8a1e5}" type="slidenum">
               <a:rPr lang="en-GB" sz="1200" b="1" dirty="0">
                 <a:solidFill>
                   <a:srgbClr val="FFFFFF"/>
@@ -10284,7 +10284,7 @@
           <a:lstStyle/>
           <a:p>
             <a:pPr algn="l"/>
-            <a:fld id="{97385b77-8060-439c-b2ab-a421c9ea7f2a}" type="datetime3">
+            <a:fld id="{9d98fea4-30d0-4e01-aeac-7bd02a49b0f5}" type="datetime3">
               <a:rPr lang="en-GB" sz="1000" dirty="0">
                 <a:solidFill>
                   <a:srgbClr val="9AA3AE"/>
@@ -10318,7 +10318,7 @@
           <a:lstStyle/>
           <a:p>
             <a:pPr algn="ctr"/>
-            <a:fld id="{528a2512-f73e-45d2-9697-f314c3662cd7}" type="slidenum">
+            <a:fld id="{cd1a8987-f4ee-476b-b83d-c73086e10c11}" type="slidenum">
               <a:rPr lang="en-GB" sz="1200" b="1" dirty="0">
                 <a:solidFill>
                   <a:srgbClr val="FFFFFF"/>
@@ -11018,7 +11018,7 @@
           <a:lstStyle/>
           <a:p>
             <a:pPr algn="l"/>
-            <a:fld id="{15551e35-2fb6-444e-8fc7-a95714db58a4}" type="datetime3">
+            <a:fld id="{e84c95f5-5efd-4344-9f4f-b39560730c0a}" type="datetime3">
               <a:rPr lang="en-GB" sz="1000" dirty="0">
                 <a:solidFill>
                   <a:srgbClr val="9AA3AE"/>
@@ -11052,7 +11052,7 @@
           <a:lstStyle/>
           <a:p>
             <a:pPr algn="ctr"/>
-            <a:fld id="{8be17b33-8142-46e8-987a-38cec05b34d2}" type="slidenum">
+            <a:fld id="{5f1a5216-65ce-41ba-8118-9d2cfcd57f7c}" type="slidenum">
               <a:rPr lang="en-GB" sz="1200" b="1" dirty="0">
                 <a:solidFill>
                   <a:srgbClr val="FFFFFF"/>
@@ -11860,7 +11860,7 @@
           <a:lstStyle/>
           <a:p>
             <a:pPr algn="l"/>
-            <a:fld id="{b9d4b552-97ea-4070-88c0-f31d3be54d5d}" type="datetime3">
+            <a:fld id="{98e77da0-3400-4ceb-9cd1-3db617ef891f}" type="datetime3">
               <a:rPr lang="en-GB" sz="1000" dirty="0">
                 <a:solidFill>
                   <a:srgbClr val="9AA3AE"/>
@@ -11894,7 +11894,7 @@
           <a:lstStyle/>
           <a:p>
             <a:pPr algn="ctr"/>
-            <a:fld id="{c2f18ce8-5aa8-4221-ab1b-12cc89bf0f73}" type="slidenum">
+            <a:fld id="{90de5231-e94b-438e-87c5-860d2f3dfd54}" type="slidenum">
               <a:rPr lang="en-GB" sz="1200" b="1" dirty="0">
                 <a:solidFill>
                   <a:srgbClr val="FFFFFF"/>
@@ -12361,7 +12361,7 @@
           <a:lstStyle/>
           <a:p>
             <a:pPr algn="l"/>
-            <a:fld id="{c7a068e7-d6d0-4e60-b057-a929e422c05a}" type="datetime3">
+            <a:fld id="{9cf2c17f-23c3-42d5-974a-3750f3fb4f06}" type="datetime3">
               <a:rPr lang="en-GB" sz="1000" dirty="0">
                 <a:solidFill>
                   <a:srgbClr val="9AA3AE"/>
@@ -12395,7 +12395,7 @@
           <a:lstStyle/>
           <a:p>
             <a:pPr algn="ctr"/>
-            <a:fld id="{fc964bca-1c64-4292-af05-f907f1da1a16}" type="slidenum">
+            <a:fld id="{13da4252-b809-4643-9d20-a23607b007a2}" type="slidenum">
               <a:rPr lang="en-GB" sz="1200" b="1" dirty="0">
                 <a:solidFill>
                   <a:srgbClr val="FFFFFF"/>
@@ -13247,7 +13247,7 @@
           <a:lstStyle/>
           <a:p>
             <a:pPr algn="l"/>
-            <a:fld id="{5cebbbd2-6c67-4d00-afb9-6e9b8d063cad}" type="datetime3">
+            <a:fld id="{8766e330-e353-4e26-853b-018818ecef36}" type="datetime3">
               <a:rPr lang="en-GB" sz="1000" dirty="0">
                 <a:solidFill>
                   <a:srgbClr val="9AA3AE"/>
@@ -13281,7 +13281,7 @@
           <a:lstStyle/>
           <a:p>
             <a:pPr algn="ctr"/>
-            <a:fld id="{bd686c24-efd6-456a-80d8-c83d630cbac8}" type="slidenum">
+            <a:fld id="{0335c207-5f82-498f-aa02-f6d6143f8a2c}" type="slidenum">
               <a:rPr lang="en-GB" sz="1200" b="1" dirty="0">
                 <a:solidFill>
                   <a:srgbClr val="FFFFFF"/>
@@ -13713,7 +13713,7 @@
           <a:lstStyle/>
           <a:p>
             <a:pPr algn="l"/>
-            <a:fld id="{18166bff-3499-4efc-b65c-d6787322171d}" type="datetime3">
+            <a:fld id="{16d23620-841a-4473-a3a0-9feef0ba1bb5}" type="datetime3">
               <a:rPr lang="en-GB" sz="1000" dirty="0">
                 <a:solidFill>
                   <a:srgbClr val="9AA3AE"/>
@@ -13747,7 +13747,7 @@
           <a:lstStyle/>
           <a:p>
             <a:pPr algn="ctr"/>
-            <a:fld id="{bd00e1bf-8e84-4fcd-a05d-f797eeb1fccb}" type="slidenum">
+            <a:fld id="{0155adc7-7d40-49a8-a304-f5e7d9bf3293}" type="slidenum">
               <a:rPr lang="en-GB" sz="1200" b="1" dirty="0">
                 <a:solidFill>
                   <a:srgbClr val="FFFFFF"/>
@@ -14196,7 +14196,7 @@
           <a:lstStyle/>
           <a:p>
             <a:pPr algn="l"/>
-            <a:fld id="{ea69f39e-f29b-4c3f-8cbc-62e9e82b7399}" type="datetime3">
+            <a:fld id="{bfaa34a8-e3df-4446-be77-5ecacb880c6d}" type="datetime3">
               <a:rPr lang="en-GB" sz="1000" dirty="0">
                 <a:solidFill>
                   <a:srgbClr val="9AA3AE"/>
@@ -14230,7 +14230,7 @@
           <a:lstStyle/>
           <a:p>
             <a:pPr algn="ctr"/>
-            <a:fld id="{7dacb714-e7f8-427b-a399-e7080fe911c3}" type="slidenum">
+            <a:fld id="{593e3ae1-a46c-4ee7-82f6-ab9d4fc227db}" type="slidenum">
               <a:rPr lang="en-GB" sz="1200" b="1" dirty="0">
                 <a:solidFill>
                   <a:srgbClr val="FFFFFF"/>
@@ -14916,7 +14916,7 @@
           <a:lstStyle/>
           <a:p>
             <a:pPr algn="l"/>
-            <a:fld id="{eec7e33d-013b-49c6-94b4-338431b5f90b}" type="datetime3">
+            <a:fld id="{9fca7fe8-0255-4d81-8a93-f61a2fefefaf}" type="datetime3">
               <a:rPr lang="en-GB" sz="1000" dirty="0">
                 <a:solidFill>
                   <a:srgbClr val="9AA3AE"/>
@@ -14950,7 +14950,7 @@
           <a:lstStyle/>
           <a:p>
             <a:pPr algn="ctr"/>
-            <a:fld id="{a4243361-14c3-4ae7-8b84-8558713ea92c}" type="slidenum">
+            <a:fld id="{bb1bef7e-1d0d-4f29-80b4-9568d86428e4}" type="slidenum">
               <a:rPr lang="en-GB" sz="1200" b="1" dirty="0">
                 <a:solidFill>
                   <a:srgbClr val="FFFFFF"/>
@@ -15848,7 +15848,7 @@
           <a:lstStyle/>
           <a:p>
             <a:pPr algn="l"/>
-            <a:fld id="{2e3a5bb4-04d9-4ad6-ad5b-6ddef876a285}" type="datetime3">
+            <a:fld id="{e801af3f-c227-4878-b50a-f31aca5ef894}" type="datetime3">
               <a:rPr lang="en-GB" sz="1000" dirty="0">
                 <a:solidFill>
                   <a:srgbClr val="9AA3AE"/>
@@ -15882,7 +15882,7 @@
           <a:lstStyle/>
           <a:p>
             <a:pPr algn="ctr"/>
-            <a:fld id="{73be9799-60e9-41f7-9fbc-676c491ba1ad}" type="slidenum">
+            <a:fld id="{58b1bd8b-ca01-477d-a681-7220abac13eb}" type="slidenum">
               <a:rPr lang="en-GB" sz="1200" b="1" dirty="0">
                 <a:solidFill>
                   <a:srgbClr val="FFFFFF"/>
@@ -16672,7 +16672,7 @@
           <a:lstStyle/>
           <a:p>
             <a:pPr algn="l"/>
-            <a:fld id="{a1ccffb8-84f5-4789-a02b-fe1e8f203126}" type="datetime3">
+            <a:fld id="{5e8cd0cd-7d9d-41a2-b580-22979de29a24}" type="datetime3">
               <a:rPr lang="en-GB" sz="1000" dirty="0">
                 <a:solidFill>
                   <a:srgbClr val="9AA3AE"/>
@@ -16706,7 +16706,7 @@
           <a:lstStyle/>
           <a:p>
             <a:pPr algn="ctr"/>
-            <a:fld id="{37b7d82a-5b9a-431c-bf7d-48e2dfd428fe}" type="slidenum">
+            <a:fld id="{4f8e3a51-3597-41c0-b3f7-ed91b6ce2c3b}" type="slidenum">
               <a:rPr lang="en-GB" sz="1200" b="1" dirty="0">
                 <a:solidFill>
                   <a:srgbClr val="FFFFFF"/>
@@ -17442,7 +17442,7 @@
           <a:lstStyle/>
           <a:p>
             <a:pPr algn="l"/>
-            <a:fld id="{ef65ddd9-b05a-4ea9-a9c0-493c5a39d286}" type="datetime3">
+            <a:fld id="{1a07693e-ce26-4df2-8a8d-d0567a7cc1d7}" type="datetime3">
               <a:rPr lang="en-GB" sz="1000" dirty="0">
                 <a:solidFill>
                   <a:srgbClr val="9AA3AE"/>
@@ -17476,7 +17476,7 @@
           <a:lstStyle/>
           <a:p>
             <a:pPr algn="ctr"/>
-            <a:fld id="{f2d3b9b3-2822-44b7-a399-a0f3c1997c71}" type="slidenum">
+            <a:fld id="{4826273f-a500-495f-b936-641d5eee5af1}" type="slidenum">
               <a:rPr lang="en-GB" sz="1200" b="1" dirty="0">
                 <a:solidFill>
                   <a:srgbClr val="FFFFFF"/>
@@ -18266,7 +18266,7 @@
           <a:lstStyle/>
           <a:p>
             <a:pPr algn="l"/>
-            <a:fld id="{4b54cf07-d71f-4a24-a03b-2f0ff9fad3f1}" type="datetime3">
+            <a:fld id="{cdadd40a-8022-4fb3-879d-d8a5333eb722}" type="datetime3">
               <a:rPr lang="en-GB" sz="1000" dirty="0">
                 <a:solidFill>
                   <a:srgbClr val="9AA3AE"/>
@@ -18300,7 +18300,7 @@
           <a:lstStyle/>
           <a:p>
             <a:pPr algn="ctr"/>
-            <a:fld id="{2efa6f34-bc09-4d7e-b20b-26e441f4285e}" type="slidenum">
+            <a:fld id="{71434a09-bfb1-4cfd-9ca3-7c079a671fb2}" type="slidenum">
               <a:rPr lang="en-GB" sz="1200" b="1" dirty="0">
                 <a:solidFill>
                   <a:srgbClr val="FFFFFF"/>
@@ -18731,7 +18731,7 @@
           <a:lstStyle/>
           <a:p>
             <a:pPr algn="l"/>
-            <a:fld id="{f9b91bfa-44d3-41c6-9167-766f59736625}" type="datetime3">
+            <a:fld id="{c191220e-17eb-461a-8762-33d7daf9abcc}" type="datetime3">
               <a:rPr lang="en-GB" sz="1000" dirty="0">
                 <a:solidFill>
                   <a:srgbClr val="9AA3AE"/>
@@ -18765,7 +18765,7 @@
           <a:lstStyle/>
           <a:p>
             <a:pPr algn="ctr"/>
-            <a:fld id="{c2ec321e-a8fa-4e7a-8151-787e8a0beb7f}" type="slidenum">
+            <a:fld id="{4bef6d6c-684a-4dc4-9654-1addefee2656}" type="slidenum">
               <a:rPr lang="en-GB" sz="1200" b="1" dirty="0">
                 <a:solidFill>
                   <a:srgbClr val="FFFFFF"/>
@@ -19179,7 +19179,7 @@
           <a:lstStyle/>
           <a:p>
             <a:pPr algn="l"/>
-            <a:fld id="{6fb1371d-b2b8-4877-a6cc-a7a7796aa15a}" type="datetime3">
+            <a:fld id="{4cbe7169-0ea1-409d-9be7-7718533c3e82}" type="datetime3">
               <a:rPr lang="en-GB" sz="1000" dirty="0">
                 <a:solidFill>
                   <a:srgbClr val="9AA3AE"/>
@@ -19213,7 +19213,7 @@
           <a:lstStyle/>
           <a:p>
             <a:pPr algn="ctr"/>
-            <a:fld id="{b702aaa2-489e-46cd-a1c0-88cd8b81bb6e}" type="slidenum">
+            <a:fld id="{8de02106-df85-4b99-be3b-600d936f6873}" type="slidenum">
               <a:rPr lang="en-GB" sz="1200" b="1" dirty="0">
                 <a:solidFill>
                   <a:srgbClr val="FFFFFF"/>
@@ -20040,7 +20040,7 @@
           <a:lstStyle/>
           <a:p>
             <a:pPr algn="l"/>
-            <a:fld id="{71fbee0f-f2c1-430d-bc69-7811a8b3ed8d}" type="datetime3">
+            <a:fld id="{c4e4a54f-0306-456b-aed8-9afe2ffbab2e}" type="datetime3">
               <a:rPr lang="en-GB" sz="1000" dirty="0">
                 <a:solidFill>
                   <a:srgbClr val="9AA3AE"/>
@@ -20074,7 +20074,7 @@
           <a:lstStyle/>
           <a:p>
             <a:pPr algn="ctr"/>
-            <a:fld id="{b65170d4-0886-49bb-8108-19a0887fc549}" type="slidenum">
+            <a:fld id="{f50b8ce9-ca58-47ad-bb5b-68fc19d504b0}" type="slidenum">
               <a:rPr lang="en-GB" sz="1200" b="1" dirty="0">
                 <a:solidFill>
                   <a:srgbClr val="FFFFFF"/>
@@ -20367,7 +20367,7 @@
                 </a:solidFill>
                 <a:latin typeface="Calibri"/>
               </a:rPr>
-              <a:t>Main FET sections, then numbered References. Motivation, architecture figures, O1–O4, and methodology detail stay in the deck under these headings. Click 11 References for citations [1]–[24] with DOI links.</a:t>
+              <a:t>Main FET sections, then numbered References. Motivation, architecture figures, O1–O4, and methodology detail stay in the deck under these headings. Click 11 References for citations [1]–[24]; every citation has a URL.</a:t>
             </a:r>
           </a:p>
         </p:txBody>
@@ -20614,7 +20614,7 @@
           <a:lstStyle/>
           <a:p>
             <a:pPr algn="l"/>
-            <a:fld id="{7859b740-a759-4604-b3fb-96a0efd38d18}" type="datetime3">
+            <a:fld id="{2027db0c-c796-4201-adb3-20c6b2c05103}" type="datetime3">
               <a:rPr lang="en-GB" sz="1000" dirty="0">
                 <a:solidFill>
                   <a:srgbClr val="9AA3AE"/>
@@ -20648,7 +20648,7 @@
           <a:lstStyle/>
           <a:p>
             <a:pPr algn="ctr"/>
-            <a:fld id="{cdf40f45-aa04-4ac8-98fb-3085c02a8d85}" type="slidenum">
+            <a:fld id="{48a26ec3-94b5-4a70-a591-d3416811151a}" type="slidenum">
               <a:rPr lang="en-GB" sz="1200" b="1" dirty="0">
                 <a:solidFill>
                   <a:srgbClr val="FFFFFF"/>
@@ -21547,7 +21547,7 @@
           <a:lstStyle/>
           <a:p>
             <a:pPr algn="l"/>
-            <a:fld id="{2591b51b-1791-48c5-bbd0-02bfd535df53}" type="datetime3">
+            <a:fld id="{aca69bde-ce50-485f-a29b-903133f88fa4}" type="datetime3">
               <a:rPr lang="en-GB" sz="1000" dirty="0">
                 <a:solidFill>
                   <a:srgbClr val="9AA3AE"/>
@@ -21581,7 +21581,7 @@
           <a:lstStyle/>
           <a:p>
             <a:pPr algn="ctr"/>
-            <a:fld id="{d1598ad5-973e-4db3-912a-1d5ac5bff2dd}" type="slidenum">
+            <a:fld id="{e7a2162a-01d3-4401-b6c1-776d0408048c}" type="slidenum">
               <a:rPr lang="en-GB" sz="1200" b="1" dirty="0">
                 <a:solidFill>
                   <a:srgbClr val="FFFFFF"/>
@@ -22390,7 +22390,7 @@
           <a:lstStyle/>
           <a:p>
             <a:pPr algn="l"/>
-            <a:fld id="{8ae7e35e-e16d-4576-94c0-e04b4d110eff}" type="datetime3">
+            <a:fld id="{2db848ab-4f94-42cf-a3a2-f80a716d9c52}" type="datetime3">
               <a:rPr lang="en-GB" sz="1000" dirty="0">
                 <a:solidFill>
                   <a:srgbClr val="9AA3AE"/>
@@ -22424,7 +22424,7 @@
           <a:lstStyle/>
           <a:p>
             <a:pPr algn="ctr"/>
-            <a:fld id="{87861bc8-be9a-4c81-8a21-8bf6328ba936}" type="slidenum">
+            <a:fld id="{da4d8667-792f-4e0c-8032-bf81ef0c92f2}" type="slidenum">
               <a:rPr lang="en-GB" sz="1200" b="1" dirty="0">
                 <a:solidFill>
                   <a:srgbClr val="FFFFFF"/>
@@ -23179,7 +23179,7 @@
           <a:lstStyle/>
           <a:p>
             <a:pPr algn="l"/>
-            <a:fld id="{13204ec2-ee1b-489e-896a-9b4cc96b7428}" type="datetime3">
+            <a:fld id="{6b271643-4f6b-43fe-8014-c43081cec9bd}" type="datetime3">
               <a:rPr lang="en-GB" sz="1000" dirty="0">
                 <a:solidFill>
                   <a:srgbClr val="9AA3AE"/>
@@ -23213,7 +23213,7 @@
           <a:lstStyle/>
           <a:p>
             <a:pPr algn="ctr"/>
-            <a:fld id="{b9d6b2ec-2735-401e-b886-4638b2472131}" type="slidenum">
+            <a:fld id="{5c489e7c-96fe-4492-8d82-9fd78cd66325}" type="slidenum">
               <a:rPr lang="en-GB" sz="1200" b="1" dirty="0">
                 <a:solidFill>
                   <a:srgbClr val="FFFFFF"/>
@@ -24022,7 +24022,7 @@
           <a:lstStyle/>
           <a:p>
             <a:pPr algn="l"/>
-            <a:fld id="{a3bbff6e-1344-4b9c-9a77-f6a19aea3b29}" type="datetime3">
+            <a:fld id="{24825611-7ca9-49d4-9f2a-b977d923099e}" type="datetime3">
               <a:rPr lang="en-GB" sz="1000" dirty="0">
                 <a:solidFill>
                   <a:srgbClr val="9AA3AE"/>
@@ -24056,7 +24056,7 @@
           <a:lstStyle/>
           <a:p>
             <a:pPr algn="ctr"/>
-            <a:fld id="{319f7a6c-9f71-4841-951f-dad096e313fb}" type="slidenum">
+            <a:fld id="{475a87fc-66af-4a3f-b2fd-5ebf7906b49b}" type="slidenum">
               <a:rPr lang="en-GB" sz="1200" b="1" dirty="0">
                 <a:solidFill>
                   <a:srgbClr val="FFFFFF"/>
@@ -24900,7 +24900,7 @@
           <a:lstStyle/>
           <a:p>
             <a:pPr algn="l"/>
-            <a:fld id="{8f20f1f2-bea4-4c65-a8a7-9be1dc71db9c}" type="datetime3">
+            <a:fld id="{d29f32b7-fbe1-4ca7-98a7-04850f318d9d}" type="datetime3">
               <a:rPr lang="en-GB" sz="1000" dirty="0">
                 <a:solidFill>
                   <a:srgbClr val="9AA3AE"/>
@@ -24934,7 +24934,7 @@
           <a:lstStyle/>
           <a:p>
             <a:pPr algn="ctr"/>
-            <a:fld id="{7e854e8e-ae93-425c-8af1-3ae78dde2f51}" type="slidenum">
+            <a:fld id="{07ff1d9d-f423-4578-895d-0d505ffc8dc8}" type="slidenum">
               <a:rPr lang="en-GB" sz="1200" b="1" dirty="0">
                 <a:solidFill>
                   <a:srgbClr val="FFFFFF"/>
@@ -25620,7 +25620,7 @@
           <a:lstStyle/>
           <a:p>
             <a:pPr algn="l"/>
-            <a:fld id="{24d44e44-41d5-4890-802c-1c0d5ee70455}" type="datetime3">
+            <a:fld id="{a4c6537f-42c4-4d3f-b0ee-944a974e28c0}" type="datetime3">
               <a:rPr lang="en-GB" sz="1000" dirty="0">
                 <a:solidFill>
                   <a:srgbClr val="9AA3AE"/>
@@ -25654,7 +25654,7 @@
           <a:lstStyle/>
           <a:p>
             <a:pPr algn="ctr"/>
-            <a:fld id="{637a9b8e-9a95-48de-bf8b-293dd81a845e}" type="slidenum">
+            <a:fld id="{be2d2cf7-1ac1-46b0-aa13-ee968d766421}" type="slidenum">
               <a:rPr lang="en-GB" sz="1200" b="1" dirty="0">
                 <a:solidFill>
                   <a:srgbClr val="FFFFFF"/>
@@ -26463,7 +26463,7 @@
           <a:lstStyle/>
           <a:p>
             <a:pPr algn="l"/>
-            <a:fld id="{d0f58af1-fb50-44d3-91e3-1718154a66d5}" type="datetime3">
+            <a:fld id="{4dd6eb1c-acb4-4050-91f2-820a63d30de0}" type="datetime3">
               <a:rPr lang="en-GB" sz="1000" dirty="0">
                 <a:solidFill>
                   <a:srgbClr val="9AA3AE"/>
@@ -26497,7 +26497,7 @@
           <a:lstStyle/>
           <a:p>
             <a:pPr algn="ctr"/>
-            <a:fld id="{9739bd2b-8084-4e55-8078-3180baba6750}" type="slidenum">
+            <a:fld id="{150bd551-3f86-4326-a876-cca5727bb985}" type="slidenum">
               <a:rPr lang="en-GB" sz="1200" b="1" dirty="0">
                 <a:solidFill>
                   <a:srgbClr val="FFFFFF"/>
@@ -26964,7 +26964,7 @@
           <a:lstStyle/>
           <a:p>
             <a:pPr algn="l"/>
-            <a:fld id="{d7cd5aed-027e-49c0-9a8a-9607d70ff275}" type="datetime3">
+            <a:fld id="{c8422e84-45f4-4bc5-9f9b-e167ad35b9e8}" type="datetime3">
               <a:rPr lang="en-GB" sz="1000" dirty="0">
                 <a:solidFill>
                   <a:srgbClr val="9AA3AE"/>
@@ -26998,7 +26998,7 @@
           <a:lstStyle/>
           <a:p>
             <a:pPr algn="ctr"/>
-            <a:fld id="{86400a96-0f23-4c67-96f1-052ea3d591d9}" type="slidenum">
+            <a:fld id="{8cb80586-0137-4927-a632-6ada54eb2d4a}" type="slidenum">
               <a:rPr lang="en-GB" sz="1200" b="1" dirty="0">
                 <a:solidFill>
                   <a:srgbClr val="FFFFFF"/>
@@ -27465,7 +27465,7 @@
           <a:lstStyle/>
           <a:p>
             <a:pPr algn="l"/>
-            <a:fld id="{71dc09de-9c00-4119-b05d-64b58418ff07}" type="datetime3">
+            <a:fld id="{609ddffb-0321-437c-9b2d-1ca2b22aeaa7}" type="datetime3">
               <a:rPr lang="en-GB" sz="1000" dirty="0">
                 <a:solidFill>
                   <a:srgbClr val="9AA3AE"/>
@@ -27499,7 +27499,7 @@
           <a:lstStyle/>
           <a:p>
             <a:pPr algn="ctr"/>
-            <a:fld id="{900bef93-1106-4e85-9d71-610a5e86cf73}" type="slidenum">
+            <a:fld id="{cf4a227e-b386-4a99-8039-3bb7f2d10ace}" type="slidenum">
               <a:rPr lang="en-GB" sz="1200" b="1" dirty="0">
                 <a:solidFill>
                   <a:srgbClr val="FFFFFF"/>
@@ -27931,7 +27931,7 @@
           <a:lstStyle/>
           <a:p>
             <a:pPr algn="l"/>
-            <a:fld id="{5592e224-0cbd-4808-b3d2-d79578b5fc48}" type="datetime3">
+            <a:fld id="{49155fb5-d165-4f37-829e-a0f927e94394}" type="datetime3">
               <a:rPr lang="en-GB" sz="1000" dirty="0">
                 <a:solidFill>
                   <a:srgbClr val="9AA3AE"/>
@@ -27965,7 +27965,7 @@
           <a:lstStyle/>
           <a:p>
             <a:pPr algn="ctr"/>
-            <a:fld id="{05db1baf-ddcf-49aa-8373-4e106c833c21}" type="slidenum">
+            <a:fld id="{e5ed4a23-e8a5-40f2-a757-33b73ec40c56}" type="slidenum">
               <a:rPr lang="en-GB" sz="1200" b="1" dirty="0">
                 <a:solidFill>
                   <a:srgbClr val="FFFFFF"/>
@@ -28397,7 +28397,7 @@
           <a:lstStyle/>
           <a:p>
             <a:pPr algn="l"/>
-            <a:fld id="{372d5901-2295-4bca-ade1-32613dde5d04}" type="datetime3">
+            <a:fld id="{7791e3e7-ab70-4a36-b7e9-c69c4bccd0c5}" type="datetime3">
               <a:rPr lang="en-GB" sz="1000" dirty="0">
                 <a:solidFill>
                   <a:srgbClr val="9AA3AE"/>
@@ -28431,7 +28431,7 @@
           <a:lstStyle/>
           <a:p>
             <a:pPr algn="ctr"/>
-            <a:fld id="{b99bc3cc-ee97-481e-914d-57fa2c1f680c}" type="slidenum">
+            <a:fld id="{befccbdc-9446-4c64-ae08-ad4b927ed4ce}" type="slidenum">
               <a:rPr lang="en-GB" sz="1200" b="1" dirty="0">
                 <a:solidFill>
                   <a:srgbClr val="FFFFFF"/>
@@ -28724,7 +28724,7 @@
                 </a:solidFill>
                 <a:latin typeface="Calibri"/>
               </a:rPr>
-              <a:t>Numbered bibliography. Evidence 1–18 use the same numbers as citations [1]–[18]. A DOI is a link to https://doi.org/…. Papers without a Crossref DOI stay numbered and unlinked.</a:t>
+              <a:t>Numbered bibliography. Evidence 1–18 use the same numbers as citations [1]–[18]. Every entry ends with a clickable URL: a Crossref DOI where one exists, otherwise the official proceedings, OpenReview, ACL Anthology, or data.gov.in record.</a:t>
             </a:r>
           </a:p>
         </p:txBody>
@@ -28765,7 +28765,7 @@
                 </a:solidFill>
                 <a:latin typeface="Calibri"/>
               </a:rPr>
-              <a:t>[1] Wang, L., Ma, C., Feng, X., Zhang, Z., Yang, H., Zhang, J., Chen, Z., Tang, J., Chen, X., Lin, Y., Zhao, W. X., Wei, Z., and Wen, J. A survey on large language model based autonomous agents. Frontiers of Computer Science, 18, article 186345 (2024). doi:10.1007/s11704-024-40231-1.</a:t>
+              <a:t>[1] Wang, L., Ma, C., Feng, X., Zhang, Z., Yang, H., Zhang, J., Chen, Z., Tang, J., Chen, X., Lin, Y., Zhao, W. X., Wei, Z., and Wen, J. A survey on large language model based autonomous agents. Frontiers of Computer Science, 18, article 186345 (2024). doi:10.1007/s11704-024-40231-1. https://doi.org/10.1007/s11704-024-40231-1</a:t>
             </a:r>
           </a:p>
           <a:p>
@@ -28783,7 +28783,7 @@
                 </a:solidFill>
                 <a:latin typeface="Calibri"/>
               </a:rPr>
-              <a:t>[2] He, J., Treude, C., and Lo, D. LLM-Based Multi-Agent Systems for Software Engineering: Literature Review, Vision, and the Road Ahead. ACM Transactions on Software Engineering and Methodology, 34(5), May 2025. doi:10.1145/3712003.</a:t>
+              <a:t>[2] He, J., Treude, C., and Lo, D. LLM-Based Multi-Agent Systems for Software Engineering: Literature Review, Vision, and the Road Ahead. ACM Transactions on Software Engineering and Methodology, 34(5), May 2025. doi:10.1145/3712003. https://doi.org/10.1145/3712003</a:t>
             </a:r>
           </a:p>
           <a:p>
@@ -28801,7 +28801,7 @@
                 </a:solidFill>
                 <a:latin typeface="Calibri"/>
               </a:rPr>
-              <a:t>[3] Guo, T., Chen, X., Wang, Y., Chang, R., Pei, S., Chawla, N. V., Wiest, O., and Zhang, X. Large Language Model based Multi-Agents: A Survey of Progress and Challenges. Proceedings of the Thirty-Third International Joint Conference on Artificial Intelligence (IJCAI-24), Survey Track, pages 8048–8057. doi:10.24963/ijcai.2024/890.</a:t>
+              <a:t>[3] Guo, T., Chen, X., Wang, Y., Chang, R., Pei, S., Chawla, N. V., Wiest, O., and Zhang, X. Large Language Model based Multi-Agents: A Survey of Progress and Challenges. Proceedings of the Thirty-Third International Joint Conference on Artificial Intelligence (IJCAI-24), Survey Track, pages 8048–8057. doi:10.24963/ijcai.2024/890. https://doi.org/10.24963/ijcai.2024/890</a:t>
             </a:r>
           </a:p>
           <a:p>
@@ -28819,7 +28819,7 @@
                 </a:solidFill>
                 <a:latin typeface="Calibri"/>
               </a:rPr>
-              <a:t>[4] Chang, E. Y., and Geng, L. SagaLLM: Context Management, Validation, and Transaction Guarantees for Multi-Agent LLM Planning. Proceedings of the VLDB Endowment (PVLDB), 18(12):4874–4886, 2025. doi:10.14778/3750601.3750611.</a:t>
+              <a:t>[4] Chang, E. Y., and Geng, L. SagaLLM: Context Management, Validation, and Transaction Guarantees for Multi-Agent LLM Planning. Proceedings of the VLDB Endowment (PVLDB), 18(12):4874–4886, 2025. doi:10.14778/3750601.3750611. https://doi.org/10.14778/3750601.3750611</a:t>
             </a:r>
           </a:p>
           <a:p>
@@ -28837,7 +28837,7 @@
                 </a:solidFill>
                 <a:latin typeface="Calibri"/>
               </a:rPr>
-              <a:t>[5] Wu, Q., Bansal, G., Zhang, J., Wu, Y., Li, B., Zhu, E., Jiang, L., Zhang, X., Zhang, S., Liu, J., Awadallah, A. H., White, R. W., Burger, D., and Wang, C. AutoGen: Enabling Next-Gen LLM Applications via Multi-Agent Conversations. Proceedings of the First Conference on Language Modeling (COLM 2024).</a:t>
+              <a:t>[5] Wu, Q., Bansal, G., Zhang, J., Wu, Y., Li, B., Zhu, E., Jiang, L., Zhang, X., Zhang, S., Liu, J., Awadallah, A. H., White, R. W., Burger, D., and Wang, C. AutoGen: Enabling Next-Gen LLM Applications via Multi-Agent Conversations. Proceedings of the First Conference on Language Modeling (COLM 2024). https://www.microsoft.com/en-us/research/publication/autogen-enabling-next-gen-llm-applications-via-multi-agent-conversation-framework/</a:t>
             </a:r>
           </a:p>
           <a:p>
@@ -28855,7 +28855,7 @@
                 </a:solidFill>
                 <a:latin typeface="Calibri"/>
               </a:rPr>
-              <a:t>[6] Hong, S., Zhuge, M., Chen, J., Zheng, X., Cheng, Y., Wang, J., Zhang, C., Wang, Z., Yau, S. K. S., Lin, Z., Zhou, L., Ran, C., Xiao, L., Wu, C., and Schmidhuber, J. MetaGPT: Meta Programming for A Multi-Agent Collaborative Framework. Proceedings of the Twelfth International Conference on Learning Representations (ICLR 2024).</a:t>
+              <a:t>[6] Hong, S., Zhuge, M., Chen, J., Zheng, X., Cheng, Y., Wang, J., Zhang, C., Wang, Z., Yau, S. K. S., Lin, Z., Zhou, L., Ran, C., Xiao, L., Wu, C., and Schmidhuber, J. MetaGPT: Meta Programming for A Multi-Agent Collaborative Framework. Proceedings of the Twelfth International Conference on Learning Representations (ICLR 2024). https://proceedings.iclr.cc/paper_files/paper/2024/hash/6507b115562bb0a305f1958ccc87355a-Abstract-Conference.html</a:t>
             </a:r>
           </a:p>
           <a:p>
@@ -28873,7 +28873,7 @@
                 </a:solidFill>
                 <a:latin typeface="Calibri"/>
               </a:rPr>
-              <a:t>[7] Qian, C., Liu, W., Liu, H., Chen, N., Dang, Y., Li, J., Yang, C., Chen, W., Su, Y., Cong, X., Xu, J., Li, D., Liu, Z., and Sun, M. ChatDev: Communicative Agents for Software Development. Proceedings of the 62nd Annual Meeting of the Association for Computational Linguistics (Volume 1: Long Papers), pages 15174–15186. doi:10.18653/v1/2024.acl-long.810.</a:t>
+              <a:t>[7] Qian, C., Liu, W., Liu, H., Chen, N., Dang, Y., Li, J., Yang, C., Chen, W., Su, Y., Cong, X., Xu, J., Li, D., Liu, Z., and Sun, M. ChatDev: Communicative Agents for Software Development. Proceedings of the 62nd Annual Meeting of the Association for Computational Linguistics (Volume 1: Long Papers), pages 15174–15186. doi:10.18653/v1/2024.acl-long.810. https://doi.org/10.18653/v1/2024.acl-long.810</a:t>
             </a:r>
           </a:p>
           <a:p>
@@ -28891,7 +28891,7 @@
                 </a:solidFill>
                 <a:latin typeface="Calibri"/>
               </a:rPr>
-              <a:t>[8] Li, G., Hammoud, H. A. A. K., Itani, H., Khizbullin, D., and Ghanem, B. CAMEL: Communicative Agents for “Mind” Exploration of Large Language Model Society. Advances in Neural Information Processing Systems 36 (NeurIPS 2023).</a:t>
+              <a:t>[8] Li, G., Hammoud, H. A. A. K., Itani, H., Khizbullin, D., and Ghanem, B. CAMEL: Communicative Agents for “Mind” Exploration of Large Language Model Society. Advances in Neural Information Processing Systems 36 (NeurIPS 2023). https://proceedings.neurips.cc/paper_files/paper/2023/hash/a3621ee907def47c1b952ade25c67698-Abstract-Conference.html</a:t>
             </a:r>
           </a:p>
         </p:txBody>
@@ -28952,7 +28952,7 @@
           <a:lstStyle/>
           <a:p>
             <a:pPr algn="l"/>
-            <a:fld id="{9b413a79-2a85-47b7-85a4-1e5e0787af6d}" type="datetime3">
+            <a:fld id="{35511a80-aafd-48ba-9727-2ae9eae3d4c3}" type="datetime3">
               <a:rPr lang="en-GB" sz="1000" dirty="0">
                 <a:solidFill>
                   <a:srgbClr val="9AA3AE"/>
@@ -28986,7 +28986,7 @@
           <a:lstStyle/>
           <a:p>
             <a:pPr algn="ctr"/>
-            <a:fld id="{7270f86b-1c08-4d4d-bc67-e6d47def8ca1}" type="slidenum">
+            <a:fld id="{5516c673-7c95-4ec0-b5d6-c452d93009ca}" type="slidenum">
               <a:rPr lang="en-GB" sz="1200" b="1" dirty="0">
                 <a:solidFill>
                   <a:srgbClr val="FFFFFF"/>
@@ -29279,7 +29279,7 @@
                 </a:solidFill>
                 <a:latin typeface="Calibri"/>
               </a:rPr>
-              <a:t>Continuation. Citations [9]–[16]. Click a DOI to open the publisher record.</a:t>
+              <a:t>Continuation. Citations [9]–[16]. Click the URL to open the publisher or portal record.</a:t>
             </a:r>
           </a:p>
         </p:txBody>
@@ -29320,7 +29320,7 @@
                 </a:solidFill>
                 <a:latin typeface="Calibri"/>
               </a:rPr>
-              <a:t>[9] Qin, Y., Liang, S., Ye, Y., Zhu, K., Yan, L., Lu, Y., Lin, Y., Cong, X., Tang, X., Qian, B., Zhao, S., Hong, L., Tian, R., Xie, R., Zhou, J., Gerstein, M., Li, D., Liu, Z., and Sun, M. ToolLLM: Facilitating Large Language Models to Master 16000+ Real-world APIs. Proceedings of the Twelfth International Conference on Learning Representations (ICLR 2024).</a:t>
+              <a:t>[9] Qin, Y., Liang, S., Ye, Y., Zhu, K., Yan, L., Lu, Y., Lin, Y., Cong, X., Tang, X., Qian, B., Zhao, S., Hong, L., Tian, R., Xie, R., Zhou, J., Gerstein, M., Li, D., Liu, Z., and Sun, M. ToolLLM: Facilitating Large Language Models to Master 16000+ Real-world APIs. Proceedings of the Twelfth International Conference on Learning Representations (ICLR 2024). https://proceedings.iclr.cc/paper_files/paper/2024/hash/28e50ee5b72e90b50e7196fde8ea260e-Abstract-Conference.html</a:t>
             </a:r>
           </a:p>
           <a:p>
@@ -29338,7 +29338,7 @@
                 </a:solidFill>
                 <a:latin typeface="Calibri"/>
               </a:rPr>
-              <a:t>[10] Zheng, Y., Li, P., Liu, W., Liu, Y., Luan, J., and Wang, B. ToolRerank: Adaptive and Hierarchy-Aware Reranking for Tool Retrieval. Proceedings of the 2024 Joint International Conference on Computational Linguistics, Language Resources and Evaluation (LREC-COLING 2024), pages 16263–16273. ACL Anthology 2024.lrec-main.1413.</a:t>
+              <a:t>[10] Zheng, Y., Li, P., Liu, W., Liu, Y., Luan, J., and Wang, B. ToolRerank: Adaptive and Hierarchy-Aware Reranking for Tool Retrieval. Proceedings of the 2024 Joint International Conference on Computational Linguistics, Language Resources and Evaluation (LREC-COLING 2024), pages 16263–16273. ACL Anthology 2024.lrec-main.1413. https://aclanthology.org/2024.lrec-main.1413/</a:t>
             </a:r>
           </a:p>
           <a:p>
@@ -29356,7 +29356,7 @@
                 </a:solidFill>
                 <a:latin typeface="Calibri"/>
               </a:rPr>
-              <a:t>[11] Ong, I., Almahairi, A., Wu, V., Chiang, W.-L., Wu, T., Gonzalez, J. E., Kadous, M. W., and Stoica, I. RouteLLM: Learning to Route LLMs from Preference Data. Proceedings of the Thirteenth International Conference on Learning Representations (ICLR 2025).</a:t>
+              <a:t>[11] Ong, I., Almahairi, A., Wu, V., Chiang, W.-L., Wu, T., Gonzalez, J. E., Kadous, M. W., and Stoica, I. RouteLLM: Learning to Route LLMs from Preference Data. Proceedings of the Thirteenth International Conference on Learning Representations (ICLR 2025). https://proceedings.iclr.cc/paper_files/paper/2025/hash/5503a7c69d48a2f86fc00b3dc09de686-Abstract-Conference.html</a:t>
             </a:r>
           </a:p>
           <a:p>
@@ -29374,7 +29374,7 @@
                 </a:solidFill>
                 <a:latin typeface="Calibri"/>
               </a:rPr>
-              <a:t>[12] Yue, Y., Zhang, G., Liu, B., Wan, G., Wang, K., Cheng, D., and Qi, Y. MasRouter: Learning to Route LLMs for Multi-Agent Systems. Proceedings of the 63rd Annual Meeting of the Association for Computational Linguistics (Volume 1: Long Papers), pages 15549–15572. doi:10.18653/v1/2025.acl-long.757.</a:t>
+              <a:t>[12] Yue, Y., Zhang, G., Liu, B., Wan, G., Wang, K., Cheng, D., and Qi, Y. MasRouter: Learning to Route LLMs for Multi-Agent Systems. Proceedings of the 63rd Annual Meeting of the Association for Computational Linguistics (Volume 1: Long Papers), pages 15549–15572. doi:10.18653/v1/2025.acl-long.757. https://doi.org/10.18653/v1/2025.acl-long.757</a:t>
             </a:r>
           </a:p>
           <a:p>
@@ -29392,7 +29392,7 @@
                 </a:solidFill>
                 <a:latin typeface="Calibri"/>
               </a:rPr>
-              <a:t>[13] Panda, P., Magazine, R., Devaguptapu, C., Takemori, S., and Sharma, V. Adaptive LLM Routing under Budget Constraints. Findings of the Association for Computational Linguistics: EMNLP 2025, pages 23934–23949. doi:10.18653/v1/2025.findings-emnlp.1301. Method name: PILOT (Preference-prior Informed LinUCB).</a:t>
+              <a:t>[13] Panda, P., Magazine, R., Devaguptapu, C., Takemori, S., and Sharma, V. Adaptive LLM Routing under Budget Constraints. Findings of the Association for Computational Linguistics: EMNLP 2025, pages 23934–23949. doi:10.18653/v1/2025.findings-emnlp.1301. Method name: PILOT (Preference-prior Informed LinUCB). https://doi.org/10.18653/v1/2025.findings-emnlp.1301</a:t>
             </a:r>
           </a:p>
           <a:p>
@@ -29410,7 +29410,7 @@
                 </a:solidFill>
                 <a:latin typeface="Calibri"/>
               </a:rPr>
-              <a:t>[14] Jiang, H., Wu, Q., Lin, C.-Y., Yang, Y., and Qiu, L. LLMLingua: Compressing Prompts for Accelerated Inference of Large Language Models. Proceedings of the 2023 Conference on Empirical Methods in Natural Language Processing, pages 13358–13376. doi:10.18653/v1/2023.emnlp-main.825.</a:t>
+              <a:t>[14] Jiang, H., Wu, Q., Lin, C.-Y., Yang, Y., and Qiu, L. LLMLingua: Compressing Prompts for Accelerated Inference of Large Language Models. Proceedings of the 2023 Conference on Empirical Methods in Natural Language Processing, pages 13358–13376. doi:10.18653/v1/2023.emnlp-main.825. https://doi.org/10.18653/v1/2023.emnlp-main.825</a:t>
             </a:r>
           </a:p>
           <a:p>
@@ -29428,7 +29428,7 @@
                 </a:solidFill>
                 <a:latin typeface="Calibri"/>
               </a:rPr>
-              <a:t>[15] Park, J. S., O’Brien, J. C., Cai, C. J., Morris, M. R., Liang, P., and Bernstein, M. S. Generative Agents: Interactive Simulacra of Human Behavior. Proceedings of the 36th Annual ACM Symposium on User Interface Software and Technology (UIST 2023), Best Paper. doi:10.1145/3586183.3606763.</a:t>
+              <a:t>[15] Park, J. S., O’Brien, J. C., Cai, C. J., Morris, M. R., Liang, P., and Bernstein, M. S. Generative Agents: Interactive Simulacra of Human Behavior. Proceedings of the 36th Annual ACM Symposium on User Interface Software and Technology (UIST 2023), Best Paper. doi:10.1145/3586183.3606763. https://doi.org/10.1145/3586183.3606763</a:t>
             </a:r>
           </a:p>
           <a:p>
@@ -29446,7 +29446,7 @@
                 </a:solidFill>
                 <a:latin typeface="Calibri"/>
               </a:rPr>
-              <a:t>[16] Tero, A., Takagi, S., Saigusa, T., Ito, K., Bebber, D. P., Fricker, M. D., Yumiki, K., Kobayashi, R., and Nakagaki, T. Rules for Biologically Inspired Adaptive Network Design. Science 327(5964):439–442. doi:10.1126/science.1177894.</a:t>
+              <a:t>[16] Tero, A., Takagi, S., Saigusa, T., Ito, K., Bebber, D. P., Fricker, M. D., Yumiki, K., Kobayashi, R., and Nakagaki, T. Rules for Biologically Inspired Adaptive Network Design. Science 327(5964):439–442. doi:10.1126/science.1177894. https://doi.org/10.1126/science.1177894</a:t>
             </a:r>
           </a:p>
         </p:txBody>
@@ -29472,7 +29472,7 @@
           <a:lstStyle/>
           <a:p>
             <a:pPr algn="l"/>
-            <a:fld id="{abddabb5-5ce3-4739-8483-ab7aa8478cfc}" type="datetime3">
+            <a:fld id="{4157f35e-ef82-4382-8ff3-b86ac73fa399}" type="datetime3">
               <a:rPr lang="en-GB" sz="1000" dirty="0">
                 <a:solidFill>
                   <a:srgbClr val="9AA3AE"/>
@@ -29506,7 +29506,7 @@
           <a:lstStyle/>
           <a:p>
             <a:pPr algn="ctr"/>
-            <a:fld id="{0012a6c7-475a-4374-9193-5c92fd15ba7d}" type="slidenum">
+            <a:fld id="{f4f104b0-9923-4032-9ffb-adc18d5dfadd}" type="slidenum">
               <a:rPr lang="en-GB" sz="1200" b="1" dirty="0">
                 <a:solidFill>
                   <a:srgbClr val="FFFFFF"/>
@@ -29799,7 +29799,7 @@
                 </a:solidFill>
                 <a:latin typeface="Calibri"/>
               </a:rPr>
-              <a:t>Continuation. Citations [17]–[24]. Click a DOI to open the publisher record.</a:t>
+              <a:t>Continuation. Citations [17]–[24]. Click the URL to open the publisher or portal record.</a:t>
             </a:r>
           </a:p>
         </p:txBody>
@@ -29840,7 +29840,7 @@
                 </a:solidFill>
                 <a:latin typeface="Calibri"/>
               </a:rPr>
-              <a:t>[17] Guo, H., Woodruff, A., and Yadav, A. Improving Lives of Indebted Farmers Using Deep Learning: Predicting Agricultural Produce Prices Using Convolutional Neural Networks (PECAD). Proceedings of the AAAI Conference on Artificial Intelligence, 34(08):13294–13299. doi:10.1609/aaai.v34i08.7039.</a:t>
+              <a:t>[17] Guo, H., Woodruff, A., and Yadav, A. Improving Lives of Indebted Farmers Using Deep Learning: Predicting Agricultural Produce Prices Using Convolutional Neural Networks (PECAD). Proceedings of the AAAI Conference on Artificial Intelligence, 34(08):13294–13299. doi:10.1609/aaai.v34i08.7039. https://doi.org/10.1609/aaai.v34i08.7039</a:t>
             </a:r>
           </a:p>
           <a:p>
@@ -29858,7 +29858,7 @@
                 </a:solidFill>
                 <a:latin typeface="Calibri"/>
               </a:rPr>
-              <a:t>[18] Yao, S., Zhao, J., Yu, D., Du, N., Shafran, I., Narasimhan, K., and Cao, Y. ReAct: Synergizing Reasoning and Acting in Language Models. Proceedings of the Eleventh International Conference on Learning Representations (ICLR 2023).</a:t>
+              <a:t>[18] Yao, S., Zhao, J., Yu, D., Du, N., Shafran, I., Narasimhan, K., and Cao, Y. ReAct: Synergizing Reasoning and Acting in Language Models. Proceedings of the Eleventh International Conference on Learning Representations (ICLR 2023). https://openreview.net/forum?id=WE_vluYUL-X</a:t>
             </a:r>
           </a:p>
           <a:p>
@@ -29876,7 +29876,7 @@
                 </a:solidFill>
                 <a:latin typeface="Calibri"/>
               </a:rPr>
-              <a:t>[19] Wei, J., Wang, X., Schuurmans, D., Bosma, M., Ichter, B., Xia, F., Chi, E., Le, Q., and Zhou, D. Chain-of-Thought Prompting Elicits Reasoning in Large Language Models. Advances in Neural Information Processing Systems 35 (NeurIPS 2022).</a:t>
+              <a:t>[19] Wei, J., Wang, X., Schuurmans, D., Bosma, M., Ichter, B., Xia, F., Chi, E., Le, Q., and Zhou, D. Chain-of-Thought Prompting Elicits Reasoning in Large Language Models. Advances in Neural Information Processing Systems 35 (NeurIPS 2022). https://proceedings.neurips.cc/paper/2022/hash/9d5609613524ecf4f15af0f7b31abca4-Abstract-Conference.html</a:t>
             </a:r>
           </a:p>
           <a:p>
@@ -29894,7 +29894,7 @@
                 </a:solidFill>
                 <a:latin typeface="Calibri"/>
               </a:rPr>
-              <a:t>[20] Yao, S., Yu, D., Zhao, J., Shafran, I., Griffiths, T. L., Cao, Y., and Narasimhan, K. Tree of Thoughts: Deliberate Problem Solving with Large Language Models. Advances in Neural Information Processing Systems 36 (NeurIPS 2023).</a:t>
+              <a:t>[20] Yao, S., Yu, D., Zhao, J., Shafran, I., Griffiths, T. L., Cao, Y., and Narasimhan, K. Tree of Thoughts: Deliberate Problem Solving with Large Language Models. Advances in Neural Information Processing Systems 36 (NeurIPS 2023). https://proceedings.neurips.cc/paper_files/paper/2023/hash/271db9922b8d1f4dd7aaef84ed5ac703-Abstract-Conference.html</a:t>
             </a:r>
           </a:p>
           <a:p>
@@ -29912,7 +29912,7 @@
                 </a:solidFill>
                 <a:latin typeface="Calibri"/>
               </a:rPr>
-              <a:t>[21] Shinn, N., Cassano, F., Gopinath, A., Narasimhan, K., and Yao, S. Reflexion: Language Agents with Verbal Reinforcement Learning. Advances in Neural Information Processing Systems 36 (NeurIPS 2023).</a:t>
+              <a:t>[21] Shinn, N., Cassano, F., Gopinath, A., Narasimhan, K., and Yao, S. Reflexion: Language Agents with Verbal Reinforcement Learning. Advances in Neural Information Processing Systems 36 (NeurIPS 2023). https://proceedings.neurips.cc/paper_files/paper/2023/hash/1b44b878bb782e6954cd888628510e90-Abstract-Conference.html</a:t>
             </a:r>
           </a:p>
           <a:p>
@@ -29930,7 +29930,7 @@
                 </a:solidFill>
                 <a:latin typeface="Calibri"/>
               </a:rPr>
-              <a:t>[22] Shen, Y., Song, K., Tan, X., Li, D., Lu, W., and Zhuang, Y. HuggingGPT: Solving AI Tasks with ChatGPT and its Friends in Hugging Face. Advances in Neural Information Processing Systems 36 (NeurIPS 2023).</a:t>
+              <a:t>[22] Shen, Y., Song, K., Tan, X., Li, D., Lu, W., and Zhuang, Y. HuggingGPT: Solving AI Tasks with ChatGPT and its Friends in Hugging Face. Advances in Neural Information Processing Systems 36 (NeurIPS 2023). https://proceedings.neurips.cc/paper_files/paper/2023/hash/77c33e6a367922d003ff102ffb92b658-Abstract-Conference.html</a:t>
             </a:r>
           </a:p>
           <a:p>
@@ -29948,7 +29948,7 @@
                 </a:solidFill>
                 <a:latin typeface="Calibri"/>
               </a:rPr>
-              <a:t>[23] Schick, T., Dwivedi-Yu, J., Dessì, R., Raileanu, R., Lomeli, M., Hambro, E., Zettlemoyer, L., Cancedda, N., and Scialom, T. Toolformer: Language Models Can Teach Themselves to Use Tools. Advances in Neural Information Processing Systems 36 (NeurIPS 2023).</a:t>
+              <a:t>[23] Schick, T., Dwivedi-Yu, J., Dessì, R., Raileanu, R., Lomeli, M., Hambro, E., Zettlemoyer, L., Cancedda, N., and Scialom, T. Toolformer: Language Models Can Teach Themselves to Use Tools. Advances in Neural Information Processing Systems 36 (NeurIPS 2023). https://proceedings.neurips.cc/paper_files/paper/2023/hash/d842425e4bf79ba039352da0f658a906-Abstract-Conference.html</a:t>
             </a:r>
           </a:p>
           <a:p>
@@ -29966,7 +29966,7 @@
                 </a:solidFill>
                 <a:latin typeface="Calibri"/>
               </a:rPr>
-              <a:t>[24] Government of India Open Government Data Platform India. data.gov.in; AGMARKNET resource 9ef84268-d588-465a-a308-a864a43d0070; Directorate of Economics and Statistics crop production; IMD rainfall series; Government Open Data License — India (GODL-India). Live execution corpus, not a journal article.</a:t>
+              <a:t>[24] Government of India Open Government Data Platform India. data.gov.in; AGMARKNET resource 9ef84268-d588-465a-a308-a864a43d0070; Directorate of Economics and Statistics crop production; IMD rainfall series; Government Open Data License — India (GODL-India). https://data.gov.in/ Live execution corpus, not a journal article.</a:t>
             </a:r>
           </a:p>
         </p:txBody>
@@ -29992,7 +29992,7 @@
           <a:lstStyle/>
           <a:p>
             <a:pPr algn="l"/>
-            <a:fld id="{9457d634-7bd3-4fd1-a6ec-664f277c13cc}" type="datetime3">
+            <a:fld id="{a9172a06-edc5-4e1a-8f75-d2702b5ef19a}" type="datetime3">
               <a:rPr lang="en-GB" sz="1000" dirty="0">
                 <a:solidFill>
                   <a:srgbClr val="9AA3AE"/>
@@ -30026,7 +30026,7 @@
           <a:lstStyle/>
           <a:p>
             <a:pPr algn="ctr"/>
-            <a:fld id="{2d489fd4-c02a-48dd-a675-ca253cbfc81b}" type="slidenum">
+            <a:fld id="{799b28a3-0c62-4aa0-8336-affe6d7020fc}" type="slidenum">
               <a:rPr lang="en-GB" sz="1200" b="1" dirty="0">
                 <a:solidFill>
                   <a:srgbClr val="FFFFFF"/>
@@ -30476,7 +30476,7 @@
           <a:lstStyle/>
           <a:p>
             <a:pPr algn="l"/>
-            <a:fld id="{864c5944-a5c2-41fd-9f33-23d6f093e7e0}" type="datetime3">
+            <a:fld id="{043d4b92-9ef7-41fe-9119-011385f95b2d}" type="datetime3">
               <a:rPr lang="en-GB" sz="1000" dirty="0">
                 <a:solidFill>
                   <a:srgbClr val="9AA3AE"/>
@@ -30510,7 +30510,7 @@
           <a:lstStyle/>
           <a:p>
             <a:pPr algn="ctr"/>
-            <a:fld id="{3db4d9ae-f9fd-4599-92ff-4ef579b73fe0}" type="slidenum">
+            <a:fld id="{caf49f3a-3986-4777-8225-305b4e04c92a}" type="slidenum">
               <a:rPr lang="en-GB" sz="1200" b="1" dirty="0">
                 <a:solidFill>
                   <a:srgbClr val="FFFFFF"/>
@@ -30977,7 +30977,7 @@
           <a:lstStyle/>
           <a:p>
             <a:pPr algn="l"/>
-            <a:fld id="{0278330f-ab27-41a4-9150-024c821febc5}" type="datetime3">
+            <a:fld id="{7f66cc9d-abed-4c90-93a0-102a2b4f4119}" type="datetime3">
               <a:rPr lang="en-GB" sz="1000" dirty="0">
                 <a:solidFill>
                   <a:srgbClr val="9AA3AE"/>
@@ -31011,7 +31011,7 @@
           <a:lstStyle/>
           <a:p>
             <a:pPr algn="ctr"/>
-            <a:fld id="{baca6da4-8281-4431-a397-72420e0d3cf8}" type="slidenum">
+            <a:fld id="{0b0e8942-4d25-4f36-97c1-c5461934c90f}" type="slidenum">
               <a:rPr lang="en-GB" sz="1200" b="1" dirty="0">
                 <a:solidFill>
                   <a:srgbClr val="FFFFFF"/>
@@ -31304,7 +31304,7 @@
                 </a:solidFill>
                 <a:latin typeface="Calibri"/>
               </a:rPr>
-              <a:t>FET template. Each paper is Evidence n and citation [n]. Fields: Author(s), Year, Title, Publication, DOI (linked at https://doi.org/…), Objective, Methodology, Findings, Limitations, To solve the research gap.</a:t>
+              <a:t>FET template. Each paper is Evidence n and citation [n]. Fields: Author(s), Year, Title, Publication, DOI or URL (publisher / proceedings / data.gov.in), Objective, Methodology, Findings, Limitations, To solve the research gap.</a:t>
             </a:r>
           </a:p>
         </p:txBody>
@@ -31938,7 +31938,7 @@
           <a:lstStyle/>
           <a:p>
             <a:pPr algn="l"/>
-            <a:fld id="{b554e629-8511-45ff-aea0-64e53412a523}" type="datetime3">
+            <a:fld id="{081b1333-0f02-40e3-9c4e-76d2ff6a1685}" type="datetime3">
               <a:rPr lang="en-GB" sz="1000" dirty="0">
                 <a:solidFill>
                   <a:srgbClr val="9AA3AE"/>
@@ -31972,7 +31972,7 @@
           <a:lstStyle/>
           <a:p>
             <a:pPr algn="ctr"/>
-            <a:fld id="{9c5a3f78-cb95-459f-9713-37d0fa256a89}" type="slidenum">
+            <a:fld id="{f97da85d-1218-4992-a33a-f2eca0ecfb9e}" type="slidenum">
               <a:rPr lang="en-GB" sz="1200" b="1" dirty="0">
                 <a:solidFill>
                   <a:srgbClr val="FFFFFF"/>
@@ -32899,7 +32899,7 @@
           <a:lstStyle/>
           <a:p>
             <a:pPr algn="l"/>
-            <a:fld id="{cb87eb55-61c4-4790-afba-be5251c9fa23}" type="datetime3">
+            <a:fld id="{c46a87e9-0283-4d71-b5fa-803c9c60c7b5}" type="datetime3">
               <a:rPr lang="en-GB" sz="1000" dirty="0">
                 <a:solidFill>
                   <a:srgbClr val="9AA3AE"/>
@@ -32933,7 +32933,7 @@
           <a:lstStyle/>
           <a:p>
             <a:pPr algn="ctr"/>
-            <a:fld id="{7291de2e-0fc0-4cdb-9f29-52150cc16ff1}" type="slidenum">
+            <a:fld id="{64977f8a-8fb8-4700-8459-e18e209032e3}" type="slidenum">
               <a:rPr lang="en-GB" sz="1200" b="1" dirty="0">
                 <a:solidFill>
                   <a:srgbClr val="FFFFFF"/>
@@ -33860,7 +33860,7 @@
           <a:lstStyle/>
           <a:p>
             <a:pPr algn="l"/>
-            <a:fld id="{324b3a64-7e38-4bd4-961a-fb05b16b0ba3}" type="datetime3">
+            <a:fld id="{bb96f0cc-ad73-4b09-b36e-ed8412adbd2c}" type="datetime3">
               <a:rPr lang="en-GB" sz="1000" dirty="0">
                 <a:solidFill>
                   <a:srgbClr val="9AA3AE"/>
@@ -33894,7 +33894,7 @@
           <a:lstStyle/>
           <a:p>
             <a:pPr algn="ctr"/>
-            <a:fld id="{03624ba8-4215-4f5c-a50e-9a5454bb7129}" type="slidenum">
+            <a:fld id="{2b2c7de8-d727-46a2-b09f-4f68c2d448ee}" type="slidenum">
               <a:rPr lang="en-GB" sz="1200" b="1" dirty="0">
                 <a:solidFill>
                   <a:srgbClr val="FFFFFF"/>
@@ -34821,7 +34821,7 @@
           <a:lstStyle/>
           <a:p>
             <a:pPr algn="l"/>
-            <a:fld id="{b8d9af0e-6795-4d62-a15d-04cbfcf47c43}" type="datetime3">
+            <a:fld id="{74a1b98a-a8a8-4ee0-8ba5-28430b55f2b8}" type="datetime3">
               <a:rPr lang="en-GB" sz="1000" dirty="0">
                 <a:solidFill>
                   <a:srgbClr val="9AA3AE"/>
@@ -34855,7 +34855,7 @@
           <a:lstStyle/>
           <a:p>
             <a:pPr algn="ctr"/>
-            <a:fld id="{766d859c-fb2c-4347-8b19-cd3f26a2893d}" type="slidenum">
+            <a:fld id="{f8db61ad-48b4-4e55-983e-21f0b2194249}" type="slidenum">
               <a:rPr lang="en-GB" sz="1200" b="1" dirty="0">
                 <a:solidFill>
                   <a:srgbClr val="FFFFFF"/>
